--- a/mon/ngu_van/slide/lop10/Slide_NGUVAN10_Bai2_VeDepCuaThoCa_T12-22.pptx
+++ b/mon/ngu_van/slide/lop10/Slide_NGUVAN10_Bai2_VeDepCuaThoCa_T12-22.pptx
@@ -48,6 +48,11 @@
     <p:sldId id="296" r:id="rId48"/>
     <p:sldId id="297" r:id="rId49"/>
     <p:sldId id="298" r:id="rId50"/>
+    <p:sldId id="299" r:id="rId51"/>
+    <p:sldId id="300" r:id="rId52"/>
+    <p:sldId id="301" r:id="rId53"/>
+    <p:sldId id="302" r:id="rId54"/>
+    <p:sldId id="303" r:id="rId55"/>
   </p:sldIdLst>
   <p:sldSz cx="12191695" cy="6858000" type="screen4x3"/>
   <p:notesSz cx="6858000" cy="9144000"/>
@@ -614,7 +619,7 @@
           <a:lstStyle/>
           <a:p>
             <a:r>
-              <a:t>Slide ĐỀ BÀI – cho HS suy nghĩ, thảo luận (không chiếu lời giải). </a:t>
+              <a:t>Câu hỏi Trước khi đọc SGK tr.47.</a:t>
             </a:r>
           </a:p>
         </p:txBody>
@@ -684,7 +689,7 @@
           <a:lstStyle/>
           <a:p>
             <a:r>
-              <a:t>Slide LỜI GIẢI – GV chốt sau khi HS trình bày. </a:t>
+              <a:t>Bấm vào đường link hoặc quét mã QR để mở video (cần Internet). </a:t>
             </a:r>
           </a:p>
         </p:txBody>
@@ -1174,7 +1179,7 @@
           <a:lstStyle/>
           <a:p>
             <a:r>
-              <a:t>Câu hỏi Trước khi đọc SGK tr.50.</a:t>
+              <a:t>Slide ĐỀ BÀI – cho HS suy nghĩ, thảo luận (không chiếu lời giải). </a:t>
             </a:r>
           </a:p>
         </p:txBody>
@@ -1244,7 +1249,7 @@
           <a:lstStyle/>
           <a:p>
             <a:r>
-              <a:t>Slide ĐỀ BÀI – cho HS suy nghĩ, thảo luận (không chiếu lời giải). </a:t>
+              <a:t>Slide LỜI GIẢI – GV chốt sau khi HS trình bày. </a:t>
             </a:r>
           </a:p>
         </p:txBody>
@@ -1384,7 +1389,7 @@
           <a:lstStyle/>
           <a:p>
             <a:r>
-              <a:t>Slide LỜI GIẢI – GV chốt sau khi HS trình bày. </a:t>
+              <a:t>Câu hỏi Trước khi đọc SGK tr.50.</a:t>
             </a:r>
           </a:p>
         </p:txBody>
@@ -1454,7 +1459,7 @@
           <a:lstStyle/>
           <a:p>
             <a:r>
-              <a:t>Slide ĐỀ BÀI – cho HS suy nghĩ, thảo luận (không chiếu lời giải). </a:t>
+              <a:t>Bấm vào đường link hoặc quét mã QR để mở video (cần Internet). </a:t>
             </a:r>
           </a:p>
         </p:txBody>
@@ -1524,7 +1529,7 @@
           <a:lstStyle/>
           <a:p>
             <a:r>
-              <a:t>Slide LỜI GIẢI – GV chốt sau khi HS trình bày. </a:t>
+              <a:t>Slide ĐỀ BÀI – cho HS suy nghĩ, thảo luận (không chiếu lời giải). </a:t>
             </a:r>
           </a:p>
         </p:txBody>
@@ -1594,7 +1599,7 @@
           <a:lstStyle/>
           <a:p>
             <a:r>
-              <a:t>Slide ĐỀ BÀI – cho HS suy nghĩ, thảo luận (không chiếu lời giải). </a:t>
+              <a:t>Slide LỜI GIẢI – GV chốt sau khi HS trình bày. </a:t>
             </a:r>
           </a:p>
         </p:txBody>
@@ -1664,7 +1669,7 @@
           <a:lstStyle/>
           <a:p>
             <a:r>
-              <a:t>Slide LỜI GIẢI – GV chốt sau khi HS trình bày. </a:t>
+              <a:t>Slide ĐỀ BÀI – cho HS suy nghĩ, thảo luận (không chiếu lời giải). </a:t>
             </a:r>
           </a:p>
         </p:txBody>
@@ -1734,7 +1739,7 @@
           <a:lstStyle/>
           <a:p>
             <a:r>
-              <a:t>Slide ĐỀ BÀI – cho HS suy nghĩ, thảo luận (không chiếu lời giải). </a:t>
+              <a:t>Slide LỜI GIẢI – GV chốt sau khi HS trình bày. </a:t>
             </a:r>
           </a:p>
         </p:txBody>
@@ -1804,7 +1809,7 @@
           <a:lstStyle/>
           <a:p>
             <a:r>
-              <a:t>Slide LỜI GIẢI – GV chốt sau khi HS trình bày. </a:t>
+              <a:t>Bấm vào đường link hoặc quét mã QR để mở video (cần Internet). </a:t>
             </a:r>
           </a:p>
         </p:txBody>
@@ -2014,7 +2019,7 @@
           <a:lstStyle/>
           <a:p>
             <a:r>
-              <a:t>Slide ĐỀ BÀI – cho HS suy nghĩ, thảo luận (không chiếu lời giải). </a:t>
+              <a:t>Bấm vào đường link hoặc quét mã QR để mở video (cần Internet). </a:t>
             </a:r>
           </a:p>
         </p:txBody>
@@ -2084,7 +2089,7 @@
           <a:lstStyle/>
           <a:p>
             <a:r>
-              <a:t>Slide ĐỀ BÀI – cho HS suy nghĩ, thảo luận (không chiếu lời giải). </a:t>
+              <a:t>Bấm vào đường link hoặc quét mã QR để mở video (cần Internet). </a:t>
             </a:r>
           </a:p>
         </p:txBody>
@@ -2154,7 +2159,7 @@
           <a:lstStyle/>
           <a:p>
             <a:r>
-              <a:t>Slide LỜI GIẢI – GV chốt sau khi HS trình bày. </a:t>
+              <a:t>Slide ĐỀ BÀI – cho HS suy nghĩ, thảo luận (không chiếu lời giải). </a:t>
             </a:r>
           </a:p>
         </p:txBody>
@@ -2224,7 +2229,7 @@
           <a:lstStyle/>
           <a:p>
             <a:r>
-              <a:t>Slide ĐỀ BÀI – cho HS suy nghĩ, thảo luận (không chiếu lời giải). </a:t>
+              <a:t>Slide LỜI GIẢI – GV chốt sau khi HS trình bày. </a:t>
             </a:r>
           </a:p>
         </p:txBody>
@@ -2294,6 +2299,356 @@
           <a:lstStyle/>
           <a:p>
             <a:r>
+              <a:t>Slide ĐỀ BÀI – cho HS suy nghĩ, thảo luận (không chiếu lời giải). </a:t>
+            </a:r>
+          </a:p>
+        </p:txBody>
+      </p:sp>
+      <p:sp>
+        <p:nvSpPr>
+          <p:cNvPr id="4" name="Slide Number Placeholder 3"/>
+          <p:cNvSpPr>
+            <a:spLocks noGrp="1"/>
+          </p:cNvSpPr>
+          <p:nvPr>
+            <p:ph type="sldNum" idx="5" sz="quarter"/>
+          </p:nvPr>
+        </p:nvSpPr>
+        <p:spPr/>
+      </p:sp>
+    </p:spTree>
+  </p:cSld>
+  <p:clrMapOvr>
+    <a:masterClrMapping/>
+  </p:clrMapOvr>
+</p:notes>
+</file>
+
+<file path=ppt/notesSlides/notesSlide33.xml><?xml version="1.0" encoding="utf-8"?>
+<p:notes xmlns:a="http://schemas.openxmlformats.org/drawingml/2006/main" xmlns:p="http://schemas.openxmlformats.org/presentationml/2006/main" xmlns:r="http://schemas.openxmlformats.org/officeDocument/2006/relationships">
+  <p:cSld>
+    <p:spTree>
+      <p:nvGrpSpPr>
+        <p:cNvPr id="1" name=""/>
+        <p:cNvGrpSpPr/>
+        <p:nvPr/>
+      </p:nvGrpSpPr>
+      <p:grpSpPr>
+        <a:xfrm>
+          <a:off x="0" y="0"/>
+          <a:ext cx="0" cy="0"/>
+          <a:chOff x="0" y="0"/>
+          <a:chExt cx="0" cy="0"/>
+        </a:xfrm>
+      </p:grpSpPr>
+      <p:sp>
+        <p:nvSpPr>
+          <p:cNvPr id="2" name="Slide Image Placeholder 1"/>
+          <p:cNvSpPr>
+            <a:spLocks noGrp="1"/>
+          </p:cNvSpPr>
+          <p:nvPr>
+            <p:ph type="sldImg" idx="2"/>
+          </p:nvPr>
+        </p:nvSpPr>
+        <p:spPr/>
+      </p:sp>
+      <p:sp>
+        <p:nvSpPr>
+          <p:cNvPr id="3" name="Notes Placeholder 2"/>
+          <p:cNvSpPr>
+            <a:spLocks noGrp="1"/>
+          </p:cNvSpPr>
+          <p:nvPr>
+            <p:ph type="body" idx="3" sz="quarter"/>
+          </p:nvPr>
+        </p:nvSpPr>
+        <p:spPr/>
+        <p:txBody>
+          <a:bodyPr/>
+          <a:lstStyle/>
+          <a:p>
+            <a:r>
+              <a:t>Slide LỜI GIẢI – GV chốt sau khi HS trình bày. </a:t>
+            </a:r>
+          </a:p>
+        </p:txBody>
+      </p:sp>
+      <p:sp>
+        <p:nvSpPr>
+          <p:cNvPr id="4" name="Slide Number Placeholder 3"/>
+          <p:cNvSpPr>
+            <a:spLocks noGrp="1"/>
+          </p:cNvSpPr>
+          <p:nvPr>
+            <p:ph type="sldNum" idx="5" sz="quarter"/>
+          </p:nvPr>
+        </p:nvSpPr>
+        <p:spPr/>
+      </p:sp>
+    </p:spTree>
+  </p:cSld>
+  <p:clrMapOvr>
+    <a:masterClrMapping/>
+  </p:clrMapOvr>
+</p:notes>
+</file>
+
+<file path=ppt/notesSlides/notesSlide34.xml><?xml version="1.0" encoding="utf-8"?>
+<p:notes xmlns:a="http://schemas.openxmlformats.org/drawingml/2006/main" xmlns:p="http://schemas.openxmlformats.org/presentationml/2006/main" xmlns:r="http://schemas.openxmlformats.org/officeDocument/2006/relationships">
+  <p:cSld>
+    <p:spTree>
+      <p:nvGrpSpPr>
+        <p:cNvPr id="1" name=""/>
+        <p:cNvGrpSpPr/>
+        <p:nvPr/>
+      </p:nvGrpSpPr>
+      <p:grpSpPr>
+        <a:xfrm>
+          <a:off x="0" y="0"/>
+          <a:ext cx="0" cy="0"/>
+          <a:chOff x="0" y="0"/>
+          <a:chExt cx="0" cy="0"/>
+        </a:xfrm>
+      </p:grpSpPr>
+      <p:sp>
+        <p:nvSpPr>
+          <p:cNvPr id="2" name="Slide Image Placeholder 1"/>
+          <p:cNvSpPr>
+            <a:spLocks noGrp="1"/>
+          </p:cNvSpPr>
+          <p:nvPr>
+            <p:ph type="sldImg" idx="2"/>
+          </p:nvPr>
+        </p:nvSpPr>
+        <p:spPr/>
+      </p:sp>
+      <p:sp>
+        <p:nvSpPr>
+          <p:cNvPr id="3" name="Notes Placeholder 2"/>
+          <p:cNvSpPr>
+            <a:spLocks noGrp="1"/>
+          </p:cNvSpPr>
+          <p:nvPr>
+            <p:ph type="body" idx="3" sz="quarter"/>
+          </p:nvPr>
+        </p:nvSpPr>
+        <p:spPr/>
+        <p:txBody>
+          <a:bodyPr/>
+          <a:lstStyle/>
+          <a:p>
+            <a:r>
+              <a:t>Slide ĐỀ BÀI – cho HS suy nghĩ, thảo luận (không chiếu lời giải). </a:t>
+            </a:r>
+          </a:p>
+        </p:txBody>
+      </p:sp>
+      <p:sp>
+        <p:nvSpPr>
+          <p:cNvPr id="4" name="Slide Number Placeholder 3"/>
+          <p:cNvSpPr>
+            <a:spLocks noGrp="1"/>
+          </p:cNvSpPr>
+          <p:nvPr>
+            <p:ph type="sldNum" idx="5" sz="quarter"/>
+          </p:nvPr>
+        </p:nvSpPr>
+        <p:spPr/>
+      </p:sp>
+    </p:spTree>
+  </p:cSld>
+  <p:clrMapOvr>
+    <a:masterClrMapping/>
+  </p:clrMapOvr>
+</p:notes>
+</file>
+
+<file path=ppt/notesSlides/notesSlide35.xml><?xml version="1.0" encoding="utf-8"?>
+<p:notes xmlns:a="http://schemas.openxmlformats.org/drawingml/2006/main" xmlns:p="http://schemas.openxmlformats.org/presentationml/2006/main" xmlns:r="http://schemas.openxmlformats.org/officeDocument/2006/relationships">
+  <p:cSld>
+    <p:spTree>
+      <p:nvGrpSpPr>
+        <p:cNvPr id="1" name=""/>
+        <p:cNvGrpSpPr/>
+        <p:nvPr/>
+      </p:nvGrpSpPr>
+      <p:grpSpPr>
+        <a:xfrm>
+          <a:off x="0" y="0"/>
+          <a:ext cx="0" cy="0"/>
+          <a:chOff x="0" y="0"/>
+          <a:chExt cx="0" cy="0"/>
+        </a:xfrm>
+      </p:grpSpPr>
+      <p:sp>
+        <p:nvSpPr>
+          <p:cNvPr id="2" name="Slide Image Placeholder 1"/>
+          <p:cNvSpPr>
+            <a:spLocks noGrp="1"/>
+          </p:cNvSpPr>
+          <p:nvPr>
+            <p:ph type="sldImg" idx="2"/>
+          </p:nvPr>
+        </p:nvSpPr>
+        <p:spPr/>
+      </p:sp>
+      <p:sp>
+        <p:nvSpPr>
+          <p:cNvPr id="3" name="Notes Placeholder 2"/>
+          <p:cNvSpPr>
+            <a:spLocks noGrp="1"/>
+          </p:cNvSpPr>
+          <p:nvPr>
+            <p:ph type="body" idx="3" sz="quarter"/>
+          </p:nvPr>
+        </p:nvSpPr>
+        <p:spPr/>
+        <p:txBody>
+          <a:bodyPr/>
+          <a:lstStyle/>
+          <a:p>
+            <a:r>
+              <a:t>Slide LỜI GIẢI – GV chốt sau khi HS trình bày. </a:t>
+            </a:r>
+          </a:p>
+        </p:txBody>
+      </p:sp>
+      <p:sp>
+        <p:nvSpPr>
+          <p:cNvPr id="4" name="Slide Number Placeholder 3"/>
+          <p:cNvSpPr>
+            <a:spLocks noGrp="1"/>
+          </p:cNvSpPr>
+          <p:nvPr>
+            <p:ph type="sldNum" idx="5" sz="quarter"/>
+          </p:nvPr>
+        </p:nvSpPr>
+        <p:spPr/>
+      </p:sp>
+    </p:spTree>
+  </p:cSld>
+  <p:clrMapOvr>
+    <a:masterClrMapping/>
+  </p:clrMapOvr>
+</p:notes>
+</file>
+
+<file path=ppt/notesSlides/notesSlide36.xml><?xml version="1.0" encoding="utf-8"?>
+<p:notes xmlns:a="http://schemas.openxmlformats.org/drawingml/2006/main" xmlns:p="http://schemas.openxmlformats.org/presentationml/2006/main" xmlns:r="http://schemas.openxmlformats.org/officeDocument/2006/relationships">
+  <p:cSld>
+    <p:spTree>
+      <p:nvGrpSpPr>
+        <p:cNvPr id="1" name=""/>
+        <p:cNvGrpSpPr/>
+        <p:nvPr/>
+      </p:nvGrpSpPr>
+      <p:grpSpPr>
+        <a:xfrm>
+          <a:off x="0" y="0"/>
+          <a:ext cx="0" cy="0"/>
+          <a:chOff x="0" y="0"/>
+          <a:chExt cx="0" cy="0"/>
+        </a:xfrm>
+      </p:grpSpPr>
+      <p:sp>
+        <p:nvSpPr>
+          <p:cNvPr id="2" name="Slide Image Placeholder 1"/>
+          <p:cNvSpPr>
+            <a:spLocks noGrp="1"/>
+          </p:cNvSpPr>
+          <p:nvPr>
+            <p:ph type="sldImg" idx="2"/>
+          </p:nvPr>
+        </p:nvSpPr>
+        <p:spPr/>
+      </p:sp>
+      <p:sp>
+        <p:nvSpPr>
+          <p:cNvPr id="3" name="Notes Placeholder 2"/>
+          <p:cNvSpPr>
+            <a:spLocks noGrp="1"/>
+          </p:cNvSpPr>
+          <p:nvPr>
+            <p:ph type="body" idx="3" sz="quarter"/>
+          </p:nvPr>
+        </p:nvSpPr>
+        <p:spPr/>
+        <p:txBody>
+          <a:bodyPr/>
+          <a:lstStyle/>
+          <a:p>
+            <a:r>
+              <a:t>Slide ĐỀ BÀI – cho HS suy nghĩ, thảo luận (không chiếu lời giải). </a:t>
+            </a:r>
+          </a:p>
+        </p:txBody>
+      </p:sp>
+      <p:sp>
+        <p:nvSpPr>
+          <p:cNvPr id="4" name="Slide Number Placeholder 3"/>
+          <p:cNvSpPr>
+            <a:spLocks noGrp="1"/>
+          </p:cNvSpPr>
+          <p:nvPr>
+            <p:ph type="sldNum" idx="5" sz="quarter"/>
+          </p:nvPr>
+        </p:nvSpPr>
+        <p:spPr/>
+      </p:sp>
+    </p:spTree>
+  </p:cSld>
+  <p:clrMapOvr>
+    <a:masterClrMapping/>
+  </p:clrMapOvr>
+</p:notes>
+</file>
+
+<file path=ppt/notesSlides/notesSlide37.xml><?xml version="1.0" encoding="utf-8"?>
+<p:notes xmlns:a="http://schemas.openxmlformats.org/drawingml/2006/main" xmlns:p="http://schemas.openxmlformats.org/presentationml/2006/main" xmlns:r="http://schemas.openxmlformats.org/officeDocument/2006/relationships">
+  <p:cSld>
+    <p:spTree>
+      <p:nvGrpSpPr>
+        <p:cNvPr id="1" name=""/>
+        <p:cNvGrpSpPr/>
+        <p:nvPr/>
+      </p:nvGrpSpPr>
+      <p:grpSpPr>
+        <a:xfrm>
+          <a:off x="0" y="0"/>
+          <a:ext cx="0" cy="0"/>
+          <a:chOff x="0" y="0"/>
+          <a:chExt cx="0" cy="0"/>
+        </a:xfrm>
+      </p:grpSpPr>
+      <p:sp>
+        <p:nvSpPr>
+          <p:cNvPr id="2" name="Slide Image Placeholder 1"/>
+          <p:cNvSpPr>
+            <a:spLocks noGrp="1"/>
+          </p:cNvSpPr>
+          <p:nvPr>
+            <p:ph type="sldImg" idx="2"/>
+          </p:nvPr>
+        </p:nvSpPr>
+        <p:spPr/>
+      </p:sp>
+      <p:sp>
+        <p:nvSpPr>
+          <p:cNvPr id="3" name="Notes Placeholder 2"/>
+          <p:cNvSpPr>
+            <a:spLocks noGrp="1"/>
+          </p:cNvSpPr>
+          <p:nvPr>
+            <p:ph type="body" idx="3" sz="quarter"/>
+          </p:nvPr>
+        </p:nvSpPr>
+        <p:spPr/>
+        <p:txBody>
+          <a:bodyPr/>
+          <a:lstStyle/>
+          <a:p>
+            <a:r>
               <a:t>Slide LỜI GIẢI – GV chốt sau khi HS trình bày. </a:t>
             </a:r>
           </a:p>
@@ -2364,7 +2719,7 @@
           <a:lstStyle/>
           <a:p>
             <a:r>
-              <a:t>Slide LỜI GIẢI – GV chốt sau khi HS trình bày. </a:t>
+              <a:t>Slide ĐỀ BÀI – cho HS suy nghĩ, thảo luận (không chiếu lời giải). </a:t>
             </a:r>
           </a:p>
         </p:txBody>
@@ -2434,7 +2789,7 @@
           <a:lstStyle/>
           <a:p>
             <a:r>
-              <a:t>Slide ĐỀ BÀI – cho HS suy nghĩ, thảo luận (không chiếu lời giải). </a:t>
+              <a:t>Slide LỜI GIẢI – GV chốt sau khi HS trình bày. </a:t>
             </a:r>
           </a:p>
         </p:txBody>
@@ -2504,7 +2859,7 @@
           <a:lstStyle/>
           <a:p>
             <a:r>
-              <a:t>Slide LỜI GIẢI – GV chốt sau khi HS trình bày. </a:t>
+              <a:t>Slide ĐỀ BÀI – cho HS suy nghĩ, thảo luận (không chiếu lời giải). </a:t>
             </a:r>
           </a:p>
         </p:txBody>
@@ -2574,7 +2929,7 @@
           <a:lstStyle/>
           <a:p>
             <a:r>
-              <a:t>Slide ĐỀ BÀI – cho HS suy nghĩ, thảo luận (không chiếu lời giải). </a:t>
+              <a:t>Slide LỜI GIẢI – GV chốt sau khi HS trình bày. </a:t>
             </a:r>
           </a:p>
         </p:txBody>
@@ -2644,7 +2999,7 @@
           <a:lstStyle/>
           <a:p>
             <a:r>
-              <a:t>Slide LỜI GIẢI – GV chốt sau khi HS trình bày. </a:t>
+              <a:t>Slide ĐỀ BÀI – cho HS suy nghĩ, thảo luận (không chiếu lời giải). </a:t>
             </a:r>
           </a:p>
         </p:txBody>
@@ -2714,7 +3069,7 @@
           <a:lstStyle/>
           <a:p>
             <a:r>
-              <a:t>Câu hỏi Trước khi đọc SGK tr.47.</a:t>
+              <a:t>Slide LỜI GIẢI – GV chốt sau khi HS trình bày. </a:t>
             </a:r>
           </a:p>
         </p:txBody>
@@ -5944,14 +6299,14 @@
         </p:nvSpPr>
         <p:spPr>
           <a:xfrm>
-            <a:off x="10253167" y="457200"/>
-            <a:ext cx="1389888" cy="457200"/>
+            <a:off x="9942271" y="457200"/>
+            <a:ext cx="1700784" cy="457200"/>
           </a:xfrm>
           <a:prstGeom prst="roundRect">
             <a:avLst/>
           </a:prstGeom>
           <a:solidFill>
-            <a:srgbClr val="1E40AF"/>
+            <a:srgbClr val="991B1B"/>
           </a:solidFill>
           <a:ln>
             <a:noFill/>
@@ -5984,7 +6339,7 @@
                 </a:solidFill>
                 <a:latin typeface="Arial"/>
               </a:rPr>
-              <a:t>ĐỀ BÀI</a:t>
+              <a:t>LỜI GIẢI</a:t>
             </a:r>
           </a:p>
         </p:txBody>
@@ -5998,7 +6353,7 @@
         <p:spPr>
           <a:xfrm>
             <a:off x="731520" y="274320"/>
-            <a:ext cx="9582912" cy="868680"/>
+            <a:ext cx="9272016" cy="868680"/>
           </a:xfrm>
           <a:prstGeom prst="rect">
             <a:avLst/>
@@ -6018,7 +6373,7 @@
                 </a:solidFill>
                 <a:latin typeface="Arial"/>
               </a:rPr>
-              <a:t>HÀNH TRÌNH “CHẬM RÌ” CỦA CON ỐC</a:t>
+              <a:t>PHÁT HIỆN VÀ TRIẾT LÍ</a:t>
             </a:r>
           </a:p>
         </p:txBody>
@@ -6111,7 +6466,7 @@
         <p:spPr>
           <a:xfrm>
             <a:off x="731520" y="1463040"/>
-            <a:ext cx="10789920" cy="3566160"/>
+            <a:ext cx="10789920" cy="3474720"/>
           </a:xfrm>
           <a:prstGeom prst="rect">
             <a:avLst/>
@@ -6124,19 +6479,66 @@
           </a:bodyPr>
           <a:lstStyle/>
           <a:p>
-            <a:pPr algn="l">
+            <a:pPr algn="l" marL="365760" indent="-365760">
               <a:spcAft>
                 <a:spcPts val="800"/>
               </a:spcAft>
+              <a:buClr>
+                <a:srgbClr val="1E40AF"/>
+              </a:buClr>
+              <a:buFont typeface="Arial"/>
+              <a:buChar char="•"/>
             </a:pPr>
             <a:r>
-              <a:rPr sz="2600" b="1">
+              <a:rPr sz="2300">
                 <a:solidFill>
                   <a:srgbClr val="1E293B"/>
                 </a:solidFill>
                 <a:latin typeface="Calibri"/>
               </a:rPr>
-              <a:t>Bạn cảm nhận như thế nào về hành trình “chậm rì” của con ốc trong bài thơ của Ít-sa?</a:t>
+              <a:t>Phát hiện: dây gàu bị hoa triêu nhan quấn vướng.</a:t>
+            </a:r>
+          </a:p>
+          <a:p>
+            <a:pPr algn="l" marL="365760" indent="-365760">
+              <a:spcAft>
+                <a:spcPts val="800"/>
+              </a:spcAft>
+              <a:buClr>
+                <a:srgbClr val="1E40AF"/>
+              </a:buClr>
+              <a:buFont typeface="Arial"/>
+              <a:buChar char="•"/>
+            </a:pPr>
+            <a:r>
+              <a:rPr sz="2300">
+                <a:solidFill>
+                  <a:srgbClr val="1E293B"/>
+                </a:solidFill>
+                <a:latin typeface="Calibri"/>
+              </a:rPr>
+              <a:t>Không nỡ làm tổn thương bông hoa → đành xin nước nhà bên.</a:t>
+            </a:r>
+          </a:p>
+          <a:p>
+            <a:pPr algn="l" marL="365760" indent="-365760">
+              <a:spcAft>
+                <a:spcPts val="800"/>
+              </a:spcAft>
+              <a:buClr>
+                <a:srgbClr val="1E40AF"/>
+              </a:buClr>
+              <a:buFont typeface="Arial"/>
+              <a:buChar char="•"/>
+            </a:pPr>
+            <a:r>
+              <a:rPr sz="2300">
+                <a:solidFill>
+                  <a:srgbClr val="1E293B"/>
+                </a:solidFill>
+                <a:latin typeface="Calibri"/>
+              </a:rPr>
+              <a:t>Triết lí: trân trọng, nâng niu sự sống; ứng xử hài hoà với thiên nhiên.</a:t>
             </a:r>
           </a:p>
         </p:txBody>
@@ -6149,8 +6551,8 @@
         </p:nvSpPr>
         <p:spPr>
           <a:xfrm>
-            <a:off x="731520" y="5120640"/>
-            <a:ext cx="10789920" cy="693420"/>
+            <a:off x="731520" y="5074920"/>
+            <a:ext cx="10789920" cy="731520"/>
           </a:xfrm>
           <a:prstGeom prst="roundRect">
             <a:avLst>
@@ -6158,11 +6560,11 @@
             </a:avLst>
           </a:prstGeom>
           <a:solidFill>
-            <a:srgbClr val="EFF4FF"/>
+            <a:srgbClr val="FEF2F2"/>
           </a:solidFill>
           <a:ln w="19050">
             <a:solidFill>
-              <a:srgbClr val="1E40AF"/>
+              <a:srgbClr val="991B1B"/>
             </a:solidFill>
           </a:ln>
           <a:effectLst/>
@@ -6197,8 +6599,8 @@
         </p:nvSpPr>
         <p:spPr>
           <a:xfrm>
-            <a:off x="914400" y="5120640"/>
-            <a:ext cx="10424160" cy="693420"/>
+            <a:off x="914400" y="5074920"/>
+            <a:ext cx="10424160" cy="731520"/>
           </a:xfrm>
           <a:prstGeom prst="rect">
             <a:avLst/>
@@ -6217,13 +6619,13 @@
               </a:spcAft>
             </a:pPr>
             <a:r>
-              <a:rPr sz="2200" b="1">
-                <a:solidFill>
-                  <a:srgbClr val="1E40AF"/>
+              <a:rPr sz="2400" b="1">
+                <a:solidFill>
+                  <a:srgbClr val="991B1B"/>
                 </a:solidFill>
                 <a:latin typeface="Calibri"/>
               </a:rPr>
-              <a:t>💡 Đặt con ốc cạnh núi Phú Sĩ.</a:t>
+              <a:t>Tình yêu thiên nhiên tinh tế, nhân hậu.</a:t>
             </a:r>
           </a:p>
         </p:txBody>
@@ -6306,6 +6708,368 @@
         </p:nvSpPr>
         <p:spPr>
           <a:xfrm>
+            <a:off x="10253167" y="457200"/>
+            <a:ext cx="1389888" cy="457200"/>
+          </a:xfrm>
+          <a:prstGeom prst="roundRect">
+            <a:avLst/>
+          </a:prstGeom>
+          <a:solidFill>
+            <a:srgbClr val="1E40AF"/>
+          </a:solidFill>
+          <a:ln>
+            <a:noFill/>
+          </a:ln>
+          <a:effectLst/>
+        </p:spPr>
+        <p:style>
+          <a:lnRef idx="1">
+            <a:schemeClr val="accent1"/>
+          </a:lnRef>
+          <a:fillRef idx="3">
+            <a:schemeClr val="accent1"/>
+          </a:fillRef>
+          <a:effectRef idx="2">
+            <a:schemeClr val="accent1"/>
+          </a:effectRef>
+          <a:fontRef idx="minor">
+            <a:schemeClr val="lt1"/>
+          </a:fontRef>
+        </p:style>
+        <p:txBody>
+          <a:bodyPr rtlCol="0" anchor="ctr" wrap="none" tIns="0" bIns="0"/>
+          <a:lstStyle/>
+          <a:p>
+            <a:pPr algn="ctr"/>
+            <a:r>
+              <a:rPr sz="1400" b="1">
+                <a:solidFill>
+                  <a:srgbClr val="FFFFFF"/>
+                </a:solidFill>
+                <a:latin typeface="Arial"/>
+              </a:rPr>
+              <a:t>ĐỀ BÀI</a:t>
+            </a:r>
+          </a:p>
+        </p:txBody>
+      </p:sp>
+      <p:sp>
+        <p:nvSpPr>
+          <p:cNvPr id="4" name="TextBox 3"/>
+          <p:cNvSpPr txBox="1"/>
+          <p:nvPr/>
+        </p:nvSpPr>
+        <p:spPr>
+          <a:xfrm>
+            <a:off x="731520" y="274320"/>
+            <a:ext cx="9582912" cy="868680"/>
+          </a:xfrm>
+          <a:prstGeom prst="rect">
+            <a:avLst/>
+          </a:prstGeom>
+          <a:noFill/>
+        </p:spPr>
+        <p:txBody>
+          <a:bodyPr wrap="square" anchor="ctr">
+            <a:spAutoFit/>
+          </a:bodyPr>
+          <a:lstStyle/>
+          <a:p>
+            <a:r>
+              <a:rPr sz="3600" b="1">
+                <a:solidFill>
+                  <a:srgbClr val="1E40AF"/>
+                </a:solidFill>
+                <a:latin typeface="Arial"/>
+              </a:rPr>
+              <a:t>HÀNH TRÌNH “CHẬM RÌ” CỦA CON ỐC</a:t>
+            </a:r>
+          </a:p>
+        </p:txBody>
+      </p:sp>
+      <p:sp>
+        <p:nvSpPr>
+          <p:cNvPr id="5" name="Rectangle 4"/>
+          <p:cNvSpPr/>
+          <p:nvPr/>
+        </p:nvSpPr>
+        <p:spPr>
+          <a:xfrm>
+            <a:off x="457200" y="1207008"/>
+            <a:ext cx="11274552" cy="22000"/>
+          </a:xfrm>
+          <a:prstGeom prst="rect">
+            <a:avLst/>
+          </a:prstGeom>
+          <a:solidFill>
+            <a:srgbClr val="E2E8F0"/>
+          </a:solidFill>
+          <a:ln>
+            <a:noFill/>
+          </a:ln>
+          <a:effectLst/>
+        </p:spPr>
+        <p:style>
+          <a:lnRef idx="1">
+            <a:schemeClr val="accent1"/>
+          </a:lnRef>
+          <a:fillRef idx="3">
+            <a:schemeClr val="accent1"/>
+          </a:fillRef>
+          <a:effectRef idx="2">
+            <a:schemeClr val="accent1"/>
+          </a:effectRef>
+          <a:fontRef idx="minor">
+            <a:schemeClr val="lt1"/>
+          </a:fontRef>
+        </p:style>
+        <p:txBody>
+          <a:bodyPr rtlCol="0" anchor="ctr"/>
+          <a:lstStyle/>
+          <a:p>
+            <a:pPr algn="ctr"/>
+          </a:p>
+        </p:txBody>
+      </p:sp>
+      <p:sp>
+        <p:nvSpPr>
+          <p:cNvPr id="6" name="TextBox 5"/>
+          <p:cNvSpPr txBox="1"/>
+          <p:nvPr/>
+        </p:nvSpPr>
+        <p:spPr>
+          <a:xfrm>
+            <a:off x="457200" y="6355080"/>
+            <a:ext cx="11274552" cy="365760"/>
+          </a:xfrm>
+          <a:prstGeom prst="rect">
+            <a:avLst/>
+          </a:prstGeom>
+          <a:noFill/>
+        </p:spPr>
+        <p:txBody>
+          <a:bodyPr wrap="none">
+            <a:spAutoFit/>
+          </a:bodyPr>
+          <a:lstStyle/>
+          <a:p>
+            <a:pPr algn="r"/>
+            <a:r>
+              <a:rPr sz="1200">
+                <a:solidFill>
+                  <a:srgbClr val="64748B"/>
+                </a:solidFill>
+                <a:latin typeface="Calibri"/>
+              </a:rPr>
+              <a:t>Ngữ văn 10 · Bài 2: Vẻ Đẹp Của Thơ Ca          11</a:t>
+            </a:r>
+          </a:p>
+        </p:txBody>
+      </p:sp>
+      <p:sp>
+        <p:nvSpPr>
+          <p:cNvPr id="7" name="TextBox 6"/>
+          <p:cNvSpPr txBox="1"/>
+          <p:nvPr/>
+        </p:nvSpPr>
+        <p:spPr>
+          <a:xfrm>
+            <a:off x="731520" y="1463040"/>
+            <a:ext cx="10789920" cy="3566160"/>
+          </a:xfrm>
+          <a:prstGeom prst="rect">
+            <a:avLst/>
+          </a:prstGeom>
+          <a:noFill/>
+        </p:spPr>
+        <p:txBody>
+          <a:bodyPr wrap="square" anchor="t" lIns="45720" rIns="45720">
+            <a:spAutoFit/>
+          </a:bodyPr>
+          <a:lstStyle/>
+          <a:p>
+            <a:pPr algn="l">
+              <a:spcAft>
+                <a:spcPts val="800"/>
+              </a:spcAft>
+            </a:pPr>
+            <a:r>
+              <a:rPr sz="2600" b="1">
+                <a:solidFill>
+                  <a:srgbClr val="1E293B"/>
+                </a:solidFill>
+                <a:latin typeface="Calibri"/>
+              </a:rPr>
+              <a:t>Bạn cảm nhận như thế nào về hành trình “chậm rì” của con ốc trong bài thơ của Ít-sa?</a:t>
+            </a:r>
+          </a:p>
+        </p:txBody>
+      </p:sp>
+      <p:sp>
+        <p:nvSpPr>
+          <p:cNvPr id="8" name="Rounded Rectangle 7"/>
+          <p:cNvSpPr/>
+          <p:nvPr/>
+        </p:nvSpPr>
+        <p:spPr>
+          <a:xfrm>
+            <a:off x="731520" y="5120640"/>
+            <a:ext cx="10789920" cy="693420"/>
+          </a:xfrm>
+          <a:prstGeom prst="roundRect">
+            <a:avLst>
+              <a:gd name="adj" fmla="val 8000"/>
+            </a:avLst>
+          </a:prstGeom>
+          <a:solidFill>
+            <a:srgbClr val="EFF4FF"/>
+          </a:solidFill>
+          <a:ln w="19050">
+            <a:solidFill>
+              <a:srgbClr val="1E40AF"/>
+            </a:solidFill>
+          </a:ln>
+          <a:effectLst/>
+        </p:spPr>
+        <p:style>
+          <a:lnRef idx="1">
+            <a:schemeClr val="accent1"/>
+          </a:lnRef>
+          <a:fillRef idx="3">
+            <a:schemeClr val="accent1"/>
+          </a:fillRef>
+          <a:effectRef idx="2">
+            <a:schemeClr val="accent1"/>
+          </a:effectRef>
+          <a:fontRef idx="minor">
+            <a:schemeClr val="lt1"/>
+          </a:fontRef>
+        </p:style>
+        <p:txBody>
+          <a:bodyPr rtlCol="0" anchor="ctr"/>
+          <a:lstStyle/>
+          <a:p>
+            <a:pPr algn="ctr"/>
+          </a:p>
+        </p:txBody>
+      </p:sp>
+      <p:sp>
+        <p:nvSpPr>
+          <p:cNvPr id="9" name="TextBox 8"/>
+          <p:cNvSpPr txBox="1"/>
+          <p:nvPr/>
+        </p:nvSpPr>
+        <p:spPr>
+          <a:xfrm>
+            <a:off x="914400" y="5120640"/>
+            <a:ext cx="10424160" cy="693420"/>
+          </a:xfrm>
+          <a:prstGeom prst="rect">
+            <a:avLst/>
+          </a:prstGeom>
+          <a:noFill/>
+        </p:spPr>
+        <p:txBody>
+          <a:bodyPr wrap="square" anchor="ctr" lIns="45720" rIns="45720">
+            <a:spAutoFit/>
+          </a:bodyPr>
+          <a:lstStyle/>
+          <a:p>
+            <a:pPr algn="l">
+              <a:spcAft>
+                <a:spcPts val="400"/>
+              </a:spcAft>
+            </a:pPr>
+            <a:r>
+              <a:rPr sz="2200" b="1">
+                <a:solidFill>
+                  <a:srgbClr val="1E40AF"/>
+                </a:solidFill>
+                <a:latin typeface="Calibri"/>
+              </a:rPr>
+              <a:t>💡 Đặt con ốc cạnh núi Phú Sĩ.</a:t>
+            </a:r>
+          </a:p>
+        </p:txBody>
+      </p:sp>
+    </p:spTree>
+  </p:cSld>
+  <p:clrMapOvr>
+    <a:masterClrMapping/>
+  </p:clrMapOvr>
+</p:sld>
+</file>
+
+<file path=ppt/slides/slide12.xml><?xml version="1.0" encoding="utf-8"?>
+<p:sld xmlns:a="http://schemas.openxmlformats.org/drawingml/2006/main" xmlns:p="http://schemas.openxmlformats.org/presentationml/2006/main" xmlns:r="http://schemas.openxmlformats.org/officeDocument/2006/relationships">
+  <p:cSld>
+    <p:bg>
+      <p:bgPr>
+        <a:solidFill>
+          <a:srgbClr val="FFFFFF"/>
+        </a:solidFill>
+        <a:effectLst/>
+      </p:bgPr>
+    </p:bg>
+    <p:spTree>
+      <p:nvGrpSpPr>
+        <p:cNvPr id="1" name=""/>
+        <p:cNvGrpSpPr/>
+        <p:nvPr/>
+      </p:nvGrpSpPr>
+      <p:grpSpPr/>
+      <p:sp>
+        <p:nvSpPr>
+          <p:cNvPr id="2" name="Rectangle 1"/>
+          <p:cNvSpPr/>
+          <p:nvPr/>
+        </p:nvSpPr>
+        <p:spPr>
+          <a:xfrm>
+            <a:off x="457200" y="384048"/>
+            <a:ext cx="109728" cy="658368"/>
+          </a:xfrm>
+          <a:prstGeom prst="rect">
+            <a:avLst/>
+          </a:prstGeom>
+          <a:solidFill>
+            <a:srgbClr val="1E40AF"/>
+          </a:solidFill>
+          <a:ln>
+            <a:noFill/>
+          </a:ln>
+          <a:effectLst/>
+        </p:spPr>
+        <p:style>
+          <a:lnRef idx="1">
+            <a:schemeClr val="accent1"/>
+          </a:lnRef>
+          <a:fillRef idx="3">
+            <a:schemeClr val="accent1"/>
+          </a:fillRef>
+          <a:effectRef idx="2">
+            <a:schemeClr val="accent1"/>
+          </a:effectRef>
+          <a:fontRef idx="minor">
+            <a:schemeClr val="lt1"/>
+          </a:fontRef>
+        </p:style>
+        <p:txBody>
+          <a:bodyPr rtlCol="0" anchor="ctr"/>
+          <a:lstStyle/>
+          <a:p>
+            <a:pPr algn="ctr"/>
+          </a:p>
+        </p:txBody>
+      </p:sp>
+      <p:sp>
+        <p:nvSpPr>
+          <p:cNvPr id="3" name="Rounded Rectangle 2"/>
+          <p:cNvSpPr/>
+          <p:nvPr/>
+        </p:nvSpPr>
+        <p:spPr>
+          <a:xfrm>
             <a:off x="9942271" y="457200"/>
             <a:ext cx="1700784" cy="457200"/>
           </a:xfrm>
@@ -6459,7 +7223,7 @@
                 </a:solidFill>
                 <a:latin typeface="Calibri"/>
               </a:rPr>
-              <a:t>Ngữ văn 10 · Bài 2: Vẻ Đẹp Của Thơ Ca          11</a:t>
+              <a:t>Ngữ văn 10 · Bài 2: Vẻ Đẹp Của Thơ Ca          12</a:t>
             </a:r>
           </a:p>
         </p:txBody>
@@ -6645,7 +7409,7 @@
 </p:sld>
 </file>
 
-<file path=ppt/slides/slide12.xml><?xml version="1.0" encoding="utf-8"?>
+<file path=ppt/slides/slide13.xml><?xml version="1.0" encoding="utf-8"?>
 <p:sld xmlns:a="http://schemas.openxmlformats.org/drawingml/2006/main" xmlns:p="http://schemas.openxmlformats.org/presentationml/2006/main" xmlns:r="http://schemas.openxmlformats.org/officeDocument/2006/relationships">
   <p:cSld>
     <p:bg>
@@ -6742,297 +7506,6 @@
                 <a:latin typeface="Calibri"/>
               </a:rPr>
               <a:t>TIẾT 13 – 14: THU HỨNG (Đỗ Phủ)</a:t>
-            </a:r>
-          </a:p>
-        </p:txBody>
-      </p:sp>
-    </p:spTree>
-  </p:cSld>
-  <p:clrMapOvr>
-    <a:masterClrMapping/>
-  </p:clrMapOvr>
-</p:sld>
-</file>
-
-<file path=ppt/slides/slide13.xml><?xml version="1.0" encoding="utf-8"?>
-<p:sld xmlns:a="http://schemas.openxmlformats.org/drawingml/2006/main" xmlns:p="http://schemas.openxmlformats.org/presentationml/2006/main" xmlns:r="http://schemas.openxmlformats.org/officeDocument/2006/relationships">
-  <p:cSld>
-    <p:bg>
-      <p:bgPr>
-        <a:solidFill>
-          <a:srgbClr val="FFFFFF"/>
-        </a:solidFill>
-        <a:effectLst/>
-      </p:bgPr>
-    </p:bg>
-    <p:spTree>
-      <p:nvGrpSpPr>
-        <p:cNvPr id="1" name=""/>
-        <p:cNvGrpSpPr/>
-        <p:nvPr/>
-      </p:nvGrpSpPr>
-      <p:grpSpPr/>
-      <p:sp>
-        <p:nvSpPr>
-          <p:cNvPr id="2" name="Rectangle 1"/>
-          <p:cNvSpPr/>
-          <p:nvPr/>
-        </p:nvSpPr>
-        <p:spPr>
-          <a:xfrm>
-            <a:off x="457200" y="384048"/>
-            <a:ext cx="109728" cy="658368"/>
-          </a:xfrm>
-          <a:prstGeom prst="rect">
-            <a:avLst/>
-          </a:prstGeom>
-          <a:solidFill>
-            <a:srgbClr val="1E40AF"/>
-          </a:solidFill>
-          <a:ln>
-            <a:noFill/>
-          </a:ln>
-          <a:effectLst/>
-        </p:spPr>
-        <p:style>
-          <a:lnRef idx="1">
-            <a:schemeClr val="accent1"/>
-          </a:lnRef>
-          <a:fillRef idx="3">
-            <a:schemeClr val="accent1"/>
-          </a:fillRef>
-          <a:effectRef idx="2">
-            <a:schemeClr val="accent1"/>
-          </a:effectRef>
-          <a:fontRef idx="minor">
-            <a:schemeClr val="lt1"/>
-          </a:fontRef>
-        </p:style>
-        <p:txBody>
-          <a:bodyPr rtlCol="0" anchor="ctr"/>
-          <a:lstStyle/>
-          <a:p>
-            <a:pPr algn="ctr"/>
-          </a:p>
-        </p:txBody>
-      </p:sp>
-      <p:sp>
-        <p:nvSpPr>
-          <p:cNvPr id="3" name="Rounded Rectangle 2"/>
-          <p:cNvSpPr/>
-          <p:nvPr/>
-        </p:nvSpPr>
-        <p:spPr>
-          <a:xfrm>
-            <a:off x="9786823" y="457200"/>
-            <a:ext cx="1856232" cy="457200"/>
-          </a:xfrm>
-          <a:prstGeom prst="roundRect">
-            <a:avLst/>
-          </a:prstGeom>
-          <a:solidFill>
-            <a:srgbClr val="1E40AF"/>
-          </a:solidFill>
-          <a:ln>
-            <a:noFill/>
-          </a:ln>
-          <a:effectLst/>
-        </p:spPr>
-        <p:style>
-          <a:lnRef idx="1">
-            <a:schemeClr val="accent1"/>
-          </a:lnRef>
-          <a:fillRef idx="3">
-            <a:schemeClr val="accent1"/>
-          </a:fillRef>
-          <a:effectRef idx="2">
-            <a:schemeClr val="accent1"/>
-          </a:effectRef>
-          <a:fontRef idx="minor">
-            <a:schemeClr val="lt1"/>
-          </a:fontRef>
-        </p:style>
-        <p:txBody>
-          <a:bodyPr rtlCol="0" anchor="ctr" wrap="none" tIns="0" bIns="0"/>
-          <a:lstStyle/>
-          <a:p>
-            <a:pPr algn="ctr"/>
-            <a:r>
-              <a:rPr sz="1400" b="1">
-                <a:solidFill>
-                  <a:srgbClr val="FFFFFF"/>
-                </a:solidFill>
-                <a:latin typeface="Arial"/>
-              </a:rPr>
-              <a:t>KHỞI ĐỘNG</a:t>
-            </a:r>
-          </a:p>
-        </p:txBody>
-      </p:sp>
-      <p:sp>
-        <p:nvSpPr>
-          <p:cNvPr id="4" name="TextBox 3"/>
-          <p:cNvSpPr txBox="1"/>
-          <p:nvPr/>
-        </p:nvSpPr>
-        <p:spPr>
-          <a:xfrm>
-            <a:off x="731520" y="274320"/>
-            <a:ext cx="9116568" cy="868680"/>
-          </a:xfrm>
-          <a:prstGeom prst="rect">
-            <a:avLst/>
-          </a:prstGeom>
-          <a:noFill/>
-        </p:spPr>
-        <p:txBody>
-          <a:bodyPr wrap="square" anchor="ctr">
-            <a:spAutoFit/>
-          </a:bodyPr>
-          <a:lstStyle/>
-          <a:p>
-            <a:r>
-              <a:rPr sz="3600" b="1">
-                <a:solidFill>
-                  <a:srgbClr val="1E40AF"/>
-                </a:solidFill>
-                <a:latin typeface="Arial"/>
-              </a:rPr>
-              <a:t>TRƯỚC KHI ĐỌC</a:t>
-            </a:r>
-          </a:p>
-        </p:txBody>
-      </p:sp>
-      <p:sp>
-        <p:nvSpPr>
-          <p:cNvPr id="5" name="Rectangle 4"/>
-          <p:cNvSpPr/>
-          <p:nvPr/>
-        </p:nvSpPr>
-        <p:spPr>
-          <a:xfrm>
-            <a:off x="457200" y="1207008"/>
-            <a:ext cx="11274552" cy="22000"/>
-          </a:xfrm>
-          <a:prstGeom prst="rect">
-            <a:avLst/>
-          </a:prstGeom>
-          <a:solidFill>
-            <a:srgbClr val="E2E8F0"/>
-          </a:solidFill>
-          <a:ln>
-            <a:noFill/>
-          </a:ln>
-          <a:effectLst/>
-        </p:spPr>
-        <p:style>
-          <a:lnRef idx="1">
-            <a:schemeClr val="accent1"/>
-          </a:lnRef>
-          <a:fillRef idx="3">
-            <a:schemeClr val="accent1"/>
-          </a:fillRef>
-          <a:effectRef idx="2">
-            <a:schemeClr val="accent1"/>
-          </a:effectRef>
-          <a:fontRef idx="minor">
-            <a:schemeClr val="lt1"/>
-          </a:fontRef>
-        </p:style>
-        <p:txBody>
-          <a:bodyPr rtlCol="0" anchor="ctr"/>
-          <a:lstStyle/>
-          <a:p>
-            <a:pPr algn="ctr"/>
-          </a:p>
-        </p:txBody>
-      </p:sp>
-      <p:sp>
-        <p:nvSpPr>
-          <p:cNvPr id="6" name="TextBox 5"/>
-          <p:cNvSpPr txBox="1"/>
-          <p:nvPr/>
-        </p:nvSpPr>
-        <p:spPr>
-          <a:xfrm>
-            <a:off x="457200" y="6355080"/>
-            <a:ext cx="11274552" cy="365760"/>
-          </a:xfrm>
-          <a:prstGeom prst="rect">
-            <a:avLst/>
-          </a:prstGeom>
-          <a:noFill/>
-        </p:spPr>
-        <p:txBody>
-          <a:bodyPr wrap="none">
-            <a:spAutoFit/>
-          </a:bodyPr>
-          <a:lstStyle/>
-          <a:p>
-            <a:pPr algn="r"/>
-            <a:r>
-              <a:rPr sz="1200">
-                <a:solidFill>
-                  <a:srgbClr val="64748B"/>
-                </a:solidFill>
-                <a:latin typeface="Calibri"/>
-              </a:rPr>
-              <a:t>Ngữ văn 10 · Bài 2: Vẻ Đẹp Của Thơ Ca          13</a:t>
-            </a:r>
-          </a:p>
-        </p:txBody>
-      </p:sp>
-      <p:sp>
-        <p:nvSpPr>
-          <p:cNvPr id="7" name="TextBox 6"/>
-          <p:cNvSpPr txBox="1"/>
-          <p:nvPr/>
-        </p:nvSpPr>
-        <p:spPr>
-          <a:xfrm>
-            <a:off x="731520" y="1463040"/>
-            <a:ext cx="10789920" cy="4572000"/>
-          </a:xfrm>
-          <a:prstGeom prst="rect">
-            <a:avLst/>
-          </a:prstGeom>
-          <a:noFill/>
-        </p:spPr>
-        <p:txBody>
-          <a:bodyPr wrap="square" anchor="t" lIns="45720" rIns="45720">
-            <a:spAutoFit/>
-          </a:bodyPr>
-          <a:lstStyle/>
-          <a:p>
-            <a:pPr algn="l">
-              <a:spcAft>
-                <a:spcPts val="800"/>
-              </a:spcAft>
-            </a:pPr>
-            <a:r>
-              <a:rPr sz="2600" b="1">
-                <a:solidFill>
-                  <a:srgbClr val="1E293B"/>
-                </a:solidFill>
-                <a:latin typeface="Calibri"/>
-              </a:rPr>
-              <a:t>Chia sẻ ấn tượng về đặc điểm hình thức, nội dung của những bài thơ Đường luật đã học ở THCS.</a:t>
-            </a:r>
-          </a:p>
-          <a:p>
-            <a:pPr algn="l">
-              <a:spcAft>
-                <a:spcPts val="800"/>
-              </a:spcAft>
-            </a:pPr>
-            <a:r>
-              <a:rPr sz="2600" b="1">
-                <a:solidFill>
-                  <a:srgbClr val="1E293B"/>
-                </a:solidFill>
-                <a:latin typeface="Calibri"/>
-              </a:rPr>
-              <a:t>Bạn đã bao giờ xa gia đình và thấy nhớ nhà?</a:t>
             </a:r>
           </a:p>
         </p:txBody>
@@ -7115,8 +7588,8 @@
         </p:nvSpPr>
         <p:spPr>
           <a:xfrm>
-            <a:off x="10253167" y="457200"/>
-            <a:ext cx="1389888" cy="457200"/>
+            <a:off x="9786823" y="457200"/>
+            <a:ext cx="1856232" cy="457200"/>
           </a:xfrm>
           <a:prstGeom prst="roundRect">
             <a:avLst/>
@@ -7155,7 +7628,7 @@
                 </a:solidFill>
                 <a:latin typeface="Arial"/>
               </a:rPr>
-              <a:t>ĐỀ BÀI</a:t>
+              <a:t>KHỞI ĐỘNG</a:t>
             </a:r>
           </a:p>
         </p:txBody>
@@ -7169,7 +7642,7 @@
         <p:spPr>
           <a:xfrm>
             <a:off x="731520" y="274320"/>
-            <a:ext cx="9582912" cy="868680"/>
+            <a:ext cx="9116568" cy="868680"/>
           </a:xfrm>
           <a:prstGeom prst="rect">
             <a:avLst/>
@@ -7189,7 +7662,7 @@
                 </a:solidFill>
                 <a:latin typeface="Arial"/>
               </a:rPr>
-              <a:t>ĐẶC ĐIỂM THƠ ĐƯỜNG LUẬT</a:t>
+              <a:t>TRƯỚC KHI ĐỌC</a:t>
             </a:r>
           </a:p>
         </p:txBody>
@@ -7282,7 +7755,7 @@
         <p:spPr>
           <a:xfrm>
             <a:off x="731520" y="1463040"/>
-            <a:ext cx="10789920" cy="3566160"/>
+            <a:ext cx="10789920" cy="4572000"/>
           </a:xfrm>
           <a:prstGeom prst="rect">
             <a:avLst/>
@@ -7307,94 +7780,23 @@
                 </a:solidFill>
                 <a:latin typeface="Calibri"/>
               </a:rPr>
-              <a:t>Mô tả một số đặc điểm cơ bản của thơ Đường luật (bố cục, gieo vần, luật bằng – trắc, phép đối) được thể hiện trong bài Thu hứng.</a:t>
-            </a:r>
-          </a:p>
-        </p:txBody>
-      </p:sp>
-      <p:sp>
-        <p:nvSpPr>
-          <p:cNvPr id="8" name="Rounded Rectangle 7"/>
-          <p:cNvSpPr/>
-          <p:nvPr/>
-        </p:nvSpPr>
-        <p:spPr>
-          <a:xfrm>
-            <a:off x="731520" y="5120640"/>
-            <a:ext cx="10789920" cy="693420"/>
-          </a:xfrm>
-          <a:prstGeom prst="roundRect">
-            <a:avLst>
-              <a:gd name="adj" fmla="val 8000"/>
-            </a:avLst>
-          </a:prstGeom>
-          <a:solidFill>
-            <a:srgbClr val="EFF4FF"/>
-          </a:solidFill>
-          <a:ln w="19050">
-            <a:solidFill>
-              <a:srgbClr val="1E40AF"/>
-            </a:solidFill>
-          </a:ln>
-          <a:effectLst/>
-        </p:spPr>
-        <p:style>
-          <a:lnRef idx="1">
-            <a:schemeClr val="accent1"/>
-          </a:lnRef>
-          <a:fillRef idx="3">
-            <a:schemeClr val="accent1"/>
-          </a:fillRef>
-          <a:effectRef idx="2">
-            <a:schemeClr val="accent1"/>
-          </a:effectRef>
-          <a:fontRef idx="minor">
-            <a:schemeClr val="lt1"/>
-          </a:fontRef>
-        </p:style>
-        <p:txBody>
-          <a:bodyPr rtlCol="0" anchor="ctr"/>
-          <a:lstStyle/>
-          <a:p>
-            <a:pPr algn="ctr"/>
-          </a:p>
-        </p:txBody>
-      </p:sp>
-      <p:sp>
-        <p:nvSpPr>
-          <p:cNvPr id="9" name="TextBox 8"/>
-          <p:cNvSpPr txBox="1"/>
-          <p:nvPr/>
-        </p:nvSpPr>
-        <p:spPr>
-          <a:xfrm>
-            <a:off x="914400" y="5120640"/>
-            <a:ext cx="10424160" cy="693420"/>
-          </a:xfrm>
-          <a:prstGeom prst="rect">
-            <a:avLst/>
-          </a:prstGeom>
-          <a:noFill/>
-        </p:spPr>
-        <p:txBody>
-          <a:bodyPr wrap="square" anchor="ctr" lIns="45720" rIns="45720">
-            <a:spAutoFit/>
-          </a:bodyPr>
-          <a:lstStyle/>
+              <a:t>Chia sẻ ấn tượng về đặc điểm hình thức, nội dung của những bài thơ Đường luật đã học ở THCS.</a:t>
+            </a:r>
+          </a:p>
           <a:p>
             <a:pPr algn="l">
               <a:spcAft>
-                <a:spcPts val="400"/>
+                <a:spcPts val="800"/>
               </a:spcAft>
             </a:pPr>
             <a:r>
-              <a:rPr sz="2200" b="1">
-                <a:solidFill>
-                  <a:srgbClr val="1E40AF"/>
+              <a:rPr sz="2600" b="1">
+                <a:solidFill>
+                  <a:srgbClr val="1E293B"/>
                 </a:solidFill>
                 <a:latin typeface="Calibri"/>
               </a:rPr>
-              <a:t>💡 Bài thơ có bao nhiêu câu, mỗi câu mấy chữ?</a:t>
+              <a:t>Bạn đã bao giờ xa gia đình và thấy nhớ nhà?</a:t>
             </a:r>
           </a:p>
         </p:txBody>
@@ -7477,8 +7879,8 @@
         </p:nvSpPr>
         <p:spPr>
           <a:xfrm>
-            <a:off x="9942271" y="457200"/>
-            <a:ext cx="1700784" cy="457200"/>
+            <a:off x="10408615" y="457200"/>
+            <a:ext cx="1234440" cy="457200"/>
           </a:xfrm>
           <a:prstGeom prst="roundRect">
             <a:avLst/>
@@ -7517,7 +7919,7 @@
                 </a:solidFill>
                 <a:latin typeface="Arial"/>
               </a:rPr>
-              <a:t>LỜI GIẢI</a:t>
+              <a:t>VIDEO</a:t>
             </a:r>
           </a:p>
         </p:txBody>
@@ -7531,7 +7933,7 @@
         <p:spPr>
           <a:xfrm>
             <a:off x="731520" y="274320"/>
-            <a:ext cx="9272016" cy="868680"/>
+            <a:ext cx="9738360" cy="868680"/>
           </a:xfrm>
           <a:prstGeom prst="rect">
             <a:avLst/>
@@ -7551,7 +7953,7 @@
                 </a:solidFill>
                 <a:latin typeface="Arial"/>
               </a:rPr>
-              <a:t>ĐẶC ĐIỂM THƠ ĐƯỜNG LUẬT</a:t>
+              <a:t>VIDEO THAM KHẢO</a:t>
             </a:r>
           </a:p>
         </p:txBody>
@@ -7635,16 +8037,40 @@
           </a:p>
         </p:txBody>
       </p:sp>
-      <p:sp>
-        <p:nvSpPr>
-          <p:cNvPr id="7" name="TextBox 6"/>
+      <p:pic>
+        <p:nvPicPr>
+          <p:cNvPr id="7" name="Picture 6" descr="QR_video_WJr3ux-UmG4.png"/>
+          <p:cNvPicPr>
+            <a:picLocks noChangeAspect="1"/>
+          </p:cNvPicPr>
+          <p:nvPr/>
+        </p:nvPicPr>
+        <p:blipFill>
+          <a:blip r:embed="rId2"/>
+          <a:stretch>
+            <a:fillRect/>
+          </a:stretch>
+        </p:blipFill>
+        <p:spPr>
+          <a:xfrm>
+            <a:off x="8412480" y="1554480"/>
+            <a:ext cx="3108960" cy="3108960"/>
+          </a:xfrm>
+          <a:prstGeom prst="rect">
+            <a:avLst/>
+          </a:prstGeom>
+        </p:spPr>
+      </p:pic>
+      <p:sp>
+        <p:nvSpPr>
+          <p:cNvPr id="8" name="TextBox 7"/>
           <p:cNvSpPr txBox="1"/>
           <p:nvPr/>
         </p:nvSpPr>
         <p:spPr>
           <a:xfrm>
-            <a:off x="731520" y="1463040"/>
-            <a:ext cx="10789920" cy="3474720"/>
+            <a:off x="731520" y="1554480"/>
+            <a:ext cx="7498079" cy="4206240"/>
           </a:xfrm>
           <a:prstGeom prst="rect">
             <a:avLst/>
@@ -7656,6 +8082,38 @@
             <a:spAutoFit/>
           </a:bodyPr>
           <a:lstStyle/>
+          <a:p>
+            <a:pPr algn="l">
+              <a:spcAft>
+                <a:spcPts val="800"/>
+              </a:spcAft>
+            </a:pPr>
+            <a:r>
+              <a:rPr sz="2600" b="1">
+                <a:solidFill>
+                  <a:srgbClr val="1E293B"/>
+                </a:solidFill>
+                <a:latin typeface="Calibri"/>
+              </a:rPr>
+              <a:t>🎬 Cảm xúc mùa thu (Thu hứng bài 1, Đỗ Phủ) – Ngữ văn 10 KNTT</a:t>
+            </a:r>
+          </a:p>
+          <a:p>
+            <a:pPr algn="l">
+              <a:spcAft>
+                <a:spcPts val="800"/>
+              </a:spcAft>
+            </a:pPr>
+            <a:r>
+              <a:rPr sz="2000">
+                <a:solidFill>
+                  <a:srgbClr val="64748B"/>
+                </a:solidFill>
+                <a:latin typeface="Calibri"/>
+              </a:rPr>
+              <a:t>Kênh: Học liệu số giáo dục</a:t>
+            </a:r>
+          </a:p>
           <a:p>
             <a:pPr algn="l" marL="365760" indent="-365760">
               <a:spcAft>
@@ -7668,163 +8126,30 @@
               <a:buChar char="•"/>
             </a:pPr>
             <a:r>
-              <a:rPr sz="2300">
+              <a:rPr sz="2000">
                 <a:solidFill>
                   <a:srgbClr val="1E293B"/>
                 </a:solidFill>
                 <a:latin typeface="Calibri"/>
               </a:rPr>
-              <a:t>Thất ngôn bát cú: 8 câu, mỗi câu 7 chữ.</a:t>
-            </a:r>
-          </a:p>
-          <a:p>
-            <a:pPr algn="l" marL="365760" indent="-365760">
+              <a:t>Đọc, tìm hiểu Thu hứng</a:t>
+            </a:r>
+          </a:p>
+          <a:p>
+            <a:pPr algn="l">
               <a:spcAft>
                 <a:spcPts val="800"/>
               </a:spcAft>
-              <a:buClr>
-                <a:srgbClr val="1E40AF"/>
-              </a:buClr>
-              <a:buFont typeface="Arial"/>
-              <a:buChar char="•"/>
             </a:pPr>
             <a:r>
-              <a:rPr sz="2300">
-                <a:solidFill>
-                  <a:srgbClr val="1E293B"/>
+              <a:rPr sz="1600">
+                <a:solidFill>
+                  <a:srgbClr val="64748B"/>
                 </a:solidFill>
                 <a:latin typeface="Calibri"/>
-              </a:rPr>
-              <a:t>Bố cục đề – thực – luận – kết.</a:t>
-            </a:r>
-          </a:p>
-          <a:p>
-            <a:pPr algn="l" marL="365760" indent="-365760">
-              <a:spcAft>
-                <a:spcPts val="800"/>
-              </a:spcAft>
-              <a:buClr>
-                <a:srgbClr val="1E40AF"/>
-              </a:buClr>
-              <a:buFont typeface="Arial"/>
-              <a:buChar char="•"/>
-            </a:pPr>
-            <a:r>
-              <a:rPr sz="2300">
-                <a:solidFill>
-                  <a:srgbClr val="1E293B"/>
-                </a:solidFill>
-                <a:latin typeface="Calibri"/>
-              </a:rPr>
-              <a:t>Gieo một vần bằng ở câu 1, 2, 4, 6, 8.</a:t>
-            </a:r>
-          </a:p>
-          <a:p>
-            <a:pPr algn="l" marL="365760" indent="-365760">
-              <a:spcAft>
-                <a:spcPts val="800"/>
-              </a:spcAft>
-              <a:buClr>
-                <a:srgbClr val="1E40AF"/>
-              </a:buClr>
-              <a:buFont typeface="Arial"/>
-              <a:buChar char="•"/>
-            </a:pPr>
-            <a:r>
-              <a:rPr sz="2300">
-                <a:solidFill>
-                  <a:srgbClr val="1E293B"/>
-                </a:solidFill>
-                <a:latin typeface="Calibri"/>
-              </a:rPr>
-              <a:t>Đối ở câu 3 – 4 và 5 – 6.</a:t>
-            </a:r>
-          </a:p>
-        </p:txBody>
-      </p:sp>
-      <p:sp>
-        <p:nvSpPr>
-          <p:cNvPr id="8" name="Rounded Rectangle 7"/>
-          <p:cNvSpPr/>
-          <p:nvPr/>
-        </p:nvSpPr>
-        <p:spPr>
-          <a:xfrm>
-            <a:off x="731520" y="5074920"/>
-            <a:ext cx="10789920" cy="731520"/>
-          </a:xfrm>
-          <a:prstGeom prst="roundRect">
-            <a:avLst>
-              <a:gd name="adj" fmla="val 8000"/>
-            </a:avLst>
-          </a:prstGeom>
-          <a:solidFill>
-            <a:srgbClr val="FEF2F2"/>
-          </a:solidFill>
-          <a:ln w="19050">
-            <a:solidFill>
-              <a:srgbClr val="991B1B"/>
-            </a:solidFill>
-          </a:ln>
-          <a:effectLst/>
-        </p:spPr>
-        <p:style>
-          <a:lnRef idx="1">
-            <a:schemeClr val="accent1"/>
-          </a:lnRef>
-          <a:fillRef idx="3">
-            <a:schemeClr val="accent1"/>
-          </a:fillRef>
-          <a:effectRef idx="2">
-            <a:schemeClr val="accent1"/>
-          </a:effectRef>
-          <a:fontRef idx="minor">
-            <a:schemeClr val="lt1"/>
-          </a:fontRef>
-        </p:style>
-        <p:txBody>
-          <a:bodyPr rtlCol="0" anchor="ctr"/>
-          <a:lstStyle/>
-          <a:p>
-            <a:pPr algn="ctr"/>
-          </a:p>
-        </p:txBody>
-      </p:sp>
-      <p:sp>
-        <p:nvSpPr>
-          <p:cNvPr id="9" name="TextBox 8"/>
-          <p:cNvSpPr txBox="1"/>
-          <p:nvPr/>
-        </p:nvSpPr>
-        <p:spPr>
-          <a:xfrm>
-            <a:off x="914400" y="5074920"/>
-            <a:ext cx="10424160" cy="731520"/>
-          </a:xfrm>
-          <a:prstGeom prst="rect">
-            <a:avLst/>
-          </a:prstGeom>
-          <a:noFill/>
-        </p:spPr>
-        <p:txBody>
-          <a:bodyPr wrap="square" anchor="ctr" lIns="45720" rIns="45720">
-            <a:spAutoFit/>
-          </a:bodyPr>
-          <a:lstStyle/>
-          <a:p>
-            <a:pPr algn="l">
-              <a:spcAft>
-                <a:spcPts val="400"/>
-              </a:spcAft>
-            </a:pPr>
-            <a:r>
-              <a:rPr sz="2400" b="1">
-                <a:solidFill>
-                  <a:srgbClr val="991B1B"/>
-                </a:solidFill>
-                <a:latin typeface="Calibri"/>
-              </a:rPr>
-              <a:t>Thi luật chặt chẽ, cân đối, hài hoà.</a:t>
+                <a:hlinkClick r:id="rId3"/>
+              </a:rPr>
+              <a:t>https://www.youtube.com/watch?v=WJr3ux-UmG4</a:t>
             </a:r>
           </a:p>
         </p:txBody>
@@ -7981,7 +8306,7 @@
                 </a:solidFill>
                 <a:latin typeface="Arial"/>
               </a:rPr>
-              <a:t>CẢNH THU TRONG BỐN CÂU ĐẦU</a:t>
+              <a:t>ĐẶC ĐIỂM THƠ ĐƯỜNG LUẬT</a:t>
             </a:r>
           </a:p>
         </p:txBody>
@@ -8099,7 +8424,7 @@
                 </a:solidFill>
                 <a:latin typeface="Calibri"/>
               </a:rPr>
-              <a:t>Những hình ảnh và từ ngữ nào gợi không khí cảnh thu trong bốn câu đầu? Khung cảnh ấy gợi cho bạn ấn tượng gì?</a:t>
+              <a:t>Mô tả một số đặc điểm cơ bản của thơ Đường luật (bố cục, gieo vần, luật bằng – trắc, phép đối) được thể hiện trong bài Thu hứng.</a:t>
             </a:r>
           </a:p>
         </p:txBody>
@@ -8186,7 +8511,7 @@
                 </a:solidFill>
                 <a:latin typeface="Calibri"/>
               </a:rPr>
-              <a:t>💡 Chú ý không gian cao – thấp, gần – xa.</a:t>
+              <a:t>💡 Bài thơ có bao nhiêu câu, mỗi câu mấy chữ?</a:t>
             </a:r>
           </a:p>
         </p:txBody>
@@ -8343,7 +8668,7 @@
                 </a:solidFill>
                 <a:latin typeface="Arial"/>
               </a:rPr>
-              <a:t>CẢNH THU TRONG BỐN CÂU ĐẦU</a:t>
+              <a:t>ĐẶC ĐIỂM THƠ ĐƯỜNG LUẬT</a:t>
             </a:r>
           </a:p>
         </p:txBody>
@@ -8466,7 +8791,7 @@
                 </a:solidFill>
                 <a:latin typeface="Calibri"/>
               </a:rPr>
-              <a:t>Rừng phong tiêu điều, sương móc trắng xoá.</a:t>
+              <a:t>Thất ngôn bát cú: 8 câu, mỗi câu 7 chữ.</a:t>
             </a:r>
           </a:p>
           <a:p>
@@ -8487,7 +8812,7 @@
                 </a:solidFill>
                 <a:latin typeface="Calibri"/>
               </a:rPr>
-              <a:t>Núi Vu, kẽm Vu hơi thu hiu hắt.</a:t>
+              <a:t>Bố cục đề – thực – luận – kết.</a:t>
             </a:r>
           </a:p>
           <a:p>
@@ -8508,7 +8833,28 @@
                 </a:solidFill>
                 <a:latin typeface="Calibri"/>
               </a:rPr>
-              <a:t>Sóng vọt lưng trời, mây sà mặt đất.</a:t>
+              <a:t>Gieo một vần bằng ở câu 1, 2, 4, 6, 8.</a:t>
+            </a:r>
+          </a:p>
+          <a:p>
+            <a:pPr algn="l" marL="365760" indent="-365760">
+              <a:spcAft>
+                <a:spcPts val="800"/>
+              </a:spcAft>
+              <a:buClr>
+                <a:srgbClr val="1E40AF"/>
+              </a:buClr>
+              <a:buFont typeface="Arial"/>
+              <a:buChar char="•"/>
+            </a:pPr>
+            <a:r>
+              <a:rPr sz="2300">
+                <a:solidFill>
+                  <a:srgbClr val="1E293B"/>
+                </a:solidFill>
+                <a:latin typeface="Calibri"/>
+              </a:rPr>
+              <a:t>Đối ở câu 3 – 4 và 5 – 6.</a:t>
             </a:r>
           </a:p>
         </p:txBody>
@@ -8595,7 +8941,7 @@
                 </a:solidFill>
                 <a:latin typeface="Calibri"/>
               </a:rPr>
-              <a:t>Cảnh thu hùng vĩ mà ảm đạm – gợi thời thế loạn li.</a:t>
+              <a:t>Thi luật chặt chẽ, cân đối, hài hoà.</a:t>
             </a:r>
           </a:p>
         </p:txBody>
@@ -8752,7 +9098,7 @@
                 </a:solidFill>
                 <a:latin typeface="Arial"/>
               </a:rPr>
-              <a:t>TÂM TRẠNG NHÂN VẬT TRỮ TÌNH</a:t>
+              <a:t>CẢNH THU TRONG BỐN CÂU ĐẦU</a:t>
             </a:r>
           </a:p>
         </p:txBody>
@@ -8870,7 +9216,7 @@
                 </a:solidFill>
                 <a:latin typeface="Calibri"/>
               </a:rPr>
-              <a:t>Qua hai câu 5 – 6 và hai câu kết, người đọc nhận biết được điều gì về nhân vật trữ tình?</a:t>
+              <a:t>Những hình ảnh và từ ngữ nào gợi không khí cảnh thu trong bốn câu đầu? Khung cảnh ấy gợi cho bạn ấn tượng gì?</a:t>
             </a:r>
           </a:p>
         </p:txBody>
@@ -8957,7 +9303,7 @@
                 </a:solidFill>
                 <a:latin typeface="Calibri"/>
               </a:rPr>
-              <a:t>💡 “Lệ cũ”, “tình nhà”, tiếng chày đập vải…</a:t>
+              <a:t>💡 Chú ý không gian cao – thấp, gần – xa.</a:t>
             </a:r>
           </a:p>
         </p:txBody>
@@ -9114,7 +9460,7 @@
                 </a:solidFill>
                 <a:latin typeface="Arial"/>
               </a:rPr>
-              <a:t>TÂM TRẠNG NHÂN VẬT TRỮ TÌNH</a:t>
+              <a:t>CẢNH THU TRONG BỐN CÂU ĐẦU</a:t>
             </a:r>
           </a:p>
         </p:txBody>
@@ -9237,7 +9583,7 @@
                 </a:solidFill>
                 <a:latin typeface="Calibri"/>
               </a:rPr>
-              <a:t>Khóm cúc nở hai lần – hai năm xa quê; “lệ cũ” tuôn rơi.</a:t>
+              <a:t>Rừng phong tiêu điều, sương móc trắng xoá.</a:t>
             </a:r>
           </a:p>
           <a:p>
@@ -9258,7 +9604,7 @@
                 </a:solidFill>
                 <a:latin typeface="Calibri"/>
               </a:rPr>
-              <a:t>Con thuyền buộc chặt tấm lòng nhớ vườn cũ.</a:t>
+              <a:t>Núi Vu, kẽm Vu hơi thu hiu hắt.</a:t>
             </a:r>
           </a:p>
           <a:p>
@@ -9279,7 +9625,7 @@
                 </a:solidFill>
                 <a:latin typeface="Calibri"/>
               </a:rPr>
-              <a:t>Tiếng dao thước, tiếng chày dồn dập → nỗi nhớ nhà da diết.</a:t>
+              <a:t>Sóng vọt lưng trời, mây sà mặt đất.</a:t>
             </a:r>
           </a:p>
         </p:txBody>
@@ -9366,7 +9712,7 @@
                 </a:solidFill>
                 <a:latin typeface="Calibri"/>
               </a:rPr>
-              <a:t>Nỗi nhớ quê, nỗi buồn thân phận tha hương.</a:t>
+              <a:t>Cảnh thu hùng vĩ mà ảm đạm – gợi thời thế loạn li.</a:t>
             </a:r>
           </a:p>
         </p:txBody>
@@ -9908,7 +10254,7 @@
                 </a:solidFill>
                 <a:latin typeface="Arial"/>
               </a:rPr>
-              <a:t>CHỈ LÀ NỖI NIỀM CÁ NHÂN?</a:t>
+              <a:t>TÂM TRẠNG NHÂN VẬT TRỮ TÌNH</a:t>
             </a:r>
           </a:p>
         </p:txBody>
@@ -10026,7 +10372,7 @@
                 </a:solidFill>
                 <a:latin typeface="Calibri"/>
               </a:rPr>
-              <a:t>Thu hứng viết trong hoàn cảnh đặc biệt của cuộc đời Đỗ Phủ. Phải chăng tác phẩm chỉ thể hiện nỗi niềm thân phận cá nhân?</a:t>
+              <a:t>Qua hai câu 5 – 6 và hai câu kết, người đọc nhận biết được điều gì về nhân vật trữ tình?</a:t>
             </a:r>
           </a:p>
         </p:txBody>
@@ -10113,7 +10459,7 @@
                 </a:solidFill>
                 <a:latin typeface="Calibri"/>
               </a:rPr>
-              <a:t>💡 Liên hệ hoàn cảnh sau loạn An – Sử.</a:t>
+              <a:t>💡 “Lệ cũ”, “tình nhà”, tiếng chày đập vải…</a:t>
             </a:r>
           </a:p>
         </p:txBody>
@@ -10270,7 +10616,7 @@
                 </a:solidFill>
                 <a:latin typeface="Arial"/>
               </a:rPr>
-              <a:t>CHỈ LÀ NỖI NIỀM CÁ NHÂN?</a:t>
+              <a:t>TÂM TRẠNG NHÂN VẬT TRỮ TÌNH</a:t>
             </a:r>
           </a:p>
         </p:txBody>
@@ -10393,7 +10739,7 @@
                 </a:solidFill>
                 <a:latin typeface="Calibri"/>
               </a:rPr>
-              <a:t>Nỗi niềm cá nhân gắn với nỗi đau thời thế, đất nước loạn li.</a:t>
+              <a:t>Khóm cúc nở hai lần – hai năm xa quê; “lệ cũ” tuôn rơi.</a:t>
             </a:r>
           </a:p>
           <a:p>
@@ -10414,7 +10760,7 @@
                 </a:solidFill>
                 <a:latin typeface="Calibri"/>
               </a:rPr>
-              <a:t>Cảnh thu u uất – hình ảnh thời cuộc.</a:t>
+              <a:t>Con thuyền buộc chặt tấm lòng nhớ vườn cũ.</a:t>
             </a:r>
           </a:p>
           <a:p>
@@ -10435,7 +10781,7 @@
                 </a:solidFill>
                 <a:latin typeface="Calibri"/>
               </a:rPr>
-              <a:t>Tấm lòng yêu nước, thương đời của Thi thánh.</a:t>
+              <a:t>Tiếng dao thước, tiếng chày dồn dập → nỗi nhớ nhà da diết.</a:t>
             </a:r>
           </a:p>
         </p:txBody>
@@ -10522,7 +10868,7 @@
                 </a:solidFill>
                 <a:latin typeface="Calibri"/>
               </a:rPr>
-              <a:t>Tả cảnh ngụ tình; cá nhân hoà vào thời đại.</a:t>
+              <a:t>Nỗi nhớ quê, nỗi buồn thân phận tha hương.</a:t>
             </a:r>
           </a:p>
         </p:txBody>
@@ -10541,7 +10887,7 @@
     <p:bg>
       <p:bgPr>
         <a:solidFill>
-          <a:srgbClr val="F8F9FA"/>
+          <a:srgbClr val="FFFFFF"/>
         </a:solidFill>
         <a:effectLst/>
       </p:bgPr>
@@ -10561,14 +10907,14 @@
         </p:nvSpPr>
         <p:spPr>
           <a:xfrm>
-            <a:off x="548640" y="2926080"/>
-            <a:ext cx="164592" cy="1005840"/>
+            <a:off x="457200" y="384048"/>
+            <a:ext cx="109728" cy="658368"/>
           </a:xfrm>
           <a:prstGeom prst="rect">
             <a:avLst/>
           </a:prstGeom>
           <a:solidFill>
-            <a:srgbClr val="991B1B"/>
+            <a:srgbClr val="1E40AF"/>
           </a:solidFill>
           <a:ln>
             <a:noFill/>
@@ -10599,14 +10945,67 @@
       </p:sp>
       <p:sp>
         <p:nvSpPr>
-          <p:cNvPr id="3" name="TextBox 2"/>
+          <p:cNvPr id="3" name="Rounded Rectangle 2"/>
+          <p:cNvSpPr/>
+          <p:nvPr/>
+        </p:nvSpPr>
+        <p:spPr>
+          <a:xfrm>
+            <a:off x="10253167" y="457200"/>
+            <a:ext cx="1389888" cy="457200"/>
+          </a:xfrm>
+          <a:prstGeom prst="roundRect">
+            <a:avLst/>
+          </a:prstGeom>
+          <a:solidFill>
+            <a:srgbClr val="1E40AF"/>
+          </a:solidFill>
+          <a:ln>
+            <a:noFill/>
+          </a:ln>
+          <a:effectLst/>
+        </p:spPr>
+        <p:style>
+          <a:lnRef idx="1">
+            <a:schemeClr val="accent1"/>
+          </a:lnRef>
+          <a:fillRef idx="3">
+            <a:schemeClr val="accent1"/>
+          </a:fillRef>
+          <a:effectRef idx="2">
+            <a:schemeClr val="accent1"/>
+          </a:effectRef>
+          <a:fontRef idx="minor">
+            <a:schemeClr val="lt1"/>
+          </a:fontRef>
+        </p:style>
+        <p:txBody>
+          <a:bodyPr rtlCol="0" anchor="ctr" wrap="none" tIns="0" bIns="0"/>
+          <a:lstStyle/>
+          <a:p>
+            <a:pPr algn="ctr"/>
+            <a:r>
+              <a:rPr sz="1400" b="1">
+                <a:solidFill>
+                  <a:srgbClr val="FFFFFF"/>
+                </a:solidFill>
+                <a:latin typeface="Arial"/>
+              </a:rPr>
+              <a:t>ĐỀ BÀI</a:t>
+            </a:r>
+          </a:p>
+        </p:txBody>
+      </p:sp>
+      <p:sp>
+        <p:nvSpPr>
+          <p:cNvPr id="4" name="TextBox 3"/>
           <p:cNvSpPr txBox="1"/>
           <p:nvPr/>
         </p:nvSpPr>
         <p:spPr>
           <a:xfrm>
-            <a:off x="914400" y="2743200"/>
-            <a:ext cx="10515600" cy="1371600"/>
+            <a:off x="731520" y="274320"/>
+            <a:ext cx="9582912" cy="868680"/>
           </a:xfrm>
           <a:prstGeom prst="rect">
             <a:avLst/>
@@ -10614,7 +11013,120 @@
           <a:noFill/>
         </p:spPr>
         <p:txBody>
-          <a:bodyPr wrap="square" anchor="ctr" lIns="45720" rIns="45720">
+          <a:bodyPr wrap="square" anchor="ctr">
+            <a:spAutoFit/>
+          </a:bodyPr>
+          <a:lstStyle/>
+          <a:p>
+            <a:r>
+              <a:rPr sz="3600" b="1">
+                <a:solidFill>
+                  <a:srgbClr val="1E40AF"/>
+                </a:solidFill>
+                <a:latin typeface="Arial"/>
+              </a:rPr>
+              <a:t>CHỈ LÀ NỖI NIỀM CÁ NHÂN?</a:t>
+            </a:r>
+          </a:p>
+        </p:txBody>
+      </p:sp>
+      <p:sp>
+        <p:nvSpPr>
+          <p:cNvPr id="5" name="Rectangle 4"/>
+          <p:cNvSpPr/>
+          <p:nvPr/>
+        </p:nvSpPr>
+        <p:spPr>
+          <a:xfrm>
+            <a:off x="457200" y="1207008"/>
+            <a:ext cx="11274552" cy="22000"/>
+          </a:xfrm>
+          <a:prstGeom prst="rect">
+            <a:avLst/>
+          </a:prstGeom>
+          <a:solidFill>
+            <a:srgbClr val="E2E8F0"/>
+          </a:solidFill>
+          <a:ln>
+            <a:noFill/>
+          </a:ln>
+          <a:effectLst/>
+        </p:spPr>
+        <p:style>
+          <a:lnRef idx="1">
+            <a:schemeClr val="accent1"/>
+          </a:lnRef>
+          <a:fillRef idx="3">
+            <a:schemeClr val="accent1"/>
+          </a:fillRef>
+          <a:effectRef idx="2">
+            <a:schemeClr val="accent1"/>
+          </a:effectRef>
+          <a:fontRef idx="minor">
+            <a:schemeClr val="lt1"/>
+          </a:fontRef>
+        </p:style>
+        <p:txBody>
+          <a:bodyPr rtlCol="0" anchor="ctr"/>
+          <a:lstStyle/>
+          <a:p>
+            <a:pPr algn="ctr"/>
+          </a:p>
+        </p:txBody>
+      </p:sp>
+      <p:sp>
+        <p:nvSpPr>
+          <p:cNvPr id="6" name="TextBox 5"/>
+          <p:cNvSpPr txBox="1"/>
+          <p:nvPr/>
+        </p:nvSpPr>
+        <p:spPr>
+          <a:xfrm>
+            <a:off x="457200" y="6355080"/>
+            <a:ext cx="11274552" cy="365760"/>
+          </a:xfrm>
+          <a:prstGeom prst="rect">
+            <a:avLst/>
+          </a:prstGeom>
+          <a:noFill/>
+        </p:spPr>
+        <p:txBody>
+          <a:bodyPr wrap="none">
+            <a:spAutoFit/>
+          </a:bodyPr>
+          <a:lstStyle/>
+          <a:p>
+            <a:pPr algn="r"/>
+            <a:r>
+              <a:rPr sz="1200">
+                <a:solidFill>
+                  <a:srgbClr val="64748B"/>
+                </a:solidFill>
+                <a:latin typeface="Calibri"/>
+              </a:rPr>
+              <a:t>Ngữ văn 10 · Bài 2: Vẻ Đẹp Của Thơ Ca          22</a:t>
+            </a:r>
+          </a:p>
+        </p:txBody>
+      </p:sp>
+      <p:sp>
+        <p:nvSpPr>
+          <p:cNvPr id="7" name="TextBox 6"/>
+          <p:cNvSpPr txBox="1"/>
+          <p:nvPr/>
+        </p:nvSpPr>
+        <p:spPr>
+          <a:xfrm>
+            <a:off x="731520" y="1463040"/>
+            <a:ext cx="10789920" cy="3566160"/>
+          </a:xfrm>
+          <a:prstGeom prst="rect">
+            <a:avLst/>
+          </a:prstGeom>
+          <a:noFill/>
+        </p:spPr>
+        <p:txBody>
+          <a:bodyPr wrap="square" anchor="t" lIns="45720" rIns="45720">
             <a:spAutoFit/>
           </a:bodyPr>
           <a:lstStyle/>
@@ -10625,13 +11137,100 @@
               </a:spcAft>
             </a:pPr>
             <a:r>
-              <a:rPr sz="3600" b="1">
+              <a:rPr sz="2600" b="1">
+                <a:solidFill>
+                  <a:srgbClr val="1E293B"/>
+                </a:solidFill>
+                <a:latin typeface="Calibri"/>
+              </a:rPr>
+              <a:t>Thu hứng viết trong hoàn cảnh đặc biệt của cuộc đời Đỗ Phủ. Phải chăng tác phẩm chỉ thể hiện nỗi niềm thân phận cá nhân?</a:t>
+            </a:r>
+          </a:p>
+        </p:txBody>
+      </p:sp>
+      <p:sp>
+        <p:nvSpPr>
+          <p:cNvPr id="8" name="Rounded Rectangle 7"/>
+          <p:cNvSpPr/>
+          <p:nvPr/>
+        </p:nvSpPr>
+        <p:spPr>
+          <a:xfrm>
+            <a:off x="731520" y="5120640"/>
+            <a:ext cx="10789920" cy="693420"/>
+          </a:xfrm>
+          <a:prstGeom prst="roundRect">
+            <a:avLst>
+              <a:gd name="adj" fmla="val 8000"/>
+            </a:avLst>
+          </a:prstGeom>
+          <a:solidFill>
+            <a:srgbClr val="EFF4FF"/>
+          </a:solidFill>
+          <a:ln w="19050">
+            <a:solidFill>
+              <a:srgbClr val="1E40AF"/>
+            </a:solidFill>
+          </a:ln>
+          <a:effectLst/>
+        </p:spPr>
+        <p:style>
+          <a:lnRef idx="1">
+            <a:schemeClr val="accent1"/>
+          </a:lnRef>
+          <a:fillRef idx="3">
+            <a:schemeClr val="accent1"/>
+          </a:fillRef>
+          <a:effectRef idx="2">
+            <a:schemeClr val="accent1"/>
+          </a:effectRef>
+          <a:fontRef idx="minor">
+            <a:schemeClr val="lt1"/>
+          </a:fontRef>
+        </p:style>
+        <p:txBody>
+          <a:bodyPr rtlCol="0" anchor="ctr"/>
+          <a:lstStyle/>
+          <a:p>
+            <a:pPr algn="ctr"/>
+          </a:p>
+        </p:txBody>
+      </p:sp>
+      <p:sp>
+        <p:nvSpPr>
+          <p:cNvPr id="9" name="TextBox 8"/>
+          <p:cNvSpPr txBox="1"/>
+          <p:nvPr/>
+        </p:nvSpPr>
+        <p:spPr>
+          <a:xfrm>
+            <a:off x="914400" y="5120640"/>
+            <a:ext cx="10424160" cy="693420"/>
+          </a:xfrm>
+          <a:prstGeom prst="rect">
+            <a:avLst/>
+          </a:prstGeom>
+          <a:noFill/>
+        </p:spPr>
+        <p:txBody>
+          <a:bodyPr wrap="square" anchor="ctr" lIns="45720" rIns="45720">
+            <a:spAutoFit/>
+          </a:bodyPr>
+          <a:lstStyle/>
+          <a:p>
+            <a:pPr algn="l">
+              <a:spcAft>
+                <a:spcPts val="400"/>
+              </a:spcAft>
+            </a:pPr>
+            <a:r>
+              <a:rPr sz="2200" b="1">
                 <a:solidFill>
                   <a:srgbClr val="1E40AF"/>
                 </a:solidFill>
                 <a:latin typeface="Calibri"/>
               </a:rPr>
-              <a:t>TIẾT 15 – 16: MÙA XUÂN CHÍN (Hàn Mặc Tử)</a:t>
+              <a:t>💡 Liên hệ hoàn cảnh sau loạn An – Sử.</a:t>
             </a:r>
           </a:p>
         </p:txBody>
@@ -10714,14 +11313,14 @@
         </p:nvSpPr>
         <p:spPr>
           <a:xfrm>
-            <a:off x="9786823" y="457200"/>
-            <a:ext cx="1856232" cy="457200"/>
+            <a:off x="9942271" y="457200"/>
+            <a:ext cx="1700784" cy="457200"/>
           </a:xfrm>
           <a:prstGeom prst="roundRect">
             <a:avLst/>
           </a:prstGeom>
           <a:solidFill>
-            <a:srgbClr val="1E40AF"/>
+            <a:srgbClr val="991B1B"/>
           </a:solidFill>
           <a:ln>
             <a:noFill/>
@@ -10754,7 +11353,7 @@
                 </a:solidFill>
                 <a:latin typeface="Arial"/>
               </a:rPr>
-              <a:t>KHỞI ĐỘNG</a:t>
+              <a:t>LỜI GIẢI</a:t>
             </a:r>
           </a:p>
         </p:txBody>
@@ -10768,7 +11367,7 @@
         <p:spPr>
           <a:xfrm>
             <a:off x="731520" y="274320"/>
-            <a:ext cx="9116568" cy="868680"/>
+            <a:ext cx="9272016" cy="868680"/>
           </a:xfrm>
           <a:prstGeom prst="rect">
             <a:avLst/>
@@ -10788,7 +11387,7 @@
                 </a:solidFill>
                 <a:latin typeface="Arial"/>
               </a:rPr>
-              <a:t>TRƯỚC KHI ĐỌC</a:t>
+              <a:t>CHỈ LÀ NỖI NIỀM CÁ NHÂN?</a:t>
             </a:r>
           </a:p>
         </p:txBody>
@@ -10881,7 +11480,7 @@
         <p:spPr>
           <a:xfrm>
             <a:off x="731520" y="1463040"/>
-            <a:ext cx="10789920" cy="4572000"/>
+            <a:ext cx="10789920" cy="3474720"/>
           </a:xfrm>
           <a:prstGeom prst="rect">
             <a:avLst/>
@@ -10894,35 +11493,153 @@
           </a:bodyPr>
           <a:lstStyle/>
           <a:p>
-            <a:pPr algn="l">
+            <a:pPr algn="l" marL="365760" indent="-365760">
               <a:spcAft>
                 <a:spcPts val="800"/>
               </a:spcAft>
+              <a:buClr>
+                <a:srgbClr val="1E40AF"/>
+              </a:buClr>
+              <a:buFont typeface="Arial"/>
+              <a:buChar char="•"/>
             </a:pPr>
             <a:r>
-              <a:rPr sz="2600" b="1">
+              <a:rPr sz="2300">
                 <a:solidFill>
                   <a:srgbClr val="1E293B"/>
                 </a:solidFill>
                 <a:latin typeface="Calibri"/>
               </a:rPr>
-              <a:t>Bạn nhớ những bài thơ, câu thơ nào về mùa xuân?</a:t>
-            </a:r>
-          </a:p>
-          <a:p>
-            <a:pPr algn="l">
+              <a:t>Nỗi niềm cá nhân gắn với nỗi đau thời thế, đất nước loạn li.</a:t>
+            </a:r>
+          </a:p>
+          <a:p>
+            <a:pPr algn="l" marL="365760" indent="-365760">
               <a:spcAft>
                 <a:spcPts val="800"/>
               </a:spcAft>
+              <a:buClr>
+                <a:srgbClr val="1E40AF"/>
+              </a:buClr>
+              <a:buFont typeface="Arial"/>
+              <a:buChar char="•"/>
             </a:pPr>
             <a:r>
-              <a:rPr sz="2600" b="1">
+              <a:rPr sz="2300">
                 <a:solidFill>
                   <a:srgbClr val="1E293B"/>
                 </a:solidFill>
                 <a:latin typeface="Calibri"/>
               </a:rPr>
-              <a:t>Điều gì khiến bạn ấn tượng ở những câu thơ ấy?</a:t>
+              <a:t>Cảnh thu u uất – hình ảnh thời cuộc.</a:t>
+            </a:r>
+          </a:p>
+          <a:p>
+            <a:pPr algn="l" marL="365760" indent="-365760">
+              <a:spcAft>
+                <a:spcPts val="800"/>
+              </a:spcAft>
+              <a:buClr>
+                <a:srgbClr val="1E40AF"/>
+              </a:buClr>
+              <a:buFont typeface="Arial"/>
+              <a:buChar char="•"/>
+            </a:pPr>
+            <a:r>
+              <a:rPr sz="2300">
+                <a:solidFill>
+                  <a:srgbClr val="1E293B"/>
+                </a:solidFill>
+                <a:latin typeface="Calibri"/>
+              </a:rPr>
+              <a:t>Tấm lòng yêu nước, thương đời của Thi thánh.</a:t>
+            </a:r>
+          </a:p>
+        </p:txBody>
+      </p:sp>
+      <p:sp>
+        <p:nvSpPr>
+          <p:cNvPr id="8" name="Rounded Rectangle 7"/>
+          <p:cNvSpPr/>
+          <p:nvPr/>
+        </p:nvSpPr>
+        <p:spPr>
+          <a:xfrm>
+            <a:off x="731520" y="5074920"/>
+            <a:ext cx="10789920" cy="731520"/>
+          </a:xfrm>
+          <a:prstGeom prst="roundRect">
+            <a:avLst>
+              <a:gd name="adj" fmla="val 8000"/>
+            </a:avLst>
+          </a:prstGeom>
+          <a:solidFill>
+            <a:srgbClr val="FEF2F2"/>
+          </a:solidFill>
+          <a:ln w="19050">
+            <a:solidFill>
+              <a:srgbClr val="991B1B"/>
+            </a:solidFill>
+          </a:ln>
+          <a:effectLst/>
+        </p:spPr>
+        <p:style>
+          <a:lnRef idx="1">
+            <a:schemeClr val="accent1"/>
+          </a:lnRef>
+          <a:fillRef idx="3">
+            <a:schemeClr val="accent1"/>
+          </a:fillRef>
+          <a:effectRef idx="2">
+            <a:schemeClr val="accent1"/>
+          </a:effectRef>
+          <a:fontRef idx="minor">
+            <a:schemeClr val="lt1"/>
+          </a:fontRef>
+        </p:style>
+        <p:txBody>
+          <a:bodyPr rtlCol="0" anchor="ctr"/>
+          <a:lstStyle/>
+          <a:p>
+            <a:pPr algn="ctr"/>
+          </a:p>
+        </p:txBody>
+      </p:sp>
+      <p:sp>
+        <p:nvSpPr>
+          <p:cNvPr id="9" name="TextBox 8"/>
+          <p:cNvSpPr txBox="1"/>
+          <p:nvPr/>
+        </p:nvSpPr>
+        <p:spPr>
+          <a:xfrm>
+            <a:off x="914400" y="5074920"/>
+            <a:ext cx="10424160" cy="731520"/>
+          </a:xfrm>
+          <a:prstGeom prst="rect">
+            <a:avLst/>
+          </a:prstGeom>
+          <a:noFill/>
+        </p:spPr>
+        <p:txBody>
+          <a:bodyPr wrap="square" anchor="ctr" lIns="45720" rIns="45720">
+            <a:spAutoFit/>
+          </a:bodyPr>
+          <a:lstStyle/>
+          <a:p>
+            <a:pPr algn="l">
+              <a:spcAft>
+                <a:spcPts val="400"/>
+              </a:spcAft>
+            </a:pPr>
+            <a:r>
+              <a:rPr sz="2400" b="1">
+                <a:solidFill>
+                  <a:srgbClr val="991B1B"/>
+                </a:solidFill>
+                <a:latin typeface="Calibri"/>
+              </a:rPr>
+              <a:t>Tả cảnh ngụ tình; cá nhân hoà vào thời đại.</a:t>
             </a:r>
           </a:p>
         </p:txBody>
@@ -10941,7 +11658,7 @@
     <p:bg>
       <p:bgPr>
         <a:solidFill>
-          <a:srgbClr val="FFFFFF"/>
+          <a:srgbClr val="F8F9FA"/>
         </a:solidFill>
         <a:effectLst/>
       </p:bgPr>
@@ -10961,14 +11678,14 @@
         </p:nvSpPr>
         <p:spPr>
           <a:xfrm>
-            <a:off x="457200" y="384048"/>
-            <a:ext cx="109728" cy="658368"/>
+            <a:off x="548640" y="2926080"/>
+            <a:ext cx="164592" cy="1005840"/>
           </a:xfrm>
           <a:prstGeom prst="rect">
             <a:avLst/>
           </a:prstGeom>
           <a:solidFill>
-            <a:srgbClr val="1E40AF"/>
+            <a:srgbClr val="991B1B"/>
           </a:solidFill>
           <a:ln>
             <a:noFill/>
@@ -10999,67 +11716,14 @@
       </p:sp>
       <p:sp>
         <p:nvSpPr>
-          <p:cNvPr id="3" name="Rounded Rectangle 2"/>
-          <p:cNvSpPr/>
-          <p:nvPr/>
-        </p:nvSpPr>
-        <p:spPr>
-          <a:xfrm>
-            <a:off x="10253167" y="457200"/>
-            <a:ext cx="1389888" cy="457200"/>
-          </a:xfrm>
-          <a:prstGeom prst="roundRect">
-            <a:avLst/>
-          </a:prstGeom>
-          <a:solidFill>
-            <a:srgbClr val="1E40AF"/>
-          </a:solidFill>
-          <a:ln>
-            <a:noFill/>
-          </a:ln>
-          <a:effectLst/>
-        </p:spPr>
-        <p:style>
-          <a:lnRef idx="1">
-            <a:schemeClr val="accent1"/>
-          </a:lnRef>
-          <a:fillRef idx="3">
-            <a:schemeClr val="accent1"/>
-          </a:fillRef>
-          <a:effectRef idx="2">
-            <a:schemeClr val="accent1"/>
-          </a:effectRef>
-          <a:fontRef idx="minor">
-            <a:schemeClr val="lt1"/>
-          </a:fontRef>
-        </p:style>
-        <p:txBody>
-          <a:bodyPr rtlCol="0" anchor="ctr" wrap="none" tIns="0" bIns="0"/>
-          <a:lstStyle/>
-          <a:p>
-            <a:pPr algn="ctr"/>
-            <a:r>
-              <a:rPr sz="1400" b="1">
-                <a:solidFill>
-                  <a:srgbClr val="FFFFFF"/>
-                </a:solidFill>
-                <a:latin typeface="Arial"/>
-              </a:rPr>
-              <a:t>ĐỀ BÀI</a:t>
-            </a:r>
-          </a:p>
-        </p:txBody>
-      </p:sp>
-      <p:sp>
-        <p:nvSpPr>
-          <p:cNvPr id="4" name="TextBox 3"/>
+          <p:cNvPr id="3" name="TextBox 2"/>
           <p:cNvSpPr txBox="1"/>
           <p:nvPr/>
         </p:nvSpPr>
         <p:spPr>
           <a:xfrm>
-            <a:off x="731520" y="274320"/>
-            <a:ext cx="9582912" cy="868680"/>
+            <a:off x="914400" y="2743200"/>
+            <a:ext cx="10515600" cy="1371600"/>
           </a:xfrm>
           <a:prstGeom prst="rect">
             <a:avLst/>
@@ -11067,120 +11731,7 @@
           <a:noFill/>
         </p:spPr>
         <p:txBody>
-          <a:bodyPr wrap="square" anchor="ctr">
-            <a:spAutoFit/>
-          </a:bodyPr>
-          <a:lstStyle/>
-          <a:p>
-            <a:r>
-              <a:rPr sz="3600" b="1">
-                <a:solidFill>
-                  <a:srgbClr val="1E40AF"/>
-                </a:solidFill>
-                <a:latin typeface="Arial"/>
-              </a:rPr>
-              <a:t>NHAN ĐỀ VÀ TRẠNG THÁI “CHÍN”</a:t>
-            </a:r>
-          </a:p>
-        </p:txBody>
-      </p:sp>
-      <p:sp>
-        <p:nvSpPr>
-          <p:cNvPr id="5" name="Rectangle 4"/>
-          <p:cNvSpPr/>
-          <p:nvPr/>
-        </p:nvSpPr>
-        <p:spPr>
-          <a:xfrm>
-            <a:off x="457200" y="1207008"/>
-            <a:ext cx="11274552" cy="22000"/>
-          </a:xfrm>
-          <a:prstGeom prst="rect">
-            <a:avLst/>
-          </a:prstGeom>
-          <a:solidFill>
-            <a:srgbClr val="E2E8F0"/>
-          </a:solidFill>
-          <a:ln>
-            <a:noFill/>
-          </a:ln>
-          <a:effectLst/>
-        </p:spPr>
-        <p:style>
-          <a:lnRef idx="1">
-            <a:schemeClr val="accent1"/>
-          </a:lnRef>
-          <a:fillRef idx="3">
-            <a:schemeClr val="accent1"/>
-          </a:fillRef>
-          <a:effectRef idx="2">
-            <a:schemeClr val="accent1"/>
-          </a:effectRef>
-          <a:fontRef idx="minor">
-            <a:schemeClr val="lt1"/>
-          </a:fontRef>
-        </p:style>
-        <p:txBody>
-          <a:bodyPr rtlCol="0" anchor="ctr"/>
-          <a:lstStyle/>
-          <a:p>
-            <a:pPr algn="ctr"/>
-          </a:p>
-        </p:txBody>
-      </p:sp>
-      <p:sp>
-        <p:nvSpPr>
-          <p:cNvPr id="6" name="TextBox 5"/>
-          <p:cNvSpPr txBox="1"/>
-          <p:nvPr/>
-        </p:nvSpPr>
-        <p:spPr>
-          <a:xfrm>
-            <a:off x="457200" y="6355080"/>
-            <a:ext cx="11274552" cy="365760"/>
-          </a:xfrm>
-          <a:prstGeom prst="rect">
-            <a:avLst/>
-          </a:prstGeom>
-          <a:noFill/>
-        </p:spPr>
-        <p:txBody>
-          <a:bodyPr wrap="none">
-            <a:spAutoFit/>
-          </a:bodyPr>
-          <a:lstStyle/>
-          <a:p>
-            <a:pPr algn="r"/>
-            <a:r>
-              <a:rPr sz="1200">
-                <a:solidFill>
-                  <a:srgbClr val="64748B"/>
-                </a:solidFill>
-                <a:latin typeface="Calibri"/>
-              </a:rPr>
-              <a:t>Ngữ văn 10 · Bài 2: Vẻ Đẹp Của Thơ Ca          24</a:t>
-            </a:r>
-          </a:p>
-        </p:txBody>
-      </p:sp>
-      <p:sp>
-        <p:nvSpPr>
-          <p:cNvPr id="7" name="TextBox 6"/>
-          <p:cNvSpPr txBox="1"/>
-          <p:nvPr/>
-        </p:nvSpPr>
-        <p:spPr>
-          <a:xfrm>
-            <a:off x="731520" y="1463040"/>
-            <a:ext cx="10789920" cy="3566160"/>
-          </a:xfrm>
-          <a:prstGeom prst="rect">
-            <a:avLst/>
-          </a:prstGeom>
-          <a:noFill/>
-        </p:spPr>
-        <p:txBody>
-          <a:bodyPr wrap="square" anchor="t" lIns="45720" rIns="45720">
+          <a:bodyPr wrap="square" anchor="ctr" lIns="45720" rIns="45720">
             <a:spAutoFit/>
           </a:bodyPr>
           <a:lstStyle/>
@@ -11191,100 +11742,13 @@
               </a:spcAft>
             </a:pPr>
             <a:r>
-              <a:rPr sz="2600" b="1">
-                <a:solidFill>
-                  <a:srgbClr val="1E293B"/>
+              <a:rPr sz="3600" b="1">
+                <a:solidFill>
+                  <a:srgbClr val="1E40AF"/>
                 </a:solidFill>
                 <a:latin typeface="Calibri"/>
               </a:rPr>
-              <a:t>Nhan đề Mùa xuân chín được cấu tạo bởi những từ thuộc từ loại nào, gợi liên tưởng gì? Trạng thái “chín” được thể hiện bằng những từ ngữ nào?</a:t>
-            </a:r>
-          </a:p>
-        </p:txBody>
-      </p:sp>
-      <p:sp>
-        <p:nvSpPr>
-          <p:cNvPr id="8" name="Rounded Rectangle 7"/>
-          <p:cNvSpPr/>
-          <p:nvPr/>
-        </p:nvSpPr>
-        <p:spPr>
-          <a:xfrm>
-            <a:off x="731520" y="5120640"/>
-            <a:ext cx="10789920" cy="693420"/>
-          </a:xfrm>
-          <a:prstGeom prst="roundRect">
-            <a:avLst>
-              <a:gd name="adj" fmla="val 8000"/>
-            </a:avLst>
-          </a:prstGeom>
-          <a:solidFill>
-            <a:srgbClr val="EFF4FF"/>
-          </a:solidFill>
-          <a:ln w="19050">
-            <a:solidFill>
-              <a:srgbClr val="1E40AF"/>
-            </a:solidFill>
-          </a:ln>
-          <a:effectLst/>
-        </p:spPr>
-        <p:style>
-          <a:lnRef idx="1">
-            <a:schemeClr val="accent1"/>
-          </a:lnRef>
-          <a:fillRef idx="3">
-            <a:schemeClr val="accent1"/>
-          </a:fillRef>
-          <a:effectRef idx="2">
-            <a:schemeClr val="accent1"/>
-          </a:effectRef>
-          <a:fontRef idx="minor">
-            <a:schemeClr val="lt1"/>
-          </a:fontRef>
-        </p:style>
-        <p:txBody>
-          <a:bodyPr rtlCol="0" anchor="ctr"/>
-          <a:lstStyle/>
-          <a:p>
-            <a:pPr algn="ctr"/>
-          </a:p>
-        </p:txBody>
-      </p:sp>
-      <p:sp>
-        <p:nvSpPr>
-          <p:cNvPr id="9" name="TextBox 8"/>
-          <p:cNvSpPr txBox="1"/>
-          <p:nvPr/>
-        </p:nvSpPr>
-        <p:spPr>
-          <a:xfrm>
-            <a:off x="914400" y="5120640"/>
-            <a:ext cx="10424160" cy="693420"/>
-          </a:xfrm>
-          <a:prstGeom prst="rect">
-            <a:avLst/>
-          </a:prstGeom>
-          <a:noFill/>
-        </p:spPr>
-        <p:txBody>
-          <a:bodyPr wrap="square" anchor="ctr" lIns="45720" rIns="45720">
-            <a:spAutoFit/>
-          </a:bodyPr>
-          <a:lstStyle/>
-          <a:p>
-            <a:pPr algn="l">
-              <a:spcAft>
-                <a:spcPts val="400"/>
-              </a:spcAft>
-            </a:pPr>
-            <a:r>
-              <a:rPr sz="2200" b="1">
-                <a:solidFill>
-                  <a:srgbClr val="1E40AF"/>
-                </a:solidFill>
-                <a:latin typeface="Calibri"/>
-              </a:rPr>
-              <a:t>💡 “Chín” thường dùng cho sự vật nào?</a:t>
+              <a:t>TIẾT 15 – 16: MÙA XUÂN CHÍN (Hàn Mặc Tử)</a:t>
             </a:r>
           </a:p>
         </p:txBody>
@@ -11367,14 +11831,14 @@
         </p:nvSpPr>
         <p:spPr>
           <a:xfrm>
-            <a:off x="9942271" y="457200"/>
-            <a:ext cx="1700784" cy="457200"/>
+            <a:off x="9786823" y="457200"/>
+            <a:ext cx="1856232" cy="457200"/>
           </a:xfrm>
           <a:prstGeom prst="roundRect">
             <a:avLst/>
           </a:prstGeom>
           <a:solidFill>
-            <a:srgbClr val="991B1B"/>
+            <a:srgbClr val="1E40AF"/>
           </a:solidFill>
           <a:ln>
             <a:noFill/>
@@ -11407,7 +11871,7 @@
                 </a:solidFill>
                 <a:latin typeface="Arial"/>
               </a:rPr>
-              <a:t>LỜI GIẢI</a:t>
+              <a:t>KHỞI ĐỘNG</a:t>
             </a:r>
           </a:p>
         </p:txBody>
@@ -11421,7 +11885,7 @@
         <p:spPr>
           <a:xfrm>
             <a:off x="731520" y="274320"/>
-            <a:ext cx="9272016" cy="868680"/>
+            <a:ext cx="9116568" cy="868680"/>
           </a:xfrm>
           <a:prstGeom prst="rect">
             <a:avLst/>
@@ -11441,7 +11905,7 @@
                 </a:solidFill>
                 <a:latin typeface="Arial"/>
               </a:rPr>
-              <a:t>NHAN ĐỀ VÀ TRẠNG THÁI “CHÍN”</a:t>
+              <a:t>TRƯỚC KHI ĐỌC</a:t>
             </a:r>
           </a:p>
         </p:txBody>
@@ -11534,7 +11998,7 @@
         <p:spPr>
           <a:xfrm>
             <a:off x="731520" y="1463040"/>
-            <a:ext cx="10789920" cy="3474720"/>
+            <a:ext cx="10789920" cy="4572000"/>
           </a:xfrm>
           <a:prstGeom prst="rect">
             <a:avLst/>
@@ -11547,153 +12011,35 @@
           </a:bodyPr>
           <a:lstStyle/>
           <a:p>
-            <a:pPr algn="l" marL="365760" indent="-365760">
+            <a:pPr algn="l">
               <a:spcAft>
                 <a:spcPts val="800"/>
               </a:spcAft>
-              <a:buClr>
-                <a:srgbClr val="1E40AF"/>
-              </a:buClr>
-              <a:buFont typeface="Arial"/>
-              <a:buChar char="•"/>
             </a:pPr>
             <a:r>
-              <a:rPr sz="2300">
+              <a:rPr sz="2600" b="1">
                 <a:solidFill>
                   <a:srgbClr val="1E293B"/>
                 </a:solidFill>
                 <a:latin typeface="Calibri"/>
               </a:rPr>
-              <a:t>Danh từ “mùa xuân” + tính từ “chín”.</a:t>
-            </a:r>
-          </a:p>
-          <a:p>
-            <a:pPr algn="l" marL="365760" indent="-365760">
+              <a:t>Bạn nhớ những bài thơ, câu thơ nào về mùa xuân?</a:t>
+            </a:r>
+          </a:p>
+          <a:p>
+            <a:pPr algn="l">
               <a:spcAft>
                 <a:spcPts val="800"/>
               </a:spcAft>
-              <a:buClr>
-                <a:srgbClr val="1E40AF"/>
-              </a:buClr>
-              <a:buFont typeface="Arial"/>
-              <a:buChar char="•"/>
             </a:pPr>
             <a:r>
-              <a:rPr sz="2300">
+              <a:rPr sz="2600" b="1">
                 <a:solidFill>
                   <a:srgbClr val="1E293B"/>
                 </a:solidFill>
                 <a:latin typeface="Calibri"/>
               </a:rPr>
-              <a:t>Gợi mùa xuân viên mãn, căng tràn như trái chín.</a:t>
-            </a:r>
-          </a:p>
-          <a:p>
-            <a:pPr algn="l" marL="365760" indent="-365760">
-              <a:spcAft>
-                <a:spcPts val="800"/>
-              </a:spcAft>
-              <a:buClr>
-                <a:srgbClr val="1E40AF"/>
-              </a:buClr>
-              <a:buFont typeface="Arial"/>
-              <a:buChar char="•"/>
-            </a:pPr>
-            <a:r>
-              <a:rPr sz="2300">
-                <a:solidFill>
-                  <a:srgbClr val="1E293B"/>
-                </a:solidFill>
-                <a:latin typeface="Calibri"/>
-              </a:rPr>
-              <a:t>“lấm tấm vàng”, “bóng xuân sang”, “sóng cỏ xanh tươi gợn tới trời”.</a:t>
-            </a:r>
-          </a:p>
-        </p:txBody>
-      </p:sp>
-      <p:sp>
-        <p:nvSpPr>
-          <p:cNvPr id="8" name="Rounded Rectangle 7"/>
-          <p:cNvSpPr/>
-          <p:nvPr/>
-        </p:nvSpPr>
-        <p:spPr>
-          <a:xfrm>
-            <a:off x="731520" y="5074920"/>
-            <a:ext cx="10789920" cy="731520"/>
-          </a:xfrm>
-          <a:prstGeom prst="roundRect">
-            <a:avLst>
-              <a:gd name="adj" fmla="val 8000"/>
-            </a:avLst>
-          </a:prstGeom>
-          <a:solidFill>
-            <a:srgbClr val="FEF2F2"/>
-          </a:solidFill>
-          <a:ln w="19050">
-            <a:solidFill>
-              <a:srgbClr val="991B1B"/>
-            </a:solidFill>
-          </a:ln>
-          <a:effectLst/>
-        </p:spPr>
-        <p:style>
-          <a:lnRef idx="1">
-            <a:schemeClr val="accent1"/>
-          </a:lnRef>
-          <a:fillRef idx="3">
-            <a:schemeClr val="accent1"/>
-          </a:fillRef>
-          <a:effectRef idx="2">
-            <a:schemeClr val="accent1"/>
-          </a:effectRef>
-          <a:fontRef idx="minor">
-            <a:schemeClr val="lt1"/>
-          </a:fontRef>
-        </p:style>
-        <p:txBody>
-          <a:bodyPr rtlCol="0" anchor="ctr"/>
-          <a:lstStyle/>
-          <a:p>
-            <a:pPr algn="ctr"/>
-          </a:p>
-        </p:txBody>
-      </p:sp>
-      <p:sp>
-        <p:nvSpPr>
-          <p:cNvPr id="9" name="TextBox 8"/>
-          <p:cNvSpPr txBox="1"/>
-          <p:nvPr/>
-        </p:nvSpPr>
-        <p:spPr>
-          <a:xfrm>
-            <a:off x="914400" y="5074920"/>
-            <a:ext cx="10424160" cy="731520"/>
-          </a:xfrm>
-          <a:prstGeom prst="rect">
-            <a:avLst/>
-          </a:prstGeom>
-          <a:noFill/>
-        </p:spPr>
-        <p:txBody>
-          <a:bodyPr wrap="square" anchor="ctr" lIns="45720" rIns="45720">
-            <a:spAutoFit/>
-          </a:bodyPr>
-          <a:lstStyle/>
-          <a:p>
-            <a:pPr algn="l">
-              <a:spcAft>
-                <a:spcPts val="400"/>
-              </a:spcAft>
-            </a:pPr>
-            <a:r>
-              <a:rPr sz="2400" b="1">
-                <a:solidFill>
-                  <a:srgbClr val="991B1B"/>
-                </a:solidFill>
-                <a:latin typeface="Calibri"/>
-              </a:rPr>
-              <a:t>Mùa xuân ở độ đẹp nhất, rạo rực nhất.</a:t>
+              <a:t>Điều gì khiến bạn ấn tượng ở những câu thơ ấy?</a:t>
             </a:r>
           </a:p>
         </p:txBody>
@@ -11776,14 +12122,14 @@
         </p:nvSpPr>
         <p:spPr>
           <a:xfrm>
-            <a:off x="10253167" y="457200"/>
-            <a:ext cx="1389888" cy="457200"/>
+            <a:off x="10408615" y="457200"/>
+            <a:ext cx="1234440" cy="457200"/>
           </a:xfrm>
           <a:prstGeom prst="roundRect">
             <a:avLst/>
           </a:prstGeom>
           <a:solidFill>
-            <a:srgbClr val="1E40AF"/>
+            <a:srgbClr val="991B1B"/>
           </a:solidFill>
           <a:ln>
             <a:noFill/>
@@ -11816,7 +12162,7 @@
                 </a:solidFill>
                 <a:latin typeface="Arial"/>
               </a:rPr>
-              <a:t>ĐỀ BÀI</a:t>
+              <a:t>VIDEO</a:t>
             </a:r>
           </a:p>
         </p:txBody>
@@ -11830,7 +12176,7 @@
         <p:spPr>
           <a:xfrm>
             <a:off x="731520" y="274320"/>
-            <a:ext cx="9582912" cy="868680"/>
+            <a:ext cx="9738360" cy="868680"/>
           </a:xfrm>
           <a:prstGeom prst="rect">
             <a:avLst/>
@@ -11850,7 +12196,7 @@
                 </a:solidFill>
                 <a:latin typeface="Arial"/>
               </a:rPr>
-              <a:t>NGÔN TỪ, NHỊP VÀ VẦN</a:t>
+              <a:t>VIDEO THAM KHẢO</a:t>
             </a:r>
           </a:p>
         </p:txBody>
@@ -11934,16 +12280,40 @@
           </a:p>
         </p:txBody>
       </p:sp>
-      <p:sp>
-        <p:nvSpPr>
-          <p:cNvPr id="7" name="TextBox 6"/>
+      <p:pic>
+        <p:nvPicPr>
+          <p:cNvPr id="7" name="Picture 6" descr="QR_video_Qvss02_9RAk.png"/>
+          <p:cNvPicPr>
+            <a:picLocks noChangeAspect="1"/>
+          </p:cNvPicPr>
+          <p:nvPr/>
+        </p:nvPicPr>
+        <p:blipFill>
+          <a:blip r:embed="rId2"/>
+          <a:stretch>
+            <a:fillRect/>
+          </a:stretch>
+        </p:blipFill>
+        <p:spPr>
+          <a:xfrm>
+            <a:off x="8412480" y="1554480"/>
+            <a:ext cx="3108960" cy="3108960"/>
+          </a:xfrm>
+          <a:prstGeom prst="rect">
+            <a:avLst/>
+          </a:prstGeom>
+        </p:spPr>
+      </p:pic>
+      <p:sp>
+        <p:nvSpPr>
+          <p:cNvPr id="8" name="TextBox 7"/>
           <p:cNvSpPr txBox="1"/>
           <p:nvPr/>
         </p:nvSpPr>
         <p:spPr>
           <a:xfrm>
-            <a:off x="731520" y="1463040"/>
-            <a:ext cx="10789920" cy="3566160"/>
+            <a:off x="731520" y="1554480"/>
+            <a:ext cx="7498079" cy="4206240"/>
           </a:xfrm>
           <a:prstGeom prst="rect">
             <a:avLst/>
@@ -11968,94 +12338,61 @@
                 </a:solidFill>
                 <a:latin typeface="Calibri"/>
               </a:rPr>
-              <a:t>Bài thơ có những lựa chọn, kết hợp ngôn từ nào đặc biệt? Mô tả cách ngắt nhịp, gieo vần và so sánh với thơ Đường luật.</a:t>
-            </a:r>
-          </a:p>
-        </p:txBody>
-      </p:sp>
-      <p:sp>
-        <p:nvSpPr>
-          <p:cNvPr id="8" name="Rounded Rectangle 7"/>
-          <p:cNvSpPr/>
-          <p:nvPr/>
-        </p:nvSpPr>
-        <p:spPr>
-          <a:xfrm>
-            <a:off x="731520" y="5120640"/>
-            <a:ext cx="10789920" cy="693420"/>
-          </a:xfrm>
-          <a:prstGeom prst="roundRect">
-            <a:avLst>
-              <a:gd name="adj" fmla="val 8000"/>
-            </a:avLst>
-          </a:prstGeom>
-          <a:solidFill>
-            <a:srgbClr val="EFF4FF"/>
-          </a:solidFill>
-          <a:ln w="19050">
-            <a:solidFill>
-              <a:srgbClr val="1E40AF"/>
-            </a:solidFill>
-          </a:ln>
-          <a:effectLst/>
-        </p:spPr>
-        <p:style>
-          <a:lnRef idx="1">
-            <a:schemeClr val="accent1"/>
-          </a:lnRef>
-          <a:fillRef idx="3">
-            <a:schemeClr val="accent1"/>
-          </a:fillRef>
-          <a:effectRef idx="2">
-            <a:schemeClr val="accent1"/>
-          </a:effectRef>
-          <a:fontRef idx="minor">
-            <a:schemeClr val="lt1"/>
-          </a:fontRef>
-        </p:style>
-        <p:txBody>
-          <a:bodyPr rtlCol="0" anchor="ctr"/>
-          <a:lstStyle/>
-          <a:p>
-            <a:pPr algn="ctr"/>
-          </a:p>
-        </p:txBody>
-      </p:sp>
-      <p:sp>
-        <p:nvSpPr>
-          <p:cNvPr id="9" name="TextBox 8"/>
-          <p:cNvSpPr txBox="1"/>
-          <p:nvPr/>
-        </p:nvSpPr>
-        <p:spPr>
-          <a:xfrm>
-            <a:off x="914400" y="5120640"/>
-            <a:ext cx="10424160" cy="693420"/>
-          </a:xfrm>
-          <a:prstGeom prst="rect">
-            <a:avLst/>
-          </a:prstGeom>
-          <a:noFill/>
-        </p:spPr>
-        <p:txBody>
-          <a:bodyPr wrap="square" anchor="ctr" lIns="45720" rIns="45720">
-            <a:spAutoFit/>
-          </a:bodyPr>
-          <a:lstStyle/>
+              <a:t>🎬 Bài thơ Mùa xuân chín – Hàn Mặc Tử – NSƯT Trần Thị Tuyết diễn ngâm</a:t>
+            </a:r>
+          </a:p>
           <a:p>
             <a:pPr algn="l">
               <a:spcAft>
-                <a:spcPts val="400"/>
+                <a:spcPts val="800"/>
               </a:spcAft>
             </a:pPr>
             <a:r>
-              <a:rPr sz="2200" b="1">
-                <a:solidFill>
-                  <a:srgbClr val="1E40AF"/>
+              <a:rPr sz="2000">
+                <a:solidFill>
+                  <a:srgbClr val="64748B"/>
                 </a:solidFill>
                 <a:latin typeface="Calibri"/>
               </a:rPr>
-              <a:t>💡 Chú ý dấu chấm giữa dòng, gạch ngang đầu dòng.</a:t>
+              <a:t>Kênh: Lê &amp; H</a:t>
+            </a:r>
+          </a:p>
+          <a:p>
+            <a:pPr algn="l" marL="365760" indent="-365760">
+              <a:spcAft>
+                <a:spcPts val="800"/>
+              </a:spcAft>
+              <a:buClr>
+                <a:srgbClr val="1E40AF"/>
+              </a:buClr>
+              <a:buFont typeface="Arial"/>
+              <a:buChar char="•"/>
+            </a:pPr>
+            <a:r>
+              <a:rPr sz="2000">
+                <a:solidFill>
+                  <a:srgbClr val="1E293B"/>
+                </a:solidFill>
+                <a:latin typeface="Calibri"/>
+              </a:rPr>
+              <a:t>Đọc diễn cảm Mùa xuân chín</a:t>
+            </a:r>
+          </a:p>
+          <a:p>
+            <a:pPr algn="l">
+              <a:spcAft>
+                <a:spcPts val="800"/>
+              </a:spcAft>
+            </a:pPr>
+            <a:r>
+              <a:rPr sz="1600">
+                <a:solidFill>
+                  <a:srgbClr val="64748B"/>
+                </a:solidFill>
+                <a:latin typeface="Calibri"/>
+                <a:hlinkClick r:id="rId3"/>
+              </a:rPr>
+              <a:t>https://www.youtube.com/watch?v=Qvss02_9RAk</a:t>
             </a:r>
           </a:p>
         </p:txBody>
@@ -12138,14 +12475,14 @@
         </p:nvSpPr>
         <p:spPr>
           <a:xfrm>
-            <a:off x="9942271" y="457200"/>
-            <a:ext cx="1700784" cy="457200"/>
+            <a:off x="10253167" y="457200"/>
+            <a:ext cx="1389888" cy="457200"/>
           </a:xfrm>
           <a:prstGeom prst="roundRect">
             <a:avLst/>
           </a:prstGeom>
           <a:solidFill>
-            <a:srgbClr val="991B1B"/>
+            <a:srgbClr val="1E40AF"/>
           </a:solidFill>
           <a:ln>
             <a:noFill/>
@@ -12178,7 +12515,7 @@
                 </a:solidFill>
                 <a:latin typeface="Arial"/>
               </a:rPr>
-              <a:t>LỜI GIẢI</a:t>
+              <a:t>ĐỀ BÀI</a:t>
             </a:r>
           </a:p>
         </p:txBody>
@@ -12192,7 +12529,7 @@
         <p:spPr>
           <a:xfrm>
             <a:off x="731520" y="274320"/>
-            <a:ext cx="9272016" cy="868680"/>
+            <a:ext cx="9582912" cy="868680"/>
           </a:xfrm>
           <a:prstGeom prst="rect">
             <a:avLst/>
@@ -12212,7 +12549,7 @@
                 </a:solidFill>
                 <a:latin typeface="Arial"/>
               </a:rPr>
-              <a:t>NGÔN TỪ, NHỊP VÀ VẦN</a:t>
+              <a:t>NHAN ĐỀ VÀ TRẠNG THÁI “CHÍN”</a:t>
             </a:r>
           </a:p>
         </p:txBody>
@@ -12305,7 +12642,7 @@
         <p:spPr>
           <a:xfrm>
             <a:off x="731520" y="1463040"/>
-            <a:ext cx="10789920" cy="3474720"/>
+            <a:ext cx="10789920" cy="3566160"/>
           </a:xfrm>
           <a:prstGeom prst="rect">
             <a:avLst/>
@@ -12318,66 +12655,19 @@
           </a:bodyPr>
           <a:lstStyle/>
           <a:p>
-            <a:pPr algn="l" marL="365760" indent="-365760">
+            <a:pPr algn="l">
               <a:spcAft>
                 <a:spcPts val="800"/>
               </a:spcAft>
-              <a:buClr>
-                <a:srgbClr val="1E40AF"/>
-              </a:buClr>
-              <a:buFont typeface="Arial"/>
-              <a:buChar char="•"/>
             </a:pPr>
             <a:r>
-              <a:rPr sz="2300">
+              <a:rPr sz="2600" b="1">
                 <a:solidFill>
                   <a:srgbClr val="1E293B"/>
                 </a:solidFill>
                 <a:latin typeface="Calibri"/>
               </a:rPr>
-              <a:t>“làn nắng ửng”, “sột soạt gió trêu”, “tiếng ca vắt vẻo”, “hổn hển như lời của nước mây”.</a:t>
-            </a:r>
-          </a:p>
-          <a:p>
-            <a:pPr algn="l" marL="365760" indent="-365760">
-              <a:spcAft>
-                <a:spcPts val="800"/>
-              </a:spcAft>
-              <a:buClr>
-                <a:srgbClr val="1E40AF"/>
-              </a:buClr>
-              <a:buFont typeface="Arial"/>
-              <a:buChar char="•"/>
-            </a:pPr>
-            <a:r>
-              <a:rPr sz="2300">
-                <a:solidFill>
-                  <a:srgbClr val="1E293B"/>
-                </a:solidFill>
-                <a:latin typeface="Calibri"/>
-              </a:rPr>
-              <a:t>Ngắt nhịp linh hoạt: “Trên giàn thiên lí. Bóng xuân sang”.</a:t>
-            </a:r>
-          </a:p>
-          <a:p>
-            <a:pPr algn="l" marL="365760" indent="-365760">
-              <a:spcAft>
-                <a:spcPts val="800"/>
-              </a:spcAft>
-              <a:buClr>
-                <a:srgbClr val="1E40AF"/>
-              </a:buClr>
-              <a:buFont typeface="Arial"/>
-              <a:buChar char="•"/>
-            </a:pPr>
-            <a:r>
-              <a:rPr sz="2300">
-                <a:solidFill>
-                  <a:srgbClr val="1E293B"/>
-                </a:solidFill>
-                <a:latin typeface="Calibri"/>
-              </a:rPr>
-              <a:t>Vần phóng khoáng, ít ràng buộc hơn thơ Đường luật.</a:t>
+              <a:t>Nhan đề Mùa xuân chín được cấu tạo bởi những từ thuộc từ loại nào, gợi liên tưởng gì? Trạng thái “chín” được thể hiện bằng những từ ngữ nào?</a:t>
             </a:r>
           </a:p>
         </p:txBody>
@@ -12390,8 +12680,8 @@
         </p:nvSpPr>
         <p:spPr>
           <a:xfrm>
-            <a:off x="731520" y="5074920"/>
-            <a:ext cx="10789920" cy="731520"/>
+            <a:off x="731520" y="5120640"/>
+            <a:ext cx="10789920" cy="693420"/>
           </a:xfrm>
           <a:prstGeom prst="roundRect">
             <a:avLst>
@@ -12399,11 +12689,11 @@
             </a:avLst>
           </a:prstGeom>
           <a:solidFill>
-            <a:srgbClr val="FEF2F2"/>
+            <a:srgbClr val="EFF4FF"/>
           </a:solidFill>
           <a:ln w="19050">
             <a:solidFill>
-              <a:srgbClr val="991B1B"/>
+              <a:srgbClr val="1E40AF"/>
             </a:solidFill>
           </a:ln>
           <a:effectLst/>
@@ -12438,8 +12728,8 @@
         </p:nvSpPr>
         <p:spPr>
           <a:xfrm>
-            <a:off x="914400" y="5074920"/>
-            <a:ext cx="10424160" cy="731520"/>
+            <a:off x="914400" y="5120640"/>
+            <a:ext cx="10424160" cy="693420"/>
           </a:xfrm>
           <a:prstGeom prst="rect">
             <a:avLst/>
@@ -12458,13 +12748,13 @@
               </a:spcAft>
             </a:pPr>
             <a:r>
-              <a:rPr sz="2400" b="1">
-                <a:solidFill>
-                  <a:srgbClr val="991B1B"/>
+              <a:rPr sz="2200" b="1">
+                <a:solidFill>
+                  <a:srgbClr val="1E40AF"/>
                 </a:solidFill>
                 <a:latin typeface="Calibri"/>
               </a:rPr>
-              <a:t>Thơ mới: tự do, giàu cảm giác, cá tính.</a:t>
+              <a:t>💡 “Chín” thường dùng cho sự vật nào?</a:t>
             </a:r>
           </a:p>
         </p:txBody>
@@ -12547,14 +12837,14 @@
         </p:nvSpPr>
         <p:spPr>
           <a:xfrm>
-            <a:off x="10253167" y="457200"/>
-            <a:ext cx="1389888" cy="457200"/>
+            <a:off x="9942271" y="457200"/>
+            <a:ext cx="1700784" cy="457200"/>
           </a:xfrm>
           <a:prstGeom prst="roundRect">
             <a:avLst/>
           </a:prstGeom>
           <a:solidFill>
-            <a:srgbClr val="1E40AF"/>
+            <a:srgbClr val="991B1B"/>
           </a:solidFill>
           <a:ln>
             <a:noFill/>
@@ -12587,7 +12877,7 @@
                 </a:solidFill>
                 <a:latin typeface="Arial"/>
               </a:rPr>
-              <a:t>ĐỀ BÀI</a:t>
+              <a:t>LỜI GIẢI</a:t>
             </a:r>
           </a:p>
         </p:txBody>
@@ -12601,7 +12891,7 @@
         <p:spPr>
           <a:xfrm>
             <a:off x="731520" y="274320"/>
-            <a:ext cx="9582912" cy="868680"/>
+            <a:ext cx="9272016" cy="868680"/>
           </a:xfrm>
           <a:prstGeom prst="rect">
             <a:avLst/>
@@ -12621,7 +12911,7 @@
                 </a:solidFill>
                 <a:latin typeface="Arial"/>
               </a:rPr>
-              <a:t>CON NGƯỜI VÀ MẠCH CẢM XÚC</a:t>
+              <a:t>NHAN ĐỀ VÀ TRẠNG THÁI “CHÍN”</a:t>
             </a:r>
           </a:p>
         </p:txBody>
@@ -12714,7 +13004,7 @@
         <p:spPr>
           <a:xfrm>
             <a:off x="731520" y="1463040"/>
-            <a:ext cx="10789920" cy="3566160"/>
+            <a:ext cx="10789920" cy="3474720"/>
           </a:xfrm>
           <a:prstGeom prst="rect">
             <a:avLst/>
@@ -12727,19 +13017,66 @@
           </a:bodyPr>
           <a:lstStyle/>
           <a:p>
-            <a:pPr algn="l">
+            <a:pPr algn="l" marL="365760" indent="-365760">
               <a:spcAft>
                 <a:spcPts val="800"/>
               </a:spcAft>
+              <a:buClr>
+                <a:srgbClr val="1E40AF"/>
+              </a:buClr>
+              <a:buFont typeface="Arial"/>
+              <a:buChar char="•"/>
             </a:pPr>
             <a:r>
-              <a:rPr sz="2600" b="1">
+              <a:rPr sz="2300">
                 <a:solidFill>
                   <a:srgbClr val="1E293B"/>
                 </a:solidFill>
                 <a:latin typeface="Calibri"/>
               </a:rPr>
-              <a:t>Con người hiện diện qua những hình ảnh nào? Hình ảnh nào nằm trong tâm tưởng nhân vật trữ tình? Nêu cảm nhận về nhân vật trữ tình.</a:t>
+              <a:t>Danh từ “mùa xuân” + tính từ “chín”.</a:t>
+            </a:r>
+          </a:p>
+          <a:p>
+            <a:pPr algn="l" marL="365760" indent="-365760">
+              <a:spcAft>
+                <a:spcPts val="800"/>
+              </a:spcAft>
+              <a:buClr>
+                <a:srgbClr val="1E40AF"/>
+              </a:buClr>
+              <a:buFont typeface="Arial"/>
+              <a:buChar char="•"/>
+            </a:pPr>
+            <a:r>
+              <a:rPr sz="2300">
+                <a:solidFill>
+                  <a:srgbClr val="1E293B"/>
+                </a:solidFill>
+                <a:latin typeface="Calibri"/>
+              </a:rPr>
+              <a:t>Gợi mùa xuân viên mãn, căng tràn như trái chín.</a:t>
+            </a:r>
+          </a:p>
+          <a:p>
+            <a:pPr algn="l" marL="365760" indent="-365760">
+              <a:spcAft>
+                <a:spcPts val="800"/>
+              </a:spcAft>
+              <a:buClr>
+                <a:srgbClr val="1E40AF"/>
+              </a:buClr>
+              <a:buFont typeface="Arial"/>
+              <a:buChar char="•"/>
+            </a:pPr>
+            <a:r>
+              <a:rPr sz="2300">
+                <a:solidFill>
+                  <a:srgbClr val="1E293B"/>
+                </a:solidFill>
+                <a:latin typeface="Calibri"/>
+              </a:rPr>
+              <a:t>“lấm tấm vàng”, “bóng xuân sang”, “sóng cỏ xanh tươi gợn tới trời”.</a:t>
             </a:r>
           </a:p>
         </p:txBody>
@@ -12752,8 +13089,8 @@
         </p:nvSpPr>
         <p:spPr>
           <a:xfrm>
-            <a:off x="731520" y="5120640"/>
-            <a:ext cx="10789920" cy="693420"/>
+            <a:off x="731520" y="5074920"/>
+            <a:ext cx="10789920" cy="731520"/>
           </a:xfrm>
           <a:prstGeom prst="roundRect">
             <a:avLst>
@@ -12761,11 +13098,11 @@
             </a:avLst>
           </a:prstGeom>
           <a:solidFill>
-            <a:srgbClr val="EFF4FF"/>
+            <a:srgbClr val="FEF2F2"/>
           </a:solidFill>
           <a:ln w="19050">
             <a:solidFill>
-              <a:srgbClr val="1E40AF"/>
+              <a:srgbClr val="991B1B"/>
             </a:solidFill>
           </a:ln>
           <a:effectLst/>
@@ -12800,8 +13137,8 @@
         </p:nvSpPr>
         <p:spPr>
           <a:xfrm>
-            <a:off x="914400" y="5120640"/>
-            <a:ext cx="10424160" cy="693420"/>
+            <a:off x="914400" y="5074920"/>
+            <a:ext cx="10424160" cy="731520"/>
           </a:xfrm>
           <a:prstGeom prst="rect">
             <a:avLst/>
@@ -12820,13 +13157,13 @@
               </a:spcAft>
             </a:pPr>
             <a:r>
-              <a:rPr sz="2200" b="1">
-                <a:solidFill>
-                  <a:srgbClr val="1E40AF"/>
+              <a:rPr sz="2400" b="1">
+                <a:solidFill>
+                  <a:srgbClr val="991B1B"/>
                 </a:solidFill>
                 <a:latin typeface="Calibri"/>
               </a:rPr>
-              <a:t>💡 Phân biệt cảnh đang ngắm và cảnh hồi tưởng.</a:t>
+              <a:t>Mùa xuân ở độ đẹp nhất, rạo rực nhất.</a:t>
             </a:r>
           </a:p>
         </p:txBody>
@@ -12909,14 +13246,14 @@
         </p:nvSpPr>
         <p:spPr>
           <a:xfrm>
-            <a:off x="9942271" y="457200"/>
-            <a:ext cx="1700784" cy="457200"/>
+            <a:off x="10253167" y="457200"/>
+            <a:ext cx="1389888" cy="457200"/>
           </a:xfrm>
           <a:prstGeom prst="roundRect">
             <a:avLst/>
           </a:prstGeom>
           <a:solidFill>
-            <a:srgbClr val="991B1B"/>
+            <a:srgbClr val="1E40AF"/>
           </a:solidFill>
           <a:ln>
             <a:noFill/>
@@ -12949,7 +13286,7 @@
                 </a:solidFill>
                 <a:latin typeface="Arial"/>
               </a:rPr>
-              <a:t>LỜI GIẢI</a:t>
+              <a:t>ĐỀ BÀI</a:t>
             </a:r>
           </a:p>
         </p:txBody>
@@ -12963,7 +13300,7 @@
         <p:spPr>
           <a:xfrm>
             <a:off x="731520" y="274320"/>
-            <a:ext cx="9272016" cy="868680"/>
+            <a:ext cx="9582912" cy="868680"/>
           </a:xfrm>
           <a:prstGeom prst="rect">
             <a:avLst/>
@@ -12983,7 +13320,7 @@
                 </a:solidFill>
                 <a:latin typeface="Arial"/>
               </a:rPr>
-              <a:t>CON NGƯỜI VÀ MẠCH CẢM XÚC</a:t>
+              <a:t>NGÔN TỪ, NHỊP VÀ VẦN</a:t>
             </a:r>
           </a:p>
         </p:txBody>
@@ -13076,7 +13413,7 @@
         <p:spPr>
           <a:xfrm>
             <a:off x="731520" y="1463040"/>
-            <a:ext cx="10789920" cy="3474720"/>
+            <a:ext cx="10789920" cy="3566160"/>
           </a:xfrm>
           <a:prstGeom prst="rect">
             <a:avLst/>
@@ -13089,66 +13426,19 @@
           </a:bodyPr>
           <a:lstStyle/>
           <a:p>
-            <a:pPr algn="l" marL="365760" indent="-365760">
+            <a:pPr algn="l">
               <a:spcAft>
                 <a:spcPts val="800"/>
               </a:spcAft>
-              <a:buClr>
-                <a:srgbClr val="1E40AF"/>
-              </a:buClr>
-              <a:buFont typeface="Arial"/>
-              <a:buChar char="•"/>
             </a:pPr>
             <a:r>
-              <a:rPr sz="2300">
+              <a:rPr sz="2600" b="1">
                 <a:solidFill>
                   <a:srgbClr val="1E293B"/>
                 </a:solidFill>
                 <a:latin typeface="Calibri"/>
               </a:rPr>
-              <a:t>Thôn nữ hát trên đồi, người theo chồng bỏ cuộc chơi.</a:t>
-            </a:r>
-          </a:p>
-          <a:p>
-            <a:pPr algn="l" marL="365760" indent="-365760">
-              <a:spcAft>
-                <a:spcPts val="800"/>
-              </a:spcAft>
-              <a:buClr>
-                <a:srgbClr val="1E40AF"/>
-              </a:buClr>
-              <a:buFont typeface="Arial"/>
-              <a:buChar char="•"/>
-            </a:pPr>
-            <a:r>
-              <a:rPr sz="2300">
-                <a:solidFill>
-                  <a:srgbClr val="1E293B"/>
-                </a:solidFill>
-                <a:latin typeface="Calibri"/>
-              </a:rPr>
-              <a:t>Người chị gánh thóc – hình ảnh trong tâm tưởng.</a:t>
-            </a:r>
-          </a:p>
-          <a:p>
-            <a:pPr algn="l" marL="365760" indent="-365760">
-              <a:spcAft>
-                <a:spcPts val="800"/>
-              </a:spcAft>
-              <a:buClr>
-                <a:srgbClr val="1E40AF"/>
-              </a:buClr>
-              <a:buFont typeface="Arial"/>
-              <a:buChar char="•"/>
-            </a:pPr>
-            <a:r>
-              <a:rPr sz="2300">
-                <a:solidFill>
-                  <a:srgbClr val="1E293B"/>
-                </a:solidFill>
-                <a:latin typeface="Calibri"/>
-              </a:rPr>
-              <a:t>“Khách xa” bâng khuâng, sực nhớ làng.</a:t>
+              <a:t>Bài thơ có những lựa chọn, kết hợp ngôn từ nào đặc biệt? Mô tả cách ngắt nhịp, gieo vần và so sánh với thơ Đường luật.</a:t>
             </a:r>
           </a:p>
         </p:txBody>
@@ -13161,8 +13451,8 @@
         </p:nvSpPr>
         <p:spPr>
           <a:xfrm>
-            <a:off x="731520" y="5074920"/>
-            <a:ext cx="10789920" cy="731520"/>
+            <a:off x="731520" y="5120640"/>
+            <a:ext cx="10789920" cy="693420"/>
           </a:xfrm>
           <a:prstGeom prst="roundRect">
             <a:avLst>
@@ -13170,11 +13460,11 @@
             </a:avLst>
           </a:prstGeom>
           <a:solidFill>
-            <a:srgbClr val="FEF2F2"/>
+            <a:srgbClr val="EFF4FF"/>
           </a:solidFill>
           <a:ln w="19050">
             <a:solidFill>
-              <a:srgbClr val="991B1B"/>
+              <a:srgbClr val="1E40AF"/>
             </a:solidFill>
           </a:ln>
           <a:effectLst/>
@@ -13209,8 +13499,8 @@
         </p:nvSpPr>
         <p:spPr>
           <a:xfrm>
-            <a:off x="914400" y="5074920"/>
-            <a:ext cx="10424160" cy="731520"/>
+            <a:off x="914400" y="5120640"/>
+            <a:ext cx="10424160" cy="693420"/>
           </a:xfrm>
           <a:prstGeom prst="rect">
             <a:avLst/>
@@ -13229,13 +13519,13 @@
               </a:spcAft>
             </a:pPr>
             <a:r>
-              <a:rPr sz="2400" b="1">
-                <a:solidFill>
-                  <a:srgbClr val="991B1B"/>
+              <a:rPr sz="2200" b="1">
+                <a:solidFill>
+                  <a:srgbClr val="1E40AF"/>
                 </a:solidFill>
                 <a:latin typeface="Calibri"/>
               </a:rPr>
-              <a:t>Say sưa cảnh xuân → tiếc nuối → nhớ thương.</a:t>
+              <a:t>💡 Chú ý dấu chấm giữa dòng, gạch ngang đầu dòng.</a:t>
             </a:r>
           </a:p>
         </p:txBody>
@@ -13363,7 +13653,7 @@
     <p:bg>
       <p:bgPr>
         <a:solidFill>
-          <a:srgbClr val="F8F9FA"/>
+          <a:srgbClr val="FFFFFF"/>
         </a:solidFill>
         <a:effectLst/>
       </p:bgPr>
@@ -13383,10 +13673,54 @@
         </p:nvSpPr>
         <p:spPr>
           <a:xfrm>
-            <a:off x="548640" y="2926080"/>
-            <a:ext cx="164592" cy="1005840"/>
-          </a:xfrm>
-          <a:prstGeom prst="rect">
+            <a:off x="457200" y="384048"/>
+            <a:ext cx="109728" cy="658368"/>
+          </a:xfrm>
+          <a:prstGeom prst="rect">
+            <a:avLst/>
+          </a:prstGeom>
+          <a:solidFill>
+            <a:srgbClr val="1E40AF"/>
+          </a:solidFill>
+          <a:ln>
+            <a:noFill/>
+          </a:ln>
+          <a:effectLst/>
+        </p:spPr>
+        <p:style>
+          <a:lnRef idx="1">
+            <a:schemeClr val="accent1"/>
+          </a:lnRef>
+          <a:fillRef idx="3">
+            <a:schemeClr val="accent1"/>
+          </a:fillRef>
+          <a:effectRef idx="2">
+            <a:schemeClr val="accent1"/>
+          </a:effectRef>
+          <a:fontRef idx="minor">
+            <a:schemeClr val="lt1"/>
+          </a:fontRef>
+        </p:style>
+        <p:txBody>
+          <a:bodyPr rtlCol="0" anchor="ctr"/>
+          <a:lstStyle/>
+          <a:p>
+            <a:pPr algn="ctr"/>
+          </a:p>
+        </p:txBody>
+      </p:sp>
+      <p:sp>
+        <p:nvSpPr>
+          <p:cNvPr id="3" name="Rounded Rectangle 2"/>
+          <p:cNvSpPr/>
+          <p:nvPr/>
+        </p:nvSpPr>
+        <p:spPr>
+          <a:xfrm>
+            <a:off x="9942271" y="457200"/>
+            <a:ext cx="1700784" cy="457200"/>
+          </a:xfrm>
+          <a:prstGeom prst="roundRect">
             <a:avLst/>
           </a:prstGeom>
           <a:solidFill>
@@ -13412,6 +13746,93 @@
           </a:fontRef>
         </p:style>
         <p:txBody>
+          <a:bodyPr rtlCol="0" anchor="ctr" wrap="none" tIns="0" bIns="0"/>
+          <a:lstStyle/>
+          <a:p>
+            <a:pPr algn="ctr"/>
+            <a:r>
+              <a:rPr sz="1400" b="1">
+                <a:solidFill>
+                  <a:srgbClr val="FFFFFF"/>
+                </a:solidFill>
+                <a:latin typeface="Arial"/>
+              </a:rPr>
+              <a:t>LỜI GIẢI</a:t>
+            </a:r>
+          </a:p>
+        </p:txBody>
+      </p:sp>
+      <p:sp>
+        <p:nvSpPr>
+          <p:cNvPr id="4" name="TextBox 3"/>
+          <p:cNvSpPr txBox="1"/>
+          <p:nvPr/>
+        </p:nvSpPr>
+        <p:spPr>
+          <a:xfrm>
+            <a:off x="731520" y="274320"/>
+            <a:ext cx="9272016" cy="868680"/>
+          </a:xfrm>
+          <a:prstGeom prst="rect">
+            <a:avLst/>
+          </a:prstGeom>
+          <a:noFill/>
+        </p:spPr>
+        <p:txBody>
+          <a:bodyPr wrap="square" anchor="ctr">
+            <a:spAutoFit/>
+          </a:bodyPr>
+          <a:lstStyle/>
+          <a:p>
+            <a:r>
+              <a:rPr sz="3600" b="1">
+                <a:solidFill>
+                  <a:srgbClr val="1E40AF"/>
+                </a:solidFill>
+                <a:latin typeface="Arial"/>
+              </a:rPr>
+              <a:t>NGÔN TỪ, NHỊP VÀ VẦN</a:t>
+            </a:r>
+          </a:p>
+        </p:txBody>
+      </p:sp>
+      <p:sp>
+        <p:nvSpPr>
+          <p:cNvPr id="5" name="Rectangle 4"/>
+          <p:cNvSpPr/>
+          <p:nvPr/>
+        </p:nvSpPr>
+        <p:spPr>
+          <a:xfrm>
+            <a:off x="457200" y="1207008"/>
+            <a:ext cx="11274552" cy="22000"/>
+          </a:xfrm>
+          <a:prstGeom prst="rect">
+            <a:avLst/>
+          </a:prstGeom>
+          <a:solidFill>
+            <a:srgbClr val="E2E8F0"/>
+          </a:solidFill>
+          <a:ln>
+            <a:noFill/>
+          </a:ln>
+          <a:effectLst/>
+        </p:spPr>
+        <p:style>
+          <a:lnRef idx="1">
+            <a:schemeClr val="accent1"/>
+          </a:lnRef>
+          <a:fillRef idx="3">
+            <a:schemeClr val="accent1"/>
+          </a:fillRef>
+          <a:effectRef idx="2">
+            <a:schemeClr val="accent1"/>
+          </a:effectRef>
+          <a:fontRef idx="minor">
+            <a:schemeClr val="lt1"/>
+          </a:fontRef>
+        </p:style>
+        <p:txBody>
           <a:bodyPr rtlCol="0" anchor="ctr"/>
           <a:lstStyle/>
           <a:p>
@@ -13421,14 +13842,183 @@
       </p:sp>
       <p:sp>
         <p:nvSpPr>
-          <p:cNvPr id="3" name="TextBox 2"/>
+          <p:cNvPr id="6" name="TextBox 5"/>
           <p:cNvSpPr txBox="1"/>
           <p:nvPr/>
         </p:nvSpPr>
         <p:spPr>
           <a:xfrm>
-            <a:off x="914400" y="2743200"/>
-            <a:ext cx="10515600" cy="1371600"/>
+            <a:off x="457200" y="6355080"/>
+            <a:ext cx="11274552" cy="365760"/>
+          </a:xfrm>
+          <a:prstGeom prst="rect">
+            <a:avLst/>
+          </a:prstGeom>
+          <a:noFill/>
+        </p:spPr>
+        <p:txBody>
+          <a:bodyPr wrap="none">
+            <a:spAutoFit/>
+          </a:bodyPr>
+          <a:lstStyle/>
+          <a:p>
+            <a:pPr algn="r"/>
+            <a:r>
+              <a:rPr sz="1200">
+                <a:solidFill>
+                  <a:srgbClr val="64748B"/>
+                </a:solidFill>
+                <a:latin typeface="Calibri"/>
+              </a:rPr>
+              <a:t>Ngữ văn 10 · Bài 2: Vẻ Đẹp Của Thơ Ca          30</a:t>
+            </a:r>
+          </a:p>
+        </p:txBody>
+      </p:sp>
+      <p:sp>
+        <p:nvSpPr>
+          <p:cNvPr id="7" name="TextBox 6"/>
+          <p:cNvSpPr txBox="1"/>
+          <p:nvPr/>
+        </p:nvSpPr>
+        <p:spPr>
+          <a:xfrm>
+            <a:off x="731520" y="1463040"/>
+            <a:ext cx="10789920" cy="3474720"/>
+          </a:xfrm>
+          <a:prstGeom prst="rect">
+            <a:avLst/>
+          </a:prstGeom>
+          <a:noFill/>
+        </p:spPr>
+        <p:txBody>
+          <a:bodyPr wrap="square" anchor="t" lIns="45720" rIns="45720">
+            <a:spAutoFit/>
+          </a:bodyPr>
+          <a:lstStyle/>
+          <a:p>
+            <a:pPr algn="l" marL="365760" indent="-365760">
+              <a:spcAft>
+                <a:spcPts val="800"/>
+              </a:spcAft>
+              <a:buClr>
+                <a:srgbClr val="1E40AF"/>
+              </a:buClr>
+              <a:buFont typeface="Arial"/>
+              <a:buChar char="•"/>
+            </a:pPr>
+            <a:r>
+              <a:rPr sz="2300">
+                <a:solidFill>
+                  <a:srgbClr val="1E293B"/>
+                </a:solidFill>
+                <a:latin typeface="Calibri"/>
+              </a:rPr>
+              <a:t>“làn nắng ửng”, “sột soạt gió trêu”, “tiếng ca vắt vẻo”, “hổn hển như lời của nước mây”.</a:t>
+            </a:r>
+          </a:p>
+          <a:p>
+            <a:pPr algn="l" marL="365760" indent="-365760">
+              <a:spcAft>
+                <a:spcPts val="800"/>
+              </a:spcAft>
+              <a:buClr>
+                <a:srgbClr val="1E40AF"/>
+              </a:buClr>
+              <a:buFont typeface="Arial"/>
+              <a:buChar char="•"/>
+            </a:pPr>
+            <a:r>
+              <a:rPr sz="2300">
+                <a:solidFill>
+                  <a:srgbClr val="1E293B"/>
+                </a:solidFill>
+                <a:latin typeface="Calibri"/>
+              </a:rPr>
+              <a:t>Ngắt nhịp linh hoạt: “Trên giàn thiên lí. Bóng xuân sang”.</a:t>
+            </a:r>
+          </a:p>
+          <a:p>
+            <a:pPr algn="l" marL="365760" indent="-365760">
+              <a:spcAft>
+                <a:spcPts val="800"/>
+              </a:spcAft>
+              <a:buClr>
+                <a:srgbClr val="1E40AF"/>
+              </a:buClr>
+              <a:buFont typeface="Arial"/>
+              <a:buChar char="•"/>
+            </a:pPr>
+            <a:r>
+              <a:rPr sz="2300">
+                <a:solidFill>
+                  <a:srgbClr val="1E293B"/>
+                </a:solidFill>
+                <a:latin typeface="Calibri"/>
+              </a:rPr>
+              <a:t>Vần phóng khoáng, ít ràng buộc hơn thơ Đường luật.</a:t>
+            </a:r>
+          </a:p>
+        </p:txBody>
+      </p:sp>
+      <p:sp>
+        <p:nvSpPr>
+          <p:cNvPr id="8" name="Rounded Rectangle 7"/>
+          <p:cNvSpPr/>
+          <p:nvPr/>
+        </p:nvSpPr>
+        <p:spPr>
+          <a:xfrm>
+            <a:off x="731520" y="5074920"/>
+            <a:ext cx="10789920" cy="731520"/>
+          </a:xfrm>
+          <a:prstGeom prst="roundRect">
+            <a:avLst>
+              <a:gd name="adj" fmla="val 8000"/>
+            </a:avLst>
+          </a:prstGeom>
+          <a:solidFill>
+            <a:srgbClr val="FEF2F2"/>
+          </a:solidFill>
+          <a:ln w="19050">
+            <a:solidFill>
+              <a:srgbClr val="991B1B"/>
+            </a:solidFill>
+          </a:ln>
+          <a:effectLst/>
+        </p:spPr>
+        <p:style>
+          <a:lnRef idx="1">
+            <a:schemeClr val="accent1"/>
+          </a:lnRef>
+          <a:fillRef idx="3">
+            <a:schemeClr val="accent1"/>
+          </a:fillRef>
+          <a:effectRef idx="2">
+            <a:schemeClr val="accent1"/>
+          </a:effectRef>
+          <a:fontRef idx="minor">
+            <a:schemeClr val="lt1"/>
+          </a:fontRef>
+        </p:style>
+        <p:txBody>
+          <a:bodyPr rtlCol="0" anchor="ctr"/>
+          <a:lstStyle/>
+          <a:p>
+            <a:pPr algn="ctr"/>
+          </a:p>
+        </p:txBody>
+      </p:sp>
+      <p:sp>
+        <p:nvSpPr>
+          <p:cNvPr id="9" name="TextBox 8"/>
+          <p:cNvSpPr txBox="1"/>
+          <p:nvPr/>
+        </p:nvSpPr>
+        <p:spPr>
+          <a:xfrm>
+            <a:off x="914400" y="5074920"/>
+            <a:ext cx="10424160" cy="731520"/>
           </a:xfrm>
           <a:prstGeom prst="rect">
             <a:avLst/>
@@ -13443,17 +14033,17 @@
           <a:p>
             <a:pPr algn="l">
               <a:spcAft>
-                <a:spcPts val="800"/>
+                <a:spcPts val="400"/>
               </a:spcAft>
             </a:pPr>
             <a:r>
-              <a:rPr sz="3600" b="1">
-                <a:solidFill>
-                  <a:srgbClr val="1E40AF"/>
+              <a:rPr sz="2400" b="1">
+                <a:solidFill>
+                  <a:srgbClr val="991B1B"/>
                 </a:solidFill>
                 <a:latin typeface="Calibri"/>
               </a:rPr>
-              <a:t>TIẾT 17: BẢN HOÀ ÂM NGÔN TỪ TRONG TIẾNG THU</a:t>
+              <a:t>Thơ mới: tự do, giàu cảm giác, cá tính.</a:t>
             </a:r>
           </a:p>
         </p:txBody>
@@ -13536,14 +14126,14 @@
         </p:nvSpPr>
         <p:spPr>
           <a:xfrm>
-            <a:off x="10253167" y="457200"/>
-            <a:ext cx="1389888" cy="457200"/>
+            <a:off x="10408615" y="457200"/>
+            <a:ext cx="1234440" cy="457200"/>
           </a:xfrm>
           <a:prstGeom prst="roundRect">
             <a:avLst/>
           </a:prstGeom>
           <a:solidFill>
-            <a:srgbClr val="1E40AF"/>
+            <a:srgbClr val="991B1B"/>
           </a:solidFill>
           <a:ln>
             <a:noFill/>
@@ -13576,7 +14166,7 @@
                 </a:solidFill>
                 <a:latin typeface="Arial"/>
               </a:rPr>
-              <a:t>ĐỀ BÀI</a:t>
+              <a:t>VIDEO</a:t>
             </a:r>
           </a:p>
         </p:txBody>
@@ -13590,7 +14180,7 @@
         <p:spPr>
           <a:xfrm>
             <a:off x="731520" y="274320"/>
-            <a:ext cx="9582912" cy="868680"/>
+            <a:ext cx="9738360" cy="868680"/>
           </a:xfrm>
           <a:prstGeom prst="rect">
             <a:avLst/>
@@ -13610,7 +14200,7 @@
                 </a:solidFill>
                 <a:latin typeface="Arial"/>
               </a:rPr>
-              <a:t>TIẾNG THU VÀ TIẾNG THƠ</a:t>
+              <a:t>VIDEO THAM KHẢO</a:t>
             </a:r>
           </a:p>
         </p:txBody>
@@ -13694,16 +14284,40 @@
           </a:p>
         </p:txBody>
       </p:sp>
-      <p:sp>
-        <p:nvSpPr>
-          <p:cNvPr id="7" name="TextBox 6"/>
+      <p:pic>
+        <p:nvPicPr>
+          <p:cNvPr id="7" name="Picture 6" descr="QR_video_0Ff0pYhbatU.png"/>
+          <p:cNvPicPr>
+            <a:picLocks noChangeAspect="1"/>
+          </p:cNvPicPr>
+          <p:nvPr/>
+        </p:nvPicPr>
+        <p:blipFill>
+          <a:blip r:embed="rId2"/>
+          <a:stretch>
+            <a:fillRect/>
+          </a:stretch>
+        </p:blipFill>
+        <p:spPr>
+          <a:xfrm>
+            <a:off x="8412480" y="1554480"/>
+            <a:ext cx="3108960" cy="3108960"/>
+          </a:xfrm>
+          <a:prstGeom prst="rect">
+            <a:avLst/>
+          </a:prstGeom>
+        </p:spPr>
+      </p:pic>
+      <p:sp>
+        <p:nvSpPr>
+          <p:cNvPr id="8" name="TextBox 7"/>
           <p:cNvSpPr txBox="1"/>
           <p:nvPr/>
         </p:nvSpPr>
         <p:spPr>
           <a:xfrm>
-            <a:off x="731520" y="1463040"/>
-            <a:ext cx="10789920" cy="3566160"/>
+            <a:off x="731520" y="1554480"/>
+            <a:ext cx="7498079" cy="4206240"/>
           </a:xfrm>
           <a:prstGeom prst="rect">
             <a:avLst/>
@@ -13728,94 +14342,61 @@
                 </a:solidFill>
                 <a:latin typeface="Calibri"/>
               </a:rPr>
-              <a:t>Theo Chu Văn Sơn, “tiếng thu” và “tiếng thơ” tương ứng với những bình diện nào? Khác biệt lớn nhất trong cách miêu tả thiên nhiên của Thơ mới so với thơ cổ điển?</a:t>
-            </a:r>
-          </a:p>
-        </p:txBody>
-      </p:sp>
-      <p:sp>
-        <p:nvSpPr>
-          <p:cNvPr id="8" name="Rounded Rectangle 7"/>
-          <p:cNvSpPr/>
-          <p:nvPr/>
-        </p:nvSpPr>
-        <p:spPr>
-          <a:xfrm>
-            <a:off x="731520" y="5120640"/>
-            <a:ext cx="10789920" cy="693420"/>
-          </a:xfrm>
-          <a:prstGeom prst="roundRect">
-            <a:avLst>
-              <a:gd name="adj" fmla="val 8000"/>
-            </a:avLst>
-          </a:prstGeom>
-          <a:solidFill>
-            <a:srgbClr val="EFF4FF"/>
-          </a:solidFill>
-          <a:ln w="19050">
-            <a:solidFill>
-              <a:srgbClr val="1E40AF"/>
-            </a:solidFill>
-          </a:ln>
-          <a:effectLst/>
-        </p:spPr>
-        <p:style>
-          <a:lnRef idx="1">
-            <a:schemeClr val="accent1"/>
-          </a:lnRef>
-          <a:fillRef idx="3">
-            <a:schemeClr val="accent1"/>
-          </a:fillRef>
-          <a:effectRef idx="2">
-            <a:schemeClr val="accent1"/>
-          </a:effectRef>
-          <a:fontRef idx="minor">
-            <a:schemeClr val="lt1"/>
-          </a:fontRef>
-        </p:style>
-        <p:txBody>
-          <a:bodyPr rtlCol="0" anchor="ctr"/>
-          <a:lstStyle/>
-          <a:p>
-            <a:pPr algn="ctr"/>
-          </a:p>
-        </p:txBody>
-      </p:sp>
-      <p:sp>
-        <p:nvSpPr>
-          <p:cNvPr id="9" name="TextBox 8"/>
-          <p:cNvSpPr txBox="1"/>
-          <p:nvPr/>
-        </p:nvSpPr>
-        <p:spPr>
-          <a:xfrm>
-            <a:off x="914400" y="5120640"/>
-            <a:ext cx="10424160" cy="693420"/>
-          </a:xfrm>
-          <a:prstGeom prst="rect">
-            <a:avLst/>
-          </a:prstGeom>
-          <a:noFill/>
-        </p:spPr>
-        <p:txBody>
-          <a:bodyPr wrap="square" anchor="ctr" lIns="45720" rIns="45720">
-            <a:spAutoFit/>
-          </a:bodyPr>
-          <a:lstStyle/>
+              <a:t>🎬 Radio Văn học: “Mùa xuân chín” (Hàn Mặc Tử) qua lời bình của TS. Chu Văn Sơn</a:t>
+            </a:r>
+          </a:p>
           <a:p>
             <a:pPr algn="l">
               <a:spcAft>
-                <a:spcPts val="400"/>
+                <a:spcPts val="800"/>
               </a:spcAft>
             </a:pPr>
             <a:r>
-              <a:rPr sz="2200" b="1">
-                <a:solidFill>
-                  <a:srgbClr val="1E40AF"/>
+              <a:rPr sz="2000">
+                <a:solidFill>
+                  <a:srgbClr val="64748B"/>
                 </a:solidFill>
                 <a:latin typeface="Calibri"/>
               </a:rPr>
-              <a:t>💡 Thơ cổ “nhìn” thiên nhiên, Thơ mới thì sao?</a:t>
+              <a:t>Kênh: Học Văn Cô Sương Mai</a:t>
+            </a:r>
+          </a:p>
+          <a:p>
+            <a:pPr algn="l" marL="365760" indent="-365760">
+              <a:spcAft>
+                <a:spcPts val="800"/>
+              </a:spcAft>
+              <a:buClr>
+                <a:srgbClr val="1E40AF"/>
+              </a:buClr>
+              <a:buFont typeface="Arial"/>
+              <a:buChar char="•"/>
+            </a:pPr>
+            <a:r>
+              <a:rPr sz="2000">
+                <a:solidFill>
+                  <a:srgbClr val="1E293B"/>
+                </a:solidFill>
+                <a:latin typeface="Calibri"/>
+              </a:rPr>
+              <a:t>Mở rộng – nghe bình thơ (ở nhà)</a:t>
+            </a:r>
+          </a:p>
+          <a:p>
+            <a:pPr algn="l">
+              <a:spcAft>
+                <a:spcPts val="800"/>
+              </a:spcAft>
+            </a:pPr>
+            <a:r>
+              <a:rPr sz="1600">
+                <a:solidFill>
+                  <a:srgbClr val="64748B"/>
+                </a:solidFill>
+                <a:latin typeface="Calibri"/>
+                <a:hlinkClick r:id="rId3"/>
+              </a:rPr>
+              <a:t>https://www.youtube.com/watch?v=0Ff0pYhbatU</a:t>
             </a:r>
           </a:p>
         </p:txBody>
@@ -13898,6 +14479,368 @@
         </p:nvSpPr>
         <p:spPr>
           <a:xfrm>
+            <a:off x="10253167" y="457200"/>
+            <a:ext cx="1389888" cy="457200"/>
+          </a:xfrm>
+          <a:prstGeom prst="roundRect">
+            <a:avLst/>
+          </a:prstGeom>
+          <a:solidFill>
+            <a:srgbClr val="1E40AF"/>
+          </a:solidFill>
+          <a:ln>
+            <a:noFill/>
+          </a:ln>
+          <a:effectLst/>
+        </p:spPr>
+        <p:style>
+          <a:lnRef idx="1">
+            <a:schemeClr val="accent1"/>
+          </a:lnRef>
+          <a:fillRef idx="3">
+            <a:schemeClr val="accent1"/>
+          </a:fillRef>
+          <a:effectRef idx="2">
+            <a:schemeClr val="accent1"/>
+          </a:effectRef>
+          <a:fontRef idx="minor">
+            <a:schemeClr val="lt1"/>
+          </a:fontRef>
+        </p:style>
+        <p:txBody>
+          <a:bodyPr rtlCol="0" anchor="ctr" wrap="none" tIns="0" bIns="0"/>
+          <a:lstStyle/>
+          <a:p>
+            <a:pPr algn="ctr"/>
+            <a:r>
+              <a:rPr sz="1400" b="1">
+                <a:solidFill>
+                  <a:srgbClr val="FFFFFF"/>
+                </a:solidFill>
+                <a:latin typeface="Arial"/>
+              </a:rPr>
+              <a:t>ĐỀ BÀI</a:t>
+            </a:r>
+          </a:p>
+        </p:txBody>
+      </p:sp>
+      <p:sp>
+        <p:nvSpPr>
+          <p:cNvPr id="4" name="TextBox 3"/>
+          <p:cNvSpPr txBox="1"/>
+          <p:nvPr/>
+        </p:nvSpPr>
+        <p:spPr>
+          <a:xfrm>
+            <a:off x="731520" y="274320"/>
+            <a:ext cx="9582912" cy="868680"/>
+          </a:xfrm>
+          <a:prstGeom prst="rect">
+            <a:avLst/>
+          </a:prstGeom>
+          <a:noFill/>
+        </p:spPr>
+        <p:txBody>
+          <a:bodyPr wrap="square" anchor="ctr">
+            <a:spAutoFit/>
+          </a:bodyPr>
+          <a:lstStyle/>
+          <a:p>
+            <a:r>
+              <a:rPr sz="3600" b="1">
+                <a:solidFill>
+                  <a:srgbClr val="1E40AF"/>
+                </a:solidFill>
+                <a:latin typeface="Arial"/>
+              </a:rPr>
+              <a:t>CON NGƯỜI VÀ MẠCH CẢM XÚC</a:t>
+            </a:r>
+          </a:p>
+        </p:txBody>
+      </p:sp>
+      <p:sp>
+        <p:nvSpPr>
+          <p:cNvPr id="5" name="Rectangle 4"/>
+          <p:cNvSpPr/>
+          <p:nvPr/>
+        </p:nvSpPr>
+        <p:spPr>
+          <a:xfrm>
+            <a:off x="457200" y="1207008"/>
+            <a:ext cx="11274552" cy="22000"/>
+          </a:xfrm>
+          <a:prstGeom prst="rect">
+            <a:avLst/>
+          </a:prstGeom>
+          <a:solidFill>
+            <a:srgbClr val="E2E8F0"/>
+          </a:solidFill>
+          <a:ln>
+            <a:noFill/>
+          </a:ln>
+          <a:effectLst/>
+        </p:spPr>
+        <p:style>
+          <a:lnRef idx="1">
+            <a:schemeClr val="accent1"/>
+          </a:lnRef>
+          <a:fillRef idx="3">
+            <a:schemeClr val="accent1"/>
+          </a:fillRef>
+          <a:effectRef idx="2">
+            <a:schemeClr val="accent1"/>
+          </a:effectRef>
+          <a:fontRef idx="minor">
+            <a:schemeClr val="lt1"/>
+          </a:fontRef>
+        </p:style>
+        <p:txBody>
+          <a:bodyPr rtlCol="0" anchor="ctr"/>
+          <a:lstStyle/>
+          <a:p>
+            <a:pPr algn="ctr"/>
+          </a:p>
+        </p:txBody>
+      </p:sp>
+      <p:sp>
+        <p:nvSpPr>
+          <p:cNvPr id="6" name="TextBox 5"/>
+          <p:cNvSpPr txBox="1"/>
+          <p:nvPr/>
+        </p:nvSpPr>
+        <p:spPr>
+          <a:xfrm>
+            <a:off x="457200" y="6355080"/>
+            <a:ext cx="11274552" cy="365760"/>
+          </a:xfrm>
+          <a:prstGeom prst="rect">
+            <a:avLst/>
+          </a:prstGeom>
+          <a:noFill/>
+        </p:spPr>
+        <p:txBody>
+          <a:bodyPr wrap="none">
+            <a:spAutoFit/>
+          </a:bodyPr>
+          <a:lstStyle/>
+          <a:p>
+            <a:pPr algn="r"/>
+            <a:r>
+              <a:rPr sz="1200">
+                <a:solidFill>
+                  <a:srgbClr val="64748B"/>
+                </a:solidFill>
+                <a:latin typeface="Calibri"/>
+              </a:rPr>
+              <a:t>Ngữ văn 10 · Bài 2: Vẻ Đẹp Của Thơ Ca          32</a:t>
+            </a:r>
+          </a:p>
+        </p:txBody>
+      </p:sp>
+      <p:sp>
+        <p:nvSpPr>
+          <p:cNvPr id="7" name="TextBox 6"/>
+          <p:cNvSpPr txBox="1"/>
+          <p:nvPr/>
+        </p:nvSpPr>
+        <p:spPr>
+          <a:xfrm>
+            <a:off x="731520" y="1463040"/>
+            <a:ext cx="10789920" cy="3566160"/>
+          </a:xfrm>
+          <a:prstGeom prst="rect">
+            <a:avLst/>
+          </a:prstGeom>
+          <a:noFill/>
+        </p:spPr>
+        <p:txBody>
+          <a:bodyPr wrap="square" anchor="t" lIns="45720" rIns="45720">
+            <a:spAutoFit/>
+          </a:bodyPr>
+          <a:lstStyle/>
+          <a:p>
+            <a:pPr algn="l">
+              <a:spcAft>
+                <a:spcPts val="800"/>
+              </a:spcAft>
+            </a:pPr>
+            <a:r>
+              <a:rPr sz="2600" b="1">
+                <a:solidFill>
+                  <a:srgbClr val="1E293B"/>
+                </a:solidFill>
+                <a:latin typeface="Calibri"/>
+              </a:rPr>
+              <a:t>Con người hiện diện qua những hình ảnh nào? Hình ảnh nào nằm trong tâm tưởng nhân vật trữ tình? Nêu cảm nhận về nhân vật trữ tình.</a:t>
+            </a:r>
+          </a:p>
+        </p:txBody>
+      </p:sp>
+      <p:sp>
+        <p:nvSpPr>
+          <p:cNvPr id="8" name="Rounded Rectangle 7"/>
+          <p:cNvSpPr/>
+          <p:nvPr/>
+        </p:nvSpPr>
+        <p:spPr>
+          <a:xfrm>
+            <a:off x="731520" y="5120640"/>
+            <a:ext cx="10789920" cy="693420"/>
+          </a:xfrm>
+          <a:prstGeom prst="roundRect">
+            <a:avLst>
+              <a:gd name="adj" fmla="val 8000"/>
+            </a:avLst>
+          </a:prstGeom>
+          <a:solidFill>
+            <a:srgbClr val="EFF4FF"/>
+          </a:solidFill>
+          <a:ln w="19050">
+            <a:solidFill>
+              <a:srgbClr val="1E40AF"/>
+            </a:solidFill>
+          </a:ln>
+          <a:effectLst/>
+        </p:spPr>
+        <p:style>
+          <a:lnRef idx="1">
+            <a:schemeClr val="accent1"/>
+          </a:lnRef>
+          <a:fillRef idx="3">
+            <a:schemeClr val="accent1"/>
+          </a:fillRef>
+          <a:effectRef idx="2">
+            <a:schemeClr val="accent1"/>
+          </a:effectRef>
+          <a:fontRef idx="minor">
+            <a:schemeClr val="lt1"/>
+          </a:fontRef>
+        </p:style>
+        <p:txBody>
+          <a:bodyPr rtlCol="0" anchor="ctr"/>
+          <a:lstStyle/>
+          <a:p>
+            <a:pPr algn="ctr"/>
+          </a:p>
+        </p:txBody>
+      </p:sp>
+      <p:sp>
+        <p:nvSpPr>
+          <p:cNvPr id="9" name="TextBox 8"/>
+          <p:cNvSpPr txBox="1"/>
+          <p:nvPr/>
+        </p:nvSpPr>
+        <p:spPr>
+          <a:xfrm>
+            <a:off x="914400" y="5120640"/>
+            <a:ext cx="10424160" cy="693420"/>
+          </a:xfrm>
+          <a:prstGeom prst="rect">
+            <a:avLst/>
+          </a:prstGeom>
+          <a:noFill/>
+        </p:spPr>
+        <p:txBody>
+          <a:bodyPr wrap="square" anchor="ctr" lIns="45720" rIns="45720">
+            <a:spAutoFit/>
+          </a:bodyPr>
+          <a:lstStyle/>
+          <a:p>
+            <a:pPr algn="l">
+              <a:spcAft>
+                <a:spcPts val="400"/>
+              </a:spcAft>
+            </a:pPr>
+            <a:r>
+              <a:rPr sz="2200" b="1">
+                <a:solidFill>
+                  <a:srgbClr val="1E40AF"/>
+                </a:solidFill>
+                <a:latin typeface="Calibri"/>
+              </a:rPr>
+              <a:t>💡 Phân biệt cảnh đang ngắm và cảnh hồi tưởng.</a:t>
+            </a:r>
+          </a:p>
+        </p:txBody>
+      </p:sp>
+    </p:spTree>
+  </p:cSld>
+  <p:clrMapOvr>
+    <a:masterClrMapping/>
+  </p:clrMapOvr>
+</p:sld>
+</file>
+
+<file path=ppt/slides/slide33.xml><?xml version="1.0" encoding="utf-8"?>
+<p:sld xmlns:a="http://schemas.openxmlformats.org/drawingml/2006/main" xmlns:p="http://schemas.openxmlformats.org/presentationml/2006/main" xmlns:r="http://schemas.openxmlformats.org/officeDocument/2006/relationships">
+  <p:cSld>
+    <p:bg>
+      <p:bgPr>
+        <a:solidFill>
+          <a:srgbClr val="FFFFFF"/>
+        </a:solidFill>
+        <a:effectLst/>
+      </p:bgPr>
+    </p:bg>
+    <p:spTree>
+      <p:nvGrpSpPr>
+        <p:cNvPr id="1" name=""/>
+        <p:cNvGrpSpPr/>
+        <p:nvPr/>
+      </p:nvGrpSpPr>
+      <p:grpSpPr/>
+      <p:sp>
+        <p:nvSpPr>
+          <p:cNvPr id="2" name="Rectangle 1"/>
+          <p:cNvSpPr/>
+          <p:nvPr/>
+        </p:nvSpPr>
+        <p:spPr>
+          <a:xfrm>
+            <a:off x="457200" y="384048"/>
+            <a:ext cx="109728" cy="658368"/>
+          </a:xfrm>
+          <a:prstGeom prst="rect">
+            <a:avLst/>
+          </a:prstGeom>
+          <a:solidFill>
+            <a:srgbClr val="1E40AF"/>
+          </a:solidFill>
+          <a:ln>
+            <a:noFill/>
+          </a:ln>
+          <a:effectLst/>
+        </p:spPr>
+        <p:style>
+          <a:lnRef idx="1">
+            <a:schemeClr val="accent1"/>
+          </a:lnRef>
+          <a:fillRef idx="3">
+            <a:schemeClr val="accent1"/>
+          </a:fillRef>
+          <a:effectRef idx="2">
+            <a:schemeClr val="accent1"/>
+          </a:effectRef>
+          <a:fontRef idx="minor">
+            <a:schemeClr val="lt1"/>
+          </a:fontRef>
+        </p:style>
+        <p:txBody>
+          <a:bodyPr rtlCol="0" anchor="ctr"/>
+          <a:lstStyle/>
+          <a:p>
+            <a:pPr algn="ctr"/>
+          </a:p>
+        </p:txBody>
+      </p:sp>
+      <p:sp>
+        <p:nvSpPr>
+          <p:cNvPr id="3" name="Rounded Rectangle 2"/>
+          <p:cNvSpPr/>
+          <p:nvPr/>
+        </p:nvSpPr>
+        <p:spPr>
+          <a:xfrm>
             <a:off x="9942271" y="457200"/>
             <a:ext cx="1700784" cy="457200"/>
           </a:xfrm>
@@ -13972,7 +14915,7 @@
                 </a:solidFill>
                 <a:latin typeface="Arial"/>
               </a:rPr>
-              <a:t>TIẾNG THU VÀ TIẾNG THƠ</a:t>
+              <a:t>CON NGƯỜI VÀ MẠCH CẢM XÚC</a:t>
             </a:r>
           </a:p>
         </p:txBody>
@@ -14051,7 +14994,7 @@
                 </a:solidFill>
                 <a:latin typeface="Calibri"/>
               </a:rPr>
-              <a:t>Ngữ văn 10 · Bài 2: Vẻ Đẹp Của Thơ Ca          32</a:t>
+              <a:t>Ngữ văn 10 · Bài 2: Vẻ Đẹp Của Thơ Ca          33</a:t>
             </a:r>
           </a:p>
         </p:txBody>
@@ -14095,7 +15038,7 @@
                 </a:solidFill>
                 <a:latin typeface="Calibri"/>
               </a:rPr>
-              <a:t>“Tiếng thu”: điệu hồn (nội dung); “tiếng thơ”: âm hưởng ngôn từ (hình thức).</a:t>
+              <a:t>Thôn nữ hát trên đồi, người theo chồng bỏ cuộc chơi.</a:t>
             </a:r>
           </a:p>
           <a:p>
@@ -14116,7 +15059,7 @@
                 </a:solidFill>
                 <a:latin typeface="Calibri"/>
               </a:rPr>
-              <a:t>Thơ cổ điển: thiên nhiên qua thị giác.</a:t>
+              <a:t>Người chị gánh thóc – hình ảnh trong tâm tưởng.</a:t>
             </a:r>
           </a:p>
           <a:p>
@@ -14137,28 +15080,7 @@
                 </a:solidFill>
                 <a:latin typeface="Calibri"/>
               </a:rPr>
-              <a:t>Thơ mới: thiên nhiên qua thính giác, cái tôi rung cảm.</a:t>
-            </a:r>
-          </a:p>
-          <a:p>
-            <a:pPr algn="l" marL="365760" indent="-365760">
-              <a:spcAft>
-                <a:spcPts val="800"/>
-              </a:spcAft>
-              <a:buClr>
-                <a:srgbClr val="1E40AF"/>
-              </a:buClr>
-              <a:buFont typeface="Arial"/>
-              <a:buChar char="•"/>
-            </a:pPr>
-            <a:r>
-              <a:rPr sz="2300">
-                <a:solidFill>
-                  <a:srgbClr val="1E293B"/>
-                </a:solidFill>
-                <a:latin typeface="Calibri"/>
-              </a:rPr>
-              <a:t>Thống kê 45 âm – 33 âm bằng → điệu êm đềm, tiêu tao.</a:t>
+              <a:t>“Khách xa” bâng khuâng, sực nhớ làng.</a:t>
             </a:r>
           </a:p>
         </p:txBody>
@@ -14245,7 +15167,7 @@
                 </a:solidFill>
                 <a:latin typeface="Calibri"/>
               </a:rPr>
-              <a:t>Sức hấp dẫn của thơ: cảm xúc hoà với nhạc điệu ngôn từ.</a:t>
+              <a:t>Say sưa cảnh xuân → tiếc nuối → nhớ thương.</a:t>
             </a:r>
           </a:p>
         </p:txBody>
@@ -14258,7 +15180,7 @@
 </p:sld>
 </file>
 
-<file path=ppt/slides/slide33.xml><?xml version="1.0" encoding="utf-8"?>
+<file path=ppt/slides/slide34.xml><?xml version="1.0" encoding="utf-8"?>
 <p:sld xmlns:a="http://schemas.openxmlformats.org/drawingml/2006/main" xmlns:p="http://schemas.openxmlformats.org/presentationml/2006/main" xmlns:r="http://schemas.openxmlformats.org/officeDocument/2006/relationships">
   <p:cSld>
     <p:bg>
@@ -14354,369 +15276,7 @@
                 </a:solidFill>
                 <a:latin typeface="Calibri"/>
               </a:rPr>
-              <a:t>TIẾT 18: THỰC HÀNH TIẾNG VIỆT</a:t>
-            </a:r>
-          </a:p>
-        </p:txBody>
-      </p:sp>
-    </p:spTree>
-  </p:cSld>
-  <p:clrMapOvr>
-    <a:masterClrMapping/>
-  </p:clrMapOvr>
-</p:sld>
-</file>
-
-<file path=ppt/slides/slide34.xml><?xml version="1.0" encoding="utf-8"?>
-<p:sld xmlns:a="http://schemas.openxmlformats.org/drawingml/2006/main" xmlns:p="http://schemas.openxmlformats.org/presentationml/2006/main" xmlns:r="http://schemas.openxmlformats.org/officeDocument/2006/relationships">
-  <p:cSld>
-    <p:bg>
-      <p:bgPr>
-        <a:solidFill>
-          <a:srgbClr val="FFFFFF"/>
-        </a:solidFill>
-        <a:effectLst/>
-      </p:bgPr>
-    </p:bg>
-    <p:spTree>
-      <p:nvGrpSpPr>
-        <p:cNvPr id="1" name=""/>
-        <p:cNvGrpSpPr/>
-        <p:nvPr/>
-      </p:nvGrpSpPr>
-      <p:grpSpPr/>
-      <p:sp>
-        <p:nvSpPr>
-          <p:cNvPr id="2" name="Rectangle 1"/>
-          <p:cNvSpPr/>
-          <p:nvPr/>
-        </p:nvSpPr>
-        <p:spPr>
-          <a:xfrm>
-            <a:off x="457200" y="384048"/>
-            <a:ext cx="109728" cy="658368"/>
-          </a:xfrm>
-          <a:prstGeom prst="rect">
-            <a:avLst/>
-          </a:prstGeom>
-          <a:solidFill>
-            <a:srgbClr val="1E40AF"/>
-          </a:solidFill>
-          <a:ln>
-            <a:noFill/>
-          </a:ln>
-          <a:effectLst/>
-        </p:spPr>
-        <p:style>
-          <a:lnRef idx="1">
-            <a:schemeClr val="accent1"/>
-          </a:lnRef>
-          <a:fillRef idx="3">
-            <a:schemeClr val="accent1"/>
-          </a:fillRef>
-          <a:effectRef idx="2">
-            <a:schemeClr val="accent1"/>
-          </a:effectRef>
-          <a:fontRef idx="minor">
-            <a:schemeClr val="lt1"/>
-          </a:fontRef>
-        </p:style>
-        <p:txBody>
-          <a:bodyPr rtlCol="0" anchor="ctr"/>
-          <a:lstStyle/>
-          <a:p>
-            <a:pPr algn="ctr"/>
-          </a:p>
-        </p:txBody>
-      </p:sp>
-      <p:sp>
-        <p:nvSpPr>
-          <p:cNvPr id="3" name="Rounded Rectangle 2"/>
-          <p:cNvSpPr/>
-          <p:nvPr/>
-        </p:nvSpPr>
-        <p:spPr>
-          <a:xfrm>
-            <a:off x="10253167" y="457200"/>
-            <a:ext cx="1389888" cy="457200"/>
-          </a:xfrm>
-          <a:prstGeom prst="roundRect">
-            <a:avLst/>
-          </a:prstGeom>
-          <a:solidFill>
-            <a:srgbClr val="1E40AF"/>
-          </a:solidFill>
-          <a:ln>
-            <a:noFill/>
-          </a:ln>
-          <a:effectLst/>
-        </p:spPr>
-        <p:style>
-          <a:lnRef idx="1">
-            <a:schemeClr val="accent1"/>
-          </a:lnRef>
-          <a:fillRef idx="3">
-            <a:schemeClr val="accent1"/>
-          </a:fillRef>
-          <a:effectRef idx="2">
-            <a:schemeClr val="accent1"/>
-          </a:effectRef>
-          <a:fontRef idx="minor">
-            <a:schemeClr val="lt1"/>
-          </a:fontRef>
-        </p:style>
-        <p:txBody>
-          <a:bodyPr rtlCol="0" anchor="ctr" wrap="none" tIns="0" bIns="0"/>
-          <a:lstStyle/>
-          <a:p>
-            <a:pPr algn="ctr"/>
-            <a:r>
-              <a:rPr sz="1400" b="1">
-                <a:solidFill>
-                  <a:srgbClr val="FFFFFF"/>
-                </a:solidFill>
-                <a:latin typeface="Arial"/>
-              </a:rPr>
-              <a:t>ĐỀ BÀI</a:t>
-            </a:r>
-          </a:p>
-        </p:txBody>
-      </p:sp>
-      <p:sp>
-        <p:nvSpPr>
-          <p:cNvPr id="4" name="TextBox 3"/>
-          <p:cNvSpPr txBox="1"/>
-          <p:nvPr/>
-        </p:nvSpPr>
-        <p:spPr>
-          <a:xfrm>
-            <a:off x="731520" y="274320"/>
-            <a:ext cx="9582912" cy="868680"/>
-          </a:xfrm>
-          <a:prstGeom prst="rect">
-            <a:avLst/>
-          </a:prstGeom>
-          <a:noFill/>
-        </p:spPr>
-        <p:txBody>
-          <a:bodyPr wrap="square" anchor="ctr">
-            <a:spAutoFit/>
-          </a:bodyPr>
-          <a:lstStyle/>
-          <a:p>
-            <a:r>
-              <a:rPr sz="3600" b="1">
-                <a:solidFill>
-                  <a:srgbClr val="1E40AF"/>
-                </a:solidFill>
-                <a:latin typeface="Arial"/>
-              </a:rPr>
-              <a:t>LỖI DÙNG TỪ</a:t>
-            </a:r>
-          </a:p>
-        </p:txBody>
-      </p:sp>
-      <p:sp>
-        <p:nvSpPr>
-          <p:cNvPr id="5" name="Rectangle 4"/>
-          <p:cNvSpPr/>
-          <p:nvPr/>
-        </p:nvSpPr>
-        <p:spPr>
-          <a:xfrm>
-            <a:off x="457200" y="1207008"/>
-            <a:ext cx="11274552" cy="22000"/>
-          </a:xfrm>
-          <a:prstGeom prst="rect">
-            <a:avLst/>
-          </a:prstGeom>
-          <a:solidFill>
-            <a:srgbClr val="E2E8F0"/>
-          </a:solidFill>
-          <a:ln>
-            <a:noFill/>
-          </a:ln>
-          <a:effectLst/>
-        </p:spPr>
-        <p:style>
-          <a:lnRef idx="1">
-            <a:schemeClr val="accent1"/>
-          </a:lnRef>
-          <a:fillRef idx="3">
-            <a:schemeClr val="accent1"/>
-          </a:fillRef>
-          <a:effectRef idx="2">
-            <a:schemeClr val="accent1"/>
-          </a:effectRef>
-          <a:fontRef idx="minor">
-            <a:schemeClr val="lt1"/>
-          </a:fontRef>
-        </p:style>
-        <p:txBody>
-          <a:bodyPr rtlCol="0" anchor="ctr"/>
-          <a:lstStyle/>
-          <a:p>
-            <a:pPr algn="ctr"/>
-          </a:p>
-        </p:txBody>
-      </p:sp>
-      <p:sp>
-        <p:nvSpPr>
-          <p:cNvPr id="6" name="TextBox 5"/>
-          <p:cNvSpPr txBox="1"/>
-          <p:nvPr/>
-        </p:nvSpPr>
-        <p:spPr>
-          <a:xfrm>
-            <a:off x="457200" y="6355080"/>
-            <a:ext cx="11274552" cy="365760"/>
-          </a:xfrm>
-          <a:prstGeom prst="rect">
-            <a:avLst/>
-          </a:prstGeom>
-          <a:noFill/>
-        </p:spPr>
-        <p:txBody>
-          <a:bodyPr wrap="none">
-            <a:spAutoFit/>
-          </a:bodyPr>
-          <a:lstStyle/>
-          <a:p>
-            <a:pPr algn="r"/>
-            <a:r>
-              <a:rPr sz="1200">
-                <a:solidFill>
-                  <a:srgbClr val="64748B"/>
-                </a:solidFill>
-                <a:latin typeface="Calibri"/>
-              </a:rPr>
-              <a:t>Ngữ văn 10 · Bài 2: Vẻ Đẹp Của Thơ Ca          34</a:t>
-            </a:r>
-          </a:p>
-        </p:txBody>
-      </p:sp>
-      <p:sp>
-        <p:nvSpPr>
-          <p:cNvPr id="7" name="TextBox 6"/>
-          <p:cNvSpPr txBox="1"/>
-          <p:nvPr/>
-        </p:nvSpPr>
-        <p:spPr>
-          <a:xfrm>
-            <a:off x="731520" y="1463040"/>
-            <a:ext cx="10789920" cy="3566160"/>
-          </a:xfrm>
-          <a:prstGeom prst="rect">
-            <a:avLst/>
-          </a:prstGeom>
-          <a:noFill/>
-        </p:spPr>
-        <p:txBody>
-          <a:bodyPr wrap="square" anchor="t" lIns="45720" rIns="45720">
-            <a:spAutoFit/>
-          </a:bodyPr>
-          <a:lstStyle/>
-          <a:p>
-            <a:pPr algn="l">
-              <a:spcAft>
-                <a:spcPts val="800"/>
-              </a:spcAft>
-            </a:pPr>
-            <a:r>
-              <a:rPr sz="2600" b="1">
-                <a:solidFill>
-                  <a:srgbClr val="1E293B"/>
-                </a:solidFill>
-                <a:latin typeface="Calibri"/>
-              </a:rPr>
-              <a:t>Tìm lỗi và sửa: “Đề tài, chủ đề, cảm hứng cũng như nội dung của các bài thơ hai-cư rất đa dạng, khác nhau.”</a:t>
-            </a:r>
-          </a:p>
-        </p:txBody>
-      </p:sp>
-      <p:sp>
-        <p:nvSpPr>
-          <p:cNvPr id="8" name="Rounded Rectangle 7"/>
-          <p:cNvSpPr/>
-          <p:nvPr/>
-        </p:nvSpPr>
-        <p:spPr>
-          <a:xfrm>
-            <a:off x="731520" y="5120640"/>
-            <a:ext cx="10789920" cy="693420"/>
-          </a:xfrm>
-          <a:prstGeom prst="roundRect">
-            <a:avLst>
-              <a:gd name="adj" fmla="val 8000"/>
-            </a:avLst>
-          </a:prstGeom>
-          <a:solidFill>
-            <a:srgbClr val="EFF4FF"/>
-          </a:solidFill>
-          <a:ln w="19050">
-            <a:solidFill>
-              <a:srgbClr val="1E40AF"/>
-            </a:solidFill>
-          </a:ln>
-          <a:effectLst/>
-        </p:spPr>
-        <p:style>
-          <a:lnRef idx="1">
-            <a:schemeClr val="accent1"/>
-          </a:lnRef>
-          <a:fillRef idx="3">
-            <a:schemeClr val="accent1"/>
-          </a:fillRef>
-          <a:effectRef idx="2">
-            <a:schemeClr val="accent1"/>
-          </a:effectRef>
-          <a:fontRef idx="minor">
-            <a:schemeClr val="lt1"/>
-          </a:fontRef>
-        </p:style>
-        <p:txBody>
-          <a:bodyPr rtlCol="0" anchor="ctr"/>
-          <a:lstStyle/>
-          <a:p>
-            <a:pPr algn="ctr"/>
-          </a:p>
-        </p:txBody>
-      </p:sp>
-      <p:sp>
-        <p:nvSpPr>
-          <p:cNvPr id="9" name="TextBox 8"/>
-          <p:cNvSpPr txBox="1"/>
-          <p:nvPr/>
-        </p:nvSpPr>
-        <p:spPr>
-          <a:xfrm>
-            <a:off x="914400" y="5120640"/>
-            <a:ext cx="10424160" cy="693420"/>
-          </a:xfrm>
-          <a:prstGeom prst="rect">
-            <a:avLst/>
-          </a:prstGeom>
-          <a:noFill/>
-        </p:spPr>
-        <p:txBody>
-          <a:bodyPr wrap="square" anchor="ctr" lIns="45720" rIns="45720">
-            <a:spAutoFit/>
-          </a:bodyPr>
-          <a:lstStyle/>
-          <a:p>
-            <a:pPr algn="l">
-              <a:spcAft>
-                <a:spcPts val="400"/>
-              </a:spcAft>
-            </a:pPr>
-            <a:r>
-              <a:rPr sz="2200" b="1">
-                <a:solidFill>
-                  <a:srgbClr val="1E40AF"/>
-                </a:solidFill>
-                <a:latin typeface="Calibri"/>
-              </a:rPr>
-              <a:t>💡 Có từ nào thừa, trùng nghĩa?</a:t>
+              <a:t>TIẾT 17: BẢN HOÀ ÂM NGÔN TỪ TRONG TIẾNG THU</a:t>
             </a:r>
           </a:p>
         </p:txBody>
@@ -14799,8 +15359,8 @@
         </p:nvSpPr>
         <p:spPr>
           <a:xfrm>
-            <a:off x="9942271" y="457200"/>
-            <a:ext cx="1700784" cy="457200"/>
+            <a:off x="10408615" y="457200"/>
+            <a:ext cx="1234440" cy="457200"/>
           </a:xfrm>
           <a:prstGeom prst="roundRect">
             <a:avLst/>
@@ -14839,7 +15399,7 @@
                 </a:solidFill>
                 <a:latin typeface="Arial"/>
               </a:rPr>
-              <a:t>LỜI GIẢI</a:t>
+              <a:t>VIDEO</a:t>
             </a:r>
           </a:p>
         </p:txBody>
@@ -14853,7 +15413,7 @@
         <p:spPr>
           <a:xfrm>
             <a:off x="731520" y="274320"/>
-            <a:ext cx="9272016" cy="868680"/>
+            <a:ext cx="9738360" cy="868680"/>
           </a:xfrm>
           <a:prstGeom prst="rect">
             <a:avLst/>
@@ -14873,7 +15433,7 @@
                 </a:solidFill>
                 <a:latin typeface="Arial"/>
               </a:rPr>
-              <a:t>LỖI DÙNG TỪ</a:t>
+              <a:t>VIDEO THAM KHẢO</a:t>
             </a:r>
           </a:p>
         </p:txBody>
@@ -14957,16 +15517,40 @@
           </a:p>
         </p:txBody>
       </p:sp>
-      <p:sp>
-        <p:nvSpPr>
-          <p:cNvPr id="7" name="TextBox 6"/>
+      <p:pic>
+        <p:nvPicPr>
+          <p:cNvPr id="7" name="Picture 6" descr="QR_video_c5RVyHI_TeU.png"/>
+          <p:cNvPicPr>
+            <a:picLocks noChangeAspect="1"/>
+          </p:cNvPicPr>
+          <p:nvPr/>
+        </p:nvPicPr>
+        <p:blipFill>
+          <a:blip r:embed="rId2"/>
+          <a:stretch>
+            <a:fillRect/>
+          </a:stretch>
+        </p:blipFill>
+        <p:spPr>
+          <a:xfrm>
+            <a:off x="8412480" y="1554480"/>
+            <a:ext cx="3108960" cy="3108960"/>
+          </a:xfrm>
+          <a:prstGeom prst="rect">
+            <a:avLst/>
+          </a:prstGeom>
+        </p:spPr>
+      </p:pic>
+      <p:sp>
+        <p:nvSpPr>
+          <p:cNvPr id="8" name="TextBox 7"/>
           <p:cNvSpPr txBox="1"/>
           <p:nvPr/>
         </p:nvSpPr>
         <p:spPr>
           <a:xfrm>
-            <a:off x="731520" y="1463040"/>
-            <a:ext cx="10789920" cy="3474720"/>
+            <a:off x="731520" y="1554480"/>
+            <a:ext cx="7498079" cy="4206240"/>
           </a:xfrm>
           <a:prstGeom prst="rect">
             <a:avLst/>
@@ -14978,6 +15562,38 @@
             <a:spAutoFit/>
           </a:bodyPr>
           <a:lstStyle/>
+          <a:p>
+            <a:pPr algn="l">
+              <a:spcAft>
+                <a:spcPts val="800"/>
+              </a:spcAft>
+            </a:pPr>
+            <a:r>
+              <a:rPr sz="2600" b="1">
+                <a:solidFill>
+                  <a:srgbClr val="1E293B"/>
+                </a:solidFill>
+                <a:latin typeface="Calibri"/>
+              </a:rPr>
+              <a:t>🎬 Bài thơ Tiếng thu – Lưu Trọng Lư – Ngọc Sang diễn ngâm</a:t>
+            </a:r>
+          </a:p>
+          <a:p>
+            <a:pPr algn="l">
+              <a:spcAft>
+                <a:spcPts val="800"/>
+              </a:spcAft>
+            </a:pPr>
+            <a:r>
+              <a:rPr sz="2000">
+                <a:solidFill>
+                  <a:srgbClr val="64748B"/>
+                </a:solidFill>
+                <a:latin typeface="Calibri"/>
+              </a:rPr>
+              <a:t>Kênh: Nghệ sĩ ngâm thơ Ngọc Sang</a:t>
+            </a:r>
+          </a:p>
           <a:p>
             <a:pPr algn="l" marL="365760" indent="-365760">
               <a:spcAft>
@@ -14990,142 +15606,30 @@
               <a:buChar char="•"/>
             </a:pPr>
             <a:r>
-              <a:rPr sz="2300">
+              <a:rPr sz="2000">
                 <a:solidFill>
                   <a:srgbClr val="1E293B"/>
                 </a:solidFill>
                 <a:latin typeface="Calibri"/>
               </a:rPr>
-              <a:t>“cũng như nội dung” thừa (đề tài, chủ đề đã là nội dung).</a:t>
-            </a:r>
-          </a:p>
-          <a:p>
-            <a:pPr algn="l" marL="365760" indent="-365760">
+              <a:t>Mở đầu Văn bản 6 (thay cho bài hát phổ thơ)</a:t>
+            </a:r>
+          </a:p>
+          <a:p>
+            <a:pPr algn="l">
               <a:spcAft>
                 <a:spcPts val="800"/>
               </a:spcAft>
-              <a:buClr>
-                <a:srgbClr val="1E40AF"/>
-              </a:buClr>
-              <a:buFont typeface="Arial"/>
-              <a:buChar char="•"/>
             </a:pPr>
             <a:r>
-              <a:rPr sz="2300">
-                <a:solidFill>
-                  <a:srgbClr val="1E293B"/>
+              <a:rPr sz="1600">
+                <a:solidFill>
+                  <a:srgbClr val="64748B"/>
                 </a:solidFill>
                 <a:latin typeface="Calibri"/>
-              </a:rPr>
-              <a:t>“đa dạng, khác nhau” trùng nghĩa.</a:t>
-            </a:r>
-          </a:p>
-          <a:p>
-            <a:pPr algn="l" marL="365760" indent="-365760">
-              <a:spcAft>
-                <a:spcPts val="800"/>
-              </a:spcAft>
-              <a:buClr>
-                <a:srgbClr val="1E40AF"/>
-              </a:buClr>
-              <a:buFont typeface="Arial"/>
-              <a:buChar char="•"/>
-            </a:pPr>
-            <a:r>
-              <a:rPr sz="2300">
-                <a:solidFill>
-                  <a:srgbClr val="1E293B"/>
-                </a:solidFill>
-                <a:latin typeface="Calibri"/>
-              </a:rPr>
-              <a:t>Sửa: “Đề tài, chủ đề, cảm hứng của các bài thơ hai-cư rất đa dạng.”</a:t>
-            </a:r>
-          </a:p>
-        </p:txBody>
-      </p:sp>
-      <p:sp>
-        <p:nvSpPr>
-          <p:cNvPr id="8" name="Rounded Rectangle 7"/>
-          <p:cNvSpPr/>
-          <p:nvPr/>
-        </p:nvSpPr>
-        <p:spPr>
-          <a:xfrm>
-            <a:off x="731520" y="5074920"/>
-            <a:ext cx="10789920" cy="731520"/>
-          </a:xfrm>
-          <a:prstGeom prst="roundRect">
-            <a:avLst>
-              <a:gd name="adj" fmla="val 8000"/>
-            </a:avLst>
-          </a:prstGeom>
-          <a:solidFill>
-            <a:srgbClr val="FEF2F2"/>
-          </a:solidFill>
-          <a:ln w="19050">
-            <a:solidFill>
-              <a:srgbClr val="991B1B"/>
-            </a:solidFill>
-          </a:ln>
-          <a:effectLst/>
-        </p:spPr>
-        <p:style>
-          <a:lnRef idx="1">
-            <a:schemeClr val="accent1"/>
-          </a:lnRef>
-          <a:fillRef idx="3">
-            <a:schemeClr val="accent1"/>
-          </a:fillRef>
-          <a:effectRef idx="2">
-            <a:schemeClr val="accent1"/>
-          </a:effectRef>
-          <a:fontRef idx="minor">
-            <a:schemeClr val="lt1"/>
-          </a:fontRef>
-        </p:style>
-        <p:txBody>
-          <a:bodyPr rtlCol="0" anchor="ctr"/>
-          <a:lstStyle/>
-          <a:p>
-            <a:pPr algn="ctr"/>
-          </a:p>
-        </p:txBody>
-      </p:sp>
-      <p:sp>
-        <p:nvSpPr>
-          <p:cNvPr id="9" name="TextBox 8"/>
-          <p:cNvSpPr txBox="1"/>
-          <p:nvPr/>
-        </p:nvSpPr>
-        <p:spPr>
-          <a:xfrm>
-            <a:off x="914400" y="5074920"/>
-            <a:ext cx="10424160" cy="731520"/>
-          </a:xfrm>
-          <a:prstGeom prst="rect">
-            <a:avLst/>
-          </a:prstGeom>
-          <a:noFill/>
-        </p:spPr>
-        <p:txBody>
-          <a:bodyPr wrap="square" anchor="ctr" lIns="45720" rIns="45720">
-            <a:spAutoFit/>
-          </a:bodyPr>
-          <a:lstStyle/>
-          <a:p>
-            <a:pPr algn="l">
-              <a:spcAft>
-                <a:spcPts val="400"/>
-              </a:spcAft>
-            </a:pPr>
-            <a:r>
-              <a:rPr sz="2400" b="1">
-                <a:solidFill>
-                  <a:srgbClr val="991B1B"/>
-                </a:solidFill>
-                <a:latin typeface="Calibri"/>
-              </a:rPr>
-              <a:t>Tránh lặp, thừa từ.</a:t>
+                <a:hlinkClick r:id="rId3"/>
+              </a:rPr>
+              <a:t>https://www.youtube.com/watch?v=c5RVyHI_TeU</a:t>
             </a:r>
           </a:p>
         </p:txBody>
@@ -15282,7 +15786,7 @@
                 </a:solidFill>
                 <a:latin typeface="Arial"/>
               </a:rPr>
-              <a:t>LỖI TRẬT TỰ TỪ</a:t>
+              <a:t>TIẾNG THU VÀ TIẾNG THƠ</a:t>
             </a:r>
           </a:p>
         </p:txBody>
@@ -15400,7 +15904,7 @@
                 </a:solidFill>
                 <a:latin typeface="Calibri"/>
               </a:rPr>
-              <a:t>Câu nào mắc lỗi trật tự từ? Sửa lại: “Một bộ phận độc giả đông đảo đã không cảm nhận được cái mới ngay trong thơ Hàn Mặc Tử.”</a:t>
+              <a:t>Theo Chu Văn Sơn, “tiếng thu” và “tiếng thơ” tương ứng với những bình diện nào? Khác biệt lớn nhất trong cách miêu tả thiên nhiên của Thơ mới so với thơ cổ điển?</a:t>
             </a:r>
           </a:p>
         </p:txBody>
@@ -15487,7 +15991,7 @@
                 </a:solidFill>
                 <a:latin typeface="Calibri"/>
               </a:rPr>
-              <a:t>💡 “đông đảo” bổ nghĩa cho từ nào?</a:t>
+              <a:t>💡 Thơ cổ “nhìn” thiên nhiên, Thơ mới thì sao?</a:t>
             </a:r>
           </a:p>
         </p:txBody>
@@ -15644,7 +16148,7 @@
                 </a:solidFill>
                 <a:latin typeface="Arial"/>
               </a:rPr>
-              <a:t>LỖI TRẬT TỰ TỪ</a:t>
+              <a:t>TIẾNG THU VÀ TIẾNG THƠ</a:t>
             </a:r>
           </a:p>
         </p:txBody>
@@ -15767,7 +16271,7 @@
                 </a:solidFill>
                 <a:latin typeface="Calibri"/>
               </a:rPr>
-              <a:t>Sai trật tự: “bộ phận độc giả đông đảo”.</a:t>
+              <a:t>“Tiếng thu”: điệu hồn (nội dung); “tiếng thơ”: âm hưởng ngôn từ (hình thức).</a:t>
             </a:r>
           </a:p>
           <a:p>
@@ -15788,7 +16292,7 @@
                 </a:solidFill>
                 <a:latin typeface="Calibri"/>
               </a:rPr>
-              <a:t>Sửa: “Một bộ phận đông đảo độc giả…”.</a:t>
+              <a:t>Thơ cổ điển: thiên nhiên qua thị giác.</a:t>
             </a:r>
           </a:p>
           <a:p>
@@ -15809,7 +16313,28 @@
                 </a:solidFill>
                 <a:latin typeface="Calibri"/>
               </a:rPr>
-              <a:t>Phân biệt lỗi trật tự từ với phép đảo ngữ trong văn học.</a:t>
+              <a:t>Thơ mới: thiên nhiên qua thính giác, cái tôi rung cảm.</a:t>
+            </a:r>
+          </a:p>
+          <a:p>
+            <a:pPr algn="l" marL="365760" indent="-365760">
+              <a:spcAft>
+                <a:spcPts val="800"/>
+              </a:spcAft>
+              <a:buClr>
+                <a:srgbClr val="1E40AF"/>
+              </a:buClr>
+              <a:buFont typeface="Arial"/>
+              <a:buChar char="•"/>
+            </a:pPr>
+            <a:r>
+              <a:rPr sz="2300">
+                <a:solidFill>
+                  <a:srgbClr val="1E293B"/>
+                </a:solidFill>
+                <a:latin typeface="Calibri"/>
+              </a:rPr>
+              <a:t>Thống kê 45 âm – 33 âm bằng → điệu êm đềm, tiêu tao.</a:t>
             </a:r>
           </a:p>
         </p:txBody>
@@ -15896,7 +16421,7 @@
                 </a:solidFill>
                 <a:latin typeface="Calibri"/>
               </a:rPr>
-              <a:t>Sắp xếp từ đúng quy tắc ngữ pháp.</a:t>
+              <a:t>Sức hấp dẫn của thơ: cảm xúc hoà với nhạc điệu ngôn từ.</a:t>
             </a:r>
           </a:p>
         </p:txBody>
@@ -16005,7 +16530,7 @@
                 </a:solidFill>
                 <a:latin typeface="Calibri"/>
               </a:rPr>
-              <a:t>TIẾT 19 – 22: VIẾT – NÓI VÀ NGHE</a:t>
+              <a:t>TIẾT 18: THỰC HÀNH TIẾNG VIỆT</a:t>
             </a:r>
           </a:p>
         </p:txBody>
@@ -16088,14 +16613,14 @@
         </p:nvSpPr>
         <p:spPr>
           <a:xfrm>
-            <a:off x="10097719" y="457200"/>
-            <a:ext cx="1545336" cy="457200"/>
+            <a:off x="10253167" y="457200"/>
+            <a:ext cx="1389888" cy="457200"/>
           </a:xfrm>
           <a:prstGeom prst="roundRect">
             <a:avLst/>
           </a:prstGeom>
           <a:solidFill>
-            <a:srgbClr val="166534"/>
+            <a:srgbClr val="1E40AF"/>
           </a:solidFill>
           <a:ln>
             <a:noFill/>
@@ -16128,7 +16653,7 @@
                 </a:solidFill>
                 <a:latin typeface="Arial"/>
               </a:rPr>
-              <a:t>GHI NHỚ</a:t>
+              <a:t>ĐỀ BÀI</a:t>
             </a:r>
           </a:p>
         </p:txBody>
@@ -16142,7 +16667,7 @@
         <p:spPr>
           <a:xfrm>
             <a:off x="731520" y="274320"/>
-            <a:ext cx="9427464" cy="868680"/>
+            <a:ext cx="9582912" cy="868680"/>
           </a:xfrm>
           <a:prstGeom prst="rect">
             <a:avLst/>
@@ -16162,7 +16687,7 @@
                 </a:solidFill>
                 <a:latin typeface="Arial"/>
               </a:rPr>
-              <a:t>YÊU CẦU BÀI PHÂN TÍCH THƠ</a:t>
+              <a:t>LỖI DÙNG TỪ</a:t>
             </a:r>
           </a:p>
         </p:txBody>
@@ -16255,7 +16780,7 @@
         <p:spPr>
           <a:xfrm>
             <a:off x="731520" y="1463040"/>
-            <a:ext cx="10789920" cy="4754880"/>
+            <a:ext cx="10789920" cy="3566160"/>
           </a:xfrm>
           <a:prstGeom prst="rect">
             <a:avLst/>
@@ -16268,87 +16793,106 @@
           </a:bodyPr>
           <a:lstStyle/>
           <a:p>
-            <a:pPr algn="l" marL="365760" indent="-365760">
+            <a:pPr algn="l">
               <a:spcAft>
                 <a:spcPts val="800"/>
               </a:spcAft>
-              <a:buClr>
-                <a:srgbClr val="1E40AF"/>
-              </a:buClr>
-              <a:buFont typeface="Arial"/>
-              <a:buChar char="•"/>
             </a:pPr>
             <a:r>
-              <a:rPr sz="2400">
+              <a:rPr sz="2600" b="1">
                 <a:solidFill>
                   <a:srgbClr val="1E293B"/>
                 </a:solidFill>
                 <a:latin typeface="Calibri"/>
               </a:rPr>
-              <a:t>Giới thiệu bài thơ: tác giả, hoàn cảnh, trào lưu, lí do chọn.</a:t>
-            </a:r>
-          </a:p>
-          <a:p>
-            <a:pPr algn="l" marL="365760" indent="-365760">
+              <a:t>Tìm lỗi và sửa: “Đề tài, chủ đề, cảm hứng cũng như nội dung của các bài thơ hai-cư rất đa dạng, khác nhau.”</a:t>
+            </a:r>
+          </a:p>
+        </p:txBody>
+      </p:sp>
+      <p:sp>
+        <p:nvSpPr>
+          <p:cNvPr id="8" name="Rounded Rectangle 7"/>
+          <p:cNvSpPr/>
+          <p:nvPr/>
+        </p:nvSpPr>
+        <p:spPr>
+          <a:xfrm>
+            <a:off x="731520" y="5120640"/>
+            <a:ext cx="10789920" cy="693420"/>
+          </a:xfrm>
+          <a:prstGeom prst="roundRect">
+            <a:avLst>
+              <a:gd name="adj" fmla="val 8000"/>
+            </a:avLst>
+          </a:prstGeom>
+          <a:solidFill>
+            <a:srgbClr val="EFF4FF"/>
+          </a:solidFill>
+          <a:ln w="19050">
+            <a:solidFill>
+              <a:srgbClr val="1E40AF"/>
+            </a:solidFill>
+          </a:ln>
+          <a:effectLst/>
+        </p:spPr>
+        <p:style>
+          <a:lnRef idx="1">
+            <a:schemeClr val="accent1"/>
+          </a:lnRef>
+          <a:fillRef idx="3">
+            <a:schemeClr val="accent1"/>
+          </a:fillRef>
+          <a:effectRef idx="2">
+            <a:schemeClr val="accent1"/>
+          </a:effectRef>
+          <a:fontRef idx="minor">
+            <a:schemeClr val="lt1"/>
+          </a:fontRef>
+        </p:style>
+        <p:txBody>
+          <a:bodyPr rtlCol="0" anchor="ctr"/>
+          <a:lstStyle/>
+          <a:p>
+            <a:pPr algn="ctr"/>
+          </a:p>
+        </p:txBody>
+      </p:sp>
+      <p:sp>
+        <p:nvSpPr>
+          <p:cNvPr id="9" name="TextBox 8"/>
+          <p:cNvSpPr txBox="1"/>
+          <p:nvPr/>
+        </p:nvSpPr>
+        <p:spPr>
+          <a:xfrm>
+            <a:off x="914400" y="5120640"/>
+            <a:ext cx="10424160" cy="693420"/>
+          </a:xfrm>
+          <a:prstGeom prst="rect">
+            <a:avLst/>
+          </a:prstGeom>
+          <a:noFill/>
+        </p:spPr>
+        <p:txBody>
+          <a:bodyPr wrap="square" anchor="ctr" lIns="45720" rIns="45720">
+            <a:spAutoFit/>
+          </a:bodyPr>
+          <a:lstStyle/>
+          <a:p>
+            <a:pPr algn="l">
               <a:spcAft>
-                <a:spcPts val="800"/>
+                <a:spcPts val="400"/>
               </a:spcAft>
-              <a:buClr>
-                <a:srgbClr val="1E40AF"/>
-              </a:buClr>
-              <a:buFont typeface="Arial"/>
-              <a:buChar char="•"/>
             </a:pPr>
             <a:r>
-              <a:rPr sz="2400">
-                <a:solidFill>
-                  <a:srgbClr val="1E293B"/>
+              <a:rPr sz="2200" b="1">
+                <a:solidFill>
+                  <a:srgbClr val="1E40AF"/>
                 </a:solidFill>
                 <a:latin typeface="Calibri"/>
               </a:rPr>
-              <a:t>Phân tích nét đặc sắc: từ ngữ, hình ảnh, nhịp điệu, nhạc điệu, mạch cảm xúc.</a:t>
-            </a:r>
-          </a:p>
-          <a:p>
-            <a:pPr algn="l" marL="365760" indent="-365760">
-              <a:spcAft>
-                <a:spcPts val="800"/>
-              </a:spcAft>
-              <a:buClr>
-                <a:srgbClr val="1E40AF"/>
-              </a:buClr>
-              <a:buFont typeface="Arial"/>
-              <a:buChar char="•"/>
-            </a:pPr>
-            <a:r>
-              <a:rPr sz="2400">
-                <a:solidFill>
-                  <a:srgbClr val="1E293B"/>
-                </a:solidFill>
-                <a:latin typeface="Calibri"/>
-              </a:rPr>
-              <a:t>Đánh giá giá trị nghệ thuật và ý nghĩa nhân sinh.</a:t>
-            </a:r>
-          </a:p>
-          <a:p>
-            <a:pPr algn="l" marL="365760" indent="-365760">
-              <a:spcAft>
-                <a:spcPts val="800"/>
-              </a:spcAft>
-              <a:buClr>
-                <a:srgbClr val="1E40AF"/>
-              </a:buClr>
-              <a:buFont typeface="Arial"/>
-              <a:buChar char="•"/>
-            </a:pPr>
-            <a:r>
-              <a:rPr sz="2400">
-                <a:solidFill>
-                  <a:srgbClr val="1E293B"/>
-                </a:solidFill>
-                <a:latin typeface="Calibri"/>
-              </a:rPr>
-              <a:t>Tránh diễn xuôi bài thơ.</a:t>
+              <a:t>💡 Có từ nào thừa, trùng nghĩa?</a:t>
             </a:r>
           </a:p>
         </p:txBody>
@@ -16722,14 +17266,14 @@
         </p:nvSpPr>
         <p:spPr>
           <a:xfrm>
-            <a:off x="10253167" y="457200"/>
-            <a:ext cx="1389888" cy="457200"/>
+            <a:off x="9942271" y="457200"/>
+            <a:ext cx="1700784" cy="457200"/>
           </a:xfrm>
           <a:prstGeom prst="roundRect">
             <a:avLst/>
           </a:prstGeom>
           <a:solidFill>
-            <a:srgbClr val="1E40AF"/>
+            <a:srgbClr val="991B1B"/>
           </a:solidFill>
           <a:ln>
             <a:noFill/>
@@ -16762,7 +17306,7 @@
                 </a:solidFill>
                 <a:latin typeface="Arial"/>
               </a:rPr>
-              <a:t>ĐỀ BÀI</a:t>
+              <a:t>LỜI GIẢI</a:t>
             </a:r>
           </a:p>
         </p:txBody>
@@ -16776,7 +17320,7 @@
         <p:spPr>
           <a:xfrm>
             <a:off x="731520" y="274320"/>
-            <a:ext cx="9582912" cy="868680"/>
+            <a:ext cx="9272016" cy="868680"/>
           </a:xfrm>
           <a:prstGeom prst="rect">
             <a:avLst/>
@@ -16796,7 +17340,7 @@
                 </a:solidFill>
                 <a:latin typeface="Arial"/>
               </a:rPr>
-              <a:t>ĐỀ THỰC HÀNH VIẾT</a:t>
+              <a:t>LỖI DÙNG TỪ</a:t>
             </a:r>
           </a:p>
         </p:txBody>
@@ -16889,7 +17433,7 @@
         <p:spPr>
           <a:xfrm>
             <a:off x="731520" y="1463040"/>
-            <a:ext cx="10789920" cy="3566160"/>
+            <a:ext cx="10789920" cy="3474720"/>
           </a:xfrm>
           <a:prstGeom prst="rect">
             <a:avLst/>
@@ -16902,19 +17446,66 @@
           </a:bodyPr>
           <a:lstStyle/>
           <a:p>
-            <a:pPr algn="l">
+            <a:pPr algn="l" marL="365760" indent="-365760">
               <a:spcAft>
                 <a:spcPts val="800"/>
               </a:spcAft>
+              <a:buClr>
+                <a:srgbClr val="1E40AF"/>
+              </a:buClr>
+              <a:buFont typeface="Arial"/>
+              <a:buChar char="•"/>
             </a:pPr>
             <a:r>
-              <a:rPr sz="2600" b="1">
+              <a:rPr sz="2300">
                 <a:solidFill>
                   <a:srgbClr val="1E293B"/>
                 </a:solidFill>
                 <a:latin typeface="Calibri"/>
               </a:rPr>
-              <a:t>Phân tích, đánh giá chủ đề và nét đặc sắc nghệ thuật của bài thơ Mùa xuân chín (Hàn Mặc Tử).</a:t>
+              <a:t>“cũng như nội dung” thừa (đề tài, chủ đề đã là nội dung).</a:t>
+            </a:r>
+          </a:p>
+          <a:p>
+            <a:pPr algn="l" marL="365760" indent="-365760">
+              <a:spcAft>
+                <a:spcPts val="800"/>
+              </a:spcAft>
+              <a:buClr>
+                <a:srgbClr val="1E40AF"/>
+              </a:buClr>
+              <a:buFont typeface="Arial"/>
+              <a:buChar char="•"/>
+            </a:pPr>
+            <a:r>
+              <a:rPr sz="2300">
+                <a:solidFill>
+                  <a:srgbClr val="1E293B"/>
+                </a:solidFill>
+                <a:latin typeface="Calibri"/>
+              </a:rPr>
+              <a:t>“đa dạng, khác nhau” trùng nghĩa.</a:t>
+            </a:r>
+          </a:p>
+          <a:p>
+            <a:pPr algn="l" marL="365760" indent="-365760">
+              <a:spcAft>
+                <a:spcPts val="800"/>
+              </a:spcAft>
+              <a:buClr>
+                <a:srgbClr val="1E40AF"/>
+              </a:buClr>
+              <a:buFont typeface="Arial"/>
+              <a:buChar char="•"/>
+            </a:pPr>
+            <a:r>
+              <a:rPr sz="2300">
+                <a:solidFill>
+                  <a:srgbClr val="1E293B"/>
+                </a:solidFill>
+                <a:latin typeface="Calibri"/>
+              </a:rPr>
+              <a:t>Sửa: “Đề tài, chủ đề, cảm hứng của các bài thơ hai-cư rất đa dạng.”</a:t>
             </a:r>
           </a:p>
         </p:txBody>
@@ -16927,8 +17518,8 @@
         </p:nvSpPr>
         <p:spPr>
           <a:xfrm>
-            <a:off x="731520" y="5120640"/>
-            <a:ext cx="10789920" cy="693420"/>
+            <a:off x="731520" y="5074920"/>
+            <a:ext cx="10789920" cy="731520"/>
           </a:xfrm>
           <a:prstGeom prst="roundRect">
             <a:avLst>
@@ -16936,11 +17527,11 @@
             </a:avLst>
           </a:prstGeom>
           <a:solidFill>
-            <a:srgbClr val="EFF4FF"/>
+            <a:srgbClr val="FEF2F2"/>
           </a:solidFill>
           <a:ln w="19050">
             <a:solidFill>
-              <a:srgbClr val="1E40AF"/>
+              <a:srgbClr val="991B1B"/>
             </a:solidFill>
           </a:ln>
           <a:effectLst/>
@@ -16975,8 +17566,8 @@
         </p:nvSpPr>
         <p:spPr>
           <a:xfrm>
-            <a:off x="914400" y="5120640"/>
-            <a:ext cx="10424160" cy="693420"/>
+            <a:off x="914400" y="5074920"/>
+            <a:ext cx="10424160" cy="731520"/>
           </a:xfrm>
           <a:prstGeom prst="rect">
             <a:avLst/>
@@ -16995,13 +17586,13 @@
               </a:spcAft>
             </a:pPr>
             <a:r>
-              <a:rPr sz="2200" b="1">
-                <a:solidFill>
-                  <a:srgbClr val="1E40AF"/>
+              <a:rPr sz="2400" b="1">
+                <a:solidFill>
+                  <a:srgbClr val="991B1B"/>
                 </a:solidFill>
                 <a:latin typeface="Calibri"/>
               </a:rPr>
-              <a:t>💡 Lập dàn ý theo mạch khổ thơ hoặc theo luận điểm.</a:t>
+              <a:t>Tránh lặp, thừa từ.</a:t>
             </a:r>
           </a:p>
         </p:txBody>
@@ -17084,14 +17675,14 @@
         </p:nvSpPr>
         <p:spPr>
           <a:xfrm>
-            <a:off x="9942271" y="457200"/>
-            <a:ext cx="1700784" cy="457200"/>
+            <a:off x="10253167" y="457200"/>
+            <a:ext cx="1389888" cy="457200"/>
           </a:xfrm>
           <a:prstGeom prst="roundRect">
             <a:avLst/>
           </a:prstGeom>
           <a:solidFill>
-            <a:srgbClr val="991B1B"/>
+            <a:srgbClr val="1E40AF"/>
           </a:solidFill>
           <a:ln>
             <a:noFill/>
@@ -17124,7 +17715,7 @@
                 </a:solidFill>
                 <a:latin typeface="Arial"/>
               </a:rPr>
-              <a:t>LỜI GIẢI</a:t>
+              <a:t>ĐỀ BÀI</a:t>
             </a:r>
           </a:p>
         </p:txBody>
@@ -17138,7 +17729,7 @@
         <p:spPr>
           <a:xfrm>
             <a:off x="731520" y="274320"/>
-            <a:ext cx="9272016" cy="868680"/>
+            <a:ext cx="9582912" cy="868680"/>
           </a:xfrm>
           <a:prstGeom prst="rect">
             <a:avLst/>
@@ -17158,7 +17749,7 @@
                 </a:solidFill>
                 <a:latin typeface="Arial"/>
               </a:rPr>
-              <a:t>ĐỀ THỰC HÀNH VIẾT</a:t>
+              <a:t>LỖI TRẬT TỰ TỪ</a:t>
             </a:r>
           </a:p>
         </p:txBody>
@@ -17251,7 +17842,7 @@
         <p:spPr>
           <a:xfrm>
             <a:off x="731520" y="1463040"/>
-            <a:ext cx="10789920" cy="3474720"/>
+            <a:ext cx="10789920" cy="3566160"/>
           </a:xfrm>
           <a:prstGeom prst="rect">
             <a:avLst/>
@@ -17264,87 +17855,19 @@
           </a:bodyPr>
           <a:lstStyle/>
           <a:p>
-            <a:pPr algn="l" marL="365760" indent="-365760">
+            <a:pPr algn="l">
               <a:spcAft>
                 <a:spcPts val="800"/>
               </a:spcAft>
-              <a:buClr>
-                <a:srgbClr val="1E40AF"/>
-              </a:buClr>
-              <a:buFont typeface="Arial"/>
-              <a:buChar char="•"/>
             </a:pPr>
             <a:r>
-              <a:rPr sz="2300">
+              <a:rPr sz="2600" b="1">
                 <a:solidFill>
                   <a:srgbClr val="1E293B"/>
                 </a:solidFill>
                 <a:latin typeface="Calibri"/>
               </a:rPr>
-              <a:t>MB: giới thiệu Hàn Mặc Tử, bài thơ.</a:t>
-            </a:r>
-          </a:p>
-          <a:p>
-            <a:pPr algn="l" marL="365760" indent="-365760">
-              <a:spcAft>
-                <a:spcPts val="800"/>
-              </a:spcAft>
-              <a:buClr>
-                <a:srgbClr val="1E40AF"/>
-              </a:buClr>
-              <a:buFont typeface="Arial"/>
-              <a:buChar char="•"/>
-            </a:pPr>
-            <a:r>
-              <a:rPr sz="2300">
-                <a:solidFill>
-                  <a:srgbClr val="1E293B"/>
-                </a:solidFill>
-                <a:latin typeface="Calibri"/>
-              </a:rPr>
-              <a:t>TB: bức tranh xuân “chín” → âm thanh, con người → nỗi nhớ làng → nghệ thuật.</a:t>
-            </a:r>
-          </a:p>
-          <a:p>
-            <a:pPr algn="l" marL="365760" indent="-365760">
-              <a:spcAft>
-                <a:spcPts val="800"/>
-              </a:spcAft>
-              <a:buClr>
-                <a:srgbClr val="1E40AF"/>
-              </a:buClr>
-              <a:buFont typeface="Arial"/>
-              <a:buChar char="•"/>
-            </a:pPr>
-            <a:r>
-              <a:rPr sz="2300">
-                <a:solidFill>
-                  <a:srgbClr val="1E293B"/>
-                </a:solidFill>
-                <a:latin typeface="Calibri"/>
-              </a:rPr>
-              <a:t>Đánh giá giá trị nghệ thuật, ý nghĩa nhân sinh.</a:t>
-            </a:r>
-          </a:p>
-          <a:p>
-            <a:pPr algn="l" marL="365760" indent="-365760">
-              <a:spcAft>
-                <a:spcPts val="800"/>
-              </a:spcAft>
-              <a:buClr>
-                <a:srgbClr val="1E40AF"/>
-              </a:buClr>
-              <a:buFont typeface="Arial"/>
-              <a:buChar char="•"/>
-            </a:pPr>
-            <a:r>
-              <a:rPr sz="2300">
-                <a:solidFill>
-                  <a:srgbClr val="1E293B"/>
-                </a:solidFill>
-                <a:latin typeface="Calibri"/>
-              </a:rPr>
-              <a:t>KB: khẳng định giá trị, cảm nghĩ riêng.</a:t>
+              <a:t>Câu nào mắc lỗi trật tự từ? Sửa lại: “Một bộ phận độc giả đông đảo đã không cảm nhận được cái mới ngay trong thơ Hàn Mặc Tử.”</a:t>
             </a:r>
           </a:p>
         </p:txBody>
@@ -17357,8 +17880,8 @@
         </p:nvSpPr>
         <p:spPr>
           <a:xfrm>
-            <a:off x="731520" y="5074920"/>
-            <a:ext cx="10789920" cy="731520"/>
+            <a:off x="731520" y="5120640"/>
+            <a:ext cx="10789920" cy="693420"/>
           </a:xfrm>
           <a:prstGeom prst="roundRect">
             <a:avLst>
@@ -17366,11 +17889,11 @@
             </a:avLst>
           </a:prstGeom>
           <a:solidFill>
-            <a:srgbClr val="FEF2F2"/>
+            <a:srgbClr val="EFF4FF"/>
           </a:solidFill>
           <a:ln w="19050">
             <a:solidFill>
-              <a:srgbClr val="991B1B"/>
+              <a:srgbClr val="1E40AF"/>
             </a:solidFill>
           </a:ln>
           <a:effectLst/>
@@ -17405,8 +17928,8 @@
         </p:nvSpPr>
         <p:spPr>
           <a:xfrm>
-            <a:off x="914400" y="5074920"/>
-            <a:ext cx="10424160" cy="731520"/>
+            <a:off x="914400" y="5120640"/>
+            <a:ext cx="10424160" cy="693420"/>
           </a:xfrm>
           <a:prstGeom prst="rect">
             <a:avLst/>
@@ -17425,13 +17948,13 @@
               </a:spcAft>
             </a:pPr>
             <a:r>
-              <a:rPr sz="2400" b="1">
-                <a:solidFill>
-                  <a:srgbClr val="991B1B"/>
+              <a:rPr sz="2200" b="1">
+                <a:solidFill>
+                  <a:srgbClr val="1E40AF"/>
                 </a:solidFill>
                 <a:latin typeface="Calibri"/>
               </a:rPr>
-              <a:t>Gắn phân tích hình thức với cảm xúc.</a:t>
+              <a:t>💡 “đông đảo” bổ nghĩa cho từ nào?</a:t>
             </a:r>
           </a:p>
         </p:txBody>
@@ -17514,14 +18037,14 @@
         </p:nvSpPr>
         <p:spPr>
           <a:xfrm>
-            <a:off x="10097719" y="457200"/>
-            <a:ext cx="1545336" cy="457200"/>
+            <a:off x="9942271" y="457200"/>
+            <a:ext cx="1700784" cy="457200"/>
           </a:xfrm>
           <a:prstGeom prst="roundRect">
             <a:avLst/>
           </a:prstGeom>
           <a:solidFill>
-            <a:srgbClr val="166534"/>
+            <a:srgbClr val="991B1B"/>
           </a:solidFill>
           <a:ln>
             <a:noFill/>
@@ -17554,7 +18077,7 @@
                 </a:solidFill>
                 <a:latin typeface="Arial"/>
               </a:rPr>
-              <a:t>CỦNG CỐ</a:t>
+              <a:t>LỜI GIẢI</a:t>
             </a:r>
           </a:p>
         </p:txBody>
@@ -17568,7 +18091,7 @@
         <p:spPr>
           <a:xfrm>
             <a:off x="731520" y="274320"/>
-            <a:ext cx="9427464" cy="868680"/>
+            <a:ext cx="9272016" cy="868680"/>
           </a:xfrm>
           <a:prstGeom prst="rect">
             <a:avLst/>
@@ -17588,7 +18111,7 @@
                 </a:solidFill>
                 <a:latin typeface="Arial"/>
               </a:rPr>
-              <a:t>SƠ ĐỒ TƯ DUY</a:t>
+              <a:t>LỖI TRẬT TỰ TỪ</a:t>
             </a:r>
           </a:p>
         </p:txBody>
@@ -17672,30 +18195,179 @@
           </a:p>
         </p:txBody>
       </p:sp>
-      <p:pic>
-        <p:nvPicPr>
-          <p:cNvPr id="7" name="Picture 6" descr="SoDoTuDuy_NGUVAN10_Bai2_VeDepCuaThoCa_T12-22.png"/>
-          <p:cNvPicPr>
-            <a:picLocks noChangeAspect="1"/>
-          </p:cNvPicPr>
-          <p:nvPr/>
-        </p:nvPicPr>
-        <p:blipFill>
-          <a:blip r:embed="rId2"/>
-          <a:stretch>
-            <a:fillRect/>
-          </a:stretch>
-        </p:blipFill>
-        <p:spPr>
-          <a:xfrm>
-            <a:off x="1788855" y="1371600"/>
-            <a:ext cx="8675250" cy="4846320"/>
-          </a:xfrm>
-          <a:prstGeom prst="rect">
-            <a:avLst/>
-          </a:prstGeom>
-        </p:spPr>
-      </p:pic>
+      <p:sp>
+        <p:nvSpPr>
+          <p:cNvPr id="7" name="TextBox 6"/>
+          <p:cNvSpPr txBox="1"/>
+          <p:nvPr/>
+        </p:nvSpPr>
+        <p:spPr>
+          <a:xfrm>
+            <a:off x="731520" y="1463040"/>
+            <a:ext cx="10789920" cy="3474720"/>
+          </a:xfrm>
+          <a:prstGeom prst="rect">
+            <a:avLst/>
+          </a:prstGeom>
+          <a:noFill/>
+        </p:spPr>
+        <p:txBody>
+          <a:bodyPr wrap="square" anchor="t" lIns="45720" rIns="45720">
+            <a:spAutoFit/>
+          </a:bodyPr>
+          <a:lstStyle/>
+          <a:p>
+            <a:pPr algn="l" marL="365760" indent="-365760">
+              <a:spcAft>
+                <a:spcPts val="800"/>
+              </a:spcAft>
+              <a:buClr>
+                <a:srgbClr val="1E40AF"/>
+              </a:buClr>
+              <a:buFont typeface="Arial"/>
+              <a:buChar char="•"/>
+            </a:pPr>
+            <a:r>
+              <a:rPr sz="2300">
+                <a:solidFill>
+                  <a:srgbClr val="1E293B"/>
+                </a:solidFill>
+                <a:latin typeface="Calibri"/>
+              </a:rPr>
+              <a:t>Sai trật tự: “bộ phận độc giả đông đảo”.</a:t>
+            </a:r>
+          </a:p>
+          <a:p>
+            <a:pPr algn="l" marL="365760" indent="-365760">
+              <a:spcAft>
+                <a:spcPts val="800"/>
+              </a:spcAft>
+              <a:buClr>
+                <a:srgbClr val="1E40AF"/>
+              </a:buClr>
+              <a:buFont typeface="Arial"/>
+              <a:buChar char="•"/>
+            </a:pPr>
+            <a:r>
+              <a:rPr sz="2300">
+                <a:solidFill>
+                  <a:srgbClr val="1E293B"/>
+                </a:solidFill>
+                <a:latin typeface="Calibri"/>
+              </a:rPr>
+              <a:t>Sửa: “Một bộ phận đông đảo độc giả…”.</a:t>
+            </a:r>
+          </a:p>
+          <a:p>
+            <a:pPr algn="l" marL="365760" indent="-365760">
+              <a:spcAft>
+                <a:spcPts val="800"/>
+              </a:spcAft>
+              <a:buClr>
+                <a:srgbClr val="1E40AF"/>
+              </a:buClr>
+              <a:buFont typeface="Arial"/>
+              <a:buChar char="•"/>
+            </a:pPr>
+            <a:r>
+              <a:rPr sz="2300">
+                <a:solidFill>
+                  <a:srgbClr val="1E293B"/>
+                </a:solidFill>
+                <a:latin typeface="Calibri"/>
+              </a:rPr>
+              <a:t>Phân biệt lỗi trật tự từ với phép đảo ngữ trong văn học.</a:t>
+            </a:r>
+          </a:p>
+        </p:txBody>
+      </p:sp>
+      <p:sp>
+        <p:nvSpPr>
+          <p:cNvPr id="8" name="Rounded Rectangle 7"/>
+          <p:cNvSpPr/>
+          <p:nvPr/>
+        </p:nvSpPr>
+        <p:spPr>
+          <a:xfrm>
+            <a:off x="731520" y="5074920"/>
+            <a:ext cx="10789920" cy="731520"/>
+          </a:xfrm>
+          <a:prstGeom prst="roundRect">
+            <a:avLst>
+              <a:gd name="adj" fmla="val 8000"/>
+            </a:avLst>
+          </a:prstGeom>
+          <a:solidFill>
+            <a:srgbClr val="FEF2F2"/>
+          </a:solidFill>
+          <a:ln w="19050">
+            <a:solidFill>
+              <a:srgbClr val="991B1B"/>
+            </a:solidFill>
+          </a:ln>
+          <a:effectLst/>
+        </p:spPr>
+        <p:style>
+          <a:lnRef idx="1">
+            <a:schemeClr val="accent1"/>
+          </a:lnRef>
+          <a:fillRef idx="3">
+            <a:schemeClr val="accent1"/>
+          </a:fillRef>
+          <a:effectRef idx="2">
+            <a:schemeClr val="accent1"/>
+          </a:effectRef>
+          <a:fontRef idx="minor">
+            <a:schemeClr val="lt1"/>
+          </a:fontRef>
+        </p:style>
+        <p:txBody>
+          <a:bodyPr rtlCol="0" anchor="ctr"/>
+          <a:lstStyle/>
+          <a:p>
+            <a:pPr algn="ctr"/>
+          </a:p>
+        </p:txBody>
+      </p:sp>
+      <p:sp>
+        <p:nvSpPr>
+          <p:cNvPr id="9" name="TextBox 8"/>
+          <p:cNvSpPr txBox="1"/>
+          <p:nvPr/>
+        </p:nvSpPr>
+        <p:spPr>
+          <a:xfrm>
+            <a:off x="914400" y="5074920"/>
+            <a:ext cx="10424160" cy="731520"/>
+          </a:xfrm>
+          <a:prstGeom prst="rect">
+            <a:avLst/>
+          </a:prstGeom>
+          <a:noFill/>
+        </p:spPr>
+        <p:txBody>
+          <a:bodyPr wrap="square" anchor="ctr" lIns="45720" rIns="45720">
+            <a:spAutoFit/>
+          </a:bodyPr>
+          <a:lstStyle/>
+          <a:p>
+            <a:pPr algn="l">
+              <a:spcAft>
+                <a:spcPts val="400"/>
+              </a:spcAft>
+            </a:pPr>
+            <a:r>
+              <a:rPr sz="2400" b="1">
+                <a:solidFill>
+                  <a:srgbClr val="991B1B"/>
+                </a:solidFill>
+                <a:latin typeface="Calibri"/>
+              </a:rPr>
+              <a:t>Sắp xếp từ đúng quy tắc ngữ pháp.</a:t>
+            </a:r>
+          </a:p>
+        </p:txBody>
+      </p:sp>
     </p:spTree>
   </p:cSld>
   <p:clrMapOvr>
@@ -17705,6 +18377,115 @@
 </file>
 
 <file path=ppt/slides/slide43.xml><?xml version="1.0" encoding="utf-8"?>
+<p:sld xmlns:a="http://schemas.openxmlformats.org/drawingml/2006/main" xmlns:p="http://schemas.openxmlformats.org/presentationml/2006/main" xmlns:r="http://schemas.openxmlformats.org/officeDocument/2006/relationships">
+  <p:cSld>
+    <p:bg>
+      <p:bgPr>
+        <a:solidFill>
+          <a:srgbClr val="F8F9FA"/>
+        </a:solidFill>
+        <a:effectLst/>
+      </p:bgPr>
+    </p:bg>
+    <p:spTree>
+      <p:nvGrpSpPr>
+        <p:cNvPr id="1" name=""/>
+        <p:cNvGrpSpPr/>
+        <p:nvPr/>
+      </p:nvGrpSpPr>
+      <p:grpSpPr/>
+      <p:sp>
+        <p:nvSpPr>
+          <p:cNvPr id="2" name="Rectangle 1"/>
+          <p:cNvSpPr/>
+          <p:nvPr/>
+        </p:nvSpPr>
+        <p:spPr>
+          <a:xfrm>
+            <a:off x="548640" y="2926080"/>
+            <a:ext cx="164592" cy="1005840"/>
+          </a:xfrm>
+          <a:prstGeom prst="rect">
+            <a:avLst/>
+          </a:prstGeom>
+          <a:solidFill>
+            <a:srgbClr val="991B1B"/>
+          </a:solidFill>
+          <a:ln>
+            <a:noFill/>
+          </a:ln>
+          <a:effectLst/>
+        </p:spPr>
+        <p:style>
+          <a:lnRef idx="1">
+            <a:schemeClr val="accent1"/>
+          </a:lnRef>
+          <a:fillRef idx="3">
+            <a:schemeClr val="accent1"/>
+          </a:fillRef>
+          <a:effectRef idx="2">
+            <a:schemeClr val="accent1"/>
+          </a:effectRef>
+          <a:fontRef idx="minor">
+            <a:schemeClr val="lt1"/>
+          </a:fontRef>
+        </p:style>
+        <p:txBody>
+          <a:bodyPr rtlCol="0" anchor="ctr"/>
+          <a:lstStyle/>
+          <a:p>
+            <a:pPr algn="ctr"/>
+          </a:p>
+        </p:txBody>
+      </p:sp>
+      <p:sp>
+        <p:nvSpPr>
+          <p:cNvPr id="3" name="TextBox 2"/>
+          <p:cNvSpPr txBox="1"/>
+          <p:nvPr/>
+        </p:nvSpPr>
+        <p:spPr>
+          <a:xfrm>
+            <a:off x="914400" y="2743200"/>
+            <a:ext cx="10515600" cy="1371600"/>
+          </a:xfrm>
+          <a:prstGeom prst="rect">
+            <a:avLst/>
+          </a:prstGeom>
+          <a:noFill/>
+        </p:spPr>
+        <p:txBody>
+          <a:bodyPr wrap="square" anchor="ctr" lIns="45720" rIns="45720">
+            <a:spAutoFit/>
+          </a:bodyPr>
+          <a:lstStyle/>
+          <a:p>
+            <a:pPr algn="l">
+              <a:spcAft>
+                <a:spcPts val="800"/>
+              </a:spcAft>
+            </a:pPr>
+            <a:r>
+              <a:rPr sz="3600" b="1">
+                <a:solidFill>
+                  <a:srgbClr val="1E40AF"/>
+                </a:solidFill>
+                <a:latin typeface="Calibri"/>
+              </a:rPr>
+              <a:t>TIẾT 19 – 22: VIẾT – NÓI VÀ NGHE</a:t>
+            </a:r>
+          </a:p>
+        </p:txBody>
+      </p:sp>
+    </p:spTree>
+  </p:cSld>
+  <p:clrMapOvr>
+    <a:masterClrMapping/>
+  </p:clrMapOvr>
+</p:sld>
+</file>
+
+<file path=ppt/slides/slide44.xml><?xml version="1.0" encoding="utf-8"?>
 <p:sld xmlns:a="http://schemas.openxmlformats.org/drawingml/2006/main" xmlns:p="http://schemas.openxmlformats.org/presentationml/2006/main" xmlns:r="http://schemas.openxmlformats.org/officeDocument/2006/relationships">
   <p:cSld>
     <p:bg>
@@ -17781,7 +18562,7 @@
             <a:avLst/>
           </a:prstGeom>
           <a:solidFill>
-            <a:srgbClr val="991B1B"/>
+            <a:srgbClr val="166534"/>
           </a:solidFill>
           <a:ln>
             <a:noFill/>
@@ -17814,7 +18595,7 @@
                 </a:solidFill>
                 <a:latin typeface="Arial"/>
               </a:rPr>
-              <a:t>CỦNG CỐ</a:t>
+              <a:t>GHI NHỚ</a:t>
             </a:r>
           </a:p>
         </p:txBody>
@@ -17848,7 +18629,7 @@
                 </a:solidFill>
                 <a:latin typeface="Arial"/>
               </a:rPr>
-              <a:t>BÀI TẬP CỦA BẠN</a:t>
+              <a:t>YÊU CẦU BÀI PHÂN TÍCH THƠ</a:t>
             </a:r>
           </a:p>
         </p:txBody>
@@ -17927,7 +18708,1402 @@
                 </a:solidFill>
                 <a:latin typeface="Calibri"/>
               </a:rPr>
-              <a:t>Ngữ văn 10 · Bài 2: Vẻ Đẹp Của Thơ Ca          43</a:t>
+              <a:t>Ngữ văn 10 · Bài 2: Vẻ Đẹp Của Thơ Ca          44</a:t>
+            </a:r>
+          </a:p>
+        </p:txBody>
+      </p:sp>
+      <p:sp>
+        <p:nvSpPr>
+          <p:cNvPr id="7" name="TextBox 6"/>
+          <p:cNvSpPr txBox="1"/>
+          <p:nvPr/>
+        </p:nvSpPr>
+        <p:spPr>
+          <a:xfrm>
+            <a:off x="731520" y="1463040"/>
+            <a:ext cx="10789920" cy="4754880"/>
+          </a:xfrm>
+          <a:prstGeom prst="rect">
+            <a:avLst/>
+          </a:prstGeom>
+          <a:noFill/>
+        </p:spPr>
+        <p:txBody>
+          <a:bodyPr wrap="square" anchor="t" lIns="45720" rIns="45720">
+            <a:spAutoFit/>
+          </a:bodyPr>
+          <a:lstStyle/>
+          <a:p>
+            <a:pPr algn="l" marL="365760" indent="-365760">
+              <a:spcAft>
+                <a:spcPts val="800"/>
+              </a:spcAft>
+              <a:buClr>
+                <a:srgbClr val="1E40AF"/>
+              </a:buClr>
+              <a:buFont typeface="Arial"/>
+              <a:buChar char="•"/>
+            </a:pPr>
+            <a:r>
+              <a:rPr sz="2400">
+                <a:solidFill>
+                  <a:srgbClr val="1E293B"/>
+                </a:solidFill>
+                <a:latin typeface="Calibri"/>
+              </a:rPr>
+              <a:t>Giới thiệu bài thơ: tác giả, hoàn cảnh, trào lưu, lí do chọn.</a:t>
+            </a:r>
+          </a:p>
+          <a:p>
+            <a:pPr algn="l" marL="365760" indent="-365760">
+              <a:spcAft>
+                <a:spcPts val="800"/>
+              </a:spcAft>
+              <a:buClr>
+                <a:srgbClr val="1E40AF"/>
+              </a:buClr>
+              <a:buFont typeface="Arial"/>
+              <a:buChar char="•"/>
+            </a:pPr>
+            <a:r>
+              <a:rPr sz="2400">
+                <a:solidFill>
+                  <a:srgbClr val="1E293B"/>
+                </a:solidFill>
+                <a:latin typeface="Calibri"/>
+              </a:rPr>
+              <a:t>Phân tích nét đặc sắc: từ ngữ, hình ảnh, nhịp điệu, nhạc điệu, mạch cảm xúc.</a:t>
+            </a:r>
+          </a:p>
+          <a:p>
+            <a:pPr algn="l" marL="365760" indent="-365760">
+              <a:spcAft>
+                <a:spcPts val="800"/>
+              </a:spcAft>
+              <a:buClr>
+                <a:srgbClr val="1E40AF"/>
+              </a:buClr>
+              <a:buFont typeface="Arial"/>
+              <a:buChar char="•"/>
+            </a:pPr>
+            <a:r>
+              <a:rPr sz="2400">
+                <a:solidFill>
+                  <a:srgbClr val="1E293B"/>
+                </a:solidFill>
+                <a:latin typeface="Calibri"/>
+              </a:rPr>
+              <a:t>Đánh giá giá trị nghệ thuật và ý nghĩa nhân sinh.</a:t>
+            </a:r>
+          </a:p>
+          <a:p>
+            <a:pPr algn="l" marL="365760" indent="-365760">
+              <a:spcAft>
+                <a:spcPts val="800"/>
+              </a:spcAft>
+              <a:buClr>
+                <a:srgbClr val="1E40AF"/>
+              </a:buClr>
+              <a:buFont typeface="Arial"/>
+              <a:buChar char="•"/>
+            </a:pPr>
+            <a:r>
+              <a:rPr sz="2400">
+                <a:solidFill>
+                  <a:srgbClr val="1E293B"/>
+                </a:solidFill>
+                <a:latin typeface="Calibri"/>
+              </a:rPr>
+              <a:t>Tránh diễn xuôi bài thơ.</a:t>
+            </a:r>
+          </a:p>
+        </p:txBody>
+      </p:sp>
+    </p:spTree>
+  </p:cSld>
+  <p:clrMapOvr>
+    <a:masterClrMapping/>
+  </p:clrMapOvr>
+</p:sld>
+</file>
+
+<file path=ppt/slides/slide45.xml><?xml version="1.0" encoding="utf-8"?>
+<p:sld xmlns:a="http://schemas.openxmlformats.org/drawingml/2006/main" xmlns:p="http://schemas.openxmlformats.org/presentationml/2006/main" xmlns:r="http://schemas.openxmlformats.org/officeDocument/2006/relationships">
+  <p:cSld>
+    <p:bg>
+      <p:bgPr>
+        <a:solidFill>
+          <a:srgbClr val="FFFFFF"/>
+        </a:solidFill>
+        <a:effectLst/>
+      </p:bgPr>
+    </p:bg>
+    <p:spTree>
+      <p:nvGrpSpPr>
+        <p:cNvPr id="1" name=""/>
+        <p:cNvGrpSpPr/>
+        <p:nvPr/>
+      </p:nvGrpSpPr>
+      <p:grpSpPr/>
+      <p:sp>
+        <p:nvSpPr>
+          <p:cNvPr id="2" name="Rectangle 1"/>
+          <p:cNvSpPr/>
+          <p:nvPr/>
+        </p:nvSpPr>
+        <p:spPr>
+          <a:xfrm>
+            <a:off x="457200" y="384048"/>
+            <a:ext cx="109728" cy="658368"/>
+          </a:xfrm>
+          <a:prstGeom prst="rect">
+            <a:avLst/>
+          </a:prstGeom>
+          <a:solidFill>
+            <a:srgbClr val="1E40AF"/>
+          </a:solidFill>
+          <a:ln>
+            <a:noFill/>
+          </a:ln>
+          <a:effectLst/>
+        </p:spPr>
+        <p:style>
+          <a:lnRef idx="1">
+            <a:schemeClr val="accent1"/>
+          </a:lnRef>
+          <a:fillRef idx="3">
+            <a:schemeClr val="accent1"/>
+          </a:fillRef>
+          <a:effectRef idx="2">
+            <a:schemeClr val="accent1"/>
+          </a:effectRef>
+          <a:fontRef idx="minor">
+            <a:schemeClr val="lt1"/>
+          </a:fontRef>
+        </p:style>
+        <p:txBody>
+          <a:bodyPr rtlCol="0" anchor="ctr"/>
+          <a:lstStyle/>
+          <a:p>
+            <a:pPr algn="ctr"/>
+          </a:p>
+        </p:txBody>
+      </p:sp>
+      <p:sp>
+        <p:nvSpPr>
+          <p:cNvPr id="3" name="Rounded Rectangle 2"/>
+          <p:cNvSpPr/>
+          <p:nvPr/>
+        </p:nvSpPr>
+        <p:spPr>
+          <a:xfrm>
+            <a:off x="10253167" y="457200"/>
+            <a:ext cx="1389888" cy="457200"/>
+          </a:xfrm>
+          <a:prstGeom prst="roundRect">
+            <a:avLst/>
+          </a:prstGeom>
+          <a:solidFill>
+            <a:srgbClr val="1E40AF"/>
+          </a:solidFill>
+          <a:ln>
+            <a:noFill/>
+          </a:ln>
+          <a:effectLst/>
+        </p:spPr>
+        <p:style>
+          <a:lnRef idx="1">
+            <a:schemeClr val="accent1"/>
+          </a:lnRef>
+          <a:fillRef idx="3">
+            <a:schemeClr val="accent1"/>
+          </a:fillRef>
+          <a:effectRef idx="2">
+            <a:schemeClr val="accent1"/>
+          </a:effectRef>
+          <a:fontRef idx="minor">
+            <a:schemeClr val="lt1"/>
+          </a:fontRef>
+        </p:style>
+        <p:txBody>
+          <a:bodyPr rtlCol="0" anchor="ctr" wrap="none" tIns="0" bIns="0"/>
+          <a:lstStyle/>
+          <a:p>
+            <a:pPr algn="ctr"/>
+            <a:r>
+              <a:rPr sz="1400" b="1">
+                <a:solidFill>
+                  <a:srgbClr val="FFFFFF"/>
+                </a:solidFill>
+                <a:latin typeface="Arial"/>
+              </a:rPr>
+              <a:t>ĐỀ BÀI</a:t>
+            </a:r>
+          </a:p>
+        </p:txBody>
+      </p:sp>
+      <p:sp>
+        <p:nvSpPr>
+          <p:cNvPr id="4" name="TextBox 3"/>
+          <p:cNvSpPr txBox="1"/>
+          <p:nvPr/>
+        </p:nvSpPr>
+        <p:spPr>
+          <a:xfrm>
+            <a:off x="731520" y="274320"/>
+            <a:ext cx="9582912" cy="868680"/>
+          </a:xfrm>
+          <a:prstGeom prst="rect">
+            <a:avLst/>
+          </a:prstGeom>
+          <a:noFill/>
+        </p:spPr>
+        <p:txBody>
+          <a:bodyPr wrap="square" anchor="ctr">
+            <a:spAutoFit/>
+          </a:bodyPr>
+          <a:lstStyle/>
+          <a:p>
+            <a:r>
+              <a:rPr sz="3600" b="1">
+                <a:solidFill>
+                  <a:srgbClr val="1E40AF"/>
+                </a:solidFill>
+                <a:latin typeface="Arial"/>
+              </a:rPr>
+              <a:t>ĐỀ THỰC HÀNH VIẾT</a:t>
+            </a:r>
+          </a:p>
+        </p:txBody>
+      </p:sp>
+      <p:sp>
+        <p:nvSpPr>
+          <p:cNvPr id="5" name="Rectangle 4"/>
+          <p:cNvSpPr/>
+          <p:nvPr/>
+        </p:nvSpPr>
+        <p:spPr>
+          <a:xfrm>
+            <a:off x="457200" y="1207008"/>
+            <a:ext cx="11274552" cy="22000"/>
+          </a:xfrm>
+          <a:prstGeom prst="rect">
+            <a:avLst/>
+          </a:prstGeom>
+          <a:solidFill>
+            <a:srgbClr val="E2E8F0"/>
+          </a:solidFill>
+          <a:ln>
+            <a:noFill/>
+          </a:ln>
+          <a:effectLst/>
+        </p:spPr>
+        <p:style>
+          <a:lnRef idx="1">
+            <a:schemeClr val="accent1"/>
+          </a:lnRef>
+          <a:fillRef idx="3">
+            <a:schemeClr val="accent1"/>
+          </a:fillRef>
+          <a:effectRef idx="2">
+            <a:schemeClr val="accent1"/>
+          </a:effectRef>
+          <a:fontRef idx="minor">
+            <a:schemeClr val="lt1"/>
+          </a:fontRef>
+        </p:style>
+        <p:txBody>
+          <a:bodyPr rtlCol="0" anchor="ctr"/>
+          <a:lstStyle/>
+          <a:p>
+            <a:pPr algn="ctr"/>
+          </a:p>
+        </p:txBody>
+      </p:sp>
+      <p:sp>
+        <p:nvSpPr>
+          <p:cNvPr id="6" name="TextBox 5"/>
+          <p:cNvSpPr txBox="1"/>
+          <p:nvPr/>
+        </p:nvSpPr>
+        <p:spPr>
+          <a:xfrm>
+            <a:off x="457200" y="6355080"/>
+            <a:ext cx="11274552" cy="365760"/>
+          </a:xfrm>
+          <a:prstGeom prst="rect">
+            <a:avLst/>
+          </a:prstGeom>
+          <a:noFill/>
+        </p:spPr>
+        <p:txBody>
+          <a:bodyPr wrap="none">
+            <a:spAutoFit/>
+          </a:bodyPr>
+          <a:lstStyle/>
+          <a:p>
+            <a:pPr algn="r"/>
+            <a:r>
+              <a:rPr sz="1200">
+                <a:solidFill>
+                  <a:srgbClr val="64748B"/>
+                </a:solidFill>
+                <a:latin typeface="Calibri"/>
+              </a:rPr>
+              <a:t>Ngữ văn 10 · Bài 2: Vẻ Đẹp Của Thơ Ca          45</a:t>
+            </a:r>
+          </a:p>
+        </p:txBody>
+      </p:sp>
+      <p:sp>
+        <p:nvSpPr>
+          <p:cNvPr id="7" name="TextBox 6"/>
+          <p:cNvSpPr txBox="1"/>
+          <p:nvPr/>
+        </p:nvSpPr>
+        <p:spPr>
+          <a:xfrm>
+            <a:off x="731520" y="1463040"/>
+            <a:ext cx="10789920" cy="3566160"/>
+          </a:xfrm>
+          <a:prstGeom prst="rect">
+            <a:avLst/>
+          </a:prstGeom>
+          <a:noFill/>
+        </p:spPr>
+        <p:txBody>
+          <a:bodyPr wrap="square" anchor="t" lIns="45720" rIns="45720">
+            <a:spAutoFit/>
+          </a:bodyPr>
+          <a:lstStyle/>
+          <a:p>
+            <a:pPr algn="l">
+              <a:spcAft>
+                <a:spcPts val="800"/>
+              </a:spcAft>
+            </a:pPr>
+            <a:r>
+              <a:rPr sz="2600" b="1">
+                <a:solidFill>
+                  <a:srgbClr val="1E293B"/>
+                </a:solidFill>
+                <a:latin typeface="Calibri"/>
+              </a:rPr>
+              <a:t>Phân tích, đánh giá chủ đề và nét đặc sắc nghệ thuật của bài thơ Mùa xuân chín (Hàn Mặc Tử).</a:t>
+            </a:r>
+          </a:p>
+        </p:txBody>
+      </p:sp>
+      <p:sp>
+        <p:nvSpPr>
+          <p:cNvPr id="8" name="Rounded Rectangle 7"/>
+          <p:cNvSpPr/>
+          <p:nvPr/>
+        </p:nvSpPr>
+        <p:spPr>
+          <a:xfrm>
+            <a:off x="731520" y="5120640"/>
+            <a:ext cx="10789920" cy="693420"/>
+          </a:xfrm>
+          <a:prstGeom prst="roundRect">
+            <a:avLst>
+              <a:gd name="adj" fmla="val 8000"/>
+            </a:avLst>
+          </a:prstGeom>
+          <a:solidFill>
+            <a:srgbClr val="EFF4FF"/>
+          </a:solidFill>
+          <a:ln w="19050">
+            <a:solidFill>
+              <a:srgbClr val="1E40AF"/>
+            </a:solidFill>
+          </a:ln>
+          <a:effectLst/>
+        </p:spPr>
+        <p:style>
+          <a:lnRef idx="1">
+            <a:schemeClr val="accent1"/>
+          </a:lnRef>
+          <a:fillRef idx="3">
+            <a:schemeClr val="accent1"/>
+          </a:fillRef>
+          <a:effectRef idx="2">
+            <a:schemeClr val="accent1"/>
+          </a:effectRef>
+          <a:fontRef idx="minor">
+            <a:schemeClr val="lt1"/>
+          </a:fontRef>
+        </p:style>
+        <p:txBody>
+          <a:bodyPr rtlCol="0" anchor="ctr"/>
+          <a:lstStyle/>
+          <a:p>
+            <a:pPr algn="ctr"/>
+          </a:p>
+        </p:txBody>
+      </p:sp>
+      <p:sp>
+        <p:nvSpPr>
+          <p:cNvPr id="9" name="TextBox 8"/>
+          <p:cNvSpPr txBox="1"/>
+          <p:nvPr/>
+        </p:nvSpPr>
+        <p:spPr>
+          <a:xfrm>
+            <a:off x="914400" y="5120640"/>
+            <a:ext cx="10424160" cy="693420"/>
+          </a:xfrm>
+          <a:prstGeom prst="rect">
+            <a:avLst/>
+          </a:prstGeom>
+          <a:noFill/>
+        </p:spPr>
+        <p:txBody>
+          <a:bodyPr wrap="square" anchor="ctr" lIns="45720" rIns="45720">
+            <a:spAutoFit/>
+          </a:bodyPr>
+          <a:lstStyle/>
+          <a:p>
+            <a:pPr algn="l">
+              <a:spcAft>
+                <a:spcPts val="400"/>
+              </a:spcAft>
+            </a:pPr>
+            <a:r>
+              <a:rPr sz="2200" b="1">
+                <a:solidFill>
+                  <a:srgbClr val="1E40AF"/>
+                </a:solidFill>
+                <a:latin typeface="Calibri"/>
+              </a:rPr>
+              <a:t>💡 Lập dàn ý theo mạch khổ thơ hoặc theo luận điểm.</a:t>
+            </a:r>
+          </a:p>
+        </p:txBody>
+      </p:sp>
+    </p:spTree>
+  </p:cSld>
+  <p:clrMapOvr>
+    <a:masterClrMapping/>
+  </p:clrMapOvr>
+</p:sld>
+</file>
+
+<file path=ppt/slides/slide46.xml><?xml version="1.0" encoding="utf-8"?>
+<p:sld xmlns:a="http://schemas.openxmlformats.org/drawingml/2006/main" xmlns:p="http://schemas.openxmlformats.org/presentationml/2006/main" xmlns:r="http://schemas.openxmlformats.org/officeDocument/2006/relationships">
+  <p:cSld>
+    <p:bg>
+      <p:bgPr>
+        <a:solidFill>
+          <a:srgbClr val="FFFFFF"/>
+        </a:solidFill>
+        <a:effectLst/>
+      </p:bgPr>
+    </p:bg>
+    <p:spTree>
+      <p:nvGrpSpPr>
+        <p:cNvPr id="1" name=""/>
+        <p:cNvGrpSpPr/>
+        <p:nvPr/>
+      </p:nvGrpSpPr>
+      <p:grpSpPr/>
+      <p:sp>
+        <p:nvSpPr>
+          <p:cNvPr id="2" name="Rectangle 1"/>
+          <p:cNvSpPr/>
+          <p:nvPr/>
+        </p:nvSpPr>
+        <p:spPr>
+          <a:xfrm>
+            <a:off x="457200" y="384048"/>
+            <a:ext cx="109728" cy="658368"/>
+          </a:xfrm>
+          <a:prstGeom prst="rect">
+            <a:avLst/>
+          </a:prstGeom>
+          <a:solidFill>
+            <a:srgbClr val="1E40AF"/>
+          </a:solidFill>
+          <a:ln>
+            <a:noFill/>
+          </a:ln>
+          <a:effectLst/>
+        </p:spPr>
+        <p:style>
+          <a:lnRef idx="1">
+            <a:schemeClr val="accent1"/>
+          </a:lnRef>
+          <a:fillRef idx="3">
+            <a:schemeClr val="accent1"/>
+          </a:fillRef>
+          <a:effectRef idx="2">
+            <a:schemeClr val="accent1"/>
+          </a:effectRef>
+          <a:fontRef idx="minor">
+            <a:schemeClr val="lt1"/>
+          </a:fontRef>
+        </p:style>
+        <p:txBody>
+          <a:bodyPr rtlCol="0" anchor="ctr"/>
+          <a:lstStyle/>
+          <a:p>
+            <a:pPr algn="ctr"/>
+          </a:p>
+        </p:txBody>
+      </p:sp>
+      <p:sp>
+        <p:nvSpPr>
+          <p:cNvPr id="3" name="Rounded Rectangle 2"/>
+          <p:cNvSpPr/>
+          <p:nvPr/>
+        </p:nvSpPr>
+        <p:spPr>
+          <a:xfrm>
+            <a:off x="9942271" y="457200"/>
+            <a:ext cx="1700784" cy="457200"/>
+          </a:xfrm>
+          <a:prstGeom prst="roundRect">
+            <a:avLst/>
+          </a:prstGeom>
+          <a:solidFill>
+            <a:srgbClr val="991B1B"/>
+          </a:solidFill>
+          <a:ln>
+            <a:noFill/>
+          </a:ln>
+          <a:effectLst/>
+        </p:spPr>
+        <p:style>
+          <a:lnRef idx="1">
+            <a:schemeClr val="accent1"/>
+          </a:lnRef>
+          <a:fillRef idx="3">
+            <a:schemeClr val="accent1"/>
+          </a:fillRef>
+          <a:effectRef idx="2">
+            <a:schemeClr val="accent1"/>
+          </a:effectRef>
+          <a:fontRef idx="minor">
+            <a:schemeClr val="lt1"/>
+          </a:fontRef>
+        </p:style>
+        <p:txBody>
+          <a:bodyPr rtlCol="0" anchor="ctr" wrap="none" tIns="0" bIns="0"/>
+          <a:lstStyle/>
+          <a:p>
+            <a:pPr algn="ctr"/>
+            <a:r>
+              <a:rPr sz="1400" b="1">
+                <a:solidFill>
+                  <a:srgbClr val="FFFFFF"/>
+                </a:solidFill>
+                <a:latin typeface="Arial"/>
+              </a:rPr>
+              <a:t>LỜI GIẢI</a:t>
+            </a:r>
+          </a:p>
+        </p:txBody>
+      </p:sp>
+      <p:sp>
+        <p:nvSpPr>
+          <p:cNvPr id="4" name="TextBox 3"/>
+          <p:cNvSpPr txBox="1"/>
+          <p:nvPr/>
+        </p:nvSpPr>
+        <p:spPr>
+          <a:xfrm>
+            <a:off x="731520" y="274320"/>
+            <a:ext cx="9272016" cy="868680"/>
+          </a:xfrm>
+          <a:prstGeom prst="rect">
+            <a:avLst/>
+          </a:prstGeom>
+          <a:noFill/>
+        </p:spPr>
+        <p:txBody>
+          <a:bodyPr wrap="square" anchor="ctr">
+            <a:spAutoFit/>
+          </a:bodyPr>
+          <a:lstStyle/>
+          <a:p>
+            <a:r>
+              <a:rPr sz="3600" b="1">
+                <a:solidFill>
+                  <a:srgbClr val="1E40AF"/>
+                </a:solidFill>
+                <a:latin typeface="Arial"/>
+              </a:rPr>
+              <a:t>ĐỀ THỰC HÀNH VIẾT</a:t>
+            </a:r>
+          </a:p>
+        </p:txBody>
+      </p:sp>
+      <p:sp>
+        <p:nvSpPr>
+          <p:cNvPr id="5" name="Rectangle 4"/>
+          <p:cNvSpPr/>
+          <p:nvPr/>
+        </p:nvSpPr>
+        <p:spPr>
+          <a:xfrm>
+            <a:off x="457200" y="1207008"/>
+            <a:ext cx="11274552" cy="22000"/>
+          </a:xfrm>
+          <a:prstGeom prst="rect">
+            <a:avLst/>
+          </a:prstGeom>
+          <a:solidFill>
+            <a:srgbClr val="E2E8F0"/>
+          </a:solidFill>
+          <a:ln>
+            <a:noFill/>
+          </a:ln>
+          <a:effectLst/>
+        </p:spPr>
+        <p:style>
+          <a:lnRef idx="1">
+            <a:schemeClr val="accent1"/>
+          </a:lnRef>
+          <a:fillRef idx="3">
+            <a:schemeClr val="accent1"/>
+          </a:fillRef>
+          <a:effectRef idx="2">
+            <a:schemeClr val="accent1"/>
+          </a:effectRef>
+          <a:fontRef idx="minor">
+            <a:schemeClr val="lt1"/>
+          </a:fontRef>
+        </p:style>
+        <p:txBody>
+          <a:bodyPr rtlCol="0" anchor="ctr"/>
+          <a:lstStyle/>
+          <a:p>
+            <a:pPr algn="ctr"/>
+          </a:p>
+        </p:txBody>
+      </p:sp>
+      <p:sp>
+        <p:nvSpPr>
+          <p:cNvPr id="6" name="TextBox 5"/>
+          <p:cNvSpPr txBox="1"/>
+          <p:nvPr/>
+        </p:nvSpPr>
+        <p:spPr>
+          <a:xfrm>
+            <a:off x="457200" y="6355080"/>
+            <a:ext cx="11274552" cy="365760"/>
+          </a:xfrm>
+          <a:prstGeom prst="rect">
+            <a:avLst/>
+          </a:prstGeom>
+          <a:noFill/>
+        </p:spPr>
+        <p:txBody>
+          <a:bodyPr wrap="none">
+            <a:spAutoFit/>
+          </a:bodyPr>
+          <a:lstStyle/>
+          <a:p>
+            <a:pPr algn="r"/>
+            <a:r>
+              <a:rPr sz="1200">
+                <a:solidFill>
+                  <a:srgbClr val="64748B"/>
+                </a:solidFill>
+                <a:latin typeface="Calibri"/>
+              </a:rPr>
+              <a:t>Ngữ văn 10 · Bài 2: Vẻ Đẹp Của Thơ Ca          46</a:t>
+            </a:r>
+          </a:p>
+        </p:txBody>
+      </p:sp>
+      <p:sp>
+        <p:nvSpPr>
+          <p:cNvPr id="7" name="TextBox 6"/>
+          <p:cNvSpPr txBox="1"/>
+          <p:nvPr/>
+        </p:nvSpPr>
+        <p:spPr>
+          <a:xfrm>
+            <a:off x="731520" y="1463040"/>
+            <a:ext cx="10789920" cy="3474720"/>
+          </a:xfrm>
+          <a:prstGeom prst="rect">
+            <a:avLst/>
+          </a:prstGeom>
+          <a:noFill/>
+        </p:spPr>
+        <p:txBody>
+          <a:bodyPr wrap="square" anchor="t" lIns="45720" rIns="45720">
+            <a:spAutoFit/>
+          </a:bodyPr>
+          <a:lstStyle/>
+          <a:p>
+            <a:pPr algn="l" marL="365760" indent="-365760">
+              <a:spcAft>
+                <a:spcPts val="800"/>
+              </a:spcAft>
+              <a:buClr>
+                <a:srgbClr val="1E40AF"/>
+              </a:buClr>
+              <a:buFont typeface="Arial"/>
+              <a:buChar char="•"/>
+            </a:pPr>
+            <a:r>
+              <a:rPr sz="2300">
+                <a:solidFill>
+                  <a:srgbClr val="1E293B"/>
+                </a:solidFill>
+                <a:latin typeface="Calibri"/>
+              </a:rPr>
+              <a:t>MB: giới thiệu Hàn Mặc Tử, bài thơ.</a:t>
+            </a:r>
+          </a:p>
+          <a:p>
+            <a:pPr algn="l" marL="365760" indent="-365760">
+              <a:spcAft>
+                <a:spcPts val="800"/>
+              </a:spcAft>
+              <a:buClr>
+                <a:srgbClr val="1E40AF"/>
+              </a:buClr>
+              <a:buFont typeface="Arial"/>
+              <a:buChar char="•"/>
+            </a:pPr>
+            <a:r>
+              <a:rPr sz="2300">
+                <a:solidFill>
+                  <a:srgbClr val="1E293B"/>
+                </a:solidFill>
+                <a:latin typeface="Calibri"/>
+              </a:rPr>
+              <a:t>TB: bức tranh xuân “chín” → âm thanh, con người → nỗi nhớ làng → nghệ thuật.</a:t>
+            </a:r>
+          </a:p>
+          <a:p>
+            <a:pPr algn="l" marL="365760" indent="-365760">
+              <a:spcAft>
+                <a:spcPts val="800"/>
+              </a:spcAft>
+              <a:buClr>
+                <a:srgbClr val="1E40AF"/>
+              </a:buClr>
+              <a:buFont typeface="Arial"/>
+              <a:buChar char="•"/>
+            </a:pPr>
+            <a:r>
+              <a:rPr sz="2300">
+                <a:solidFill>
+                  <a:srgbClr val="1E293B"/>
+                </a:solidFill>
+                <a:latin typeface="Calibri"/>
+              </a:rPr>
+              <a:t>Đánh giá giá trị nghệ thuật, ý nghĩa nhân sinh.</a:t>
+            </a:r>
+          </a:p>
+          <a:p>
+            <a:pPr algn="l" marL="365760" indent="-365760">
+              <a:spcAft>
+                <a:spcPts val="800"/>
+              </a:spcAft>
+              <a:buClr>
+                <a:srgbClr val="1E40AF"/>
+              </a:buClr>
+              <a:buFont typeface="Arial"/>
+              <a:buChar char="•"/>
+            </a:pPr>
+            <a:r>
+              <a:rPr sz="2300">
+                <a:solidFill>
+                  <a:srgbClr val="1E293B"/>
+                </a:solidFill>
+                <a:latin typeface="Calibri"/>
+              </a:rPr>
+              <a:t>KB: khẳng định giá trị, cảm nghĩ riêng.</a:t>
+            </a:r>
+          </a:p>
+        </p:txBody>
+      </p:sp>
+      <p:sp>
+        <p:nvSpPr>
+          <p:cNvPr id="8" name="Rounded Rectangle 7"/>
+          <p:cNvSpPr/>
+          <p:nvPr/>
+        </p:nvSpPr>
+        <p:spPr>
+          <a:xfrm>
+            <a:off x="731520" y="5074920"/>
+            <a:ext cx="10789920" cy="731520"/>
+          </a:xfrm>
+          <a:prstGeom prst="roundRect">
+            <a:avLst>
+              <a:gd name="adj" fmla="val 8000"/>
+            </a:avLst>
+          </a:prstGeom>
+          <a:solidFill>
+            <a:srgbClr val="FEF2F2"/>
+          </a:solidFill>
+          <a:ln w="19050">
+            <a:solidFill>
+              <a:srgbClr val="991B1B"/>
+            </a:solidFill>
+          </a:ln>
+          <a:effectLst/>
+        </p:spPr>
+        <p:style>
+          <a:lnRef idx="1">
+            <a:schemeClr val="accent1"/>
+          </a:lnRef>
+          <a:fillRef idx="3">
+            <a:schemeClr val="accent1"/>
+          </a:fillRef>
+          <a:effectRef idx="2">
+            <a:schemeClr val="accent1"/>
+          </a:effectRef>
+          <a:fontRef idx="minor">
+            <a:schemeClr val="lt1"/>
+          </a:fontRef>
+        </p:style>
+        <p:txBody>
+          <a:bodyPr rtlCol="0" anchor="ctr"/>
+          <a:lstStyle/>
+          <a:p>
+            <a:pPr algn="ctr"/>
+          </a:p>
+        </p:txBody>
+      </p:sp>
+      <p:sp>
+        <p:nvSpPr>
+          <p:cNvPr id="9" name="TextBox 8"/>
+          <p:cNvSpPr txBox="1"/>
+          <p:nvPr/>
+        </p:nvSpPr>
+        <p:spPr>
+          <a:xfrm>
+            <a:off x="914400" y="5074920"/>
+            <a:ext cx="10424160" cy="731520"/>
+          </a:xfrm>
+          <a:prstGeom prst="rect">
+            <a:avLst/>
+          </a:prstGeom>
+          <a:noFill/>
+        </p:spPr>
+        <p:txBody>
+          <a:bodyPr wrap="square" anchor="ctr" lIns="45720" rIns="45720">
+            <a:spAutoFit/>
+          </a:bodyPr>
+          <a:lstStyle/>
+          <a:p>
+            <a:pPr algn="l">
+              <a:spcAft>
+                <a:spcPts val="400"/>
+              </a:spcAft>
+            </a:pPr>
+            <a:r>
+              <a:rPr sz="2400" b="1">
+                <a:solidFill>
+                  <a:srgbClr val="991B1B"/>
+                </a:solidFill>
+                <a:latin typeface="Calibri"/>
+              </a:rPr>
+              <a:t>Gắn phân tích hình thức với cảm xúc.</a:t>
+            </a:r>
+          </a:p>
+        </p:txBody>
+      </p:sp>
+    </p:spTree>
+  </p:cSld>
+  <p:clrMapOvr>
+    <a:masterClrMapping/>
+  </p:clrMapOvr>
+</p:sld>
+</file>
+
+<file path=ppt/slides/slide47.xml><?xml version="1.0" encoding="utf-8"?>
+<p:sld xmlns:a="http://schemas.openxmlformats.org/drawingml/2006/main" xmlns:p="http://schemas.openxmlformats.org/presentationml/2006/main" xmlns:r="http://schemas.openxmlformats.org/officeDocument/2006/relationships">
+  <p:cSld>
+    <p:bg>
+      <p:bgPr>
+        <a:solidFill>
+          <a:srgbClr val="FFFFFF"/>
+        </a:solidFill>
+        <a:effectLst/>
+      </p:bgPr>
+    </p:bg>
+    <p:spTree>
+      <p:nvGrpSpPr>
+        <p:cNvPr id="1" name=""/>
+        <p:cNvGrpSpPr/>
+        <p:nvPr/>
+      </p:nvGrpSpPr>
+      <p:grpSpPr/>
+      <p:sp>
+        <p:nvSpPr>
+          <p:cNvPr id="2" name="Rectangle 1"/>
+          <p:cNvSpPr/>
+          <p:nvPr/>
+        </p:nvSpPr>
+        <p:spPr>
+          <a:xfrm>
+            <a:off x="457200" y="384048"/>
+            <a:ext cx="109728" cy="658368"/>
+          </a:xfrm>
+          <a:prstGeom prst="rect">
+            <a:avLst/>
+          </a:prstGeom>
+          <a:solidFill>
+            <a:srgbClr val="1E40AF"/>
+          </a:solidFill>
+          <a:ln>
+            <a:noFill/>
+          </a:ln>
+          <a:effectLst/>
+        </p:spPr>
+        <p:style>
+          <a:lnRef idx="1">
+            <a:schemeClr val="accent1"/>
+          </a:lnRef>
+          <a:fillRef idx="3">
+            <a:schemeClr val="accent1"/>
+          </a:fillRef>
+          <a:effectRef idx="2">
+            <a:schemeClr val="accent1"/>
+          </a:effectRef>
+          <a:fontRef idx="minor">
+            <a:schemeClr val="lt1"/>
+          </a:fontRef>
+        </p:style>
+        <p:txBody>
+          <a:bodyPr rtlCol="0" anchor="ctr"/>
+          <a:lstStyle/>
+          <a:p>
+            <a:pPr algn="ctr"/>
+          </a:p>
+        </p:txBody>
+      </p:sp>
+      <p:sp>
+        <p:nvSpPr>
+          <p:cNvPr id="3" name="Rounded Rectangle 2"/>
+          <p:cNvSpPr/>
+          <p:nvPr/>
+        </p:nvSpPr>
+        <p:spPr>
+          <a:xfrm>
+            <a:off x="10097719" y="457200"/>
+            <a:ext cx="1545336" cy="457200"/>
+          </a:xfrm>
+          <a:prstGeom prst="roundRect">
+            <a:avLst/>
+          </a:prstGeom>
+          <a:solidFill>
+            <a:srgbClr val="166534"/>
+          </a:solidFill>
+          <a:ln>
+            <a:noFill/>
+          </a:ln>
+          <a:effectLst/>
+        </p:spPr>
+        <p:style>
+          <a:lnRef idx="1">
+            <a:schemeClr val="accent1"/>
+          </a:lnRef>
+          <a:fillRef idx="3">
+            <a:schemeClr val="accent1"/>
+          </a:fillRef>
+          <a:effectRef idx="2">
+            <a:schemeClr val="accent1"/>
+          </a:effectRef>
+          <a:fontRef idx="minor">
+            <a:schemeClr val="lt1"/>
+          </a:fontRef>
+        </p:style>
+        <p:txBody>
+          <a:bodyPr rtlCol="0" anchor="ctr" wrap="none" tIns="0" bIns="0"/>
+          <a:lstStyle/>
+          <a:p>
+            <a:pPr algn="ctr"/>
+            <a:r>
+              <a:rPr sz="1400" b="1">
+                <a:solidFill>
+                  <a:srgbClr val="FFFFFF"/>
+                </a:solidFill>
+                <a:latin typeface="Arial"/>
+              </a:rPr>
+              <a:t>CỦNG CỐ</a:t>
+            </a:r>
+          </a:p>
+        </p:txBody>
+      </p:sp>
+      <p:sp>
+        <p:nvSpPr>
+          <p:cNvPr id="4" name="TextBox 3"/>
+          <p:cNvSpPr txBox="1"/>
+          <p:nvPr/>
+        </p:nvSpPr>
+        <p:spPr>
+          <a:xfrm>
+            <a:off x="731520" y="274320"/>
+            <a:ext cx="9427464" cy="868680"/>
+          </a:xfrm>
+          <a:prstGeom prst="rect">
+            <a:avLst/>
+          </a:prstGeom>
+          <a:noFill/>
+        </p:spPr>
+        <p:txBody>
+          <a:bodyPr wrap="square" anchor="ctr">
+            <a:spAutoFit/>
+          </a:bodyPr>
+          <a:lstStyle/>
+          <a:p>
+            <a:r>
+              <a:rPr sz="3600" b="1">
+                <a:solidFill>
+                  <a:srgbClr val="1E40AF"/>
+                </a:solidFill>
+                <a:latin typeface="Arial"/>
+              </a:rPr>
+              <a:t>SƠ ĐỒ TƯ DUY</a:t>
+            </a:r>
+          </a:p>
+        </p:txBody>
+      </p:sp>
+      <p:sp>
+        <p:nvSpPr>
+          <p:cNvPr id="5" name="Rectangle 4"/>
+          <p:cNvSpPr/>
+          <p:nvPr/>
+        </p:nvSpPr>
+        <p:spPr>
+          <a:xfrm>
+            <a:off x="457200" y="1207008"/>
+            <a:ext cx="11274552" cy="22000"/>
+          </a:xfrm>
+          <a:prstGeom prst="rect">
+            <a:avLst/>
+          </a:prstGeom>
+          <a:solidFill>
+            <a:srgbClr val="E2E8F0"/>
+          </a:solidFill>
+          <a:ln>
+            <a:noFill/>
+          </a:ln>
+          <a:effectLst/>
+        </p:spPr>
+        <p:style>
+          <a:lnRef idx="1">
+            <a:schemeClr val="accent1"/>
+          </a:lnRef>
+          <a:fillRef idx="3">
+            <a:schemeClr val="accent1"/>
+          </a:fillRef>
+          <a:effectRef idx="2">
+            <a:schemeClr val="accent1"/>
+          </a:effectRef>
+          <a:fontRef idx="minor">
+            <a:schemeClr val="lt1"/>
+          </a:fontRef>
+        </p:style>
+        <p:txBody>
+          <a:bodyPr rtlCol="0" anchor="ctr"/>
+          <a:lstStyle/>
+          <a:p>
+            <a:pPr algn="ctr"/>
+          </a:p>
+        </p:txBody>
+      </p:sp>
+      <p:sp>
+        <p:nvSpPr>
+          <p:cNvPr id="6" name="TextBox 5"/>
+          <p:cNvSpPr txBox="1"/>
+          <p:nvPr/>
+        </p:nvSpPr>
+        <p:spPr>
+          <a:xfrm>
+            <a:off x="457200" y="6355080"/>
+            <a:ext cx="11274552" cy="365760"/>
+          </a:xfrm>
+          <a:prstGeom prst="rect">
+            <a:avLst/>
+          </a:prstGeom>
+          <a:noFill/>
+        </p:spPr>
+        <p:txBody>
+          <a:bodyPr wrap="none">
+            <a:spAutoFit/>
+          </a:bodyPr>
+          <a:lstStyle/>
+          <a:p>
+            <a:pPr algn="r"/>
+            <a:r>
+              <a:rPr sz="1200">
+                <a:solidFill>
+                  <a:srgbClr val="64748B"/>
+                </a:solidFill>
+                <a:latin typeface="Calibri"/>
+              </a:rPr>
+              <a:t>Ngữ văn 10 · Bài 2: Vẻ Đẹp Của Thơ Ca          47</a:t>
+            </a:r>
+          </a:p>
+        </p:txBody>
+      </p:sp>
+      <p:pic>
+        <p:nvPicPr>
+          <p:cNvPr id="7" name="Picture 6" descr="SoDoTuDuy_NGUVAN10_Bai2_VeDepCuaThoCa_T12-22.png"/>
+          <p:cNvPicPr>
+            <a:picLocks noChangeAspect="1"/>
+          </p:cNvPicPr>
+          <p:nvPr/>
+        </p:nvPicPr>
+        <p:blipFill>
+          <a:blip r:embed="rId2"/>
+          <a:stretch>
+            <a:fillRect/>
+          </a:stretch>
+        </p:blipFill>
+        <p:spPr>
+          <a:xfrm>
+            <a:off x="1788855" y="1371600"/>
+            <a:ext cx="8675250" cy="4846320"/>
+          </a:xfrm>
+          <a:prstGeom prst="rect">
+            <a:avLst/>
+          </a:prstGeom>
+        </p:spPr>
+      </p:pic>
+    </p:spTree>
+  </p:cSld>
+  <p:clrMapOvr>
+    <a:masterClrMapping/>
+  </p:clrMapOvr>
+</p:sld>
+</file>
+
+<file path=ppt/slides/slide48.xml><?xml version="1.0" encoding="utf-8"?>
+<p:sld xmlns:a="http://schemas.openxmlformats.org/drawingml/2006/main" xmlns:p="http://schemas.openxmlformats.org/presentationml/2006/main" xmlns:r="http://schemas.openxmlformats.org/officeDocument/2006/relationships">
+  <p:cSld>
+    <p:bg>
+      <p:bgPr>
+        <a:solidFill>
+          <a:srgbClr val="FFFFFF"/>
+        </a:solidFill>
+        <a:effectLst/>
+      </p:bgPr>
+    </p:bg>
+    <p:spTree>
+      <p:nvGrpSpPr>
+        <p:cNvPr id="1" name=""/>
+        <p:cNvGrpSpPr/>
+        <p:nvPr/>
+      </p:nvGrpSpPr>
+      <p:grpSpPr/>
+      <p:sp>
+        <p:nvSpPr>
+          <p:cNvPr id="2" name="Rectangle 1"/>
+          <p:cNvSpPr/>
+          <p:nvPr/>
+        </p:nvSpPr>
+        <p:spPr>
+          <a:xfrm>
+            <a:off x="457200" y="384048"/>
+            <a:ext cx="109728" cy="658368"/>
+          </a:xfrm>
+          <a:prstGeom prst="rect">
+            <a:avLst/>
+          </a:prstGeom>
+          <a:solidFill>
+            <a:srgbClr val="1E40AF"/>
+          </a:solidFill>
+          <a:ln>
+            <a:noFill/>
+          </a:ln>
+          <a:effectLst/>
+        </p:spPr>
+        <p:style>
+          <a:lnRef idx="1">
+            <a:schemeClr val="accent1"/>
+          </a:lnRef>
+          <a:fillRef idx="3">
+            <a:schemeClr val="accent1"/>
+          </a:fillRef>
+          <a:effectRef idx="2">
+            <a:schemeClr val="accent1"/>
+          </a:effectRef>
+          <a:fontRef idx="minor">
+            <a:schemeClr val="lt1"/>
+          </a:fontRef>
+        </p:style>
+        <p:txBody>
+          <a:bodyPr rtlCol="0" anchor="ctr"/>
+          <a:lstStyle/>
+          <a:p>
+            <a:pPr algn="ctr"/>
+          </a:p>
+        </p:txBody>
+      </p:sp>
+      <p:sp>
+        <p:nvSpPr>
+          <p:cNvPr id="3" name="Rounded Rectangle 2"/>
+          <p:cNvSpPr/>
+          <p:nvPr/>
+        </p:nvSpPr>
+        <p:spPr>
+          <a:xfrm>
+            <a:off x="10097719" y="457200"/>
+            <a:ext cx="1545336" cy="457200"/>
+          </a:xfrm>
+          <a:prstGeom prst="roundRect">
+            <a:avLst/>
+          </a:prstGeom>
+          <a:solidFill>
+            <a:srgbClr val="991B1B"/>
+          </a:solidFill>
+          <a:ln>
+            <a:noFill/>
+          </a:ln>
+          <a:effectLst/>
+        </p:spPr>
+        <p:style>
+          <a:lnRef idx="1">
+            <a:schemeClr val="accent1"/>
+          </a:lnRef>
+          <a:fillRef idx="3">
+            <a:schemeClr val="accent1"/>
+          </a:fillRef>
+          <a:effectRef idx="2">
+            <a:schemeClr val="accent1"/>
+          </a:effectRef>
+          <a:fontRef idx="minor">
+            <a:schemeClr val="lt1"/>
+          </a:fontRef>
+        </p:style>
+        <p:txBody>
+          <a:bodyPr rtlCol="0" anchor="ctr" wrap="none" tIns="0" bIns="0"/>
+          <a:lstStyle/>
+          <a:p>
+            <a:pPr algn="ctr"/>
+            <a:r>
+              <a:rPr sz="1400" b="1">
+                <a:solidFill>
+                  <a:srgbClr val="FFFFFF"/>
+                </a:solidFill>
+                <a:latin typeface="Arial"/>
+              </a:rPr>
+              <a:t>CỦNG CỐ</a:t>
+            </a:r>
+          </a:p>
+        </p:txBody>
+      </p:sp>
+      <p:sp>
+        <p:nvSpPr>
+          <p:cNvPr id="4" name="TextBox 3"/>
+          <p:cNvSpPr txBox="1"/>
+          <p:nvPr/>
+        </p:nvSpPr>
+        <p:spPr>
+          <a:xfrm>
+            <a:off x="731520" y="274320"/>
+            <a:ext cx="9427464" cy="868680"/>
+          </a:xfrm>
+          <a:prstGeom prst="rect">
+            <a:avLst/>
+          </a:prstGeom>
+          <a:noFill/>
+        </p:spPr>
+        <p:txBody>
+          <a:bodyPr wrap="square" anchor="ctr">
+            <a:spAutoFit/>
+          </a:bodyPr>
+          <a:lstStyle/>
+          <a:p>
+            <a:r>
+              <a:rPr sz="3600" b="1">
+                <a:solidFill>
+                  <a:srgbClr val="1E40AF"/>
+                </a:solidFill>
+                <a:latin typeface="Arial"/>
+              </a:rPr>
+              <a:t>BÀI TẬP CỦA BẠN</a:t>
+            </a:r>
+          </a:p>
+        </p:txBody>
+      </p:sp>
+      <p:sp>
+        <p:nvSpPr>
+          <p:cNvPr id="5" name="Rectangle 4"/>
+          <p:cNvSpPr/>
+          <p:nvPr/>
+        </p:nvSpPr>
+        <p:spPr>
+          <a:xfrm>
+            <a:off x="457200" y="1207008"/>
+            <a:ext cx="11274552" cy="22000"/>
+          </a:xfrm>
+          <a:prstGeom prst="rect">
+            <a:avLst/>
+          </a:prstGeom>
+          <a:solidFill>
+            <a:srgbClr val="E2E8F0"/>
+          </a:solidFill>
+          <a:ln>
+            <a:noFill/>
+          </a:ln>
+          <a:effectLst/>
+        </p:spPr>
+        <p:style>
+          <a:lnRef idx="1">
+            <a:schemeClr val="accent1"/>
+          </a:lnRef>
+          <a:fillRef idx="3">
+            <a:schemeClr val="accent1"/>
+          </a:fillRef>
+          <a:effectRef idx="2">
+            <a:schemeClr val="accent1"/>
+          </a:effectRef>
+          <a:fontRef idx="minor">
+            <a:schemeClr val="lt1"/>
+          </a:fontRef>
+        </p:style>
+        <p:txBody>
+          <a:bodyPr rtlCol="0" anchor="ctr"/>
+          <a:lstStyle/>
+          <a:p>
+            <a:pPr algn="ctr"/>
+          </a:p>
+        </p:txBody>
+      </p:sp>
+      <p:sp>
+        <p:nvSpPr>
+          <p:cNvPr id="6" name="TextBox 5"/>
+          <p:cNvSpPr txBox="1"/>
+          <p:nvPr/>
+        </p:nvSpPr>
+        <p:spPr>
+          <a:xfrm>
+            <a:off x="457200" y="6355080"/>
+            <a:ext cx="11274552" cy="365760"/>
+          </a:xfrm>
+          <a:prstGeom prst="rect">
+            <a:avLst/>
+          </a:prstGeom>
+          <a:noFill/>
+        </p:spPr>
+        <p:txBody>
+          <a:bodyPr wrap="none">
+            <a:spAutoFit/>
+          </a:bodyPr>
+          <a:lstStyle/>
+          <a:p>
+            <a:pPr algn="r"/>
+            <a:r>
+              <a:rPr sz="1200">
+                <a:solidFill>
+                  <a:srgbClr val="64748B"/>
+                </a:solidFill>
+                <a:latin typeface="Calibri"/>
+              </a:rPr>
+              <a:t>Ngữ văn 10 · Bài 2: Vẻ Đẹp Của Thơ Ca          48</a:t>
             </a:r>
           </a:p>
         </p:txBody>
@@ -18168,14 +20344,14 @@
         </p:nvSpPr>
         <p:spPr>
           <a:xfrm>
-            <a:off x="10097719" y="457200"/>
-            <a:ext cx="1545336" cy="457200"/>
+            <a:off x="10408615" y="457200"/>
+            <a:ext cx="1234440" cy="457200"/>
           </a:xfrm>
           <a:prstGeom prst="roundRect">
             <a:avLst/>
           </a:prstGeom>
           <a:solidFill>
-            <a:srgbClr val="166534"/>
+            <a:srgbClr val="991B1B"/>
           </a:solidFill>
           <a:ln>
             <a:noFill/>
@@ -18208,7 +20384,7 @@
                 </a:solidFill>
                 <a:latin typeface="Arial"/>
               </a:rPr>
-              <a:t>GHI NHỚ</a:t>
+              <a:t>VIDEO</a:t>
             </a:r>
           </a:p>
         </p:txBody>
@@ -18222,7 +20398,7 @@
         <p:spPr>
           <a:xfrm>
             <a:off x="731520" y="274320"/>
-            <a:ext cx="9427464" cy="868680"/>
+            <a:ext cx="9738360" cy="868680"/>
           </a:xfrm>
           <a:prstGeom prst="rect">
             <a:avLst/>
@@ -18242,7 +20418,7 @@
                 </a:solidFill>
                 <a:latin typeface="Arial"/>
               </a:rPr>
-              <a:t>TRI THỨC NGỮ VĂN</a:t>
+              <a:t>VIDEO THAM KHẢO</a:t>
             </a:r>
           </a:p>
         </p:txBody>
@@ -18326,16 +20502,40 @@
           </a:p>
         </p:txBody>
       </p:sp>
-      <p:sp>
-        <p:nvSpPr>
-          <p:cNvPr id="7" name="TextBox 6"/>
+      <p:pic>
+        <p:nvPicPr>
+          <p:cNvPr id="7" name="Picture 6" descr="QR_video_uS7Hxn7RKDo.png"/>
+          <p:cNvPicPr>
+            <a:picLocks noChangeAspect="1"/>
+          </p:cNvPicPr>
+          <p:nvPr/>
+        </p:nvPicPr>
+        <p:blipFill>
+          <a:blip r:embed="rId2"/>
+          <a:stretch>
+            <a:fillRect/>
+          </a:stretch>
+        </p:blipFill>
+        <p:spPr>
+          <a:xfrm>
+            <a:off x="8412480" y="1554480"/>
+            <a:ext cx="3108960" cy="3108960"/>
+          </a:xfrm>
+          <a:prstGeom prst="rect">
+            <a:avLst/>
+          </a:prstGeom>
+        </p:spPr>
+      </p:pic>
+      <p:sp>
+        <p:nvSpPr>
+          <p:cNvPr id="8" name="TextBox 7"/>
           <p:cNvSpPr txBox="1"/>
           <p:nvPr/>
         </p:nvSpPr>
         <p:spPr>
           <a:xfrm>
-            <a:off x="731520" y="1463040"/>
-            <a:ext cx="10789920" cy="4754880"/>
+            <a:off x="731520" y="1554480"/>
+            <a:ext cx="7498079" cy="4206240"/>
           </a:xfrm>
           <a:prstGeom prst="rect">
             <a:avLst/>
@@ -18347,6 +20547,38 @@
             <a:spAutoFit/>
           </a:bodyPr>
           <a:lstStyle/>
+          <a:p>
+            <a:pPr algn="l">
+              <a:spcAft>
+                <a:spcPts val="800"/>
+              </a:spcAft>
+            </a:pPr>
+            <a:r>
+              <a:rPr sz="2600" b="1">
+                <a:solidFill>
+                  <a:srgbClr val="1E293B"/>
+                </a:solidFill>
+                <a:latin typeface="Calibri"/>
+              </a:rPr>
+              <a:t>🎬 Matsuo Bashō – Người khai sáng thơ Haiku Nhật Bản</a:t>
+            </a:r>
+          </a:p>
+          <a:p>
+            <a:pPr algn="l">
+              <a:spcAft>
+                <a:spcPts val="800"/>
+              </a:spcAft>
+            </a:pPr>
+            <a:r>
+              <a:rPr sz="2000">
+                <a:solidFill>
+                  <a:srgbClr val="64748B"/>
+                </a:solidFill>
+                <a:latin typeface="Calibri"/>
+              </a:rPr>
+              <a:t>Kênh: Người Nổi Tiếng</a:t>
+            </a:r>
+          </a:p>
           <a:p>
             <a:pPr algn="l" marL="365760" indent="-365760">
               <a:spcAft>
@@ -18359,112 +20591,30 @@
               <a:buChar char="•"/>
             </a:pPr>
             <a:r>
-              <a:rPr sz="2400" b="1">
+              <a:rPr sz="2000">
                 <a:solidFill>
                   <a:srgbClr val="1E293B"/>
                 </a:solidFill>
                 <a:latin typeface="Calibri"/>
               </a:rPr>
-              <a:t>Nhân vật trữ tình</a:t>
-            </a:r>
-            <a:r>
-              <a:rPr sz="2400">
-                <a:solidFill>
-                  <a:srgbClr val="1E293B"/>
-                </a:solidFill>
-                <a:latin typeface="Calibri"/>
-              </a:rPr>
-              <a:t>: người trực tiếp bộc lộ rung động, tình cảm trong bài thơ.</a:t>
-            </a:r>
-          </a:p>
-          <a:p>
-            <a:pPr algn="l" marL="365760" indent="-365760">
+              <a:t>Tìm hiểu tác giả Ba-sô, thể thơ hai-cư</a:t>
+            </a:r>
+          </a:p>
+          <a:p>
+            <a:pPr algn="l">
               <a:spcAft>
                 <a:spcPts val="800"/>
               </a:spcAft>
-              <a:buClr>
-                <a:srgbClr val="1E40AF"/>
-              </a:buClr>
-              <a:buFont typeface="Arial"/>
-              <a:buChar char="•"/>
             </a:pPr>
             <a:r>
-              <a:rPr sz="2400" b="1">
-                <a:solidFill>
-                  <a:srgbClr val="1E293B"/>
+              <a:rPr sz="1600">
+                <a:solidFill>
+                  <a:srgbClr val="64748B"/>
                 </a:solidFill>
                 <a:latin typeface="Calibri"/>
-              </a:rPr>
-              <a:t>Hình ảnh thơ</a:t>
-            </a:r>
-            <a:r>
-              <a:rPr sz="2400">
-                <a:solidFill>
-                  <a:srgbClr val="1E293B"/>
-                </a:solidFill>
-                <a:latin typeface="Calibri"/>
-              </a:rPr>
-              <a:t>: sự vật, hiện tượng tái tạo cụ thể bằng ngôn từ, khơi cảm giác.</a:t>
-            </a:r>
-          </a:p>
-          <a:p>
-            <a:pPr algn="l" marL="365760" indent="-365760">
-              <a:spcAft>
-                <a:spcPts val="800"/>
-              </a:spcAft>
-              <a:buClr>
-                <a:srgbClr val="1E40AF"/>
-              </a:buClr>
-              <a:buFont typeface="Arial"/>
-              <a:buChar char="•"/>
-            </a:pPr>
-            <a:r>
-              <a:rPr sz="2400" b="1">
-                <a:solidFill>
-                  <a:srgbClr val="1E293B"/>
-                </a:solidFill>
-                <a:latin typeface="Calibri"/>
-              </a:rPr>
-              <a:t>Vần, nhịp, nhạc điệu, đối</a:t>
-            </a:r>
-            <a:r>
-              <a:rPr sz="2400">
-                <a:solidFill>
-                  <a:srgbClr val="1E293B"/>
-                </a:solidFill>
-                <a:latin typeface="Calibri"/>
-              </a:rPr>
-              <a:t>: tạo âm hưởng, liên kết, sự cân xứng.</a:t>
-            </a:r>
-          </a:p>
-          <a:p>
-            <a:pPr algn="l" marL="365760" indent="-365760">
-              <a:spcAft>
-                <a:spcPts val="800"/>
-              </a:spcAft>
-              <a:buClr>
-                <a:srgbClr val="1E40AF"/>
-              </a:buClr>
-              <a:buFont typeface="Arial"/>
-              <a:buChar char="•"/>
-            </a:pPr>
-            <a:r>
-              <a:rPr sz="2400" b="1">
-                <a:solidFill>
-                  <a:srgbClr val="1E293B"/>
-                </a:solidFill>
-                <a:latin typeface="Calibri"/>
-              </a:rPr>
-              <a:t>Thi luật, thể thơ</a:t>
-            </a:r>
-            <a:r>
-              <a:rPr sz="2400">
-                <a:solidFill>
-                  <a:srgbClr val="1E293B"/>
-                </a:solidFill>
-                <a:latin typeface="Calibri"/>
-              </a:rPr>
-              <a:t>: quy tắc tổ chức ngôn từ; hai-cư, Đường luật, Thơ mới…</a:t>
+                <a:hlinkClick r:id="rId3"/>
+              </a:rPr>
+              <a:t>https://www.youtube.com/watch?v=uS7Hxn7RKDo</a:t>
             </a:r>
           </a:p>
         </p:txBody>
@@ -18547,14 +20697,14 @@
         </p:nvSpPr>
         <p:spPr>
           <a:xfrm>
-            <a:off x="10253167" y="457200"/>
-            <a:ext cx="1389888" cy="457200"/>
+            <a:off x="10097719" y="457200"/>
+            <a:ext cx="1545336" cy="457200"/>
           </a:xfrm>
           <a:prstGeom prst="roundRect">
             <a:avLst/>
           </a:prstGeom>
           <a:solidFill>
-            <a:srgbClr val="1E40AF"/>
+            <a:srgbClr val="166534"/>
           </a:solidFill>
           <a:ln>
             <a:noFill/>
@@ -18587,7 +20737,7 @@
                 </a:solidFill>
                 <a:latin typeface="Arial"/>
               </a:rPr>
-              <a:t>ĐỀ BÀI</a:t>
+              <a:t>GHI NHỚ</a:t>
             </a:r>
           </a:p>
         </p:txBody>
@@ -18601,7 +20751,7 @@
         <p:spPr>
           <a:xfrm>
             <a:off x="731520" y="274320"/>
-            <a:ext cx="9582912" cy="868680"/>
+            <a:ext cx="9427464" cy="868680"/>
           </a:xfrm>
           <a:prstGeom prst="rect">
             <a:avLst/>
@@ -18621,7 +20771,7 @@
                 </a:solidFill>
                 <a:latin typeface="Arial"/>
               </a:rPr>
-              <a:t>HÌNH ẢNH TRUNG TÂM CỦA THƠ HAI-CƯ</a:t>
+              <a:t>TRI THỨC NGỮ VĂN</a:t>
             </a:r>
           </a:p>
         </p:txBody>
@@ -18714,7 +20864,7 @@
         <p:spPr>
           <a:xfrm>
             <a:off x="731520" y="1463040"/>
-            <a:ext cx="10789920" cy="3566160"/>
+            <a:ext cx="10789920" cy="4754880"/>
           </a:xfrm>
           <a:prstGeom prst="rect">
             <a:avLst/>
@@ -18727,106 +20877,123 @@
           </a:bodyPr>
           <a:lstStyle/>
           <a:p>
-            <a:pPr algn="l">
+            <a:pPr algn="l" marL="365760" indent="-365760">
               <a:spcAft>
                 <a:spcPts val="800"/>
               </a:spcAft>
+              <a:buClr>
+                <a:srgbClr val="1E40AF"/>
+              </a:buClr>
+              <a:buFont typeface="Arial"/>
+              <a:buChar char="•"/>
             </a:pPr>
             <a:r>
-              <a:rPr sz="2600" b="1">
+              <a:rPr sz="2400" b="1">
                 <a:solidFill>
                   <a:srgbClr val="1E293B"/>
                 </a:solidFill>
                 <a:latin typeface="Calibri"/>
               </a:rPr>
-              <a:t>Nhận diện hình ảnh trung tâm ở từng bài thơ hai-cư và cho biết đặc điểm chung của các hình ảnh ấy.</a:t>
-            </a:r>
-          </a:p>
-        </p:txBody>
-      </p:sp>
-      <p:sp>
-        <p:nvSpPr>
-          <p:cNvPr id="8" name="Rounded Rectangle 7"/>
-          <p:cNvSpPr/>
-          <p:nvPr/>
-        </p:nvSpPr>
-        <p:spPr>
-          <a:xfrm>
-            <a:off x="731520" y="5120640"/>
-            <a:ext cx="10789920" cy="693420"/>
-          </a:xfrm>
-          <a:prstGeom prst="roundRect">
-            <a:avLst>
-              <a:gd name="adj" fmla="val 8000"/>
-            </a:avLst>
-          </a:prstGeom>
-          <a:solidFill>
-            <a:srgbClr val="EFF4FF"/>
-          </a:solidFill>
-          <a:ln w="19050">
-            <a:solidFill>
-              <a:srgbClr val="1E40AF"/>
-            </a:solidFill>
-          </a:ln>
-          <a:effectLst/>
-        </p:spPr>
-        <p:style>
-          <a:lnRef idx="1">
-            <a:schemeClr val="accent1"/>
-          </a:lnRef>
-          <a:fillRef idx="3">
-            <a:schemeClr val="accent1"/>
-          </a:fillRef>
-          <a:effectRef idx="2">
-            <a:schemeClr val="accent1"/>
-          </a:effectRef>
-          <a:fontRef idx="minor">
-            <a:schemeClr val="lt1"/>
-          </a:fontRef>
-        </p:style>
-        <p:txBody>
-          <a:bodyPr rtlCol="0" anchor="ctr"/>
-          <a:lstStyle/>
-          <a:p>
-            <a:pPr algn="ctr"/>
-          </a:p>
-        </p:txBody>
-      </p:sp>
-      <p:sp>
-        <p:nvSpPr>
-          <p:cNvPr id="9" name="TextBox 8"/>
-          <p:cNvSpPr txBox="1"/>
-          <p:nvPr/>
-        </p:nvSpPr>
-        <p:spPr>
-          <a:xfrm>
-            <a:off x="914400" y="5120640"/>
-            <a:ext cx="10424160" cy="693420"/>
-          </a:xfrm>
-          <a:prstGeom prst="rect">
-            <a:avLst/>
-          </a:prstGeom>
-          <a:noFill/>
-        </p:spPr>
-        <p:txBody>
-          <a:bodyPr wrap="square" anchor="ctr" lIns="45720" rIns="45720">
-            <a:spAutoFit/>
-          </a:bodyPr>
-          <a:lstStyle/>
-          <a:p>
-            <a:pPr algn="l">
+              <a:t>Nhân vật trữ tình</a:t>
+            </a:r>
+            <a:r>
+              <a:rPr sz="2400">
+                <a:solidFill>
+                  <a:srgbClr val="1E293B"/>
+                </a:solidFill>
+                <a:latin typeface="Calibri"/>
+              </a:rPr>
+              <a:t>: người trực tiếp bộc lộ rung động, tình cảm trong bài thơ.</a:t>
+            </a:r>
+          </a:p>
+          <a:p>
+            <a:pPr algn="l" marL="365760" indent="-365760">
               <a:spcAft>
-                <a:spcPts val="400"/>
+                <a:spcPts val="800"/>
               </a:spcAft>
+              <a:buClr>
+                <a:srgbClr val="1E40AF"/>
+              </a:buClr>
+              <a:buFont typeface="Arial"/>
+              <a:buChar char="•"/>
             </a:pPr>
             <a:r>
-              <a:rPr sz="2200" b="1">
-                <a:solidFill>
-                  <a:srgbClr val="1E40AF"/>
+              <a:rPr sz="2400" b="1">
+                <a:solidFill>
+                  <a:srgbClr val="1E293B"/>
                 </a:solidFill>
                 <a:latin typeface="Calibri"/>
               </a:rPr>
-              <a:t>💡 Mỗi bài thơ xoay quanh một sự vật nào?</a:t>
+              <a:t>Hình ảnh thơ</a:t>
+            </a:r>
+            <a:r>
+              <a:rPr sz="2400">
+                <a:solidFill>
+                  <a:srgbClr val="1E293B"/>
+                </a:solidFill>
+                <a:latin typeface="Calibri"/>
+              </a:rPr>
+              <a:t>: sự vật, hiện tượng tái tạo cụ thể bằng ngôn từ, khơi cảm giác.</a:t>
+            </a:r>
+          </a:p>
+          <a:p>
+            <a:pPr algn="l" marL="365760" indent="-365760">
+              <a:spcAft>
+                <a:spcPts val="800"/>
+              </a:spcAft>
+              <a:buClr>
+                <a:srgbClr val="1E40AF"/>
+              </a:buClr>
+              <a:buFont typeface="Arial"/>
+              <a:buChar char="•"/>
+            </a:pPr>
+            <a:r>
+              <a:rPr sz="2400" b="1">
+                <a:solidFill>
+                  <a:srgbClr val="1E293B"/>
+                </a:solidFill>
+                <a:latin typeface="Calibri"/>
+              </a:rPr>
+              <a:t>Vần, nhịp, nhạc điệu, đối</a:t>
+            </a:r>
+            <a:r>
+              <a:rPr sz="2400">
+                <a:solidFill>
+                  <a:srgbClr val="1E293B"/>
+                </a:solidFill>
+                <a:latin typeface="Calibri"/>
+              </a:rPr>
+              <a:t>: tạo âm hưởng, liên kết, sự cân xứng.</a:t>
+            </a:r>
+          </a:p>
+          <a:p>
+            <a:pPr algn="l" marL="365760" indent="-365760">
+              <a:spcAft>
+                <a:spcPts val="800"/>
+              </a:spcAft>
+              <a:buClr>
+                <a:srgbClr val="1E40AF"/>
+              </a:buClr>
+              <a:buFont typeface="Arial"/>
+              <a:buChar char="•"/>
+            </a:pPr>
+            <a:r>
+              <a:rPr sz="2400" b="1">
+                <a:solidFill>
+                  <a:srgbClr val="1E293B"/>
+                </a:solidFill>
+                <a:latin typeface="Calibri"/>
+              </a:rPr>
+              <a:t>Thi luật, thể thơ</a:t>
+            </a:r>
+            <a:r>
+              <a:rPr sz="2400">
+                <a:solidFill>
+                  <a:srgbClr val="1E293B"/>
+                </a:solidFill>
+                <a:latin typeface="Calibri"/>
+              </a:rPr>
+              <a:t>: quy tắc tổ chức ngôn từ; hai-cư, Đường luật, Thơ mới…</a:t>
             </a:r>
           </a:p>
         </p:txBody>
@@ -18909,14 +21076,14 @@
         </p:nvSpPr>
         <p:spPr>
           <a:xfrm>
-            <a:off x="9942271" y="457200"/>
-            <a:ext cx="1700784" cy="457200"/>
+            <a:off x="10253167" y="457200"/>
+            <a:ext cx="1389888" cy="457200"/>
           </a:xfrm>
           <a:prstGeom prst="roundRect">
             <a:avLst/>
           </a:prstGeom>
           <a:solidFill>
-            <a:srgbClr val="991B1B"/>
+            <a:srgbClr val="1E40AF"/>
           </a:solidFill>
           <a:ln>
             <a:noFill/>
@@ -18949,7 +21116,7 @@
                 </a:solidFill>
                 <a:latin typeface="Arial"/>
               </a:rPr>
-              <a:t>LỜI GIẢI</a:t>
+              <a:t>ĐỀ BÀI</a:t>
             </a:r>
           </a:p>
         </p:txBody>
@@ -18963,7 +21130,7 @@
         <p:spPr>
           <a:xfrm>
             <a:off x="731520" y="274320"/>
-            <a:ext cx="9272016" cy="868680"/>
+            <a:ext cx="9582912" cy="868680"/>
           </a:xfrm>
           <a:prstGeom prst="rect">
             <a:avLst/>
@@ -19076,7 +21243,7 @@
         <p:spPr>
           <a:xfrm>
             <a:off x="731520" y="1463040"/>
-            <a:ext cx="10789920" cy="3474720"/>
+            <a:ext cx="10789920" cy="3566160"/>
           </a:xfrm>
           <a:prstGeom prst="rect">
             <a:avLst/>
@@ -19089,87 +21256,19 @@
           </a:bodyPr>
           <a:lstStyle/>
           <a:p>
-            <a:pPr algn="l" marL="365760" indent="-365760">
+            <a:pPr algn="l">
               <a:spcAft>
                 <a:spcPts val="800"/>
               </a:spcAft>
-              <a:buClr>
-                <a:srgbClr val="1E40AF"/>
-              </a:buClr>
-              <a:buFont typeface="Arial"/>
-              <a:buChar char="•"/>
             </a:pPr>
             <a:r>
-              <a:rPr sz="2300">
+              <a:rPr sz="2600" b="1">
                 <a:solidFill>
                   <a:srgbClr val="1E293B"/>
                 </a:solidFill>
                 <a:latin typeface="Calibri"/>
               </a:rPr>
-              <a:t>Ba-sô: cánh quạ trên cành khô.</a:t>
-            </a:r>
-          </a:p>
-          <a:p>
-            <a:pPr algn="l" marL="365760" indent="-365760">
-              <a:spcAft>
-                <a:spcPts val="800"/>
-              </a:spcAft>
-              <a:buClr>
-                <a:srgbClr val="1E40AF"/>
-              </a:buClr>
-              <a:buFont typeface="Arial"/>
-              <a:buChar char="•"/>
-            </a:pPr>
-            <a:r>
-              <a:rPr sz="2300">
-                <a:solidFill>
-                  <a:srgbClr val="1E293B"/>
-                </a:solidFill>
-                <a:latin typeface="Calibri"/>
-              </a:rPr>
-              <a:t>Chi-y-ô: hoa triêu nhan quấn dây gàu.</a:t>
-            </a:r>
-          </a:p>
-          <a:p>
-            <a:pPr algn="l" marL="365760" indent="-365760">
-              <a:spcAft>
-                <a:spcPts val="800"/>
-              </a:spcAft>
-              <a:buClr>
-                <a:srgbClr val="1E40AF"/>
-              </a:buClr>
-              <a:buFont typeface="Arial"/>
-              <a:buChar char="•"/>
-            </a:pPr>
-            <a:r>
-              <a:rPr sz="2300">
-                <a:solidFill>
-                  <a:srgbClr val="1E293B"/>
-                </a:solidFill>
-                <a:latin typeface="Calibri"/>
-              </a:rPr>
-              <a:t>Ít-sa: con ốc nhỏ trèo núi Phú Sĩ.</a:t>
-            </a:r>
-          </a:p>
-          <a:p>
-            <a:pPr algn="l" marL="365760" indent="-365760">
-              <a:spcAft>
-                <a:spcPts val="800"/>
-              </a:spcAft>
-              <a:buClr>
-                <a:srgbClr val="1E40AF"/>
-              </a:buClr>
-              <a:buFont typeface="Arial"/>
-              <a:buChar char="•"/>
-            </a:pPr>
-            <a:r>
-              <a:rPr sz="2300">
-                <a:solidFill>
-                  <a:srgbClr val="1E293B"/>
-                </a:solidFill>
-                <a:latin typeface="Calibri"/>
-              </a:rPr>
-              <a:t>Điểm chung: sự vật bình dị, nhỏ bé của thiên nhiên, mang tính tượng trưng.</a:t>
+              <a:t>Nhận diện hình ảnh trung tâm ở từng bài thơ hai-cư và cho biết đặc điểm chung của các hình ảnh ấy.</a:t>
             </a:r>
           </a:p>
         </p:txBody>
@@ -19182,8 +21281,8 @@
         </p:nvSpPr>
         <p:spPr>
           <a:xfrm>
-            <a:off x="731520" y="5074920"/>
-            <a:ext cx="10789920" cy="731520"/>
+            <a:off x="731520" y="5120640"/>
+            <a:ext cx="10789920" cy="693420"/>
           </a:xfrm>
           <a:prstGeom prst="roundRect">
             <a:avLst>
@@ -19191,11 +21290,11 @@
             </a:avLst>
           </a:prstGeom>
           <a:solidFill>
-            <a:srgbClr val="FEF2F2"/>
+            <a:srgbClr val="EFF4FF"/>
           </a:solidFill>
           <a:ln w="19050">
             <a:solidFill>
-              <a:srgbClr val="991B1B"/>
+              <a:srgbClr val="1E40AF"/>
             </a:solidFill>
           </a:ln>
           <a:effectLst/>
@@ -19230,8 +21329,8 @@
         </p:nvSpPr>
         <p:spPr>
           <a:xfrm>
-            <a:off x="914400" y="5074920"/>
-            <a:ext cx="10424160" cy="731520"/>
+            <a:off x="914400" y="5120640"/>
+            <a:ext cx="10424160" cy="693420"/>
           </a:xfrm>
           <a:prstGeom prst="rect">
             <a:avLst/>
@@ -19250,13 +21349,13 @@
               </a:spcAft>
             </a:pPr>
             <a:r>
-              <a:rPr sz="2400" b="1">
-                <a:solidFill>
-                  <a:srgbClr val="991B1B"/>
+              <a:rPr sz="2200" b="1">
+                <a:solidFill>
+                  <a:srgbClr val="1E40AF"/>
                 </a:solidFill>
                 <a:latin typeface="Calibri"/>
               </a:rPr>
-              <a:t>Thơ hai-cư: hình ảnh bình dị, khơi gợi nhiều hơn diễn giải.</a:t>
+              <a:t>💡 Mỗi bài thơ xoay quanh một sự vật nào?</a:t>
             </a:r>
           </a:p>
         </p:txBody>
@@ -19339,14 +21438,14 @@
         </p:nvSpPr>
         <p:spPr>
           <a:xfrm>
-            <a:off x="10253167" y="457200"/>
-            <a:ext cx="1389888" cy="457200"/>
+            <a:off x="9942271" y="457200"/>
+            <a:ext cx="1700784" cy="457200"/>
           </a:xfrm>
           <a:prstGeom prst="roundRect">
             <a:avLst/>
           </a:prstGeom>
           <a:solidFill>
-            <a:srgbClr val="1E40AF"/>
+            <a:srgbClr val="991B1B"/>
           </a:solidFill>
           <a:ln>
             <a:noFill/>
@@ -19379,7 +21478,7 @@
                 </a:solidFill>
                 <a:latin typeface="Arial"/>
               </a:rPr>
-              <a:t>ĐỀ BÀI</a:t>
+              <a:t>LỜI GIẢI</a:t>
             </a:r>
           </a:p>
         </p:txBody>
@@ -19393,7 +21492,7 @@
         <p:spPr>
           <a:xfrm>
             <a:off x="731520" y="274320"/>
-            <a:ext cx="9582912" cy="868680"/>
+            <a:ext cx="9272016" cy="868680"/>
           </a:xfrm>
           <a:prstGeom prst="rect">
             <a:avLst/>
@@ -19413,7 +21512,7 @@
                 </a:solidFill>
                 <a:latin typeface="Arial"/>
               </a:rPr>
-              <a:t>PHÁT HIỆN VÀ TRIẾT LÍ</a:t>
+              <a:t>HÌNH ẢNH TRUNG TÂM CỦA THƠ HAI-CƯ</a:t>
             </a:r>
           </a:p>
         </p:txBody>
@@ -19506,7 +21605,7 @@
         <p:spPr>
           <a:xfrm>
             <a:off x="731520" y="1463040"/>
-            <a:ext cx="10789920" cy="3566160"/>
+            <a:ext cx="10789920" cy="3474720"/>
           </a:xfrm>
           <a:prstGeom prst="rect">
             <a:avLst/>
@@ -19519,19 +21618,87 @@
           </a:bodyPr>
           <a:lstStyle/>
           <a:p>
-            <a:pPr algn="l">
+            <a:pPr algn="l" marL="365760" indent="-365760">
               <a:spcAft>
                 <a:spcPts val="800"/>
               </a:spcAft>
+              <a:buClr>
+                <a:srgbClr val="1E40AF"/>
+              </a:buClr>
+              <a:buFont typeface="Arial"/>
+              <a:buChar char="•"/>
             </a:pPr>
             <a:r>
-              <a:rPr sz="2600" b="1">
+              <a:rPr sz="2300">
                 <a:solidFill>
                   <a:srgbClr val="1E293B"/>
                 </a:solidFill>
                 <a:latin typeface="Calibri"/>
               </a:rPr>
-              <a:t>Bài thơ của Chi-y-ô xoay quanh phát hiện nào? Vì sao phát hiện ấy dẫn nhân vật trữ tình sang “xin nước nhà bên”? Ý nghĩa triết lí?</a:t>
+              <a:t>Ba-sô: cánh quạ trên cành khô.</a:t>
+            </a:r>
+          </a:p>
+          <a:p>
+            <a:pPr algn="l" marL="365760" indent="-365760">
+              <a:spcAft>
+                <a:spcPts val="800"/>
+              </a:spcAft>
+              <a:buClr>
+                <a:srgbClr val="1E40AF"/>
+              </a:buClr>
+              <a:buFont typeface="Arial"/>
+              <a:buChar char="•"/>
+            </a:pPr>
+            <a:r>
+              <a:rPr sz="2300">
+                <a:solidFill>
+                  <a:srgbClr val="1E293B"/>
+                </a:solidFill>
+                <a:latin typeface="Calibri"/>
+              </a:rPr>
+              <a:t>Chi-y-ô: hoa triêu nhan quấn dây gàu.</a:t>
+            </a:r>
+          </a:p>
+          <a:p>
+            <a:pPr algn="l" marL="365760" indent="-365760">
+              <a:spcAft>
+                <a:spcPts val="800"/>
+              </a:spcAft>
+              <a:buClr>
+                <a:srgbClr val="1E40AF"/>
+              </a:buClr>
+              <a:buFont typeface="Arial"/>
+              <a:buChar char="•"/>
+            </a:pPr>
+            <a:r>
+              <a:rPr sz="2300">
+                <a:solidFill>
+                  <a:srgbClr val="1E293B"/>
+                </a:solidFill>
+                <a:latin typeface="Calibri"/>
+              </a:rPr>
+              <a:t>Ít-sa: con ốc nhỏ trèo núi Phú Sĩ.</a:t>
+            </a:r>
+          </a:p>
+          <a:p>
+            <a:pPr algn="l" marL="365760" indent="-365760">
+              <a:spcAft>
+                <a:spcPts val="800"/>
+              </a:spcAft>
+              <a:buClr>
+                <a:srgbClr val="1E40AF"/>
+              </a:buClr>
+              <a:buFont typeface="Arial"/>
+              <a:buChar char="•"/>
+            </a:pPr>
+            <a:r>
+              <a:rPr sz="2300">
+                <a:solidFill>
+                  <a:srgbClr val="1E293B"/>
+                </a:solidFill>
+                <a:latin typeface="Calibri"/>
+              </a:rPr>
+              <a:t>Điểm chung: sự vật bình dị, nhỏ bé của thiên nhiên, mang tính tượng trưng.</a:t>
             </a:r>
           </a:p>
         </p:txBody>
@@ -19544,8 +21711,8 @@
         </p:nvSpPr>
         <p:spPr>
           <a:xfrm>
-            <a:off x="731520" y="5120640"/>
-            <a:ext cx="10789920" cy="693420"/>
+            <a:off x="731520" y="5074920"/>
+            <a:ext cx="10789920" cy="731520"/>
           </a:xfrm>
           <a:prstGeom prst="roundRect">
             <a:avLst>
@@ -19553,11 +21720,11 @@
             </a:avLst>
           </a:prstGeom>
           <a:solidFill>
-            <a:srgbClr val="EFF4FF"/>
+            <a:srgbClr val="FEF2F2"/>
           </a:solidFill>
           <a:ln w="19050">
             <a:solidFill>
-              <a:srgbClr val="1E40AF"/>
+              <a:srgbClr val="991B1B"/>
             </a:solidFill>
           </a:ln>
           <a:effectLst/>
@@ -19592,8 +21759,8 @@
         </p:nvSpPr>
         <p:spPr>
           <a:xfrm>
-            <a:off x="914400" y="5120640"/>
-            <a:ext cx="10424160" cy="693420"/>
+            <a:off x="914400" y="5074920"/>
+            <a:ext cx="10424160" cy="731520"/>
           </a:xfrm>
           <a:prstGeom prst="rect">
             <a:avLst/>
@@ -19612,13 +21779,13 @@
               </a:spcAft>
             </a:pPr>
             <a:r>
-              <a:rPr sz="2200" b="1">
-                <a:solidFill>
-                  <a:srgbClr val="1E40AF"/>
+              <a:rPr sz="2400" b="1">
+                <a:solidFill>
+                  <a:srgbClr val="991B1B"/>
                 </a:solidFill>
                 <a:latin typeface="Calibri"/>
               </a:rPr>
-              <a:t>💡 Nhân vật trữ tình có nỡ làm đứt dây hoa?</a:t>
+              <a:t>Thơ hai-cư: hình ảnh bình dị, khơi gợi nhiều hơn diễn giải.</a:t>
             </a:r>
           </a:p>
         </p:txBody>
@@ -19701,14 +21868,14 @@
         </p:nvSpPr>
         <p:spPr>
           <a:xfrm>
-            <a:off x="9942271" y="457200"/>
-            <a:ext cx="1700784" cy="457200"/>
+            <a:off x="10253167" y="457200"/>
+            <a:ext cx="1389888" cy="457200"/>
           </a:xfrm>
           <a:prstGeom prst="roundRect">
             <a:avLst/>
           </a:prstGeom>
           <a:solidFill>
-            <a:srgbClr val="991B1B"/>
+            <a:srgbClr val="1E40AF"/>
           </a:solidFill>
           <a:ln>
             <a:noFill/>
@@ -19741,7 +21908,7 @@
                 </a:solidFill>
                 <a:latin typeface="Arial"/>
               </a:rPr>
-              <a:t>LỜI GIẢI</a:t>
+              <a:t>ĐỀ BÀI</a:t>
             </a:r>
           </a:p>
         </p:txBody>
@@ -19755,7 +21922,7 @@
         <p:spPr>
           <a:xfrm>
             <a:off x="731520" y="274320"/>
-            <a:ext cx="9272016" cy="868680"/>
+            <a:ext cx="9582912" cy="868680"/>
           </a:xfrm>
           <a:prstGeom prst="rect">
             <a:avLst/>
@@ -19868,7 +22035,7 @@
         <p:spPr>
           <a:xfrm>
             <a:off x="731520" y="1463040"/>
-            <a:ext cx="10789920" cy="3474720"/>
+            <a:ext cx="10789920" cy="3566160"/>
           </a:xfrm>
           <a:prstGeom prst="rect">
             <a:avLst/>
@@ -19881,66 +22048,19 @@
           </a:bodyPr>
           <a:lstStyle/>
           <a:p>
-            <a:pPr algn="l" marL="365760" indent="-365760">
+            <a:pPr algn="l">
               <a:spcAft>
                 <a:spcPts val="800"/>
               </a:spcAft>
-              <a:buClr>
-                <a:srgbClr val="1E40AF"/>
-              </a:buClr>
-              <a:buFont typeface="Arial"/>
-              <a:buChar char="•"/>
             </a:pPr>
             <a:r>
-              <a:rPr sz="2300">
+              <a:rPr sz="2600" b="1">
                 <a:solidFill>
                   <a:srgbClr val="1E293B"/>
                 </a:solidFill>
                 <a:latin typeface="Calibri"/>
               </a:rPr>
-              <a:t>Phát hiện: dây gàu bị hoa triêu nhan quấn vướng.</a:t>
-            </a:r>
-          </a:p>
-          <a:p>
-            <a:pPr algn="l" marL="365760" indent="-365760">
-              <a:spcAft>
-                <a:spcPts val="800"/>
-              </a:spcAft>
-              <a:buClr>
-                <a:srgbClr val="1E40AF"/>
-              </a:buClr>
-              <a:buFont typeface="Arial"/>
-              <a:buChar char="•"/>
-            </a:pPr>
-            <a:r>
-              <a:rPr sz="2300">
-                <a:solidFill>
-                  <a:srgbClr val="1E293B"/>
-                </a:solidFill>
-                <a:latin typeface="Calibri"/>
-              </a:rPr>
-              <a:t>Không nỡ làm tổn thương bông hoa → đành xin nước nhà bên.</a:t>
-            </a:r>
-          </a:p>
-          <a:p>
-            <a:pPr algn="l" marL="365760" indent="-365760">
-              <a:spcAft>
-                <a:spcPts val="800"/>
-              </a:spcAft>
-              <a:buClr>
-                <a:srgbClr val="1E40AF"/>
-              </a:buClr>
-              <a:buFont typeface="Arial"/>
-              <a:buChar char="•"/>
-            </a:pPr>
-            <a:r>
-              <a:rPr sz="2300">
-                <a:solidFill>
-                  <a:srgbClr val="1E293B"/>
-                </a:solidFill>
-                <a:latin typeface="Calibri"/>
-              </a:rPr>
-              <a:t>Triết lí: trân trọng, nâng niu sự sống; ứng xử hài hoà với thiên nhiên.</a:t>
+              <a:t>Bài thơ của Chi-y-ô xoay quanh phát hiện nào? Vì sao phát hiện ấy dẫn nhân vật trữ tình sang “xin nước nhà bên”? Ý nghĩa triết lí?</a:t>
             </a:r>
           </a:p>
         </p:txBody>
@@ -19953,8 +22073,8 @@
         </p:nvSpPr>
         <p:spPr>
           <a:xfrm>
-            <a:off x="731520" y="5074920"/>
-            <a:ext cx="10789920" cy="731520"/>
+            <a:off x="731520" y="5120640"/>
+            <a:ext cx="10789920" cy="693420"/>
           </a:xfrm>
           <a:prstGeom prst="roundRect">
             <a:avLst>
@@ -19962,11 +22082,11 @@
             </a:avLst>
           </a:prstGeom>
           <a:solidFill>
-            <a:srgbClr val="FEF2F2"/>
+            <a:srgbClr val="EFF4FF"/>
           </a:solidFill>
           <a:ln w="19050">
             <a:solidFill>
-              <a:srgbClr val="991B1B"/>
+              <a:srgbClr val="1E40AF"/>
             </a:solidFill>
           </a:ln>
           <a:effectLst/>
@@ -20001,8 +22121,8 @@
         </p:nvSpPr>
         <p:spPr>
           <a:xfrm>
-            <a:off x="914400" y="5074920"/>
-            <a:ext cx="10424160" cy="731520"/>
+            <a:off x="914400" y="5120640"/>
+            <a:ext cx="10424160" cy="693420"/>
           </a:xfrm>
           <a:prstGeom prst="rect">
             <a:avLst/>
@@ -20021,13 +22141,13 @@
               </a:spcAft>
             </a:pPr>
             <a:r>
-              <a:rPr sz="2400" b="1">
-                <a:solidFill>
-                  <a:srgbClr val="991B1B"/>
+              <a:rPr sz="2200" b="1">
+                <a:solidFill>
+                  <a:srgbClr val="1E40AF"/>
                 </a:solidFill>
                 <a:latin typeface="Calibri"/>
               </a:rPr>
-              <a:t>Tình yêu thiên nhiên tinh tế, nhân hậu.</a:t>
+              <a:t>💡 Nhân vật trữ tình có nỡ làm đứt dây hoa?</a:t>
             </a:r>
           </a:p>
         </p:txBody>

--- a/mon/ngu_van/slide/lop10/Slide_NGUVAN10_Bai2_VeDepCuaThoCa_T12-22.pptx
+++ b/mon/ngu_van/slide/lop10/Slide_NGUVAN10_Bai2_VeDepCuaThoCa_T12-22.pptx
@@ -48,11 +48,6 @@
     <p:sldId id="296" r:id="rId48"/>
     <p:sldId id="297" r:id="rId49"/>
     <p:sldId id="298" r:id="rId50"/>
-    <p:sldId id="299" r:id="rId51"/>
-    <p:sldId id="300" r:id="rId52"/>
-    <p:sldId id="301" r:id="rId53"/>
-    <p:sldId id="302" r:id="rId54"/>
-    <p:sldId id="303" r:id="rId55"/>
   </p:sldIdLst>
   <p:sldSz cx="12191695" cy="6858000" type="screen4x3"/>
   <p:notesSz cx="6858000" cy="9144000"/>
@@ -619,7 +614,7 @@
           <a:lstStyle/>
           <a:p>
             <a:r>
-              <a:t>Câu hỏi Trước khi đọc SGK tr.47.</a:t>
+              <a:t>Slide ĐỀ BÀI – cho HS suy nghĩ, thảo luận (không chiếu lời giải). </a:t>
             </a:r>
           </a:p>
         </p:txBody>
@@ -689,7 +684,7 @@
           <a:lstStyle/>
           <a:p>
             <a:r>
-              <a:t>Bấm vào đường link hoặc quét mã QR để mở video (cần Internet). </a:t>
+              <a:t>Slide LỜI GIẢI – GV chốt sau khi HS trình bày. </a:t>
             </a:r>
           </a:p>
         </p:txBody>
@@ -1179,7 +1174,7 @@
           <a:lstStyle/>
           <a:p>
             <a:r>
-              <a:t>Slide ĐỀ BÀI – cho HS suy nghĩ, thảo luận (không chiếu lời giải). </a:t>
+              <a:t>Câu hỏi Trước khi đọc SGK tr.50.</a:t>
             </a:r>
           </a:p>
         </p:txBody>
@@ -1249,7 +1244,7 @@
           <a:lstStyle/>
           <a:p>
             <a:r>
-              <a:t>Slide LỜI GIẢI – GV chốt sau khi HS trình bày. </a:t>
+              <a:t>Slide ĐỀ BÀI – cho HS suy nghĩ, thảo luận (không chiếu lời giải). </a:t>
             </a:r>
           </a:p>
         </p:txBody>
@@ -1389,7 +1384,7 @@
           <a:lstStyle/>
           <a:p>
             <a:r>
-              <a:t>Câu hỏi Trước khi đọc SGK tr.50.</a:t>
+              <a:t>Slide LỜI GIẢI – GV chốt sau khi HS trình bày. </a:t>
             </a:r>
           </a:p>
         </p:txBody>
@@ -1459,7 +1454,7 @@
           <a:lstStyle/>
           <a:p>
             <a:r>
-              <a:t>Bấm vào đường link hoặc quét mã QR để mở video (cần Internet). </a:t>
+              <a:t>Slide ĐỀ BÀI – cho HS suy nghĩ, thảo luận (không chiếu lời giải). </a:t>
             </a:r>
           </a:p>
         </p:txBody>
@@ -1529,7 +1524,7 @@
           <a:lstStyle/>
           <a:p>
             <a:r>
-              <a:t>Slide ĐỀ BÀI – cho HS suy nghĩ, thảo luận (không chiếu lời giải). </a:t>
+              <a:t>Slide LỜI GIẢI – GV chốt sau khi HS trình bày. </a:t>
             </a:r>
           </a:p>
         </p:txBody>
@@ -1599,7 +1594,7 @@
           <a:lstStyle/>
           <a:p>
             <a:r>
-              <a:t>Slide LỜI GIẢI – GV chốt sau khi HS trình bày. </a:t>
+              <a:t>Slide ĐỀ BÀI – cho HS suy nghĩ, thảo luận (không chiếu lời giải). </a:t>
             </a:r>
           </a:p>
         </p:txBody>
@@ -1669,7 +1664,7 @@
           <a:lstStyle/>
           <a:p>
             <a:r>
-              <a:t>Slide ĐỀ BÀI – cho HS suy nghĩ, thảo luận (không chiếu lời giải). </a:t>
+              <a:t>Slide LỜI GIẢI – GV chốt sau khi HS trình bày. </a:t>
             </a:r>
           </a:p>
         </p:txBody>
@@ -1739,7 +1734,7 @@
           <a:lstStyle/>
           <a:p>
             <a:r>
-              <a:t>Slide LỜI GIẢI – GV chốt sau khi HS trình bày. </a:t>
+              <a:t>Slide ĐỀ BÀI – cho HS suy nghĩ, thảo luận (không chiếu lời giải). </a:t>
             </a:r>
           </a:p>
         </p:txBody>
@@ -1809,7 +1804,7 @@
           <a:lstStyle/>
           <a:p>
             <a:r>
-              <a:t>Bấm vào đường link hoặc quét mã QR để mở video (cần Internet). </a:t>
+              <a:t>Slide LỜI GIẢI – GV chốt sau khi HS trình bày. </a:t>
             </a:r>
           </a:p>
         </p:txBody>
@@ -2019,7 +2014,7 @@
           <a:lstStyle/>
           <a:p>
             <a:r>
-              <a:t>Bấm vào đường link hoặc quét mã QR để mở video (cần Internet). </a:t>
+              <a:t>Slide ĐỀ BÀI – cho HS suy nghĩ, thảo luận (không chiếu lời giải). </a:t>
             </a:r>
           </a:p>
         </p:txBody>
@@ -2089,7 +2084,7 @@
           <a:lstStyle/>
           <a:p>
             <a:r>
-              <a:t>Bấm vào đường link hoặc quét mã QR để mở video (cần Internet). </a:t>
+              <a:t>Slide ĐỀ BÀI – cho HS suy nghĩ, thảo luận (không chiếu lời giải). </a:t>
             </a:r>
           </a:p>
         </p:txBody>
@@ -2159,7 +2154,7 @@
           <a:lstStyle/>
           <a:p>
             <a:r>
-              <a:t>Slide ĐỀ BÀI – cho HS suy nghĩ, thảo luận (không chiếu lời giải). </a:t>
+              <a:t>Slide LỜI GIẢI – GV chốt sau khi HS trình bày. </a:t>
             </a:r>
           </a:p>
         </p:txBody>
@@ -2229,7 +2224,7 @@
           <a:lstStyle/>
           <a:p>
             <a:r>
-              <a:t>Slide LỜI GIẢI – GV chốt sau khi HS trình bày. </a:t>
+              <a:t>Slide ĐỀ BÀI – cho HS suy nghĩ, thảo luận (không chiếu lời giải). </a:t>
             </a:r>
           </a:p>
         </p:txBody>
@@ -2299,356 +2294,6 @@
           <a:lstStyle/>
           <a:p>
             <a:r>
-              <a:t>Slide ĐỀ BÀI – cho HS suy nghĩ, thảo luận (không chiếu lời giải). </a:t>
-            </a:r>
-          </a:p>
-        </p:txBody>
-      </p:sp>
-      <p:sp>
-        <p:nvSpPr>
-          <p:cNvPr id="4" name="Slide Number Placeholder 3"/>
-          <p:cNvSpPr>
-            <a:spLocks noGrp="1"/>
-          </p:cNvSpPr>
-          <p:nvPr>
-            <p:ph type="sldNum" idx="5" sz="quarter"/>
-          </p:nvPr>
-        </p:nvSpPr>
-        <p:spPr/>
-      </p:sp>
-    </p:spTree>
-  </p:cSld>
-  <p:clrMapOvr>
-    <a:masterClrMapping/>
-  </p:clrMapOvr>
-</p:notes>
-</file>
-
-<file path=ppt/notesSlides/notesSlide33.xml><?xml version="1.0" encoding="utf-8"?>
-<p:notes xmlns:a="http://schemas.openxmlformats.org/drawingml/2006/main" xmlns:p="http://schemas.openxmlformats.org/presentationml/2006/main" xmlns:r="http://schemas.openxmlformats.org/officeDocument/2006/relationships">
-  <p:cSld>
-    <p:spTree>
-      <p:nvGrpSpPr>
-        <p:cNvPr id="1" name=""/>
-        <p:cNvGrpSpPr/>
-        <p:nvPr/>
-      </p:nvGrpSpPr>
-      <p:grpSpPr>
-        <a:xfrm>
-          <a:off x="0" y="0"/>
-          <a:ext cx="0" cy="0"/>
-          <a:chOff x="0" y="0"/>
-          <a:chExt cx="0" cy="0"/>
-        </a:xfrm>
-      </p:grpSpPr>
-      <p:sp>
-        <p:nvSpPr>
-          <p:cNvPr id="2" name="Slide Image Placeholder 1"/>
-          <p:cNvSpPr>
-            <a:spLocks noGrp="1"/>
-          </p:cNvSpPr>
-          <p:nvPr>
-            <p:ph type="sldImg" idx="2"/>
-          </p:nvPr>
-        </p:nvSpPr>
-        <p:spPr/>
-      </p:sp>
-      <p:sp>
-        <p:nvSpPr>
-          <p:cNvPr id="3" name="Notes Placeholder 2"/>
-          <p:cNvSpPr>
-            <a:spLocks noGrp="1"/>
-          </p:cNvSpPr>
-          <p:nvPr>
-            <p:ph type="body" idx="3" sz="quarter"/>
-          </p:nvPr>
-        </p:nvSpPr>
-        <p:spPr/>
-        <p:txBody>
-          <a:bodyPr/>
-          <a:lstStyle/>
-          <a:p>
-            <a:r>
-              <a:t>Slide LỜI GIẢI – GV chốt sau khi HS trình bày. </a:t>
-            </a:r>
-          </a:p>
-        </p:txBody>
-      </p:sp>
-      <p:sp>
-        <p:nvSpPr>
-          <p:cNvPr id="4" name="Slide Number Placeholder 3"/>
-          <p:cNvSpPr>
-            <a:spLocks noGrp="1"/>
-          </p:cNvSpPr>
-          <p:nvPr>
-            <p:ph type="sldNum" idx="5" sz="quarter"/>
-          </p:nvPr>
-        </p:nvSpPr>
-        <p:spPr/>
-      </p:sp>
-    </p:spTree>
-  </p:cSld>
-  <p:clrMapOvr>
-    <a:masterClrMapping/>
-  </p:clrMapOvr>
-</p:notes>
-</file>
-
-<file path=ppt/notesSlides/notesSlide34.xml><?xml version="1.0" encoding="utf-8"?>
-<p:notes xmlns:a="http://schemas.openxmlformats.org/drawingml/2006/main" xmlns:p="http://schemas.openxmlformats.org/presentationml/2006/main" xmlns:r="http://schemas.openxmlformats.org/officeDocument/2006/relationships">
-  <p:cSld>
-    <p:spTree>
-      <p:nvGrpSpPr>
-        <p:cNvPr id="1" name=""/>
-        <p:cNvGrpSpPr/>
-        <p:nvPr/>
-      </p:nvGrpSpPr>
-      <p:grpSpPr>
-        <a:xfrm>
-          <a:off x="0" y="0"/>
-          <a:ext cx="0" cy="0"/>
-          <a:chOff x="0" y="0"/>
-          <a:chExt cx="0" cy="0"/>
-        </a:xfrm>
-      </p:grpSpPr>
-      <p:sp>
-        <p:nvSpPr>
-          <p:cNvPr id="2" name="Slide Image Placeholder 1"/>
-          <p:cNvSpPr>
-            <a:spLocks noGrp="1"/>
-          </p:cNvSpPr>
-          <p:nvPr>
-            <p:ph type="sldImg" idx="2"/>
-          </p:nvPr>
-        </p:nvSpPr>
-        <p:spPr/>
-      </p:sp>
-      <p:sp>
-        <p:nvSpPr>
-          <p:cNvPr id="3" name="Notes Placeholder 2"/>
-          <p:cNvSpPr>
-            <a:spLocks noGrp="1"/>
-          </p:cNvSpPr>
-          <p:nvPr>
-            <p:ph type="body" idx="3" sz="quarter"/>
-          </p:nvPr>
-        </p:nvSpPr>
-        <p:spPr/>
-        <p:txBody>
-          <a:bodyPr/>
-          <a:lstStyle/>
-          <a:p>
-            <a:r>
-              <a:t>Slide ĐỀ BÀI – cho HS suy nghĩ, thảo luận (không chiếu lời giải). </a:t>
-            </a:r>
-          </a:p>
-        </p:txBody>
-      </p:sp>
-      <p:sp>
-        <p:nvSpPr>
-          <p:cNvPr id="4" name="Slide Number Placeholder 3"/>
-          <p:cNvSpPr>
-            <a:spLocks noGrp="1"/>
-          </p:cNvSpPr>
-          <p:nvPr>
-            <p:ph type="sldNum" idx="5" sz="quarter"/>
-          </p:nvPr>
-        </p:nvSpPr>
-        <p:spPr/>
-      </p:sp>
-    </p:spTree>
-  </p:cSld>
-  <p:clrMapOvr>
-    <a:masterClrMapping/>
-  </p:clrMapOvr>
-</p:notes>
-</file>
-
-<file path=ppt/notesSlides/notesSlide35.xml><?xml version="1.0" encoding="utf-8"?>
-<p:notes xmlns:a="http://schemas.openxmlformats.org/drawingml/2006/main" xmlns:p="http://schemas.openxmlformats.org/presentationml/2006/main" xmlns:r="http://schemas.openxmlformats.org/officeDocument/2006/relationships">
-  <p:cSld>
-    <p:spTree>
-      <p:nvGrpSpPr>
-        <p:cNvPr id="1" name=""/>
-        <p:cNvGrpSpPr/>
-        <p:nvPr/>
-      </p:nvGrpSpPr>
-      <p:grpSpPr>
-        <a:xfrm>
-          <a:off x="0" y="0"/>
-          <a:ext cx="0" cy="0"/>
-          <a:chOff x="0" y="0"/>
-          <a:chExt cx="0" cy="0"/>
-        </a:xfrm>
-      </p:grpSpPr>
-      <p:sp>
-        <p:nvSpPr>
-          <p:cNvPr id="2" name="Slide Image Placeholder 1"/>
-          <p:cNvSpPr>
-            <a:spLocks noGrp="1"/>
-          </p:cNvSpPr>
-          <p:nvPr>
-            <p:ph type="sldImg" idx="2"/>
-          </p:nvPr>
-        </p:nvSpPr>
-        <p:spPr/>
-      </p:sp>
-      <p:sp>
-        <p:nvSpPr>
-          <p:cNvPr id="3" name="Notes Placeholder 2"/>
-          <p:cNvSpPr>
-            <a:spLocks noGrp="1"/>
-          </p:cNvSpPr>
-          <p:nvPr>
-            <p:ph type="body" idx="3" sz="quarter"/>
-          </p:nvPr>
-        </p:nvSpPr>
-        <p:spPr/>
-        <p:txBody>
-          <a:bodyPr/>
-          <a:lstStyle/>
-          <a:p>
-            <a:r>
-              <a:t>Slide LỜI GIẢI – GV chốt sau khi HS trình bày. </a:t>
-            </a:r>
-          </a:p>
-        </p:txBody>
-      </p:sp>
-      <p:sp>
-        <p:nvSpPr>
-          <p:cNvPr id="4" name="Slide Number Placeholder 3"/>
-          <p:cNvSpPr>
-            <a:spLocks noGrp="1"/>
-          </p:cNvSpPr>
-          <p:nvPr>
-            <p:ph type="sldNum" idx="5" sz="quarter"/>
-          </p:nvPr>
-        </p:nvSpPr>
-        <p:spPr/>
-      </p:sp>
-    </p:spTree>
-  </p:cSld>
-  <p:clrMapOvr>
-    <a:masterClrMapping/>
-  </p:clrMapOvr>
-</p:notes>
-</file>
-
-<file path=ppt/notesSlides/notesSlide36.xml><?xml version="1.0" encoding="utf-8"?>
-<p:notes xmlns:a="http://schemas.openxmlformats.org/drawingml/2006/main" xmlns:p="http://schemas.openxmlformats.org/presentationml/2006/main" xmlns:r="http://schemas.openxmlformats.org/officeDocument/2006/relationships">
-  <p:cSld>
-    <p:spTree>
-      <p:nvGrpSpPr>
-        <p:cNvPr id="1" name=""/>
-        <p:cNvGrpSpPr/>
-        <p:nvPr/>
-      </p:nvGrpSpPr>
-      <p:grpSpPr>
-        <a:xfrm>
-          <a:off x="0" y="0"/>
-          <a:ext cx="0" cy="0"/>
-          <a:chOff x="0" y="0"/>
-          <a:chExt cx="0" cy="0"/>
-        </a:xfrm>
-      </p:grpSpPr>
-      <p:sp>
-        <p:nvSpPr>
-          <p:cNvPr id="2" name="Slide Image Placeholder 1"/>
-          <p:cNvSpPr>
-            <a:spLocks noGrp="1"/>
-          </p:cNvSpPr>
-          <p:nvPr>
-            <p:ph type="sldImg" idx="2"/>
-          </p:nvPr>
-        </p:nvSpPr>
-        <p:spPr/>
-      </p:sp>
-      <p:sp>
-        <p:nvSpPr>
-          <p:cNvPr id="3" name="Notes Placeholder 2"/>
-          <p:cNvSpPr>
-            <a:spLocks noGrp="1"/>
-          </p:cNvSpPr>
-          <p:nvPr>
-            <p:ph type="body" idx="3" sz="quarter"/>
-          </p:nvPr>
-        </p:nvSpPr>
-        <p:spPr/>
-        <p:txBody>
-          <a:bodyPr/>
-          <a:lstStyle/>
-          <a:p>
-            <a:r>
-              <a:t>Slide ĐỀ BÀI – cho HS suy nghĩ, thảo luận (không chiếu lời giải). </a:t>
-            </a:r>
-          </a:p>
-        </p:txBody>
-      </p:sp>
-      <p:sp>
-        <p:nvSpPr>
-          <p:cNvPr id="4" name="Slide Number Placeholder 3"/>
-          <p:cNvSpPr>
-            <a:spLocks noGrp="1"/>
-          </p:cNvSpPr>
-          <p:nvPr>
-            <p:ph type="sldNum" idx="5" sz="quarter"/>
-          </p:nvPr>
-        </p:nvSpPr>
-        <p:spPr/>
-      </p:sp>
-    </p:spTree>
-  </p:cSld>
-  <p:clrMapOvr>
-    <a:masterClrMapping/>
-  </p:clrMapOvr>
-</p:notes>
-</file>
-
-<file path=ppt/notesSlides/notesSlide37.xml><?xml version="1.0" encoding="utf-8"?>
-<p:notes xmlns:a="http://schemas.openxmlformats.org/drawingml/2006/main" xmlns:p="http://schemas.openxmlformats.org/presentationml/2006/main" xmlns:r="http://schemas.openxmlformats.org/officeDocument/2006/relationships">
-  <p:cSld>
-    <p:spTree>
-      <p:nvGrpSpPr>
-        <p:cNvPr id="1" name=""/>
-        <p:cNvGrpSpPr/>
-        <p:nvPr/>
-      </p:nvGrpSpPr>
-      <p:grpSpPr>
-        <a:xfrm>
-          <a:off x="0" y="0"/>
-          <a:ext cx="0" cy="0"/>
-          <a:chOff x="0" y="0"/>
-          <a:chExt cx="0" cy="0"/>
-        </a:xfrm>
-      </p:grpSpPr>
-      <p:sp>
-        <p:nvSpPr>
-          <p:cNvPr id="2" name="Slide Image Placeholder 1"/>
-          <p:cNvSpPr>
-            <a:spLocks noGrp="1"/>
-          </p:cNvSpPr>
-          <p:nvPr>
-            <p:ph type="sldImg" idx="2"/>
-          </p:nvPr>
-        </p:nvSpPr>
-        <p:spPr/>
-      </p:sp>
-      <p:sp>
-        <p:nvSpPr>
-          <p:cNvPr id="3" name="Notes Placeholder 2"/>
-          <p:cNvSpPr>
-            <a:spLocks noGrp="1"/>
-          </p:cNvSpPr>
-          <p:nvPr>
-            <p:ph type="body" idx="3" sz="quarter"/>
-          </p:nvPr>
-        </p:nvSpPr>
-        <p:spPr/>
-        <p:txBody>
-          <a:bodyPr/>
-          <a:lstStyle/>
-          <a:p>
-            <a:r>
               <a:t>Slide LỜI GIẢI – GV chốt sau khi HS trình bày. </a:t>
             </a:r>
           </a:p>
@@ -2719,7 +2364,7 @@
           <a:lstStyle/>
           <a:p>
             <a:r>
-              <a:t>Slide ĐỀ BÀI – cho HS suy nghĩ, thảo luận (không chiếu lời giải). </a:t>
+              <a:t>Slide LỜI GIẢI – GV chốt sau khi HS trình bày. </a:t>
             </a:r>
           </a:p>
         </p:txBody>
@@ -2789,7 +2434,7 @@
           <a:lstStyle/>
           <a:p>
             <a:r>
-              <a:t>Slide LỜI GIẢI – GV chốt sau khi HS trình bày. </a:t>
+              <a:t>Slide ĐỀ BÀI – cho HS suy nghĩ, thảo luận (không chiếu lời giải). </a:t>
             </a:r>
           </a:p>
         </p:txBody>
@@ -2859,7 +2504,7 @@
           <a:lstStyle/>
           <a:p>
             <a:r>
-              <a:t>Slide ĐỀ BÀI – cho HS suy nghĩ, thảo luận (không chiếu lời giải). </a:t>
+              <a:t>Slide LỜI GIẢI – GV chốt sau khi HS trình bày. </a:t>
             </a:r>
           </a:p>
         </p:txBody>
@@ -2929,7 +2574,7 @@
           <a:lstStyle/>
           <a:p>
             <a:r>
-              <a:t>Slide LỜI GIẢI – GV chốt sau khi HS trình bày. </a:t>
+              <a:t>Slide ĐỀ BÀI – cho HS suy nghĩ, thảo luận (không chiếu lời giải). </a:t>
             </a:r>
           </a:p>
         </p:txBody>
@@ -2999,7 +2644,7 @@
           <a:lstStyle/>
           <a:p>
             <a:r>
-              <a:t>Slide ĐỀ BÀI – cho HS suy nghĩ, thảo luận (không chiếu lời giải). </a:t>
+              <a:t>Slide LỜI GIẢI – GV chốt sau khi HS trình bày. </a:t>
             </a:r>
           </a:p>
         </p:txBody>
@@ -3069,7 +2714,7 @@
           <a:lstStyle/>
           <a:p>
             <a:r>
-              <a:t>Slide LỜI GIẢI – GV chốt sau khi HS trình bày. </a:t>
+              <a:t>Câu hỏi Trước khi đọc SGK tr.47.</a:t>
             </a:r>
           </a:p>
         </p:txBody>
@@ -6299,14 +5944,14 @@
         </p:nvSpPr>
         <p:spPr>
           <a:xfrm>
-            <a:off x="9942271" y="457200"/>
-            <a:ext cx="1700784" cy="457200"/>
+            <a:off x="10253167" y="457200"/>
+            <a:ext cx="1389888" cy="457200"/>
           </a:xfrm>
           <a:prstGeom prst="roundRect">
             <a:avLst/>
           </a:prstGeom>
           <a:solidFill>
-            <a:srgbClr val="991B1B"/>
+            <a:srgbClr val="1E40AF"/>
           </a:solidFill>
           <a:ln>
             <a:noFill/>
@@ -6339,7 +5984,7 @@
                 </a:solidFill>
                 <a:latin typeface="Arial"/>
               </a:rPr>
-              <a:t>LỜI GIẢI</a:t>
+              <a:t>ĐỀ BÀI</a:t>
             </a:r>
           </a:p>
         </p:txBody>
@@ -6353,7 +5998,7 @@
         <p:spPr>
           <a:xfrm>
             <a:off x="731520" y="274320"/>
-            <a:ext cx="9272016" cy="868680"/>
+            <a:ext cx="9582912" cy="868680"/>
           </a:xfrm>
           <a:prstGeom prst="rect">
             <a:avLst/>
@@ -6373,7 +6018,7 @@
                 </a:solidFill>
                 <a:latin typeface="Arial"/>
               </a:rPr>
-              <a:t>PHÁT HIỆN VÀ TRIẾT LÍ</a:t>
+              <a:t>HÀNH TRÌNH “CHẬM RÌ” CỦA CON ỐC</a:t>
             </a:r>
           </a:p>
         </p:txBody>
@@ -6466,7 +6111,7 @@
         <p:spPr>
           <a:xfrm>
             <a:off x="731520" y="1463040"/>
-            <a:ext cx="10789920" cy="3474720"/>
+            <a:ext cx="10789920" cy="3566160"/>
           </a:xfrm>
           <a:prstGeom prst="rect">
             <a:avLst/>
@@ -6479,66 +6124,19 @@
           </a:bodyPr>
           <a:lstStyle/>
           <a:p>
-            <a:pPr algn="l" marL="365760" indent="-365760">
+            <a:pPr algn="l">
               <a:spcAft>
                 <a:spcPts val="800"/>
               </a:spcAft>
-              <a:buClr>
-                <a:srgbClr val="1E40AF"/>
-              </a:buClr>
-              <a:buFont typeface="Arial"/>
-              <a:buChar char="•"/>
             </a:pPr>
             <a:r>
-              <a:rPr sz="2300">
+              <a:rPr sz="2600" b="1">
                 <a:solidFill>
                   <a:srgbClr val="1E293B"/>
                 </a:solidFill>
                 <a:latin typeface="Calibri"/>
               </a:rPr>
-              <a:t>Phát hiện: dây gàu bị hoa triêu nhan quấn vướng.</a:t>
-            </a:r>
-          </a:p>
-          <a:p>
-            <a:pPr algn="l" marL="365760" indent="-365760">
-              <a:spcAft>
-                <a:spcPts val="800"/>
-              </a:spcAft>
-              <a:buClr>
-                <a:srgbClr val="1E40AF"/>
-              </a:buClr>
-              <a:buFont typeface="Arial"/>
-              <a:buChar char="•"/>
-            </a:pPr>
-            <a:r>
-              <a:rPr sz="2300">
-                <a:solidFill>
-                  <a:srgbClr val="1E293B"/>
-                </a:solidFill>
-                <a:latin typeface="Calibri"/>
-              </a:rPr>
-              <a:t>Không nỡ làm tổn thương bông hoa → đành xin nước nhà bên.</a:t>
-            </a:r>
-          </a:p>
-          <a:p>
-            <a:pPr algn="l" marL="365760" indent="-365760">
-              <a:spcAft>
-                <a:spcPts val="800"/>
-              </a:spcAft>
-              <a:buClr>
-                <a:srgbClr val="1E40AF"/>
-              </a:buClr>
-              <a:buFont typeface="Arial"/>
-              <a:buChar char="•"/>
-            </a:pPr>
-            <a:r>
-              <a:rPr sz="2300">
-                <a:solidFill>
-                  <a:srgbClr val="1E293B"/>
-                </a:solidFill>
-                <a:latin typeface="Calibri"/>
-              </a:rPr>
-              <a:t>Triết lí: trân trọng, nâng niu sự sống; ứng xử hài hoà với thiên nhiên.</a:t>
+              <a:t>Bạn cảm nhận như thế nào về hành trình “chậm rì” của con ốc trong bài thơ của Ít-sa?</a:t>
             </a:r>
           </a:p>
         </p:txBody>
@@ -6551,8 +6149,8 @@
         </p:nvSpPr>
         <p:spPr>
           <a:xfrm>
-            <a:off x="731520" y="5074920"/>
-            <a:ext cx="10789920" cy="731520"/>
+            <a:off x="731520" y="5120640"/>
+            <a:ext cx="10789920" cy="693420"/>
           </a:xfrm>
           <a:prstGeom prst="roundRect">
             <a:avLst>
@@ -6560,11 +6158,11 @@
             </a:avLst>
           </a:prstGeom>
           <a:solidFill>
-            <a:srgbClr val="FEF2F2"/>
+            <a:srgbClr val="EFF4FF"/>
           </a:solidFill>
           <a:ln w="19050">
             <a:solidFill>
-              <a:srgbClr val="991B1B"/>
+              <a:srgbClr val="1E40AF"/>
             </a:solidFill>
           </a:ln>
           <a:effectLst/>
@@ -6599,8 +6197,8 @@
         </p:nvSpPr>
         <p:spPr>
           <a:xfrm>
-            <a:off x="914400" y="5074920"/>
-            <a:ext cx="10424160" cy="731520"/>
+            <a:off x="914400" y="5120640"/>
+            <a:ext cx="10424160" cy="693420"/>
           </a:xfrm>
           <a:prstGeom prst="rect">
             <a:avLst/>
@@ -6619,13 +6217,13 @@
               </a:spcAft>
             </a:pPr>
             <a:r>
-              <a:rPr sz="2400" b="1">
-                <a:solidFill>
-                  <a:srgbClr val="991B1B"/>
+              <a:rPr sz="2200" b="1">
+                <a:solidFill>
+                  <a:srgbClr val="1E40AF"/>
                 </a:solidFill>
                 <a:latin typeface="Calibri"/>
               </a:rPr>
-              <a:t>Tình yêu thiên nhiên tinh tế, nhân hậu.</a:t>
+              <a:t>💡 Đặt con ốc cạnh núi Phú Sĩ.</a:t>
             </a:r>
           </a:p>
         </p:txBody>
@@ -6708,14 +6306,14 @@
         </p:nvSpPr>
         <p:spPr>
           <a:xfrm>
-            <a:off x="10253167" y="457200"/>
-            <a:ext cx="1389888" cy="457200"/>
+            <a:off x="9942271" y="457200"/>
+            <a:ext cx="1700784" cy="457200"/>
           </a:xfrm>
           <a:prstGeom prst="roundRect">
             <a:avLst/>
           </a:prstGeom>
           <a:solidFill>
-            <a:srgbClr val="1E40AF"/>
+            <a:srgbClr val="991B1B"/>
           </a:solidFill>
           <a:ln>
             <a:noFill/>
@@ -6748,7 +6346,7 @@
                 </a:solidFill>
                 <a:latin typeface="Arial"/>
               </a:rPr>
-              <a:t>ĐỀ BÀI</a:t>
+              <a:t>LỜI GIẢI</a:t>
             </a:r>
           </a:p>
         </p:txBody>
@@ -6762,7 +6360,7 @@
         <p:spPr>
           <a:xfrm>
             <a:off x="731520" y="274320"/>
-            <a:ext cx="9582912" cy="868680"/>
+            <a:ext cx="9272016" cy="868680"/>
           </a:xfrm>
           <a:prstGeom prst="rect">
             <a:avLst/>
@@ -6875,7 +6473,7 @@
         <p:spPr>
           <a:xfrm>
             <a:off x="731520" y="1463040"/>
-            <a:ext cx="10789920" cy="3566160"/>
+            <a:ext cx="10789920" cy="3474720"/>
           </a:xfrm>
           <a:prstGeom prst="rect">
             <a:avLst/>
@@ -6888,19 +6486,66 @@
           </a:bodyPr>
           <a:lstStyle/>
           <a:p>
-            <a:pPr algn="l">
+            <a:pPr algn="l" marL="365760" indent="-365760">
               <a:spcAft>
                 <a:spcPts val="800"/>
               </a:spcAft>
+              <a:buClr>
+                <a:srgbClr val="1E40AF"/>
+              </a:buClr>
+              <a:buFont typeface="Arial"/>
+              <a:buChar char="•"/>
             </a:pPr>
             <a:r>
-              <a:rPr sz="2600" b="1">
+              <a:rPr sz="2300">
                 <a:solidFill>
                   <a:srgbClr val="1E293B"/>
                 </a:solidFill>
                 <a:latin typeface="Calibri"/>
               </a:rPr>
-              <a:t>Bạn cảm nhận như thế nào về hành trình “chậm rì” của con ốc trong bài thơ của Ít-sa?</a:t>
+              <a:t>Con ốc nhỏ bé, chậm chạp ↔ núi Phú Sĩ cao lớn.</a:t>
+            </a:r>
+          </a:p>
+          <a:p>
+            <a:pPr algn="l" marL="365760" indent="-365760">
+              <a:spcAft>
+                <a:spcPts val="800"/>
+              </a:spcAft>
+              <a:buClr>
+                <a:srgbClr val="1E40AF"/>
+              </a:buClr>
+              <a:buFont typeface="Arial"/>
+              <a:buChar char="•"/>
+            </a:pPr>
+            <a:r>
+              <a:rPr sz="2300">
+                <a:solidFill>
+                  <a:srgbClr val="1E293B"/>
+                </a:solidFill>
+                <a:latin typeface="Calibri"/>
+              </a:rPr>
+              <a:t>Hành trình bền bỉ, kiên nhẫn.</a:t>
+            </a:r>
+          </a:p>
+          <a:p>
+            <a:pPr algn="l" marL="365760" indent="-365760">
+              <a:spcAft>
+                <a:spcPts val="800"/>
+              </a:spcAft>
+              <a:buClr>
+                <a:srgbClr val="1E40AF"/>
+              </a:buClr>
+              <a:buFont typeface="Arial"/>
+              <a:buChar char="•"/>
+            </a:pPr>
+            <a:r>
+              <a:rPr sz="2300">
+                <a:solidFill>
+                  <a:srgbClr val="1E293B"/>
+                </a:solidFill>
+                <a:latin typeface="Calibri"/>
+              </a:rPr>
+              <a:t>Gợi niềm tin: cái nhỏ bé vẫn có thể vươn tới cái lớn lao.</a:t>
             </a:r>
           </a:p>
         </p:txBody>
@@ -6913,8 +6558,8 @@
         </p:nvSpPr>
         <p:spPr>
           <a:xfrm>
-            <a:off x="731520" y="5120640"/>
-            <a:ext cx="10789920" cy="693420"/>
+            <a:off x="731520" y="5074920"/>
+            <a:ext cx="10789920" cy="731520"/>
           </a:xfrm>
           <a:prstGeom prst="roundRect">
             <a:avLst>
@@ -6922,11 +6567,11 @@
             </a:avLst>
           </a:prstGeom>
           <a:solidFill>
-            <a:srgbClr val="EFF4FF"/>
+            <a:srgbClr val="FEF2F2"/>
           </a:solidFill>
           <a:ln w="19050">
             <a:solidFill>
-              <a:srgbClr val="1E40AF"/>
+              <a:srgbClr val="991B1B"/>
             </a:solidFill>
           </a:ln>
           <a:effectLst/>
@@ -6961,8 +6606,8 @@
         </p:nvSpPr>
         <p:spPr>
           <a:xfrm>
-            <a:off x="914400" y="5120640"/>
-            <a:ext cx="10424160" cy="693420"/>
+            <a:off x="914400" y="5074920"/>
+            <a:ext cx="10424160" cy="731520"/>
           </a:xfrm>
           <a:prstGeom prst="rect">
             <a:avLst/>
@@ -6981,13 +6626,13 @@
               </a:spcAft>
             </a:pPr>
             <a:r>
-              <a:rPr sz="2200" b="1">
-                <a:solidFill>
-                  <a:srgbClr val="1E40AF"/>
+              <a:rPr sz="2400" b="1">
+                <a:solidFill>
+                  <a:srgbClr val="991B1B"/>
                 </a:solidFill>
                 <a:latin typeface="Calibri"/>
               </a:rPr>
-              <a:t>💡 Đặt con ốc cạnh núi Phú Sĩ.</a:t>
+              <a:t>Ngợi ca ý chí kiên trì.</a:t>
             </a:r>
           </a:p>
         </p:txBody>
@@ -7001,6 +6646,115 @@
 </file>
 
 <file path=ppt/slides/slide12.xml><?xml version="1.0" encoding="utf-8"?>
+<p:sld xmlns:a="http://schemas.openxmlformats.org/drawingml/2006/main" xmlns:p="http://schemas.openxmlformats.org/presentationml/2006/main" xmlns:r="http://schemas.openxmlformats.org/officeDocument/2006/relationships">
+  <p:cSld>
+    <p:bg>
+      <p:bgPr>
+        <a:solidFill>
+          <a:srgbClr val="F8F9FA"/>
+        </a:solidFill>
+        <a:effectLst/>
+      </p:bgPr>
+    </p:bg>
+    <p:spTree>
+      <p:nvGrpSpPr>
+        <p:cNvPr id="1" name=""/>
+        <p:cNvGrpSpPr/>
+        <p:nvPr/>
+      </p:nvGrpSpPr>
+      <p:grpSpPr/>
+      <p:sp>
+        <p:nvSpPr>
+          <p:cNvPr id="2" name="Rectangle 1"/>
+          <p:cNvSpPr/>
+          <p:nvPr/>
+        </p:nvSpPr>
+        <p:spPr>
+          <a:xfrm>
+            <a:off x="548640" y="2926080"/>
+            <a:ext cx="164592" cy="1005840"/>
+          </a:xfrm>
+          <a:prstGeom prst="rect">
+            <a:avLst/>
+          </a:prstGeom>
+          <a:solidFill>
+            <a:srgbClr val="991B1B"/>
+          </a:solidFill>
+          <a:ln>
+            <a:noFill/>
+          </a:ln>
+          <a:effectLst/>
+        </p:spPr>
+        <p:style>
+          <a:lnRef idx="1">
+            <a:schemeClr val="accent1"/>
+          </a:lnRef>
+          <a:fillRef idx="3">
+            <a:schemeClr val="accent1"/>
+          </a:fillRef>
+          <a:effectRef idx="2">
+            <a:schemeClr val="accent1"/>
+          </a:effectRef>
+          <a:fontRef idx="minor">
+            <a:schemeClr val="lt1"/>
+          </a:fontRef>
+        </p:style>
+        <p:txBody>
+          <a:bodyPr rtlCol="0" anchor="ctr"/>
+          <a:lstStyle/>
+          <a:p>
+            <a:pPr algn="ctr"/>
+          </a:p>
+        </p:txBody>
+      </p:sp>
+      <p:sp>
+        <p:nvSpPr>
+          <p:cNvPr id="3" name="TextBox 2"/>
+          <p:cNvSpPr txBox="1"/>
+          <p:nvPr/>
+        </p:nvSpPr>
+        <p:spPr>
+          <a:xfrm>
+            <a:off x="914400" y="2743200"/>
+            <a:ext cx="10515600" cy="1371600"/>
+          </a:xfrm>
+          <a:prstGeom prst="rect">
+            <a:avLst/>
+          </a:prstGeom>
+          <a:noFill/>
+        </p:spPr>
+        <p:txBody>
+          <a:bodyPr wrap="square" anchor="ctr" lIns="45720" rIns="45720">
+            <a:spAutoFit/>
+          </a:bodyPr>
+          <a:lstStyle/>
+          <a:p>
+            <a:pPr algn="l">
+              <a:spcAft>
+                <a:spcPts val="800"/>
+              </a:spcAft>
+            </a:pPr>
+            <a:r>
+              <a:rPr sz="3600" b="1">
+                <a:solidFill>
+                  <a:srgbClr val="1E40AF"/>
+                </a:solidFill>
+                <a:latin typeface="Calibri"/>
+              </a:rPr>
+              <a:t>TIẾT 13 – 14: THU HỨNG (Đỗ Phủ)</a:t>
+            </a:r>
+          </a:p>
+        </p:txBody>
+      </p:sp>
+    </p:spTree>
+  </p:cSld>
+  <p:clrMapOvr>
+    <a:masterClrMapping/>
+  </p:clrMapOvr>
+</p:sld>
+</file>
+
+<file path=ppt/slides/slide13.xml><?xml version="1.0" encoding="utf-8"?>
 <p:sld xmlns:a="http://schemas.openxmlformats.org/drawingml/2006/main" xmlns:p="http://schemas.openxmlformats.org/presentationml/2006/main" xmlns:r="http://schemas.openxmlformats.org/officeDocument/2006/relationships">
   <p:cSld>
     <p:bg>
@@ -7070,14 +6824,14 @@
         </p:nvSpPr>
         <p:spPr>
           <a:xfrm>
-            <a:off x="9942271" y="457200"/>
-            <a:ext cx="1700784" cy="457200"/>
+            <a:off x="9786823" y="457200"/>
+            <a:ext cx="1856232" cy="457200"/>
           </a:xfrm>
           <a:prstGeom prst="roundRect">
             <a:avLst/>
           </a:prstGeom>
           <a:solidFill>
-            <a:srgbClr val="991B1B"/>
+            <a:srgbClr val="1E40AF"/>
           </a:solidFill>
           <a:ln>
             <a:noFill/>
@@ -7110,7 +6864,7 @@
                 </a:solidFill>
                 <a:latin typeface="Arial"/>
               </a:rPr>
-              <a:t>LỜI GIẢI</a:t>
+              <a:t>KHỞI ĐỘNG</a:t>
             </a:r>
           </a:p>
         </p:txBody>
@@ -7124,7 +6878,7 @@
         <p:spPr>
           <a:xfrm>
             <a:off x="731520" y="274320"/>
-            <a:ext cx="9272016" cy="868680"/>
+            <a:ext cx="9116568" cy="868680"/>
           </a:xfrm>
           <a:prstGeom prst="rect">
             <a:avLst/>
@@ -7144,7 +6898,7 @@
                 </a:solidFill>
                 <a:latin typeface="Arial"/>
               </a:rPr>
-              <a:t>HÀNH TRÌNH “CHẬM RÌ” CỦA CON ỐC</a:t>
+              <a:t>TRƯỚC KHI ĐỌC</a:t>
             </a:r>
           </a:p>
         </p:txBody>
@@ -7223,7 +6977,7 @@
                 </a:solidFill>
                 <a:latin typeface="Calibri"/>
               </a:rPr>
-              <a:t>Ngữ văn 10 · Bài 2: Vẻ Đẹp Của Thơ Ca          12</a:t>
+              <a:t>Ngữ văn 10 · Bài 2: Vẻ Đẹp Của Thơ Ca          13</a:t>
             </a:r>
           </a:p>
         </p:txBody>
@@ -7237,7 +6991,7 @@
         <p:spPr>
           <a:xfrm>
             <a:off x="731520" y="1463040"/>
-            <a:ext cx="10789920" cy="3474720"/>
+            <a:ext cx="10789920" cy="4572000"/>
           </a:xfrm>
           <a:prstGeom prst="rect">
             <a:avLst/>
@@ -7246,249 +7000,6 @@
         </p:spPr>
         <p:txBody>
           <a:bodyPr wrap="square" anchor="t" lIns="45720" rIns="45720">
-            <a:spAutoFit/>
-          </a:bodyPr>
-          <a:lstStyle/>
-          <a:p>
-            <a:pPr algn="l" marL="365760" indent="-365760">
-              <a:spcAft>
-                <a:spcPts val="800"/>
-              </a:spcAft>
-              <a:buClr>
-                <a:srgbClr val="1E40AF"/>
-              </a:buClr>
-              <a:buFont typeface="Arial"/>
-              <a:buChar char="•"/>
-            </a:pPr>
-            <a:r>
-              <a:rPr sz="2300">
-                <a:solidFill>
-                  <a:srgbClr val="1E293B"/>
-                </a:solidFill>
-                <a:latin typeface="Calibri"/>
-              </a:rPr>
-              <a:t>Con ốc nhỏ bé, chậm chạp ↔ núi Phú Sĩ cao lớn.</a:t>
-            </a:r>
-          </a:p>
-          <a:p>
-            <a:pPr algn="l" marL="365760" indent="-365760">
-              <a:spcAft>
-                <a:spcPts val="800"/>
-              </a:spcAft>
-              <a:buClr>
-                <a:srgbClr val="1E40AF"/>
-              </a:buClr>
-              <a:buFont typeface="Arial"/>
-              <a:buChar char="•"/>
-            </a:pPr>
-            <a:r>
-              <a:rPr sz="2300">
-                <a:solidFill>
-                  <a:srgbClr val="1E293B"/>
-                </a:solidFill>
-                <a:latin typeface="Calibri"/>
-              </a:rPr>
-              <a:t>Hành trình bền bỉ, kiên nhẫn.</a:t>
-            </a:r>
-          </a:p>
-          <a:p>
-            <a:pPr algn="l" marL="365760" indent="-365760">
-              <a:spcAft>
-                <a:spcPts val="800"/>
-              </a:spcAft>
-              <a:buClr>
-                <a:srgbClr val="1E40AF"/>
-              </a:buClr>
-              <a:buFont typeface="Arial"/>
-              <a:buChar char="•"/>
-            </a:pPr>
-            <a:r>
-              <a:rPr sz="2300">
-                <a:solidFill>
-                  <a:srgbClr val="1E293B"/>
-                </a:solidFill>
-                <a:latin typeface="Calibri"/>
-              </a:rPr>
-              <a:t>Gợi niềm tin: cái nhỏ bé vẫn có thể vươn tới cái lớn lao.</a:t>
-            </a:r>
-          </a:p>
-        </p:txBody>
-      </p:sp>
-      <p:sp>
-        <p:nvSpPr>
-          <p:cNvPr id="8" name="Rounded Rectangle 7"/>
-          <p:cNvSpPr/>
-          <p:nvPr/>
-        </p:nvSpPr>
-        <p:spPr>
-          <a:xfrm>
-            <a:off x="731520" y="5074920"/>
-            <a:ext cx="10789920" cy="731520"/>
-          </a:xfrm>
-          <a:prstGeom prst="roundRect">
-            <a:avLst>
-              <a:gd name="adj" fmla="val 8000"/>
-            </a:avLst>
-          </a:prstGeom>
-          <a:solidFill>
-            <a:srgbClr val="FEF2F2"/>
-          </a:solidFill>
-          <a:ln w="19050">
-            <a:solidFill>
-              <a:srgbClr val="991B1B"/>
-            </a:solidFill>
-          </a:ln>
-          <a:effectLst/>
-        </p:spPr>
-        <p:style>
-          <a:lnRef idx="1">
-            <a:schemeClr val="accent1"/>
-          </a:lnRef>
-          <a:fillRef idx="3">
-            <a:schemeClr val="accent1"/>
-          </a:fillRef>
-          <a:effectRef idx="2">
-            <a:schemeClr val="accent1"/>
-          </a:effectRef>
-          <a:fontRef idx="minor">
-            <a:schemeClr val="lt1"/>
-          </a:fontRef>
-        </p:style>
-        <p:txBody>
-          <a:bodyPr rtlCol="0" anchor="ctr"/>
-          <a:lstStyle/>
-          <a:p>
-            <a:pPr algn="ctr"/>
-          </a:p>
-        </p:txBody>
-      </p:sp>
-      <p:sp>
-        <p:nvSpPr>
-          <p:cNvPr id="9" name="TextBox 8"/>
-          <p:cNvSpPr txBox="1"/>
-          <p:nvPr/>
-        </p:nvSpPr>
-        <p:spPr>
-          <a:xfrm>
-            <a:off x="914400" y="5074920"/>
-            <a:ext cx="10424160" cy="731520"/>
-          </a:xfrm>
-          <a:prstGeom prst="rect">
-            <a:avLst/>
-          </a:prstGeom>
-          <a:noFill/>
-        </p:spPr>
-        <p:txBody>
-          <a:bodyPr wrap="square" anchor="ctr" lIns="45720" rIns="45720">
-            <a:spAutoFit/>
-          </a:bodyPr>
-          <a:lstStyle/>
-          <a:p>
-            <a:pPr algn="l">
-              <a:spcAft>
-                <a:spcPts val="400"/>
-              </a:spcAft>
-            </a:pPr>
-            <a:r>
-              <a:rPr sz="2400" b="1">
-                <a:solidFill>
-                  <a:srgbClr val="991B1B"/>
-                </a:solidFill>
-                <a:latin typeface="Calibri"/>
-              </a:rPr>
-              <a:t>Ngợi ca ý chí kiên trì.</a:t>
-            </a:r>
-          </a:p>
-        </p:txBody>
-      </p:sp>
-    </p:spTree>
-  </p:cSld>
-  <p:clrMapOvr>
-    <a:masterClrMapping/>
-  </p:clrMapOvr>
-</p:sld>
-</file>
-
-<file path=ppt/slides/slide13.xml><?xml version="1.0" encoding="utf-8"?>
-<p:sld xmlns:a="http://schemas.openxmlformats.org/drawingml/2006/main" xmlns:p="http://schemas.openxmlformats.org/presentationml/2006/main" xmlns:r="http://schemas.openxmlformats.org/officeDocument/2006/relationships">
-  <p:cSld>
-    <p:bg>
-      <p:bgPr>
-        <a:solidFill>
-          <a:srgbClr val="F8F9FA"/>
-        </a:solidFill>
-        <a:effectLst/>
-      </p:bgPr>
-    </p:bg>
-    <p:spTree>
-      <p:nvGrpSpPr>
-        <p:cNvPr id="1" name=""/>
-        <p:cNvGrpSpPr/>
-        <p:nvPr/>
-      </p:nvGrpSpPr>
-      <p:grpSpPr/>
-      <p:sp>
-        <p:nvSpPr>
-          <p:cNvPr id="2" name="Rectangle 1"/>
-          <p:cNvSpPr/>
-          <p:nvPr/>
-        </p:nvSpPr>
-        <p:spPr>
-          <a:xfrm>
-            <a:off x="548640" y="2926080"/>
-            <a:ext cx="164592" cy="1005840"/>
-          </a:xfrm>
-          <a:prstGeom prst="rect">
-            <a:avLst/>
-          </a:prstGeom>
-          <a:solidFill>
-            <a:srgbClr val="991B1B"/>
-          </a:solidFill>
-          <a:ln>
-            <a:noFill/>
-          </a:ln>
-          <a:effectLst/>
-        </p:spPr>
-        <p:style>
-          <a:lnRef idx="1">
-            <a:schemeClr val="accent1"/>
-          </a:lnRef>
-          <a:fillRef idx="3">
-            <a:schemeClr val="accent1"/>
-          </a:fillRef>
-          <a:effectRef idx="2">
-            <a:schemeClr val="accent1"/>
-          </a:effectRef>
-          <a:fontRef idx="minor">
-            <a:schemeClr val="lt1"/>
-          </a:fontRef>
-        </p:style>
-        <p:txBody>
-          <a:bodyPr rtlCol="0" anchor="ctr"/>
-          <a:lstStyle/>
-          <a:p>
-            <a:pPr algn="ctr"/>
-          </a:p>
-        </p:txBody>
-      </p:sp>
-      <p:sp>
-        <p:nvSpPr>
-          <p:cNvPr id="3" name="TextBox 2"/>
-          <p:cNvSpPr txBox="1"/>
-          <p:nvPr/>
-        </p:nvSpPr>
-        <p:spPr>
-          <a:xfrm>
-            <a:off x="914400" y="2743200"/>
-            <a:ext cx="10515600" cy="1371600"/>
-          </a:xfrm>
-          <a:prstGeom prst="rect">
-            <a:avLst/>
-          </a:prstGeom>
-          <a:noFill/>
-        </p:spPr>
-        <p:txBody>
-          <a:bodyPr wrap="square" anchor="ctr" lIns="45720" rIns="45720">
             <a:spAutoFit/>
           </a:bodyPr>
           <a:lstStyle/>
@@ -7499,13 +7010,29 @@
               </a:spcAft>
             </a:pPr>
             <a:r>
-              <a:rPr sz="3600" b="1">
-                <a:solidFill>
-                  <a:srgbClr val="1E40AF"/>
+              <a:rPr sz="2600" b="1">
+                <a:solidFill>
+                  <a:srgbClr val="1E293B"/>
                 </a:solidFill>
                 <a:latin typeface="Calibri"/>
               </a:rPr>
-              <a:t>TIẾT 13 – 14: THU HỨNG (Đỗ Phủ)</a:t>
+              <a:t>Chia sẻ ấn tượng về đặc điểm hình thức, nội dung của những bài thơ Đường luật đã học ở THCS.</a:t>
+            </a:r>
+          </a:p>
+          <a:p>
+            <a:pPr algn="l">
+              <a:spcAft>
+                <a:spcPts val="800"/>
+              </a:spcAft>
+            </a:pPr>
+            <a:r>
+              <a:rPr sz="2600" b="1">
+                <a:solidFill>
+                  <a:srgbClr val="1E293B"/>
+                </a:solidFill>
+                <a:latin typeface="Calibri"/>
+              </a:rPr>
+              <a:t>Bạn đã bao giờ xa gia đình và thấy nhớ nhà?</a:t>
             </a:r>
           </a:p>
         </p:txBody>
@@ -7588,8 +7115,8 @@
         </p:nvSpPr>
         <p:spPr>
           <a:xfrm>
-            <a:off x="9786823" y="457200"/>
-            <a:ext cx="1856232" cy="457200"/>
+            <a:off x="10253167" y="457200"/>
+            <a:ext cx="1389888" cy="457200"/>
           </a:xfrm>
           <a:prstGeom prst="roundRect">
             <a:avLst/>
@@ -7628,7 +7155,7 @@
                 </a:solidFill>
                 <a:latin typeface="Arial"/>
               </a:rPr>
-              <a:t>KHỞI ĐỘNG</a:t>
+              <a:t>ĐỀ BÀI</a:t>
             </a:r>
           </a:p>
         </p:txBody>
@@ -7642,7 +7169,7 @@
         <p:spPr>
           <a:xfrm>
             <a:off x="731520" y="274320"/>
-            <a:ext cx="9116568" cy="868680"/>
+            <a:ext cx="9582912" cy="868680"/>
           </a:xfrm>
           <a:prstGeom prst="rect">
             <a:avLst/>
@@ -7662,7 +7189,7 @@
                 </a:solidFill>
                 <a:latin typeface="Arial"/>
               </a:rPr>
-              <a:t>TRƯỚC KHI ĐỌC</a:t>
+              <a:t>ĐẶC ĐIỂM THƠ ĐƯỜNG LUẬT</a:t>
             </a:r>
           </a:p>
         </p:txBody>
@@ -7755,7 +7282,7 @@
         <p:spPr>
           <a:xfrm>
             <a:off x="731520" y="1463040"/>
-            <a:ext cx="10789920" cy="4572000"/>
+            <a:ext cx="10789920" cy="3566160"/>
           </a:xfrm>
           <a:prstGeom prst="rect">
             <a:avLst/>
@@ -7780,23 +7307,94 @@
                 </a:solidFill>
                 <a:latin typeface="Calibri"/>
               </a:rPr>
-              <a:t>Chia sẻ ấn tượng về đặc điểm hình thức, nội dung của những bài thơ Đường luật đã học ở THCS.</a:t>
-            </a:r>
-          </a:p>
+              <a:t>Mô tả một số đặc điểm cơ bản của thơ Đường luật (bố cục, gieo vần, luật bằng – trắc, phép đối) được thể hiện trong bài Thu hứng.</a:t>
+            </a:r>
+          </a:p>
+        </p:txBody>
+      </p:sp>
+      <p:sp>
+        <p:nvSpPr>
+          <p:cNvPr id="8" name="Rounded Rectangle 7"/>
+          <p:cNvSpPr/>
+          <p:nvPr/>
+        </p:nvSpPr>
+        <p:spPr>
+          <a:xfrm>
+            <a:off x="731520" y="5120640"/>
+            <a:ext cx="10789920" cy="693420"/>
+          </a:xfrm>
+          <a:prstGeom prst="roundRect">
+            <a:avLst>
+              <a:gd name="adj" fmla="val 8000"/>
+            </a:avLst>
+          </a:prstGeom>
+          <a:solidFill>
+            <a:srgbClr val="EFF4FF"/>
+          </a:solidFill>
+          <a:ln w="19050">
+            <a:solidFill>
+              <a:srgbClr val="1E40AF"/>
+            </a:solidFill>
+          </a:ln>
+          <a:effectLst/>
+        </p:spPr>
+        <p:style>
+          <a:lnRef idx="1">
+            <a:schemeClr val="accent1"/>
+          </a:lnRef>
+          <a:fillRef idx="3">
+            <a:schemeClr val="accent1"/>
+          </a:fillRef>
+          <a:effectRef idx="2">
+            <a:schemeClr val="accent1"/>
+          </a:effectRef>
+          <a:fontRef idx="minor">
+            <a:schemeClr val="lt1"/>
+          </a:fontRef>
+        </p:style>
+        <p:txBody>
+          <a:bodyPr rtlCol="0" anchor="ctr"/>
+          <a:lstStyle/>
+          <a:p>
+            <a:pPr algn="ctr"/>
+          </a:p>
+        </p:txBody>
+      </p:sp>
+      <p:sp>
+        <p:nvSpPr>
+          <p:cNvPr id="9" name="TextBox 8"/>
+          <p:cNvSpPr txBox="1"/>
+          <p:nvPr/>
+        </p:nvSpPr>
+        <p:spPr>
+          <a:xfrm>
+            <a:off x="914400" y="5120640"/>
+            <a:ext cx="10424160" cy="693420"/>
+          </a:xfrm>
+          <a:prstGeom prst="rect">
+            <a:avLst/>
+          </a:prstGeom>
+          <a:noFill/>
+        </p:spPr>
+        <p:txBody>
+          <a:bodyPr wrap="square" anchor="ctr" lIns="45720" rIns="45720">
+            <a:spAutoFit/>
+          </a:bodyPr>
+          <a:lstStyle/>
           <a:p>
             <a:pPr algn="l">
               <a:spcAft>
-                <a:spcPts val="800"/>
+                <a:spcPts val="400"/>
               </a:spcAft>
             </a:pPr>
             <a:r>
-              <a:rPr sz="2600" b="1">
-                <a:solidFill>
-                  <a:srgbClr val="1E293B"/>
+              <a:rPr sz="2200" b="1">
+                <a:solidFill>
+                  <a:srgbClr val="1E40AF"/>
                 </a:solidFill>
                 <a:latin typeface="Calibri"/>
               </a:rPr>
-              <a:t>Bạn đã bao giờ xa gia đình và thấy nhớ nhà?</a:t>
+              <a:t>💡 Bài thơ có bao nhiêu câu, mỗi câu mấy chữ?</a:t>
             </a:r>
           </a:p>
         </p:txBody>
@@ -7879,8 +7477,8 @@
         </p:nvSpPr>
         <p:spPr>
           <a:xfrm>
-            <a:off x="10408615" y="457200"/>
-            <a:ext cx="1234440" cy="457200"/>
+            <a:off x="9942271" y="457200"/>
+            <a:ext cx="1700784" cy="457200"/>
           </a:xfrm>
           <a:prstGeom prst="roundRect">
             <a:avLst/>
@@ -7919,7 +7517,7 @@
                 </a:solidFill>
                 <a:latin typeface="Arial"/>
               </a:rPr>
-              <a:t>VIDEO</a:t>
+              <a:t>LỜI GIẢI</a:t>
             </a:r>
           </a:p>
         </p:txBody>
@@ -7933,7 +7531,7 @@
         <p:spPr>
           <a:xfrm>
             <a:off x="731520" y="274320"/>
-            <a:ext cx="9738360" cy="868680"/>
+            <a:ext cx="9272016" cy="868680"/>
           </a:xfrm>
           <a:prstGeom prst="rect">
             <a:avLst/>
@@ -7953,7 +7551,7 @@
                 </a:solidFill>
                 <a:latin typeface="Arial"/>
               </a:rPr>
-              <a:t>VIDEO THAM KHẢO</a:t>
+              <a:t>ĐẶC ĐIỂM THƠ ĐƯỜNG LUẬT</a:t>
             </a:r>
           </a:p>
         </p:txBody>
@@ -8037,40 +7635,16 @@
           </a:p>
         </p:txBody>
       </p:sp>
-      <p:pic>
-        <p:nvPicPr>
-          <p:cNvPr id="7" name="Picture 6" descr="QR_video_WJr3ux-UmG4.png"/>
-          <p:cNvPicPr>
-            <a:picLocks noChangeAspect="1"/>
-          </p:cNvPicPr>
-          <p:nvPr/>
-        </p:nvPicPr>
-        <p:blipFill>
-          <a:blip r:embed="rId2"/>
-          <a:stretch>
-            <a:fillRect/>
-          </a:stretch>
-        </p:blipFill>
-        <p:spPr>
-          <a:xfrm>
-            <a:off x="8412480" y="1554480"/>
-            <a:ext cx="3108960" cy="3108960"/>
-          </a:xfrm>
-          <a:prstGeom prst="rect">
-            <a:avLst/>
-          </a:prstGeom>
-        </p:spPr>
-      </p:pic>
-      <p:sp>
-        <p:nvSpPr>
-          <p:cNvPr id="8" name="TextBox 7"/>
+      <p:sp>
+        <p:nvSpPr>
+          <p:cNvPr id="7" name="TextBox 6"/>
           <p:cNvSpPr txBox="1"/>
           <p:nvPr/>
         </p:nvSpPr>
         <p:spPr>
           <a:xfrm>
-            <a:off x="731520" y="1554480"/>
-            <a:ext cx="7498079" cy="4206240"/>
+            <a:off x="731520" y="1463040"/>
+            <a:ext cx="10789920" cy="3474720"/>
           </a:xfrm>
           <a:prstGeom prst="rect">
             <a:avLst/>
@@ -8082,38 +7656,6 @@
             <a:spAutoFit/>
           </a:bodyPr>
           <a:lstStyle/>
-          <a:p>
-            <a:pPr algn="l">
-              <a:spcAft>
-                <a:spcPts val="800"/>
-              </a:spcAft>
-            </a:pPr>
-            <a:r>
-              <a:rPr sz="2600" b="1">
-                <a:solidFill>
-                  <a:srgbClr val="1E293B"/>
-                </a:solidFill>
-                <a:latin typeface="Calibri"/>
-              </a:rPr>
-              <a:t>🎬 Cảm xúc mùa thu (Thu hứng bài 1, Đỗ Phủ) – Ngữ văn 10 KNTT</a:t>
-            </a:r>
-          </a:p>
-          <a:p>
-            <a:pPr algn="l">
-              <a:spcAft>
-                <a:spcPts val="800"/>
-              </a:spcAft>
-            </a:pPr>
-            <a:r>
-              <a:rPr sz="2000">
-                <a:solidFill>
-                  <a:srgbClr val="64748B"/>
-                </a:solidFill>
-                <a:latin typeface="Calibri"/>
-              </a:rPr>
-              <a:t>Kênh: Học liệu số giáo dục</a:t>
-            </a:r>
-          </a:p>
           <a:p>
             <a:pPr algn="l" marL="365760" indent="-365760">
               <a:spcAft>
@@ -8126,30 +7668,163 @@
               <a:buChar char="•"/>
             </a:pPr>
             <a:r>
-              <a:rPr sz="2000">
+              <a:rPr sz="2300">
                 <a:solidFill>
                   <a:srgbClr val="1E293B"/>
                 </a:solidFill>
                 <a:latin typeface="Calibri"/>
               </a:rPr>
-              <a:t>Đọc, tìm hiểu Thu hứng</a:t>
-            </a:r>
-          </a:p>
-          <a:p>
-            <a:pPr algn="l">
+              <a:t>Thất ngôn bát cú: 8 câu, mỗi câu 7 chữ.</a:t>
+            </a:r>
+          </a:p>
+          <a:p>
+            <a:pPr algn="l" marL="365760" indent="-365760">
               <a:spcAft>
                 <a:spcPts val="800"/>
               </a:spcAft>
+              <a:buClr>
+                <a:srgbClr val="1E40AF"/>
+              </a:buClr>
+              <a:buFont typeface="Arial"/>
+              <a:buChar char="•"/>
             </a:pPr>
             <a:r>
-              <a:rPr sz="1600">
-                <a:solidFill>
-                  <a:srgbClr val="64748B"/>
+              <a:rPr sz="2300">
+                <a:solidFill>
+                  <a:srgbClr val="1E293B"/>
                 </a:solidFill>
                 <a:latin typeface="Calibri"/>
-                <a:hlinkClick r:id="rId3"/>
-              </a:rPr>
-              <a:t>https://www.youtube.com/watch?v=WJr3ux-UmG4</a:t>
+              </a:rPr>
+              <a:t>Bố cục đề – thực – luận – kết.</a:t>
+            </a:r>
+          </a:p>
+          <a:p>
+            <a:pPr algn="l" marL="365760" indent="-365760">
+              <a:spcAft>
+                <a:spcPts val="800"/>
+              </a:spcAft>
+              <a:buClr>
+                <a:srgbClr val="1E40AF"/>
+              </a:buClr>
+              <a:buFont typeface="Arial"/>
+              <a:buChar char="•"/>
+            </a:pPr>
+            <a:r>
+              <a:rPr sz="2300">
+                <a:solidFill>
+                  <a:srgbClr val="1E293B"/>
+                </a:solidFill>
+                <a:latin typeface="Calibri"/>
+              </a:rPr>
+              <a:t>Gieo một vần bằng ở câu 1, 2, 4, 6, 8.</a:t>
+            </a:r>
+          </a:p>
+          <a:p>
+            <a:pPr algn="l" marL="365760" indent="-365760">
+              <a:spcAft>
+                <a:spcPts val="800"/>
+              </a:spcAft>
+              <a:buClr>
+                <a:srgbClr val="1E40AF"/>
+              </a:buClr>
+              <a:buFont typeface="Arial"/>
+              <a:buChar char="•"/>
+            </a:pPr>
+            <a:r>
+              <a:rPr sz="2300">
+                <a:solidFill>
+                  <a:srgbClr val="1E293B"/>
+                </a:solidFill>
+                <a:latin typeface="Calibri"/>
+              </a:rPr>
+              <a:t>Đối ở câu 3 – 4 và 5 – 6.</a:t>
+            </a:r>
+          </a:p>
+        </p:txBody>
+      </p:sp>
+      <p:sp>
+        <p:nvSpPr>
+          <p:cNvPr id="8" name="Rounded Rectangle 7"/>
+          <p:cNvSpPr/>
+          <p:nvPr/>
+        </p:nvSpPr>
+        <p:spPr>
+          <a:xfrm>
+            <a:off x="731520" y="5074920"/>
+            <a:ext cx="10789920" cy="731520"/>
+          </a:xfrm>
+          <a:prstGeom prst="roundRect">
+            <a:avLst>
+              <a:gd name="adj" fmla="val 8000"/>
+            </a:avLst>
+          </a:prstGeom>
+          <a:solidFill>
+            <a:srgbClr val="FEF2F2"/>
+          </a:solidFill>
+          <a:ln w="19050">
+            <a:solidFill>
+              <a:srgbClr val="991B1B"/>
+            </a:solidFill>
+          </a:ln>
+          <a:effectLst/>
+        </p:spPr>
+        <p:style>
+          <a:lnRef idx="1">
+            <a:schemeClr val="accent1"/>
+          </a:lnRef>
+          <a:fillRef idx="3">
+            <a:schemeClr val="accent1"/>
+          </a:fillRef>
+          <a:effectRef idx="2">
+            <a:schemeClr val="accent1"/>
+          </a:effectRef>
+          <a:fontRef idx="minor">
+            <a:schemeClr val="lt1"/>
+          </a:fontRef>
+        </p:style>
+        <p:txBody>
+          <a:bodyPr rtlCol="0" anchor="ctr"/>
+          <a:lstStyle/>
+          <a:p>
+            <a:pPr algn="ctr"/>
+          </a:p>
+        </p:txBody>
+      </p:sp>
+      <p:sp>
+        <p:nvSpPr>
+          <p:cNvPr id="9" name="TextBox 8"/>
+          <p:cNvSpPr txBox="1"/>
+          <p:nvPr/>
+        </p:nvSpPr>
+        <p:spPr>
+          <a:xfrm>
+            <a:off x="914400" y="5074920"/>
+            <a:ext cx="10424160" cy="731520"/>
+          </a:xfrm>
+          <a:prstGeom prst="rect">
+            <a:avLst/>
+          </a:prstGeom>
+          <a:noFill/>
+        </p:spPr>
+        <p:txBody>
+          <a:bodyPr wrap="square" anchor="ctr" lIns="45720" rIns="45720">
+            <a:spAutoFit/>
+          </a:bodyPr>
+          <a:lstStyle/>
+          <a:p>
+            <a:pPr algn="l">
+              <a:spcAft>
+                <a:spcPts val="400"/>
+              </a:spcAft>
+            </a:pPr>
+            <a:r>
+              <a:rPr sz="2400" b="1">
+                <a:solidFill>
+                  <a:srgbClr val="991B1B"/>
+                </a:solidFill>
+                <a:latin typeface="Calibri"/>
+              </a:rPr>
+              <a:t>Thi luật chặt chẽ, cân đối, hài hoà.</a:t>
             </a:r>
           </a:p>
         </p:txBody>
@@ -8306,7 +7981,7 @@
                 </a:solidFill>
                 <a:latin typeface="Arial"/>
               </a:rPr>
-              <a:t>ĐẶC ĐIỂM THƠ ĐƯỜNG LUẬT</a:t>
+              <a:t>CẢNH THU TRONG BỐN CÂU ĐẦU</a:t>
             </a:r>
           </a:p>
         </p:txBody>
@@ -8424,7 +8099,7 @@
                 </a:solidFill>
                 <a:latin typeface="Calibri"/>
               </a:rPr>
-              <a:t>Mô tả một số đặc điểm cơ bản của thơ Đường luật (bố cục, gieo vần, luật bằng – trắc, phép đối) được thể hiện trong bài Thu hứng.</a:t>
+              <a:t>Những hình ảnh và từ ngữ nào gợi không khí cảnh thu trong bốn câu đầu? Khung cảnh ấy gợi cho bạn ấn tượng gì?</a:t>
             </a:r>
           </a:p>
         </p:txBody>
@@ -8511,7 +8186,7 @@
                 </a:solidFill>
                 <a:latin typeface="Calibri"/>
               </a:rPr>
-              <a:t>💡 Bài thơ có bao nhiêu câu, mỗi câu mấy chữ?</a:t>
+              <a:t>💡 Chú ý không gian cao – thấp, gần – xa.</a:t>
             </a:r>
           </a:p>
         </p:txBody>
@@ -8668,7 +8343,7 @@
                 </a:solidFill>
                 <a:latin typeface="Arial"/>
               </a:rPr>
-              <a:t>ĐẶC ĐIỂM THƠ ĐƯỜNG LUẬT</a:t>
+              <a:t>CẢNH THU TRONG BỐN CÂU ĐẦU</a:t>
             </a:r>
           </a:p>
         </p:txBody>
@@ -8791,7 +8466,7 @@
                 </a:solidFill>
                 <a:latin typeface="Calibri"/>
               </a:rPr>
-              <a:t>Thất ngôn bát cú: 8 câu, mỗi câu 7 chữ.</a:t>
+              <a:t>Rừng phong tiêu điều, sương móc trắng xoá.</a:t>
             </a:r>
           </a:p>
           <a:p>
@@ -8812,7 +8487,7 @@
                 </a:solidFill>
                 <a:latin typeface="Calibri"/>
               </a:rPr>
-              <a:t>Bố cục đề – thực – luận – kết.</a:t>
+              <a:t>Núi Vu, kẽm Vu hơi thu hiu hắt.</a:t>
             </a:r>
           </a:p>
           <a:p>
@@ -8833,28 +8508,7 @@
                 </a:solidFill>
                 <a:latin typeface="Calibri"/>
               </a:rPr>
-              <a:t>Gieo một vần bằng ở câu 1, 2, 4, 6, 8.</a:t>
-            </a:r>
-          </a:p>
-          <a:p>
-            <a:pPr algn="l" marL="365760" indent="-365760">
-              <a:spcAft>
-                <a:spcPts val="800"/>
-              </a:spcAft>
-              <a:buClr>
-                <a:srgbClr val="1E40AF"/>
-              </a:buClr>
-              <a:buFont typeface="Arial"/>
-              <a:buChar char="•"/>
-            </a:pPr>
-            <a:r>
-              <a:rPr sz="2300">
-                <a:solidFill>
-                  <a:srgbClr val="1E293B"/>
-                </a:solidFill>
-                <a:latin typeface="Calibri"/>
-              </a:rPr>
-              <a:t>Đối ở câu 3 – 4 và 5 – 6.</a:t>
+              <a:t>Sóng vọt lưng trời, mây sà mặt đất.</a:t>
             </a:r>
           </a:p>
         </p:txBody>
@@ -8941,7 +8595,7 @@
                 </a:solidFill>
                 <a:latin typeface="Calibri"/>
               </a:rPr>
-              <a:t>Thi luật chặt chẽ, cân đối, hài hoà.</a:t>
+              <a:t>Cảnh thu hùng vĩ mà ảm đạm – gợi thời thế loạn li.</a:t>
             </a:r>
           </a:p>
         </p:txBody>
@@ -9098,7 +8752,7 @@
                 </a:solidFill>
                 <a:latin typeface="Arial"/>
               </a:rPr>
-              <a:t>CẢNH THU TRONG BỐN CÂU ĐẦU</a:t>
+              <a:t>TÂM TRẠNG NHÂN VẬT TRỮ TÌNH</a:t>
             </a:r>
           </a:p>
         </p:txBody>
@@ -9216,7 +8870,7 @@
                 </a:solidFill>
                 <a:latin typeface="Calibri"/>
               </a:rPr>
-              <a:t>Những hình ảnh và từ ngữ nào gợi không khí cảnh thu trong bốn câu đầu? Khung cảnh ấy gợi cho bạn ấn tượng gì?</a:t>
+              <a:t>Qua hai câu 5 – 6 và hai câu kết, người đọc nhận biết được điều gì về nhân vật trữ tình?</a:t>
             </a:r>
           </a:p>
         </p:txBody>
@@ -9303,7 +8957,7 @@
                 </a:solidFill>
                 <a:latin typeface="Calibri"/>
               </a:rPr>
-              <a:t>💡 Chú ý không gian cao – thấp, gần – xa.</a:t>
+              <a:t>💡 “Lệ cũ”, “tình nhà”, tiếng chày đập vải…</a:t>
             </a:r>
           </a:p>
         </p:txBody>
@@ -9460,7 +9114,7 @@
                 </a:solidFill>
                 <a:latin typeface="Arial"/>
               </a:rPr>
-              <a:t>CẢNH THU TRONG BỐN CÂU ĐẦU</a:t>
+              <a:t>TÂM TRẠNG NHÂN VẬT TRỮ TÌNH</a:t>
             </a:r>
           </a:p>
         </p:txBody>
@@ -9583,7 +9237,7 @@
                 </a:solidFill>
                 <a:latin typeface="Calibri"/>
               </a:rPr>
-              <a:t>Rừng phong tiêu điều, sương móc trắng xoá.</a:t>
+              <a:t>Khóm cúc nở hai lần – hai năm xa quê; “lệ cũ” tuôn rơi.</a:t>
             </a:r>
           </a:p>
           <a:p>
@@ -9604,7 +9258,7 @@
                 </a:solidFill>
                 <a:latin typeface="Calibri"/>
               </a:rPr>
-              <a:t>Núi Vu, kẽm Vu hơi thu hiu hắt.</a:t>
+              <a:t>Con thuyền buộc chặt tấm lòng nhớ vườn cũ.</a:t>
             </a:r>
           </a:p>
           <a:p>
@@ -9625,7 +9279,7 @@
                 </a:solidFill>
                 <a:latin typeface="Calibri"/>
               </a:rPr>
-              <a:t>Sóng vọt lưng trời, mây sà mặt đất.</a:t>
+              <a:t>Tiếng dao thước, tiếng chày dồn dập → nỗi nhớ nhà da diết.</a:t>
             </a:r>
           </a:p>
         </p:txBody>
@@ -9712,7 +9366,7 @@
                 </a:solidFill>
                 <a:latin typeface="Calibri"/>
               </a:rPr>
-              <a:t>Cảnh thu hùng vĩ mà ảm đạm – gợi thời thế loạn li.</a:t>
+              <a:t>Nỗi nhớ quê, nỗi buồn thân phận tha hương.</a:t>
             </a:r>
           </a:p>
         </p:txBody>
@@ -10254,7 +9908,7 @@
                 </a:solidFill>
                 <a:latin typeface="Arial"/>
               </a:rPr>
-              <a:t>TÂM TRẠNG NHÂN VẬT TRỮ TÌNH</a:t>
+              <a:t>CHỈ LÀ NỖI NIỀM CÁ NHÂN?</a:t>
             </a:r>
           </a:p>
         </p:txBody>
@@ -10372,7 +10026,7 @@
                 </a:solidFill>
                 <a:latin typeface="Calibri"/>
               </a:rPr>
-              <a:t>Qua hai câu 5 – 6 và hai câu kết, người đọc nhận biết được điều gì về nhân vật trữ tình?</a:t>
+              <a:t>Thu hứng viết trong hoàn cảnh đặc biệt của cuộc đời Đỗ Phủ. Phải chăng tác phẩm chỉ thể hiện nỗi niềm thân phận cá nhân?</a:t>
             </a:r>
           </a:p>
         </p:txBody>
@@ -10459,7 +10113,7 @@
                 </a:solidFill>
                 <a:latin typeface="Calibri"/>
               </a:rPr>
-              <a:t>💡 “Lệ cũ”, “tình nhà”, tiếng chày đập vải…</a:t>
+              <a:t>💡 Liên hệ hoàn cảnh sau loạn An – Sử.</a:t>
             </a:r>
           </a:p>
         </p:txBody>
@@ -10616,7 +10270,7 @@
                 </a:solidFill>
                 <a:latin typeface="Arial"/>
               </a:rPr>
-              <a:t>TÂM TRẠNG NHÂN VẬT TRỮ TÌNH</a:t>
+              <a:t>CHỈ LÀ NỖI NIỀM CÁ NHÂN?</a:t>
             </a:r>
           </a:p>
         </p:txBody>
@@ -10739,7 +10393,7 @@
                 </a:solidFill>
                 <a:latin typeface="Calibri"/>
               </a:rPr>
-              <a:t>Khóm cúc nở hai lần – hai năm xa quê; “lệ cũ” tuôn rơi.</a:t>
+              <a:t>Nỗi niềm cá nhân gắn với nỗi đau thời thế, đất nước loạn li.</a:t>
             </a:r>
           </a:p>
           <a:p>
@@ -10760,7 +10414,7 @@
                 </a:solidFill>
                 <a:latin typeface="Calibri"/>
               </a:rPr>
-              <a:t>Con thuyền buộc chặt tấm lòng nhớ vườn cũ.</a:t>
+              <a:t>Cảnh thu u uất – hình ảnh thời cuộc.</a:t>
             </a:r>
           </a:p>
           <a:p>
@@ -10781,7 +10435,7 @@
                 </a:solidFill>
                 <a:latin typeface="Calibri"/>
               </a:rPr>
-              <a:t>Tiếng dao thước, tiếng chày dồn dập → nỗi nhớ nhà da diết.</a:t>
+              <a:t>Tấm lòng yêu nước, thương đời của Thi thánh.</a:t>
             </a:r>
           </a:p>
         </p:txBody>
@@ -10868,7 +10522,7 @@
                 </a:solidFill>
                 <a:latin typeface="Calibri"/>
               </a:rPr>
-              <a:t>Nỗi nhớ quê, nỗi buồn thân phận tha hương.</a:t>
+              <a:t>Tả cảnh ngụ tình; cá nhân hoà vào thời đại.</a:t>
             </a:r>
           </a:p>
         </p:txBody>
@@ -10887,7 +10541,7 @@
     <p:bg>
       <p:bgPr>
         <a:solidFill>
-          <a:srgbClr val="FFFFFF"/>
+          <a:srgbClr val="F8F9FA"/>
         </a:solidFill>
         <a:effectLst/>
       </p:bgPr>
@@ -10907,14 +10561,14 @@
         </p:nvSpPr>
         <p:spPr>
           <a:xfrm>
-            <a:off x="457200" y="384048"/>
-            <a:ext cx="109728" cy="658368"/>
+            <a:off x="548640" y="2926080"/>
+            <a:ext cx="164592" cy="1005840"/>
           </a:xfrm>
           <a:prstGeom prst="rect">
             <a:avLst/>
           </a:prstGeom>
           <a:solidFill>
-            <a:srgbClr val="1E40AF"/>
+            <a:srgbClr val="991B1B"/>
           </a:solidFill>
           <a:ln>
             <a:noFill/>
@@ -10945,67 +10599,14 @@
       </p:sp>
       <p:sp>
         <p:nvSpPr>
-          <p:cNvPr id="3" name="Rounded Rectangle 2"/>
-          <p:cNvSpPr/>
-          <p:nvPr/>
-        </p:nvSpPr>
-        <p:spPr>
-          <a:xfrm>
-            <a:off x="10253167" y="457200"/>
-            <a:ext cx="1389888" cy="457200"/>
-          </a:xfrm>
-          <a:prstGeom prst="roundRect">
-            <a:avLst/>
-          </a:prstGeom>
-          <a:solidFill>
-            <a:srgbClr val="1E40AF"/>
-          </a:solidFill>
-          <a:ln>
-            <a:noFill/>
-          </a:ln>
-          <a:effectLst/>
-        </p:spPr>
-        <p:style>
-          <a:lnRef idx="1">
-            <a:schemeClr val="accent1"/>
-          </a:lnRef>
-          <a:fillRef idx="3">
-            <a:schemeClr val="accent1"/>
-          </a:fillRef>
-          <a:effectRef idx="2">
-            <a:schemeClr val="accent1"/>
-          </a:effectRef>
-          <a:fontRef idx="minor">
-            <a:schemeClr val="lt1"/>
-          </a:fontRef>
-        </p:style>
-        <p:txBody>
-          <a:bodyPr rtlCol="0" anchor="ctr" wrap="none" tIns="0" bIns="0"/>
-          <a:lstStyle/>
-          <a:p>
-            <a:pPr algn="ctr"/>
-            <a:r>
-              <a:rPr sz="1400" b="1">
-                <a:solidFill>
-                  <a:srgbClr val="FFFFFF"/>
-                </a:solidFill>
-                <a:latin typeface="Arial"/>
-              </a:rPr>
-              <a:t>ĐỀ BÀI</a:t>
-            </a:r>
-          </a:p>
-        </p:txBody>
-      </p:sp>
-      <p:sp>
-        <p:nvSpPr>
-          <p:cNvPr id="4" name="TextBox 3"/>
+          <p:cNvPr id="3" name="TextBox 2"/>
           <p:cNvSpPr txBox="1"/>
           <p:nvPr/>
         </p:nvSpPr>
         <p:spPr>
           <a:xfrm>
-            <a:off x="731520" y="274320"/>
-            <a:ext cx="9582912" cy="868680"/>
+            <a:off x="914400" y="2743200"/>
+            <a:ext cx="10515600" cy="1371600"/>
           </a:xfrm>
           <a:prstGeom prst="rect">
             <a:avLst/>
@@ -11013,120 +10614,7 @@
           <a:noFill/>
         </p:spPr>
         <p:txBody>
-          <a:bodyPr wrap="square" anchor="ctr">
-            <a:spAutoFit/>
-          </a:bodyPr>
-          <a:lstStyle/>
-          <a:p>
-            <a:r>
-              <a:rPr sz="3600" b="1">
-                <a:solidFill>
-                  <a:srgbClr val="1E40AF"/>
-                </a:solidFill>
-                <a:latin typeface="Arial"/>
-              </a:rPr>
-              <a:t>CHỈ LÀ NỖI NIỀM CÁ NHÂN?</a:t>
-            </a:r>
-          </a:p>
-        </p:txBody>
-      </p:sp>
-      <p:sp>
-        <p:nvSpPr>
-          <p:cNvPr id="5" name="Rectangle 4"/>
-          <p:cNvSpPr/>
-          <p:nvPr/>
-        </p:nvSpPr>
-        <p:spPr>
-          <a:xfrm>
-            <a:off x="457200" y="1207008"/>
-            <a:ext cx="11274552" cy="22000"/>
-          </a:xfrm>
-          <a:prstGeom prst="rect">
-            <a:avLst/>
-          </a:prstGeom>
-          <a:solidFill>
-            <a:srgbClr val="E2E8F0"/>
-          </a:solidFill>
-          <a:ln>
-            <a:noFill/>
-          </a:ln>
-          <a:effectLst/>
-        </p:spPr>
-        <p:style>
-          <a:lnRef idx="1">
-            <a:schemeClr val="accent1"/>
-          </a:lnRef>
-          <a:fillRef idx="3">
-            <a:schemeClr val="accent1"/>
-          </a:fillRef>
-          <a:effectRef idx="2">
-            <a:schemeClr val="accent1"/>
-          </a:effectRef>
-          <a:fontRef idx="minor">
-            <a:schemeClr val="lt1"/>
-          </a:fontRef>
-        </p:style>
-        <p:txBody>
-          <a:bodyPr rtlCol="0" anchor="ctr"/>
-          <a:lstStyle/>
-          <a:p>
-            <a:pPr algn="ctr"/>
-          </a:p>
-        </p:txBody>
-      </p:sp>
-      <p:sp>
-        <p:nvSpPr>
-          <p:cNvPr id="6" name="TextBox 5"/>
-          <p:cNvSpPr txBox="1"/>
-          <p:nvPr/>
-        </p:nvSpPr>
-        <p:spPr>
-          <a:xfrm>
-            <a:off x="457200" y="6355080"/>
-            <a:ext cx="11274552" cy="365760"/>
-          </a:xfrm>
-          <a:prstGeom prst="rect">
-            <a:avLst/>
-          </a:prstGeom>
-          <a:noFill/>
-        </p:spPr>
-        <p:txBody>
-          <a:bodyPr wrap="none">
-            <a:spAutoFit/>
-          </a:bodyPr>
-          <a:lstStyle/>
-          <a:p>
-            <a:pPr algn="r"/>
-            <a:r>
-              <a:rPr sz="1200">
-                <a:solidFill>
-                  <a:srgbClr val="64748B"/>
-                </a:solidFill>
-                <a:latin typeface="Calibri"/>
-              </a:rPr>
-              <a:t>Ngữ văn 10 · Bài 2: Vẻ Đẹp Của Thơ Ca          22</a:t>
-            </a:r>
-          </a:p>
-        </p:txBody>
-      </p:sp>
-      <p:sp>
-        <p:nvSpPr>
-          <p:cNvPr id="7" name="TextBox 6"/>
-          <p:cNvSpPr txBox="1"/>
-          <p:nvPr/>
-        </p:nvSpPr>
-        <p:spPr>
-          <a:xfrm>
-            <a:off x="731520" y="1463040"/>
-            <a:ext cx="10789920" cy="3566160"/>
-          </a:xfrm>
-          <a:prstGeom prst="rect">
-            <a:avLst/>
-          </a:prstGeom>
-          <a:noFill/>
-        </p:spPr>
-        <p:txBody>
-          <a:bodyPr wrap="square" anchor="t" lIns="45720" rIns="45720">
+          <a:bodyPr wrap="square" anchor="ctr" lIns="45720" rIns="45720">
             <a:spAutoFit/>
           </a:bodyPr>
           <a:lstStyle/>
@@ -11137,100 +10625,13 @@
               </a:spcAft>
             </a:pPr>
             <a:r>
-              <a:rPr sz="2600" b="1">
-                <a:solidFill>
-                  <a:srgbClr val="1E293B"/>
+              <a:rPr sz="3600" b="1">
+                <a:solidFill>
+                  <a:srgbClr val="1E40AF"/>
                 </a:solidFill>
                 <a:latin typeface="Calibri"/>
               </a:rPr>
-              <a:t>Thu hứng viết trong hoàn cảnh đặc biệt của cuộc đời Đỗ Phủ. Phải chăng tác phẩm chỉ thể hiện nỗi niềm thân phận cá nhân?</a:t>
-            </a:r>
-          </a:p>
-        </p:txBody>
-      </p:sp>
-      <p:sp>
-        <p:nvSpPr>
-          <p:cNvPr id="8" name="Rounded Rectangle 7"/>
-          <p:cNvSpPr/>
-          <p:nvPr/>
-        </p:nvSpPr>
-        <p:spPr>
-          <a:xfrm>
-            <a:off x="731520" y="5120640"/>
-            <a:ext cx="10789920" cy="693420"/>
-          </a:xfrm>
-          <a:prstGeom prst="roundRect">
-            <a:avLst>
-              <a:gd name="adj" fmla="val 8000"/>
-            </a:avLst>
-          </a:prstGeom>
-          <a:solidFill>
-            <a:srgbClr val="EFF4FF"/>
-          </a:solidFill>
-          <a:ln w="19050">
-            <a:solidFill>
-              <a:srgbClr val="1E40AF"/>
-            </a:solidFill>
-          </a:ln>
-          <a:effectLst/>
-        </p:spPr>
-        <p:style>
-          <a:lnRef idx="1">
-            <a:schemeClr val="accent1"/>
-          </a:lnRef>
-          <a:fillRef idx="3">
-            <a:schemeClr val="accent1"/>
-          </a:fillRef>
-          <a:effectRef idx="2">
-            <a:schemeClr val="accent1"/>
-          </a:effectRef>
-          <a:fontRef idx="minor">
-            <a:schemeClr val="lt1"/>
-          </a:fontRef>
-        </p:style>
-        <p:txBody>
-          <a:bodyPr rtlCol="0" anchor="ctr"/>
-          <a:lstStyle/>
-          <a:p>
-            <a:pPr algn="ctr"/>
-          </a:p>
-        </p:txBody>
-      </p:sp>
-      <p:sp>
-        <p:nvSpPr>
-          <p:cNvPr id="9" name="TextBox 8"/>
-          <p:cNvSpPr txBox="1"/>
-          <p:nvPr/>
-        </p:nvSpPr>
-        <p:spPr>
-          <a:xfrm>
-            <a:off x="914400" y="5120640"/>
-            <a:ext cx="10424160" cy="693420"/>
-          </a:xfrm>
-          <a:prstGeom prst="rect">
-            <a:avLst/>
-          </a:prstGeom>
-          <a:noFill/>
-        </p:spPr>
-        <p:txBody>
-          <a:bodyPr wrap="square" anchor="ctr" lIns="45720" rIns="45720">
-            <a:spAutoFit/>
-          </a:bodyPr>
-          <a:lstStyle/>
-          <a:p>
-            <a:pPr algn="l">
-              <a:spcAft>
-                <a:spcPts val="400"/>
-              </a:spcAft>
-            </a:pPr>
-            <a:r>
-              <a:rPr sz="2200" b="1">
-                <a:solidFill>
-                  <a:srgbClr val="1E40AF"/>
-                </a:solidFill>
-                <a:latin typeface="Calibri"/>
-              </a:rPr>
-              <a:t>💡 Liên hệ hoàn cảnh sau loạn An – Sử.</a:t>
+              <a:t>TIẾT 15 – 16: MÙA XUÂN CHÍN (Hàn Mặc Tử)</a:t>
             </a:r>
           </a:p>
         </p:txBody>
@@ -11313,14 +10714,14 @@
         </p:nvSpPr>
         <p:spPr>
           <a:xfrm>
-            <a:off x="9942271" y="457200"/>
-            <a:ext cx="1700784" cy="457200"/>
+            <a:off x="9786823" y="457200"/>
+            <a:ext cx="1856232" cy="457200"/>
           </a:xfrm>
           <a:prstGeom prst="roundRect">
             <a:avLst/>
           </a:prstGeom>
           <a:solidFill>
-            <a:srgbClr val="991B1B"/>
+            <a:srgbClr val="1E40AF"/>
           </a:solidFill>
           <a:ln>
             <a:noFill/>
@@ -11353,7 +10754,7 @@
                 </a:solidFill>
                 <a:latin typeface="Arial"/>
               </a:rPr>
-              <a:t>LỜI GIẢI</a:t>
+              <a:t>KHỞI ĐỘNG</a:t>
             </a:r>
           </a:p>
         </p:txBody>
@@ -11367,7 +10768,7 @@
         <p:spPr>
           <a:xfrm>
             <a:off x="731520" y="274320"/>
-            <a:ext cx="9272016" cy="868680"/>
+            <a:ext cx="9116568" cy="868680"/>
           </a:xfrm>
           <a:prstGeom prst="rect">
             <a:avLst/>
@@ -11387,7 +10788,7 @@
                 </a:solidFill>
                 <a:latin typeface="Arial"/>
               </a:rPr>
-              <a:t>CHỈ LÀ NỖI NIỀM CÁ NHÂN?</a:t>
+              <a:t>TRƯỚC KHI ĐỌC</a:t>
             </a:r>
           </a:p>
         </p:txBody>
@@ -11480,7 +10881,7 @@
         <p:spPr>
           <a:xfrm>
             <a:off x="731520" y="1463040"/>
-            <a:ext cx="10789920" cy="3474720"/>
+            <a:ext cx="10789920" cy="4572000"/>
           </a:xfrm>
           <a:prstGeom prst="rect">
             <a:avLst/>
@@ -11493,153 +10894,35 @@
           </a:bodyPr>
           <a:lstStyle/>
           <a:p>
-            <a:pPr algn="l" marL="365760" indent="-365760">
+            <a:pPr algn="l">
               <a:spcAft>
                 <a:spcPts val="800"/>
               </a:spcAft>
-              <a:buClr>
-                <a:srgbClr val="1E40AF"/>
-              </a:buClr>
-              <a:buFont typeface="Arial"/>
-              <a:buChar char="•"/>
             </a:pPr>
             <a:r>
-              <a:rPr sz="2300">
+              <a:rPr sz="2600" b="1">
                 <a:solidFill>
                   <a:srgbClr val="1E293B"/>
                 </a:solidFill>
                 <a:latin typeface="Calibri"/>
               </a:rPr>
-              <a:t>Nỗi niềm cá nhân gắn với nỗi đau thời thế, đất nước loạn li.</a:t>
-            </a:r>
-          </a:p>
-          <a:p>
-            <a:pPr algn="l" marL="365760" indent="-365760">
+              <a:t>Bạn nhớ những bài thơ, câu thơ nào về mùa xuân?</a:t>
+            </a:r>
+          </a:p>
+          <a:p>
+            <a:pPr algn="l">
               <a:spcAft>
                 <a:spcPts val="800"/>
               </a:spcAft>
-              <a:buClr>
-                <a:srgbClr val="1E40AF"/>
-              </a:buClr>
-              <a:buFont typeface="Arial"/>
-              <a:buChar char="•"/>
             </a:pPr>
             <a:r>
-              <a:rPr sz="2300">
+              <a:rPr sz="2600" b="1">
                 <a:solidFill>
                   <a:srgbClr val="1E293B"/>
                 </a:solidFill>
                 <a:latin typeface="Calibri"/>
               </a:rPr>
-              <a:t>Cảnh thu u uất – hình ảnh thời cuộc.</a:t>
-            </a:r>
-          </a:p>
-          <a:p>
-            <a:pPr algn="l" marL="365760" indent="-365760">
-              <a:spcAft>
-                <a:spcPts val="800"/>
-              </a:spcAft>
-              <a:buClr>
-                <a:srgbClr val="1E40AF"/>
-              </a:buClr>
-              <a:buFont typeface="Arial"/>
-              <a:buChar char="•"/>
-            </a:pPr>
-            <a:r>
-              <a:rPr sz="2300">
-                <a:solidFill>
-                  <a:srgbClr val="1E293B"/>
-                </a:solidFill>
-                <a:latin typeface="Calibri"/>
-              </a:rPr>
-              <a:t>Tấm lòng yêu nước, thương đời của Thi thánh.</a:t>
-            </a:r>
-          </a:p>
-        </p:txBody>
-      </p:sp>
-      <p:sp>
-        <p:nvSpPr>
-          <p:cNvPr id="8" name="Rounded Rectangle 7"/>
-          <p:cNvSpPr/>
-          <p:nvPr/>
-        </p:nvSpPr>
-        <p:spPr>
-          <a:xfrm>
-            <a:off x="731520" y="5074920"/>
-            <a:ext cx="10789920" cy="731520"/>
-          </a:xfrm>
-          <a:prstGeom prst="roundRect">
-            <a:avLst>
-              <a:gd name="adj" fmla="val 8000"/>
-            </a:avLst>
-          </a:prstGeom>
-          <a:solidFill>
-            <a:srgbClr val="FEF2F2"/>
-          </a:solidFill>
-          <a:ln w="19050">
-            <a:solidFill>
-              <a:srgbClr val="991B1B"/>
-            </a:solidFill>
-          </a:ln>
-          <a:effectLst/>
-        </p:spPr>
-        <p:style>
-          <a:lnRef idx="1">
-            <a:schemeClr val="accent1"/>
-          </a:lnRef>
-          <a:fillRef idx="3">
-            <a:schemeClr val="accent1"/>
-          </a:fillRef>
-          <a:effectRef idx="2">
-            <a:schemeClr val="accent1"/>
-          </a:effectRef>
-          <a:fontRef idx="minor">
-            <a:schemeClr val="lt1"/>
-          </a:fontRef>
-        </p:style>
-        <p:txBody>
-          <a:bodyPr rtlCol="0" anchor="ctr"/>
-          <a:lstStyle/>
-          <a:p>
-            <a:pPr algn="ctr"/>
-          </a:p>
-        </p:txBody>
-      </p:sp>
-      <p:sp>
-        <p:nvSpPr>
-          <p:cNvPr id="9" name="TextBox 8"/>
-          <p:cNvSpPr txBox="1"/>
-          <p:nvPr/>
-        </p:nvSpPr>
-        <p:spPr>
-          <a:xfrm>
-            <a:off x="914400" y="5074920"/>
-            <a:ext cx="10424160" cy="731520"/>
-          </a:xfrm>
-          <a:prstGeom prst="rect">
-            <a:avLst/>
-          </a:prstGeom>
-          <a:noFill/>
-        </p:spPr>
-        <p:txBody>
-          <a:bodyPr wrap="square" anchor="ctr" lIns="45720" rIns="45720">
-            <a:spAutoFit/>
-          </a:bodyPr>
-          <a:lstStyle/>
-          <a:p>
-            <a:pPr algn="l">
-              <a:spcAft>
-                <a:spcPts val="400"/>
-              </a:spcAft>
-            </a:pPr>
-            <a:r>
-              <a:rPr sz="2400" b="1">
-                <a:solidFill>
-                  <a:srgbClr val="991B1B"/>
-                </a:solidFill>
-                <a:latin typeface="Calibri"/>
-              </a:rPr>
-              <a:t>Tả cảnh ngụ tình; cá nhân hoà vào thời đại.</a:t>
+              <a:t>Điều gì khiến bạn ấn tượng ở những câu thơ ấy?</a:t>
             </a:r>
           </a:p>
         </p:txBody>
@@ -11658,7 +10941,7 @@
     <p:bg>
       <p:bgPr>
         <a:solidFill>
-          <a:srgbClr val="F8F9FA"/>
+          <a:srgbClr val="FFFFFF"/>
         </a:solidFill>
         <a:effectLst/>
       </p:bgPr>
@@ -11678,14 +10961,14 @@
         </p:nvSpPr>
         <p:spPr>
           <a:xfrm>
-            <a:off x="548640" y="2926080"/>
-            <a:ext cx="164592" cy="1005840"/>
+            <a:off x="457200" y="384048"/>
+            <a:ext cx="109728" cy="658368"/>
           </a:xfrm>
           <a:prstGeom prst="rect">
             <a:avLst/>
           </a:prstGeom>
           <a:solidFill>
-            <a:srgbClr val="991B1B"/>
+            <a:srgbClr val="1E40AF"/>
           </a:solidFill>
           <a:ln>
             <a:noFill/>
@@ -11716,14 +10999,67 @@
       </p:sp>
       <p:sp>
         <p:nvSpPr>
-          <p:cNvPr id="3" name="TextBox 2"/>
+          <p:cNvPr id="3" name="Rounded Rectangle 2"/>
+          <p:cNvSpPr/>
+          <p:nvPr/>
+        </p:nvSpPr>
+        <p:spPr>
+          <a:xfrm>
+            <a:off x="10253167" y="457200"/>
+            <a:ext cx="1389888" cy="457200"/>
+          </a:xfrm>
+          <a:prstGeom prst="roundRect">
+            <a:avLst/>
+          </a:prstGeom>
+          <a:solidFill>
+            <a:srgbClr val="1E40AF"/>
+          </a:solidFill>
+          <a:ln>
+            <a:noFill/>
+          </a:ln>
+          <a:effectLst/>
+        </p:spPr>
+        <p:style>
+          <a:lnRef idx="1">
+            <a:schemeClr val="accent1"/>
+          </a:lnRef>
+          <a:fillRef idx="3">
+            <a:schemeClr val="accent1"/>
+          </a:fillRef>
+          <a:effectRef idx="2">
+            <a:schemeClr val="accent1"/>
+          </a:effectRef>
+          <a:fontRef idx="minor">
+            <a:schemeClr val="lt1"/>
+          </a:fontRef>
+        </p:style>
+        <p:txBody>
+          <a:bodyPr rtlCol="0" anchor="ctr" wrap="none" tIns="0" bIns="0"/>
+          <a:lstStyle/>
+          <a:p>
+            <a:pPr algn="ctr"/>
+            <a:r>
+              <a:rPr sz="1400" b="1">
+                <a:solidFill>
+                  <a:srgbClr val="FFFFFF"/>
+                </a:solidFill>
+                <a:latin typeface="Arial"/>
+              </a:rPr>
+              <a:t>ĐỀ BÀI</a:t>
+            </a:r>
+          </a:p>
+        </p:txBody>
+      </p:sp>
+      <p:sp>
+        <p:nvSpPr>
+          <p:cNvPr id="4" name="TextBox 3"/>
           <p:cNvSpPr txBox="1"/>
           <p:nvPr/>
         </p:nvSpPr>
         <p:spPr>
           <a:xfrm>
-            <a:off x="914400" y="2743200"/>
-            <a:ext cx="10515600" cy="1371600"/>
+            <a:off x="731520" y="274320"/>
+            <a:ext cx="9582912" cy="868680"/>
           </a:xfrm>
           <a:prstGeom prst="rect">
             <a:avLst/>
@@ -11731,7 +11067,120 @@
           <a:noFill/>
         </p:spPr>
         <p:txBody>
-          <a:bodyPr wrap="square" anchor="ctr" lIns="45720" rIns="45720">
+          <a:bodyPr wrap="square" anchor="ctr">
+            <a:spAutoFit/>
+          </a:bodyPr>
+          <a:lstStyle/>
+          <a:p>
+            <a:r>
+              <a:rPr sz="3600" b="1">
+                <a:solidFill>
+                  <a:srgbClr val="1E40AF"/>
+                </a:solidFill>
+                <a:latin typeface="Arial"/>
+              </a:rPr>
+              <a:t>NHAN ĐỀ VÀ TRẠNG THÁI “CHÍN”</a:t>
+            </a:r>
+          </a:p>
+        </p:txBody>
+      </p:sp>
+      <p:sp>
+        <p:nvSpPr>
+          <p:cNvPr id="5" name="Rectangle 4"/>
+          <p:cNvSpPr/>
+          <p:nvPr/>
+        </p:nvSpPr>
+        <p:spPr>
+          <a:xfrm>
+            <a:off x="457200" y="1207008"/>
+            <a:ext cx="11274552" cy="22000"/>
+          </a:xfrm>
+          <a:prstGeom prst="rect">
+            <a:avLst/>
+          </a:prstGeom>
+          <a:solidFill>
+            <a:srgbClr val="E2E8F0"/>
+          </a:solidFill>
+          <a:ln>
+            <a:noFill/>
+          </a:ln>
+          <a:effectLst/>
+        </p:spPr>
+        <p:style>
+          <a:lnRef idx="1">
+            <a:schemeClr val="accent1"/>
+          </a:lnRef>
+          <a:fillRef idx="3">
+            <a:schemeClr val="accent1"/>
+          </a:fillRef>
+          <a:effectRef idx="2">
+            <a:schemeClr val="accent1"/>
+          </a:effectRef>
+          <a:fontRef idx="minor">
+            <a:schemeClr val="lt1"/>
+          </a:fontRef>
+        </p:style>
+        <p:txBody>
+          <a:bodyPr rtlCol="0" anchor="ctr"/>
+          <a:lstStyle/>
+          <a:p>
+            <a:pPr algn="ctr"/>
+          </a:p>
+        </p:txBody>
+      </p:sp>
+      <p:sp>
+        <p:nvSpPr>
+          <p:cNvPr id="6" name="TextBox 5"/>
+          <p:cNvSpPr txBox="1"/>
+          <p:nvPr/>
+        </p:nvSpPr>
+        <p:spPr>
+          <a:xfrm>
+            <a:off x="457200" y="6355080"/>
+            <a:ext cx="11274552" cy="365760"/>
+          </a:xfrm>
+          <a:prstGeom prst="rect">
+            <a:avLst/>
+          </a:prstGeom>
+          <a:noFill/>
+        </p:spPr>
+        <p:txBody>
+          <a:bodyPr wrap="none">
+            <a:spAutoFit/>
+          </a:bodyPr>
+          <a:lstStyle/>
+          <a:p>
+            <a:pPr algn="r"/>
+            <a:r>
+              <a:rPr sz="1200">
+                <a:solidFill>
+                  <a:srgbClr val="64748B"/>
+                </a:solidFill>
+                <a:latin typeface="Calibri"/>
+              </a:rPr>
+              <a:t>Ngữ văn 10 · Bài 2: Vẻ Đẹp Của Thơ Ca          24</a:t>
+            </a:r>
+          </a:p>
+        </p:txBody>
+      </p:sp>
+      <p:sp>
+        <p:nvSpPr>
+          <p:cNvPr id="7" name="TextBox 6"/>
+          <p:cNvSpPr txBox="1"/>
+          <p:nvPr/>
+        </p:nvSpPr>
+        <p:spPr>
+          <a:xfrm>
+            <a:off x="731520" y="1463040"/>
+            <a:ext cx="10789920" cy="3566160"/>
+          </a:xfrm>
+          <a:prstGeom prst="rect">
+            <a:avLst/>
+          </a:prstGeom>
+          <a:noFill/>
+        </p:spPr>
+        <p:txBody>
+          <a:bodyPr wrap="square" anchor="t" lIns="45720" rIns="45720">
             <a:spAutoFit/>
           </a:bodyPr>
           <a:lstStyle/>
@@ -11742,13 +11191,100 @@
               </a:spcAft>
             </a:pPr>
             <a:r>
-              <a:rPr sz="3600" b="1">
+              <a:rPr sz="2600" b="1">
+                <a:solidFill>
+                  <a:srgbClr val="1E293B"/>
+                </a:solidFill>
+                <a:latin typeface="Calibri"/>
+              </a:rPr>
+              <a:t>Nhan đề Mùa xuân chín được cấu tạo bởi những từ thuộc từ loại nào, gợi liên tưởng gì? Trạng thái “chín” được thể hiện bằng những từ ngữ nào?</a:t>
+            </a:r>
+          </a:p>
+        </p:txBody>
+      </p:sp>
+      <p:sp>
+        <p:nvSpPr>
+          <p:cNvPr id="8" name="Rounded Rectangle 7"/>
+          <p:cNvSpPr/>
+          <p:nvPr/>
+        </p:nvSpPr>
+        <p:spPr>
+          <a:xfrm>
+            <a:off x="731520" y="5120640"/>
+            <a:ext cx="10789920" cy="693420"/>
+          </a:xfrm>
+          <a:prstGeom prst="roundRect">
+            <a:avLst>
+              <a:gd name="adj" fmla="val 8000"/>
+            </a:avLst>
+          </a:prstGeom>
+          <a:solidFill>
+            <a:srgbClr val="EFF4FF"/>
+          </a:solidFill>
+          <a:ln w="19050">
+            <a:solidFill>
+              <a:srgbClr val="1E40AF"/>
+            </a:solidFill>
+          </a:ln>
+          <a:effectLst/>
+        </p:spPr>
+        <p:style>
+          <a:lnRef idx="1">
+            <a:schemeClr val="accent1"/>
+          </a:lnRef>
+          <a:fillRef idx="3">
+            <a:schemeClr val="accent1"/>
+          </a:fillRef>
+          <a:effectRef idx="2">
+            <a:schemeClr val="accent1"/>
+          </a:effectRef>
+          <a:fontRef idx="minor">
+            <a:schemeClr val="lt1"/>
+          </a:fontRef>
+        </p:style>
+        <p:txBody>
+          <a:bodyPr rtlCol="0" anchor="ctr"/>
+          <a:lstStyle/>
+          <a:p>
+            <a:pPr algn="ctr"/>
+          </a:p>
+        </p:txBody>
+      </p:sp>
+      <p:sp>
+        <p:nvSpPr>
+          <p:cNvPr id="9" name="TextBox 8"/>
+          <p:cNvSpPr txBox="1"/>
+          <p:nvPr/>
+        </p:nvSpPr>
+        <p:spPr>
+          <a:xfrm>
+            <a:off x="914400" y="5120640"/>
+            <a:ext cx="10424160" cy="693420"/>
+          </a:xfrm>
+          <a:prstGeom prst="rect">
+            <a:avLst/>
+          </a:prstGeom>
+          <a:noFill/>
+        </p:spPr>
+        <p:txBody>
+          <a:bodyPr wrap="square" anchor="ctr" lIns="45720" rIns="45720">
+            <a:spAutoFit/>
+          </a:bodyPr>
+          <a:lstStyle/>
+          <a:p>
+            <a:pPr algn="l">
+              <a:spcAft>
+                <a:spcPts val="400"/>
+              </a:spcAft>
+            </a:pPr>
+            <a:r>
+              <a:rPr sz="2200" b="1">
                 <a:solidFill>
                   <a:srgbClr val="1E40AF"/>
                 </a:solidFill>
                 <a:latin typeface="Calibri"/>
               </a:rPr>
-              <a:t>TIẾT 15 – 16: MÙA XUÂN CHÍN (Hàn Mặc Tử)</a:t>
+              <a:t>💡 “Chín” thường dùng cho sự vật nào?</a:t>
             </a:r>
           </a:p>
         </p:txBody>
@@ -11831,14 +11367,14 @@
         </p:nvSpPr>
         <p:spPr>
           <a:xfrm>
-            <a:off x="9786823" y="457200"/>
-            <a:ext cx="1856232" cy="457200"/>
+            <a:off x="9942271" y="457200"/>
+            <a:ext cx="1700784" cy="457200"/>
           </a:xfrm>
           <a:prstGeom prst="roundRect">
             <a:avLst/>
           </a:prstGeom>
           <a:solidFill>
-            <a:srgbClr val="1E40AF"/>
+            <a:srgbClr val="991B1B"/>
           </a:solidFill>
           <a:ln>
             <a:noFill/>
@@ -11871,7 +11407,7 @@
                 </a:solidFill>
                 <a:latin typeface="Arial"/>
               </a:rPr>
-              <a:t>KHỞI ĐỘNG</a:t>
+              <a:t>LỜI GIẢI</a:t>
             </a:r>
           </a:p>
         </p:txBody>
@@ -11885,7 +11421,7 @@
         <p:spPr>
           <a:xfrm>
             <a:off x="731520" y="274320"/>
-            <a:ext cx="9116568" cy="868680"/>
+            <a:ext cx="9272016" cy="868680"/>
           </a:xfrm>
           <a:prstGeom prst="rect">
             <a:avLst/>
@@ -11905,7 +11441,7 @@
                 </a:solidFill>
                 <a:latin typeface="Arial"/>
               </a:rPr>
-              <a:t>TRƯỚC KHI ĐỌC</a:t>
+              <a:t>NHAN ĐỀ VÀ TRẠNG THÁI “CHÍN”</a:t>
             </a:r>
           </a:p>
         </p:txBody>
@@ -11998,7 +11534,7 @@
         <p:spPr>
           <a:xfrm>
             <a:off x="731520" y="1463040"/>
-            <a:ext cx="10789920" cy="4572000"/>
+            <a:ext cx="10789920" cy="3474720"/>
           </a:xfrm>
           <a:prstGeom prst="rect">
             <a:avLst/>
@@ -12011,35 +11547,153 @@
           </a:bodyPr>
           <a:lstStyle/>
           <a:p>
-            <a:pPr algn="l">
+            <a:pPr algn="l" marL="365760" indent="-365760">
               <a:spcAft>
                 <a:spcPts val="800"/>
               </a:spcAft>
+              <a:buClr>
+                <a:srgbClr val="1E40AF"/>
+              </a:buClr>
+              <a:buFont typeface="Arial"/>
+              <a:buChar char="•"/>
             </a:pPr>
             <a:r>
-              <a:rPr sz="2600" b="1">
+              <a:rPr sz="2300">
                 <a:solidFill>
                   <a:srgbClr val="1E293B"/>
                 </a:solidFill>
                 <a:latin typeface="Calibri"/>
               </a:rPr>
-              <a:t>Bạn nhớ những bài thơ, câu thơ nào về mùa xuân?</a:t>
-            </a:r>
-          </a:p>
-          <a:p>
-            <a:pPr algn="l">
+              <a:t>Danh từ “mùa xuân” + tính từ “chín”.</a:t>
+            </a:r>
+          </a:p>
+          <a:p>
+            <a:pPr algn="l" marL="365760" indent="-365760">
               <a:spcAft>
                 <a:spcPts val="800"/>
               </a:spcAft>
+              <a:buClr>
+                <a:srgbClr val="1E40AF"/>
+              </a:buClr>
+              <a:buFont typeface="Arial"/>
+              <a:buChar char="•"/>
             </a:pPr>
             <a:r>
-              <a:rPr sz="2600" b="1">
+              <a:rPr sz="2300">
                 <a:solidFill>
                   <a:srgbClr val="1E293B"/>
                 </a:solidFill>
                 <a:latin typeface="Calibri"/>
               </a:rPr>
-              <a:t>Điều gì khiến bạn ấn tượng ở những câu thơ ấy?</a:t>
+              <a:t>Gợi mùa xuân viên mãn, căng tràn như trái chín.</a:t>
+            </a:r>
+          </a:p>
+          <a:p>
+            <a:pPr algn="l" marL="365760" indent="-365760">
+              <a:spcAft>
+                <a:spcPts val="800"/>
+              </a:spcAft>
+              <a:buClr>
+                <a:srgbClr val="1E40AF"/>
+              </a:buClr>
+              <a:buFont typeface="Arial"/>
+              <a:buChar char="•"/>
+            </a:pPr>
+            <a:r>
+              <a:rPr sz="2300">
+                <a:solidFill>
+                  <a:srgbClr val="1E293B"/>
+                </a:solidFill>
+                <a:latin typeface="Calibri"/>
+              </a:rPr>
+              <a:t>“lấm tấm vàng”, “bóng xuân sang”, “sóng cỏ xanh tươi gợn tới trời”.</a:t>
+            </a:r>
+          </a:p>
+        </p:txBody>
+      </p:sp>
+      <p:sp>
+        <p:nvSpPr>
+          <p:cNvPr id="8" name="Rounded Rectangle 7"/>
+          <p:cNvSpPr/>
+          <p:nvPr/>
+        </p:nvSpPr>
+        <p:spPr>
+          <a:xfrm>
+            <a:off x="731520" y="5074920"/>
+            <a:ext cx="10789920" cy="731520"/>
+          </a:xfrm>
+          <a:prstGeom prst="roundRect">
+            <a:avLst>
+              <a:gd name="adj" fmla="val 8000"/>
+            </a:avLst>
+          </a:prstGeom>
+          <a:solidFill>
+            <a:srgbClr val="FEF2F2"/>
+          </a:solidFill>
+          <a:ln w="19050">
+            <a:solidFill>
+              <a:srgbClr val="991B1B"/>
+            </a:solidFill>
+          </a:ln>
+          <a:effectLst/>
+        </p:spPr>
+        <p:style>
+          <a:lnRef idx="1">
+            <a:schemeClr val="accent1"/>
+          </a:lnRef>
+          <a:fillRef idx="3">
+            <a:schemeClr val="accent1"/>
+          </a:fillRef>
+          <a:effectRef idx="2">
+            <a:schemeClr val="accent1"/>
+          </a:effectRef>
+          <a:fontRef idx="minor">
+            <a:schemeClr val="lt1"/>
+          </a:fontRef>
+        </p:style>
+        <p:txBody>
+          <a:bodyPr rtlCol="0" anchor="ctr"/>
+          <a:lstStyle/>
+          <a:p>
+            <a:pPr algn="ctr"/>
+          </a:p>
+        </p:txBody>
+      </p:sp>
+      <p:sp>
+        <p:nvSpPr>
+          <p:cNvPr id="9" name="TextBox 8"/>
+          <p:cNvSpPr txBox="1"/>
+          <p:nvPr/>
+        </p:nvSpPr>
+        <p:spPr>
+          <a:xfrm>
+            <a:off x="914400" y="5074920"/>
+            <a:ext cx="10424160" cy="731520"/>
+          </a:xfrm>
+          <a:prstGeom prst="rect">
+            <a:avLst/>
+          </a:prstGeom>
+          <a:noFill/>
+        </p:spPr>
+        <p:txBody>
+          <a:bodyPr wrap="square" anchor="ctr" lIns="45720" rIns="45720">
+            <a:spAutoFit/>
+          </a:bodyPr>
+          <a:lstStyle/>
+          <a:p>
+            <a:pPr algn="l">
+              <a:spcAft>
+                <a:spcPts val="400"/>
+              </a:spcAft>
+            </a:pPr>
+            <a:r>
+              <a:rPr sz="2400" b="1">
+                <a:solidFill>
+                  <a:srgbClr val="991B1B"/>
+                </a:solidFill>
+                <a:latin typeface="Calibri"/>
+              </a:rPr>
+              <a:t>Mùa xuân ở độ đẹp nhất, rạo rực nhất.</a:t>
             </a:r>
           </a:p>
         </p:txBody>
@@ -12122,14 +11776,14 @@
         </p:nvSpPr>
         <p:spPr>
           <a:xfrm>
-            <a:off x="10408615" y="457200"/>
-            <a:ext cx="1234440" cy="457200"/>
+            <a:off x="10253167" y="457200"/>
+            <a:ext cx="1389888" cy="457200"/>
           </a:xfrm>
           <a:prstGeom prst="roundRect">
             <a:avLst/>
           </a:prstGeom>
           <a:solidFill>
-            <a:srgbClr val="991B1B"/>
+            <a:srgbClr val="1E40AF"/>
           </a:solidFill>
           <a:ln>
             <a:noFill/>
@@ -12162,7 +11816,7 @@
                 </a:solidFill>
                 <a:latin typeface="Arial"/>
               </a:rPr>
-              <a:t>VIDEO</a:t>
+              <a:t>ĐỀ BÀI</a:t>
             </a:r>
           </a:p>
         </p:txBody>
@@ -12176,7 +11830,7 @@
         <p:spPr>
           <a:xfrm>
             <a:off x="731520" y="274320"/>
-            <a:ext cx="9738360" cy="868680"/>
+            <a:ext cx="9582912" cy="868680"/>
           </a:xfrm>
           <a:prstGeom prst="rect">
             <a:avLst/>
@@ -12196,7 +11850,7 @@
                 </a:solidFill>
                 <a:latin typeface="Arial"/>
               </a:rPr>
-              <a:t>VIDEO THAM KHẢO</a:t>
+              <a:t>NGÔN TỪ, NHỊP VÀ VẦN</a:t>
             </a:r>
           </a:p>
         </p:txBody>
@@ -12280,40 +11934,16 @@
           </a:p>
         </p:txBody>
       </p:sp>
-      <p:pic>
-        <p:nvPicPr>
-          <p:cNvPr id="7" name="Picture 6" descr="QR_video_Qvss02_9RAk.png"/>
-          <p:cNvPicPr>
-            <a:picLocks noChangeAspect="1"/>
-          </p:cNvPicPr>
-          <p:nvPr/>
-        </p:nvPicPr>
-        <p:blipFill>
-          <a:blip r:embed="rId2"/>
-          <a:stretch>
-            <a:fillRect/>
-          </a:stretch>
-        </p:blipFill>
-        <p:spPr>
-          <a:xfrm>
-            <a:off x="8412480" y="1554480"/>
-            <a:ext cx="3108960" cy="3108960"/>
-          </a:xfrm>
-          <a:prstGeom prst="rect">
-            <a:avLst/>
-          </a:prstGeom>
-        </p:spPr>
-      </p:pic>
-      <p:sp>
-        <p:nvSpPr>
-          <p:cNvPr id="8" name="TextBox 7"/>
+      <p:sp>
+        <p:nvSpPr>
+          <p:cNvPr id="7" name="TextBox 6"/>
           <p:cNvSpPr txBox="1"/>
           <p:nvPr/>
         </p:nvSpPr>
         <p:spPr>
           <a:xfrm>
-            <a:off x="731520" y="1554480"/>
-            <a:ext cx="7498079" cy="4206240"/>
+            <a:off x="731520" y="1463040"/>
+            <a:ext cx="10789920" cy="3566160"/>
           </a:xfrm>
           <a:prstGeom prst="rect">
             <a:avLst/>
@@ -12338,61 +11968,94 @@
                 </a:solidFill>
                 <a:latin typeface="Calibri"/>
               </a:rPr>
-              <a:t>🎬 Bài thơ Mùa xuân chín – Hàn Mặc Tử – NSƯT Trần Thị Tuyết diễn ngâm</a:t>
-            </a:r>
-          </a:p>
+              <a:t>Bài thơ có những lựa chọn, kết hợp ngôn từ nào đặc biệt? Mô tả cách ngắt nhịp, gieo vần và so sánh với thơ Đường luật.</a:t>
+            </a:r>
+          </a:p>
+        </p:txBody>
+      </p:sp>
+      <p:sp>
+        <p:nvSpPr>
+          <p:cNvPr id="8" name="Rounded Rectangle 7"/>
+          <p:cNvSpPr/>
+          <p:nvPr/>
+        </p:nvSpPr>
+        <p:spPr>
+          <a:xfrm>
+            <a:off x="731520" y="5120640"/>
+            <a:ext cx="10789920" cy="693420"/>
+          </a:xfrm>
+          <a:prstGeom prst="roundRect">
+            <a:avLst>
+              <a:gd name="adj" fmla="val 8000"/>
+            </a:avLst>
+          </a:prstGeom>
+          <a:solidFill>
+            <a:srgbClr val="EFF4FF"/>
+          </a:solidFill>
+          <a:ln w="19050">
+            <a:solidFill>
+              <a:srgbClr val="1E40AF"/>
+            </a:solidFill>
+          </a:ln>
+          <a:effectLst/>
+        </p:spPr>
+        <p:style>
+          <a:lnRef idx="1">
+            <a:schemeClr val="accent1"/>
+          </a:lnRef>
+          <a:fillRef idx="3">
+            <a:schemeClr val="accent1"/>
+          </a:fillRef>
+          <a:effectRef idx="2">
+            <a:schemeClr val="accent1"/>
+          </a:effectRef>
+          <a:fontRef idx="minor">
+            <a:schemeClr val="lt1"/>
+          </a:fontRef>
+        </p:style>
+        <p:txBody>
+          <a:bodyPr rtlCol="0" anchor="ctr"/>
+          <a:lstStyle/>
+          <a:p>
+            <a:pPr algn="ctr"/>
+          </a:p>
+        </p:txBody>
+      </p:sp>
+      <p:sp>
+        <p:nvSpPr>
+          <p:cNvPr id="9" name="TextBox 8"/>
+          <p:cNvSpPr txBox="1"/>
+          <p:nvPr/>
+        </p:nvSpPr>
+        <p:spPr>
+          <a:xfrm>
+            <a:off x="914400" y="5120640"/>
+            <a:ext cx="10424160" cy="693420"/>
+          </a:xfrm>
+          <a:prstGeom prst="rect">
+            <a:avLst/>
+          </a:prstGeom>
+          <a:noFill/>
+        </p:spPr>
+        <p:txBody>
+          <a:bodyPr wrap="square" anchor="ctr" lIns="45720" rIns="45720">
+            <a:spAutoFit/>
+          </a:bodyPr>
+          <a:lstStyle/>
           <a:p>
             <a:pPr algn="l">
               <a:spcAft>
-                <a:spcPts val="800"/>
+                <a:spcPts val="400"/>
               </a:spcAft>
             </a:pPr>
             <a:r>
-              <a:rPr sz="2000">
-                <a:solidFill>
-                  <a:srgbClr val="64748B"/>
+              <a:rPr sz="2200" b="1">
+                <a:solidFill>
+                  <a:srgbClr val="1E40AF"/>
                 </a:solidFill>
                 <a:latin typeface="Calibri"/>
               </a:rPr>
-              <a:t>Kênh: Lê &amp; H</a:t>
-            </a:r>
-          </a:p>
-          <a:p>
-            <a:pPr algn="l" marL="365760" indent="-365760">
-              <a:spcAft>
-                <a:spcPts val="800"/>
-              </a:spcAft>
-              <a:buClr>
-                <a:srgbClr val="1E40AF"/>
-              </a:buClr>
-              <a:buFont typeface="Arial"/>
-              <a:buChar char="•"/>
-            </a:pPr>
-            <a:r>
-              <a:rPr sz="2000">
-                <a:solidFill>
-                  <a:srgbClr val="1E293B"/>
-                </a:solidFill>
-                <a:latin typeface="Calibri"/>
-              </a:rPr>
-              <a:t>Đọc diễn cảm Mùa xuân chín</a:t>
-            </a:r>
-          </a:p>
-          <a:p>
-            <a:pPr algn="l">
-              <a:spcAft>
-                <a:spcPts val="800"/>
-              </a:spcAft>
-            </a:pPr>
-            <a:r>
-              <a:rPr sz="1600">
-                <a:solidFill>
-                  <a:srgbClr val="64748B"/>
-                </a:solidFill>
-                <a:latin typeface="Calibri"/>
-                <a:hlinkClick r:id="rId3"/>
-              </a:rPr>
-              <a:t>https://www.youtube.com/watch?v=Qvss02_9RAk</a:t>
+              <a:t>💡 Chú ý dấu chấm giữa dòng, gạch ngang đầu dòng.</a:t>
             </a:r>
           </a:p>
         </p:txBody>
@@ -12475,14 +12138,14 @@
         </p:nvSpPr>
         <p:spPr>
           <a:xfrm>
-            <a:off x="10253167" y="457200"/>
-            <a:ext cx="1389888" cy="457200"/>
+            <a:off x="9942271" y="457200"/>
+            <a:ext cx="1700784" cy="457200"/>
           </a:xfrm>
           <a:prstGeom prst="roundRect">
             <a:avLst/>
           </a:prstGeom>
           <a:solidFill>
-            <a:srgbClr val="1E40AF"/>
+            <a:srgbClr val="991B1B"/>
           </a:solidFill>
           <a:ln>
             <a:noFill/>
@@ -12515,7 +12178,7 @@
                 </a:solidFill>
                 <a:latin typeface="Arial"/>
               </a:rPr>
-              <a:t>ĐỀ BÀI</a:t>
+              <a:t>LỜI GIẢI</a:t>
             </a:r>
           </a:p>
         </p:txBody>
@@ -12529,7 +12192,7 @@
         <p:spPr>
           <a:xfrm>
             <a:off x="731520" y="274320"/>
-            <a:ext cx="9582912" cy="868680"/>
+            <a:ext cx="9272016" cy="868680"/>
           </a:xfrm>
           <a:prstGeom prst="rect">
             <a:avLst/>
@@ -12549,7 +12212,7 @@
                 </a:solidFill>
                 <a:latin typeface="Arial"/>
               </a:rPr>
-              <a:t>NHAN ĐỀ VÀ TRẠNG THÁI “CHÍN”</a:t>
+              <a:t>NGÔN TỪ, NHỊP VÀ VẦN</a:t>
             </a:r>
           </a:p>
         </p:txBody>
@@ -12642,7 +12305,7 @@
         <p:spPr>
           <a:xfrm>
             <a:off x="731520" y="1463040"/>
-            <a:ext cx="10789920" cy="3566160"/>
+            <a:ext cx="10789920" cy="3474720"/>
           </a:xfrm>
           <a:prstGeom prst="rect">
             <a:avLst/>
@@ -12655,19 +12318,66 @@
           </a:bodyPr>
           <a:lstStyle/>
           <a:p>
-            <a:pPr algn="l">
+            <a:pPr algn="l" marL="365760" indent="-365760">
               <a:spcAft>
                 <a:spcPts val="800"/>
               </a:spcAft>
+              <a:buClr>
+                <a:srgbClr val="1E40AF"/>
+              </a:buClr>
+              <a:buFont typeface="Arial"/>
+              <a:buChar char="•"/>
             </a:pPr>
             <a:r>
-              <a:rPr sz="2600" b="1">
+              <a:rPr sz="2300">
                 <a:solidFill>
                   <a:srgbClr val="1E293B"/>
                 </a:solidFill>
                 <a:latin typeface="Calibri"/>
               </a:rPr>
-              <a:t>Nhan đề Mùa xuân chín được cấu tạo bởi những từ thuộc từ loại nào, gợi liên tưởng gì? Trạng thái “chín” được thể hiện bằng những từ ngữ nào?</a:t>
+              <a:t>“làn nắng ửng”, “sột soạt gió trêu”, “tiếng ca vắt vẻo”, “hổn hển như lời của nước mây”.</a:t>
+            </a:r>
+          </a:p>
+          <a:p>
+            <a:pPr algn="l" marL="365760" indent="-365760">
+              <a:spcAft>
+                <a:spcPts val="800"/>
+              </a:spcAft>
+              <a:buClr>
+                <a:srgbClr val="1E40AF"/>
+              </a:buClr>
+              <a:buFont typeface="Arial"/>
+              <a:buChar char="•"/>
+            </a:pPr>
+            <a:r>
+              <a:rPr sz="2300">
+                <a:solidFill>
+                  <a:srgbClr val="1E293B"/>
+                </a:solidFill>
+                <a:latin typeface="Calibri"/>
+              </a:rPr>
+              <a:t>Ngắt nhịp linh hoạt: “Trên giàn thiên lí. Bóng xuân sang”.</a:t>
+            </a:r>
+          </a:p>
+          <a:p>
+            <a:pPr algn="l" marL="365760" indent="-365760">
+              <a:spcAft>
+                <a:spcPts val="800"/>
+              </a:spcAft>
+              <a:buClr>
+                <a:srgbClr val="1E40AF"/>
+              </a:buClr>
+              <a:buFont typeface="Arial"/>
+              <a:buChar char="•"/>
+            </a:pPr>
+            <a:r>
+              <a:rPr sz="2300">
+                <a:solidFill>
+                  <a:srgbClr val="1E293B"/>
+                </a:solidFill>
+                <a:latin typeface="Calibri"/>
+              </a:rPr>
+              <a:t>Vần phóng khoáng, ít ràng buộc hơn thơ Đường luật.</a:t>
             </a:r>
           </a:p>
         </p:txBody>
@@ -12680,8 +12390,8 @@
         </p:nvSpPr>
         <p:spPr>
           <a:xfrm>
-            <a:off x="731520" y="5120640"/>
-            <a:ext cx="10789920" cy="693420"/>
+            <a:off x="731520" y="5074920"/>
+            <a:ext cx="10789920" cy="731520"/>
           </a:xfrm>
           <a:prstGeom prst="roundRect">
             <a:avLst>
@@ -12689,11 +12399,11 @@
             </a:avLst>
           </a:prstGeom>
           <a:solidFill>
-            <a:srgbClr val="EFF4FF"/>
+            <a:srgbClr val="FEF2F2"/>
           </a:solidFill>
           <a:ln w="19050">
             <a:solidFill>
-              <a:srgbClr val="1E40AF"/>
+              <a:srgbClr val="991B1B"/>
             </a:solidFill>
           </a:ln>
           <a:effectLst/>
@@ -12728,8 +12438,8 @@
         </p:nvSpPr>
         <p:spPr>
           <a:xfrm>
-            <a:off x="914400" y="5120640"/>
-            <a:ext cx="10424160" cy="693420"/>
+            <a:off x="914400" y="5074920"/>
+            <a:ext cx="10424160" cy="731520"/>
           </a:xfrm>
           <a:prstGeom prst="rect">
             <a:avLst/>
@@ -12748,13 +12458,13 @@
               </a:spcAft>
             </a:pPr>
             <a:r>
-              <a:rPr sz="2200" b="1">
-                <a:solidFill>
-                  <a:srgbClr val="1E40AF"/>
+              <a:rPr sz="2400" b="1">
+                <a:solidFill>
+                  <a:srgbClr val="991B1B"/>
                 </a:solidFill>
                 <a:latin typeface="Calibri"/>
               </a:rPr>
-              <a:t>💡 “Chín” thường dùng cho sự vật nào?</a:t>
+              <a:t>Thơ mới: tự do, giàu cảm giác, cá tính.</a:t>
             </a:r>
           </a:p>
         </p:txBody>
@@ -12837,14 +12547,14 @@
         </p:nvSpPr>
         <p:spPr>
           <a:xfrm>
-            <a:off x="9942271" y="457200"/>
-            <a:ext cx="1700784" cy="457200"/>
+            <a:off x="10253167" y="457200"/>
+            <a:ext cx="1389888" cy="457200"/>
           </a:xfrm>
           <a:prstGeom prst="roundRect">
             <a:avLst/>
           </a:prstGeom>
           <a:solidFill>
-            <a:srgbClr val="991B1B"/>
+            <a:srgbClr val="1E40AF"/>
           </a:solidFill>
           <a:ln>
             <a:noFill/>
@@ -12877,7 +12587,7 @@
                 </a:solidFill>
                 <a:latin typeface="Arial"/>
               </a:rPr>
-              <a:t>LỜI GIẢI</a:t>
+              <a:t>ĐỀ BÀI</a:t>
             </a:r>
           </a:p>
         </p:txBody>
@@ -12891,7 +12601,7 @@
         <p:spPr>
           <a:xfrm>
             <a:off x="731520" y="274320"/>
-            <a:ext cx="9272016" cy="868680"/>
+            <a:ext cx="9582912" cy="868680"/>
           </a:xfrm>
           <a:prstGeom prst="rect">
             <a:avLst/>
@@ -12911,7 +12621,7 @@
                 </a:solidFill>
                 <a:latin typeface="Arial"/>
               </a:rPr>
-              <a:t>NHAN ĐỀ VÀ TRẠNG THÁI “CHÍN”</a:t>
+              <a:t>CON NGƯỜI VÀ MẠCH CẢM XÚC</a:t>
             </a:r>
           </a:p>
         </p:txBody>
@@ -13004,7 +12714,7 @@
         <p:spPr>
           <a:xfrm>
             <a:off x="731520" y="1463040"/>
-            <a:ext cx="10789920" cy="3474720"/>
+            <a:ext cx="10789920" cy="3566160"/>
           </a:xfrm>
           <a:prstGeom prst="rect">
             <a:avLst/>
@@ -13017,66 +12727,19 @@
           </a:bodyPr>
           <a:lstStyle/>
           <a:p>
-            <a:pPr algn="l" marL="365760" indent="-365760">
+            <a:pPr algn="l">
               <a:spcAft>
                 <a:spcPts val="800"/>
               </a:spcAft>
-              <a:buClr>
-                <a:srgbClr val="1E40AF"/>
-              </a:buClr>
-              <a:buFont typeface="Arial"/>
-              <a:buChar char="•"/>
             </a:pPr>
             <a:r>
-              <a:rPr sz="2300">
+              <a:rPr sz="2600" b="1">
                 <a:solidFill>
                   <a:srgbClr val="1E293B"/>
                 </a:solidFill>
                 <a:latin typeface="Calibri"/>
               </a:rPr>
-              <a:t>Danh từ “mùa xuân” + tính từ “chín”.</a:t>
-            </a:r>
-          </a:p>
-          <a:p>
-            <a:pPr algn="l" marL="365760" indent="-365760">
-              <a:spcAft>
-                <a:spcPts val="800"/>
-              </a:spcAft>
-              <a:buClr>
-                <a:srgbClr val="1E40AF"/>
-              </a:buClr>
-              <a:buFont typeface="Arial"/>
-              <a:buChar char="•"/>
-            </a:pPr>
-            <a:r>
-              <a:rPr sz="2300">
-                <a:solidFill>
-                  <a:srgbClr val="1E293B"/>
-                </a:solidFill>
-                <a:latin typeface="Calibri"/>
-              </a:rPr>
-              <a:t>Gợi mùa xuân viên mãn, căng tràn như trái chín.</a:t>
-            </a:r>
-          </a:p>
-          <a:p>
-            <a:pPr algn="l" marL="365760" indent="-365760">
-              <a:spcAft>
-                <a:spcPts val="800"/>
-              </a:spcAft>
-              <a:buClr>
-                <a:srgbClr val="1E40AF"/>
-              </a:buClr>
-              <a:buFont typeface="Arial"/>
-              <a:buChar char="•"/>
-            </a:pPr>
-            <a:r>
-              <a:rPr sz="2300">
-                <a:solidFill>
-                  <a:srgbClr val="1E293B"/>
-                </a:solidFill>
-                <a:latin typeface="Calibri"/>
-              </a:rPr>
-              <a:t>“lấm tấm vàng”, “bóng xuân sang”, “sóng cỏ xanh tươi gợn tới trời”.</a:t>
+              <a:t>Con người hiện diện qua những hình ảnh nào? Hình ảnh nào nằm trong tâm tưởng nhân vật trữ tình? Nêu cảm nhận về nhân vật trữ tình.</a:t>
             </a:r>
           </a:p>
         </p:txBody>
@@ -13089,8 +12752,8 @@
         </p:nvSpPr>
         <p:spPr>
           <a:xfrm>
-            <a:off x="731520" y="5074920"/>
-            <a:ext cx="10789920" cy="731520"/>
+            <a:off x="731520" y="5120640"/>
+            <a:ext cx="10789920" cy="693420"/>
           </a:xfrm>
           <a:prstGeom prst="roundRect">
             <a:avLst>
@@ -13098,11 +12761,11 @@
             </a:avLst>
           </a:prstGeom>
           <a:solidFill>
-            <a:srgbClr val="FEF2F2"/>
+            <a:srgbClr val="EFF4FF"/>
           </a:solidFill>
           <a:ln w="19050">
             <a:solidFill>
-              <a:srgbClr val="991B1B"/>
+              <a:srgbClr val="1E40AF"/>
             </a:solidFill>
           </a:ln>
           <a:effectLst/>
@@ -13137,8 +12800,8 @@
         </p:nvSpPr>
         <p:spPr>
           <a:xfrm>
-            <a:off x="914400" y="5074920"/>
-            <a:ext cx="10424160" cy="731520"/>
+            <a:off x="914400" y="5120640"/>
+            <a:ext cx="10424160" cy="693420"/>
           </a:xfrm>
           <a:prstGeom prst="rect">
             <a:avLst/>
@@ -13157,13 +12820,13 @@
               </a:spcAft>
             </a:pPr>
             <a:r>
-              <a:rPr sz="2400" b="1">
-                <a:solidFill>
-                  <a:srgbClr val="991B1B"/>
+              <a:rPr sz="2200" b="1">
+                <a:solidFill>
+                  <a:srgbClr val="1E40AF"/>
                 </a:solidFill>
                 <a:latin typeface="Calibri"/>
               </a:rPr>
-              <a:t>Mùa xuân ở độ đẹp nhất, rạo rực nhất.</a:t>
+              <a:t>💡 Phân biệt cảnh đang ngắm và cảnh hồi tưởng.</a:t>
             </a:r>
           </a:p>
         </p:txBody>
@@ -13246,14 +12909,14 @@
         </p:nvSpPr>
         <p:spPr>
           <a:xfrm>
-            <a:off x="10253167" y="457200"/>
-            <a:ext cx="1389888" cy="457200"/>
+            <a:off x="9942271" y="457200"/>
+            <a:ext cx="1700784" cy="457200"/>
           </a:xfrm>
           <a:prstGeom prst="roundRect">
             <a:avLst/>
           </a:prstGeom>
           <a:solidFill>
-            <a:srgbClr val="1E40AF"/>
+            <a:srgbClr val="991B1B"/>
           </a:solidFill>
           <a:ln>
             <a:noFill/>
@@ -13286,7 +12949,7 @@
                 </a:solidFill>
                 <a:latin typeface="Arial"/>
               </a:rPr>
-              <a:t>ĐỀ BÀI</a:t>
+              <a:t>LỜI GIẢI</a:t>
             </a:r>
           </a:p>
         </p:txBody>
@@ -13300,7 +12963,7 @@
         <p:spPr>
           <a:xfrm>
             <a:off x="731520" y="274320"/>
-            <a:ext cx="9582912" cy="868680"/>
+            <a:ext cx="9272016" cy="868680"/>
           </a:xfrm>
           <a:prstGeom prst="rect">
             <a:avLst/>
@@ -13320,7 +12983,7 @@
                 </a:solidFill>
                 <a:latin typeface="Arial"/>
               </a:rPr>
-              <a:t>NGÔN TỪ, NHỊP VÀ VẦN</a:t>
+              <a:t>CON NGƯỜI VÀ MẠCH CẢM XÚC</a:t>
             </a:r>
           </a:p>
         </p:txBody>
@@ -13413,7 +13076,7 @@
         <p:spPr>
           <a:xfrm>
             <a:off x="731520" y="1463040"/>
-            <a:ext cx="10789920" cy="3566160"/>
+            <a:ext cx="10789920" cy="3474720"/>
           </a:xfrm>
           <a:prstGeom prst="rect">
             <a:avLst/>
@@ -13426,19 +13089,66 @@
           </a:bodyPr>
           <a:lstStyle/>
           <a:p>
-            <a:pPr algn="l">
+            <a:pPr algn="l" marL="365760" indent="-365760">
               <a:spcAft>
                 <a:spcPts val="800"/>
               </a:spcAft>
+              <a:buClr>
+                <a:srgbClr val="1E40AF"/>
+              </a:buClr>
+              <a:buFont typeface="Arial"/>
+              <a:buChar char="•"/>
             </a:pPr>
             <a:r>
-              <a:rPr sz="2600" b="1">
+              <a:rPr sz="2300">
                 <a:solidFill>
                   <a:srgbClr val="1E293B"/>
                 </a:solidFill>
                 <a:latin typeface="Calibri"/>
               </a:rPr>
-              <a:t>Bài thơ có những lựa chọn, kết hợp ngôn từ nào đặc biệt? Mô tả cách ngắt nhịp, gieo vần và so sánh với thơ Đường luật.</a:t>
+              <a:t>Thôn nữ hát trên đồi, người theo chồng bỏ cuộc chơi.</a:t>
+            </a:r>
+          </a:p>
+          <a:p>
+            <a:pPr algn="l" marL="365760" indent="-365760">
+              <a:spcAft>
+                <a:spcPts val="800"/>
+              </a:spcAft>
+              <a:buClr>
+                <a:srgbClr val="1E40AF"/>
+              </a:buClr>
+              <a:buFont typeface="Arial"/>
+              <a:buChar char="•"/>
+            </a:pPr>
+            <a:r>
+              <a:rPr sz="2300">
+                <a:solidFill>
+                  <a:srgbClr val="1E293B"/>
+                </a:solidFill>
+                <a:latin typeface="Calibri"/>
+              </a:rPr>
+              <a:t>Người chị gánh thóc – hình ảnh trong tâm tưởng.</a:t>
+            </a:r>
+          </a:p>
+          <a:p>
+            <a:pPr algn="l" marL="365760" indent="-365760">
+              <a:spcAft>
+                <a:spcPts val="800"/>
+              </a:spcAft>
+              <a:buClr>
+                <a:srgbClr val="1E40AF"/>
+              </a:buClr>
+              <a:buFont typeface="Arial"/>
+              <a:buChar char="•"/>
+            </a:pPr>
+            <a:r>
+              <a:rPr sz="2300">
+                <a:solidFill>
+                  <a:srgbClr val="1E293B"/>
+                </a:solidFill>
+                <a:latin typeface="Calibri"/>
+              </a:rPr>
+              <a:t>“Khách xa” bâng khuâng, sực nhớ làng.</a:t>
             </a:r>
           </a:p>
         </p:txBody>
@@ -13451,8 +13161,8 @@
         </p:nvSpPr>
         <p:spPr>
           <a:xfrm>
-            <a:off x="731520" y="5120640"/>
-            <a:ext cx="10789920" cy="693420"/>
+            <a:off x="731520" y="5074920"/>
+            <a:ext cx="10789920" cy="731520"/>
           </a:xfrm>
           <a:prstGeom prst="roundRect">
             <a:avLst>
@@ -13460,11 +13170,11 @@
             </a:avLst>
           </a:prstGeom>
           <a:solidFill>
-            <a:srgbClr val="EFF4FF"/>
+            <a:srgbClr val="FEF2F2"/>
           </a:solidFill>
           <a:ln w="19050">
             <a:solidFill>
-              <a:srgbClr val="1E40AF"/>
+              <a:srgbClr val="991B1B"/>
             </a:solidFill>
           </a:ln>
           <a:effectLst/>
@@ -13499,8 +13209,8 @@
         </p:nvSpPr>
         <p:spPr>
           <a:xfrm>
-            <a:off x="914400" y="5120640"/>
-            <a:ext cx="10424160" cy="693420"/>
+            <a:off x="914400" y="5074920"/>
+            <a:ext cx="10424160" cy="731520"/>
           </a:xfrm>
           <a:prstGeom prst="rect">
             <a:avLst/>
@@ -13519,13 +13229,13 @@
               </a:spcAft>
             </a:pPr>
             <a:r>
-              <a:rPr sz="2200" b="1">
-                <a:solidFill>
-                  <a:srgbClr val="1E40AF"/>
+              <a:rPr sz="2400" b="1">
+                <a:solidFill>
+                  <a:srgbClr val="991B1B"/>
                 </a:solidFill>
                 <a:latin typeface="Calibri"/>
               </a:rPr>
-              <a:t>💡 Chú ý dấu chấm giữa dòng, gạch ngang đầu dòng.</a:t>
+              <a:t>Say sưa cảnh xuân → tiếc nuối → nhớ thương.</a:t>
             </a:r>
           </a:p>
         </p:txBody>
@@ -13653,7 +13363,7 @@
     <p:bg>
       <p:bgPr>
         <a:solidFill>
-          <a:srgbClr val="FFFFFF"/>
+          <a:srgbClr val="F8F9FA"/>
         </a:solidFill>
         <a:effectLst/>
       </p:bgPr>
@@ -13673,54 +13383,10 @@
         </p:nvSpPr>
         <p:spPr>
           <a:xfrm>
-            <a:off x="457200" y="384048"/>
-            <a:ext cx="109728" cy="658368"/>
-          </a:xfrm>
-          <a:prstGeom prst="rect">
-            <a:avLst/>
-          </a:prstGeom>
-          <a:solidFill>
-            <a:srgbClr val="1E40AF"/>
-          </a:solidFill>
-          <a:ln>
-            <a:noFill/>
-          </a:ln>
-          <a:effectLst/>
-        </p:spPr>
-        <p:style>
-          <a:lnRef idx="1">
-            <a:schemeClr val="accent1"/>
-          </a:lnRef>
-          <a:fillRef idx="3">
-            <a:schemeClr val="accent1"/>
-          </a:fillRef>
-          <a:effectRef idx="2">
-            <a:schemeClr val="accent1"/>
-          </a:effectRef>
-          <a:fontRef idx="minor">
-            <a:schemeClr val="lt1"/>
-          </a:fontRef>
-        </p:style>
-        <p:txBody>
-          <a:bodyPr rtlCol="0" anchor="ctr"/>
-          <a:lstStyle/>
-          <a:p>
-            <a:pPr algn="ctr"/>
-          </a:p>
-        </p:txBody>
-      </p:sp>
-      <p:sp>
-        <p:nvSpPr>
-          <p:cNvPr id="3" name="Rounded Rectangle 2"/>
-          <p:cNvSpPr/>
-          <p:nvPr/>
-        </p:nvSpPr>
-        <p:spPr>
-          <a:xfrm>
-            <a:off x="9942271" y="457200"/>
-            <a:ext cx="1700784" cy="457200"/>
-          </a:xfrm>
-          <a:prstGeom prst="roundRect">
+            <a:off x="548640" y="2926080"/>
+            <a:ext cx="164592" cy="1005840"/>
+          </a:xfrm>
+          <a:prstGeom prst="rect">
             <a:avLst/>
           </a:prstGeom>
           <a:solidFill>
@@ -13746,32 +13412,23 @@
           </a:fontRef>
         </p:style>
         <p:txBody>
-          <a:bodyPr rtlCol="0" anchor="ctr" wrap="none" tIns="0" bIns="0"/>
+          <a:bodyPr rtlCol="0" anchor="ctr"/>
           <a:lstStyle/>
           <a:p>
             <a:pPr algn="ctr"/>
-            <a:r>
-              <a:rPr sz="1400" b="1">
-                <a:solidFill>
-                  <a:srgbClr val="FFFFFF"/>
-                </a:solidFill>
-                <a:latin typeface="Arial"/>
-              </a:rPr>
-              <a:t>LỜI GIẢI</a:t>
-            </a:r>
-          </a:p>
-        </p:txBody>
-      </p:sp>
-      <p:sp>
-        <p:nvSpPr>
-          <p:cNvPr id="4" name="TextBox 3"/>
+          </a:p>
+        </p:txBody>
+      </p:sp>
+      <p:sp>
+        <p:nvSpPr>
+          <p:cNvPr id="3" name="TextBox 2"/>
           <p:cNvSpPr txBox="1"/>
           <p:nvPr/>
         </p:nvSpPr>
         <p:spPr>
           <a:xfrm>
-            <a:off x="731520" y="274320"/>
-            <a:ext cx="9272016" cy="868680"/>
+            <a:off x="914400" y="2743200"/>
+            <a:ext cx="10515600" cy="1371600"/>
           </a:xfrm>
           <a:prstGeom prst="rect">
             <a:avLst/>
@@ -13779,271 +13436,24 @@
           <a:noFill/>
         </p:spPr>
         <p:txBody>
-          <a:bodyPr wrap="square" anchor="ctr">
+          <a:bodyPr wrap="square" anchor="ctr" lIns="45720" rIns="45720">
             <a:spAutoFit/>
           </a:bodyPr>
           <a:lstStyle/>
           <a:p>
-            <a:r>
-              <a:rPr sz="3600" b="1">
-                <a:solidFill>
-                  <a:srgbClr val="1E40AF"/>
-                </a:solidFill>
-                <a:latin typeface="Arial"/>
-              </a:rPr>
-              <a:t>NGÔN TỪ, NHỊP VÀ VẦN</a:t>
-            </a:r>
-          </a:p>
-        </p:txBody>
-      </p:sp>
-      <p:sp>
-        <p:nvSpPr>
-          <p:cNvPr id="5" name="Rectangle 4"/>
-          <p:cNvSpPr/>
-          <p:nvPr/>
-        </p:nvSpPr>
-        <p:spPr>
-          <a:xfrm>
-            <a:off x="457200" y="1207008"/>
-            <a:ext cx="11274552" cy="22000"/>
-          </a:xfrm>
-          <a:prstGeom prst="rect">
-            <a:avLst/>
-          </a:prstGeom>
-          <a:solidFill>
-            <a:srgbClr val="E2E8F0"/>
-          </a:solidFill>
-          <a:ln>
-            <a:noFill/>
-          </a:ln>
-          <a:effectLst/>
-        </p:spPr>
-        <p:style>
-          <a:lnRef idx="1">
-            <a:schemeClr val="accent1"/>
-          </a:lnRef>
-          <a:fillRef idx="3">
-            <a:schemeClr val="accent1"/>
-          </a:fillRef>
-          <a:effectRef idx="2">
-            <a:schemeClr val="accent1"/>
-          </a:effectRef>
-          <a:fontRef idx="minor">
-            <a:schemeClr val="lt1"/>
-          </a:fontRef>
-        </p:style>
-        <p:txBody>
-          <a:bodyPr rtlCol="0" anchor="ctr"/>
-          <a:lstStyle/>
-          <a:p>
-            <a:pPr algn="ctr"/>
-          </a:p>
-        </p:txBody>
-      </p:sp>
-      <p:sp>
-        <p:nvSpPr>
-          <p:cNvPr id="6" name="TextBox 5"/>
-          <p:cNvSpPr txBox="1"/>
-          <p:nvPr/>
-        </p:nvSpPr>
-        <p:spPr>
-          <a:xfrm>
-            <a:off x="457200" y="6355080"/>
-            <a:ext cx="11274552" cy="365760"/>
-          </a:xfrm>
-          <a:prstGeom prst="rect">
-            <a:avLst/>
-          </a:prstGeom>
-          <a:noFill/>
-        </p:spPr>
-        <p:txBody>
-          <a:bodyPr wrap="none">
-            <a:spAutoFit/>
-          </a:bodyPr>
-          <a:lstStyle/>
-          <a:p>
-            <a:pPr algn="r"/>
-            <a:r>
-              <a:rPr sz="1200">
-                <a:solidFill>
-                  <a:srgbClr val="64748B"/>
-                </a:solidFill>
-                <a:latin typeface="Calibri"/>
-              </a:rPr>
-              <a:t>Ngữ văn 10 · Bài 2: Vẻ Đẹp Của Thơ Ca          30</a:t>
-            </a:r>
-          </a:p>
-        </p:txBody>
-      </p:sp>
-      <p:sp>
-        <p:nvSpPr>
-          <p:cNvPr id="7" name="TextBox 6"/>
-          <p:cNvSpPr txBox="1"/>
-          <p:nvPr/>
-        </p:nvSpPr>
-        <p:spPr>
-          <a:xfrm>
-            <a:off x="731520" y="1463040"/>
-            <a:ext cx="10789920" cy="3474720"/>
-          </a:xfrm>
-          <a:prstGeom prst="rect">
-            <a:avLst/>
-          </a:prstGeom>
-          <a:noFill/>
-        </p:spPr>
-        <p:txBody>
-          <a:bodyPr wrap="square" anchor="t" lIns="45720" rIns="45720">
-            <a:spAutoFit/>
-          </a:bodyPr>
-          <a:lstStyle/>
-          <a:p>
-            <a:pPr algn="l" marL="365760" indent="-365760">
+            <a:pPr algn="l">
               <a:spcAft>
                 <a:spcPts val="800"/>
               </a:spcAft>
-              <a:buClr>
-                <a:srgbClr val="1E40AF"/>
-              </a:buClr>
-              <a:buFont typeface="Arial"/>
-              <a:buChar char="•"/>
             </a:pPr>
             <a:r>
-              <a:rPr sz="2300">
-                <a:solidFill>
-                  <a:srgbClr val="1E293B"/>
+              <a:rPr sz="3600" b="1">
+                <a:solidFill>
+                  <a:srgbClr val="1E40AF"/>
                 </a:solidFill>
                 <a:latin typeface="Calibri"/>
               </a:rPr>
-              <a:t>“làn nắng ửng”, “sột soạt gió trêu”, “tiếng ca vắt vẻo”, “hổn hển như lời của nước mây”.</a:t>
-            </a:r>
-          </a:p>
-          <a:p>
-            <a:pPr algn="l" marL="365760" indent="-365760">
-              <a:spcAft>
-                <a:spcPts val="800"/>
-              </a:spcAft>
-              <a:buClr>
-                <a:srgbClr val="1E40AF"/>
-              </a:buClr>
-              <a:buFont typeface="Arial"/>
-              <a:buChar char="•"/>
-            </a:pPr>
-            <a:r>
-              <a:rPr sz="2300">
-                <a:solidFill>
-                  <a:srgbClr val="1E293B"/>
-                </a:solidFill>
-                <a:latin typeface="Calibri"/>
-              </a:rPr>
-              <a:t>Ngắt nhịp linh hoạt: “Trên giàn thiên lí. Bóng xuân sang”.</a:t>
-            </a:r>
-          </a:p>
-          <a:p>
-            <a:pPr algn="l" marL="365760" indent="-365760">
-              <a:spcAft>
-                <a:spcPts val="800"/>
-              </a:spcAft>
-              <a:buClr>
-                <a:srgbClr val="1E40AF"/>
-              </a:buClr>
-              <a:buFont typeface="Arial"/>
-              <a:buChar char="•"/>
-            </a:pPr>
-            <a:r>
-              <a:rPr sz="2300">
-                <a:solidFill>
-                  <a:srgbClr val="1E293B"/>
-                </a:solidFill>
-                <a:latin typeface="Calibri"/>
-              </a:rPr>
-              <a:t>Vần phóng khoáng, ít ràng buộc hơn thơ Đường luật.</a:t>
-            </a:r>
-          </a:p>
-        </p:txBody>
-      </p:sp>
-      <p:sp>
-        <p:nvSpPr>
-          <p:cNvPr id="8" name="Rounded Rectangle 7"/>
-          <p:cNvSpPr/>
-          <p:nvPr/>
-        </p:nvSpPr>
-        <p:spPr>
-          <a:xfrm>
-            <a:off x="731520" y="5074920"/>
-            <a:ext cx="10789920" cy="731520"/>
-          </a:xfrm>
-          <a:prstGeom prst="roundRect">
-            <a:avLst>
-              <a:gd name="adj" fmla="val 8000"/>
-            </a:avLst>
-          </a:prstGeom>
-          <a:solidFill>
-            <a:srgbClr val="FEF2F2"/>
-          </a:solidFill>
-          <a:ln w="19050">
-            <a:solidFill>
-              <a:srgbClr val="991B1B"/>
-            </a:solidFill>
-          </a:ln>
-          <a:effectLst/>
-        </p:spPr>
-        <p:style>
-          <a:lnRef idx="1">
-            <a:schemeClr val="accent1"/>
-          </a:lnRef>
-          <a:fillRef idx="3">
-            <a:schemeClr val="accent1"/>
-          </a:fillRef>
-          <a:effectRef idx="2">
-            <a:schemeClr val="accent1"/>
-          </a:effectRef>
-          <a:fontRef idx="minor">
-            <a:schemeClr val="lt1"/>
-          </a:fontRef>
-        </p:style>
-        <p:txBody>
-          <a:bodyPr rtlCol="0" anchor="ctr"/>
-          <a:lstStyle/>
-          <a:p>
-            <a:pPr algn="ctr"/>
-          </a:p>
-        </p:txBody>
-      </p:sp>
-      <p:sp>
-        <p:nvSpPr>
-          <p:cNvPr id="9" name="TextBox 8"/>
-          <p:cNvSpPr txBox="1"/>
-          <p:nvPr/>
-        </p:nvSpPr>
-        <p:spPr>
-          <a:xfrm>
-            <a:off x="914400" y="5074920"/>
-            <a:ext cx="10424160" cy="731520"/>
-          </a:xfrm>
-          <a:prstGeom prst="rect">
-            <a:avLst/>
-          </a:prstGeom>
-          <a:noFill/>
-        </p:spPr>
-        <p:txBody>
-          <a:bodyPr wrap="square" anchor="ctr" lIns="45720" rIns="45720">
-            <a:spAutoFit/>
-          </a:bodyPr>
-          <a:lstStyle/>
-          <a:p>
-            <a:pPr algn="l">
-              <a:spcAft>
-                <a:spcPts val="400"/>
-              </a:spcAft>
-            </a:pPr>
-            <a:r>
-              <a:rPr sz="2400" b="1">
-                <a:solidFill>
-                  <a:srgbClr val="991B1B"/>
-                </a:solidFill>
-                <a:latin typeface="Calibri"/>
-              </a:rPr>
-              <a:t>Thơ mới: tự do, giàu cảm giác, cá tính.</a:t>
+              <a:t>TIẾT 17: BẢN HOÀ ÂM NGÔN TỪ TRONG TIẾNG THU</a:t>
             </a:r>
           </a:p>
         </p:txBody>
@@ -14126,14 +13536,14 @@
         </p:nvSpPr>
         <p:spPr>
           <a:xfrm>
-            <a:off x="10408615" y="457200"/>
-            <a:ext cx="1234440" cy="457200"/>
+            <a:off x="10253167" y="457200"/>
+            <a:ext cx="1389888" cy="457200"/>
           </a:xfrm>
           <a:prstGeom prst="roundRect">
             <a:avLst/>
           </a:prstGeom>
           <a:solidFill>
-            <a:srgbClr val="991B1B"/>
+            <a:srgbClr val="1E40AF"/>
           </a:solidFill>
           <a:ln>
             <a:noFill/>
@@ -14166,7 +13576,7 @@
                 </a:solidFill>
                 <a:latin typeface="Arial"/>
               </a:rPr>
-              <a:t>VIDEO</a:t>
+              <a:t>ĐỀ BÀI</a:t>
             </a:r>
           </a:p>
         </p:txBody>
@@ -14180,7 +13590,7 @@
         <p:spPr>
           <a:xfrm>
             <a:off x="731520" y="274320"/>
-            <a:ext cx="9738360" cy="868680"/>
+            <a:ext cx="9582912" cy="868680"/>
           </a:xfrm>
           <a:prstGeom prst="rect">
             <a:avLst/>
@@ -14200,7 +13610,7 @@
                 </a:solidFill>
                 <a:latin typeface="Arial"/>
               </a:rPr>
-              <a:t>VIDEO THAM KHẢO</a:t>
+              <a:t>TIẾNG THU VÀ TIẾNG THƠ</a:t>
             </a:r>
           </a:p>
         </p:txBody>
@@ -14284,40 +13694,16 @@
           </a:p>
         </p:txBody>
       </p:sp>
-      <p:pic>
-        <p:nvPicPr>
-          <p:cNvPr id="7" name="Picture 6" descr="QR_video_0Ff0pYhbatU.png"/>
-          <p:cNvPicPr>
-            <a:picLocks noChangeAspect="1"/>
-          </p:cNvPicPr>
-          <p:nvPr/>
-        </p:nvPicPr>
-        <p:blipFill>
-          <a:blip r:embed="rId2"/>
-          <a:stretch>
-            <a:fillRect/>
-          </a:stretch>
-        </p:blipFill>
-        <p:spPr>
-          <a:xfrm>
-            <a:off x="8412480" y="1554480"/>
-            <a:ext cx="3108960" cy="3108960"/>
-          </a:xfrm>
-          <a:prstGeom prst="rect">
-            <a:avLst/>
-          </a:prstGeom>
-        </p:spPr>
-      </p:pic>
-      <p:sp>
-        <p:nvSpPr>
-          <p:cNvPr id="8" name="TextBox 7"/>
+      <p:sp>
+        <p:nvSpPr>
+          <p:cNvPr id="7" name="TextBox 6"/>
           <p:cNvSpPr txBox="1"/>
           <p:nvPr/>
         </p:nvSpPr>
         <p:spPr>
           <a:xfrm>
-            <a:off x="731520" y="1554480"/>
-            <a:ext cx="7498079" cy="4206240"/>
+            <a:off x="731520" y="1463040"/>
+            <a:ext cx="10789920" cy="3566160"/>
           </a:xfrm>
           <a:prstGeom prst="rect">
             <a:avLst/>
@@ -14342,61 +13728,94 @@
                 </a:solidFill>
                 <a:latin typeface="Calibri"/>
               </a:rPr>
-              <a:t>🎬 Radio Văn học: “Mùa xuân chín” (Hàn Mặc Tử) qua lời bình của TS. Chu Văn Sơn</a:t>
-            </a:r>
-          </a:p>
+              <a:t>Theo Chu Văn Sơn, “tiếng thu” và “tiếng thơ” tương ứng với những bình diện nào? Khác biệt lớn nhất trong cách miêu tả thiên nhiên của Thơ mới so với thơ cổ điển?</a:t>
+            </a:r>
+          </a:p>
+        </p:txBody>
+      </p:sp>
+      <p:sp>
+        <p:nvSpPr>
+          <p:cNvPr id="8" name="Rounded Rectangle 7"/>
+          <p:cNvSpPr/>
+          <p:nvPr/>
+        </p:nvSpPr>
+        <p:spPr>
+          <a:xfrm>
+            <a:off x="731520" y="5120640"/>
+            <a:ext cx="10789920" cy="693420"/>
+          </a:xfrm>
+          <a:prstGeom prst="roundRect">
+            <a:avLst>
+              <a:gd name="adj" fmla="val 8000"/>
+            </a:avLst>
+          </a:prstGeom>
+          <a:solidFill>
+            <a:srgbClr val="EFF4FF"/>
+          </a:solidFill>
+          <a:ln w="19050">
+            <a:solidFill>
+              <a:srgbClr val="1E40AF"/>
+            </a:solidFill>
+          </a:ln>
+          <a:effectLst/>
+        </p:spPr>
+        <p:style>
+          <a:lnRef idx="1">
+            <a:schemeClr val="accent1"/>
+          </a:lnRef>
+          <a:fillRef idx="3">
+            <a:schemeClr val="accent1"/>
+          </a:fillRef>
+          <a:effectRef idx="2">
+            <a:schemeClr val="accent1"/>
+          </a:effectRef>
+          <a:fontRef idx="minor">
+            <a:schemeClr val="lt1"/>
+          </a:fontRef>
+        </p:style>
+        <p:txBody>
+          <a:bodyPr rtlCol="0" anchor="ctr"/>
+          <a:lstStyle/>
+          <a:p>
+            <a:pPr algn="ctr"/>
+          </a:p>
+        </p:txBody>
+      </p:sp>
+      <p:sp>
+        <p:nvSpPr>
+          <p:cNvPr id="9" name="TextBox 8"/>
+          <p:cNvSpPr txBox="1"/>
+          <p:nvPr/>
+        </p:nvSpPr>
+        <p:spPr>
+          <a:xfrm>
+            <a:off x="914400" y="5120640"/>
+            <a:ext cx="10424160" cy="693420"/>
+          </a:xfrm>
+          <a:prstGeom prst="rect">
+            <a:avLst/>
+          </a:prstGeom>
+          <a:noFill/>
+        </p:spPr>
+        <p:txBody>
+          <a:bodyPr wrap="square" anchor="ctr" lIns="45720" rIns="45720">
+            <a:spAutoFit/>
+          </a:bodyPr>
+          <a:lstStyle/>
           <a:p>
             <a:pPr algn="l">
               <a:spcAft>
-                <a:spcPts val="800"/>
+                <a:spcPts val="400"/>
               </a:spcAft>
             </a:pPr>
             <a:r>
-              <a:rPr sz="2000">
-                <a:solidFill>
-                  <a:srgbClr val="64748B"/>
+              <a:rPr sz="2200" b="1">
+                <a:solidFill>
+                  <a:srgbClr val="1E40AF"/>
                 </a:solidFill>
                 <a:latin typeface="Calibri"/>
               </a:rPr>
-              <a:t>Kênh: Học Văn Cô Sương Mai</a:t>
-            </a:r>
-          </a:p>
-          <a:p>
-            <a:pPr algn="l" marL="365760" indent="-365760">
-              <a:spcAft>
-                <a:spcPts val="800"/>
-              </a:spcAft>
-              <a:buClr>
-                <a:srgbClr val="1E40AF"/>
-              </a:buClr>
-              <a:buFont typeface="Arial"/>
-              <a:buChar char="•"/>
-            </a:pPr>
-            <a:r>
-              <a:rPr sz="2000">
-                <a:solidFill>
-                  <a:srgbClr val="1E293B"/>
-                </a:solidFill>
-                <a:latin typeface="Calibri"/>
-              </a:rPr>
-              <a:t>Mở rộng – nghe bình thơ (ở nhà)</a:t>
-            </a:r>
-          </a:p>
-          <a:p>
-            <a:pPr algn="l">
-              <a:spcAft>
-                <a:spcPts val="800"/>
-              </a:spcAft>
-            </a:pPr>
-            <a:r>
-              <a:rPr sz="1600">
-                <a:solidFill>
-                  <a:srgbClr val="64748B"/>
-                </a:solidFill>
-                <a:latin typeface="Calibri"/>
-                <a:hlinkClick r:id="rId3"/>
-              </a:rPr>
-              <a:t>https://www.youtube.com/watch?v=0Ff0pYhbatU</a:t>
+              <a:t>💡 Thơ cổ “nhìn” thiên nhiên, Thơ mới thì sao?</a:t>
             </a:r>
           </a:p>
         </p:txBody>
@@ -14479,14 +13898,14 @@
         </p:nvSpPr>
         <p:spPr>
           <a:xfrm>
-            <a:off x="10253167" y="457200"/>
-            <a:ext cx="1389888" cy="457200"/>
+            <a:off x="9942271" y="457200"/>
+            <a:ext cx="1700784" cy="457200"/>
           </a:xfrm>
           <a:prstGeom prst="roundRect">
             <a:avLst/>
           </a:prstGeom>
           <a:solidFill>
-            <a:srgbClr val="1E40AF"/>
+            <a:srgbClr val="991B1B"/>
           </a:solidFill>
           <a:ln>
             <a:noFill/>
@@ -14519,7 +13938,7 @@
                 </a:solidFill>
                 <a:latin typeface="Arial"/>
               </a:rPr>
-              <a:t>ĐỀ BÀI</a:t>
+              <a:t>LỜI GIẢI</a:t>
             </a:r>
           </a:p>
         </p:txBody>
@@ -14533,7 +13952,7 @@
         <p:spPr>
           <a:xfrm>
             <a:off x="731520" y="274320"/>
-            <a:ext cx="9582912" cy="868680"/>
+            <a:ext cx="9272016" cy="868680"/>
           </a:xfrm>
           <a:prstGeom prst="rect">
             <a:avLst/>
@@ -14553,7 +13972,7 @@
                 </a:solidFill>
                 <a:latin typeface="Arial"/>
               </a:rPr>
-              <a:t>CON NGƯỜI VÀ MẠCH CẢM XÚC</a:t>
+              <a:t>TIẾNG THU VÀ TIẾNG THƠ</a:t>
             </a:r>
           </a:p>
         </p:txBody>
@@ -14646,7 +14065,7 @@
         <p:spPr>
           <a:xfrm>
             <a:off x="731520" y="1463040"/>
-            <a:ext cx="10789920" cy="3566160"/>
+            <a:ext cx="10789920" cy="3474720"/>
           </a:xfrm>
           <a:prstGeom prst="rect">
             <a:avLst/>
@@ -14659,19 +14078,87 @@
           </a:bodyPr>
           <a:lstStyle/>
           <a:p>
-            <a:pPr algn="l">
+            <a:pPr algn="l" marL="365760" indent="-365760">
               <a:spcAft>
                 <a:spcPts val="800"/>
               </a:spcAft>
+              <a:buClr>
+                <a:srgbClr val="1E40AF"/>
+              </a:buClr>
+              <a:buFont typeface="Arial"/>
+              <a:buChar char="•"/>
             </a:pPr>
             <a:r>
-              <a:rPr sz="2600" b="1">
+              <a:rPr sz="2300">
                 <a:solidFill>
                   <a:srgbClr val="1E293B"/>
                 </a:solidFill>
                 <a:latin typeface="Calibri"/>
               </a:rPr>
-              <a:t>Con người hiện diện qua những hình ảnh nào? Hình ảnh nào nằm trong tâm tưởng nhân vật trữ tình? Nêu cảm nhận về nhân vật trữ tình.</a:t>
+              <a:t>“Tiếng thu”: điệu hồn (nội dung); “tiếng thơ”: âm hưởng ngôn từ (hình thức).</a:t>
+            </a:r>
+          </a:p>
+          <a:p>
+            <a:pPr algn="l" marL="365760" indent="-365760">
+              <a:spcAft>
+                <a:spcPts val="800"/>
+              </a:spcAft>
+              <a:buClr>
+                <a:srgbClr val="1E40AF"/>
+              </a:buClr>
+              <a:buFont typeface="Arial"/>
+              <a:buChar char="•"/>
+            </a:pPr>
+            <a:r>
+              <a:rPr sz="2300">
+                <a:solidFill>
+                  <a:srgbClr val="1E293B"/>
+                </a:solidFill>
+                <a:latin typeface="Calibri"/>
+              </a:rPr>
+              <a:t>Thơ cổ điển: thiên nhiên qua thị giác.</a:t>
+            </a:r>
+          </a:p>
+          <a:p>
+            <a:pPr algn="l" marL="365760" indent="-365760">
+              <a:spcAft>
+                <a:spcPts val="800"/>
+              </a:spcAft>
+              <a:buClr>
+                <a:srgbClr val="1E40AF"/>
+              </a:buClr>
+              <a:buFont typeface="Arial"/>
+              <a:buChar char="•"/>
+            </a:pPr>
+            <a:r>
+              <a:rPr sz="2300">
+                <a:solidFill>
+                  <a:srgbClr val="1E293B"/>
+                </a:solidFill>
+                <a:latin typeface="Calibri"/>
+              </a:rPr>
+              <a:t>Thơ mới: thiên nhiên qua thính giác, cái tôi rung cảm.</a:t>
+            </a:r>
+          </a:p>
+          <a:p>
+            <a:pPr algn="l" marL="365760" indent="-365760">
+              <a:spcAft>
+                <a:spcPts val="800"/>
+              </a:spcAft>
+              <a:buClr>
+                <a:srgbClr val="1E40AF"/>
+              </a:buClr>
+              <a:buFont typeface="Arial"/>
+              <a:buChar char="•"/>
+            </a:pPr>
+            <a:r>
+              <a:rPr sz="2300">
+                <a:solidFill>
+                  <a:srgbClr val="1E293B"/>
+                </a:solidFill>
+                <a:latin typeface="Calibri"/>
+              </a:rPr>
+              <a:t>Thống kê 45 âm – 33 âm bằng → điệu êm đềm, tiêu tao.</a:t>
             </a:r>
           </a:p>
         </p:txBody>
@@ -14684,8 +14171,8 @@
         </p:nvSpPr>
         <p:spPr>
           <a:xfrm>
-            <a:off x="731520" y="5120640"/>
-            <a:ext cx="10789920" cy="693420"/>
+            <a:off x="731520" y="5074920"/>
+            <a:ext cx="10789920" cy="731520"/>
           </a:xfrm>
           <a:prstGeom prst="roundRect">
             <a:avLst>
@@ -14693,11 +14180,11 @@
             </a:avLst>
           </a:prstGeom>
           <a:solidFill>
-            <a:srgbClr val="EFF4FF"/>
+            <a:srgbClr val="FEF2F2"/>
           </a:solidFill>
           <a:ln w="19050">
             <a:solidFill>
-              <a:srgbClr val="1E40AF"/>
+              <a:srgbClr val="991B1B"/>
             </a:solidFill>
           </a:ln>
           <a:effectLst/>
@@ -14732,8 +14219,8 @@
         </p:nvSpPr>
         <p:spPr>
           <a:xfrm>
-            <a:off x="914400" y="5120640"/>
-            <a:ext cx="10424160" cy="693420"/>
+            <a:off x="914400" y="5074920"/>
+            <a:ext cx="10424160" cy="731520"/>
           </a:xfrm>
           <a:prstGeom prst="rect">
             <a:avLst/>
@@ -14752,13 +14239,13 @@
               </a:spcAft>
             </a:pPr>
             <a:r>
-              <a:rPr sz="2200" b="1">
-                <a:solidFill>
-                  <a:srgbClr val="1E40AF"/>
+              <a:rPr sz="2400" b="1">
+                <a:solidFill>
+                  <a:srgbClr val="991B1B"/>
                 </a:solidFill>
                 <a:latin typeface="Calibri"/>
               </a:rPr>
-              <a:t>💡 Phân biệt cảnh đang ngắm và cảnh hồi tưởng.</a:t>
+              <a:t>Sức hấp dẫn của thơ: cảm xúc hoà với nhạc điệu ngôn từ.</a:t>
             </a:r>
           </a:p>
         </p:txBody>
@@ -14772,6 +14259,115 @@
 </file>
 
 <file path=ppt/slides/slide33.xml><?xml version="1.0" encoding="utf-8"?>
+<p:sld xmlns:a="http://schemas.openxmlformats.org/drawingml/2006/main" xmlns:p="http://schemas.openxmlformats.org/presentationml/2006/main" xmlns:r="http://schemas.openxmlformats.org/officeDocument/2006/relationships">
+  <p:cSld>
+    <p:bg>
+      <p:bgPr>
+        <a:solidFill>
+          <a:srgbClr val="F8F9FA"/>
+        </a:solidFill>
+        <a:effectLst/>
+      </p:bgPr>
+    </p:bg>
+    <p:spTree>
+      <p:nvGrpSpPr>
+        <p:cNvPr id="1" name=""/>
+        <p:cNvGrpSpPr/>
+        <p:nvPr/>
+      </p:nvGrpSpPr>
+      <p:grpSpPr/>
+      <p:sp>
+        <p:nvSpPr>
+          <p:cNvPr id="2" name="Rectangle 1"/>
+          <p:cNvSpPr/>
+          <p:nvPr/>
+        </p:nvSpPr>
+        <p:spPr>
+          <a:xfrm>
+            <a:off x="548640" y="2926080"/>
+            <a:ext cx="164592" cy="1005840"/>
+          </a:xfrm>
+          <a:prstGeom prst="rect">
+            <a:avLst/>
+          </a:prstGeom>
+          <a:solidFill>
+            <a:srgbClr val="991B1B"/>
+          </a:solidFill>
+          <a:ln>
+            <a:noFill/>
+          </a:ln>
+          <a:effectLst/>
+        </p:spPr>
+        <p:style>
+          <a:lnRef idx="1">
+            <a:schemeClr val="accent1"/>
+          </a:lnRef>
+          <a:fillRef idx="3">
+            <a:schemeClr val="accent1"/>
+          </a:fillRef>
+          <a:effectRef idx="2">
+            <a:schemeClr val="accent1"/>
+          </a:effectRef>
+          <a:fontRef idx="minor">
+            <a:schemeClr val="lt1"/>
+          </a:fontRef>
+        </p:style>
+        <p:txBody>
+          <a:bodyPr rtlCol="0" anchor="ctr"/>
+          <a:lstStyle/>
+          <a:p>
+            <a:pPr algn="ctr"/>
+          </a:p>
+        </p:txBody>
+      </p:sp>
+      <p:sp>
+        <p:nvSpPr>
+          <p:cNvPr id="3" name="TextBox 2"/>
+          <p:cNvSpPr txBox="1"/>
+          <p:nvPr/>
+        </p:nvSpPr>
+        <p:spPr>
+          <a:xfrm>
+            <a:off x="914400" y="2743200"/>
+            <a:ext cx="10515600" cy="1371600"/>
+          </a:xfrm>
+          <a:prstGeom prst="rect">
+            <a:avLst/>
+          </a:prstGeom>
+          <a:noFill/>
+        </p:spPr>
+        <p:txBody>
+          <a:bodyPr wrap="square" anchor="ctr" lIns="45720" rIns="45720">
+            <a:spAutoFit/>
+          </a:bodyPr>
+          <a:lstStyle/>
+          <a:p>
+            <a:pPr algn="l">
+              <a:spcAft>
+                <a:spcPts val="800"/>
+              </a:spcAft>
+            </a:pPr>
+            <a:r>
+              <a:rPr sz="3600" b="1">
+                <a:solidFill>
+                  <a:srgbClr val="1E40AF"/>
+                </a:solidFill>
+                <a:latin typeface="Calibri"/>
+              </a:rPr>
+              <a:t>TIẾT 18: THỰC HÀNH TIẾNG VIỆT</a:t>
+            </a:r>
+          </a:p>
+        </p:txBody>
+      </p:sp>
+    </p:spTree>
+  </p:cSld>
+  <p:clrMapOvr>
+    <a:masterClrMapping/>
+  </p:clrMapOvr>
+</p:sld>
+</file>
+
+<file path=ppt/slides/slide34.xml><?xml version="1.0" encoding="utf-8"?>
 <p:sld xmlns:a="http://schemas.openxmlformats.org/drawingml/2006/main" xmlns:p="http://schemas.openxmlformats.org/presentationml/2006/main" xmlns:r="http://schemas.openxmlformats.org/officeDocument/2006/relationships">
   <p:cSld>
     <p:bg>
@@ -14841,14 +14437,14 @@
         </p:nvSpPr>
         <p:spPr>
           <a:xfrm>
-            <a:off x="9942271" y="457200"/>
-            <a:ext cx="1700784" cy="457200"/>
+            <a:off x="10253167" y="457200"/>
+            <a:ext cx="1389888" cy="457200"/>
           </a:xfrm>
           <a:prstGeom prst="roundRect">
             <a:avLst/>
           </a:prstGeom>
           <a:solidFill>
-            <a:srgbClr val="991B1B"/>
+            <a:srgbClr val="1E40AF"/>
           </a:solidFill>
           <a:ln>
             <a:noFill/>
@@ -14881,7 +14477,7 @@
                 </a:solidFill>
                 <a:latin typeface="Arial"/>
               </a:rPr>
-              <a:t>LỜI GIẢI</a:t>
+              <a:t>ĐỀ BÀI</a:t>
             </a:r>
           </a:p>
         </p:txBody>
@@ -14895,7 +14491,7 @@
         <p:spPr>
           <a:xfrm>
             <a:off x="731520" y="274320"/>
-            <a:ext cx="9272016" cy="868680"/>
+            <a:ext cx="9582912" cy="868680"/>
           </a:xfrm>
           <a:prstGeom prst="rect">
             <a:avLst/>
@@ -14915,7 +14511,7 @@
                 </a:solidFill>
                 <a:latin typeface="Arial"/>
               </a:rPr>
-              <a:t>CON NGƯỜI VÀ MẠCH CẢM XÚC</a:t>
+              <a:t>LỖI DÙNG TỪ</a:t>
             </a:r>
           </a:p>
         </p:txBody>
@@ -14994,7 +14590,7 @@
                 </a:solidFill>
                 <a:latin typeface="Calibri"/>
               </a:rPr>
-              <a:t>Ngữ văn 10 · Bài 2: Vẻ Đẹp Của Thơ Ca          33</a:t>
+              <a:t>Ngữ văn 10 · Bài 2: Vẻ Đẹp Của Thơ Ca          34</a:t>
             </a:r>
           </a:p>
         </p:txBody>
@@ -15008,7 +14604,7 @@
         <p:spPr>
           <a:xfrm>
             <a:off x="731520" y="1463040"/>
-            <a:ext cx="10789920" cy="3474720"/>
+            <a:ext cx="10789920" cy="3566160"/>
           </a:xfrm>
           <a:prstGeom prst="rect">
             <a:avLst/>
@@ -15021,66 +14617,19 @@
           </a:bodyPr>
           <a:lstStyle/>
           <a:p>
-            <a:pPr algn="l" marL="365760" indent="-365760">
+            <a:pPr algn="l">
               <a:spcAft>
                 <a:spcPts val="800"/>
               </a:spcAft>
-              <a:buClr>
-                <a:srgbClr val="1E40AF"/>
-              </a:buClr>
-              <a:buFont typeface="Arial"/>
-              <a:buChar char="•"/>
             </a:pPr>
             <a:r>
-              <a:rPr sz="2300">
+              <a:rPr sz="2600" b="1">
                 <a:solidFill>
                   <a:srgbClr val="1E293B"/>
                 </a:solidFill>
                 <a:latin typeface="Calibri"/>
               </a:rPr>
-              <a:t>Thôn nữ hát trên đồi, người theo chồng bỏ cuộc chơi.</a:t>
-            </a:r>
-          </a:p>
-          <a:p>
-            <a:pPr algn="l" marL="365760" indent="-365760">
-              <a:spcAft>
-                <a:spcPts val="800"/>
-              </a:spcAft>
-              <a:buClr>
-                <a:srgbClr val="1E40AF"/>
-              </a:buClr>
-              <a:buFont typeface="Arial"/>
-              <a:buChar char="•"/>
-            </a:pPr>
-            <a:r>
-              <a:rPr sz="2300">
-                <a:solidFill>
-                  <a:srgbClr val="1E293B"/>
-                </a:solidFill>
-                <a:latin typeface="Calibri"/>
-              </a:rPr>
-              <a:t>Người chị gánh thóc – hình ảnh trong tâm tưởng.</a:t>
-            </a:r>
-          </a:p>
-          <a:p>
-            <a:pPr algn="l" marL="365760" indent="-365760">
-              <a:spcAft>
-                <a:spcPts val="800"/>
-              </a:spcAft>
-              <a:buClr>
-                <a:srgbClr val="1E40AF"/>
-              </a:buClr>
-              <a:buFont typeface="Arial"/>
-              <a:buChar char="•"/>
-            </a:pPr>
-            <a:r>
-              <a:rPr sz="2300">
-                <a:solidFill>
-                  <a:srgbClr val="1E293B"/>
-                </a:solidFill>
-                <a:latin typeface="Calibri"/>
-              </a:rPr>
-              <a:t>“Khách xa” bâng khuâng, sực nhớ làng.</a:t>
+              <a:t>Tìm lỗi và sửa: “Đề tài, chủ đề, cảm hứng cũng như nội dung của các bài thơ hai-cư rất đa dạng, khác nhau.”</a:t>
             </a:r>
           </a:p>
         </p:txBody>
@@ -15093,8 +14642,8 @@
         </p:nvSpPr>
         <p:spPr>
           <a:xfrm>
-            <a:off x="731520" y="5074920"/>
-            <a:ext cx="10789920" cy="731520"/>
+            <a:off x="731520" y="5120640"/>
+            <a:ext cx="10789920" cy="693420"/>
           </a:xfrm>
           <a:prstGeom prst="roundRect">
             <a:avLst>
@@ -15102,11 +14651,11 @@
             </a:avLst>
           </a:prstGeom>
           <a:solidFill>
-            <a:srgbClr val="FEF2F2"/>
+            <a:srgbClr val="EFF4FF"/>
           </a:solidFill>
           <a:ln w="19050">
             <a:solidFill>
-              <a:srgbClr val="991B1B"/>
+              <a:srgbClr val="1E40AF"/>
             </a:solidFill>
           </a:ln>
           <a:effectLst/>
@@ -15141,8 +14690,8 @@
         </p:nvSpPr>
         <p:spPr>
           <a:xfrm>
-            <a:off x="914400" y="5074920"/>
-            <a:ext cx="10424160" cy="731520"/>
+            <a:off x="914400" y="5120640"/>
+            <a:ext cx="10424160" cy="693420"/>
           </a:xfrm>
           <a:prstGeom prst="rect">
             <a:avLst/>
@@ -15161,122 +14710,13 @@
               </a:spcAft>
             </a:pPr>
             <a:r>
-              <a:rPr sz="2400" b="1">
-                <a:solidFill>
-                  <a:srgbClr val="991B1B"/>
+              <a:rPr sz="2200" b="1">
+                <a:solidFill>
+                  <a:srgbClr val="1E40AF"/>
                 </a:solidFill>
                 <a:latin typeface="Calibri"/>
               </a:rPr>
-              <a:t>Say sưa cảnh xuân → tiếc nuối → nhớ thương.</a:t>
-            </a:r>
-          </a:p>
-        </p:txBody>
-      </p:sp>
-    </p:spTree>
-  </p:cSld>
-  <p:clrMapOvr>
-    <a:masterClrMapping/>
-  </p:clrMapOvr>
-</p:sld>
-</file>
-
-<file path=ppt/slides/slide34.xml><?xml version="1.0" encoding="utf-8"?>
-<p:sld xmlns:a="http://schemas.openxmlformats.org/drawingml/2006/main" xmlns:p="http://schemas.openxmlformats.org/presentationml/2006/main" xmlns:r="http://schemas.openxmlformats.org/officeDocument/2006/relationships">
-  <p:cSld>
-    <p:bg>
-      <p:bgPr>
-        <a:solidFill>
-          <a:srgbClr val="F8F9FA"/>
-        </a:solidFill>
-        <a:effectLst/>
-      </p:bgPr>
-    </p:bg>
-    <p:spTree>
-      <p:nvGrpSpPr>
-        <p:cNvPr id="1" name=""/>
-        <p:cNvGrpSpPr/>
-        <p:nvPr/>
-      </p:nvGrpSpPr>
-      <p:grpSpPr/>
-      <p:sp>
-        <p:nvSpPr>
-          <p:cNvPr id="2" name="Rectangle 1"/>
-          <p:cNvSpPr/>
-          <p:nvPr/>
-        </p:nvSpPr>
-        <p:spPr>
-          <a:xfrm>
-            <a:off x="548640" y="2926080"/>
-            <a:ext cx="164592" cy="1005840"/>
-          </a:xfrm>
-          <a:prstGeom prst="rect">
-            <a:avLst/>
-          </a:prstGeom>
-          <a:solidFill>
-            <a:srgbClr val="991B1B"/>
-          </a:solidFill>
-          <a:ln>
-            <a:noFill/>
-          </a:ln>
-          <a:effectLst/>
-        </p:spPr>
-        <p:style>
-          <a:lnRef idx="1">
-            <a:schemeClr val="accent1"/>
-          </a:lnRef>
-          <a:fillRef idx="3">
-            <a:schemeClr val="accent1"/>
-          </a:fillRef>
-          <a:effectRef idx="2">
-            <a:schemeClr val="accent1"/>
-          </a:effectRef>
-          <a:fontRef idx="minor">
-            <a:schemeClr val="lt1"/>
-          </a:fontRef>
-        </p:style>
-        <p:txBody>
-          <a:bodyPr rtlCol="0" anchor="ctr"/>
-          <a:lstStyle/>
-          <a:p>
-            <a:pPr algn="ctr"/>
-          </a:p>
-        </p:txBody>
-      </p:sp>
-      <p:sp>
-        <p:nvSpPr>
-          <p:cNvPr id="3" name="TextBox 2"/>
-          <p:cNvSpPr txBox="1"/>
-          <p:nvPr/>
-        </p:nvSpPr>
-        <p:spPr>
-          <a:xfrm>
-            <a:off x="914400" y="2743200"/>
-            <a:ext cx="10515600" cy="1371600"/>
-          </a:xfrm>
-          <a:prstGeom prst="rect">
-            <a:avLst/>
-          </a:prstGeom>
-          <a:noFill/>
-        </p:spPr>
-        <p:txBody>
-          <a:bodyPr wrap="square" anchor="ctr" lIns="45720" rIns="45720">
-            <a:spAutoFit/>
-          </a:bodyPr>
-          <a:lstStyle/>
-          <a:p>
-            <a:pPr algn="l">
-              <a:spcAft>
-                <a:spcPts val="800"/>
-              </a:spcAft>
-            </a:pPr>
-            <a:r>
-              <a:rPr sz="3600" b="1">
-                <a:solidFill>
-                  <a:srgbClr val="1E40AF"/>
-                </a:solidFill>
-                <a:latin typeface="Calibri"/>
-              </a:rPr>
-              <a:t>TIẾT 17: BẢN HOÀ ÂM NGÔN TỪ TRONG TIẾNG THU</a:t>
+              <a:t>💡 Có từ nào thừa, trùng nghĩa?</a:t>
             </a:r>
           </a:p>
         </p:txBody>
@@ -15359,8 +14799,8 @@
         </p:nvSpPr>
         <p:spPr>
           <a:xfrm>
-            <a:off x="10408615" y="457200"/>
-            <a:ext cx="1234440" cy="457200"/>
+            <a:off x="9942271" y="457200"/>
+            <a:ext cx="1700784" cy="457200"/>
           </a:xfrm>
           <a:prstGeom prst="roundRect">
             <a:avLst/>
@@ -15399,7 +14839,7 @@
                 </a:solidFill>
                 <a:latin typeface="Arial"/>
               </a:rPr>
-              <a:t>VIDEO</a:t>
+              <a:t>LỜI GIẢI</a:t>
             </a:r>
           </a:p>
         </p:txBody>
@@ -15413,7 +14853,7 @@
         <p:spPr>
           <a:xfrm>
             <a:off x="731520" y="274320"/>
-            <a:ext cx="9738360" cy="868680"/>
+            <a:ext cx="9272016" cy="868680"/>
           </a:xfrm>
           <a:prstGeom prst="rect">
             <a:avLst/>
@@ -15433,7 +14873,7 @@
                 </a:solidFill>
                 <a:latin typeface="Arial"/>
               </a:rPr>
-              <a:t>VIDEO THAM KHẢO</a:t>
+              <a:t>LỖI DÙNG TỪ</a:t>
             </a:r>
           </a:p>
         </p:txBody>
@@ -15517,40 +14957,16 @@
           </a:p>
         </p:txBody>
       </p:sp>
-      <p:pic>
-        <p:nvPicPr>
-          <p:cNvPr id="7" name="Picture 6" descr="QR_video_c5RVyHI_TeU.png"/>
-          <p:cNvPicPr>
-            <a:picLocks noChangeAspect="1"/>
-          </p:cNvPicPr>
-          <p:nvPr/>
-        </p:nvPicPr>
-        <p:blipFill>
-          <a:blip r:embed="rId2"/>
-          <a:stretch>
-            <a:fillRect/>
-          </a:stretch>
-        </p:blipFill>
-        <p:spPr>
-          <a:xfrm>
-            <a:off x="8412480" y="1554480"/>
-            <a:ext cx="3108960" cy="3108960"/>
-          </a:xfrm>
-          <a:prstGeom prst="rect">
-            <a:avLst/>
-          </a:prstGeom>
-        </p:spPr>
-      </p:pic>
-      <p:sp>
-        <p:nvSpPr>
-          <p:cNvPr id="8" name="TextBox 7"/>
+      <p:sp>
+        <p:nvSpPr>
+          <p:cNvPr id="7" name="TextBox 6"/>
           <p:cNvSpPr txBox="1"/>
           <p:nvPr/>
         </p:nvSpPr>
         <p:spPr>
           <a:xfrm>
-            <a:off x="731520" y="1554480"/>
-            <a:ext cx="7498079" cy="4206240"/>
+            <a:off x="731520" y="1463040"/>
+            <a:ext cx="10789920" cy="3474720"/>
           </a:xfrm>
           <a:prstGeom prst="rect">
             <a:avLst/>
@@ -15562,38 +14978,6 @@
             <a:spAutoFit/>
           </a:bodyPr>
           <a:lstStyle/>
-          <a:p>
-            <a:pPr algn="l">
-              <a:spcAft>
-                <a:spcPts val="800"/>
-              </a:spcAft>
-            </a:pPr>
-            <a:r>
-              <a:rPr sz="2600" b="1">
-                <a:solidFill>
-                  <a:srgbClr val="1E293B"/>
-                </a:solidFill>
-                <a:latin typeface="Calibri"/>
-              </a:rPr>
-              <a:t>🎬 Bài thơ Tiếng thu – Lưu Trọng Lư – Ngọc Sang diễn ngâm</a:t>
-            </a:r>
-          </a:p>
-          <a:p>
-            <a:pPr algn="l">
-              <a:spcAft>
-                <a:spcPts val="800"/>
-              </a:spcAft>
-            </a:pPr>
-            <a:r>
-              <a:rPr sz="2000">
-                <a:solidFill>
-                  <a:srgbClr val="64748B"/>
-                </a:solidFill>
-                <a:latin typeface="Calibri"/>
-              </a:rPr>
-              <a:t>Kênh: Nghệ sĩ ngâm thơ Ngọc Sang</a:t>
-            </a:r>
-          </a:p>
           <a:p>
             <a:pPr algn="l" marL="365760" indent="-365760">
               <a:spcAft>
@@ -15606,30 +14990,142 @@
               <a:buChar char="•"/>
             </a:pPr>
             <a:r>
-              <a:rPr sz="2000">
+              <a:rPr sz="2300">
                 <a:solidFill>
                   <a:srgbClr val="1E293B"/>
                 </a:solidFill>
                 <a:latin typeface="Calibri"/>
               </a:rPr>
-              <a:t>Mở đầu Văn bản 6 (thay cho bài hát phổ thơ)</a:t>
-            </a:r>
-          </a:p>
-          <a:p>
-            <a:pPr algn="l">
+              <a:t>“cũng như nội dung” thừa (đề tài, chủ đề đã là nội dung).</a:t>
+            </a:r>
+          </a:p>
+          <a:p>
+            <a:pPr algn="l" marL="365760" indent="-365760">
               <a:spcAft>
                 <a:spcPts val="800"/>
               </a:spcAft>
+              <a:buClr>
+                <a:srgbClr val="1E40AF"/>
+              </a:buClr>
+              <a:buFont typeface="Arial"/>
+              <a:buChar char="•"/>
             </a:pPr>
             <a:r>
-              <a:rPr sz="1600">
-                <a:solidFill>
-                  <a:srgbClr val="64748B"/>
+              <a:rPr sz="2300">
+                <a:solidFill>
+                  <a:srgbClr val="1E293B"/>
                 </a:solidFill>
                 <a:latin typeface="Calibri"/>
-                <a:hlinkClick r:id="rId3"/>
-              </a:rPr>
-              <a:t>https://www.youtube.com/watch?v=c5RVyHI_TeU</a:t>
+              </a:rPr>
+              <a:t>“đa dạng, khác nhau” trùng nghĩa.</a:t>
+            </a:r>
+          </a:p>
+          <a:p>
+            <a:pPr algn="l" marL="365760" indent="-365760">
+              <a:spcAft>
+                <a:spcPts val="800"/>
+              </a:spcAft>
+              <a:buClr>
+                <a:srgbClr val="1E40AF"/>
+              </a:buClr>
+              <a:buFont typeface="Arial"/>
+              <a:buChar char="•"/>
+            </a:pPr>
+            <a:r>
+              <a:rPr sz="2300">
+                <a:solidFill>
+                  <a:srgbClr val="1E293B"/>
+                </a:solidFill>
+                <a:latin typeface="Calibri"/>
+              </a:rPr>
+              <a:t>Sửa: “Đề tài, chủ đề, cảm hứng của các bài thơ hai-cư rất đa dạng.”</a:t>
+            </a:r>
+          </a:p>
+        </p:txBody>
+      </p:sp>
+      <p:sp>
+        <p:nvSpPr>
+          <p:cNvPr id="8" name="Rounded Rectangle 7"/>
+          <p:cNvSpPr/>
+          <p:nvPr/>
+        </p:nvSpPr>
+        <p:spPr>
+          <a:xfrm>
+            <a:off x="731520" y="5074920"/>
+            <a:ext cx="10789920" cy="731520"/>
+          </a:xfrm>
+          <a:prstGeom prst="roundRect">
+            <a:avLst>
+              <a:gd name="adj" fmla="val 8000"/>
+            </a:avLst>
+          </a:prstGeom>
+          <a:solidFill>
+            <a:srgbClr val="FEF2F2"/>
+          </a:solidFill>
+          <a:ln w="19050">
+            <a:solidFill>
+              <a:srgbClr val="991B1B"/>
+            </a:solidFill>
+          </a:ln>
+          <a:effectLst/>
+        </p:spPr>
+        <p:style>
+          <a:lnRef idx="1">
+            <a:schemeClr val="accent1"/>
+          </a:lnRef>
+          <a:fillRef idx="3">
+            <a:schemeClr val="accent1"/>
+          </a:fillRef>
+          <a:effectRef idx="2">
+            <a:schemeClr val="accent1"/>
+          </a:effectRef>
+          <a:fontRef idx="minor">
+            <a:schemeClr val="lt1"/>
+          </a:fontRef>
+        </p:style>
+        <p:txBody>
+          <a:bodyPr rtlCol="0" anchor="ctr"/>
+          <a:lstStyle/>
+          <a:p>
+            <a:pPr algn="ctr"/>
+          </a:p>
+        </p:txBody>
+      </p:sp>
+      <p:sp>
+        <p:nvSpPr>
+          <p:cNvPr id="9" name="TextBox 8"/>
+          <p:cNvSpPr txBox="1"/>
+          <p:nvPr/>
+        </p:nvSpPr>
+        <p:spPr>
+          <a:xfrm>
+            <a:off x="914400" y="5074920"/>
+            <a:ext cx="10424160" cy="731520"/>
+          </a:xfrm>
+          <a:prstGeom prst="rect">
+            <a:avLst/>
+          </a:prstGeom>
+          <a:noFill/>
+        </p:spPr>
+        <p:txBody>
+          <a:bodyPr wrap="square" anchor="ctr" lIns="45720" rIns="45720">
+            <a:spAutoFit/>
+          </a:bodyPr>
+          <a:lstStyle/>
+          <a:p>
+            <a:pPr algn="l">
+              <a:spcAft>
+                <a:spcPts val="400"/>
+              </a:spcAft>
+            </a:pPr>
+            <a:r>
+              <a:rPr sz="2400" b="1">
+                <a:solidFill>
+                  <a:srgbClr val="991B1B"/>
+                </a:solidFill>
+                <a:latin typeface="Calibri"/>
+              </a:rPr>
+              <a:t>Tránh lặp, thừa từ.</a:t>
             </a:r>
           </a:p>
         </p:txBody>
@@ -15786,7 +15282,7 @@
                 </a:solidFill>
                 <a:latin typeface="Arial"/>
               </a:rPr>
-              <a:t>TIẾNG THU VÀ TIẾNG THƠ</a:t>
+              <a:t>LỖI TRẬT TỰ TỪ</a:t>
             </a:r>
           </a:p>
         </p:txBody>
@@ -15904,7 +15400,7 @@
                 </a:solidFill>
                 <a:latin typeface="Calibri"/>
               </a:rPr>
-              <a:t>Theo Chu Văn Sơn, “tiếng thu” và “tiếng thơ” tương ứng với những bình diện nào? Khác biệt lớn nhất trong cách miêu tả thiên nhiên của Thơ mới so với thơ cổ điển?</a:t>
+              <a:t>Câu nào mắc lỗi trật tự từ? Sửa lại: “Một bộ phận độc giả đông đảo đã không cảm nhận được cái mới ngay trong thơ Hàn Mặc Tử.”</a:t>
             </a:r>
           </a:p>
         </p:txBody>
@@ -15991,7 +15487,7 @@
                 </a:solidFill>
                 <a:latin typeface="Calibri"/>
               </a:rPr>
-              <a:t>💡 Thơ cổ “nhìn” thiên nhiên, Thơ mới thì sao?</a:t>
+              <a:t>💡 “đông đảo” bổ nghĩa cho từ nào?</a:t>
             </a:r>
           </a:p>
         </p:txBody>
@@ -16148,7 +15644,7 @@
                 </a:solidFill>
                 <a:latin typeface="Arial"/>
               </a:rPr>
-              <a:t>TIẾNG THU VÀ TIẾNG THƠ</a:t>
+              <a:t>LỖI TRẬT TỰ TỪ</a:t>
             </a:r>
           </a:p>
         </p:txBody>
@@ -16271,7 +15767,7 @@
                 </a:solidFill>
                 <a:latin typeface="Calibri"/>
               </a:rPr>
-              <a:t>“Tiếng thu”: điệu hồn (nội dung); “tiếng thơ”: âm hưởng ngôn từ (hình thức).</a:t>
+              <a:t>Sai trật tự: “bộ phận độc giả đông đảo”.</a:t>
             </a:r>
           </a:p>
           <a:p>
@@ -16292,7 +15788,7 @@
                 </a:solidFill>
                 <a:latin typeface="Calibri"/>
               </a:rPr>
-              <a:t>Thơ cổ điển: thiên nhiên qua thị giác.</a:t>
+              <a:t>Sửa: “Một bộ phận đông đảo độc giả…”.</a:t>
             </a:r>
           </a:p>
           <a:p>
@@ -16313,28 +15809,7 @@
                 </a:solidFill>
                 <a:latin typeface="Calibri"/>
               </a:rPr>
-              <a:t>Thơ mới: thiên nhiên qua thính giác, cái tôi rung cảm.</a:t>
-            </a:r>
-          </a:p>
-          <a:p>
-            <a:pPr algn="l" marL="365760" indent="-365760">
-              <a:spcAft>
-                <a:spcPts val="800"/>
-              </a:spcAft>
-              <a:buClr>
-                <a:srgbClr val="1E40AF"/>
-              </a:buClr>
-              <a:buFont typeface="Arial"/>
-              <a:buChar char="•"/>
-            </a:pPr>
-            <a:r>
-              <a:rPr sz="2300">
-                <a:solidFill>
-                  <a:srgbClr val="1E293B"/>
-                </a:solidFill>
-                <a:latin typeface="Calibri"/>
-              </a:rPr>
-              <a:t>Thống kê 45 âm – 33 âm bằng → điệu êm đềm, tiêu tao.</a:t>
+              <a:t>Phân biệt lỗi trật tự từ với phép đảo ngữ trong văn học.</a:t>
             </a:r>
           </a:p>
         </p:txBody>
@@ -16421,7 +15896,7 @@
                 </a:solidFill>
                 <a:latin typeface="Calibri"/>
               </a:rPr>
-              <a:t>Sức hấp dẫn của thơ: cảm xúc hoà với nhạc điệu ngôn từ.</a:t>
+              <a:t>Sắp xếp từ đúng quy tắc ngữ pháp.</a:t>
             </a:r>
           </a:p>
         </p:txBody>
@@ -16530,7 +16005,7 @@
                 </a:solidFill>
                 <a:latin typeface="Calibri"/>
               </a:rPr>
-              <a:t>TIẾT 18: THỰC HÀNH TIẾNG VIỆT</a:t>
+              <a:t>TIẾT 19 – 22: VIẾT – NÓI VÀ NGHE</a:t>
             </a:r>
           </a:p>
         </p:txBody>
@@ -16613,14 +16088,14 @@
         </p:nvSpPr>
         <p:spPr>
           <a:xfrm>
-            <a:off x="10253167" y="457200"/>
-            <a:ext cx="1389888" cy="457200"/>
+            <a:off x="10097719" y="457200"/>
+            <a:ext cx="1545336" cy="457200"/>
           </a:xfrm>
           <a:prstGeom prst="roundRect">
             <a:avLst/>
           </a:prstGeom>
           <a:solidFill>
-            <a:srgbClr val="1E40AF"/>
+            <a:srgbClr val="166534"/>
           </a:solidFill>
           <a:ln>
             <a:noFill/>
@@ -16653,7 +16128,7 @@
                 </a:solidFill>
                 <a:latin typeface="Arial"/>
               </a:rPr>
-              <a:t>ĐỀ BÀI</a:t>
+              <a:t>GHI NHỚ</a:t>
             </a:r>
           </a:p>
         </p:txBody>
@@ -16667,7 +16142,7 @@
         <p:spPr>
           <a:xfrm>
             <a:off x="731520" y="274320"/>
-            <a:ext cx="9582912" cy="868680"/>
+            <a:ext cx="9427464" cy="868680"/>
           </a:xfrm>
           <a:prstGeom prst="rect">
             <a:avLst/>
@@ -16687,7 +16162,7 @@
                 </a:solidFill>
                 <a:latin typeface="Arial"/>
               </a:rPr>
-              <a:t>LỖI DÙNG TỪ</a:t>
+              <a:t>YÊU CẦU BÀI PHÂN TÍCH THƠ</a:t>
             </a:r>
           </a:p>
         </p:txBody>
@@ -16780,7 +16255,7 @@
         <p:spPr>
           <a:xfrm>
             <a:off x="731520" y="1463040"/>
-            <a:ext cx="10789920" cy="3566160"/>
+            <a:ext cx="10789920" cy="4754880"/>
           </a:xfrm>
           <a:prstGeom prst="rect">
             <a:avLst/>
@@ -16793,106 +16268,87 @@
           </a:bodyPr>
           <a:lstStyle/>
           <a:p>
-            <a:pPr algn="l">
+            <a:pPr algn="l" marL="365760" indent="-365760">
               <a:spcAft>
                 <a:spcPts val="800"/>
               </a:spcAft>
+              <a:buClr>
+                <a:srgbClr val="1E40AF"/>
+              </a:buClr>
+              <a:buFont typeface="Arial"/>
+              <a:buChar char="•"/>
             </a:pPr>
             <a:r>
-              <a:rPr sz="2600" b="1">
+              <a:rPr sz="2400">
                 <a:solidFill>
                   <a:srgbClr val="1E293B"/>
                 </a:solidFill>
                 <a:latin typeface="Calibri"/>
               </a:rPr>
-              <a:t>Tìm lỗi và sửa: “Đề tài, chủ đề, cảm hứng cũng như nội dung của các bài thơ hai-cư rất đa dạng, khác nhau.”</a:t>
-            </a:r>
-          </a:p>
-        </p:txBody>
-      </p:sp>
-      <p:sp>
-        <p:nvSpPr>
-          <p:cNvPr id="8" name="Rounded Rectangle 7"/>
-          <p:cNvSpPr/>
-          <p:nvPr/>
-        </p:nvSpPr>
-        <p:spPr>
-          <a:xfrm>
-            <a:off x="731520" y="5120640"/>
-            <a:ext cx="10789920" cy="693420"/>
-          </a:xfrm>
-          <a:prstGeom prst="roundRect">
-            <a:avLst>
-              <a:gd name="adj" fmla="val 8000"/>
-            </a:avLst>
-          </a:prstGeom>
-          <a:solidFill>
-            <a:srgbClr val="EFF4FF"/>
-          </a:solidFill>
-          <a:ln w="19050">
-            <a:solidFill>
-              <a:srgbClr val="1E40AF"/>
-            </a:solidFill>
-          </a:ln>
-          <a:effectLst/>
-        </p:spPr>
-        <p:style>
-          <a:lnRef idx="1">
-            <a:schemeClr val="accent1"/>
-          </a:lnRef>
-          <a:fillRef idx="3">
-            <a:schemeClr val="accent1"/>
-          </a:fillRef>
-          <a:effectRef idx="2">
-            <a:schemeClr val="accent1"/>
-          </a:effectRef>
-          <a:fontRef idx="minor">
-            <a:schemeClr val="lt1"/>
-          </a:fontRef>
-        </p:style>
-        <p:txBody>
-          <a:bodyPr rtlCol="0" anchor="ctr"/>
-          <a:lstStyle/>
-          <a:p>
-            <a:pPr algn="ctr"/>
-          </a:p>
-        </p:txBody>
-      </p:sp>
-      <p:sp>
-        <p:nvSpPr>
-          <p:cNvPr id="9" name="TextBox 8"/>
-          <p:cNvSpPr txBox="1"/>
-          <p:nvPr/>
-        </p:nvSpPr>
-        <p:spPr>
-          <a:xfrm>
-            <a:off x="914400" y="5120640"/>
-            <a:ext cx="10424160" cy="693420"/>
-          </a:xfrm>
-          <a:prstGeom prst="rect">
-            <a:avLst/>
-          </a:prstGeom>
-          <a:noFill/>
-        </p:spPr>
-        <p:txBody>
-          <a:bodyPr wrap="square" anchor="ctr" lIns="45720" rIns="45720">
-            <a:spAutoFit/>
-          </a:bodyPr>
-          <a:lstStyle/>
-          <a:p>
-            <a:pPr algn="l">
+              <a:t>Giới thiệu bài thơ: tác giả, hoàn cảnh, trào lưu, lí do chọn.</a:t>
+            </a:r>
+          </a:p>
+          <a:p>
+            <a:pPr algn="l" marL="365760" indent="-365760">
               <a:spcAft>
-                <a:spcPts val="400"/>
+                <a:spcPts val="800"/>
               </a:spcAft>
+              <a:buClr>
+                <a:srgbClr val="1E40AF"/>
+              </a:buClr>
+              <a:buFont typeface="Arial"/>
+              <a:buChar char="•"/>
             </a:pPr>
             <a:r>
-              <a:rPr sz="2200" b="1">
-                <a:solidFill>
-                  <a:srgbClr val="1E40AF"/>
+              <a:rPr sz="2400">
+                <a:solidFill>
+                  <a:srgbClr val="1E293B"/>
                 </a:solidFill>
                 <a:latin typeface="Calibri"/>
               </a:rPr>
-              <a:t>💡 Có từ nào thừa, trùng nghĩa?</a:t>
+              <a:t>Phân tích nét đặc sắc: từ ngữ, hình ảnh, nhịp điệu, nhạc điệu, mạch cảm xúc.</a:t>
+            </a:r>
+          </a:p>
+          <a:p>
+            <a:pPr algn="l" marL="365760" indent="-365760">
+              <a:spcAft>
+                <a:spcPts val="800"/>
+              </a:spcAft>
+              <a:buClr>
+                <a:srgbClr val="1E40AF"/>
+              </a:buClr>
+              <a:buFont typeface="Arial"/>
+              <a:buChar char="•"/>
+            </a:pPr>
+            <a:r>
+              <a:rPr sz="2400">
+                <a:solidFill>
+                  <a:srgbClr val="1E293B"/>
+                </a:solidFill>
+                <a:latin typeface="Calibri"/>
+              </a:rPr>
+              <a:t>Đánh giá giá trị nghệ thuật và ý nghĩa nhân sinh.</a:t>
+            </a:r>
+          </a:p>
+          <a:p>
+            <a:pPr algn="l" marL="365760" indent="-365760">
+              <a:spcAft>
+                <a:spcPts val="800"/>
+              </a:spcAft>
+              <a:buClr>
+                <a:srgbClr val="1E40AF"/>
+              </a:buClr>
+              <a:buFont typeface="Arial"/>
+              <a:buChar char="•"/>
+            </a:pPr>
+            <a:r>
+              <a:rPr sz="2400">
+                <a:solidFill>
+                  <a:srgbClr val="1E293B"/>
+                </a:solidFill>
+                <a:latin typeface="Calibri"/>
+              </a:rPr>
+              <a:t>Tránh diễn xuôi bài thơ.</a:t>
             </a:r>
           </a:p>
         </p:txBody>
@@ -17266,14 +16722,14 @@
         </p:nvSpPr>
         <p:spPr>
           <a:xfrm>
-            <a:off x="9942271" y="457200"/>
-            <a:ext cx="1700784" cy="457200"/>
+            <a:off x="10253167" y="457200"/>
+            <a:ext cx="1389888" cy="457200"/>
           </a:xfrm>
           <a:prstGeom prst="roundRect">
             <a:avLst/>
           </a:prstGeom>
           <a:solidFill>
-            <a:srgbClr val="991B1B"/>
+            <a:srgbClr val="1E40AF"/>
           </a:solidFill>
           <a:ln>
             <a:noFill/>
@@ -17306,7 +16762,7 @@
                 </a:solidFill>
                 <a:latin typeface="Arial"/>
               </a:rPr>
-              <a:t>LỜI GIẢI</a:t>
+              <a:t>ĐỀ BÀI</a:t>
             </a:r>
           </a:p>
         </p:txBody>
@@ -17320,7 +16776,7 @@
         <p:spPr>
           <a:xfrm>
             <a:off x="731520" y="274320"/>
-            <a:ext cx="9272016" cy="868680"/>
+            <a:ext cx="9582912" cy="868680"/>
           </a:xfrm>
           <a:prstGeom prst="rect">
             <a:avLst/>
@@ -17340,7 +16796,7 @@
                 </a:solidFill>
                 <a:latin typeface="Arial"/>
               </a:rPr>
-              <a:t>LỖI DÙNG TỪ</a:t>
+              <a:t>ĐỀ THỰC HÀNH VIẾT</a:t>
             </a:r>
           </a:p>
         </p:txBody>
@@ -17433,7 +16889,7 @@
         <p:spPr>
           <a:xfrm>
             <a:off x="731520" y="1463040"/>
-            <a:ext cx="10789920" cy="3474720"/>
+            <a:ext cx="10789920" cy="3566160"/>
           </a:xfrm>
           <a:prstGeom prst="rect">
             <a:avLst/>
@@ -17446,66 +16902,19 @@
           </a:bodyPr>
           <a:lstStyle/>
           <a:p>
-            <a:pPr algn="l" marL="365760" indent="-365760">
+            <a:pPr algn="l">
               <a:spcAft>
                 <a:spcPts val="800"/>
               </a:spcAft>
-              <a:buClr>
-                <a:srgbClr val="1E40AF"/>
-              </a:buClr>
-              <a:buFont typeface="Arial"/>
-              <a:buChar char="•"/>
             </a:pPr>
             <a:r>
-              <a:rPr sz="2300">
+              <a:rPr sz="2600" b="1">
                 <a:solidFill>
                   <a:srgbClr val="1E293B"/>
                 </a:solidFill>
                 <a:latin typeface="Calibri"/>
               </a:rPr>
-              <a:t>“cũng như nội dung” thừa (đề tài, chủ đề đã là nội dung).</a:t>
-            </a:r>
-          </a:p>
-          <a:p>
-            <a:pPr algn="l" marL="365760" indent="-365760">
-              <a:spcAft>
-                <a:spcPts val="800"/>
-              </a:spcAft>
-              <a:buClr>
-                <a:srgbClr val="1E40AF"/>
-              </a:buClr>
-              <a:buFont typeface="Arial"/>
-              <a:buChar char="•"/>
-            </a:pPr>
-            <a:r>
-              <a:rPr sz="2300">
-                <a:solidFill>
-                  <a:srgbClr val="1E293B"/>
-                </a:solidFill>
-                <a:latin typeface="Calibri"/>
-              </a:rPr>
-              <a:t>“đa dạng, khác nhau” trùng nghĩa.</a:t>
-            </a:r>
-          </a:p>
-          <a:p>
-            <a:pPr algn="l" marL="365760" indent="-365760">
-              <a:spcAft>
-                <a:spcPts val="800"/>
-              </a:spcAft>
-              <a:buClr>
-                <a:srgbClr val="1E40AF"/>
-              </a:buClr>
-              <a:buFont typeface="Arial"/>
-              <a:buChar char="•"/>
-            </a:pPr>
-            <a:r>
-              <a:rPr sz="2300">
-                <a:solidFill>
-                  <a:srgbClr val="1E293B"/>
-                </a:solidFill>
-                <a:latin typeface="Calibri"/>
-              </a:rPr>
-              <a:t>Sửa: “Đề tài, chủ đề, cảm hứng của các bài thơ hai-cư rất đa dạng.”</a:t>
+              <a:t>Phân tích, đánh giá chủ đề và nét đặc sắc nghệ thuật của bài thơ Mùa xuân chín (Hàn Mặc Tử).</a:t>
             </a:r>
           </a:p>
         </p:txBody>
@@ -17518,8 +16927,8 @@
         </p:nvSpPr>
         <p:spPr>
           <a:xfrm>
-            <a:off x="731520" y="5074920"/>
-            <a:ext cx="10789920" cy="731520"/>
+            <a:off x="731520" y="5120640"/>
+            <a:ext cx="10789920" cy="693420"/>
           </a:xfrm>
           <a:prstGeom prst="roundRect">
             <a:avLst>
@@ -17527,11 +16936,11 @@
             </a:avLst>
           </a:prstGeom>
           <a:solidFill>
-            <a:srgbClr val="FEF2F2"/>
+            <a:srgbClr val="EFF4FF"/>
           </a:solidFill>
           <a:ln w="19050">
             <a:solidFill>
-              <a:srgbClr val="991B1B"/>
+              <a:srgbClr val="1E40AF"/>
             </a:solidFill>
           </a:ln>
           <a:effectLst/>
@@ -17566,8 +16975,8 @@
         </p:nvSpPr>
         <p:spPr>
           <a:xfrm>
-            <a:off x="914400" y="5074920"/>
-            <a:ext cx="10424160" cy="731520"/>
+            <a:off x="914400" y="5120640"/>
+            <a:ext cx="10424160" cy="693420"/>
           </a:xfrm>
           <a:prstGeom prst="rect">
             <a:avLst/>
@@ -17586,13 +16995,13 @@
               </a:spcAft>
             </a:pPr>
             <a:r>
-              <a:rPr sz="2400" b="1">
-                <a:solidFill>
-                  <a:srgbClr val="991B1B"/>
+              <a:rPr sz="2200" b="1">
+                <a:solidFill>
+                  <a:srgbClr val="1E40AF"/>
                 </a:solidFill>
                 <a:latin typeface="Calibri"/>
               </a:rPr>
-              <a:t>Tránh lặp, thừa từ.</a:t>
+              <a:t>💡 Lập dàn ý theo mạch khổ thơ hoặc theo luận điểm.</a:t>
             </a:r>
           </a:p>
         </p:txBody>
@@ -17675,14 +17084,14 @@
         </p:nvSpPr>
         <p:spPr>
           <a:xfrm>
-            <a:off x="10253167" y="457200"/>
-            <a:ext cx="1389888" cy="457200"/>
+            <a:off x="9942271" y="457200"/>
+            <a:ext cx="1700784" cy="457200"/>
           </a:xfrm>
           <a:prstGeom prst="roundRect">
             <a:avLst/>
           </a:prstGeom>
           <a:solidFill>
-            <a:srgbClr val="1E40AF"/>
+            <a:srgbClr val="991B1B"/>
           </a:solidFill>
           <a:ln>
             <a:noFill/>
@@ -17715,7 +17124,7 @@
                 </a:solidFill>
                 <a:latin typeface="Arial"/>
               </a:rPr>
-              <a:t>ĐỀ BÀI</a:t>
+              <a:t>LỜI GIẢI</a:t>
             </a:r>
           </a:p>
         </p:txBody>
@@ -17729,7 +17138,7 @@
         <p:spPr>
           <a:xfrm>
             <a:off x="731520" y="274320"/>
-            <a:ext cx="9582912" cy="868680"/>
+            <a:ext cx="9272016" cy="868680"/>
           </a:xfrm>
           <a:prstGeom prst="rect">
             <a:avLst/>
@@ -17749,7 +17158,7 @@
                 </a:solidFill>
                 <a:latin typeface="Arial"/>
               </a:rPr>
-              <a:t>LỖI TRẬT TỰ TỪ</a:t>
+              <a:t>ĐỀ THỰC HÀNH VIẾT</a:t>
             </a:r>
           </a:p>
         </p:txBody>
@@ -17842,7 +17251,7 @@
         <p:spPr>
           <a:xfrm>
             <a:off x="731520" y="1463040"/>
-            <a:ext cx="10789920" cy="3566160"/>
+            <a:ext cx="10789920" cy="3474720"/>
           </a:xfrm>
           <a:prstGeom prst="rect">
             <a:avLst/>
@@ -17855,19 +17264,87 @@
           </a:bodyPr>
           <a:lstStyle/>
           <a:p>
-            <a:pPr algn="l">
+            <a:pPr algn="l" marL="365760" indent="-365760">
               <a:spcAft>
                 <a:spcPts val="800"/>
               </a:spcAft>
+              <a:buClr>
+                <a:srgbClr val="1E40AF"/>
+              </a:buClr>
+              <a:buFont typeface="Arial"/>
+              <a:buChar char="•"/>
             </a:pPr>
             <a:r>
-              <a:rPr sz="2600" b="1">
+              <a:rPr sz="2300">
                 <a:solidFill>
                   <a:srgbClr val="1E293B"/>
                 </a:solidFill>
                 <a:latin typeface="Calibri"/>
               </a:rPr>
-              <a:t>Câu nào mắc lỗi trật tự từ? Sửa lại: “Một bộ phận độc giả đông đảo đã không cảm nhận được cái mới ngay trong thơ Hàn Mặc Tử.”</a:t>
+              <a:t>MB: giới thiệu Hàn Mặc Tử, bài thơ.</a:t>
+            </a:r>
+          </a:p>
+          <a:p>
+            <a:pPr algn="l" marL="365760" indent="-365760">
+              <a:spcAft>
+                <a:spcPts val="800"/>
+              </a:spcAft>
+              <a:buClr>
+                <a:srgbClr val="1E40AF"/>
+              </a:buClr>
+              <a:buFont typeface="Arial"/>
+              <a:buChar char="•"/>
+            </a:pPr>
+            <a:r>
+              <a:rPr sz="2300">
+                <a:solidFill>
+                  <a:srgbClr val="1E293B"/>
+                </a:solidFill>
+                <a:latin typeface="Calibri"/>
+              </a:rPr>
+              <a:t>TB: bức tranh xuân “chín” → âm thanh, con người → nỗi nhớ làng → nghệ thuật.</a:t>
+            </a:r>
+          </a:p>
+          <a:p>
+            <a:pPr algn="l" marL="365760" indent="-365760">
+              <a:spcAft>
+                <a:spcPts val="800"/>
+              </a:spcAft>
+              <a:buClr>
+                <a:srgbClr val="1E40AF"/>
+              </a:buClr>
+              <a:buFont typeface="Arial"/>
+              <a:buChar char="•"/>
+            </a:pPr>
+            <a:r>
+              <a:rPr sz="2300">
+                <a:solidFill>
+                  <a:srgbClr val="1E293B"/>
+                </a:solidFill>
+                <a:latin typeface="Calibri"/>
+              </a:rPr>
+              <a:t>Đánh giá giá trị nghệ thuật, ý nghĩa nhân sinh.</a:t>
+            </a:r>
+          </a:p>
+          <a:p>
+            <a:pPr algn="l" marL="365760" indent="-365760">
+              <a:spcAft>
+                <a:spcPts val="800"/>
+              </a:spcAft>
+              <a:buClr>
+                <a:srgbClr val="1E40AF"/>
+              </a:buClr>
+              <a:buFont typeface="Arial"/>
+              <a:buChar char="•"/>
+            </a:pPr>
+            <a:r>
+              <a:rPr sz="2300">
+                <a:solidFill>
+                  <a:srgbClr val="1E293B"/>
+                </a:solidFill>
+                <a:latin typeface="Calibri"/>
+              </a:rPr>
+              <a:t>KB: khẳng định giá trị, cảm nghĩ riêng.</a:t>
             </a:r>
           </a:p>
         </p:txBody>
@@ -17880,8 +17357,8 @@
         </p:nvSpPr>
         <p:spPr>
           <a:xfrm>
-            <a:off x="731520" y="5120640"/>
-            <a:ext cx="10789920" cy="693420"/>
+            <a:off x="731520" y="5074920"/>
+            <a:ext cx="10789920" cy="731520"/>
           </a:xfrm>
           <a:prstGeom prst="roundRect">
             <a:avLst>
@@ -17889,11 +17366,11 @@
             </a:avLst>
           </a:prstGeom>
           <a:solidFill>
-            <a:srgbClr val="EFF4FF"/>
+            <a:srgbClr val="FEF2F2"/>
           </a:solidFill>
           <a:ln w="19050">
             <a:solidFill>
-              <a:srgbClr val="1E40AF"/>
+              <a:srgbClr val="991B1B"/>
             </a:solidFill>
           </a:ln>
           <a:effectLst/>
@@ -17928,8 +17405,8 @@
         </p:nvSpPr>
         <p:spPr>
           <a:xfrm>
-            <a:off x="914400" y="5120640"/>
-            <a:ext cx="10424160" cy="693420"/>
+            <a:off x="914400" y="5074920"/>
+            <a:ext cx="10424160" cy="731520"/>
           </a:xfrm>
           <a:prstGeom prst="rect">
             <a:avLst/>
@@ -17948,13 +17425,13 @@
               </a:spcAft>
             </a:pPr>
             <a:r>
-              <a:rPr sz="2200" b="1">
-                <a:solidFill>
-                  <a:srgbClr val="1E40AF"/>
+              <a:rPr sz="2400" b="1">
+                <a:solidFill>
+                  <a:srgbClr val="991B1B"/>
                 </a:solidFill>
                 <a:latin typeface="Calibri"/>
               </a:rPr>
-              <a:t>💡 “đông đảo” bổ nghĩa cho từ nào?</a:t>
+              <a:t>Gắn phân tích hình thức với cảm xúc.</a:t>
             </a:r>
           </a:p>
         </p:txBody>
@@ -18037,14 +17514,14 @@
         </p:nvSpPr>
         <p:spPr>
           <a:xfrm>
-            <a:off x="9942271" y="457200"/>
-            <a:ext cx="1700784" cy="457200"/>
+            <a:off x="10097719" y="457200"/>
+            <a:ext cx="1545336" cy="457200"/>
           </a:xfrm>
           <a:prstGeom prst="roundRect">
             <a:avLst/>
           </a:prstGeom>
           <a:solidFill>
-            <a:srgbClr val="991B1B"/>
+            <a:srgbClr val="166534"/>
           </a:solidFill>
           <a:ln>
             <a:noFill/>
@@ -18077,7 +17554,7 @@
                 </a:solidFill>
                 <a:latin typeface="Arial"/>
               </a:rPr>
-              <a:t>LỜI GIẢI</a:t>
+              <a:t>CỦNG CỐ</a:t>
             </a:r>
           </a:p>
         </p:txBody>
@@ -18091,7 +17568,7 @@
         <p:spPr>
           <a:xfrm>
             <a:off x="731520" y="274320"/>
-            <a:ext cx="9272016" cy="868680"/>
+            <a:ext cx="9427464" cy="868680"/>
           </a:xfrm>
           <a:prstGeom prst="rect">
             <a:avLst/>
@@ -18111,7 +17588,7 @@
                 </a:solidFill>
                 <a:latin typeface="Arial"/>
               </a:rPr>
-              <a:t>LỖI TRẬT TỰ TỪ</a:t>
+              <a:t>SƠ ĐỒ TƯ DUY</a:t>
             </a:r>
           </a:p>
         </p:txBody>
@@ -18195,179 +17672,30 @@
           </a:p>
         </p:txBody>
       </p:sp>
-      <p:sp>
-        <p:nvSpPr>
-          <p:cNvPr id="7" name="TextBox 6"/>
-          <p:cNvSpPr txBox="1"/>
-          <p:nvPr/>
-        </p:nvSpPr>
-        <p:spPr>
-          <a:xfrm>
-            <a:off x="731520" y="1463040"/>
-            <a:ext cx="10789920" cy="3474720"/>
-          </a:xfrm>
-          <a:prstGeom prst="rect">
-            <a:avLst/>
-          </a:prstGeom>
-          <a:noFill/>
-        </p:spPr>
-        <p:txBody>
-          <a:bodyPr wrap="square" anchor="t" lIns="45720" rIns="45720">
-            <a:spAutoFit/>
-          </a:bodyPr>
-          <a:lstStyle/>
-          <a:p>
-            <a:pPr algn="l" marL="365760" indent="-365760">
-              <a:spcAft>
-                <a:spcPts val="800"/>
-              </a:spcAft>
-              <a:buClr>
-                <a:srgbClr val="1E40AF"/>
-              </a:buClr>
-              <a:buFont typeface="Arial"/>
-              <a:buChar char="•"/>
-            </a:pPr>
-            <a:r>
-              <a:rPr sz="2300">
-                <a:solidFill>
-                  <a:srgbClr val="1E293B"/>
-                </a:solidFill>
-                <a:latin typeface="Calibri"/>
-              </a:rPr>
-              <a:t>Sai trật tự: “bộ phận độc giả đông đảo”.</a:t>
-            </a:r>
-          </a:p>
-          <a:p>
-            <a:pPr algn="l" marL="365760" indent="-365760">
-              <a:spcAft>
-                <a:spcPts val="800"/>
-              </a:spcAft>
-              <a:buClr>
-                <a:srgbClr val="1E40AF"/>
-              </a:buClr>
-              <a:buFont typeface="Arial"/>
-              <a:buChar char="•"/>
-            </a:pPr>
-            <a:r>
-              <a:rPr sz="2300">
-                <a:solidFill>
-                  <a:srgbClr val="1E293B"/>
-                </a:solidFill>
-                <a:latin typeface="Calibri"/>
-              </a:rPr>
-              <a:t>Sửa: “Một bộ phận đông đảo độc giả…”.</a:t>
-            </a:r>
-          </a:p>
-          <a:p>
-            <a:pPr algn="l" marL="365760" indent="-365760">
-              <a:spcAft>
-                <a:spcPts val="800"/>
-              </a:spcAft>
-              <a:buClr>
-                <a:srgbClr val="1E40AF"/>
-              </a:buClr>
-              <a:buFont typeface="Arial"/>
-              <a:buChar char="•"/>
-            </a:pPr>
-            <a:r>
-              <a:rPr sz="2300">
-                <a:solidFill>
-                  <a:srgbClr val="1E293B"/>
-                </a:solidFill>
-                <a:latin typeface="Calibri"/>
-              </a:rPr>
-              <a:t>Phân biệt lỗi trật tự từ với phép đảo ngữ trong văn học.</a:t>
-            </a:r>
-          </a:p>
-        </p:txBody>
-      </p:sp>
-      <p:sp>
-        <p:nvSpPr>
-          <p:cNvPr id="8" name="Rounded Rectangle 7"/>
-          <p:cNvSpPr/>
-          <p:nvPr/>
-        </p:nvSpPr>
-        <p:spPr>
-          <a:xfrm>
-            <a:off x="731520" y="5074920"/>
-            <a:ext cx="10789920" cy="731520"/>
-          </a:xfrm>
-          <a:prstGeom prst="roundRect">
-            <a:avLst>
-              <a:gd name="adj" fmla="val 8000"/>
-            </a:avLst>
-          </a:prstGeom>
-          <a:solidFill>
-            <a:srgbClr val="FEF2F2"/>
-          </a:solidFill>
-          <a:ln w="19050">
-            <a:solidFill>
-              <a:srgbClr val="991B1B"/>
-            </a:solidFill>
-          </a:ln>
-          <a:effectLst/>
-        </p:spPr>
-        <p:style>
-          <a:lnRef idx="1">
-            <a:schemeClr val="accent1"/>
-          </a:lnRef>
-          <a:fillRef idx="3">
-            <a:schemeClr val="accent1"/>
-          </a:fillRef>
-          <a:effectRef idx="2">
-            <a:schemeClr val="accent1"/>
-          </a:effectRef>
-          <a:fontRef idx="minor">
-            <a:schemeClr val="lt1"/>
-          </a:fontRef>
-        </p:style>
-        <p:txBody>
-          <a:bodyPr rtlCol="0" anchor="ctr"/>
-          <a:lstStyle/>
-          <a:p>
-            <a:pPr algn="ctr"/>
-          </a:p>
-        </p:txBody>
-      </p:sp>
-      <p:sp>
-        <p:nvSpPr>
-          <p:cNvPr id="9" name="TextBox 8"/>
-          <p:cNvSpPr txBox="1"/>
-          <p:nvPr/>
-        </p:nvSpPr>
-        <p:spPr>
-          <a:xfrm>
-            <a:off x="914400" y="5074920"/>
-            <a:ext cx="10424160" cy="731520"/>
-          </a:xfrm>
-          <a:prstGeom prst="rect">
-            <a:avLst/>
-          </a:prstGeom>
-          <a:noFill/>
-        </p:spPr>
-        <p:txBody>
-          <a:bodyPr wrap="square" anchor="ctr" lIns="45720" rIns="45720">
-            <a:spAutoFit/>
-          </a:bodyPr>
-          <a:lstStyle/>
-          <a:p>
-            <a:pPr algn="l">
-              <a:spcAft>
-                <a:spcPts val="400"/>
-              </a:spcAft>
-            </a:pPr>
-            <a:r>
-              <a:rPr sz="2400" b="1">
-                <a:solidFill>
-                  <a:srgbClr val="991B1B"/>
-                </a:solidFill>
-                <a:latin typeface="Calibri"/>
-              </a:rPr>
-              <a:t>Sắp xếp từ đúng quy tắc ngữ pháp.</a:t>
-            </a:r>
-          </a:p>
-        </p:txBody>
-      </p:sp>
+      <p:pic>
+        <p:nvPicPr>
+          <p:cNvPr id="7" name="Picture 6" descr="SoDoTuDuy_NGUVAN10_Bai2_VeDepCuaThoCa_T12-22.png"/>
+          <p:cNvPicPr>
+            <a:picLocks noChangeAspect="1"/>
+          </p:cNvPicPr>
+          <p:nvPr/>
+        </p:nvPicPr>
+        <p:blipFill>
+          <a:blip r:embed="rId2"/>
+          <a:stretch>
+            <a:fillRect/>
+          </a:stretch>
+        </p:blipFill>
+        <p:spPr>
+          <a:xfrm>
+            <a:off x="1788855" y="1371600"/>
+            <a:ext cx="8675250" cy="4846320"/>
+          </a:xfrm>
+          <a:prstGeom prst="rect">
+            <a:avLst/>
+          </a:prstGeom>
+        </p:spPr>
+      </p:pic>
     </p:spTree>
   </p:cSld>
   <p:clrMapOvr>
@@ -18377,115 +17705,6 @@
 </file>
 
 <file path=ppt/slides/slide43.xml><?xml version="1.0" encoding="utf-8"?>
-<p:sld xmlns:a="http://schemas.openxmlformats.org/drawingml/2006/main" xmlns:p="http://schemas.openxmlformats.org/presentationml/2006/main" xmlns:r="http://schemas.openxmlformats.org/officeDocument/2006/relationships">
-  <p:cSld>
-    <p:bg>
-      <p:bgPr>
-        <a:solidFill>
-          <a:srgbClr val="F8F9FA"/>
-        </a:solidFill>
-        <a:effectLst/>
-      </p:bgPr>
-    </p:bg>
-    <p:spTree>
-      <p:nvGrpSpPr>
-        <p:cNvPr id="1" name=""/>
-        <p:cNvGrpSpPr/>
-        <p:nvPr/>
-      </p:nvGrpSpPr>
-      <p:grpSpPr/>
-      <p:sp>
-        <p:nvSpPr>
-          <p:cNvPr id="2" name="Rectangle 1"/>
-          <p:cNvSpPr/>
-          <p:nvPr/>
-        </p:nvSpPr>
-        <p:spPr>
-          <a:xfrm>
-            <a:off x="548640" y="2926080"/>
-            <a:ext cx="164592" cy="1005840"/>
-          </a:xfrm>
-          <a:prstGeom prst="rect">
-            <a:avLst/>
-          </a:prstGeom>
-          <a:solidFill>
-            <a:srgbClr val="991B1B"/>
-          </a:solidFill>
-          <a:ln>
-            <a:noFill/>
-          </a:ln>
-          <a:effectLst/>
-        </p:spPr>
-        <p:style>
-          <a:lnRef idx="1">
-            <a:schemeClr val="accent1"/>
-          </a:lnRef>
-          <a:fillRef idx="3">
-            <a:schemeClr val="accent1"/>
-          </a:fillRef>
-          <a:effectRef idx="2">
-            <a:schemeClr val="accent1"/>
-          </a:effectRef>
-          <a:fontRef idx="minor">
-            <a:schemeClr val="lt1"/>
-          </a:fontRef>
-        </p:style>
-        <p:txBody>
-          <a:bodyPr rtlCol="0" anchor="ctr"/>
-          <a:lstStyle/>
-          <a:p>
-            <a:pPr algn="ctr"/>
-          </a:p>
-        </p:txBody>
-      </p:sp>
-      <p:sp>
-        <p:nvSpPr>
-          <p:cNvPr id="3" name="TextBox 2"/>
-          <p:cNvSpPr txBox="1"/>
-          <p:nvPr/>
-        </p:nvSpPr>
-        <p:spPr>
-          <a:xfrm>
-            <a:off x="914400" y="2743200"/>
-            <a:ext cx="10515600" cy="1371600"/>
-          </a:xfrm>
-          <a:prstGeom prst="rect">
-            <a:avLst/>
-          </a:prstGeom>
-          <a:noFill/>
-        </p:spPr>
-        <p:txBody>
-          <a:bodyPr wrap="square" anchor="ctr" lIns="45720" rIns="45720">
-            <a:spAutoFit/>
-          </a:bodyPr>
-          <a:lstStyle/>
-          <a:p>
-            <a:pPr algn="l">
-              <a:spcAft>
-                <a:spcPts val="800"/>
-              </a:spcAft>
-            </a:pPr>
-            <a:r>
-              <a:rPr sz="3600" b="1">
-                <a:solidFill>
-                  <a:srgbClr val="1E40AF"/>
-                </a:solidFill>
-                <a:latin typeface="Calibri"/>
-              </a:rPr>
-              <a:t>TIẾT 19 – 22: VIẾT – NÓI VÀ NGHE</a:t>
-            </a:r>
-          </a:p>
-        </p:txBody>
-      </p:sp>
-    </p:spTree>
-  </p:cSld>
-  <p:clrMapOvr>
-    <a:masterClrMapping/>
-  </p:clrMapOvr>
-</p:sld>
-</file>
-
-<file path=ppt/slides/slide44.xml><?xml version="1.0" encoding="utf-8"?>
 <p:sld xmlns:a="http://schemas.openxmlformats.org/drawingml/2006/main" xmlns:p="http://schemas.openxmlformats.org/presentationml/2006/main" xmlns:r="http://schemas.openxmlformats.org/officeDocument/2006/relationships">
   <p:cSld>
     <p:bg>
@@ -18562,7 +17781,7 @@
             <a:avLst/>
           </a:prstGeom>
           <a:solidFill>
-            <a:srgbClr val="166534"/>
+            <a:srgbClr val="991B1B"/>
           </a:solidFill>
           <a:ln>
             <a:noFill/>
@@ -18595,7 +17814,7 @@
                 </a:solidFill>
                 <a:latin typeface="Arial"/>
               </a:rPr>
-              <a:t>GHI NHỚ</a:t>
+              <a:t>CỦNG CỐ</a:t>
             </a:r>
           </a:p>
         </p:txBody>
@@ -18629,7 +17848,7 @@
                 </a:solidFill>
                 <a:latin typeface="Arial"/>
               </a:rPr>
-              <a:t>YÊU CẦU BÀI PHÂN TÍCH THƠ</a:t>
+              <a:t>BÀI TẬP CỦA BẠN</a:t>
             </a:r>
           </a:p>
         </p:txBody>
@@ -18708,1402 +17927,7 @@
                 </a:solidFill>
                 <a:latin typeface="Calibri"/>
               </a:rPr>
-              <a:t>Ngữ văn 10 · Bài 2: Vẻ Đẹp Của Thơ Ca          44</a:t>
-            </a:r>
-          </a:p>
-        </p:txBody>
-      </p:sp>
-      <p:sp>
-        <p:nvSpPr>
-          <p:cNvPr id="7" name="TextBox 6"/>
-          <p:cNvSpPr txBox="1"/>
-          <p:nvPr/>
-        </p:nvSpPr>
-        <p:spPr>
-          <a:xfrm>
-            <a:off x="731520" y="1463040"/>
-            <a:ext cx="10789920" cy="4754880"/>
-          </a:xfrm>
-          <a:prstGeom prst="rect">
-            <a:avLst/>
-          </a:prstGeom>
-          <a:noFill/>
-        </p:spPr>
-        <p:txBody>
-          <a:bodyPr wrap="square" anchor="t" lIns="45720" rIns="45720">
-            <a:spAutoFit/>
-          </a:bodyPr>
-          <a:lstStyle/>
-          <a:p>
-            <a:pPr algn="l" marL="365760" indent="-365760">
-              <a:spcAft>
-                <a:spcPts val="800"/>
-              </a:spcAft>
-              <a:buClr>
-                <a:srgbClr val="1E40AF"/>
-              </a:buClr>
-              <a:buFont typeface="Arial"/>
-              <a:buChar char="•"/>
-            </a:pPr>
-            <a:r>
-              <a:rPr sz="2400">
-                <a:solidFill>
-                  <a:srgbClr val="1E293B"/>
-                </a:solidFill>
-                <a:latin typeface="Calibri"/>
-              </a:rPr>
-              <a:t>Giới thiệu bài thơ: tác giả, hoàn cảnh, trào lưu, lí do chọn.</a:t>
-            </a:r>
-          </a:p>
-          <a:p>
-            <a:pPr algn="l" marL="365760" indent="-365760">
-              <a:spcAft>
-                <a:spcPts val="800"/>
-              </a:spcAft>
-              <a:buClr>
-                <a:srgbClr val="1E40AF"/>
-              </a:buClr>
-              <a:buFont typeface="Arial"/>
-              <a:buChar char="•"/>
-            </a:pPr>
-            <a:r>
-              <a:rPr sz="2400">
-                <a:solidFill>
-                  <a:srgbClr val="1E293B"/>
-                </a:solidFill>
-                <a:latin typeface="Calibri"/>
-              </a:rPr>
-              <a:t>Phân tích nét đặc sắc: từ ngữ, hình ảnh, nhịp điệu, nhạc điệu, mạch cảm xúc.</a:t>
-            </a:r>
-          </a:p>
-          <a:p>
-            <a:pPr algn="l" marL="365760" indent="-365760">
-              <a:spcAft>
-                <a:spcPts val="800"/>
-              </a:spcAft>
-              <a:buClr>
-                <a:srgbClr val="1E40AF"/>
-              </a:buClr>
-              <a:buFont typeface="Arial"/>
-              <a:buChar char="•"/>
-            </a:pPr>
-            <a:r>
-              <a:rPr sz="2400">
-                <a:solidFill>
-                  <a:srgbClr val="1E293B"/>
-                </a:solidFill>
-                <a:latin typeface="Calibri"/>
-              </a:rPr>
-              <a:t>Đánh giá giá trị nghệ thuật và ý nghĩa nhân sinh.</a:t>
-            </a:r>
-          </a:p>
-          <a:p>
-            <a:pPr algn="l" marL="365760" indent="-365760">
-              <a:spcAft>
-                <a:spcPts val="800"/>
-              </a:spcAft>
-              <a:buClr>
-                <a:srgbClr val="1E40AF"/>
-              </a:buClr>
-              <a:buFont typeface="Arial"/>
-              <a:buChar char="•"/>
-            </a:pPr>
-            <a:r>
-              <a:rPr sz="2400">
-                <a:solidFill>
-                  <a:srgbClr val="1E293B"/>
-                </a:solidFill>
-                <a:latin typeface="Calibri"/>
-              </a:rPr>
-              <a:t>Tránh diễn xuôi bài thơ.</a:t>
-            </a:r>
-          </a:p>
-        </p:txBody>
-      </p:sp>
-    </p:spTree>
-  </p:cSld>
-  <p:clrMapOvr>
-    <a:masterClrMapping/>
-  </p:clrMapOvr>
-</p:sld>
-</file>
-
-<file path=ppt/slides/slide45.xml><?xml version="1.0" encoding="utf-8"?>
-<p:sld xmlns:a="http://schemas.openxmlformats.org/drawingml/2006/main" xmlns:p="http://schemas.openxmlformats.org/presentationml/2006/main" xmlns:r="http://schemas.openxmlformats.org/officeDocument/2006/relationships">
-  <p:cSld>
-    <p:bg>
-      <p:bgPr>
-        <a:solidFill>
-          <a:srgbClr val="FFFFFF"/>
-        </a:solidFill>
-        <a:effectLst/>
-      </p:bgPr>
-    </p:bg>
-    <p:spTree>
-      <p:nvGrpSpPr>
-        <p:cNvPr id="1" name=""/>
-        <p:cNvGrpSpPr/>
-        <p:nvPr/>
-      </p:nvGrpSpPr>
-      <p:grpSpPr/>
-      <p:sp>
-        <p:nvSpPr>
-          <p:cNvPr id="2" name="Rectangle 1"/>
-          <p:cNvSpPr/>
-          <p:nvPr/>
-        </p:nvSpPr>
-        <p:spPr>
-          <a:xfrm>
-            <a:off x="457200" y="384048"/>
-            <a:ext cx="109728" cy="658368"/>
-          </a:xfrm>
-          <a:prstGeom prst="rect">
-            <a:avLst/>
-          </a:prstGeom>
-          <a:solidFill>
-            <a:srgbClr val="1E40AF"/>
-          </a:solidFill>
-          <a:ln>
-            <a:noFill/>
-          </a:ln>
-          <a:effectLst/>
-        </p:spPr>
-        <p:style>
-          <a:lnRef idx="1">
-            <a:schemeClr val="accent1"/>
-          </a:lnRef>
-          <a:fillRef idx="3">
-            <a:schemeClr val="accent1"/>
-          </a:fillRef>
-          <a:effectRef idx="2">
-            <a:schemeClr val="accent1"/>
-          </a:effectRef>
-          <a:fontRef idx="minor">
-            <a:schemeClr val="lt1"/>
-          </a:fontRef>
-        </p:style>
-        <p:txBody>
-          <a:bodyPr rtlCol="0" anchor="ctr"/>
-          <a:lstStyle/>
-          <a:p>
-            <a:pPr algn="ctr"/>
-          </a:p>
-        </p:txBody>
-      </p:sp>
-      <p:sp>
-        <p:nvSpPr>
-          <p:cNvPr id="3" name="Rounded Rectangle 2"/>
-          <p:cNvSpPr/>
-          <p:nvPr/>
-        </p:nvSpPr>
-        <p:spPr>
-          <a:xfrm>
-            <a:off x="10253167" y="457200"/>
-            <a:ext cx="1389888" cy="457200"/>
-          </a:xfrm>
-          <a:prstGeom prst="roundRect">
-            <a:avLst/>
-          </a:prstGeom>
-          <a:solidFill>
-            <a:srgbClr val="1E40AF"/>
-          </a:solidFill>
-          <a:ln>
-            <a:noFill/>
-          </a:ln>
-          <a:effectLst/>
-        </p:spPr>
-        <p:style>
-          <a:lnRef idx="1">
-            <a:schemeClr val="accent1"/>
-          </a:lnRef>
-          <a:fillRef idx="3">
-            <a:schemeClr val="accent1"/>
-          </a:fillRef>
-          <a:effectRef idx="2">
-            <a:schemeClr val="accent1"/>
-          </a:effectRef>
-          <a:fontRef idx="minor">
-            <a:schemeClr val="lt1"/>
-          </a:fontRef>
-        </p:style>
-        <p:txBody>
-          <a:bodyPr rtlCol="0" anchor="ctr" wrap="none" tIns="0" bIns="0"/>
-          <a:lstStyle/>
-          <a:p>
-            <a:pPr algn="ctr"/>
-            <a:r>
-              <a:rPr sz="1400" b="1">
-                <a:solidFill>
-                  <a:srgbClr val="FFFFFF"/>
-                </a:solidFill>
-                <a:latin typeface="Arial"/>
-              </a:rPr>
-              <a:t>ĐỀ BÀI</a:t>
-            </a:r>
-          </a:p>
-        </p:txBody>
-      </p:sp>
-      <p:sp>
-        <p:nvSpPr>
-          <p:cNvPr id="4" name="TextBox 3"/>
-          <p:cNvSpPr txBox="1"/>
-          <p:nvPr/>
-        </p:nvSpPr>
-        <p:spPr>
-          <a:xfrm>
-            <a:off x="731520" y="274320"/>
-            <a:ext cx="9582912" cy="868680"/>
-          </a:xfrm>
-          <a:prstGeom prst="rect">
-            <a:avLst/>
-          </a:prstGeom>
-          <a:noFill/>
-        </p:spPr>
-        <p:txBody>
-          <a:bodyPr wrap="square" anchor="ctr">
-            <a:spAutoFit/>
-          </a:bodyPr>
-          <a:lstStyle/>
-          <a:p>
-            <a:r>
-              <a:rPr sz="3600" b="1">
-                <a:solidFill>
-                  <a:srgbClr val="1E40AF"/>
-                </a:solidFill>
-                <a:latin typeface="Arial"/>
-              </a:rPr>
-              <a:t>ĐỀ THỰC HÀNH VIẾT</a:t>
-            </a:r>
-          </a:p>
-        </p:txBody>
-      </p:sp>
-      <p:sp>
-        <p:nvSpPr>
-          <p:cNvPr id="5" name="Rectangle 4"/>
-          <p:cNvSpPr/>
-          <p:nvPr/>
-        </p:nvSpPr>
-        <p:spPr>
-          <a:xfrm>
-            <a:off x="457200" y="1207008"/>
-            <a:ext cx="11274552" cy="22000"/>
-          </a:xfrm>
-          <a:prstGeom prst="rect">
-            <a:avLst/>
-          </a:prstGeom>
-          <a:solidFill>
-            <a:srgbClr val="E2E8F0"/>
-          </a:solidFill>
-          <a:ln>
-            <a:noFill/>
-          </a:ln>
-          <a:effectLst/>
-        </p:spPr>
-        <p:style>
-          <a:lnRef idx="1">
-            <a:schemeClr val="accent1"/>
-          </a:lnRef>
-          <a:fillRef idx="3">
-            <a:schemeClr val="accent1"/>
-          </a:fillRef>
-          <a:effectRef idx="2">
-            <a:schemeClr val="accent1"/>
-          </a:effectRef>
-          <a:fontRef idx="minor">
-            <a:schemeClr val="lt1"/>
-          </a:fontRef>
-        </p:style>
-        <p:txBody>
-          <a:bodyPr rtlCol="0" anchor="ctr"/>
-          <a:lstStyle/>
-          <a:p>
-            <a:pPr algn="ctr"/>
-          </a:p>
-        </p:txBody>
-      </p:sp>
-      <p:sp>
-        <p:nvSpPr>
-          <p:cNvPr id="6" name="TextBox 5"/>
-          <p:cNvSpPr txBox="1"/>
-          <p:nvPr/>
-        </p:nvSpPr>
-        <p:spPr>
-          <a:xfrm>
-            <a:off x="457200" y="6355080"/>
-            <a:ext cx="11274552" cy="365760"/>
-          </a:xfrm>
-          <a:prstGeom prst="rect">
-            <a:avLst/>
-          </a:prstGeom>
-          <a:noFill/>
-        </p:spPr>
-        <p:txBody>
-          <a:bodyPr wrap="none">
-            <a:spAutoFit/>
-          </a:bodyPr>
-          <a:lstStyle/>
-          <a:p>
-            <a:pPr algn="r"/>
-            <a:r>
-              <a:rPr sz="1200">
-                <a:solidFill>
-                  <a:srgbClr val="64748B"/>
-                </a:solidFill>
-                <a:latin typeface="Calibri"/>
-              </a:rPr>
-              <a:t>Ngữ văn 10 · Bài 2: Vẻ Đẹp Của Thơ Ca          45</a:t>
-            </a:r>
-          </a:p>
-        </p:txBody>
-      </p:sp>
-      <p:sp>
-        <p:nvSpPr>
-          <p:cNvPr id="7" name="TextBox 6"/>
-          <p:cNvSpPr txBox="1"/>
-          <p:nvPr/>
-        </p:nvSpPr>
-        <p:spPr>
-          <a:xfrm>
-            <a:off x="731520" y="1463040"/>
-            <a:ext cx="10789920" cy="3566160"/>
-          </a:xfrm>
-          <a:prstGeom prst="rect">
-            <a:avLst/>
-          </a:prstGeom>
-          <a:noFill/>
-        </p:spPr>
-        <p:txBody>
-          <a:bodyPr wrap="square" anchor="t" lIns="45720" rIns="45720">
-            <a:spAutoFit/>
-          </a:bodyPr>
-          <a:lstStyle/>
-          <a:p>
-            <a:pPr algn="l">
-              <a:spcAft>
-                <a:spcPts val="800"/>
-              </a:spcAft>
-            </a:pPr>
-            <a:r>
-              <a:rPr sz="2600" b="1">
-                <a:solidFill>
-                  <a:srgbClr val="1E293B"/>
-                </a:solidFill>
-                <a:latin typeface="Calibri"/>
-              </a:rPr>
-              <a:t>Phân tích, đánh giá chủ đề và nét đặc sắc nghệ thuật của bài thơ Mùa xuân chín (Hàn Mặc Tử).</a:t>
-            </a:r>
-          </a:p>
-        </p:txBody>
-      </p:sp>
-      <p:sp>
-        <p:nvSpPr>
-          <p:cNvPr id="8" name="Rounded Rectangle 7"/>
-          <p:cNvSpPr/>
-          <p:nvPr/>
-        </p:nvSpPr>
-        <p:spPr>
-          <a:xfrm>
-            <a:off x="731520" y="5120640"/>
-            <a:ext cx="10789920" cy="693420"/>
-          </a:xfrm>
-          <a:prstGeom prst="roundRect">
-            <a:avLst>
-              <a:gd name="adj" fmla="val 8000"/>
-            </a:avLst>
-          </a:prstGeom>
-          <a:solidFill>
-            <a:srgbClr val="EFF4FF"/>
-          </a:solidFill>
-          <a:ln w="19050">
-            <a:solidFill>
-              <a:srgbClr val="1E40AF"/>
-            </a:solidFill>
-          </a:ln>
-          <a:effectLst/>
-        </p:spPr>
-        <p:style>
-          <a:lnRef idx="1">
-            <a:schemeClr val="accent1"/>
-          </a:lnRef>
-          <a:fillRef idx="3">
-            <a:schemeClr val="accent1"/>
-          </a:fillRef>
-          <a:effectRef idx="2">
-            <a:schemeClr val="accent1"/>
-          </a:effectRef>
-          <a:fontRef idx="minor">
-            <a:schemeClr val="lt1"/>
-          </a:fontRef>
-        </p:style>
-        <p:txBody>
-          <a:bodyPr rtlCol="0" anchor="ctr"/>
-          <a:lstStyle/>
-          <a:p>
-            <a:pPr algn="ctr"/>
-          </a:p>
-        </p:txBody>
-      </p:sp>
-      <p:sp>
-        <p:nvSpPr>
-          <p:cNvPr id="9" name="TextBox 8"/>
-          <p:cNvSpPr txBox="1"/>
-          <p:nvPr/>
-        </p:nvSpPr>
-        <p:spPr>
-          <a:xfrm>
-            <a:off x="914400" y="5120640"/>
-            <a:ext cx="10424160" cy="693420"/>
-          </a:xfrm>
-          <a:prstGeom prst="rect">
-            <a:avLst/>
-          </a:prstGeom>
-          <a:noFill/>
-        </p:spPr>
-        <p:txBody>
-          <a:bodyPr wrap="square" anchor="ctr" lIns="45720" rIns="45720">
-            <a:spAutoFit/>
-          </a:bodyPr>
-          <a:lstStyle/>
-          <a:p>
-            <a:pPr algn="l">
-              <a:spcAft>
-                <a:spcPts val="400"/>
-              </a:spcAft>
-            </a:pPr>
-            <a:r>
-              <a:rPr sz="2200" b="1">
-                <a:solidFill>
-                  <a:srgbClr val="1E40AF"/>
-                </a:solidFill>
-                <a:latin typeface="Calibri"/>
-              </a:rPr>
-              <a:t>💡 Lập dàn ý theo mạch khổ thơ hoặc theo luận điểm.</a:t>
-            </a:r>
-          </a:p>
-        </p:txBody>
-      </p:sp>
-    </p:spTree>
-  </p:cSld>
-  <p:clrMapOvr>
-    <a:masterClrMapping/>
-  </p:clrMapOvr>
-</p:sld>
-</file>
-
-<file path=ppt/slides/slide46.xml><?xml version="1.0" encoding="utf-8"?>
-<p:sld xmlns:a="http://schemas.openxmlformats.org/drawingml/2006/main" xmlns:p="http://schemas.openxmlformats.org/presentationml/2006/main" xmlns:r="http://schemas.openxmlformats.org/officeDocument/2006/relationships">
-  <p:cSld>
-    <p:bg>
-      <p:bgPr>
-        <a:solidFill>
-          <a:srgbClr val="FFFFFF"/>
-        </a:solidFill>
-        <a:effectLst/>
-      </p:bgPr>
-    </p:bg>
-    <p:spTree>
-      <p:nvGrpSpPr>
-        <p:cNvPr id="1" name=""/>
-        <p:cNvGrpSpPr/>
-        <p:nvPr/>
-      </p:nvGrpSpPr>
-      <p:grpSpPr/>
-      <p:sp>
-        <p:nvSpPr>
-          <p:cNvPr id="2" name="Rectangle 1"/>
-          <p:cNvSpPr/>
-          <p:nvPr/>
-        </p:nvSpPr>
-        <p:spPr>
-          <a:xfrm>
-            <a:off x="457200" y="384048"/>
-            <a:ext cx="109728" cy="658368"/>
-          </a:xfrm>
-          <a:prstGeom prst="rect">
-            <a:avLst/>
-          </a:prstGeom>
-          <a:solidFill>
-            <a:srgbClr val="1E40AF"/>
-          </a:solidFill>
-          <a:ln>
-            <a:noFill/>
-          </a:ln>
-          <a:effectLst/>
-        </p:spPr>
-        <p:style>
-          <a:lnRef idx="1">
-            <a:schemeClr val="accent1"/>
-          </a:lnRef>
-          <a:fillRef idx="3">
-            <a:schemeClr val="accent1"/>
-          </a:fillRef>
-          <a:effectRef idx="2">
-            <a:schemeClr val="accent1"/>
-          </a:effectRef>
-          <a:fontRef idx="minor">
-            <a:schemeClr val="lt1"/>
-          </a:fontRef>
-        </p:style>
-        <p:txBody>
-          <a:bodyPr rtlCol="0" anchor="ctr"/>
-          <a:lstStyle/>
-          <a:p>
-            <a:pPr algn="ctr"/>
-          </a:p>
-        </p:txBody>
-      </p:sp>
-      <p:sp>
-        <p:nvSpPr>
-          <p:cNvPr id="3" name="Rounded Rectangle 2"/>
-          <p:cNvSpPr/>
-          <p:nvPr/>
-        </p:nvSpPr>
-        <p:spPr>
-          <a:xfrm>
-            <a:off x="9942271" y="457200"/>
-            <a:ext cx="1700784" cy="457200"/>
-          </a:xfrm>
-          <a:prstGeom prst="roundRect">
-            <a:avLst/>
-          </a:prstGeom>
-          <a:solidFill>
-            <a:srgbClr val="991B1B"/>
-          </a:solidFill>
-          <a:ln>
-            <a:noFill/>
-          </a:ln>
-          <a:effectLst/>
-        </p:spPr>
-        <p:style>
-          <a:lnRef idx="1">
-            <a:schemeClr val="accent1"/>
-          </a:lnRef>
-          <a:fillRef idx="3">
-            <a:schemeClr val="accent1"/>
-          </a:fillRef>
-          <a:effectRef idx="2">
-            <a:schemeClr val="accent1"/>
-          </a:effectRef>
-          <a:fontRef idx="minor">
-            <a:schemeClr val="lt1"/>
-          </a:fontRef>
-        </p:style>
-        <p:txBody>
-          <a:bodyPr rtlCol="0" anchor="ctr" wrap="none" tIns="0" bIns="0"/>
-          <a:lstStyle/>
-          <a:p>
-            <a:pPr algn="ctr"/>
-            <a:r>
-              <a:rPr sz="1400" b="1">
-                <a:solidFill>
-                  <a:srgbClr val="FFFFFF"/>
-                </a:solidFill>
-                <a:latin typeface="Arial"/>
-              </a:rPr>
-              <a:t>LỜI GIẢI</a:t>
-            </a:r>
-          </a:p>
-        </p:txBody>
-      </p:sp>
-      <p:sp>
-        <p:nvSpPr>
-          <p:cNvPr id="4" name="TextBox 3"/>
-          <p:cNvSpPr txBox="1"/>
-          <p:nvPr/>
-        </p:nvSpPr>
-        <p:spPr>
-          <a:xfrm>
-            <a:off x="731520" y="274320"/>
-            <a:ext cx="9272016" cy="868680"/>
-          </a:xfrm>
-          <a:prstGeom prst="rect">
-            <a:avLst/>
-          </a:prstGeom>
-          <a:noFill/>
-        </p:spPr>
-        <p:txBody>
-          <a:bodyPr wrap="square" anchor="ctr">
-            <a:spAutoFit/>
-          </a:bodyPr>
-          <a:lstStyle/>
-          <a:p>
-            <a:r>
-              <a:rPr sz="3600" b="1">
-                <a:solidFill>
-                  <a:srgbClr val="1E40AF"/>
-                </a:solidFill>
-                <a:latin typeface="Arial"/>
-              </a:rPr>
-              <a:t>ĐỀ THỰC HÀNH VIẾT</a:t>
-            </a:r>
-          </a:p>
-        </p:txBody>
-      </p:sp>
-      <p:sp>
-        <p:nvSpPr>
-          <p:cNvPr id="5" name="Rectangle 4"/>
-          <p:cNvSpPr/>
-          <p:nvPr/>
-        </p:nvSpPr>
-        <p:spPr>
-          <a:xfrm>
-            <a:off x="457200" y="1207008"/>
-            <a:ext cx="11274552" cy="22000"/>
-          </a:xfrm>
-          <a:prstGeom prst="rect">
-            <a:avLst/>
-          </a:prstGeom>
-          <a:solidFill>
-            <a:srgbClr val="E2E8F0"/>
-          </a:solidFill>
-          <a:ln>
-            <a:noFill/>
-          </a:ln>
-          <a:effectLst/>
-        </p:spPr>
-        <p:style>
-          <a:lnRef idx="1">
-            <a:schemeClr val="accent1"/>
-          </a:lnRef>
-          <a:fillRef idx="3">
-            <a:schemeClr val="accent1"/>
-          </a:fillRef>
-          <a:effectRef idx="2">
-            <a:schemeClr val="accent1"/>
-          </a:effectRef>
-          <a:fontRef idx="minor">
-            <a:schemeClr val="lt1"/>
-          </a:fontRef>
-        </p:style>
-        <p:txBody>
-          <a:bodyPr rtlCol="0" anchor="ctr"/>
-          <a:lstStyle/>
-          <a:p>
-            <a:pPr algn="ctr"/>
-          </a:p>
-        </p:txBody>
-      </p:sp>
-      <p:sp>
-        <p:nvSpPr>
-          <p:cNvPr id="6" name="TextBox 5"/>
-          <p:cNvSpPr txBox="1"/>
-          <p:nvPr/>
-        </p:nvSpPr>
-        <p:spPr>
-          <a:xfrm>
-            <a:off x="457200" y="6355080"/>
-            <a:ext cx="11274552" cy="365760"/>
-          </a:xfrm>
-          <a:prstGeom prst="rect">
-            <a:avLst/>
-          </a:prstGeom>
-          <a:noFill/>
-        </p:spPr>
-        <p:txBody>
-          <a:bodyPr wrap="none">
-            <a:spAutoFit/>
-          </a:bodyPr>
-          <a:lstStyle/>
-          <a:p>
-            <a:pPr algn="r"/>
-            <a:r>
-              <a:rPr sz="1200">
-                <a:solidFill>
-                  <a:srgbClr val="64748B"/>
-                </a:solidFill>
-                <a:latin typeface="Calibri"/>
-              </a:rPr>
-              <a:t>Ngữ văn 10 · Bài 2: Vẻ Đẹp Của Thơ Ca          46</a:t>
-            </a:r>
-          </a:p>
-        </p:txBody>
-      </p:sp>
-      <p:sp>
-        <p:nvSpPr>
-          <p:cNvPr id="7" name="TextBox 6"/>
-          <p:cNvSpPr txBox="1"/>
-          <p:nvPr/>
-        </p:nvSpPr>
-        <p:spPr>
-          <a:xfrm>
-            <a:off x="731520" y="1463040"/>
-            <a:ext cx="10789920" cy="3474720"/>
-          </a:xfrm>
-          <a:prstGeom prst="rect">
-            <a:avLst/>
-          </a:prstGeom>
-          <a:noFill/>
-        </p:spPr>
-        <p:txBody>
-          <a:bodyPr wrap="square" anchor="t" lIns="45720" rIns="45720">
-            <a:spAutoFit/>
-          </a:bodyPr>
-          <a:lstStyle/>
-          <a:p>
-            <a:pPr algn="l" marL="365760" indent="-365760">
-              <a:spcAft>
-                <a:spcPts val="800"/>
-              </a:spcAft>
-              <a:buClr>
-                <a:srgbClr val="1E40AF"/>
-              </a:buClr>
-              <a:buFont typeface="Arial"/>
-              <a:buChar char="•"/>
-            </a:pPr>
-            <a:r>
-              <a:rPr sz="2300">
-                <a:solidFill>
-                  <a:srgbClr val="1E293B"/>
-                </a:solidFill>
-                <a:latin typeface="Calibri"/>
-              </a:rPr>
-              <a:t>MB: giới thiệu Hàn Mặc Tử, bài thơ.</a:t>
-            </a:r>
-          </a:p>
-          <a:p>
-            <a:pPr algn="l" marL="365760" indent="-365760">
-              <a:spcAft>
-                <a:spcPts val="800"/>
-              </a:spcAft>
-              <a:buClr>
-                <a:srgbClr val="1E40AF"/>
-              </a:buClr>
-              <a:buFont typeface="Arial"/>
-              <a:buChar char="•"/>
-            </a:pPr>
-            <a:r>
-              <a:rPr sz="2300">
-                <a:solidFill>
-                  <a:srgbClr val="1E293B"/>
-                </a:solidFill>
-                <a:latin typeface="Calibri"/>
-              </a:rPr>
-              <a:t>TB: bức tranh xuân “chín” → âm thanh, con người → nỗi nhớ làng → nghệ thuật.</a:t>
-            </a:r>
-          </a:p>
-          <a:p>
-            <a:pPr algn="l" marL="365760" indent="-365760">
-              <a:spcAft>
-                <a:spcPts val="800"/>
-              </a:spcAft>
-              <a:buClr>
-                <a:srgbClr val="1E40AF"/>
-              </a:buClr>
-              <a:buFont typeface="Arial"/>
-              <a:buChar char="•"/>
-            </a:pPr>
-            <a:r>
-              <a:rPr sz="2300">
-                <a:solidFill>
-                  <a:srgbClr val="1E293B"/>
-                </a:solidFill>
-                <a:latin typeface="Calibri"/>
-              </a:rPr>
-              <a:t>Đánh giá giá trị nghệ thuật, ý nghĩa nhân sinh.</a:t>
-            </a:r>
-          </a:p>
-          <a:p>
-            <a:pPr algn="l" marL="365760" indent="-365760">
-              <a:spcAft>
-                <a:spcPts val="800"/>
-              </a:spcAft>
-              <a:buClr>
-                <a:srgbClr val="1E40AF"/>
-              </a:buClr>
-              <a:buFont typeface="Arial"/>
-              <a:buChar char="•"/>
-            </a:pPr>
-            <a:r>
-              <a:rPr sz="2300">
-                <a:solidFill>
-                  <a:srgbClr val="1E293B"/>
-                </a:solidFill>
-                <a:latin typeface="Calibri"/>
-              </a:rPr>
-              <a:t>KB: khẳng định giá trị, cảm nghĩ riêng.</a:t>
-            </a:r>
-          </a:p>
-        </p:txBody>
-      </p:sp>
-      <p:sp>
-        <p:nvSpPr>
-          <p:cNvPr id="8" name="Rounded Rectangle 7"/>
-          <p:cNvSpPr/>
-          <p:nvPr/>
-        </p:nvSpPr>
-        <p:spPr>
-          <a:xfrm>
-            <a:off x="731520" y="5074920"/>
-            <a:ext cx="10789920" cy="731520"/>
-          </a:xfrm>
-          <a:prstGeom prst="roundRect">
-            <a:avLst>
-              <a:gd name="adj" fmla="val 8000"/>
-            </a:avLst>
-          </a:prstGeom>
-          <a:solidFill>
-            <a:srgbClr val="FEF2F2"/>
-          </a:solidFill>
-          <a:ln w="19050">
-            <a:solidFill>
-              <a:srgbClr val="991B1B"/>
-            </a:solidFill>
-          </a:ln>
-          <a:effectLst/>
-        </p:spPr>
-        <p:style>
-          <a:lnRef idx="1">
-            <a:schemeClr val="accent1"/>
-          </a:lnRef>
-          <a:fillRef idx="3">
-            <a:schemeClr val="accent1"/>
-          </a:fillRef>
-          <a:effectRef idx="2">
-            <a:schemeClr val="accent1"/>
-          </a:effectRef>
-          <a:fontRef idx="minor">
-            <a:schemeClr val="lt1"/>
-          </a:fontRef>
-        </p:style>
-        <p:txBody>
-          <a:bodyPr rtlCol="0" anchor="ctr"/>
-          <a:lstStyle/>
-          <a:p>
-            <a:pPr algn="ctr"/>
-          </a:p>
-        </p:txBody>
-      </p:sp>
-      <p:sp>
-        <p:nvSpPr>
-          <p:cNvPr id="9" name="TextBox 8"/>
-          <p:cNvSpPr txBox="1"/>
-          <p:nvPr/>
-        </p:nvSpPr>
-        <p:spPr>
-          <a:xfrm>
-            <a:off x="914400" y="5074920"/>
-            <a:ext cx="10424160" cy="731520"/>
-          </a:xfrm>
-          <a:prstGeom prst="rect">
-            <a:avLst/>
-          </a:prstGeom>
-          <a:noFill/>
-        </p:spPr>
-        <p:txBody>
-          <a:bodyPr wrap="square" anchor="ctr" lIns="45720" rIns="45720">
-            <a:spAutoFit/>
-          </a:bodyPr>
-          <a:lstStyle/>
-          <a:p>
-            <a:pPr algn="l">
-              <a:spcAft>
-                <a:spcPts val="400"/>
-              </a:spcAft>
-            </a:pPr>
-            <a:r>
-              <a:rPr sz="2400" b="1">
-                <a:solidFill>
-                  <a:srgbClr val="991B1B"/>
-                </a:solidFill>
-                <a:latin typeface="Calibri"/>
-              </a:rPr>
-              <a:t>Gắn phân tích hình thức với cảm xúc.</a:t>
-            </a:r>
-          </a:p>
-        </p:txBody>
-      </p:sp>
-    </p:spTree>
-  </p:cSld>
-  <p:clrMapOvr>
-    <a:masterClrMapping/>
-  </p:clrMapOvr>
-</p:sld>
-</file>
-
-<file path=ppt/slides/slide47.xml><?xml version="1.0" encoding="utf-8"?>
-<p:sld xmlns:a="http://schemas.openxmlformats.org/drawingml/2006/main" xmlns:p="http://schemas.openxmlformats.org/presentationml/2006/main" xmlns:r="http://schemas.openxmlformats.org/officeDocument/2006/relationships">
-  <p:cSld>
-    <p:bg>
-      <p:bgPr>
-        <a:solidFill>
-          <a:srgbClr val="FFFFFF"/>
-        </a:solidFill>
-        <a:effectLst/>
-      </p:bgPr>
-    </p:bg>
-    <p:spTree>
-      <p:nvGrpSpPr>
-        <p:cNvPr id="1" name=""/>
-        <p:cNvGrpSpPr/>
-        <p:nvPr/>
-      </p:nvGrpSpPr>
-      <p:grpSpPr/>
-      <p:sp>
-        <p:nvSpPr>
-          <p:cNvPr id="2" name="Rectangle 1"/>
-          <p:cNvSpPr/>
-          <p:nvPr/>
-        </p:nvSpPr>
-        <p:spPr>
-          <a:xfrm>
-            <a:off x="457200" y="384048"/>
-            <a:ext cx="109728" cy="658368"/>
-          </a:xfrm>
-          <a:prstGeom prst="rect">
-            <a:avLst/>
-          </a:prstGeom>
-          <a:solidFill>
-            <a:srgbClr val="1E40AF"/>
-          </a:solidFill>
-          <a:ln>
-            <a:noFill/>
-          </a:ln>
-          <a:effectLst/>
-        </p:spPr>
-        <p:style>
-          <a:lnRef idx="1">
-            <a:schemeClr val="accent1"/>
-          </a:lnRef>
-          <a:fillRef idx="3">
-            <a:schemeClr val="accent1"/>
-          </a:fillRef>
-          <a:effectRef idx="2">
-            <a:schemeClr val="accent1"/>
-          </a:effectRef>
-          <a:fontRef idx="minor">
-            <a:schemeClr val="lt1"/>
-          </a:fontRef>
-        </p:style>
-        <p:txBody>
-          <a:bodyPr rtlCol="0" anchor="ctr"/>
-          <a:lstStyle/>
-          <a:p>
-            <a:pPr algn="ctr"/>
-          </a:p>
-        </p:txBody>
-      </p:sp>
-      <p:sp>
-        <p:nvSpPr>
-          <p:cNvPr id="3" name="Rounded Rectangle 2"/>
-          <p:cNvSpPr/>
-          <p:nvPr/>
-        </p:nvSpPr>
-        <p:spPr>
-          <a:xfrm>
-            <a:off x="10097719" y="457200"/>
-            <a:ext cx="1545336" cy="457200"/>
-          </a:xfrm>
-          <a:prstGeom prst="roundRect">
-            <a:avLst/>
-          </a:prstGeom>
-          <a:solidFill>
-            <a:srgbClr val="166534"/>
-          </a:solidFill>
-          <a:ln>
-            <a:noFill/>
-          </a:ln>
-          <a:effectLst/>
-        </p:spPr>
-        <p:style>
-          <a:lnRef idx="1">
-            <a:schemeClr val="accent1"/>
-          </a:lnRef>
-          <a:fillRef idx="3">
-            <a:schemeClr val="accent1"/>
-          </a:fillRef>
-          <a:effectRef idx="2">
-            <a:schemeClr val="accent1"/>
-          </a:effectRef>
-          <a:fontRef idx="minor">
-            <a:schemeClr val="lt1"/>
-          </a:fontRef>
-        </p:style>
-        <p:txBody>
-          <a:bodyPr rtlCol="0" anchor="ctr" wrap="none" tIns="0" bIns="0"/>
-          <a:lstStyle/>
-          <a:p>
-            <a:pPr algn="ctr"/>
-            <a:r>
-              <a:rPr sz="1400" b="1">
-                <a:solidFill>
-                  <a:srgbClr val="FFFFFF"/>
-                </a:solidFill>
-                <a:latin typeface="Arial"/>
-              </a:rPr>
-              <a:t>CỦNG CỐ</a:t>
-            </a:r>
-          </a:p>
-        </p:txBody>
-      </p:sp>
-      <p:sp>
-        <p:nvSpPr>
-          <p:cNvPr id="4" name="TextBox 3"/>
-          <p:cNvSpPr txBox="1"/>
-          <p:nvPr/>
-        </p:nvSpPr>
-        <p:spPr>
-          <a:xfrm>
-            <a:off x="731520" y="274320"/>
-            <a:ext cx="9427464" cy="868680"/>
-          </a:xfrm>
-          <a:prstGeom prst="rect">
-            <a:avLst/>
-          </a:prstGeom>
-          <a:noFill/>
-        </p:spPr>
-        <p:txBody>
-          <a:bodyPr wrap="square" anchor="ctr">
-            <a:spAutoFit/>
-          </a:bodyPr>
-          <a:lstStyle/>
-          <a:p>
-            <a:r>
-              <a:rPr sz="3600" b="1">
-                <a:solidFill>
-                  <a:srgbClr val="1E40AF"/>
-                </a:solidFill>
-                <a:latin typeface="Arial"/>
-              </a:rPr>
-              <a:t>SƠ ĐỒ TƯ DUY</a:t>
-            </a:r>
-          </a:p>
-        </p:txBody>
-      </p:sp>
-      <p:sp>
-        <p:nvSpPr>
-          <p:cNvPr id="5" name="Rectangle 4"/>
-          <p:cNvSpPr/>
-          <p:nvPr/>
-        </p:nvSpPr>
-        <p:spPr>
-          <a:xfrm>
-            <a:off x="457200" y="1207008"/>
-            <a:ext cx="11274552" cy="22000"/>
-          </a:xfrm>
-          <a:prstGeom prst="rect">
-            <a:avLst/>
-          </a:prstGeom>
-          <a:solidFill>
-            <a:srgbClr val="E2E8F0"/>
-          </a:solidFill>
-          <a:ln>
-            <a:noFill/>
-          </a:ln>
-          <a:effectLst/>
-        </p:spPr>
-        <p:style>
-          <a:lnRef idx="1">
-            <a:schemeClr val="accent1"/>
-          </a:lnRef>
-          <a:fillRef idx="3">
-            <a:schemeClr val="accent1"/>
-          </a:fillRef>
-          <a:effectRef idx="2">
-            <a:schemeClr val="accent1"/>
-          </a:effectRef>
-          <a:fontRef idx="minor">
-            <a:schemeClr val="lt1"/>
-          </a:fontRef>
-        </p:style>
-        <p:txBody>
-          <a:bodyPr rtlCol="0" anchor="ctr"/>
-          <a:lstStyle/>
-          <a:p>
-            <a:pPr algn="ctr"/>
-          </a:p>
-        </p:txBody>
-      </p:sp>
-      <p:sp>
-        <p:nvSpPr>
-          <p:cNvPr id="6" name="TextBox 5"/>
-          <p:cNvSpPr txBox="1"/>
-          <p:nvPr/>
-        </p:nvSpPr>
-        <p:spPr>
-          <a:xfrm>
-            <a:off x="457200" y="6355080"/>
-            <a:ext cx="11274552" cy="365760"/>
-          </a:xfrm>
-          <a:prstGeom prst="rect">
-            <a:avLst/>
-          </a:prstGeom>
-          <a:noFill/>
-        </p:spPr>
-        <p:txBody>
-          <a:bodyPr wrap="none">
-            <a:spAutoFit/>
-          </a:bodyPr>
-          <a:lstStyle/>
-          <a:p>
-            <a:pPr algn="r"/>
-            <a:r>
-              <a:rPr sz="1200">
-                <a:solidFill>
-                  <a:srgbClr val="64748B"/>
-                </a:solidFill>
-                <a:latin typeface="Calibri"/>
-              </a:rPr>
-              <a:t>Ngữ văn 10 · Bài 2: Vẻ Đẹp Của Thơ Ca          47</a:t>
-            </a:r>
-          </a:p>
-        </p:txBody>
-      </p:sp>
-      <p:pic>
-        <p:nvPicPr>
-          <p:cNvPr id="7" name="Picture 6" descr="SoDoTuDuy_NGUVAN10_Bai2_VeDepCuaThoCa_T12-22.png"/>
-          <p:cNvPicPr>
-            <a:picLocks noChangeAspect="1"/>
-          </p:cNvPicPr>
-          <p:nvPr/>
-        </p:nvPicPr>
-        <p:blipFill>
-          <a:blip r:embed="rId2"/>
-          <a:stretch>
-            <a:fillRect/>
-          </a:stretch>
-        </p:blipFill>
-        <p:spPr>
-          <a:xfrm>
-            <a:off x="1788855" y="1371600"/>
-            <a:ext cx="8675250" cy="4846320"/>
-          </a:xfrm>
-          <a:prstGeom prst="rect">
-            <a:avLst/>
-          </a:prstGeom>
-        </p:spPr>
-      </p:pic>
-    </p:spTree>
-  </p:cSld>
-  <p:clrMapOvr>
-    <a:masterClrMapping/>
-  </p:clrMapOvr>
-</p:sld>
-</file>
-
-<file path=ppt/slides/slide48.xml><?xml version="1.0" encoding="utf-8"?>
-<p:sld xmlns:a="http://schemas.openxmlformats.org/drawingml/2006/main" xmlns:p="http://schemas.openxmlformats.org/presentationml/2006/main" xmlns:r="http://schemas.openxmlformats.org/officeDocument/2006/relationships">
-  <p:cSld>
-    <p:bg>
-      <p:bgPr>
-        <a:solidFill>
-          <a:srgbClr val="FFFFFF"/>
-        </a:solidFill>
-        <a:effectLst/>
-      </p:bgPr>
-    </p:bg>
-    <p:spTree>
-      <p:nvGrpSpPr>
-        <p:cNvPr id="1" name=""/>
-        <p:cNvGrpSpPr/>
-        <p:nvPr/>
-      </p:nvGrpSpPr>
-      <p:grpSpPr/>
-      <p:sp>
-        <p:nvSpPr>
-          <p:cNvPr id="2" name="Rectangle 1"/>
-          <p:cNvSpPr/>
-          <p:nvPr/>
-        </p:nvSpPr>
-        <p:spPr>
-          <a:xfrm>
-            <a:off x="457200" y="384048"/>
-            <a:ext cx="109728" cy="658368"/>
-          </a:xfrm>
-          <a:prstGeom prst="rect">
-            <a:avLst/>
-          </a:prstGeom>
-          <a:solidFill>
-            <a:srgbClr val="1E40AF"/>
-          </a:solidFill>
-          <a:ln>
-            <a:noFill/>
-          </a:ln>
-          <a:effectLst/>
-        </p:spPr>
-        <p:style>
-          <a:lnRef idx="1">
-            <a:schemeClr val="accent1"/>
-          </a:lnRef>
-          <a:fillRef idx="3">
-            <a:schemeClr val="accent1"/>
-          </a:fillRef>
-          <a:effectRef idx="2">
-            <a:schemeClr val="accent1"/>
-          </a:effectRef>
-          <a:fontRef idx="minor">
-            <a:schemeClr val="lt1"/>
-          </a:fontRef>
-        </p:style>
-        <p:txBody>
-          <a:bodyPr rtlCol="0" anchor="ctr"/>
-          <a:lstStyle/>
-          <a:p>
-            <a:pPr algn="ctr"/>
-          </a:p>
-        </p:txBody>
-      </p:sp>
-      <p:sp>
-        <p:nvSpPr>
-          <p:cNvPr id="3" name="Rounded Rectangle 2"/>
-          <p:cNvSpPr/>
-          <p:nvPr/>
-        </p:nvSpPr>
-        <p:spPr>
-          <a:xfrm>
-            <a:off x="10097719" y="457200"/>
-            <a:ext cx="1545336" cy="457200"/>
-          </a:xfrm>
-          <a:prstGeom prst="roundRect">
-            <a:avLst/>
-          </a:prstGeom>
-          <a:solidFill>
-            <a:srgbClr val="991B1B"/>
-          </a:solidFill>
-          <a:ln>
-            <a:noFill/>
-          </a:ln>
-          <a:effectLst/>
-        </p:spPr>
-        <p:style>
-          <a:lnRef idx="1">
-            <a:schemeClr val="accent1"/>
-          </a:lnRef>
-          <a:fillRef idx="3">
-            <a:schemeClr val="accent1"/>
-          </a:fillRef>
-          <a:effectRef idx="2">
-            <a:schemeClr val="accent1"/>
-          </a:effectRef>
-          <a:fontRef idx="minor">
-            <a:schemeClr val="lt1"/>
-          </a:fontRef>
-        </p:style>
-        <p:txBody>
-          <a:bodyPr rtlCol="0" anchor="ctr" wrap="none" tIns="0" bIns="0"/>
-          <a:lstStyle/>
-          <a:p>
-            <a:pPr algn="ctr"/>
-            <a:r>
-              <a:rPr sz="1400" b="1">
-                <a:solidFill>
-                  <a:srgbClr val="FFFFFF"/>
-                </a:solidFill>
-                <a:latin typeface="Arial"/>
-              </a:rPr>
-              <a:t>CỦNG CỐ</a:t>
-            </a:r>
-          </a:p>
-        </p:txBody>
-      </p:sp>
-      <p:sp>
-        <p:nvSpPr>
-          <p:cNvPr id="4" name="TextBox 3"/>
-          <p:cNvSpPr txBox="1"/>
-          <p:nvPr/>
-        </p:nvSpPr>
-        <p:spPr>
-          <a:xfrm>
-            <a:off x="731520" y="274320"/>
-            <a:ext cx="9427464" cy="868680"/>
-          </a:xfrm>
-          <a:prstGeom prst="rect">
-            <a:avLst/>
-          </a:prstGeom>
-          <a:noFill/>
-        </p:spPr>
-        <p:txBody>
-          <a:bodyPr wrap="square" anchor="ctr">
-            <a:spAutoFit/>
-          </a:bodyPr>
-          <a:lstStyle/>
-          <a:p>
-            <a:r>
-              <a:rPr sz="3600" b="1">
-                <a:solidFill>
-                  <a:srgbClr val="1E40AF"/>
-                </a:solidFill>
-                <a:latin typeface="Arial"/>
-              </a:rPr>
-              <a:t>BÀI TẬP CỦA BẠN</a:t>
-            </a:r>
-          </a:p>
-        </p:txBody>
-      </p:sp>
-      <p:sp>
-        <p:nvSpPr>
-          <p:cNvPr id="5" name="Rectangle 4"/>
-          <p:cNvSpPr/>
-          <p:nvPr/>
-        </p:nvSpPr>
-        <p:spPr>
-          <a:xfrm>
-            <a:off x="457200" y="1207008"/>
-            <a:ext cx="11274552" cy="22000"/>
-          </a:xfrm>
-          <a:prstGeom prst="rect">
-            <a:avLst/>
-          </a:prstGeom>
-          <a:solidFill>
-            <a:srgbClr val="E2E8F0"/>
-          </a:solidFill>
-          <a:ln>
-            <a:noFill/>
-          </a:ln>
-          <a:effectLst/>
-        </p:spPr>
-        <p:style>
-          <a:lnRef idx="1">
-            <a:schemeClr val="accent1"/>
-          </a:lnRef>
-          <a:fillRef idx="3">
-            <a:schemeClr val="accent1"/>
-          </a:fillRef>
-          <a:effectRef idx="2">
-            <a:schemeClr val="accent1"/>
-          </a:effectRef>
-          <a:fontRef idx="minor">
-            <a:schemeClr val="lt1"/>
-          </a:fontRef>
-        </p:style>
-        <p:txBody>
-          <a:bodyPr rtlCol="0" anchor="ctr"/>
-          <a:lstStyle/>
-          <a:p>
-            <a:pPr algn="ctr"/>
-          </a:p>
-        </p:txBody>
-      </p:sp>
-      <p:sp>
-        <p:nvSpPr>
-          <p:cNvPr id="6" name="TextBox 5"/>
-          <p:cNvSpPr txBox="1"/>
-          <p:nvPr/>
-        </p:nvSpPr>
-        <p:spPr>
-          <a:xfrm>
-            <a:off x="457200" y="6355080"/>
-            <a:ext cx="11274552" cy="365760"/>
-          </a:xfrm>
-          <a:prstGeom prst="rect">
-            <a:avLst/>
-          </a:prstGeom>
-          <a:noFill/>
-        </p:spPr>
-        <p:txBody>
-          <a:bodyPr wrap="none">
-            <a:spAutoFit/>
-          </a:bodyPr>
-          <a:lstStyle/>
-          <a:p>
-            <a:pPr algn="r"/>
-            <a:r>
-              <a:rPr sz="1200">
-                <a:solidFill>
-                  <a:srgbClr val="64748B"/>
-                </a:solidFill>
-                <a:latin typeface="Calibri"/>
-              </a:rPr>
-              <a:t>Ngữ văn 10 · Bài 2: Vẻ Đẹp Của Thơ Ca          48</a:t>
+              <a:t>Ngữ văn 10 · Bài 2: Vẻ Đẹp Của Thơ Ca          43</a:t>
             </a:r>
           </a:p>
         </p:txBody>
@@ -20344,14 +18168,14 @@
         </p:nvSpPr>
         <p:spPr>
           <a:xfrm>
-            <a:off x="10408615" y="457200"/>
-            <a:ext cx="1234440" cy="457200"/>
+            <a:off x="10097719" y="457200"/>
+            <a:ext cx="1545336" cy="457200"/>
           </a:xfrm>
           <a:prstGeom prst="roundRect">
             <a:avLst/>
           </a:prstGeom>
           <a:solidFill>
-            <a:srgbClr val="991B1B"/>
+            <a:srgbClr val="166534"/>
           </a:solidFill>
           <a:ln>
             <a:noFill/>
@@ -20384,7 +18208,7 @@
                 </a:solidFill>
                 <a:latin typeface="Arial"/>
               </a:rPr>
-              <a:t>VIDEO</a:t>
+              <a:t>GHI NHỚ</a:t>
             </a:r>
           </a:p>
         </p:txBody>
@@ -20398,7 +18222,7 @@
         <p:spPr>
           <a:xfrm>
             <a:off x="731520" y="274320"/>
-            <a:ext cx="9738360" cy="868680"/>
+            <a:ext cx="9427464" cy="868680"/>
           </a:xfrm>
           <a:prstGeom prst="rect">
             <a:avLst/>
@@ -20418,7 +18242,7 @@
                 </a:solidFill>
                 <a:latin typeface="Arial"/>
               </a:rPr>
-              <a:t>VIDEO THAM KHẢO</a:t>
+              <a:t>TRI THỨC NGỮ VĂN</a:t>
             </a:r>
           </a:p>
         </p:txBody>
@@ -20502,40 +18326,16 @@
           </a:p>
         </p:txBody>
       </p:sp>
-      <p:pic>
-        <p:nvPicPr>
-          <p:cNvPr id="7" name="Picture 6" descr="QR_video_uS7Hxn7RKDo.png"/>
-          <p:cNvPicPr>
-            <a:picLocks noChangeAspect="1"/>
-          </p:cNvPicPr>
-          <p:nvPr/>
-        </p:nvPicPr>
-        <p:blipFill>
-          <a:blip r:embed="rId2"/>
-          <a:stretch>
-            <a:fillRect/>
-          </a:stretch>
-        </p:blipFill>
-        <p:spPr>
-          <a:xfrm>
-            <a:off x="8412480" y="1554480"/>
-            <a:ext cx="3108960" cy="3108960"/>
-          </a:xfrm>
-          <a:prstGeom prst="rect">
-            <a:avLst/>
-          </a:prstGeom>
-        </p:spPr>
-      </p:pic>
-      <p:sp>
-        <p:nvSpPr>
-          <p:cNvPr id="8" name="TextBox 7"/>
+      <p:sp>
+        <p:nvSpPr>
+          <p:cNvPr id="7" name="TextBox 6"/>
           <p:cNvSpPr txBox="1"/>
           <p:nvPr/>
         </p:nvSpPr>
         <p:spPr>
           <a:xfrm>
-            <a:off x="731520" y="1554480"/>
-            <a:ext cx="7498079" cy="4206240"/>
+            <a:off x="731520" y="1463040"/>
+            <a:ext cx="10789920" cy="4754880"/>
           </a:xfrm>
           <a:prstGeom prst="rect">
             <a:avLst/>
@@ -20547,38 +18347,6 @@
             <a:spAutoFit/>
           </a:bodyPr>
           <a:lstStyle/>
-          <a:p>
-            <a:pPr algn="l">
-              <a:spcAft>
-                <a:spcPts val="800"/>
-              </a:spcAft>
-            </a:pPr>
-            <a:r>
-              <a:rPr sz="2600" b="1">
-                <a:solidFill>
-                  <a:srgbClr val="1E293B"/>
-                </a:solidFill>
-                <a:latin typeface="Calibri"/>
-              </a:rPr>
-              <a:t>🎬 Matsuo Bashō – Người khai sáng thơ Haiku Nhật Bản</a:t>
-            </a:r>
-          </a:p>
-          <a:p>
-            <a:pPr algn="l">
-              <a:spcAft>
-                <a:spcPts val="800"/>
-              </a:spcAft>
-            </a:pPr>
-            <a:r>
-              <a:rPr sz="2000">
-                <a:solidFill>
-                  <a:srgbClr val="64748B"/>
-                </a:solidFill>
-                <a:latin typeface="Calibri"/>
-              </a:rPr>
-              <a:t>Kênh: Người Nổi Tiếng</a:t>
-            </a:r>
-          </a:p>
           <a:p>
             <a:pPr algn="l" marL="365760" indent="-365760">
               <a:spcAft>
@@ -20591,30 +18359,112 @@
               <a:buChar char="•"/>
             </a:pPr>
             <a:r>
-              <a:rPr sz="2000">
+              <a:rPr sz="2400" b="1">
                 <a:solidFill>
                   <a:srgbClr val="1E293B"/>
                 </a:solidFill>
                 <a:latin typeface="Calibri"/>
               </a:rPr>
-              <a:t>Tìm hiểu tác giả Ba-sô, thể thơ hai-cư</a:t>
-            </a:r>
-          </a:p>
-          <a:p>
-            <a:pPr algn="l">
+              <a:t>Nhân vật trữ tình</a:t>
+            </a:r>
+            <a:r>
+              <a:rPr sz="2400">
+                <a:solidFill>
+                  <a:srgbClr val="1E293B"/>
+                </a:solidFill>
+                <a:latin typeface="Calibri"/>
+              </a:rPr>
+              <a:t>: người trực tiếp bộc lộ rung động, tình cảm trong bài thơ.</a:t>
+            </a:r>
+          </a:p>
+          <a:p>
+            <a:pPr algn="l" marL="365760" indent="-365760">
               <a:spcAft>
                 <a:spcPts val="800"/>
               </a:spcAft>
+              <a:buClr>
+                <a:srgbClr val="1E40AF"/>
+              </a:buClr>
+              <a:buFont typeface="Arial"/>
+              <a:buChar char="•"/>
             </a:pPr>
             <a:r>
-              <a:rPr sz="1600">
-                <a:solidFill>
-                  <a:srgbClr val="64748B"/>
+              <a:rPr sz="2400" b="1">
+                <a:solidFill>
+                  <a:srgbClr val="1E293B"/>
                 </a:solidFill>
                 <a:latin typeface="Calibri"/>
-                <a:hlinkClick r:id="rId3"/>
-              </a:rPr>
-              <a:t>https://www.youtube.com/watch?v=uS7Hxn7RKDo</a:t>
+              </a:rPr>
+              <a:t>Hình ảnh thơ</a:t>
+            </a:r>
+            <a:r>
+              <a:rPr sz="2400">
+                <a:solidFill>
+                  <a:srgbClr val="1E293B"/>
+                </a:solidFill>
+                <a:latin typeface="Calibri"/>
+              </a:rPr>
+              <a:t>: sự vật, hiện tượng tái tạo cụ thể bằng ngôn từ, khơi cảm giác.</a:t>
+            </a:r>
+          </a:p>
+          <a:p>
+            <a:pPr algn="l" marL="365760" indent="-365760">
+              <a:spcAft>
+                <a:spcPts val="800"/>
+              </a:spcAft>
+              <a:buClr>
+                <a:srgbClr val="1E40AF"/>
+              </a:buClr>
+              <a:buFont typeface="Arial"/>
+              <a:buChar char="•"/>
+            </a:pPr>
+            <a:r>
+              <a:rPr sz="2400" b="1">
+                <a:solidFill>
+                  <a:srgbClr val="1E293B"/>
+                </a:solidFill>
+                <a:latin typeface="Calibri"/>
+              </a:rPr>
+              <a:t>Vần, nhịp, nhạc điệu, đối</a:t>
+            </a:r>
+            <a:r>
+              <a:rPr sz="2400">
+                <a:solidFill>
+                  <a:srgbClr val="1E293B"/>
+                </a:solidFill>
+                <a:latin typeface="Calibri"/>
+              </a:rPr>
+              <a:t>: tạo âm hưởng, liên kết, sự cân xứng.</a:t>
+            </a:r>
+          </a:p>
+          <a:p>
+            <a:pPr algn="l" marL="365760" indent="-365760">
+              <a:spcAft>
+                <a:spcPts val="800"/>
+              </a:spcAft>
+              <a:buClr>
+                <a:srgbClr val="1E40AF"/>
+              </a:buClr>
+              <a:buFont typeface="Arial"/>
+              <a:buChar char="•"/>
+            </a:pPr>
+            <a:r>
+              <a:rPr sz="2400" b="1">
+                <a:solidFill>
+                  <a:srgbClr val="1E293B"/>
+                </a:solidFill>
+                <a:latin typeface="Calibri"/>
+              </a:rPr>
+              <a:t>Thi luật, thể thơ</a:t>
+            </a:r>
+            <a:r>
+              <a:rPr sz="2400">
+                <a:solidFill>
+                  <a:srgbClr val="1E293B"/>
+                </a:solidFill>
+                <a:latin typeface="Calibri"/>
+              </a:rPr>
+              <a:t>: quy tắc tổ chức ngôn từ; hai-cư, Đường luật, Thơ mới…</a:t>
             </a:r>
           </a:p>
         </p:txBody>
@@ -20697,14 +18547,14 @@
         </p:nvSpPr>
         <p:spPr>
           <a:xfrm>
-            <a:off x="10097719" y="457200"/>
-            <a:ext cx="1545336" cy="457200"/>
+            <a:off x="10253167" y="457200"/>
+            <a:ext cx="1389888" cy="457200"/>
           </a:xfrm>
           <a:prstGeom prst="roundRect">
             <a:avLst/>
           </a:prstGeom>
           <a:solidFill>
-            <a:srgbClr val="166534"/>
+            <a:srgbClr val="1E40AF"/>
           </a:solidFill>
           <a:ln>
             <a:noFill/>
@@ -20737,7 +18587,7 @@
                 </a:solidFill>
                 <a:latin typeface="Arial"/>
               </a:rPr>
-              <a:t>GHI NHỚ</a:t>
+              <a:t>ĐỀ BÀI</a:t>
             </a:r>
           </a:p>
         </p:txBody>
@@ -20751,7 +18601,7 @@
         <p:spPr>
           <a:xfrm>
             <a:off x="731520" y="274320"/>
-            <a:ext cx="9427464" cy="868680"/>
+            <a:ext cx="9582912" cy="868680"/>
           </a:xfrm>
           <a:prstGeom prst="rect">
             <a:avLst/>
@@ -20771,7 +18621,7 @@
                 </a:solidFill>
                 <a:latin typeface="Arial"/>
               </a:rPr>
-              <a:t>TRI THỨC NGỮ VĂN</a:t>
+              <a:t>HÌNH ẢNH TRUNG TÂM CỦA THƠ HAI-CƯ</a:t>
             </a:r>
           </a:p>
         </p:txBody>
@@ -20864,7 +18714,7 @@
         <p:spPr>
           <a:xfrm>
             <a:off x="731520" y="1463040"/>
-            <a:ext cx="10789920" cy="4754880"/>
+            <a:ext cx="10789920" cy="3566160"/>
           </a:xfrm>
           <a:prstGeom prst="rect">
             <a:avLst/>
@@ -20877,123 +18727,106 @@
           </a:bodyPr>
           <a:lstStyle/>
           <a:p>
-            <a:pPr algn="l" marL="365760" indent="-365760">
+            <a:pPr algn="l">
               <a:spcAft>
                 <a:spcPts val="800"/>
               </a:spcAft>
-              <a:buClr>
-                <a:srgbClr val="1E40AF"/>
-              </a:buClr>
-              <a:buFont typeface="Arial"/>
-              <a:buChar char="•"/>
             </a:pPr>
             <a:r>
-              <a:rPr sz="2400" b="1">
+              <a:rPr sz="2600" b="1">
                 <a:solidFill>
                   <a:srgbClr val="1E293B"/>
                 </a:solidFill>
                 <a:latin typeface="Calibri"/>
               </a:rPr>
-              <a:t>Nhân vật trữ tình</a:t>
-            </a:r>
-            <a:r>
-              <a:rPr sz="2400">
-                <a:solidFill>
-                  <a:srgbClr val="1E293B"/>
+              <a:t>Nhận diện hình ảnh trung tâm ở từng bài thơ hai-cư và cho biết đặc điểm chung của các hình ảnh ấy.</a:t>
+            </a:r>
+          </a:p>
+        </p:txBody>
+      </p:sp>
+      <p:sp>
+        <p:nvSpPr>
+          <p:cNvPr id="8" name="Rounded Rectangle 7"/>
+          <p:cNvSpPr/>
+          <p:nvPr/>
+        </p:nvSpPr>
+        <p:spPr>
+          <a:xfrm>
+            <a:off x="731520" y="5120640"/>
+            <a:ext cx="10789920" cy="693420"/>
+          </a:xfrm>
+          <a:prstGeom prst="roundRect">
+            <a:avLst>
+              <a:gd name="adj" fmla="val 8000"/>
+            </a:avLst>
+          </a:prstGeom>
+          <a:solidFill>
+            <a:srgbClr val="EFF4FF"/>
+          </a:solidFill>
+          <a:ln w="19050">
+            <a:solidFill>
+              <a:srgbClr val="1E40AF"/>
+            </a:solidFill>
+          </a:ln>
+          <a:effectLst/>
+        </p:spPr>
+        <p:style>
+          <a:lnRef idx="1">
+            <a:schemeClr val="accent1"/>
+          </a:lnRef>
+          <a:fillRef idx="3">
+            <a:schemeClr val="accent1"/>
+          </a:fillRef>
+          <a:effectRef idx="2">
+            <a:schemeClr val="accent1"/>
+          </a:effectRef>
+          <a:fontRef idx="minor">
+            <a:schemeClr val="lt1"/>
+          </a:fontRef>
+        </p:style>
+        <p:txBody>
+          <a:bodyPr rtlCol="0" anchor="ctr"/>
+          <a:lstStyle/>
+          <a:p>
+            <a:pPr algn="ctr"/>
+          </a:p>
+        </p:txBody>
+      </p:sp>
+      <p:sp>
+        <p:nvSpPr>
+          <p:cNvPr id="9" name="TextBox 8"/>
+          <p:cNvSpPr txBox="1"/>
+          <p:nvPr/>
+        </p:nvSpPr>
+        <p:spPr>
+          <a:xfrm>
+            <a:off x="914400" y="5120640"/>
+            <a:ext cx="10424160" cy="693420"/>
+          </a:xfrm>
+          <a:prstGeom prst="rect">
+            <a:avLst/>
+          </a:prstGeom>
+          <a:noFill/>
+        </p:spPr>
+        <p:txBody>
+          <a:bodyPr wrap="square" anchor="ctr" lIns="45720" rIns="45720">
+            <a:spAutoFit/>
+          </a:bodyPr>
+          <a:lstStyle/>
+          <a:p>
+            <a:pPr algn="l">
+              <a:spcAft>
+                <a:spcPts val="400"/>
+              </a:spcAft>
+            </a:pPr>
+            <a:r>
+              <a:rPr sz="2200" b="1">
+                <a:solidFill>
+                  <a:srgbClr val="1E40AF"/>
                 </a:solidFill>
                 <a:latin typeface="Calibri"/>
               </a:rPr>
-              <a:t>: người trực tiếp bộc lộ rung động, tình cảm trong bài thơ.</a:t>
-            </a:r>
-          </a:p>
-          <a:p>
-            <a:pPr algn="l" marL="365760" indent="-365760">
-              <a:spcAft>
-                <a:spcPts val="800"/>
-              </a:spcAft>
-              <a:buClr>
-                <a:srgbClr val="1E40AF"/>
-              </a:buClr>
-              <a:buFont typeface="Arial"/>
-              <a:buChar char="•"/>
-            </a:pPr>
-            <a:r>
-              <a:rPr sz="2400" b="1">
-                <a:solidFill>
-                  <a:srgbClr val="1E293B"/>
-                </a:solidFill>
-                <a:latin typeface="Calibri"/>
-              </a:rPr>
-              <a:t>Hình ảnh thơ</a:t>
-            </a:r>
-            <a:r>
-              <a:rPr sz="2400">
-                <a:solidFill>
-                  <a:srgbClr val="1E293B"/>
-                </a:solidFill>
-                <a:latin typeface="Calibri"/>
-              </a:rPr>
-              <a:t>: sự vật, hiện tượng tái tạo cụ thể bằng ngôn từ, khơi cảm giác.</a:t>
-            </a:r>
-          </a:p>
-          <a:p>
-            <a:pPr algn="l" marL="365760" indent="-365760">
-              <a:spcAft>
-                <a:spcPts val="800"/>
-              </a:spcAft>
-              <a:buClr>
-                <a:srgbClr val="1E40AF"/>
-              </a:buClr>
-              <a:buFont typeface="Arial"/>
-              <a:buChar char="•"/>
-            </a:pPr>
-            <a:r>
-              <a:rPr sz="2400" b="1">
-                <a:solidFill>
-                  <a:srgbClr val="1E293B"/>
-                </a:solidFill>
-                <a:latin typeface="Calibri"/>
-              </a:rPr>
-              <a:t>Vần, nhịp, nhạc điệu, đối</a:t>
-            </a:r>
-            <a:r>
-              <a:rPr sz="2400">
-                <a:solidFill>
-                  <a:srgbClr val="1E293B"/>
-                </a:solidFill>
-                <a:latin typeface="Calibri"/>
-              </a:rPr>
-              <a:t>: tạo âm hưởng, liên kết, sự cân xứng.</a:t>
-            </a:r>
-          </a:p>
-          <a:p>
-            <a:pPr algn="l" marL="365760" indent="-365760">
-              <a:spcAft>
-                <a:spcPts val="800"/>
-              </a:spcAft>
-              <a:buClr>
-                <a:srgbClr val="1E40AF"/>
-              </a:buClr>
-              <a:buFont typeface="Arial"/>
-              <a:buChar char="•"/>
-            </a:pPr>
-            <a:r>
-              <a:rPr sz="2400" b="1">
-                <a:solidFill>
-                  <a:srgbClr val="1E293B"/>
-                </a:solidFill>
-                <a:latin typeface="Calibri"/>
-              </a:rPr>
-              <a:t>Thi luật, thể thơ</a:t>
-            </a:r>
-            <a:r>
-              <a:rPr sz="2400">
-                <a:solidFill>
-                  <a:srgbClr val="1E293B"/>
-                </a:solidFill>
-                <a:latin typeface="Calibri"/>
-              </a:rPr>
-              <a:t>: quy tắc tổ chức ngôn từ; hai-cư, Đường luật, Thơ mới…</a:t>
+              <a:t>💡 Mỗi bài thơ xoay quanh một sự vật nào?</a:t>
             </a:r>
           </a:p>
         </p:txBody>
@@ -21076,14 +18909,14 @@
         </p:nvSpPr>
         <p:spPr>
           <a:xfrm>
-            <a:off x="10253167" y="457200"/>
-            <a:ext cx="1389888" cy="457200"/>
+            <a:off x="9942271" y="457200"/>
+            <a:ext cx="1700784" cy="457200"/>
           </a:xfrm>
           <a:prstGeom prst="roundRect">
             <a:avLst/>
           </a:prstGeom>
           <a:solidFill>
-            <a:srgbClr val="1E40AF"/>
+            <a:srgbClr val="991B1B"/>
           </a:solidFill>
           <a:ln>
             <a:noFill/>
@@ -21116,7 +18949,7 @@
                 </a:solidFill>
                 <a:latin typeface="Arial"/>
               </a:rPr>
-              <a:t>ĐỀ BÀI</a:t>
+              <a:t>LỜI GIẢI</a:t>
             </a:r>
           </a:p>
         </p:txBody>
@@ -21130,7 +18963,7 @@
         <p:spPr>
           <a:xfrm>
             <a:off x="731520" y="274320"/>
-            <a:ext cx="9582912" cy="868680"/>
+            <a:ext cx="9272016" cy="868680"/>
           </a:xfrm>
           <a:prstGeom prst="rect">
             <a:avLst/>
@@ -21243,7 +19076,7 @@
         <p:spPr>
           <a:xfrm>
             <a:off x="731520" y="1463040"/>
-            <a:ext cx="10789920" cy="3566160"/>
+            <a:ext cx="10789920" cy="3474720"/>
           </a:xfrm>
           <a:prstGeom prst="rect">
             <a:avLst/>
@@ -21256,19 +19089,87 @@
           </a:bodyPr>
           <a:lstStyle/>
           <a:p>
-            <a:pPr algn="l">
+            <a:pPr algn="l" marL="365760" indent="-365760">
               <a:spcAft>
                 <a:spcPts val="800"/>
               </a:spcAft>
+              <a:buClr>
+                <a:srgbClr val="1E40AF"/>
+              </a:buClr>
+              <a:buFont typeface="Arial"/>
+              <a:buChar char="•"/>
             </a:pPr>
             <a:r>
-              <a:rPr sz="2600" b="1">
+              <a:rPr sz="2300">
                 <a:solidFill>
                   <a:srgbClr val="1E293B"/>
                 </a:solidFill>
                 <a:latin typeface="Calibri"/>
               </a:rPr>
-              <a:t>Nhận diện hình ảnh trung tâm ở từng bài thơ hai-cư và cho biết đặc điểm chung của các hình ảnh ấy.</a:t>
+              <a:t>Ba-sô: cánh quạ trên cành khô.</a:t>
+            </a:r>
+          </a:p>
+          <a:p>
+            <a:pPr algn="l" marL="365760" indent="-365760">
+              <a:spcAft>
+                <a:spcPts val="800"/>
+              </a:spcAft>
+              <a:buClr>
+                <a:srgbClr val="1E40AF"/>
+              </a:buClr>
+              <a:buFont typeface="Arial"/>
+              <a:buChar char="•"/>
+            </a:pPr>
+            <a:r>
+              <a:rPr sz="2300">
+                <a:solidFill>
+                  <a:srgbClr val="1E293B"/>
+                </a:solidFill>
+                <a:latin typeface="Calibri"/>
+              </a:rPr>
+              <a:t>Chi-y-ô: hoa triêu nhan quấn dây gàu.</a:t>
+            </a:r>
+          </a:p>
+          <a:p>
+            <a:pPr algn="l" marL="365760" indent="-365760">
+              <a:spcAft>
+                <a:spcPts val="800"/>
+              </a:spcAft>
+              <a:buClr>
+                <a:srgbClr val="1E40AF"/>
+              </a:buClr>
+              <a:buFont typeface="Arial"/>
+              <a:buChar char="•"/>
+            </a:pPr>
+            <a:r>
+              <a:rPr sz="2300">
+                <a:solidFill>
+                  <a:srgbClr val="1E293B"/>
+                </a:solidFill>
+                <a:latin typeface="Calibri"/>
+              </a:rPr>
+              <a:t>Ít-sa: con ốc nhỏ trèo núi Phú Sĩ.</a:t>
+            </a:r>
+          </a:p>
+          <a:p>
+            <a:pPr algn="l" marL="365760" indent="-365760">
+              <a:spcAft>
+                <a:spcPts val="800"/>
+              </a:spcAft>
+              <a:buClr>
+                <a:srgbClr val="1E40AF"/>
+              </a:buClr>
+              <a:buFont typeface="Arial"/>
+              <a:buChar char="•"/>
+            </a:pPr>
+            <a:r>
+              <a:rPr sz="2300">
+                <a:solidFill>
+                  <a:srgbClr val="1E293B"/>
+                </a:solidFill>
+                <a:latin typeface="Calibri"/>
+              </a:rPr>
+              <a:t>Điểm chung: sự vật bình dị, nhỏ bé của thiên nhiên, mang tính tượng trưng.</a:t>
             </a:r>
           </a:p>
         </p:txBody>
@@ -21281,8 +19182,8 @@
         </p:nvSpPr>
         <p:spPr>
           <a:xfrm>
-            <a:off x="731520" y="5120640"/>
-            <a:ext cx="10789920" cy="693420"/>
+            <a:off x="731520" y="5074920"/>
+            <a:ext cx="10789920" cy="731520"/>
           </a:xfrm>
           <a:prstGeom prst="roundRect">
             <a:avLst>
@@ -21290,11 +19191,11 @@
             </a:avLst>
           </a:prstGeom>
           <a:solidFill>
-            <a:srgbClr val="EFF4FF"/>
+            <a:srgbClr val="FEF2F2"/>
           </a:solidFill>
           <a:ln w="19050">
             <a:solidFill>
-              <a:srgbClr val="1E40AF"/>
+              <a:srgbClr val="991B1B"/>
             </a:solidFill>
           </a:ln>
           <a:effectLst/>
@@ -21329,8 +19230,8 @@
         </p:nvSpPr>
         <p:spPr>
           <a:xfrm>
-            <a:off x="914400" y="5120640"/>
-            <a:ext cx="10424160" cy="693420"/>
+            <a:off x="914400" y="5074920"/>
+            <a:ext cx="10424160" cy="731520"/>
           </a:xfrm>
           <a:prstGeom prst="rect">
             <a:avLst/>
@@ -21349,13 +19250,13 @@
               </a:spcAft>
             </a:pPr>
             <a:r>
-              <a:rPr sz="2200" b="1">
-                <a:solidFill>
-                  <a:srgbClr val="1E40AF"/>
+              <a:rPr sz="2400" b="1">
+                <a:solidFill>
+                  <a:srgbClr val="991B1B"/>
                 </a:solidFill>
                 <a:latin typeface="Calibri"/>
               </a:rPr>
-              <a:t>💡 Mỗi bài thơ xoay quanh một sự vật nào?</a:t>
+              <a:t>Thơ hai-cư: hình ảnh bình dị, khơi gợi nhiều hơn diễn giải.</a:t>
             </a:r>
           </a:p>
         </p:txBody>
@@ -21438,14 +19339,14 @@
         </p:nvSpPr>
         <p:spPr>
           <a:xfrm>
-            <a:off x="9942271" y="457200"/>
-            <a:ext cx="1700784" cy="457200"/>
+            <a:off x="10253167" y="457200"/>
+            <a:ext cx="1389888" cy="457200"/>
           </a:xfrm>
           <a:prstGeom prst="roundRect">
             <a:avLst/>
           </a:prstGeom>
           <a:solidFill>
-            <a:srgbClr val="991B1B"/>
+            <a:srgbClr val="1E40AF"/>
           </a:solidFill>
           <a:ln>
             <a:noFill/>
@@ -21478,7 +19379,7 @@
                 </a:solidFill>
                 <a:latin typeface="Arial"/>
               </a:rPr>
-              <a:t>LỜI GIẢI</a:t>
+              <a:t>ĐỀ BÀI</a:t>
             </a:r>
           </a:p>
         </p:txBody>
@@ -21492,7 +19393,7 @@
         <p:spPr>
           <a:xfrm>
             <a:off x="731520" y="274320"/>
-            <a:ext cx="9272016" cy="868680"/>
+            <a:ext cx="9582912" cy="868680"/>
           </a:xfrm>
           <a:prstGeom prst="rect">
             <a:avLst/>
@@ -21512,7 +19413,7 @@
                 </a:solidFill>
                 <a:latin typeface="Arial"/>
               </a:rPr>
-              <a:t>HÌNH ẢNH TRUNG TÂM CỦA THƠ HAI-CƯ</a:t>
+              <a:t>PHÁT HIỆN VÀ TRIẾT LÍ</a:t>
             </a:r>
           </a:p>
         </p:txBody>
@@ -21605,7 +19506,7 @@
         <p:spPr>
           <a:xfrm>
             <a:off x="731520" y="1463040"/>
-            <a:ext cx="10789920" cy="3474720"/>
+            <a:ext cx="10789920" cy="3566160"/>
           </a:xfrm>
           <a:prstGeom prst="rect">
             <a:avLst/>
@@ -21618,87 +19519,19 @@
           </a:bodyPr>
           <a:lstStyle/>
           <a:p>
-            <a:pPr algn="l" marL="365760" indent="-365760">
+            <a:pPr algn="l">
               <a:spcAft>
                 <a:spcPts val="800"/>
               </a:spcAft>
-              <a:buClr>
-                <a:srgbClr val="1E40AF"/>
-              </a:buClr>
-              <a:buFont typeface="Arial"/>
-              <a:buChar char="•"/>
             </a:pPr>
             <a:r>
-              <a:rPr sz="2300">
+              <a:rPr sz="2600" b="1">
                 <a:solidFill>
                   <a:srgbClr val="1E293B"/>
                 </a:solidFill>
                 <a:latin typeface="Calibri"/>
               </a:rPr>
-              <a:t>Ba-sô: cánh quạ trên cành khô.</a:t>
-            </a:r>
-          </a:p>
-          <a:p>
-            <a:pPr algn="l" marL="365760" indent="-365760">
-              <a:spcAft>
-                <a:spcPts val="800"/>
-              </a:spcAft>
-              <a:buClr>
-                <a:srgbClr val="1E40AF"/>
-              </a:buClr>
-              <a:buFont typeface="Arial"/>
-              <a:buChar char="•"/>
-            </a:pPr>
-            <a:r>
-              <a:rPr sz="2300">
-                <a:solidFill>
-                  <a:srgbClr val="1E293B"/>
-                </a:solidFill>
-                <a:latin typeface="Calibri"/>
-              </a:rPr>
-              <a:t>Chi-y-ô: hoa triêu nhan quấn dây gàu.</a:t>
-            </a:r>
-          </a:p>
-          <a:p>
-            <a:pPr algn="l" marL="365760" indent="-365760">
-              <a:spcAft>
-                <a:spcPts val="800"/>
-              </a:spcAft>
-              <a:buClr>
-                <a:srgbClr val="1E40AF"/>
-              </a:buClr>
-              <a:buFont typeface="Arial"/>
-              <a:buChar char="•"/>
-            </a:pPr>
-            <a:r>
-              <a:rPr sz="2300">
-                <a:solidFill>
-                  <a:srgbClr val="1E293B"/>
-                </a:solidFill>
-                <a:latin typeface="Calibri"/>
-              </a:rPr>
-              <a:t>Ít-sa: con ốc nhỏ trèo núi Phú Sĩ.</a:t>
-            </a:r>
-          </a:p>
-          <a:p>
-            <a:pPr algn="l" marL="365760" indent="-365760">
-              <a:spcAft>
-                <a:spcPts val="800"/>
-              </a:spcAft>
-              <a:buClr>
-                <a:srgbClr val="1E40AF"/>
-              </a:buClr>
-              <a:buFont typeface="Arial"/>
-              <a:buChar char="•"/>
-            </a:pPr>
-            <a:r>
-              <a:rPr sz="2300">
-                <a:solidFill>
-                  <a:srgbClr val="1E293B"/>
-                </a:solidFill>
-                <a:latin typeface="Calibri"/>
-              </a:rPr>
-              <a:t>Điểm chung: sự vật bình dị, nhỏ bé của thiên nhiên, mang tính tượng trưng.</a:t>
+              <a:t>Bài thơ của Chi-y-ô xoay quanh phát hiện nào? Vì sao phát hiện ấy dẫn nhân vật trữ tình sang “xin nước nhà bên”? Ý nghĩa triết lí?</a:t>
             </a:r>
           </a:p>
         </p:txBody>
@@ -21711,8 +19544,8 @@
         </p:nvSpPr>
         <p:spPr>
           <a:xfrm>
-            <a:off x="731520" y="5074920"/>
-            <a:ext cx="10789920" cy="731520"/>
+            <a:off x="731520" y="5120640"/>
+            <a:ext cx="10789920" cy="693420"/>
           </a:xfrm>
           <a:prstGeom prst="roundRect">
             <a:avLst>
@@ -21720,11 +19553,11 @@
             </a:avLst>
           </a:prstGeom>
           <a:solidFill>
-            <a:srgbClr val="FEF2F2"/>
+            <a:srgbClr val="EFF4FF"/>
           </a:solidFill>
           <a:ln w="19050">
             <a:solidFill>
-              <a:srgbClr val="991B1B"/>
+              <a:srgbClr val="1E40AF"/>
             </a:solidFill>
           </a:ln>
           <a:effectLst/>
@@ -21759,8 +19592,8 @@
         </p:nvSpPr>
         <p:spPr>
           <a:xfrm>
-            <a:off x="914400" y="5074920"/>
-            <a:ext cx="10424160" cy="731520"/>
+            <a:off x="914400" y="5120640"/>
+            <a:ext cx="10424160" cy="693420"/>
           </a:xfrm>
           <a:prstGeom prst="rect">
             <a:avLst/>
@@ -21779,13 +19612,13 @@
               </a:spcAft>
             </a:pPr>
             <a:r>
-              <a:rPr sz="2400" b="1">
-                <a:solidFill>
-                  <a:srgbClr val="991B1B"/>
+              <a:rPr sz="2200" b="1">
+                <a:solidFill>
+                  <a:srgbClr val="1E40AF"/>
                 </a:solidFill>
                 <a:latin typeface="Calibri"/>
               </a:rPr>
-              <a:t>Thơ hai-cư: hình ảnh bình dị, khơi gợi nhiều hơn diễn giải.</a:t>
+              <a:t>💡 Nhân vật trữ tình có nỡ làm đứt dây hoa?</a:t>
             </a:r>
           </a:p>
         </p:txBody>
@@ -21868,14 +19701,14 @@
         </p:nvSpPr>
         <p:spPr>
           <a:xfrm>
-            <a:off x="10253167" y="457200"/>
-            <a:ext cx="1389888" cy="457200"/>
+            <a:off x="9942271" y="457200"/>
+            <a:ext cx="1700784" cy="457200"/>
           </a:xfrm>
           <a:prstGeom prst="roundRect">
             <a:avLst/>
           </a:prstGeom>
           <a:solidFill>
-            <a:srgbClr val="1E40AF"/>
+            <a:srgbClr val="991B1B"/>
           </a:solidFill>
           <a:ln>
             <a:noFill/>
@@ -21908,7 +19741,7 @@
                 </a:solidFill>
                 <a:latin typeface="Arial"/>
               </a:rPr>
-              <a:t>ĐỀ BÀI</a:t>
+              <a:t>LỜI GIẢI</a:t>
             </a:r>
           </a:p>
         </p:txBody>
@@ -21922,7 +19755,7 @@
         <p:spPr>
           <a:xfrm>
             <a:off x="731520" y="274320"/>
-            <a:ext cx="9582912" cy="868680"/>
+            <a:ext cx="9272016" cy="868680"/>
           </a:xfrm>
           <a:prstGeom prst="rect">
             <a:avLst/>
@@ -22035,7 +19868,7 @@
         <p:spPr>
           <a:xfrm>
             <a:off x="731520" y="1463040"/>
-            <a:ext cx="10789920" cy="3566160"/>
+            <a:ext cx="10789920" cy="3474720"/>
           </a:xfrm>
           <a:prstGeom prst="rect">
             <a:avLst/>
@@ -22048,19 +19881,66 @@
           </a:bodyPr>
           <a:lstStyle/>
           <a:p>
-            <a:pPr algn="l">
+            <a:pPr algn="l" marL="365760" indent="-365760">
               <a:spcAft>
                 <a:spcPts val="800"/>
               </a:spcAft>
+              <a:buClr>
+                <a:srgbClr val="1E40AF"/>
+              </a:buClr>
+              <a:buFont typeface="Arial"/>
+              <a:buChar char="•"/>
             </a:pPr>
             <a:r>
-              <a:rPr sz="2600" b="1">
+              <a:rPr sz="2300">
                 <a:solidFill>
                   <a:srgbClr val="1E293B"/>
                 </a:solidFill>
                 <a:latin typeface="Calibri"/>
               </a:rPr>
-              <a:t>Bài thơ của Chi-y-ô xoay quanh phát hiện nào? Vì sao phát hiện ấy dẫn nhân vật trữ tình sang “xin nước nhà bên”? Ý nghĩa triết lí?</a:t>
+              <a:t>Phát hiện: dây gàu bị hoa triêu nhan quấn vướng.</a:t>
+            </a:r>
+          </a:p>
+          <a:p>
+            <a:pPr algn="l" marL="365760" indent="-365760">
+              <a:spcAft>
+                <a:spcPts val="800"/>
+              </a:spcAft>
+              <a:buClr>
+                <a:srgbClr val="1E40AF"/>
+              </a:buClr>
+              <a:buFont typeface="Arial"/>
+              <a:buChar char="•"/>
+            </a:pPr>
+            <a:r>
+              <a:rPr sz="2300">
+                <a:solidFill>
+                  <a:srgbClr val="1E293B"/>
+                </a:solidFill>
+                <a:latin typeface="Calibri"/>
+              </a:rPr>
+              <a:t>Không nỡ làm tổn thương bông hoa → đành xin nước nhà bên.</a:t>
+            </a:r>
+          </a:p>
+          <a:p>
+            <a:pPr algn="l" marL="365760" indent="-365760">
+              <a:spcAft>
+                <a:spcPts val="800"/>
+              </a:spcAft>
+              <a:buClr>
+                <a:srgbClr val="1E40AF"/>
+              </a:buClr>
+              <a:buFont typeface="Arial"/>
+              <a:buChar char="•"/>
+            </a:pPr>
+            <a:r>
+              <a:rPr sz="2300">
+                <a:solidFill>
+                  <a:srgbClr val="1E293B"/>
+                </a:solidFill>
+                <a:latin typeface="Calibri"/>
+              </a:rPr>
+              <a:t>Triết lí: trân trọng, nâng niu sự sống; ứng xử hài hoà với thiên nhiên.</a:t>
             </a:r>
           </a:p>
         </p:txBody>
@@ -22073,8 +19953,8 @@
         </p:nvSpPr>
         <p:spPr>
           <a:xfrm>
-            <a:off x="731520" y="5120640"/>
-            <a:ext cx="10789920" cy="693420"/>
+            <a:off x="731520" y="5074920"/>
+            <a:ext cx="10789920" cy="731520"/>
           </a:xfrm>
           <a:prstGeom prst="roundRect">
             <a:avLst>
@@ -22082,11 +19962,11 @@
             </a:avLst>
           </a:prstGeom>
           <a:solidFill>
-            <a:srgbClr val="EFF4FF"/>
+            <a:srgbClr val="FEF2F2"/>
           </a:solidFill>
           <a:ln w="19050">
             <a:solidFill>
-              <a:srgbClr val="1E40AF"/>
+              <a:srgbClr val="991B1B"/>
             </a:solidFill>
           </a:ln>
           <a:effectLst/>
@@ -22121,8 +20001,8 @@
         </p:nvSpPr>
         <p:spPr>
           <a:xfrm>
-            <a:off x="914400" y="5120640"/>
-            <a:ext cx="10424160" cy="693420"/>
+            <a:off x="914400" y="5074920"/>
+            <a:ext cx="10424160" cy="731520"/>
           </a:xfrm>
           <a:prstGeom prst="rect">
             <a:avLst/>
@@ -22141,13 +20021,13 @@
               </a:spcAft>
             </a:pPr>
             <a:r>
-              <a:rPr sz="2200" b="1">
-                <a:solidFill>
-                  <a:srgbClr val="1E40AF"/>
+              <a:rPr sz="2400" b="1">
+                <a:solidFill>
+                  <a:srgbClr val="991B1B"/>
                 </a:solidFill>
                 <a:latin typeface="Calibri"/>
               </a:rPr>
-              <a:t>💡 Nhân vật trữ tình có nỡ làm đứt dây hoa?</a:t>
+              <a:t>Tình yêu thiên nhiên tinh tế, nhân hậu.</a:t>
             </a:r>
           </a:p>
         </p:txBody>

--- a/mon/ngu_van/slide/lop10/Slide_NGUVAN10_Bai2_VeDepCuaThoCa_T12-22.pptx
+++ b/mon/ngu_van/slide/lop10/Slide_NGUVAN10_Bai2_VeDepCuaThoCa_T12-22.pptx
@@ -5861,7 +5861,7 @@
                 </a:solidFill>
                 <a:latin typeface="Calibri"/>
               </a:rPr>
-              <a:t>Trường THPT Vĩnh Thạnh – Tổ Ngữ văn – Tiếng Anh</a:t>
+              <a:t>Trường THPT – Tổ Ngữ văn – Tiếng Anh</a:t>
             </a:r>
           </a:p>
         </p:txBody>
@@ -17464,103 +17464,6 @@
       <p:grpSpPr/>
       <p:sp>
         <p:nvSpPr>
-          <p:cNvPr id="2" name="Rectangle 1"/>
-          <p:cNvSpPr/>
-          <p:nvPr/>
-        </p:nvSpPr>
-        <p:spPr>
-          <a:xfrm>
-            <a:off x="457200" y="384048"/>
-            <a:ext cx="109728" cy="658368"/>
-          </a:xfrm>
-          <a:prstGeom prst="rect">
-            <a:avLst/>
-          </a:prstGeom>
-          <a:solidFill>
-            <a:srgbClr val="1E40AF"/>
-          </a:solidFill>
-          <a:ln>
-            <a:noFill/>
-          </a:ln>
-          <a:effectLst/>
-        </p:spPr>
-        <p:style>
-          <a:lnRef idx="1">
-            <a:schemeClr val="accent1"/>
-          </a:lnRef>
-          <a:fillRef idx="3">
-            <a:schemeClr val="accent1"/>
-          </a:fillRef>
-          <a:effectRef idx="2">
-            <a:schemeClr val="accent1"/>
-          </a:effectRef>
-          <a:fontRef idx="minor">
-            <a:schemeClr val="lt1"/>
-          </a:fontRef>
-        </p:style>
-        <p:txBody>
-          <a:bodyPr rtlCol="0" anchor="ctr"/>
-          <a:lstStyle/>
-          <a:p>
-            <a:pPr algn="ctr"/>
-          </a:p>
-        </p:txBody>
-      </p:sp>
-      <p:sp>
-        <p:nvSpPr>
-          <p:cNvPr id="3" name="Rounded Rectangle 2"/>
-          <p:cNvSpPr/>
-          <p:nvPr/>
-        </p:nvSpPr>
-        <p:spPr>
-          <a:xfrm>
-            <a:off x="10097719" y="457200"/>
-            <a:ext cx="1545336" cy="457200"/>
-          </a:xfrm>
-          <a:prstGeom prst="roundRect">
-            <a:avLst/>
-          </a:prstGeom>
-          <a:solidFill>
-            <a:srgbClr val="166534"/>
-          </a:solidFill>
-          <a:ln>
-            <a:noFill/>
-          </a:ln>
-          <a:effectLst/>
-        </p:spPr>
-        <p:style>
-          <a:lnRef idx="1">
-            <a:schemeClr val="accent1"/>
-          </a:lnRef>
-          <a:fillRef idx="3">
-            <a:schemeClr val="accent1"/>
-          </a:fillRef>
-          <a:effectRef idx="2">
-            <a:schemeClr val="accent1"/>
-          </a:effectRef>
-          <a:fontRef idx="minor">
-            <a:schemeClr val="lt1"/>
-          </a:fontRef>
-        </p:style>
-        <p:txBody>
-          <a:bodyPr rtlCol="0" anchor="ctr" wrap="none" tIns="0" bIns="0"/>
-          <a:lstStyle/>
-          <a:p>
-            <a:pPr algn="ctr"/>
-            <a:r>
-              <a:rPr sz="1400" b="1">
-                <a:solidFill>
-                  <a:srgbClr val="FFFFFF"/>
-                </a:solidFill>
-                <a:latin typeface="Arial"/>
-              </a:rPr>
-              <a:t>CỦNG CỐ</a:t>
-            </a:r>
-          </a:p>
-        </p:txBody>
-      </p:sp>
-      <p:sp>
-        <p:nvSpPr>
           <p:cNvPr id="4" name="TextBox 3"/>
           <p:cNvSpPr txBox="1"/>
           <p:nvPr/>
@@ -17672,30 +17575,2085 @@
           </a:p>
         </p:txBody>
       </p:sp>
-      <p:pic>
-        <p:nvPicPr>
-          <p:cNvPr id="7" name="Picture 6" descr="SoDoTuDuy_NGUVAN10_Bai2_VeDepCuaThoCa_T12-22.png"/>
-          <p:cNvPicPr>
-            <a:picLocks noChangeAspect="1"/>
-          </p:cNvPicPr>
-          <p:nvPr/>
-        </p:nvPicPr>
-        <p:blipFill>
-          <a:blip r:embed="rId2"/>
-          <a:stretch>
-            <a:fillRect/>
-          </a:stretch>
-        </p:blipFill>
-        <p:spPr>
-          <a:xfrm>
-            <a:off x="1788855" y="1371600"/>
-            <a:ext cx="8675250" cy="4846320"/>
-          </a:xfrm>
-          <a:prstGeom prst="rect">
-            <a:avLst/>
-          </a:prstGeom>
-        </p:spPr>
-      </p:pic>
+      <p:cxnSp>
+        <p:nvCxnSpPr>
+          <p:cNvPr id="7" name="Connector 6"/>
+          <p:cNvCxnSpPr/>
+          <p:nvPr/>
+        </p:nvCxnSpPr>
+        <p:spPr>
+          <a:xfrm flipH="1" flipV="1">
+            <a:off x="4338888" y="2670962"/>
+            <a:ext cx="1688379" cy="1283818"/>
+          </a:xfrm>
+          <a:prstGeom prst="line">
+            <a:avLst/>
+          </a:prstGeom>
+          <a:ln w="44450">
+            <a:solidFill>
+              <a:srgbClr val="548235"/>
+            </a:solidFill>
+          </a:ln>
+        </p:spPr>
+        <p:style>
+          <a:lnRef idx="2">
+            <a:schemeClr val="accent1"/>
+          </a:lnRef>
+          <a:fillRef idx="0">
+            <a:schemeClr val="accent1"/>
+          </a:fillRef>
+          <a:effectRef idx="1">
+            <a:schemeClr val="accent1"/>
+          </a:effectRef>
+          <a:fontRef idx="minor">
+            <a:schemeClr val="tx1"/>
+          </a:fontRef>
+        </p:style>
+      </p:cxnSp>
+      <p:cxnSp>
+        <p:nvCxnSpPr>
+          <p:cNvPr id="8" name="Connector 7"/>
+          <p:cNvCxnSpPr/>
+          <p:nvPr/>
+        </p:nvCxnSpPr>
+        <p:spPr>
+          <a:xfrm flipH="1" flipV="1">
+            <a:off x="2735059" y="1931116"/>
+            <a:ext cx="1603829" cy="739846"/>
+          </a:xfrm>
+          <a:prstGeom prst="line">
+            <a:avLst/>
+          </a:prstGeom>
+          <a:ln w="15875">
+            <a:solidFill>
+              <a:srgbClr val="548235"/>
+            </a:solidFill>
+          </a:ln>
+        </p:spPr>
+        <p:style>
+          <a:lnRef idx="2">
+            <a:schemeClr val="accent1"/>
+          </a:lnRef>
+          <a:fillRef idx="0">
+            <a:schemeClr val="accent1"/>
+          </a:fillRef>
+          <a:effectRef idx="1">
+            <a:schemeClr val="accent1"/>
+          </a:effectRef>
+          <a:fontRef idx="minor">
+            <a:schemeClr val="tx1"/>
+          </a:fontRef>
+        </p:style>
+      </p:cxnSp>
+      <p:sp>
+        <p:nvSpPr>
+          <p:cNvPr id="9" name="Rounded Rectangle 8"/>
+          <p:cNvSpPr/>
+          <p:nvPr/>
+        </p:nvSpPr>
+        <p:spPr>
+          <a:xfrm>
+            <a:off x="877582" y="1755515"/>
+            <a:ext cx="1857477" cy="351200"/>
+          </a:xfrm>
+          <a:prstGeom prst="roundRect">
+            <a:avLst>
+              <a:gd name="adj" fmla="val 50000"/>
+            </a:avLst>
+          </a:prstGeom>
+          <a:solidFill>
+            <a:srgbClr val="EDF5E8"/>
+          </a:solidFill>
+          <a:ln w="15875">
+            <a:solidFill>
+              <a:srgbClr val="548235"/>
+            </a:solidFill>
+          </a:ln>
+          <a:effectLst/>
+        </p:spPr>
+        <p:style>
+          <a:lnRef idx="1">
+            <a:schemeClr val="accent1"/>
+          </a:lnRef>
+          <a:fillRef idx="3">
+            <a:schemeClr val="accent1"/>
+          </a:fillRef>
+          <a:effectRef idx="2">
+            <a:schemeClr val="accent1"/>
+          </a:effectRef>
+          <a:fontRef idx="minor">
+            <a:schemeClr val="lt1"/>
+          </a:fontRef>
+        </p:style>
+        <p:txBody>
+          <a:bodyPr rtlCol="0" anchor="ctr" wrap="none" lIns="64000" rIns="64000" tIns="25400" bIns="25400"/>
+          <a:lstStyle/>
+          <a:p>
+            <a:pPr algn="ctr"/>
+            <a:r>
+              <a:rPr sz="1300" b="1">
+                <a:solidFill>
+                  <a:srgbClr val="8B0000"/>
+                </a:solidFill>
+                <a:latin typeface="Calibri"/>
+              </a:rPr>
+              <a:t>Nhân vật trữ tình</a:t>
+            </a:r>
+          </a:p>
+        </p:txBody>
+      </p:sp>
+      <p:cxnSp>
+        <p:nvCxnSpPr>
+          <p:cNvPr id="10" name="Connector 9"/>
+          <p:cNvCxnSpPr/>
+          <p:nvPr/>
+        </p:nvCxnSpPr>
+        <p:spPr>
+          <a:xfrm flipH="1" flipV="1">
+            <a:off x="2464295" y="2357206"/>
+            <a:ext cx="1874593" cy="313756"/>
+          </a:xfrm>
+          <a:prstGeom prst="line">
+            <a:avLst/>
+          </a:prstGeom>
+          <a:ln w="15875">
+            <a:solidFill>
+              <a:srgbClr val="548235"/>
+            </a:solidFill>
+          </a:ln>
+        </p:spPr>
+        <p:style>
+          <a:lnRef idx="2">
+            <a:schemeClr val="accent1"/>
+          </a:lnRef>
+          <a:fillRef idx="0">
+            <a:schemeClr val="accent1"/>
+          </a:fillRef>
+          <a:effectRef idx="1">
+            <a:schemeClr val="accent1"/>
+          </a:effectRef>
+          <a:fontRef idx="minor">
+            <a:schemeClr val="tx1"/>
+          </a:fontRef>
+        </p:style>
+      </p:cxnSp>
+      <p:sp>
+        <p:nvSpPr>
+          <p:cNvPr id="11" name="Rounded Rectangle 10"/>
+          <p:cNvSpPr/>
+          <p:nvPr/>
+        </p:nvSpPr>
+        <p:spPr>
+          <a:xfrm>
+            <a:off x="1148346" y="2181605"/>
+            <a:ext cx="1315949" cy="351200"/>
+          </a:xfrm>
+          <a:prstGeom prst="roundRect">
+            <a:avLst>
+              <a:gd name="adj" fmla="val 50000"/>
+            </a:avLst>
+          </a:prstGeom>
+          <a:solidFill>
+            <a:srgbClr val="EDF5E8"/>
+          </a:solidFill>
+          <a:ln w="15875">
+            <a:solidFill>
+              <a:srgbClr val="548235"/>
+            </a:solidFill>
+          </a:ln>
+          <a:effectLst/>
+        </p:spPr>
+        <p:style>
+          <a:lnRef idx="1">
+            <a:schemeClr val="accent1"/>
+          </a:lnRef>
+          <a:fillRef idx="3">
+            <a:schemeClr val="accent1"/>
+          </a:fillRef>
+          <a:effectRef idx="2">
+            <a:schemeClr val="accent1"/>
+          </a:effectRef>
+          <a:fontRef idx="minor">
+            <a:schemeClr val="lt1"/>
+          </a:fontRef>
+        </p:style>
+        <p:txBody>
+          <a:bodyPr rtlCol="0" anchor="ctr" wrap="none" lIns="64000" rIns="64000" tIns="25400" bIns="25400"/>
+          <a:lstStyle/>
+          <a:p>
+            <a:pPr algn="ctr"/>
+            <a:r>
+              <a:rPr sz="1300" b="0">
+                <a:solidFill>
+                  <a:srgbClr val="000000"/>
+                </a:solidFill>
+                <a:latin typeface="Calibri"/>
+              </a:rPr>
+              <a:t>Hình ảnh thơ</a:t>
+            </a:r>
+          </a:p>
+        </p:txBody>
+      </p:sp>
+      <p:cxnSp>
+        <p:nvCxnSpPr>
+          <p:cNvPr id="12" name="Connector 11"/>
+          <p:cNvCxnSpPr/>
+          <p:nvPr/>
+        </p:nvCxnSpPr>
+        <p:spPr>
+          <a:xfrm flipH="1">
+            <a:off x="2593073" y="2670962"/>
+            <a:ext cx="1745815" cy="213045"/>
+          </a:xfrm>
+          <a:prstGeom prst="line">
+            <a:avLst/>
+          </a:prstGeom>
+          <a:ln w="15875">
+            <a:solidFill>
+              <a:srgbClr val="548235"/>
+            </a:solidFill>
+          </a:ln>
+        </p:spPr>
+        <p:style>
+          <a:lnRef idx="2">
+            <a:schemeClr val="accent1"/>
+          </a:lnRef>
+          <a:fillRef idx="0">
+            <a:schemeClr val="accent1"/>
+          </a:fillRef>
+          <a:effectRef idx="1">
+            <a:schemeClr val="accent1"/>
+          </a:effectRef>
+          <a:fontRef idx="minor">
+            <a:schemeClr val="tx1"/>
+          </a:fontRef>
+        </p:style>
+      </p:cxnSp>
+      <p:sp>
+        <p:nvSpPr>
+          <p:cNvPr id="13" name="Rounded Rectangle 12"/>
+          <p:cNvSpPr/>
+          <p:nvPr/>
+        </p:nvSpPr>
+        <p:spPr>
+          <a:xfrm>
+            <a:off x="1019568" y="2607696"/>
+            <a:ext cx="1573505" cy="552622"/>
+          </a:xfrm>
+          <a:prstGeom prst="roundRect">
+            <a:avLst>
+              <a:gd name="adj" fmla="val 50000"/>
+            </a:avLst>
+          </a:prstGeom>
+          <a:solidFill>
+            <a:srgbClr val="EDF5E8"/>
+          </a:solidFill>
+          <a:ln w="15875">
+            <a:solidFill>
+              <a:srgbClr val="548235"/>
+            </a:solidFill>
+          </a:ln>
+          <a:effectLst/>
+        </p:spPr>
+        <p:style>
+          <a:lnRef idx="1">
+            <a:schemeClr val="accent1"/>
+          </a:lnRef>
+          <a:fillRef idx="3">
+            <a:schemeClr val="accent1"/>
+          </a:fillRef>
+          <a:effectRef idx="2">
+            <a:schemeClr val="accent1"/>
+          </a:effectRef>
+          <a:fontRef idx="minor">
+            <a:schemeClr val="lt1"/>
+          </a:fontRef>
+        </p:style>
+        <p:txBody>
+          <a:bodyPr rtlCol="0" anchor="ctr" wrap="none" lIns="64000" rIns="64000" tIns="25400" bIns="25400"/>
+          <a:lstStyle/>
+          <a:p>
+            <a:pPr algn="ctr"/>
+            <a:r>
+              <a:rPr sz="1300" b="0">
+                <a:solidFill>
+                  <a:srgbClr val="000000"/>
+                </a:solidFill>
+                <a:latin typeface="Calibri"/>
+              </a:rPr>
+              <a:t>Vần – nhịp –</a:t>
+            </a:r>
+          </a:p>
+          <a:p>
+            <a:pPr algn="ctr"/>
+            <a:r>
+              <a:rPr sz="1300" b="0">
+                <a:solidFill>
+                  <a:srgbClr val="000000"/>
+                </a:solidFill>
+                <a:latin typeface="Calibri"/>
+              </a:rPr>
+              <a:t>nhạc điệu – đối</a:t>
+            </a:r>
+          </a:p>
+        </p:txBody>
+      </p:sp>
+      <p:cxnSp>
+        <p:nvCxnSpPr>
+          <p:cNvPr id="14" name="Connector 13"/>
+          <p:cNvCxnSpPr/>
+          <p:nvPr/>
+        </p:nvCxnSpPr>
+        <p:spPr>
+          <a:xfrm flipH="1">
+            <a:off x="2678925" y="2670962"/>
+            <a:ext cx="1659963" cy="739846"/>
+          </a:xfrm>
+          <a:prstGeom prst="line">
+            <a:avLst/>
+          </a:prstGeom>
+          <a:ln w="15875">
+            <a:solidFill>
+              <a:srgbClr val="548235"/>
+            </a:solidFill>
+          </a:ln>
+        </p:spPr>
+        <p:style>
+          <a:lnRef idx="2">
+            <a:schemeClr val="accent1"/>
+          </a:lnRef>
+          <a:fillRef idx="0">
+            <a:schemeClr val="accent1"/>
+          </a:fillRef>
+          <a:effectRef idx="1">
+            <a:schemeClr val="accent1"/>
+          </a:effectRef>
+          <a:fontRef idx="minor">
+            <a:schemeClr val="tx1"/>
+          </a:fontRef>
+        </p:style>
+      </p:cxnSp>
+      <p:sp>
+        <p:nvSpPr>
+          <p:cNvPr id="15" name="Rounded Rectangle 14"/>
+          <p:cNvSpPr/>
+          <p:nvPr/>
+        </p:nvSpPr>
+        <p:spPr>
+          <a:xfrm>
+            <a:off x="933716" y="3235208"/>
+            <a:ext cx="1745209" cy="351200"/>
+          </a:xfrm>
+          <a:prstGeom prst="roundRect">
+            <a:avLst>
+              <a:gd name="adj" fmla="val 50000"/>
+            </a:avLst>
+          </a:prstGeom>
+          <a:solidFill>
+            <a:srgbClr val="EDF5E8"/>
+          </a:solidFill>
+          <a:ln w="15875">
+            <a:solidFill>
+              <a:srgbClr val="548235"/>
+            </a:solidFill>
+          </a:ln>
+          <a:effectLst/>
+        </p:spPr>
+        <p:style>
+          <a:lnRef idx="1">
+            <a:schemeClr val="accent1"/>
+          </a:lnRef>
+          <a:fillRef idx="3">
+            <a:schemeClr val="accent1"/>
+          </a:fillRef>
+          <a:effectRef idx="2">
+            <a:schemeClr val="accent1"/>
+          </a:effectRef>
+          <a:fontRef idx="minor">
+            <a:schemeClr val="lt1"/>
+          </a:fontRef>
+        </p:style>
+        <p:txBody>
+          <a:bodyPr rtlCol="0" anchor="ctr" wrap="none" lIns="64000" rIns="64000" tIns="25400" bIns="25400"/>
+          <a:lstStyle/>
+          <a:p>
+            <a:pPr algn="ctr"/>
+            <a:r>
+              <a:rPr sz="1300" b="0">
+                <a:solidFill>
+                  <a:srgbClr val="000000"/>
+                </a:solidFill>
+                <a:latin typeface="Calibri"/>
+              </a:rPr>
+              <a:t>Thi luật, thể thơ</a:t>
+            </a:r>
+          </a:p>
+        </p:txBody>
+      </p:sp>
+      <p:sp>
+        <p:nvSpPr>
+          <p:cNvPr id="16" name="Oval 15"/>
+          <p:cNvSpPr/>
+          <p:nvPr/>
+        </p:nvSpPr>
+        <p:spPr>
+          <a:xfrm>
+            <a:off x="3502606" y="2259078"/>
+            <a:ext cx="1672565" cy="823767"/>
+          </a:xfrm>
+          <a:prstGeom prst="ellipse">
+            <a:avLst/>
+          </a:prstGeom>
+          <a:solidFill>
+            <a:srgbClr val="E2EFDA"/>
+          </a:solidFill>
+          <a:ln w="31750">
+            <a:solidFill>
+              <a:srgbClr val="375623"/>
+            </a:solidFill>
+          </a:ln>
+          <a:effectLst/>
+        </p:spPr>
+        <p:style>
+          <a:lnRef idx="1">
+            <a:schemeClr val="accent1"/>
+          </a:lnRef>
+          <a:fillRef idx="3">
+            <a:schemeClr val="accent1"/>
+          </a:fillRef>
+          <a:effectRef idx="2">
+            <a:schemeClr val="accent1"/>
+          </a:effectRef>
+          <a:fontRef idx="minor">
+            <a:schemeClr val="lt1"/>
+          </a:fontRef>
+        </p:style>
+        <p:txBody>
+          <a:bodyPr rtlCol="0" anchor="ctr" wrap="none" lIns="64000" rIns="64000" tIns="25400" bIns="25400"/>
+          <a:lstStyle/>
+          <a:p>
+            <a:pPr algn="ctr"/>
+            <a:r>
+              <a:rPr sz="1500" b="1">
+                <a:solidFill>
+                  <a:srgbClr val="000000"/>
+                </a:solidFill>
+                <a:latin typeface="Calibri"/>
+              </a:rPr>
+              <a:t>① Tri thức</a:t>
+            </a:r>
+          </a:p>
+          <a:p>
+            <a:pPr algn="ctr"/>
+            <a:r>
+              <a:rPr sz="1500" b="1">
+                <a:solidFill>
+                  <a:srgbClr val="000000"/>
+                </a:solidFill>
+                <a:latin typeface="Calibri"/>
+              </a:rPr>
+              <a:t>ngữ văn</a:t>
+            </a:r>
+          </a:p>
+        </p:txBody>
+      </p:sp>
+      <p:cxnSp>
+        <p:nvCxnSpPr>
+          <p:cNvPr id="17" name="Connector 16"/>
+          <p:cNvCxnSpPr/>
+          <p:nvPr/>
+        </p:nvCxnSpPr>
+        <p:spPr>
+          <a:xfrm flipV="1">
+            <a:off x="6027267" y="2670962"/>
+            <a:ext cx="1688379" cy="1283818"/>
+          </a:xfrm>
+          <a:prstGeom prst="line">
+            <a:avLst/>
+          </a:prstGeom>
+          <a:ln w="44450">
+            <a:solidFill>
+              <a:srgbClr val="BF8F00"/>
+            </a:solidFill>
+          </a:ln>
+        </p:spPr>
+        <p:style>
+          <a:lnRef idx="2">
+            <a:schemeClr val="accent1"/>
+          </a:lnRef>
+          <a:fillRef idx="0">
+            <a:schemeClr val="accent1"/>
+          </a:fillRef>
+          <a:effectRef idx="1">
+            <a:schemeClr val="accent1"/>
+          </a:effectRef>
+          <a:fontRef idx="minor">
+            <a:schemeClr val="tx1"/>
+          </a:fontRef>
+        </p:style>
+      </p:cxnSp>
+      <p:cxnSp>
+        <p:nvCxnSpPr>
+          <p:cNvPr id="18" name="Connector 17"/>
+          <p:cNvCxnSpPr/>
+          <p:nvPr/>
+        </p:nvCxnSpPr>
+        <p:spPr>
+          <a:xfrm flipV="1">
+            <a:off x="7715646" y="1830405"/>
+            <a:ext cx="1465145" cy="840557"/>
+          </a:xfrm>
+          <a:prstGeom prst="line">
+            <a:avLst/>
+          </a:prstGeom>
+          <a:ln w="15875">
+            <a:solidFill>
+              <a:srgbClr val="BF8F00"/>
+            </a:solidFill>
+          </a:ln>
+        </p:spPr>
+        <p:style>
+          <a:lnRef idx="2">
+            <a:schemeClr val="accent1"/>
+          </a:lnRef>
+          <a:fillRef idx="0">
+            <a:schemeClr val="accent1"/>
+          </a:fillRef>
+          <a:effectRef idx="1">
+            <a:schemeClr val="accent1"/>
+          </a:effectRef>
+          <a:fontRef idx="minor">
+            <a:schemeClr val="tx1"/>
+          </a:fontRef>
+        </p:style>
+      </p:cxnSp>
+      <p:sp>
+        <p:nvSpPr>
+          <p:cNvPr id="19" name="Rounded Rectangle 18"/>
+          <p:cNvSpPr/>
+          <p:nvPr/>
+        </p:nvSpPr>
+        <p:spPr>
+          <a:xfrm>
+            <a:off x="9180791" y="1654804"/>
+            <a:ext cx="2134845" cy="351200"/>
+          </a:xfrm>
+          <a:prstGeom prst="roundRect">
+            <a:avLst>
+              <a:gd name="adj" fmla="val 50000"/>
+            </a:avLst>
+          </a:prstGeom>
+          <a:solidFill>
+            <a:srgbClr val="FFF8E1"/>
+          </a:solidFill>
+          <a:ln w="15875">
+            <a:solidFill>
+              <a:srgbClr val="BF8F00"/>
+            </a:solidFill>
+          </a:ln>
+          <a:effectLst/>
+        </p:spPr>
+        <p:style>
+          <a:lnRef idx="1">
+            <a:schemeClr val="accent1"/>
+          </a:lnRef>
+          <a:fillRef idx="3">
+            <a:schemeClr val="accent1"/>
+          </a:fillRef>
+          <a:effectRef idx="2">
+            <a:schemeClr val="accent1"/>
+          </a:effectRef>
+          <a:fontRef idx="minor">
+            <a:schemeClr val="lt1"/>
+          </a:fontRef>
+        </p:style>
+        <p:txBody>
+          <a:bodyPr rtlCol="0" anchor="ctr" wrap="none" lIns="64000" rIns="64000" tIns="25400" bIns="25400"/>
+          <a:lstStyle/>
+          <a:p>
+            <a:pPr algn="ctr"/>
+            <a:r>
+              <a:rPr sz="1300" b="1">
+                <a:solidFill>
+                  <a:srgbClr val="8B0000"/>
+                </a:solidFill>
+                <a:latin typeface="Calibri"/>
+              </a:rPr>
+              <a:t>Hai-cư: 3 dòng 5–7–5</a:t>
+            </a:r>
+          </a:p>
+        </p:txBody>
+      </p:sp>
+      <p:cxnSp>
+        <p:nvCxnSpPr>
+          <p:cNvPr id="20" name="Connector 19"/>
+          <p:cNvCxnSpPr/>
+          <p:nvPr/>
+        </p:nvCxnSpPr>
+        <p:spPr>
+          <a:xfrm flipV="1">
+            <a:off x="7715646" y="2256495"/>
+            <a:ext cx="1531185" cy="414467"/>
+          </a:xfrm>
+          <a:prstGeom prst="line">
+            <a:avLst/>
+          </a:prstGeom>
+          <a:ln w="15875">
+            <a:solidFill>
+              <a:srgbClr val="BF8F00"/>
+            </a:solidFill>
+          </a:ln>
+        </p:spPr>
+        <p:style>
+          <a:lnRef idx="2">
+            <a:schemeClr val="accent1"/>
+          </a:lnRef>
+          <a:fillRef idx="0">
+            <a:schemeClr val="accent1"/>
+          </a:fillRef>
+          <a:effectRef idx="1">
+            <a:schemeClr val="accent1"/>
+          </a:effectRef>
+          <a:fontRef idx="minor">
+            <a:schemeClr val="tx1"/>
+          </a:fontRef>
+        </p:style>
+      </p:cxnSp>
+      <p:sp>
+        <p:nvSpPr>
+          <p:cNvPr id="21" name="Rounded Rectangle 20"/>
+          <p:cNvSpPr/>
+          <p:nvPr/>
+        </p:nvSpPr>
+        <p:spPr>
+          <a:xfrm>
+            <a:off x="9246831" y="2080894"/>
+            <a:ext cx="2002765" cy="351200"/>
+          </a:xfrm>
+          <a:prstGeom prst="roundRect">
+            <a:avLst>
+              <a:gd name="adj" fmla="val 50000"/>
+            </a:avLst>
+          </a:prstGeom>
+          <a:solidFill>
+            <a:srgbClr val="FFF8E1"/>
+          </a:solidFill>
+          <a:ln w="15875">
+            <a:solidFill>
+              <a:srgbClr val="BF8F00"/>
+            </a:solidFill>
+          </a:ln>
+          <a:effectLst/>
+        </p:spPr>
+        <p:style>
+          <a:lnRef idx="1">
+            <a:schemeClr val="accent1"/>
+          </a:lnRef>
+          <a:fillRef idx="3">
+            <a:schemeClr val="accent1"/>
+          </a:fillRef>
+          <a:effectRef idx="2">
+            <a:schemeClr val="accent1"/>
+          </a:effectRef>
+          <a:fontRef idx="minor">
+            <a:schemeClr val="lt1"/>
+          </a:fontRef>
+        </p:style>
+        <p:txBody>
+          <a:bodyPr rtlCol="0" anchor="ctr" wrap="none" lIns="64000" rIns="64000" tIns="25400" bIns="25400"/>
+          <a:lstStyle/>
+          <a:p>
+            <a:pPr algn="ctr"/>
+            <a:r>
+              <a:rPr sz="1300" b="0">
+                <a:solidFill>
+                  <a:srgbClr val="000000"/>
+                </a:solidFill>
+                <a:latin typeface="Calibri"/>
+              </a:rPr>
+              <a:t>Phát hiện “bừng ngộ”</a:t>
+            </a:r>
+          </a:p>
+        </p:txBody>
+      </p:sp>
+      <p:cxnSp>
+        <p:nvCxnSpPr>
+          <p:cNvPr id="22" name="Connector 21"/>
+          <p:cNvCxnSpPr/>
+          <p:nvPr/>
+        </p:nvCxnSpPr>
+        <p:spPr>
+          <a:xfrm>
+            <a:off x="7715646" y="2670962"/>
+            <a:ext cx="1702889" cy="112334"/>
+          </a:xfrm>
+          <a:prstGeom prst="line">
+            <a:avLst/>
+          </a:prstGeom>
+          <a:ln w="15875">
+            <a:solidFill>
+              <a:srgbClr val="BF8F00"/>
+            </a:solidFill>
+          </a:ln>
+        </p:spPr>
+        <p:style>
+          <a:lnRef idx="2">
+            <a:schemeClr val="accent1"/>
+          </a:lnRef>
+          <a:fillRef idx="0">
+            <a:schemeClr val="accent1"/>
+          </a:fillRef>
+          <a:effectRef idx="1">
+            <a:schemeClr val="accent1"/>
+          </a:effectRef>
+          <a:fontRef idx="minor">
+            <a:schemeClr val="tx1"/>
+          </a:fontRef>
+        </p:style>
+      </p:cxnSp>
+      <p:sp>
+        <p:nvSpPr>
+          <p:cNvPr id="23" name="Rounded Rectangle 22"/>
+          <p:cNvSpPr/>
+          <p:nvPr/>
+        </p:nvSpPr>
+        <p:spPr>
+          <a:xfrm>
+            <a:off x="9418535" y="2506985"/>
+            <a:ext cx="1659357" cy="552622"/>
+          </a:xfrm>
+          <a:prstGeom prst="roundRect">
+            <a:avLst>
+              <a:gd name="adj" fmla="val 50000"/>
+            </a:avLst>
+          </a:prstGeom>
+          <a:solidFill>
+            <a:srgbClr val="FFF8E1"/>
+          </a:solidFill>
+          <a:ln w="15875">
+            <a:solidFill>
+              <a:srgbClr val="BF8F00"/>
+            </a:solidFill>
+          </a:ln>
+          <a:effectLst/>
+        </p:spPr>
+        <p:style>
+          <a:lnRef idx="1">
+            <a:schemeClr val="accent1"/>
+          </a:lnRef>
+          <a:fillRef idx="3">
+            <a:schemeClr val="accent1"/>
+          </a:fillRef>
+          <a:effectRef idx="2">
+            <a:schemeClr val="accent1"/>
+          </a:effectRef>
+          <a:fontRef idx="minor">
+            <a:schemeClr val="lt1"/>
+          </a:fontRef>
+        </p:style>
+        <p:txBody>
+          <a:bodyPr rtlCol="0" anchor="ctr" wrap="none" lIns="64000" rIns="64000" tIns="25400" bIns="25400"/>
+          <a:lstStyle/>
+          <a:p>
+            <a:pPr algn="ctr"/>
+            <a:r>
+              <a:rPr sz="1300" b="0">
+                <a:solidFill>
+                  <a:srgbClr val="000000"/>
+                </a:solidFill>
+                <a:latin typeface="Calibri"/>
+              </a:rPr>
+              <a:t>Đường luật:</a:t>
+            </a:r>
+          </a:p>
+          <a:p>
+            <a:pPr algn="ctr"/>
+            <a:r>
+              <a:rPr sz="1300" b="0">
+                <a:solidFill>
+                  <a:srgbClr val="000000"/>
+                </a:solidFill>
+                <a:latin typeface="Calibri"/>
+              </a:rPr>
+              <a:t>đề–thực–luận–kết</a:t>
+            </a:r>
+          </a:p>
+        </p:txBody>
+      </p:sp>
+      <p:cxnSp>
+        <p:nvCxnSpPr>
+          <p:cNvPr id="24" name="Connector 23"/>
+          <p:cNvCxnSpPr/>
+          <p:nvPr/>
+        </p:nvCxnSpPr>
+        <p:spPr>
+          <a:xfrm>
+            <a:off x="7715646" y="2670962"/>
+            <a:ext cx="1788741" cy="739846"/>
+          </a:xfrm>
+          <a:prstGeom prst="line">
+            <a:avLst/>
+          </a:prstGeom>
+          <a:ln w="15875">
+            <a:solidFill>
+              <a:srgbClr val="BF8F00"/>
+            </a:solidFill>
+          </a:ln>
+        </p:spPr>
+        <p:style>
+          <a:lnRef idx="2">
+            <a:schemeClr val="accent1"/>
+          </a:lnRef>
+          <a:fillRef idx="0">
+            <a:schemeClr val="accent1"/>
+          </a:fillRef>
+          <a:effectRef idx="1">
+            <a:schemeClr val="accent1"/>
+          </a:effectRef>
+          <a:fontRef idx="minor">
+            <a:schemeClr val="tx1"/>
+          </a:fontRef>
+        </p:style>
+      </p:cxnSp>
+      <p:sp>
+        <p:nvSpPr>
+          <p:cNvPr id="25" name="Rounded Rectangle 24"/>
+          <p:cNvSpPr/>
+          <p:nvPr/>
+        </p:nvSpPr>
+        <p:spPr>
+          <a:xfrm>
+            <a:off x="9504387" y="3134497"/>
+            <a:ext cx="1487653" cy="552622"/>
+          </a:xfrm>
+          <a:prstGeom prst="roundRect">
+            <a:avLst>
+              <a:gd name="adj" fmla="val 50000"/>
+            </a:avLst>
+          </a:prstGeom>
+          <a:solidFill>
+            <a:srgbClr val="FFF8E1"/>
+          </a:solidFill>
+          <a:ln w="15875">
+            <a:solidFill>
+              <a:srgbClr val="BF8F00"/>
+            </a:solidFill>
+          </a:ln>
+          <a:effectLst/>
+        </p:spPr>
+        <p:style>
+          <a:lnRef idx="1">
+            <a:schemeClr val="accent1"/>
+          </a:lnRef>
+          <a:fillRef idx="3">
+            <a:schemeClr val="accent1"/>
+          </a:fillRef>
+          <a:effectRef idx="2">
+            <a:schemeClr val="accent1"/>
+          </a:effectRef>
+          <a:fontRef idx="minor">
+            <a:schemeClr val="lt1"/>
+          </a:fontRef>
+        </p:style>
+        <p:txBody>
+          <a:bodyPr rtlCol="0" anchor="ctr" wrap="none" lIns="64000" rIns="64000" tIns="25400" bIns="25400"/>
+          <a:lstStyle/>
+          <a:p>
+            <a:pPr algn="ctr"/>
+            <a:r>
+              <a:rPr sz="1300" b="0">
+                <a:solidFill>
+                  <a:srgbClr val="000000"/>
+                </a:solidFill>
+                <a:latin typeface="Calibri"/>
+              </a:rPr>
+              <a:t>Cảnh thu – nỗi</a:t>
+            </a:r>
+          </a:p>
+          <a:p>
+            <a:pPr algn="ctr"/>
+            <a:r>
+              <a:rPr sz="1300" b="0">
+                <a:solidFill>
+                  <a:srgbClr val="000000"/>
+                </a:solidFill>
+                <a:latin typeface="Calibri"/>
+              </a:rPr>
+              <a:t>nhớ quê</a:t>
+            </a:r>
+          </a:p>
+        </p:txBody>
+      </p:sp>
+      <p:sp>
+        <p:nvSpPr>
+          <p:cNvPr id="26" name="Oval 25"/>
+          <p:cNvSpPr/>
+          <p:nvPr/>
+        </p:nvSpPr>
+        <p:spPr>
+          <a:xfrm>
+            <a:off x="6879363" y="2259078"/>
+            <a:ext cx="1672565" cy="823767"/>
+          </a:xfrm>
+          <a:prstGeom prst="ellipse">
+            <a:avLst/>
+          </a:prstGeom>
+          <a:solidFill>
+            <a:srgbClr val="FFF2CC"/>
+          </a:solidFill>
+          <a:ln w="31750">
+            <a:solidFill>
+              <a:srgbClr val="BF8F00"/>
+            </a:solidFill>
+          </a:ln>
+          <a:effectLst/>
+        </p:spPr>
+        <p:style>
+          <a:lnRef idx="1">
+            <a:schemeClr val="accent1"/>
+          </a:lnRef>
+          <a:fillRef idx="3">
+            <a:schemeClr val="accent1"/>
+          </a:fillRef>
+          <a:effectRef idx="2">
+            <a:schemeClr val="accent1"/>
+          </a:effectRef>
+          <a:fontRef idx="minor">
+            <a:schemeClr val="lt1"/>
+          </a:fontRef>
+        </p:style>
+        <p:txBody>
+          <a:bodyPr rtlCol="0" anchor="ctr" wrap="none" lIns="64000" rIns="64000" tIns="25400" bIns="25400"/>
+          <a:lstStyle/>
+          <a:p>
+            <a:pPr algn="ctr"/>
+            <a:r>
+              <a:rPr sz="1500" b="1">
+                <a:solidFill>
+                  <a:srgbClr val="000000"/>
+                </a:solidFill>
+                <a:latin typeface="Calibri"/>
+              </a:rPr>
+              <a:t>② Hai-cư –</a:t>
+            </a:r>
+          </a:p>
+          <a:p>
+            <a:pPr algn="ctr"/>
+            <a:r>
+              <a:rPr sz="1500" b="1">
+                <a:solidFill>
+                  <a:srgbClr val="000000"/>
+                </a:solidFill>
+                <a:latin typeface="Calibri"/>
+              </a:rPr>
+              <a:t>Thu hứng</a:t>
+            </a:r>
+          </a:p>
+        </p:txBody>
+      </p:sp>
+      <p:cxnSp>
+        <p:nvCxnSpPr>
+          <p:cNvPr id="27" name="Connector 26"/>
+          <p:cNvCxnSpPr/>
+          <p:nvPr/>
+        </p:nvCxnSpPr>
+        <p:spPr>
+          <a:xfrm flipH="1">
+            <a:off x="4338888" y="3954780"/>
+            <a:ext cx="1688379" cy="1283817"/>
+          </a:xfrm>
+          <a:prstGeom prst="line">
+            <a:avLst/>
+          </a:prstGeom>
+          <a:ln w="44450">
+            <a:solidFill>
+              <a:srgbClr val="2F5597"/>
+            </a:solidFill>
+          </a:ln>
+        </p:spPr>
+        <p:style>
+          <a:lnRef idx="2">
+            <a:schemeClr val="accent1"/>
+          </a:lnRef>
+          <a:fillRef idx="0">
+            <a:schemeClr val="accent1"/>
+          </a:fillRef>
+          <a:effectRef idx="1">
+            <a:schemeClr val="accent1"/>
+          </a:effectRef>
+          <a:fontRef idx="minor">
+            <a:schemeClr val="tx1"/>
+          </a:fontRef>
+        </p:style>
+      </p:cxnSp>
+      <p:cxnSp>
+        <p:nvCxnSpPr>
+          <p:cNvPr id="28" name="Connector 27"/>
+          <p:cNvCxnSpPr/>
+          <p:nvPr/>
+        </p:nvCxnSpPr>
+        <p:spPr>
+          <a:xfrm flipH="1" flipV="1">
+            <a:off x="2919971" y="4398040"/>
+            <a:ext cx="1418917" cy="840557"/>
+          </a:xfrm>
+          <a:prstGeom prst="line">
+            <a:avLst/>
+          </a:prstGeom>
+          <a:ln w="15875">
+            <a:solidFill>
+              <a:srgbClr val="2F5597"/>
+            </a:solidFill>
+          </a:ln>
+        </p:spPr>
+        <p:style>
+          <a:lnRef idx="2">
+            <a:schemeClr val="accent1"/>
+          </a:lnRef>
+          <a:fillRef idx="0">
+            <a:schemeClr val="accent1"/>
+          </a:fillRef>
+          <a:effectRef idx="1">
+            <a:schemeClr val="accent1"/>
+          </a:effectRef>
+          <a:fontRef idx="minor">
+            <a:schemeClr val="tx1"/>
+          </a:fontRef>
+        </p:style>
+      </p:cxnSp>
+      <p:sp>
+        <p:nvSpPr>
+          <p:cNvPr id="29" name="Rounded Rectangle 28"/>
+          <p:cNvSpPr/>
+          <p:nvPr/>
+        </p:nvSpPr>
+        <p:spPr>
+          <a:xfrm>
+            <a:off x="692670" y="4222440"/>
+            <a:ext cx="2227301" cy="351200"/>
+          </a:xfrm>
+          <a:prstGeom prst="roundRect">
+            <a:avLst>
+              <a:gd name="adj" fmla="val 50000"/>
+            </a:avLst>
+          </a:prstGeom>
+          <a:solidFill>
+            <a:srgbClr val="E3EEF9"/>
+          </a:solidFill>
+          <a:ln w="15875">
+            <a:solidFill>
+              <a:srgbClr val="2F5597"/>
+            </a:solidFill>
+          </a:ln>
+          <a:effectLst/>
+        </p:spPr>
+        <p:style>
+          <a:lnRef idx="1">
+            <a:schemeClr val="accent1"/>
+          </a:lnRef>
+          <a:fillRef idx="3">
+            <a:schemeClr val="accent1"/>
+          </a:fillRef>
+          <a:effectRef idx="2">
+            <a:schemeClr val="accent1"/>
+          </a:effectRef>
+          <a:fontRef idx="minor">
+            <a:schemeClr val="lt1"/>
+          </a:fontRef>
+        </p:style>
+        <p:txBody>
+          <a:bodyPr rtlCol="0" anchor="ctr" wrap="none" lIns="64000" rIns="64000" tIns="25400" bIns="25400"/>
+          <a:lstStyle/>
+          <a:p>
+            <a:pPr algn="ctr"/>
+            <a:r>
+              <a:rPr sz="1300" b="1">
+                <a:solidFill>
+                  <a:srgbClr val="8B0000"/>
+                </a:solidFill>
+                <a:latin typeface="Calibri"/>
+              </a:rPr>
+              <a:t>Xuân “chín”: viên mãn</a:t>
+            </a:r>
+          </a:p>
+        </p:txBody>
+      </p:sp>
+      <p:cxnSp>
+        <p:nvCxnSpPr>
+          <p:cNvPr id="30" name="Connector 29"/>
+          <p:cNvCxnSpPr/>
+          <p:nvPr/>
+        </p:nvCxnSpPr>
+        <p:spPr>
+          <a:xfrm flipH="1" flipV="1">
+            <a:off x="2764777" y="4924841"/>
+            <a:ext cx="1574111" cy="313756"/>
+          </a:xfrm>
+          <a:prstGeom prst="line">
+            <a:avLst/>
+          </a:prstGeom>
+          <a:ln w="15875">
+            <a:solidFill>
+              <a:srgbClr val="2F5597"/>
+            </a:solidFill>
+          </a:ln>
+        </p:spPr>
+        <p:style>
+          <a:lnRef idx="2">
+            <a:schemeClr val="accent1"/>
+          </a:lnRef>
+          <a:fillRef idx="0">
+            <a:schemeClr val="accent1"/>
+          </a:fillRef>
+          <a:effectRef idx="1">
+            <a:schemeClr val="accent1"/>
+          </a:effectRef>
+          <a:fontRef idx="minor">
+            <a:schemeClr val="tx1"/>
+          </a:fontRef>
+        </p:style>
+      </p:cxnSp>
+      <p:sp>
+        <p:nvSpPr>
+          <p:cNvPr id="31" name="Rounded Rectangle 30"/>
+          <p:cNvSpPr/>
+          <p:nvPr/>
+        </p:nvSpPr>
+        <p:spPr>
+          <a:xfrm>
+            <a:off x="847864" y="4648530"/>
+            <a:ext cx="1916913" cy="552622"/>
+          </a:xfrm>
+          <a:prstGeom prst="roundRect">
+            <a:avLst>
+              <a:gd name="adj" fmla="val 50000"/>
+            </a:avLst>
+          </a:prstGeom>
+          <a:solidFill>
+            <a:srgbClr val="E3EEF9"/>
+          </a:solidFill>
+          <a:ln w="15875">
+            <a:solidFill>
+              <a:srgbClr val="2F5597"/>
+            </a:solidFill>
+          </a:ln>
+          <a:effectLst/>
+        </p:spPr>
+        <p:style>
+          <a:lnRef idx="1">
+            <a:schemeClr val="accent1"/>
+          </a:lnRef>
+          <a:fillRef idx="3">
+            <a:schemeClr val="accent1"/>
+          </a:fillRef>
+          <a:effectRef idx="2">
+            <a:schemeClr val="accent1"/>
+          </a:effectRef>
+          <a:fontRef idx="minor">
+            <a:schemeClr val="lt1"/>
+          </a:fontRef>
+        </p:style>
+        <p:txBody>
+          <a:bodyPr rtlCol="0" anchor="ctr" wrap="none" lIns="64000" rIns="64000" tIns="25400" bIns="25400"/>
+          <a:lstStyle/>
+          <a:p>
+            <a:pPr algn="ctr"/>
+            <a:r>
+              <a:rPr sz="1300" b="0">
+                <a:solidFill>
+                  <a:srgbClr val="000000"/>
+                </a:solidFill>
+                <a:latin typeface="Calibri"/>
+              </a:rPr>
+              <a:t>Ngôn từ, nhịp phóng</a:t>
+            </a:r>
+          </a:p>
+          <a:p>
+            <a:pPr algn="ctr"/>
+            <a:r>
+              <a:rPr sz="1300" b="0">
+                <a:solidFill>
+                  <a:srgbClr val="000000"/>
+                </a:solidFill>
+                <a:latin typeface="Calibri"/>
+              </a:rPr>
+              <a:t>khoáng</a:t>
+            </a:r>
+          </a:p>
+        </p:txBody>
+      </p:sp>
+      <p:cxnSp>
+        <p:nvCxnSpPr>
+          <p:cNvPr id="32" name="Connector 31"/>
+          <p:cNvCxnSpPr/>
+          <p:nvPr/>
+        </p:nvCxnSpPr>
+        <p:spPr>
+          <a:xfrm flipH="1">
+            <a:off x="2764777" y="5238597"/>
+            <a:ext cx="1574111" cy="213045"/>
+          </a:xfrm>
+          <a:prstGeom prst="line">
+            <a:avLst/>
+          </a:prstGeom>
+          <a:ln w="15875">
+            <a:solidFill>
+              <a:srgbClr val="2F5597"/>
+            </a:solidFill>
+          </a:ln>
+        </p:spPr>
+        <p:style>
+          <a:lnRef idx="2">
+            <a:schemeClr val="accent1"/>
+          </a:lnRef>
+          <a:fillRef idx="0">
+            <a:schemeClr val="accent1"/>
+          </a:fillRef>
+          <a:effectRef idx="1">
+            <a:schemeClr val="accent1"/>
+          </a:effectRef>
+          <a:fontRef idx="minor">
+            <a:schemeClr val="tx1"/>
+          </a:fontRef>
+        </p:style>
+      </p:cxnSp>
+      <p:sp>
+        <p:nvSpPr>
+          <p:cNvPr id="33" name="Rounded Rectangle 32"/>
+          <p:cNvSpPr/>
+          <p:nvPr/>
+        </p:nvSpPr>
+        <p:spPr>
+          <a:xfrm>
+            <a:off x="847864" y="5276042"/>
+            <a:ext cx="1916913" cy="351200"/>
+          </a:xfrm>
+          <a:prstGeom prst="roundRect">
+            <a:avLst>
+              <a:gd name="adj" fmla="val 50000"/>
+            </a:avLst>
+          </a:prstGeom>
+          <a:solidFill>
+            <a:srgbClr val="E3EEF9"/>
+          </a:solidFill>
+          <a:ln w="15875">
+            <a:solidFill>
+              <a:srgbClr val="2F5597"/>
+            </a:solidFill>
+          </a:ln>
+          <a:effectLst/>
+        </p:spPr>
+        <p:style>
+          <a:lnRef idx="1">
+            <a:schemeClr val="accent1"/>
+          </a:lnRef>
+          <a:fillRef idx="3">
+            <a:schemeClr val="accent1"/>
+          </a:fillRef>
+          <a:effectRef idx="2">
+            <a:schemeClr val="accent1"/>
+          </a:effectRef>
+          <a:fontRef idx="minor">
+            <a:schemeClr val="lt1"/>
+          </a:fontRef>
+        </p:style>
+        <p:txBody>
+          <a:bodyPr rtlCol="0" anchor="ctr" wrap="none" lIns="64000" rIns="64000" tIns="25400" bIns="25400"/>
+          <a:lstStyle/>
+          <a:p>
+            <a:pPr algn="ctr"/>
+            <a:r>
+              <a:rPr sz="1300" b="0">
+                <a:solidFill>
+                  <a:srgbClr val="000000"/>
+                </a:solidFill>
+                <a:latin typeface="Calibri"/>
+              </a:rPr>
+              <a:t>Nhớ làng, người chị</a:t>
+            </a:r>
+          </a:p>
+        </p:txBody>
+      </p:sp>
+      <p:cxnSp>
+        <p:nvCxnSpPr>
+          <p:cNvPr id="34" name="Connector 33"/>
+          <p:cNvCxnSpPr/>
+          <p:nvPr/>
+        </p:nvCxnSpPr>
+        <p:spPr>
+          <a:xfrm flipH="1">
+            <a:off x="2678925" y="5238597"/>
+            <a:ext cx="1659963" cy="739846"/>
+          </a:xfrm>
+          <a:prstGeom prst="line">
+            <a:avLst/>
+          </a:prstGeom>
+          <a:ln w="15875">
+            <a:solidFill>
+              <a:srgbClr val="2F5597"/>
+            </a:solidFill>
+          </a:ln>
+        </p:spPr>
+        <p:style>
+          <a:lnRef idx="2">
+            <a:schemeClr val="accent1"/>
+          </a:lnRef>
+          <a:fillRef idx="0">
+            <a:schemeClr val="accent1"/>
+          </a:fillRef>
+          <a:effectRef idx="1">
+            <a:schemeClr val="accent1"/>
+          </a:effectRef>
+          <a:fontRef idx="minor">
+            <a:schemeClr val="tx1"/>
+          </a:fontRef>
+        </p:style>
+      </p:cxnSp>
+      <p:sp>
+        <p:nvSpPr>
+          <p:cNvPr id="35" name="Rounded Rectangle 34"/>
+          <p:cNvSpPr/>
+          <p:nvPr/>
+        </p:nvSpPr>
+        <p:spPr>
+          <a:xfrm>
+            <a:off x="933716" y="5702132"/>
+            <a:ext cx="1745209" cy="552622"/>
+          </a:xfrm>
+          <a:prstGeom prst="roundRect">
+            <a:avLst>
+              <a:gd name="adj" fmla="val 50000"/>
+            </a:avLst>
+          </a:prstGeom>
+          <a:solidFill>
+            <a:srgbClr val="E3EEF9"/>
+          </a:solidFill>
+          <a:ln w="15875">
+            <a:solidFill>
+              <a:srgbClr val="2F5597"/>
+            </a:solidFill>
+          </a:ln>
+          <a:effectLst/>
+        </p:spPr>
+        <p:style>
+          <a:lnRef idx="1">
+            <a:schemeClr val="accent1"/>
+          </a:lnRef>
+          <a:fillRef idx="3">
+            <a:schemeClr val="accent1"/>
+          </a:fillRef>
+          <a:effectRef idx="2">
+            <a:schemeClr val="accent1"/>
+          </a:effectRef>
+          <a:fontRef idx="minor">
+            <a:schemeClr val="lt1"/>
+          </a:fontRef>
+        </p:style>
+        <p:txBody>
+          <a:bodyPr rtlCol="0" anchor="ctr" wrap="none" lIns="64000" rIns="64000" tIns="25400" bIns="25400"/>
+          <a:lstStyle/>
+          <a:p>
+            <a:pPr algn="ctr"/>
+            <a:r>
+              <a:rPr sz="1300" b="0">
+                <a:solidFill>
+                  <a:srgbClr val="000000"/>
+                </a:solidFill>
+                <a:latin typeface="Calibri"/>
+              </a:rPr>
+              <a:t>Tiếng thu ↔ tiếng</a:t>
+            </a:r>
+          </a:p>
+          <a:p>
+            <a:pPr algn="ctr"/>
+            <a:r>
+              <a:rPr sz="1300" b="0">
+                <a:solidFill>
+                  <a:srgbClr val="000000"/>
+                </a:solidFill>
+                <a:latin typeface="Calibri"/>
+              </a:rPr>
+              <a:t>thơ</a:t>
+            </a:r>
+          </a:p>
+        </p:txBody>
+      </p:sp>
+      <p:sp>
+        <p:nvSpPr>
+          <p:cNvPr id="36" name="Oval 35"/>
+          <p:cNvSpPr/>
+          <p:nvPr/>
+        </p:nvSpPr>
+        <p:spPr>
+          <a:xfrm>
+            <a:off x="3363922" y="4658216"/>
+            <a:ext cx="1949933" cy="1160762"/>
+          </a:xfrm>
+          <a:prstGeom prst="ellipse">
+            <a:avLst/>
+          </a:prstGeom>
+          <a:solidFill>
+            <a:srgbClr val="E2EFDA"/>
+          </a:solidFill>
+          <a:ln w="31750">
+            <a:solidFill>
+              <a:srgbClr val="375623"/>
+            </a:solidFill>
+          </a:ln>
+          <a:effectLst/>
+        </p:spPr>
+        <p:style>
+          <a:lnRef idx="1">
+            <a:schemeClr val="accent1"/>
+          </a:lnRef>
+          <a:fillRef idx="3">
+            <a:schemeClr val="accent1"/>
+          </a:fillRef>
+          <a:effectRef idx="2">
+            <a:schemeClr val="accent1"/>
+          </a:effectRef>
+          <a:fontRef idx="minor">
+            <a:schemeClr val="lt1"/>
+          </a:fontRef>
+        </p:style>
+        <p:txBody>
+          <a:bodyPr rtlCol="0" anchor="ctr" wrap="none" lIns="64000" rIns="64000" tIns="25400" bIns="25400"/>
+          <a:lstStyle/>
+          <a:p>
+            <a:pPr algn="ctr"/>
+            <a:r>
+              <a:rPr sz="1500" b="1">
+                <a:solidFill>
+                  <a:srgbClr val="000000"/>
+                </a:solidFill>
+                <a:latin typeface="Calibri"/>
+              </a:rPr>
+              <a:t>③ Mùa xuân</a:t>
+            </a:r>
+          </a:p>
+          <a:p>
+            <a:pPr algn="ctr"/>
+            <a:r>
+              <a:rPr sz="1500" b="1">
+                <a:solidFill>
+                  <a:srgbClr val="000000"/>
+                </a:solidFill>
+                <a:latin typeface="Calibri"/>
+              </a:rPr>
+              <a:t>chín – Tiếng</a:t>
+            </a:r>
+          </a:p>
+          <a:p>
+            <a:pPr algn="ctr"/>
+            <a:r>
+              <a:rPr sz="1500" b="1">
+                <a:solidFill>
+                  <a:srgbClr val="000000"/>
+                </a:solidFill>
+                <a:latin typeface="Calibri"/>
+              </a:rPr>
+              <a:t>thu</a:t>
+            </a:r>
+          </a:p>
+        </p:txBody>
+      </p:sp>
+      <p:cxnSp>
+        <p:nvCxnSpPr>
+          <p:cNvPr id="37" name="Connector 36"/>
+          <p:cNvCxnSpPr/>
+          <p:nvPr/>
+        </p:nvCxnSpPr>
+        <p:spPr>
+          <a:xfrm>
+            <a:off x="6027267" y="3954780"/>
+            <a:ext cx="1688379" cy="1283817"/>
+          </a:xfrm>
+          <a:prstGeom prst="line">
+            <a:avLst/>
+          </a:prstGeom>
+          <a:ln w="44450">
+            <a:solidFill>
+              <a:srgbClr val="7030A0"/>
+            </a:solidFill>
+          </a:ln>
+        </p:spPr>
+        <p:style>
+          <a:lnRef idx="2">
+            <a:schemeClr val="accent1"/>
+          </a:lnRef>
+          <a:fillRef idx="0">
+            <a:schemeClr val="accent1"/>
+          </a:fillRef>
+          <a:effectRef idx="1">
+            <a:schemeClr val="accent1"/>
+          </a:effectRef>
+          <a:fontRef idx="minor">
+            <a:schemeClr val="tx1"/>
+          </a:fontRef>
+        </p:style>
+      </p:cxnSp>
+      <p:cxnSp>
+        <p:nvCxnSpPr>
+          <p:cNvPr id="38" name="Connector 37"/>
+          <p:cNvCxnSpPr/>
+          <p:nvPr/>
+        </p:nvCxnSpPr>
+        <p:spPr>
+          <a:xfrm flipV="1">
+            <a:off x="7715646" y="4297329"/>
+            <a:ext cx="1659963" cy="941268"/>
+          </a:xfrm>
+          <a:prstGeom prst="line">
+            <a:avLst/>
+          </a:prstGeom>
+          <a:ln w="15875">
+            <a:solidFill>
+              <a:srgbClr val="7030A0"/>
+            </a:solidFill>
+          </a:ln>
+        </p:spPr>
+        <p:style>
+          <a:lnRef idx="2">
+            <a:schemeClr val="accent1"/>
+          </a:lnRef>
+          <a:fillRef idx="0">
+            <a:schemeClr val="accent1"/>
+          </a:fillRef>
+          <a:effectRef idx="1">
+            <a:schemeClr val="accent1"/>
+          </a:effectRef>
+          <a:fontRef idx="minor">
+            <a:schemeClr val="tx1"/>
+          </a:fontRef>
+        </p:style>
+      </p:cxnSp>
+      <p:sp>
+        <p:nvSpPr>
+          <p:cNvPr id="39" name="Rounded Rectangle 38"/>
+          <p:cNvSpPr/>
+          <p:nvPr/>
+        </p:nvSpPr>
+        <p:spPr>
+          <a:xfrm>
+            <a:off x="9375609" y="4021018"/>
+            <a:ext cx="1745209" cy="552622"/>
+          </a:xfrm>
+          <a:prstGeom prst="roundRect">
+            <a:avLst>
+              <a:gd name="adj" fmla="val 50000"/>
+            </a:avLst>
+          </a:prstGeom>
+          <a:solidFill>
+            <a:srgbClr val="F3E8F7"/>
+          </a:solidFill>
+          <a:ln w="15875">
+            <a:solidFill>
+              <a:srgbClr val="7030A0"/>
+            </a:solidFill>
+          </a:ln>
+          <a:effectLst/>
+        </p:spPr>
+        <p:style>
+          <a:lnRef idx="1">
+            <a:schemeClr val="accent1"/>
+          </a:lnRef>
+          <a:fillRef idx="3">
+            <a:schemeClr val="accent1"/>
+          </a:fillRef>
+          <a:effectRef idx="2">
+            <a:schemeClr val="accent1"/>
+          </a:effectRef>
+          <a:fontRef idx="minor">
+            <a:schemeClr val="lt1"/>
+          </a:fontRef>
+        </p:style>
+        <p:txBody>
+          <a:bodyPr rtlCol="0" anchor="ctr" wrap="none" lIns="64000" rIns="64000" tIns="25400" bIns="25400"/>
+          <a:lstStyle/>
+          <a:p>
+            <a:pPr algn="ctr"/>
+            <a:r>
+              <a:rPr sz="1300" b="0">
+                <a:solidFill>
+                  <a:srgbClr val="000000"/>
+                </a:solidFill>
+                <a:latin typeface="Calibri"/>
+              </a:rPr>
+              <a:t>Lỗi dùng từ, trật</a:t>
+            </a:r>
+          </a:p>
+          <a:p>
+            <a:pPr algn="ctr"/>
+            <a:r>
+              <a:rPr sz="1300" b="0">
+                <a:solidFill>
+                  <a:srgbClr val="000000"/>
+                </a:solidFill>
+                <a:latin typeface="Calibri"/>
+              </a:rPr>
+              <a:t>tự từ</a:t>
+            </a:r>
+          </a:p>
+        </p:txBody>
+      </p:sp>
+      <p:cxnSp>
+        <p:nvCxnSpPr>
+          <p:cNvPr id="40" name="Connector 39"/>
+          <p:cNvCxnSpPr/>
+          <p:nvPr/>
+        </p:nvCxnSpPr>
+        <p:spPr>
+          <a:xfrm flipV="1">
+            <a:off x="7715646" y="4924841"/>
+            <a:ext cx="1650057" cy="313756"/>
+          </a:xfrm>
+          <a:prstGeom prst="line">
+            <a:avLst/>
+          </a:prstGeom>
+          <a:ln w="15875">
+            <a:solidFill>
+              <a:srgbClr val="7030A0"/>
+            </a:solidFill>
+          </a:ln>
+        </p:spPr>
+        <p:style>
+          <a:lnRef idx="2">
+            <a:schemeClr val="accent1"/>
+          </a:lnRef>
+          <a:fillRef idx="0">
+            <a:schemeClr val="accent1"/>
+          </a:fillRef>
+          <a:effectRef idx="1">
+            <a:schemeClr val="accent1"/>
+          </a:effectRef>
+          <a:fontRef idx="minor">
+            <a:schemeClr val="tx1"/>
+          </a:fontRef>
+        </p:style>
+      </p:cxnSp>
+      <p:sp>
+        <p:nvSpPr>
+          <p:cNvPr id="41" name="Rounded Rectangle 40"/>
+          <p:cNvSpPr/>
+          <p:nvPr/>
+        </p:nvSpPr>
+        <p:spPr>
+          <a:xfrm>
+            <a:off x="9365703" y="4648530"/>
+            <a:ext cx="1765021" cy="552622"/>
+          </a:xfrm>
+          <a:prstGeom prst="roundRect">
+            <a:avLst>
+              <a:gd name="adj" fmla="val 50000"/>
+            </a:avLst>
+          </a:prstGeom>
+          <a:solidFill>
+            <a:srgbClr val="F3E8F7"/>
+          </a:solidFill>
+          <a:ln w="15875">
+            <a:solidFill>
+              <a:srgbClr val="7030A0"/>
+            </a:solidFill>
+          </a:ln>
+          <a:effectLst/>
+        </p:spPr>
+        <p:style>
+          <a:lnRef idx="1">
+            <a:schemeClr val="accent1"/>
+          </a:lnRef>
+          <a:fillRef idx="3">
+            <a:schemeClr val="accent1"/>
+          </a:fillRef>
+          <a:effectRef idx="2">
+            <a:schemeClr val="accent1"/>
+          </a:effectRef>
+          <a:fontRef idx="minor">
+            <a:schemeClr val="lt1"/>
+          </a:fontRef>
+        </p:style>
+        <p:txBody>
+          <a:bodyPr rtlCol="0" anchor="ctr" wrap="none" lIns="64000" rIns="64000" tIns="25400" bIns="25400"/>
+          <a:lstStyle/>
+          <a:p>
+            <a:pPr algn="ctr"/>
+            <a:r>
+              <a:rPr sz="1300" b="1">
+                <a:solidFill>
+                  <a:srgbClr val="8B0000"/>
+                </a:solidFill>
+                <a:latin typeface="Calibri"/>
+              </a:rPr>
+              <a:t>NL phân tích một</a:t>
+            </a:r>
+          </a:p>
+          <a:p>
+            <a:pPr algn="ctr"/>
+            <a:r>
+              <a:rPr sz="1300" b="1">
+                <a:solidFill>
+                  <a:srgbClr val="8B0000"/>
+                </a:solidFill>
+                <a:latin typeface="Calibri"/>
+              </a:rPr>
+              <a:t>bài thơ</a:t>
+            </a:r>
+          </a:p>
+        </p:txBody>
+      </p:sp>
+      <p:cxnSp>
+        <p:nvCxnSpPr>
+          <p:cNvPr id="42" name="Connector 41"/>
+          <p:cNvCxnSpPr/>
+          <p:nvPr/>
+        </p:nvCxnSpPr>
+        <p:spPr>
+          <a:xfrm>
+            <a:off x="7715646" y="5238597"/>
+            <a:ext cx="1574111" cy="313756"/>
+          </a:xfrm>
+          <a:prstGeom prst="line">
+            <a:avLst/>
+          </a:prstGeom>
+          <a:ln w="15875">
+            <a:solidFill>
+              <a:srgbClr val="7030A0"/>
+            </a:solidFill>
+          </a:ln>
+        </p:spPr>
+        <p:style>
+          <a:lnRef idx="2">
+            <a:schemeClr val="accent1"/>
+          </a:lnRef>
+          <a:fillRef idx="0">
+            <a:schemeClr val="accent1"/>
+          </a:fillRef>
+          <a:effectRef idx="1">
+            <a:schemeClr val="accent1"/>
+          </a:effectRef>
+          <a:fontRef idx="minor">
+            <a:schemeClr val="tx1"/>
+          </a:fontRef>
+        </p:style>
+      </p:cxnSp>
+      <p:sp>
+        <p:nvSpPr>
+          <p:cNvPr id="43" name="Rounded Rectangle 42"/>
+          <p:cNvSpPr/>
+          <p:nvPr/>
+        </p:nvSpPr>
+        <p:spPr>
+          <a:xfrm>
+            <a:off x="9289757" y="5276042"/>
+            <a:ext cx="1916913" cy="552622"/>
+          </a:xfrm>
+          <a:prstGeom prst="roundRect">
+            <a:avLst>
+              <a:gd name="adj" fmla="val 50000"/>
+            </a:avLst>
+          </a:prstGeom>
+          <a:solidFill>
+            <a:srgbClr val="F3E8F7"/>
+          </a:solidFill>
+          <a:ln w="15875">
+            <a:solidFill>
+              <a:srgbClr val="7030A0"/>
+            </a:solidFill>
+          </a:ln>
+          <a:effectLst/>
+        </p:spPr>
+        <p:style>
+          <a:lnRef idx="1">
+            <a:schemeClr val="accent1"/>
+          </a:lnRef>
+          <a:fillRef idx="3">
+            <a:schemeClr val="accent1"/>
+          </a:fillRef>
+          <a:effectRef idx="2">
+            <a:schemeClr val="accent1"/>
+          </a:effectRef>
+          <a:fontRef idx="minor">
+            <a:schemeClr val="lt1"/>
+          </a:fontRef>
+        </p:style>
+        <p:txBody>
+          <a:bodyPr rtlCol="0" anchor="ctr" wrap="none" lIns="64000" rIns="64000" tIns="25400" bIns="25400"/>
+          <a:lstStyle/>
+          <a:p>
+            <a:pPr algn="ctr"/>
+            <a:r>
+              <a:rPr sz="1300" b="0">
+                <a:solidFill>
+                  <a:srgbClr val="000000"/>
+                </a:solidFill>
+                <a:latin typeface="Calibri"/>
+              </a:rPr>
+              <a:t>Thuyết trình về bài</a:t>
+            </a:r>
+          </a:p>
+          <a:p>
+            <a:pPr algn="ctr"/>
+            <a:r>
+              <a:rPr sz="1300" b="0">
+                <a:solidFill>
+                  <a:srgbClr val="000000"/>
+                </a:solidFill>
+                <a:latin typeface="Calibri"/>
+              </a:rPr>
+              <a:t>thơ</a:t>
+            </a:r>
+          </a:p>
+        </p:txBody>
+      </p:sp>
+      <p:cxnSp>
+        <p:nvCxnSpPr>
+          <p:cNvPr id="44" name="Connector 43"/>
+          <p:cNvCxnSpPr/>
+          <p:nvPr/>
+        </p:nvCxnSpPr>
+        <p:spPr>
+          <a:xfrm>
+            <a:off x="7715646" y="5238597"/>
+            <a:ext cx="1617037" cy="941268"/>
+          </a:xfrm>
+          <a:prstGeom prst="line">
+            <a:avLst/>
+          </a:prstGeom>
+          <a:ln w="15875">
+            <a:solidFill>
+              <a:srgbClr val="7030A0"/>
+            </a:solidFill>
+          </a:ln>
+        </p:spPr>
+        <p:style>
+          <a:lnRef idx="2">
+            <a:schemeClr val="accent1"/>
+          </a:lnRef>
+          <a:fillRef idx="0">
+            <a:schemeClr val="accent1"/>
+          </a:fillRef>
+          <a:effectRef idx="1">
+            <a:schemeClr val="accent1"/>
+          </a:effectRef>
+          <a:fontRef idx="minor">
+            <a:schemeClr val="tx1"/>
+          </a:fontRef>
+        </p:style>
+      </p:cxnSp>
+      <p:sp>
+        <p:nvSpPr>
+          <p:cNvPr id="45" name="Rounded Rectangle 44"/>
+          <p:cNvSpPr/>
+          <p:nvPr/>
+        </p:nvSpPr>
+        <p:spPr>
+          <a:xfrm>
+            <a:off x="9332683" y="5903554"/>
+            <a:ext cx="1831061" cy="552622"/>
+          </a:xfrm>
+          <a:prstGeom prst="roundRect">
+            <a:avLst>
+              <a:gd name="adj" fmla="val 50000"/>
+            </a:avLst>
+          </a:prstGeom>
+          <a:solidFill>
+            <a:srgbClr val="F3E8F7"/>
+          </a:solidFill>
+          <a:ln w="15875">
+            <a:solidFill>
+              <a:srgbClr val="7030A0"/>
+            </a:solidFill>
+          </a:ln>
+          <a:effectLst/>
+        </p:spPr>
+        <p:style>
+          <a:lnRef idx="1">
+            <a:schemeClr val="accent1"/>
+          </a:lnRef>
+          <a:fillRef idx="3">
+            <a:schemeClr val="accent1"/>
+          </a:fillRef>
+          <a:effectRef idx="2">
+            <a:schemeClr val="accent1"/>
+          </a:effectRef>
+          <a:fontRef idx="minor">
+            <a:schemeClr val="lt1"/>
+          </a:fontRef>
+        </p:style>
+        <p:txBody>
+          <a:bodyPr rtlCol="0" anchor="ctr" wrap="none" lIns="64000" rIns="64000" tIns="25400" bIns="25400"/>
+          <a:lstStyle/>
+          <a:p>
+            <a:pPr algn="ctr"/>
+            <a:r>
+              <a:rPr sz="1300" b="0">
+                <a:solidFill>
+                  <a:srgbClr val="000000"/>
+                </a:solidFill>
+                <a:latin typeface="Calibri"/>
+              </a:rPr>
+              <a:t>Củng cố trực tuyến</a:t>
+            </a:r>
+          </a:p>
+          <a:p>
+            <a:pPr algn="ctr"/>
+            <a:r>
+              <a:rPr sz="1300" b="0">
+                <a:solidFill>
+                  <a:srgbClr val="000000"/>
+                </a:solidFill>
+                <a:latin typeface="Calibri"/>
+              </a:rPr>
+              <a:t>(QR)</a:t>
+            </a:r>
+          </a:p>
+        </p:txBody>
+      </p:sp>
+      <p:sp>
+        <p:nvSpPr>
+          <p:cNvPr id="46" name="Oval 45"/>
+          <p:cNvSpPr/>
+          <p:nvPr/>
+        </p:nvSpPr>
+        <p:spPr>
+          <a:xfrm>
+            <a:off x="6740679" y="4658216"/>
+            <a:ext cx="1949933" cy="1160762"/>
+          </a:xfrm>
+          <a:prstGeom prst="ellipse">
+            <a:avLst/>
+          </a:prstGeom>
+          <a:solidFill>
+            <a:srgbClr val="FFF2CC"/>
+          </a:solidFill>
+          <a:ln w="31750">
+            <a:solidFill>
+              <a:srgbClr val="BF8F00"/>
+            </a:solidFill>
+          </a:ln>
+          <a:effectLst/>
+        </p:spPr>
+        <p:style>
+          <a:lnRef idx="1">
+            <a:schemeClr val="accent1"/>
+          </a:lnRef>
+          <a:fillRef idx="3">
+            <a:schemeClr val="accent1"/>
+          </a:fillRef>
+          <a:effectRef idx="2">
+            <a:schemeClr val="accent1"/>
+          </a:effectRef>
+          <a:fontRef idx="minor">
+            <a:schemeClr val="lt1"/>
+          </a:fontRef>
+        </p:style>
+        <p:txBody>
+          <a:bodyPr rtlCol="0" anchor="ctr" wrap="none" lIns="64000" rIns="64000" tIns="25400" bIns="25400"/>
+          <a:lstStyle/>
+          <a:p>
+            <a:pPr algn="ctr"/>
+            <a:r>
+              <a:rPr sz="1500" b="1">
+                <a:solidFill>
+                  <a:srgbClr val="000000"/>
+                </a:solidFill>
+                <a:latin typeface="Calibri"/>
+              </a:rPr>
+              <a:t>④ Tiếng Việt</a:t>
+            </a:r>
+          </a:p>
+          <a:p>
+            <a:pPr algn="ctr"/>
+            <a:r>
+              <a:rPr sz="1500" b="1">
+                <a:solidFill>
+                  <a:srgbClr val="000000"/>
+                </a:solidFill>
+                <a:latin typeface="Calibri"/>
+              </a:rPr>
+              <a:t>– Viết –</a:t>
+            </a:r>
+          </a:p>
+          <a:p>
+            <a:pPr algn="ctr"/>
+            <a:r>
+              <a:rPr sz="1500" b="1">
+                <a:solidFill>
+                  <a:srgbClr val="000000"/>
+                </a:solidFill>
+                <a:latin typeface="Calibri"/>
+              </a:rPr>
+              <a:t>Nói</a:t>
+            </a:r>
+          </a:p>
+        </p:txBody>
+      </p:sp>
+      <p:sp>
+        <p:nvSpPr>
+          <p:cNvPr id="47" name="Oval 46"/>
+          <p:cNvSpPr/>
+          <p:nvPr/>
+        </p:nvSpPr>
+        <p:spPr>
+          <a:xfrm>
+            <a:off x="5098528" y="3484793"/>
+            <a:ext cx="1857477" cy="939972"/>
+          </a:xfrm>
+          <a:prstGeom prst="ellipse">
+            <a:avLst/>
+          </a:prstGeom>
+          <a:solidFill>
+            <a:srgbClr val="002060"/>
+          </a:solidFill>
+          <a:ln w="25400">
+            <a:solidFill>
+              <a:srgbClr val="000B1E"/>
+            </a:solidFill>
+          </a:ln>
+          <a:effectLst/>
+        </p:spPr>
+        <p:style>
+          <a:lnRef idx="1">
+            <a:schemeClr val="accent1"/>
+          </a:lnRef>
+          <a:fillRef idx="3">
+            <a:schemeClr val="accent1"/>
+          </a:fillRef>
+          <a:effectRef idx="2">
+            <a:schemeClr val="accent1"/>
+          </a:effectRef>
+          <a:fontRef idx="minor">
+            <a:schemeClr val="lt1"/>
+          </a:fontRef>
+        </p:style>
+        <p:txBody>
+          <a:bodyPr rtlCol="0" anchor="ctr" wrap="none" lIns="64000" rIns="64000" tIns="25400" bIns="25400"/>
+          <a:lstStyle/>
+          <a:p>
+            <a:pPr algn="ctr"/>
+            <a:r>
+              <a:rPr sz="1700" b="1">
+                <a:solidFill>
+                  <a:srgbClr val="FFFFFF"/>
+                </a:solidFill>
+                <a:latin typeface="Calibri"/>
+              </a:rPr>
+              <a:t>VẺ ĐẸP CỦA</a:t>
+            </a:r>
+          </a:p>
+          <a:p>
+            <a:pPr algn="ctr"/>
+            <a:r>
+              <a:rPr sz="1700" b="1">
+                <a:solidFill>
+                  <a:srgbClr val="FFFFFF"/>
+                </a:solidFill>
+                <a:latin typeface="Calibri"/>
+              </a:rPr>
+              <a:t>THƠ CA</a:t>
+            </a:r>
+          </a:p>
+        </p:txBody>
+      </p:sp>
     </p:spTree>
   </p:cSld>
   <p:clrMapOvr>

--- a/mon/ngu_van/slide/lop10/Slide_NGUVAN10_Bai2_VeDepCuaThoCa_T12-22.pptx
+++ b/mon/ngu_van/slide/lop10/Slide_NGUVAN10_Bai2_VeDepCuaThoCa_T12-22.pptx
@@ -48,6 +48,9 @@
     <p:sldId id="296" r:id="rId48"/>
     <p:sldId id="297" r:id="rId49"/>
     <p:sldId id="298" r:id="rId50"/>
+    <p:sldId id="299" r:id="rId51"/>
+    <p:sldId id="300" r:id="rId52"/>
+    <p:sldId id="301" r:id="rId53"/>
   </p:sldIdLst>
   <p:sldSz cx="12191695" cy="6858000" type="screen4x3"/>
   <p:notesSz cx="6858000" cy="9144000"/>
@@ -1244,7 +1247,7 @@
           <a:lstStyle/>
           <a:p>
             <a:r>
-              <a:t>Slide ĐỀ BÀI – cho HS suy nghĩ, thảo luận (không chiếu lời giải). </a:t>
+              <a:t>Bấm vào đường link hoặc quét mã QR để mở video (cần Internet). Video khoảng 5 phút.</a:t>
             </a:r>
           </a:p>
         </p:txBody>
@@ -1384,7 +1387,7 @@
           <a:lstStyle/>
           <a:p>
             <a:r>
-              <a:t>Slide LỜI GIẢI – GV chốt sau khi HS trình bày. </a:t>
+              <a:t>Bấm vào đường link hoặc quét mã QR để mở video (cần Internet). Video khoảng 2,5 phút.</a:t>
             </a:r>
           </a:p>
         </p:txBody>
@@ -1874,7 +1877,7 @@
           <a:lstStyle/>
           <a:p>
             <a:r>
-              <a:t>Slide ĐỀ BÀI – cho HS suy nghĩ, thảo luận (không chiếu lời giải). </a:t>
+              <a:t>Bấm vào đường link hoặc quét mã QR để mở video (cần Internet). Video khoảng 1,5 phút.</a:t>
             </a:r>
           </a:p>
         </p:txBody>
@@ -1944,7 +1947,7 @@
           <a:lstStyle/>
           <a:p>
             <a:r>
-              <a:t>Slide LỜI GIẢI – GV chốt sau khi HS trình bày. </a:t>
+              <a:t>Slide ĐỀ BÀI – cho HS suy nghĩ, thảo luận (không chiếu lời giải). </a:t>
             </a:r>
           </a:p>
         </p:txBody>
@@ -2014,7 +2017,7 @@
           <a:lstStyle/>
           <a:p>
             <a:r>
-              <a:t>Slide ĐỀ BÀI – cho HS suy nghĩ, thảo luận (không chiếu lời giải). </a:t>
+              <a:t>Slide LỜI GIẢI – GV chốt sau khi HS trình bày. </a:t>
             </a:r>
           </a:p>
         </p:txBody>
@@ -2154,7 +2157,7 @@
           <a:lstStyle/>
           <a:p>
             <a:r>
-              <a:t>Slide LỜI GIẢI – GV chốt sau khi HS trình bày. </a:t>
+              <a:t>Slide ĐỀ BÀI – cho HS suy nghĩ, thảo luận (không chiếu lời giải). </a:t>
             </a:r>
           </a:p>
         </p:txBody>
@@ -2224,7 +2227,7 @@
           <a:lstStyle/>
           <a:p>
             <a:r>
-              <a:t>Slide ĐỀ BÀI – cho HS suy nghĩ, thảo luận (không chiếu lời giải). </a:t>
+              <a:t>Slide LỜI GIẢI – GV chốt sau khi HS trình bày. </a:t>
             </a:r>
           </a:p>
         </p:txBody>
@@ -2250,6 +2253,216 @@
 </file>
 
 <file path=ppt/notesSlides/notesSlide32.xml><?xml version="1.0" encoding="utf-8"?>
+<p:notes xmlns:a="http://schemas.openxmlformats.org/drawingml/2006/main" xmlns:p="http://schemas.openxmlformats.org/presentationml/2006/main" xmlns:r="http://schemas.openxmlformats.org/officeDocument/2006/relationships">
+  <p:cSld>
+    <p:spTree>
+      <p:nvGrpSpPr>
+        <p:cNvPr id="1" name=""/>
+        <p:cNvGrpSpPr/>
+        <p:nvPr/>
+      </p:nvGrpSpPr>
+      <p:grpSpPr>
+        <a:xfrm>
+          <a:off x="0" y="0"/>
+          <a:ext cx="0" cy="0"/>
+          <a:chOff x="0" y="0"/>
+          <a:chExt cx="0" cy="0"/>
+        </a:xfrm>
+      </p:grpSpPr>
+      <p:sp>
+        <p:nvSpPr>
+          <p:cNvPr id="2" name="Slide Image Placeholder 1"/>
+          <p:cNvSpPr>
+            <a:spLocks noGrp="1"/>
+          </p:cNvSpPr>
+          <p:nvPr>
+            <p:ph type="sldImg" idx="2"/>
+          </p:nvPr>
+        </p:nvSpPr>
+        <p:spPr/>
+      </p:sp>
+      <p:sp>
+        <p:nvSpPr>
+          <p:cNvPr id="3" name="Notes Placeholder 2"/>
+          <p:cNvSpPr>
+            <a:spLocks noGrp="1"/>
+          </p:cNvSpPr>
+          <p:nvPr>
+            <p:ph type="body" idx="3" sz="quarter"/>
+          </p:nvPr>
+        </p:nvSpPr>
+        <p:spPr/>
+        <p:txBody>
+          <a:bodyPr/>
+          <a:lstStyle/>
+          <a:p>
+            <a:r>
+              <a:t>Slide ĐỀ BÀI – cho HS suy nghĩ, thảo luận (không chiếu lời giải). </a:t>
+            </a:r>
+          </a:p>
+        </p:txBody>
+      </p:sp>
+      <p:sp>
+        <p:nvSpPr>
+          <p:cNvPr id="4" name="Slide Number Placeholder 3"/>
+          <p:cNvSpPr>
+            <a:spLocks noGrp="1"/>
+          </p:cNvSpPr>
+          <p:nvPr>
+            <p:ph type="sldNum" idx="5" sz="quarter"/>
+          </p:nvPr>
+        </p:nvSpPr>
+        <p:spPr/>
+      </p:sp>
+    </p:spTree>
+  </p:cSld>
+  <p:clrMapOvr>
+    <a:masterClrMapping/>
+  </p:clrMapOvr>
+</p:notes>
+</file>
+
+<file path=ppt/notesSlides/notesSlide33.xml><?xml version="1.0" encoding="utf-8"?>
+<p:notes xmlns:a="http://schemas.openxmlformats.org/drawingml/2006/main" xmlns:p="http://schemas.openxmlformats.org/presentationml/2006/main" xmlns:r="http://schemas.openxmlformats.org/officeDocument/2006/relationships">
+  <p:cSld>
+    <p:spTree>
+      <p:nvGrpSpPr>
+        <p:cNvPr id="1" name=""/>
+        <p:cNvGrpSpPr/>
+        <p:nvPr/>
+      </p:nvGrpSpPr>
+      <p:grpSpPr>
+        <a:xfrm>
+          <a:off x="0" y="0"/>
+          <a:ext cx="0" cy="0"/>
+          <a:chOff x="0" y="0"/>
+          <a:chExt cx="0" cy="0"/>
+        </a:xfrm>
+      </p:grpSpPr>
+      <p:sp>
+        <p:nvSpPr>
+          <p:cNvPr id="2" name="Slide Image Placeholder 1"/>
+          <p:cNvSpPr>
+            <a:spLocks noGrp="1"/>
+          </p:cNvSpPr>
+          <p:nvPr>
+            <p:ph type="sldImg" idx="2"/>
+          </p:nvPr>
+        </p:nvSpPr>
+        <p:spPr/>
+      </p:sp>
+      <p:sp>
+        <p:nvSpPr>
+          <p:cNvPr id="3" name="Notes Placeholder 2"/>
+          <p:cNvSpPr>
+            <a:spLocks noGrp="1"/>
+          </p:cNvSpPr>
+          <p:nvPr>
+            <p:ph type="body" idx="3" sz="quarter"/>
+          </p:nvPr>
+        </p:nvSpPr>
+        <p:spPr/>
+        <p:txBody>
+          <a:bodyPr/>
+          <a:lstStyle/>
+          <a:p>
+            <a:r>
+              <a:t>Slide LỜI GIẢI – GV chốt sau khi HS trình bày. </a:t>
+            </a:r>
+          </a:p>
+        </p:txBody>
+      </p:sp>
+      <p:sp>
+        <p:nvSpPr>
+          <p:cNvPr id="4" name="Slide Number Placeholder 3"/>
+          <p:cNvSpPr>
+            <a:spLocks noGrp="1"/>
+          </p:cNvSpPr>
+          <p:nvPr>
+            <p:ph type="sldNum" idx="5" sz="quarter"/>
+          </p:nvPr>
+        </p:nvSpPr>
+        <p:spPr/>
+      </p:sp>
+    </p:spTree>
+  </p:cSld>
+  <p:clrMapOvr>
+    <a:masterClrMapping/>
+  </p:clrMapOvr>
+</p:notes>
+</file>
+
+<file path=ppt/notesSlides/notesSlide34.xml><?xml version="1.0" encoding="utf-8"?>
+<p:notes xmlns:a="http://schemas.openxmlformats.org/drawingml/2006/main" xmlns:p="http://schemas.openxmlformats.org/presentationml/2006/main" xmlns:r="http://schemas.openxmlformats.org/officeDocument/2006/relationships">
+  <p:cSld>
+    <p:spTree>
+      <p:nvGrpSpPr>
+        <p:cNvPr id="1" name=""/>
+        <p:cNvGrpSpPr/>
+        <p:nvPr/>
+      </p:nvGrpSpPr>
+      <p:grpSpPr>
+        <a:xfrm>
+          <a:off x="0" y="0"/>
+          <a:ext cx="0" cy="0"/>
+          <a:chOff x="0" y="0"/>
+          <a:chExt cx="0" cy="0"/>
+        </a:xfrm>
+      </p:grpSpPr>
+      <p:sp>
+        <p:nvSpPr>
+          <p:cNvPr id="2" name="Slide Image Placeholder 1"/>
+          <p:cNvSpPr>
+            <a:spLocks noGrp="1"/>
+          </p:cNvSpPr>
+          <p:nvPr>
+            <p:ph type="sldImg" idx="2"/>
+          </p:nvPr>
+        </p:nvSpPr>
+        <p:spPr/>
+      </p:sp>
+      <p:sp>
+        <p:nvSpPr>
+          <p:cNvPr id="3" name="Notes Placeholder 2"/>
+          <p:cNvSpPr>
+            <a:spLocks noGrp="1"/>
+          </p:cNvSpPr>
+          <p:nvPr>
+            <p:ph type="body" idx="3" sz="quarter"/>
+          </p:nvPr>
+        </p:nvSpPr>
+        <p:spPr/>
+        <p:txBody>
+          <a:bodyPr/>
+          <a:lstStyle/>
+          <a:p>
+            <a:r>
+              <a:t>Slide ĐỀ BÀI – cho HS suy nghĩ, thảo luận (không chiếu lời giải). </a:t>
+            </a:r>
+          </a:p>
+        </p:txBody>
+      </p:sp>
+      <p:sp>
+        <p:nvSpPr>
+          <p:cNvPr id="4" name="Slide Number Placeholder 3"/>
+          <p:cNvSpPr>
+            <a:spLocks noGrp="1"/>
+          </p:cNvSpPr>
+          <p:nvPr>
+            <p:ph type="sldNum" idx="5" sz="quarter"/>
+          </p:nvPr>
+        </p:nvSpPr>
+        <p:spPr/>
+      </p:sp>
+    </p:spTree>
+  </p:cSld>
+  <p:clrMapOvr>
+    <a:masterClrMapping/>
+  </p:clrMapOvr>
+</p:notes>
+</file>
+
+<file path=ppt/notesSlides/notesSlide35.xml><?xml version="1.0" encoding="utf-8"?>
 <p:notes xmlns:a="http://schemas.openxmlformats.org/drawingml/2006/main" xmlns:p="http://schemas.openxmlformats.org/presentationml/2006/main" xmlns:r="http://schemas.openxmlformats.org/officeDocument/2006/relationships">
   <p:cSld>
     <p:spTree>
@@ -11005,14 +11218,14 @@
         </p:nvSpPr>
         <p:spPr>
           <a:xfrm>
-            <a:off x="10253167" y="457200"/>
-            <a:ext cx="1389888" cy="457200"/>
+            <a:off x="10408615" y="457200"/>
+            <a:ext cx="1234440" cy="457200"/>
           </a:xfrm>
           <a:prstGeom prst="roundRect">
             <a:avLst/>
           </a:prstGeom>
           <a:solidFill>
-            <a:srgbClr val="1E40AF"/>
+            <a:srgbClr val="991B1B"/>
           </a:solidFill>
           <a:ln>
             <a:noFill/>
@@ -11045,7 +11258,7 @@
                 </a:solidFill>
                 <a:latin typeface="Arial"/>
               </a:rPr>
-              <a:t>ĐỀ BÀI</a:t>
+              <a:t>VIDEO</a:t>
             </a:r>
           </a:p>
         </p:txBody>
@@ -11059,7 +11272,7 @@
         <p:spPr>
           <a:xfrm>
             <a:off x="731520" y="274320"/>
-            <a:ext cx="9582912" cy="868680"/>
+            <a:ext cx="9738360" cy="868680"/>
           </a:xfrm>
           <a:prstGeom prst="rect">
             <a:avLst/>
@@ -11079,7 +11292,7 @@
                 </a:solidFill>
                 <a:latin typeface="Arial"/>
               </a:rPr>
-              <a:t>NHAN ĐỀ VÀ TRẠNG THÁI “CHÍN”</a:t>
+              <a:t>VIDEO THAM KHẢO</a:t>
             </a:r>
           </a:p>
         </p:txBody>
@@ -11163,16 +11376,40 @@
           </a:p>
         </p:txBody>
       </p:sp>
-      <p:sp>
-        <p:nvSpPr>
-          <p:cNvPr id="7" name="TextBox 6"/>
+      <p:pic>
+        <p:nvPicPr>
+          <p:cNvPr id="7" name="Picture 6" descr="QR_video_616f_IeQ52k.png"/>
+          <p:cNvPicPr>
+            <a:picLocks noChangeAspect="1"/>
+          </p:cNvPicPr>
+          <p:nvPr/>
+        </p:nvPicPr>
+        <p:blipFill>
+          <a:blip r:embed="rId2"/>
+          <a:stretch>
+            <a:fillRect/>
+          </a:stretch>
+        </p:blipFill>
+        <p:spPr>
+          <a:xfrm>
+            <a:off x="8412480" y="1554480"/>
+            <a:ext cx="3108960" cy="3108960"/>
+          </a:xfrm>
+          <a:prstGeom prst="rect">
+            <a:avLst/>
+          </a:prstGeom>
+        </p:spPr>
+      </p:pic>
+      <p:sp>
+        <p:nvSpPr>
+          <p:cNvPr id="8" name="TextBox 7"/>
           <p:cNvSpPr txBox="1"/>
           <p:nvPr/>
         </p:nvSpPr>
         <p:spPr>
           <a:xfrm>
-            <a:off x="731520" y="1463040"/>
-            <a:ext cx="10789920" cy="3566160"/>
+            <a:off x="731520" y="1554480"/>
+            <a:ext cx="7498079" cy="4206240"/>
           </a:xfrm>
           <a:prstGeom prst="rect">
             <a:avLst/>
@@ -11197,94 +11434,61 @@
                 </a:solidFill>
                 <a:latin typeface="Calibri"/>
               </a:rPr>
-              <a:t>Nhan đề Mùa xuân chín được cấu tạo bởi những từ thuộc từ loại nào, gợi liên tưởng gì? Trạng thái “chín” được thể hiện bằng những từ ngữ nào?</a:t>
-            </a:r>
-          </a:p>
-        </p:txBody>
-      </p:sp>
-      <p:sp>
-        <p:nvSpPr>
-          <p:cNvPr id="8" name="Rounded Rectangle 7"/>
-          <p:cNvSpPr/>
-          <p:nvPr/>
-        </p:nvSpPr>
-        <p:spPr>
-          <a:xfrm>
-            <a:off x="731520" y="5120640"/>
-            <a:ext cx="10789920" cy="693420"/>
-          </a:xfrm>
-          <a:prstGeom prst="roundRect">
-            <a:avLst>
-              <a:gd name="adj" fmla="val 8000"/>
-            </a:avLst>
-          </a:prstGeom>
-          <a:solidFill>
-            <a:srgbClr val="EFF4FF"/>
-          </a:solidFill>
-          <a:ln w="19050">
-            <a:solidFill>
-              <a:srgbClr val="1E40AF"/>
-            </a:solidFill>
-          </a:ln>
-          <a:effectLst/>
-        </p:spPr>
-        <p:style>
-          <a:lnRef idx="1">
-            <a:schemeClr val="accent1"/>
-          </a:lnRef>
-          <a:fillRef idx="3">
-            <a:schemeClr val="accent1"/>
-          </a:fillRef>
-          <a:effectRef idx="2">
-            <a:schemeClr val="accent1"/>
-          </a:effectRef>
-          <a:fontRef idx="minor">
-            <a:schemeClr val="lt1"/>
-          </a:fontRef>
-        </p:style>
-        <p:txBody>
-          <a:bodyPr rtlCol="0" anchor="ctr"/>
-          <a:lstStyle/>
-          <a:p>
-            <a:pPr algn="ctr"/>
-          </a:p>
-        </p:txBody>
-      </p:sp>
-      <p:sp>
-        <p:nvSpPr>
-          <p:cNvPr id="9" name="TextBox 8"/>
-          <p:cNvSpPr txBox="1"/>
-          <p:nvPr/>
-        </p:nvSpPr>
-        <p:spPr>
-          <a:xfrm>
-            <a:off x="914400" y="5120640"/>
-            <a:ext cx="10424160" cy="693420"/>
-          </a:xfrm>
-          <a:prstGeom prst="rect">
-            <a:avLst/>
-          </a:prstGeom>
-          <a:noFill/>
-        </p:spPr>
-        <p:txBody>
-          <a:bodyPr wrap="square" anchor="ctr" lIns="45720" rIns="45720">
-            <a:spAutoFit/>
-          </a:bodyPr>
-          <a:lstStyle/>
+              <a:t>🎬 Hành trình đến với Hàn Mặc Tử (S – Việt Nam)</a:t>
+            </a:r>
+          </a:p>
           <a:p>
             <a:pPr algn="l">
               <a:spcAft>
-                <a:spcPts val="400"/>
+                <a:spcPts val="800"/>
               </a:spcAft>
             </a:pPr>
             <a:r>
-              <a:rPr sz="2200" b="1">
-                <a:solidFill>
-                  <a:srgbClr val="1E40AF"/>
+              <a:rPr sz="2000">
+                <a:solidFill>
+                  <a:srgbClr val="64748B"/>
                 </a:solidFill>
                 <a:latin typeface="Calibri"/>
               </a:rPr>
-              <a:t>💡 “Chín” thường dùng cho sự vật nào?</a:t>
+              <a:t>Kênh: VTV3</a:t>
+            </a:r>
+          </a:p>
+          <a:p>
+            <a:pPr algn="l" marL="365760" indent="-365760">
+              <a:spcAft>
+                <a:spcPts val="800"/>
+              </a:spcAft>
+              <a:buClr>
+                <a:srgbClr val="1E40AF"/>
+              </a:buClr>
+              <a:buFont typeface="Arial"/>
+              <a:buChar char="•"/>
+            </a:pPr>
+            <a:r>
+              <a:rPr sz="2000">
+                <a:solidFill>
+                  <a:srgbClr val="1E293B"/>
+                </a:solidFill>
+                <a:latin typeface="Calibri"/>
+              </a:rPr>
+              <a:t>Tìm hiểu tác giả Hàn Mặc Tử (Văn bản 5)</a:t>
+            </a:r>
+          </a:p>
+          <a:p>
+            <a:pPr algn="l">
+              <a:spcAft>
+                <a:spcPts val="800"/>
+              </a:spcAft>
+            </a:pPr>
+            <a:r>
+              <a:rPr sz="1600">
+                <a:solidFill>
+                  <a:srgbClr val="64748B"/>
+                </a:solidFill>
+                <a:latin typeface="Calibri"/>
+                <a:hlinkClick r:id="rId3"/>
+              </a:rPr>
+              <a:t>https://www.youtube.com/watch?v=616f_IeQ52k</a:t>
             </a:r>
           </a:p>
         </p:txBody>
@@ -11367,8 +11571,8 @@
         </p:nvSpPr>
         <p:spPr>
           <a:xfrm>
-            <a:off x="9942271" y="457200"/>
-            <a:ext cx="1700784" cy="457200"/>
+            <a:off x="10408615" y="457200"/>
+            <a:ext cx="1234440" cy="457200"/>
           </a:xfrm>
           <a:prstGeom prst="roundRect">
             <a:avLst/>
@@ -11407,7 +11611,7 @@
                 </a:solidFill>
                 <a:latin typeface="Arial"/>
               </a:rPr>
-              <a:t>LỜI GIẢI</a:t>
+              <a:t>VIDEO</a:t>
             </a:r>
           </a:p>
         </p:txBody>
@@ -11421,7 +11625,7 @@
         <p:spPr>
           <a:xfrm>
             <a:off x="731520" y="274320"/>
-            <a:ext cx="9272016" cy="868680"/>
+            <a:ext cx="9738360" cy="868680"/>
           </a:xfrm>
           <a:prstGeom prst="rect">
             <a:avLst/>
@@ -11441,7 +11645,7 @@
                 </a:solidFill>
                 <a:latin typeface="Arial"/>
               </a:rPr>
-              <a:t>NHAN ĐỀ VÀ TRẠNG THÁI “CHÍN”</a:t>
+              <a:t>VIDEO THAM KHẢO</a:t>
             </a:r>
           </a:p>
         </p:txBody>
@@ -11525,16 +11729,40 @@
           </a:p>
         </p:txBody>
       </p:sp>
-      <p:sp>
-        <p:nvSpPr>
-          <p:cNvPr id="7" name="TextBox 6"/>
+      <p:pic>
+        <p:nvPicPr>
+          <p:cNvPr id="7" name="Picture 6" descr="QR_video_-6k_bcYdWyY.png"/>
+          <p:cNvPicPr>
+            <a:picLocks noChangeAspect="1"/>
+          </p:cNvPicPr>
+          <p:nvPr/>
+        </p:nvPicPr>
+        <p:blipFill>
+          <a:blip r:embed="rId2"/>
+          <a:stretch>
+            <a:fillRect/>
+          </a:stretch>
+        </p:blipFill>
+        <p:spPr>
+          <a:xfrm>
+            <a:off x="8412480" y="1554480"/>
+            <a:ext cx="3108960" cy="3108960"/>
+          </a:xfrm>
+          <a:prstGeom prst="rect">
+            <a:avLst/>
+          </a:prstGeom>
+        </p:spPr>
+      </p:pic>
+      <p:sp>
+        <p:nvSpPr>
+          <p:cNvPr id="8" name="TextBox 7"/>
           <p:cNvSpPr txBox="1"/>
           <p:nvPr/>
         </p:nvSpPr>
         <p:spPr>
           <a:xfrm>
-            <a:off x="731520" y="1463040"/>
-            <a:ext cx="10789920" cy="3474720"/>
+            <a:off x="731520" y="1554480"/>
+            <a:ext cx="7498079" cy="4206240"/>
           </a:xfrm>
           <a:prstGeom prst="rect">
             <a:avLst/>
@@ -11546,6 +11774,38 @@
             <a:spAutoFit/>
           </a:bodyPr>
           <a:lstStyle/>
+          <a:p>
+            <a:pPr algn="l">
+              <a:spcAft>
+                <a:spcPts val="800"/>
+              </a:spcAft>
+            </a:pPr>
+            <a:r>
+              <a:rPr sz="2600" b="1">
+                <a:solidFill>
+                  <a:srgbClr val="1E293B"/>
+                </a:solidFill>
+                <a:latin typeface="Calibri"/>
+              </a:rPr>
+              <a:t>🎬 Mùa xuân chín – thơ Hàn Mặc Tử, Ngọc Sang diễn ngâm</a:t>
+            </a:r>
+          </a:p>
+          <a:p>
+            <a:pPr algn="l">
+              <a:spcAft>
+                <a:spcPts val="800"/>
+              </a:spcAft>
+            </a:pPr>
+            <a:r>
+              <a:rPr sz="2000">
+                <a:solidFill>
+                  <a:srgbClr val="64748B"/>
+                </a:solidFill>
+                <a:latin typeface="Calibri"/>
+              </a:rPr>
+              <a:t>Kênh: Nghệ sĩ ngâm thơ Ngọc Sang</a:t>
+            </a:r>
+          </a:p>
           <a:p>
             <a:pPr algn="l" marL="365760" indent="-365760">
               <a:spcAft>
@@ -11558,142 +11818,30 @@
               <a:buChar char="•"/>
             </a:pPr>
             <a:r>
-              <a:rPr sz="2300">
+              <a:rPr sz="2000">
                 <a:solidFill>
                   <a:srgbClr val="1E293B"/>
                 </a:solidFill>
                 <a:latin typeface="Calibri"/>
               </a:rPr>
-              <a:t>Danh từ “mùa xuân” + tính từ “chín”.</a:t>
-            </a:r>
-          </a:p>
-          <a:p>
-            <a:pPr algn="l" marL="365760" indent="-365760">
+              <a:t>Nghe ngâm thơ, cảm nhận giọng điệu bài thơ (Văn bản 5)</a:t>
+            </a:r>
+          </a:p>
+          <a:p>
+            <a:pPr algn="l">
               <a:spcAft>
                 <a:spcPts val="800"/>
               </a:spcAft>
-              <a:buClr>
-                <a:srgbClr val="1E40AF"/>
-              </a:buClr>
-              <a:buFont typeface="Arial"/>
-              <a:buChar char="•"/>
             </a:pPr>
             <a:r>
-              <a:rPr sz="2300">
-                <a:solidFill>
-                  <a:srgbClr val="1E293B"/>
+              <a:rPr sz="1600">
+                <a:solidFill>
+                  <a:srgbClr val="64748B"/>
                 </a:solidFill>
                 <a:latin typeface="Calibri"/>
-              </a:rPr>
-              <a:t>Gợi mùa xuân viên mãn, căng tràn như trái chín.</a:t>
-            </a:r>
-          </a:p>
-          <a:p>
-            <a:pPr algn="l" marL="365760" indent="-365760">
-              <a:spcAft>
-                <a:spcPts val="800"/>
-              </a:spcAft>
-              <a:buClr>
-                <a:srgbClr val="1E40AF"/>
-              </a:buClr>
-              <a:buFont typeface="Arial"/>
-              <a:buChar char="•"/>
-            </a:pPr>
-            <a:r>
-              <a:rPr sz="2300">
-                <a:solidFill>
-                  <a:srgbClr val="1E293B"/>
-                </a:solidFill>
-                <a:latin typeface="Calibri"/>
-              </a:rPr>
-              <a:t>“lấm tấm vàng”, “bóng xuân sang”, “sóng cỏ xanh tươi gợn tới trời”.</a:t>
-            </a:r>
-          </a:p>
-        </p:txBody>
-      </p:sp>
-      <p:sp>
-        <p:nvSpPr>
-          <p:cNvPr id="8" name="Rounded Rectangle 7"/>
-          <p:cNvSpPr/>
-          <p:nvPr/>
-        </p:nvSpPr>
-        <p:spPr>
-          <a:xfrm>
-            <a:off x="731520" y="5074920"/>
-            <a:ext cx="10789920" cy="731520"/>
-          </a:xfrm>
-          <a:prstGeom prst="roundRect">
-            <a:avLst>
-              <a:gd name="adj" fmla="val 8000"/>
-            </a:avLst>
-          </a:prstGeom>
-          <a:solidFill>
-            <a:srgbClr val="FEF2F2"/>
-          </a:solidFill>
-          <a:ln w="19050">
-            <a:solidFill>
-              <a:srgbClr val="991B1B"/>
-            </a:solidFill>
-          </a:ln>
-          <a:effectLst/>
-        </p:spPr>
-        <p:style>
-          <a:lnRef idx="1">
-            <a:schemeClr val="accent1"/>
-          </a:lnRef>
-          <a:fillRef idx="3">
-            <a:schemeClr val="accent1"/>
-          </a:fillRef>
-          <a:effectRef idx="2">
-            <a:schemeClr val="accent1"/>
-          </a:effectRef>
-          <a:fontRef idx="minor">
-            <a:schemeClr val="lt1"/>
-          </a:fontRef>
-        </p:style>
-        <p:txBody>
-          <a:bodyPr rtlCol="0" anchor="ctr"/>
-          <a:lstStyle/>
-          <a:p>
-            <a:pPr algn="ctr"/>
-          </a:p>
-        </p:txBody>
-      </p:sp>
-      <p:sp>
-        <p:nvSpPr>
-          <p:cNvPr id="9" name="TextBox 8"/>
-          <p:cNvSpPr txBox="1"/>
-          <p:nvPr/>
-        </p:nvSpPr>
-        <p:spPr>
-          <a:xfrm>
-            <a:off x="914400" y="5074920"/>
-            <a:ext cx="10424160" cy="731520"/>
-          </a:xfrm>
-          <a:prstGeom prst="rect">
-            <a:avLst/>
-          </a:prstGeom>
-          <a:noFill/>
-        </p:spPr>
-        <p:txBody>
-          <a:bodyPr wrap="square" anchor="ctr" lIns="45720" rIns="45720">
-            <a:spAutoFit/>
-          </a:bodyPr>
-          <a:lstStyle/>
-          <a:p>
-            <a:pPr algn="l">
-              <a:spcAft>
-                <a:spcPts val="400"/>
-              </a:spcAft>
-            </a:pPr>
-            <a:r>
-              <a:rPr sz="2400" b="1">
-                <a:solidFill>
-                  <a:srgbClr val="991B1B"/>
-                </a:solidFill>
-                <a:latin typeface="Calibri"/>
-              </a:rPr>
-              <a:t>Mùa xuân ở độ đẹp nhất, rạo rực nhất.</a:t>
+                <a:hlinkClick r:id="rId3"/>
+              </a:rPr>
+              <a:t>https://www.youtube.com/watch?v=-6k_bcYdWyY</a:t>
             </a:r>
           </a:p>
         </p:txBody>
@@ -11850,7 +11998,7 @@
                 </a:solidFill>
                 <a:latin typeface="Arial"/>
               </a:rPr>
-              <a:t>NGÔN TỪ, NHỊP VÀ VẦN</a:t>
+              <a:t>NHAN ĐỀ VÀ TRẠNG THÁI “CHÍN”</a:t>
             </a:r>
           </a:p>
         </p:txBody>
@@ -11968,7 +12116,7 @@
                 </a:solidFill>
                 <a:latin typeface="Calibri"/>
               </a:rPr>
-              <a:t>Bài thơ có những lựa chọn, kết hợp ngôn từ nào đặc biệt? Mô tả cách ngắt nhịp, gieo vần và so sánh với thơ Đường luật.</a:t>
+              <a:t>Nhan đề Mùa xuân chín được cấu tạo bởi những từ thuộc từ loại nào, gợi liên tưởng gì? Trạng thái “chín” được thể hiện bằng những từ ngữ nào?</a:t>
             </a:r>
           </a:p>
         </p:txBody>
@@ -12055,7 +12203,7 @@
                 </a:solidFill>
                 <a:latin typeface="Calibri"/>
               </a:rPr>
-              <a:t>💡 Chú ý dấu chấm giữa dòng, gạch ngang đầu dòng.</a:t>
+              <a:t>💡 “Chín” thường dùng cho sự vật nào?</a:t>
             </a:r>
           </a:p>
         </p:txBody>
@@ -12212,7 +12360,7 @@
                 </a:solidFill>
                 <a:latin typeface="Arial"/>
               </a:rPr>
-              <a:t>NGÔN TỪ, NHỊP VÀ VẦN</a:t>
+              <a:t>NHAN ĐỀ VÀ TRẠNG THÁI “CHÍN”</a:t>
             </a:r>
           </a:p>
         </p:txBody>
@@ -12335,7 +12483,7 @@
                 </a:solidFill>
                 <a:latin typeface="Calibri"/>
               </a:rPr>
-              <a:t>“làn nắng ửng”, “sột soạt gió trêu”, “tiếng ca vắt vẻo”, “hổn hển như lời của nước mây”.</a:t>
+              <a:t>Danh từ “mùa xuân” + tính từ “chín”.</a:t>
             </a:r>
           </a:p>
           <a:p>
@@ -12356,7 +12504,7 @@
                 </a:solidFill>
                 <a:latin typeface="Calibri"/>
               </a:rPr>
-              <a:t>Ngắt nhịp linh hoạt: “Trên giàn thiên lí. Bóng xuân sang”.</a:t>
+              <a:t>Gợi mùa xuân viên mãn, căng tràn như trái chín.</a:t>
             </a:r>
           </a:p>
           <a:p>
@@ -12377,7 +12525,7 @@
                 </a:solidFill>
                 <a:latin typeface="Calibri"/>
               </a:rPr>
-              <a:t>Vần phóng khoáng, ít ràng buộc hơn thơ Đường luật.</a:t>
+              <a:t>“lấm tấm vàng”, “bóng xuân sang”, “sóng cỏ xanh tươi gợn tới trời”.</a:t>
             </a:r>
           </a:p>
         </p:txBody>
@@ -12464,7 +12612,7 @@
                 </a:solidFill>
                 <a:latin typeface="Calibri"/>
               </a:rPr>
-              <a:t>Thơ mới: tự do, giàu cảm giác, cá tính.</a:t>
+              <a:t>Mùa xuân ở độ đẹp nhất, rạo rực nhất.</a:t>
             </a:r>
           </a:p>
         </p:txBody>
@@ -12621,7 +12769,7 @@
                 </a:solidFill>
                 <a:latin typeface="Arial"/>
               </a:rPr>
-              <a:t>CON NGƯỜI VÀ MẠCH CẢM XÚC</a:t>
+              <a:t>NGÔN TỪ, NHỊP VÀ VẦN</a:t>
             </a:r>
           </a:p>
         </p:txBody>
@@ -12739,7 +12887,7 @@
                 </a:solidFill>
                 <a:latin typeface="Calibri"/>
               </a:rPr>
-              <a:t>Con người hiện diện qua những hình ảnh nào? Hình ảnh nào nằm trong tâm tưởng nhân vật trữ tình? Nêu cảm nhận về nhân vật trữ tình.</a:t>
+              <a:t>Bài thơ có những lựa chọn, kết hợp ngôn từ nào đặc biệt? Mô tả cách ngắt nhịp, gieo vần và so sánh với thơ Đường luật.</a:t>
             </a:r>
           </a:p>
         </p:txBody>
@@ -12826,7 +12974,7 @@
                 </a:solidFill>
                 <a:latin typeface="Calibri"/>
               </a:rPr>
-              <a:t>💡 Phân biệt cảnh đang ngắm và cảnh hồi tưởng.</a:t>
+              <a:t>💡 Chú ý dấu chấm giữa dòng, gạch ngang đầu dòng.</a:t>
             </a:r>
           </a:p>
         </p:txBody>
@@ -12983,7 +13131,7 @@
                 </a:solidFill>
                 <a:latin typeface="Arial"/>
               </a:rPr>
-              <a:t>CON NGƯỜI VÀ MẠCH CẢM XÚC</a:t>
+              <a:t>NGÔN TỪ, NHỊP VÀ VẦN</a:t>
             </a:r>
           </a:p>
         </p:txBody>
@@ -13106,7 +13254,7 @@
                 </a:solidFill>
                 <a:latin typeface="Calibri"/>
               </a:rPr>
-              <a:t>Thôn nữ hát trên đồi, người theo chồng bỏ cuộc chơi.</a:t>
+              <a:t>“làn nắng ửng”, “sột soạt gió trêu”, “tiếng ca vắt vẻo”, “hổn hển như lời của nước mây”.</a:t>
             </a:r>
           </a:p>
           <a:p>
@@ -13127,7 +13275,7 @@
                 </a:solidFill>
                 <a:latin typeface="Calibri"/>
               </a:rPr>
-              <a:t>Người chị gánh thóc – hình ảnh trong tâm tưởng.</a:t>
+              <a:t>Ngắt nhịp linh hoạt: “Trên giàn thiên lí. Bóng xuân sang”.</a:t>
             </a:r>
           </a:p>
           <a:p>
@@ -13148,7 +13296,7 @@
                 </a:solidFill>
                 <a:latin typeface="Calibri"/>
               </a:rPr>
-              <a:t>“Khách xa” bâng khuâng, sực nhớ làng.</a:t>
+              <a:t>Vần phóng khoáng, ít ràng buộc hơn thơ Đường luật.</a:t>
             </a:r>
           </a:p>
         </p:txBody>
@@ -13235,7 +13383,7 @@
                 </a:solidFill>
                 <a:latin typeface="Calibri"/>
               </a:rPr>
-              <a:t>Say sưa cảnh xuân → tiếc nuối → nhớ thương.</a:t>
+              <a:t>Thơ mới: tự do, giàu cảm giác, cá tính.</a:t>
             </a:r>
           </a:p>
         </p:txBody>
@@ -13363,7 +13511,7 @@
     <p:bg>
       <p:bgPr>
         <a:solidFill>
-          <a:srgbClr val="F8F9FA"/>
+          <a:srgbClr val="FFFFFF"/>
         </a:solidFill>
         <a:effectLst/>
       </p:bgPr>
@@ -13383,14 +13531,14 @@
         </p:nvSpPr>
         <p:spPr>
           <a:xfrm>
-            <a:off x="548640" y="2926080"/>
-            <a:ext cx="164592" cy="1005840"/>
+            <a:off x="457200" y="384048"/>
+            <a:ext cx="109728" cy="658368"/>
           </a:xfrm>
           <a:prstGeom prst="rect">
             <a:avLst/>
           </a:prstGeom>
           <a:solidFill>
-            <a:srgbClr val="991B1B"/>
+            <a:srgbClr val="1E40AF"/>
           </a:solidFill>
           <a:ln>
             <a:noFill/>
@@ -13421,14 +13569,67 @@
       </p:sp>
       <p:sp>
         <p:nvSpPr>
-          <p:cNvPr id="3" name="TextBox 2"/>
+          <p:cNvPr id="3" name="Rounded Rectangle 2"/>
+          <p:cNvSpPr/>
+          <p:nvPr/>
+        </p:nvSpPr>
+        <p:spPr>
+          <a:xfrm>
+            <a:off x="10253167" y="457200"/>
+            <a:ext cx="1389888" cy="457200"/>
+          </a:xfrm>
+          <a:prstGeom prst="roundRect">
+            <a:avLst/>
+          </a:prstGeom>
+          <a:solidFill>
+            <a:srgbClr val="1E40AF"/>
+          </a:solidFill>
+          <a:ln>
+            <a:noFill/>
+          </a:ln>
+          <a:effectLst/>
+        </p:spPr>
+        <p:style>
+          <a:lnRef idx="1">
+            <a:schemeClr val="accent1"/>
+          </a:lnRef>
+          <a:fillRef idx="3">
+            <a:schemeClr val="accent1"/>
+          </a:fillRef>
+          <a:effectRef idx="2">
+            <a:schemeClr val="accent1"/>
+          </a:effectRef>
+          <a:fontRef idx="minor">
+            <a:schemeClr val="lt1"/>
+          </a:fontRef>
+        </p:style>
+        <p:txBody>
+          <a:bodyPr rtlCol="0" anchor="ctr" wrap="none" tIns="0" bIns="0"/>
+          <a:lstStyle/>
+          <a:p>
+            <a:pPr algn="ctr"/>
+            <a:r>
+              <a:rPr sz="1400" b="1">
+                <a:solidFill>
+                  <a:srgbClr val="FFFFFF"/>
+                </a:solidFill>
+                <a:latin typeface="Arial"/>
+              </a:rPr>
+              <a:t>ĐỀ BÀI</a:t>
+            </a:r>
+          </a:p>
+        </p:txBody>
+      </p:sp>
+      <p:sp>
+        <p:nvSpPr>
+          <p:cNvPr id="4" name="TextBox 3"/>
           <p:cNvSpPr txBox="1"/>
           <p:nvPr/>
         </p:nvSpPr>
         <p:spPr>
           <a:xfrm>
-            <a:off x="914400" y="2743200"/>
-            <a:ext cx="10515600" cy="1371600"/>
+            <a:off x="731520" y="274320"/>
+            <a:ext cx="9582912" cy="868680"/>
           </a:xfrm>
           <a:prstGeom prst="rect">
             <a:avLst/>
@@ -13436,7 +13637,120 @@
           <a:noFill/>
         </p:spPr>
         <p:txBody>
-          <a:bodyPr wrap="square" anchor="ctr" lIns="45720" rIns="45720">
+          <a:bodyPr wrap="square" anchor="ctr">
+            <a:spAutoFit/>
+          </a:bodyPr>
+          <a:lstStyle/>
+          <a:p>
+            <a:r>
+              <a:rPr sz="3600" b="1">
+                <a:solidFill>
+                  <a:srgbClr val="1E40AF"/>
+                </a:solidFill>
+                <a:latin typeface="Arial"/>
+              </a:rPr>
+              <a:t>CON NGƯỜI VÀ MẠCH CẢM XÚC</a:t>
+            </a:r>
+          </a:p>
+        </p:txBody>
+      </p:sp>
+      <p:sp>
+        <p:nvSpPr>
+          <p:cNvPr id="5" name="Rectangle 4"/>
+          <p:cNvSpPr/>
+          <p:nvPr/>
+        </p:nvSpPr>
+        <p:spPr>
+          <a:xfrm>
+            <a:off x="457200" y="1207008"/>
+            <a:ext cx="11274552" cy="22000"/>
+          </a:xfrm>
+          <a:prstGeom prst="rect">
+            <a:avLst/>
+          </a:prstGeom>
+          <a:solidFill>
+            <a:srgbClr val="E2E8F0"/>
+          </a:solidFill>
+          <a:ln>
+            <a:noFill/>
+          </a:ln>
+          <a:effectLst/>
+        </p:spPr>
+        <p:style>
+          <a:lnRef idx="1">
+            <a:schemeClr val="accent1"/>
+          </a:lnRef>
+          <a:fillRef idx="3">
+            <a:schemeClr val="accent1"/>
+          </a:fillRef>
+          <a:effectRef idx="2">
+            <a:schemeClr val="accent1"/>
+          </a:effectRef>
+          <a:fontRef idx="minor">
+            <a:schemeClr val="lt1"/>
+          </a:fontRef>
+        </p:style>
+        <p:txBody>
+          <a:bodyPr rtlCol="0" anchor="ctr"/>
+          <a:lstStyle/>
+          <a:p>
+            <a:pPr algn="ctr"/>
+          </a:p>
+        </p:txBody>
+      </p:sp>
+      <p:sp>
+        <p:nvSpPr>
+          <p:cNvPr id="6" name="TextBox 5"/>
+          <p:cNvSpPr txBox="1"/>
+          <p:nvPr/>
+        </p:nvSpPr>
+        <p:spPr>
+          <a:xfrm>
+            <a:off x="457200" y="6355080"/>
+            <a:ext cx="11274552" cy="365760"/>
+          </a:xfrm>
+          <a:prstGeom prst="rect">
+            <a:avLst/>
+          </a:prstGeom>
+          <a:noFill/>
+        </p:spPr>
+        <p:txBody>
+          <a:bodyPr wrap="none">
+            <a:spAutoFit/>
+          </a:bodyPr>
+          <a:lstStyle/>
+          <a:p>
+            <a:pPr algn="r"/>
+            <a:r>
+              <a:rPr sz="1200">
+                <a:solidFill>
+                  <a:srgbClr val="64748B"/>
+                </a:solidFill>
+                <a:latin typeface="Calibri"/>
+              </a:rPr>
+              <a:t>Ngữ văn 10 · Bài 2: Vẻ Đẹp Của Thơ Ca          30</a:t>
+            </a:r>
+          </a:p>
+        </p:txBody>
+      </p:sp>
+      <p:sp>
+        <p:nvSpPr>
+          <p:cNvPr id="7" name="TextBox 6"/>
+          <p:cNvSpPr txBox="1"/>
+          <p:nvPr/>
+        </p:nvSpPr>
+        <p:spPr>
+          <a:xfrm>
+            <a:off x="731520" y="1463040"/>
+            <a:ext cx="10789920" cy="3566160"/>
+          </a:xfrm>
+          <a:prstGeom prst="rect">
+            <a:avLst/>
+          </a:prstGeom>
+          <a:noFill/>
+        </p:spPr>
+        <p:txBody>
+          <a:bodyPr wrap="square" anchor="t" lIns="45720" rIns="45720">
             <a:spAutoFit/>
           </a:bodyPr>
           <a:lstStyle/>
@@ -13447,13 +13761,100 @@
               </a:spcAft>
             </a:pPr>
             <a:r>
-              <a:rPr sz="3600" b="1">
+              <a:rPr sz="2600" b="1">
+                <a:solidFill>
+                  <a:srgbClr val="1E293B"/>
+                </a:solidFill>
+                <a:latin typeface="Calibri"/>
+              </a:rPr>
+              <a:t>Con người hiện diện qua những hình ảnh nào? Hình ảnh nào nằm trong tâm tưởng nhân vật trữ tình? Nêu cảm nhận về nhân vật trữ tình.</a:t>
+            </a:r>
+          </a:p>
+        </p:txBody>
+      </p:sp>
+      <p:sp>
+        <p:nvSpPr>
+          <p:cNvPr id="8" name="Rounded Rectangle 7"/>
+          <p:cNvSpPr/>
+          <p:nvPr/>
+        </p:nvSpPr>
+        <p:spPr>
+          <a:xfrm>
+            <a:off x="731520" y="5120640"/>
+            <a:ext cx="10789920" cy="693420"/>
+          </a:xfrm>
+          <a:prstGeom prst="roundRect">
+            <a:avLst>
+              <a:gd name="adj" fmla="val 8000"/>
+            </a:avLst>
+          </a:prstGeom>
+          <a:solidFill>
+            <a:srgbClr val="EFF4FF"/>
+          </a:solidFill>
+          <a:ln w="19050">
+            <a:solidFill>
+              <a:srgbClr val="1E40AF"/>
+            </a:solidFill>
+          </a:ln>
+          <a:effectLst/>
+        </p:spPr>
+        <p:style>
+          <a:lnRef idx="1">
+            <a:schemeClr val="accent1"/>
+          </a:lnRef>
+          <a:fillRef idx="3">
+            <a:schemeClr val="accent1"/>
+          </a:fillRef>
+          <a:effectRef idx="2">
+            <a:schemeClr val="accent1"/>
+          </a:effectRef>
+          <a:fontRef idx="minor">
+            <a:schemeClr val="lt1"/>
+          </a:fontRef>
+        </p:style>
+        <p:txBody>
+          <a:bodyPr rtlCol="0" anchor="ctr"/>
+          <a:lstStyle/>
+          <a:p>
+            <a:pPr algn="ctr"/>
+          </a:p>
+        </p:txBody>
+      </p:sp>
+      <p:sp>
+        <p:nvSpPr>
+          <p:cNvPr id="9" name="TextBox 8"/>
+          <p:cNvSpPr txBox="1"/>
+          <p:nvPr/>
+        </p:nvSpPr>
+        <p:spPr>
+          <a:xfrm>
+            <a:off x="914400" y="5120640"/>
+            <a:ext cx="10424160" cy="693420"/>
+          </a:xfrm>
+          <a:prstGeom prst="rect">
+            <a:avLst/>
+          </a:prstGeom>
+          <a:noFill/>
+        </p:spPr>
+        <p:txBody>
+          <a:bodyPr wrap="square" anchor="ctr" lIns="45720" rIns="45720">
+            <a:spAutoFit/>
+          </a:bodyPr>
+          <a:lstStyle/>
+          <a:p>
+            <a:pPr algn="l">
+              <a:spcAft>
+                <a:spcPts val="400"/>
+              </a:spcAft>
+            </a:pPr>
+            <a:r>
+              <a:rPr sz="2200" b="1">
                 <a:solidFill>
                   <a:srgbClr val="1E40AF"/>
                 </a:solidFill>
                 <a:latin typeface="Calibri"/>
               </a:rPr>
-              <a:t>TIẾT 17: BẢN HOÀ ÂM NGÔN TỪ TRONG TIẾNG THU</a:t>
+              <a:t>💡 Phân biệt cảnh đang ngắm và cảnh hồi tưởng.</a:t>
             </a:r>
           </a:p>
         </p:txBody>
@@ -13536,14 +13937,14 @@
         </p:nvSpPr>
         <p:spPr>
           <a:xfrm>
-            <a:off x="10253167" y="457200"/>
-            <a:ext cx="1389888" cy="457200"/>
+            <a:off x="9942271" y="457200"/>
+            <a:ext cx="1700784" cy="457200"/>
           </a:xfrm>
           <a:prstGeom prst="roundRect">
             <a:avLst/>
           </a:prstGeom>
           <a:solidFill>
-            <a:srgbClr val="1E40AF"/>
+            <a:srgbClr val="991B1B"/>
           </a:solidFill>
           <a:ln>
             <a:noFill/>
@@ -13576,7 +13977,7 @@
                 </a:solidFill>
                 <a:latin typeface="Arial"/>
               </a:rPr>
-              <a:t>ĐỀ BÀI</a:t>
+              <a:t>LỜI GIẢI</a:t>
             </a:r>
           </a:p>
         </p:txBody>
@@ -13590,7 +13991,7 @@
         <p:spPr>
           <a:xfrm>
             <a:off x="731520" y="274320"/>
-            <a:ext cx="9582912" cy="868680"/>
+            <a:ext cx="9272016" cy="868680"/>
           </a:xfrm>
           <a:prstGeom prst="rect">
             <a:avLst/>
@@ -13610,7 +14011,7 @@
                 </a:solidFill>
                 <a:latin typeface="Arial"/>
               </a:rPr>
-              <a:t>TIẾNG THU VÀ TIẾNG THƠ</a:t>
+              <a:t>CON NGƯỜI VÀ MẠCH CẢM XÚC</a:t>
             </a:r>
           </a:p>
         </p:txBody>
@@ -13703,7 +14104,7 @@
         <p:spPr>
           <a:xfrm>
             <a:off x="731520" y="1463040"/>
-            <a:ext cx="10789920" cy="3566160"/>
+            <a:ext cx="10789920" cy="3474720"/>
           </a:xfrm>
           <a:prstGeom prst="rect">
             <a:avLst/>
@@ -13716,19 +14117,66 @@
           </a:bodyPr>
           <a:lstStyle/>
           <a:p>
-            <a:pPr algn="l">
+            <a:pPr algn="l" marL="365760" indent="-365760">
               <a:spcAft>
                 <a:spcPts val="800"/>
               </a:spcAft>
+              <a:buClr>
+                <a:srgbClr val="1E40AF"/>
+              </a:buClr>
+              <a:buFont typeface="Arial"/>
+              <a:buChar char="•"/>
             </a:pPr>
             <a:r>
-              <a:rPr sz="2600" b="1">
+              <a:rPr sz="2300">
                 <a:solidFill>
                   <a:srgbClr val="1E293B"/>
                 </a:solidFill>
                 <a:latin typeface="Calibri"/>
               </a:rPr>
-              <a:t>Theo Chu Văn Sơn, “tiếng thu” và “tiếng thơ” tương ứng với những bình diện nào? Khác biệt lớn nhất trong cách miêu tả thiên nhiên của Thơ mới so với thơ cổ điển?</a:t>
+              <a:t>Thôn nữ hát trên đồi, người theo chồng bỏ cuộc chơi.</a:t>
+            </a:r>
+          </a:p>
+          <a:p>
+            <a:pPr algn="l" marL="365760" indent="-365760">
+              <a:spcAft>
+                <a:spcPts val="800"/>
+              </a:spcAft>
+              <a:buClr>
+                <a:srgbClr val="1E40AF"/>
+              </a:buClr>
+              <a:buFont typeface="Arial"/>
+              <a:buChar char="•"/>
+            </a:pPr>
+            <a:r>
+              <a:rPr sz="2300">
+                <a:solidFill>
+                  <a:srgbClr val="1E293B"/>
+                </a:solidFill>
+                <a:latin typeface="Calibri"/>
+              </a:rPr>
+              <a:t>Người chị gánh thóc – hình ảnh trong tâm tưởng.</a:t>
+            </a:r>
+          </a:p>
+          <a:p>
+            <a:pPr algn="l" marL="365760" indent="-365760">
+              <a:spcAft>
+                <a:spcPts val="800"/>
+              </a:spcAft>
+              <a:buClr>
+                <a:srgbClr val="1E40AF"/>
+              </a:buClr>
+              <a:buFont typeface="Arial"/>
+              <a:buChar char="•"/>
+            </a:pPr>
+            <a:r>
+              <a:rPr sz="2300">
+                <a:solidFill>
+                  <a:srgbClr val="1E293B"/>
+                </a:solidFill>
+                <a:latin typeface="Calibri"/>
+              </a:rPr>
+              <a:t>“Khách xa” bâng khuâng, sực nhớ làng.</a:t>
             </a:r>
           </a:p>
         </p:txBody>
@@ -13741,8 +14189,8 @@
         </p:nvSpPr>
         <p:spPr>
           <a:xfrm>
-            <a:off x="731520" y="5120640"/>
-            <a:ext cx="10789920" cy="693420"/>
+            <a:off x="731520" y="5074920"/>
+            <a:ext cx="10789920" cy="731520"/>
           </a:xfrm>
           <a:prstGeom prst="roundRect">
             <a:avLst>
@@ -13750,11 +14198,11 @@
             </a:avLst>
           </a:prstGeom>
           <a:solidFill>
-            <a:srgbClr val="EFF4FF"/>
+            <a:srgbClr val="FEF2F2"/>
           </a:solidFill>
           <a:ln w="19050">
             <a:solidFill>
-              <a:srgbClr val="1E40AF"/>
+              <a:srgbClr val="991B1B"/>
             </a:solidFill>
           </a:ln>
           <a:effectLst/>
@@ -13789,8 +14237,8 @@
         </p:nvSpPr>
         <p:spPr>
           <a:xfrm>
-            <a:off x="914400" y="5120640"/>
-            <a:ext cx="10424160" cy="693420"/>
+            <a:off x="914400" y="5074920"/>
+            <a:ext cx="10424160" cy="731520"/>
           </a:xfrm>
           <a:prstGeom prst="rect">
             <a:avLst/>
@@ -13809,13 +14257,13 @@
               </a:spcAft>
             </a:pPr>
             <a:r>
-              <a:rPr sz="2200" b="1">
-                <a:solidFill>
-                  <a:srgbClr val="1E40AF"/>
+              <a:rPr sz="2400" b="1">
+                <a:solidFill>
+                  <a:srgbClr val="991B1B"/>
                 </a:solidFill>
                 <a:latin typeface="Calibri"/>
               </a:rPr>
-              <a:t>💡 Thơ cổ “nhìn” thiên nhiên, Thơ mới thì sao?</a:t>
+              <a:t>Say sưa cảnh xuân → tiếc nuối → nhớ thương.</a:t>
             </a:r>
           </a:p>
         </p:txBody>
@@ -13829,6 +14277,115 @@
 </file>
 
 <file path=ppt/slides/slide32.xml><?xml version="1.0" encoding="utf-8"?>
+<p:sld xmlns:a="http://schemas.openxmlformats.org/drawingml/2006/main" xmlns:p="http://schemas.openxmlformats.org/presentationml/2006/main" xmlns:r="http://schemas.openxmlformats.org/officeDocument/2006/relationships">
+  <p:cSld>
+    <p:bg>
+      <p:bgPr>
+        <a:solidFill>
+          <a:srgbClr val="F8F9FA"/>
+        </a:solidFill>
+        <a:effectLst/>
+      </p:bgPr>
+    </p:bg>
+    <p:spTree>
+      <p:nvGrpSpPr>
+        <p:cNvPr id="1" name=""/>
+        <p:cNvGrpSpPr/>
+        <p:nvPr/>
+      </p:nvGrpSpPr>
+      <p:grpSpPr/>
+      <p:sp>
+        <p:nvSpPr>
+          <p:cNvPr id="2" name="Rectangle 1"/>
+          <p:cNvSpPr/>
+          <p:nvPr/>
+        </p:nvSpPr>
+        <p:spPr>
+          <a:xfrm>
+            <a:off x="548640" y="2926080"/>
+            <a:ext cx="164592" cy="1005840"/>
+          </a:xfrm>
+          <a:prstGeom prst="rect">
+            <a:avLst/>
+          </a:prstGeom>
+          <a:solidFill>
+            <a:srgbClr val="991B1B"/>
+          </a:solidFill>
+          <a:ln>
+            <a:noFill/>
+          </a:ln>
+          <a:effectLst/>
+        </p:spPr>
+        <p:style>
+          <a:lnRef idx="1">
+            <a:schemeClr val="accent1"/>
+          </a:lnRef>
+          <a:fillRef idx="3">
+            <a:schemeClr val="accent1"/>
+          </a:fillRef>
+          <a:effectRef idx="2">
+            <a:schemeClr val="accent1"/>
+          </a:effectRef>
+          <a:fontRef idx="minor">
+            <a:schemeClr val="lt1"/>
+          </a:fontRef>
+        </p:style>
+        <p:txBody>
+          <a:bodyPr rtlCol="0" anchor="ctr"/>
+          <a:lstStyle/>
+          <a:p>
+            <a:pPr algn="ctr"/>
+          </a:p>
+        </p:txBody>
+      </p:sp>
+      <p:sp>
+        <p:nvSpPr>
+          <p:cNvPr id="3" name="TextBox 2"/>
+          <p:cNvSpPr txBox="1"/>
+          <p:nvPr/>
+        </p:nvSpPr>
+        <p:spPr>
+          <a:xfrm>
+            <a:off x="914400" y="2743200"/>
+            <a:ext cx="10515600" cy="1371600"/>
+          </a:xfrm>
+          <a:prstGeom prst="rect">
+            <a:avLst/>
+          </a:prstGeom>
+          <a:noFill/>
+        </p:spPr>
+        <p:txBody>
+          <a:bodyPr wrap="square" anchor="ctr" lIns="45720" rIns="45720">
+            <a:spAutoFit/>
+          </a:bodyPr>
+          <a:lstStyle/>
+          <a:p>
+            <a:pPr algn="l">
+              <a:spcAft>
+                <a:spcPts val="800"/>
+              </a:spcAft>
+            </a:pPr>
+            <a:r>
+              <a:rPr sz="3600" b="1">
+                <a:solidFill>
+                  <a:srgbClr val="1E40AF"/>
+                </a:solidFill>
+                <a:latin typeface="Calibri"/>
+              </a:rPr>
+              <a:t>TIẾT 17: BẢN HOÀ ÂM NGÔN TỪ TRONG TIẾNG THU</a:t>
+            </a:r>
+          </a:p>
+        </p:txBody>
+      </p:sp>
+    </p:spTree>
+  </p:cSld>
+  <p:clrMapOvr>
+    <a:masterClrMapping/>
+  </p:clrMapOvr>
+</p:sld>
+</file>
+
+<file path=ppt/slides/slide33.xml><?xml version="1.0" encoding="utf-8"?>
 <p:sld xmlns:a="http://schemas.openxmlformats.org/drawingml/2006/main" xmlns:p="http://schemas.openxmlformats.org/presentationml/2006/main" xmlns:r="http://schemas.openxmlformats.org/officeDocument/2006/relationships">
   <p:cSld>
     <p:bg>
@@ -13898,8 +14455,8 @@
         </p:nvSpPr>
         <p:spPr>
           <a:xfrm>
-            <a:off x="9942271" y="457200"/>
-            <a:ext cx="1700784" cy="457200"/>
+            <a:off x="10408615" y="457200"/>
+            <a:ext cx="1234440" cy="457200"/>
           </a:xfrm>
           <a:prstGeom prst="roundRect">
             <a:avLst/>
@@ -13938,7 +14495,7 @@
                 </a:solidFill>
                 <a:latin typeface="Arial"/>
               </a:rPr>
-              <a:t>LỜI GIẢI</a:t>
+              <a:t>VIDEO</a:t>
             </a:r>
           </a:p>
         </p:txBody>
@@ -13952,7 +14509,7 @@
         <p:spPr>
           <a:xfrm>
             <a:off x="731520" y="274320"/>
-            <a:ext cx="9272016" cy="868680"/>
+            <a:ext cx="9738360" cy="868680"/>
           </a:xfrm>
           <a:prstGeom prst="rect">
             <a:avLst/>
@@ -13972,7 +14529,7 @@
                 </a:solidFill>
                 <a:latin typeface="Arial"/>
               </a:rPr>
-              <a:t>TIẾNG THU VÀ TIẾNG THƠ</a:t>
+              <a:t>VIDEO THAM KHẢO</a:t>
             </a:r>
           </a:p>
         </p:txBody>
@@ -14051,21 +14608,45 @@
                 </a:solidFill>
                 <a:latin typeface="Calibri"/>
               </a:rPr>
-              <a:t>Ngữ văn 10 · Bài 2: Vẻ Đẹp Của Thơ Ca          32</a:t>
-            </a:r>
-          </a:p>
-        </p:txBody>
-      </p:sp>
-      <p:sp>
-        <p:nvSpPr>
-          <p:cNvPr id="7" name="TextBox 6"/>
+              <a:t>Ngữ văn 10 · Bài 2: Vẻ Đẹp Của Thơ Ca          33</a:t>
+            </a:r>
+          </a:p>
+        </p:txBody>
+      </p:sp>
+      <p:pic>
+        <p:nvPicPr>
+          <p:cNvPr id="7" name="Picture 6" descr="QR_video_c5RVyHI_TeU.png"/>
+          <p:cNvPicPr>
+            <a:picLocks noChangeAspect="1"/>
+          </p:cNvPicPr>
+          <p:nvPr/>
+        </p:nvPicPr>
+        <p:blipFill>
+          <a:blip r:embed="rId2"/>
+          <a:stretch>
+            <a:fillRect/>
+          </a:stretch>
+        </p:blipFill>
+        <p:spPr>
+          <a:xfrm>
+            <a:off x="8412480" y="1554480"/>
+            <a:ext cx="3108960" cy="3108960"/>
+          </a:xfrm>
+          <a:prstGeom prst="rect">
+            <a:avLst/>
+          </a:prstGeom>
+        </p:spPr>
+      </p:pic>
+      <p:sp>
+        <p:nvSpPr>
+          <p:cNvPr id="8" name="TextBox 7"/>
           <p:cNvSpPr txBox="1"/>
           <p:nvPr/>
         </p:nvSpPr>
         <p:spPr>
           <a:xfrm>
-            <a:off x="731520" y="1463040"/>
-            <a:ext cx="10789920" cy="3474720"/>
+            <a:off x="731520" y="1554480"/>
+            <a:ext cx="7498079" cy="4206240"/>
           </a:xfrm>
           <a:prstGeom prst="rect">
             <a:avLst/>
@@ -14077,6 +14658,38 @@
             <a:spAutoFit/>
           </a:bodyPr>
           <a:lstStyle/>
+          <a:p>
+            <a:pPr algn="l">
+              <a:spcAft>
+                <a:spcPts val="800"/>
+              </a:spcAft>
+            </a:pPr>
+            <a:r>
+              <a:rPr sz="2600" b="1">
+                <a:solidFill>
+                  <a:srgbClr val="1E293B"/>
+                </a:solidFill>
+                <a:latin typeface="Calibri"/>
+              </a:rPr>
+              <a:t>🎬 Bài thơ Tiếng thu – Lưu Trọng Lư, Ngọc Sang diễn ngâm</a:t>
+            </a:r>
+          </a:p>
+          <a:p>
+            <a:pPr algn="l">
+              <a:spcAft>
+                <a:spcPts val="800"/>
+              </a:spcAft>
+            </a:pPr>
+            <a:r>
+              <a:rPr sz="2000">
+                <a:solidFill>
+                  <a:srgbClr val="64748B"/>
+                </a:solidFill>
+                <a:latin typeface="Calibri"/>
+              </a:rPr>
+              <a:t>Kênh: Nghệ sĩ ngâm thơ Ngọc Sang</a:t>
+            </a:r>
+          </a:p>
           <a:p>
             <a:pPr algn="l" marL="365760" indent="-365760">
               <a:spcAft>
@@ -14089,258 +14702,15 @@
               <a:buChar char="•"/>
             </a:pPr>
             <a:r>
-              <a:rPr sz="2300">
+              <a:rPr sz="2000">
                 <a:solidFill>
                   <a:srgbClr val="1E293B"/>
                 </a:solidFill>
                 <a:latin typeface="Calibri"/>
               </a:rPr>
-              <a:t>“Tiếng thu”: điệu hồn (nội dung); “tiếng thơ”: âm hưởng ngôn từ (hình thức).</a:t>
-            </a:r>
-          </a:p>
-          <a:p>
-            <a:pPr algn="l" marL="365760" indent="-365760">
-              <a:spcAft>
-                <a:spcPts val="800"/>
-              </a:spcAft>
-              <a:buClr>
-                <a:srgbClr val="1E40AF"/>
-              </a:buClr>
-              <a:buFont typeface="Arial"/>
-              <a:buChar char="•"/>
-            </a:pPr>
-            <a:r>
-              <a:rPr sz="2300">
-                <a:solidFill>
-                  <a:srgbClr val="1E293B"/>
-                </a:solidFill>
-                <a:latin typeface="Calibri"/>
-              </a:rPr>
-              <a:t>Thơ cổ điển: thiên nhiên qua thị giác.</a:t>
-            </a:r>
-          </a:p>
-          <a:p>
-            <a:pPr algn="l" marL="365760" indent="-365760">
-              <a:spcAft>
-                <a:spcPts val="800"/>
-              </a:spcAft>
-              <a:buClr>
-                <a:srgbClr val="1E40AF"/>
-              </a:buClr>
-              <a:buFont typeface="Arial"/>
-              <a:buChar char="•"/>
-            </a:pPr>
-            <a:r>
-              <a:rPr sz="2300">
-                <a:solidFill>
-                  <a:srgbClr val="1E293B"/>
-                </a:solidFill>
-                <a:latin typeface="Calibri"/>
-              </a:rPr>
-              <a:t>Thơ mới: thiên nhiên qua thính giác, cái tôi rung cảm.</a:t>
-            </a:r>
-          </a:p>
-          <a:p>
-            <a:pPr algn="l" marL="365760" indent="-365760">
-              <a:spcAft>
-                <a:spcPts val="800"/>
-              </a:spcAft>
-              <a:buClr>
-                <a:srgbClr val="1E40AF"/>
-              </a:buClr>
-              <a:buFont typeface="Arial"/>
-              <a:buChar char="•"/>
-            </a:pPr>
-            <a:r>
-              <a:rPr sz="2300">
-                <a:solidFill>
-                  <a:srgbClr val="1E293B"/>
-                </a:solidFill>
-                <a:latin typeface="Calibri"/>
-              </a:rPr>
-              <a:t>Thống kê 45 âm – 33 âm bằng → điệu êm đềm, tiêu tao.</a:t>
-            </a:r>
-          </a:p>
-        </p:txBody>
-      </p:sp>
-      <p:sp>
-        <p:nvSpPr>
-          <p:cNvPr id="8" name="Rounded Rectangle 7"/>
-          <p:cNvSpPr/>
-          <p:nvPr/>
-        </p:nvSpPr>
-        <p:spPr>
-          <a:xfrm>
-            <a:off x="731520" y="5074920"/>
-            <a:ext cx="10789920" cy="731520"/>
-          </a:xfrm>
-          <a:prstGeom prst="roundRect">
-            <a:avLst>
-              <a:gd name="adj" fmla="val 8000"/>
-            </a:avLst>
-          </a:prstGeom>
-          <a:solidFill>
-            <a:srgbClr val="FEF2F2"/>
-          </a:solidFill>
-          <a:ln w="19050">
-            <a:solidFill>
-              <a:srgbClr val="991B1B"/>
-            </a:solidFill>
-          </a:ln>
-          <a:effectLst/>
-        </p:spPr>
-        <p:style>
-          <a:lnRef idx="1">
-            <a:schemeClr val="accent1"/>
-          </a:lnRef>
-          <a:fillRef idx="3">
-            <a:schemeClr val="accent1"/>
-          </a:fillRef>
-          <a:effectRef idx="2">
-            <a:schemeClr val="accent1"/>
-          </a:effectRef>
-          <a:fontRef idx="minor">
-            <a:schemeClr val="lt1"/>
-          </a:fontRef>
-        </p:style>
-        <p:txBody>
-          <a:bodyPr rtlCol="0" anchor="ctr"/>
-          <a:lstStyle/>
-          <a:p>
-            <a:pPr algn="ctr"/>
-          </a:p>
-        </p:txBody>
-      </p:sp>
-      <p:sp>
-        <p:nvSpPr>
-          <p:cNvPr id="9" name="TextBox 8"/>
-          <p:cNvSpPr txBox="1"/>
-          <p:nvPr/>
-        </p:nvSpPr>
-        <p:spPr>
-          <a:xfrm>
-            <a:off x="914400" y="5074920"/>
-            <a:ext cx="10424160" cy="731520"/>
-          </a:xfrm>
-          <a:prstGeom prst="rect">
-            <a:avLst/>
-          </a:prstGeom>
-          <a:noFill/>
-        </p:spPr>
-        <p:txBody>
-          <a:bodyPr wrap="square" anchor="ctr" lIns="45720" rIns="45720">
-            <a:spAutoFit/>
-          </a:bodyPr>
-          <a:lstStyle/>
-          <a:p>
-            <a:pPr algn="l">
-              <a:spcAft>
-                <a:spcPts val="400"/>
-              </a:spcAft>
-            </a:pPr>
-            <a:r>
-              <a:rPr sz="2400" b="1">
-                <a:solidFill>
-                  <a:srgbClr val="991B1B"/>
-                </a:solidFill>
-                <a:latin typeface="Calibri"/>
-              </a:rPr>
-              <a:t>Sức hấp dẫn của thơ: cảm xúc hoà với nhạc điệu ngôn từ.</a:t>
-            </a:r>
-          </a:p>
-        </p:txBody>
-      </p:sp>
-    </p:spTree>
-  </p:cSld>
-  <p:clrMapOvr>
-    <a:masterClrMapping/>
-  </p:clrMapOvr>
-</p:sld>
-</file>
-
-<file path=ppt/slides/slide33.xml><?xml version="1.0" encoding="utf-8"?>
-<p:sld xmlns:a="http://schemas.openxmlformats.org/drawingml/2006/main" xmlns:p="http://schemas.openxmlformats.org/presentationml/2006/main" xmlns:r="http://schemas.openxmlformats.org/officeDocument/2006/relationships">
-  <p:cSld>
-    <p:bg>
-      <p:bgPr>
-        <a:solidFill>
-          <a:srgbClr val="F8F9FA"/>
-        </a:solidFill>
-        <a:effectLst/>
-      </p:bgPr>
-    </p:bg>
-    <p:spTree>
-      <p:nvGrpSpPr>
-        <p:cNvPr id="1" name=""/>
-        <p:cNvGrpSpPr/>
-        <p:nvPr/>
-      </p:nvGrpSpPr>
-      <p:grpSpPr/>
-      <p:sp>
-        <p:nvSpPr>
-          <p:cNvPr id="2" name="Rectangle 1"/>
-          <p:cNvSpPr/>
-          <p:nvPr/>
-        </p:nvSpPr>
-        <p:spPr>
-          <a:xfrm>
-            <a:off x="548640" y="2926080"/>
-            <a:ext cx="164592" cy="1005840"/>
-          </a:xfrm>
-          <a:prstGeom prst="rect">
-            <a:avLst/>
-          </a:prstGeom>
-          <a:solidFill>
-            <a:srgbClr val="991B1B"/>
-          </a:solidFill>
-          <a:ln>
-            <a:noFill/>
-          </a:ln>
-          <a:effectLst/>
-        </p:spPr>
-        <p:style>
-          <a:lnRef idx="1">
-            <a:schemeClr val="accent1"/>
-          </a:lnRef>
-          <a:fillRef idx="3">
-            <a:schemeClr val="accent1"/>
-          </a:fillRef>
-          <a:effectRef idx="2">
-            <a:schemeClr val="accent1"/>
-          </a:effectRef>
-          <a:fontRef idx="minor">
-            <a:schemeClr val="lt1"/>
-          </a:fontRef>
-        </p:style>
-        <p:txBody>
-          <a:bodyPr rtlCol="0" anchor="ctr"/>
-          <a:lstStyle/>
-          <a:p>
-            <a:pPr algn="ctr"/>
-          </a:p>
-        </p:txBody>
-      </p:sp>
-      <p:sp>
-        <p:nvSpPr>
-          <p:cNvPr id="3" name="TextBox 2"/>
-          <p:cNvSpPr txBox="1"/>
-          <p:nvPr/>
-        </p:nvSpPr>
-        <p:spPr>
-          <a:xfrm>
-            <a:off x="914400" y="2743200"/>
-            <a:ext cx="10515600" cy="1371600"/>
-          </a:xfrm>
-          <a:prstGeom prst="rect">
-            <a:avLst/>
-          </a:prstGeom>
-          <a:noFill/>
-        </p:spPr>
-        <p:txBody>
-          <a:bodyPr wrap="square" anchor="ctr" lIns="45720" rIns="45720">
-            <a:spAutoFit/>
-          </a:bodyPr>
-          <a:lstStyle/>
+              <a:t>Khởi động Văn bản 6: nghe bài thơ Tiếng thu</a:t>
+            </a:r>
+          </a:p>
           <a:p>
             <a:pPr algn="l">
               <a:spcAft>
@@ -14348,13 +14718,14 @@
               </a:spcAft>
             </a:pPr>
             <a:r>
-              <a:rPr sz="3600" b="1">
-                <a:solidFill>
-                  <a:srgbClr val="1E40AF"/>
+              <a:rPr sz="1600">
+                <a:solidFill>
+                  <a:srgbClr val="64748B"/>
                 </a:solidFill>
                 <a:latin typeface="Calibri"/>
-              </a:rPr>
-              <a:t>TIẾT 18: THỰC HÀNH TIẾNG VIỆT</a:t>
+                <a:hlinkClick r:id="rId3"/>
+              </a:rPr>
+              <a:t>https://www.youtube.com/watch?v=c5RVyHI_TeU</a:t>
             </a:r>
           </a:p>
         </p:txBody>
@@ -14511,7 +14882,7 @@
                 </a:solidFill>
                 <a:latin typeface="Arial"/>
               </a:rPr>
-              <a:t>LỖI DÙNG TỪ</a:t>
+              <a:t>TIẾNG THU VÀ TIẾNG THƠ</a:t>
             </a:r>
           </a:p>
         </p:txBody>
@@ -14629,7 +15000,7 @@
                 </a:solidFill>
                 <a:latin typeface="Calibri"/>
               </a:rPr>
-              <a:t>Tìm lỗi và sửa: “Đề tài, chủ đề, cảm hứng cũng như nội dung của các bài thơ hai-cư rất đa dạng, khác nhau.”</a:t>
+              <a:t>Theo Chu Văn Sơn, “tiếng thu” và “tiếng thơ” tương ứng với những bình diện nào? Khác biệt lớn nhất trong cách miêu tả thiên nhiên của Thơ mới so với thơ cổ điển?</a:t>
             </a:r>
           </a:p>
         </p:txBody>
@@ -14716,7 +15087,7 @@
                 </a:solidFill>
                 <a:latin typeface="Calibri"/>
               </a:rPr>
-              <a:t>💡 Có từ nào thừa, trùng nghĩa?</a:t>
+              <a:t>💡 Thơ cổ “nhìn” thiên nhiên, Thơ mới thì sao?</a:t>
             </a:r>
           </a:p>
         </p:txBody>
@@ -14873,7 +15244,7 @@
                 </a:solidFill>
                 <a:latin typeface="Arial"/>
               </a:rPr>
-              <a:t>LỖI DÙNG TỪ</a:t>
+              <a:t>TIẾNG THU VÀ TIẾNG THƠ</a:t>
             </a:r>
           </a:p>
         </p:txBody>
@@ -14996,7 +15367,7 @@
                 </a:solidFill>
                 <a:latin typeface="Calibri"/>
               </a:rPr>
-              <a:t>“cũng như nội dung” thừa (đề tài, chủ đề đã là nội dung).</a:t>
+              <a:t>“Tiếng thu”: điệu hồn (nội dung); “tiếng thơ”: âm hưởng ngôn từ (hình thức).</a:t>
             </a:r>
           </a:p>
           <a:p>
@@ -15017,7 +15388,7 @@
                 </a:solidFill>
                 <a:latin typeface="Calibri"/>
               </a:rPr>
-              <a:t>“đa dạng, khác nhau” trùng nghĩa.</a:t>
+              <a:t>Thơ cổ điển: thiên nhiên qua thị giác.</a:t>
             </a:r>
           </a:p>
           <a:p>
@@ -15038,7 +15409,28 @@
                 </a:solidFill>
                 <a:latin typeface="Calibri"/>
               </a:rPr>
-              <a:t>Sửa: “Đề tài, chủ đề, cảm hứng của các bài thơ hai-cư rất đa dạng.”</a:t>
+              <a:t>Thơ mới: thiên nhiên qua thính giác, cái tôi rung cảm.</a:t>
+            </a:r>
+          </a:p>
+          <a:p>
+            <a:pPr algn="l" marL="365760" indent="-365760">
+              <a:spcAft>
+                <a:spcPts val="800"/>
+              </a:spcAft>
+              <a:buClr>
+                <a:srgbClr val="1E40AF"/>
+              </a:buClr>
+              <a:buFont typeface="Arial"/>
+              <a:buChar char="•"/>
+            </a:pPr>
+            <a:r>
+              <a:rPr sz="2300">
+                <a:solidFill>
+                  <a:srgbClr val="1E293B"/>
+                </a:solidFill>
+                <a:latin typeface="Calibri"/>
+              </a:rPr>
+              <a:t>Thống kê 45 âm – 33 âm bằng → điệu êm đềm, tiêu tao.</a:t>
             </a:r>
           </a:p>
         </p:txBody>
@@ -15125,7 +15517,7 @@
                 </a:solidFill>
                 <a:latin typeface="Calibri"/>
               </a:rPr>
-              <a:t>Tránh lặp, thừa từ.</a:t>
+              <a:t>Sức hấp dẫn của thơ: cảm xúc hoà với nhạc điệu ngôn từ.</a:t>
             </a:r>
           </a:p>
         </p:txBody>
@@ -15144,7 +15536,7 @@
     <p:bg>
       <p:bgPr>
         <a:solidFill>
-          <a:srgbClr val="FFFFFF"/>
+          <a:srgbClr val="F8F9FA"/>
         </a:solidFill>
         <a:effectLst/>
       </p:bgPr>
@@ -15164,14 +15556,14 @@
         </p:nvSpPr>
         <p:spPr>
           <a:xfrm>
-            <a:off x="457200" y="384048"/>
-            <a:ext cx="109728" cy="658368"/>
+            <a:off x="548640" y="2926080"/>
+            <a:ext cx="164592" cy="1005840"/>
           </a:xfrm>
           <a:prstGeom prst="rect">
             <a:avLst/>
           </a:prstGeom>
           <a:solidFill>
-            <a:srgbClr val="1E40AF"/>
+            <a:srgbClr val="991B1B"/>
           </a:solidFill>
           <a:ln>
             <a:noFill/>
@@ -15202,67 +15594,14 @@
       </p:sp>
       <p:sp>
         <p:nvSpPr>
-          <p:cNvPr id="3" name="Rounded Rectangle 2"/>
-          <p:cNvSpPr/>
-          <p:nvPr/>
-        </p:nvSpPr>
-        <p:spPr>
-          <a:xfrm>
-            <a:off x="10253167" y="457200"/>
-            <a:ext cx="1389888" cy="457200"/>
-          </a:xfrm>
-          <a:prstGeom prst="roundRect">
-            <a:avLst/>
-          </a:prstGeom>
-          <a:solidFill>
-            <a:srgbClr val="1E40AF"/>
-          </a:solidFill>
-          <a:ln>
-            <a:noFill/>
-          </a:ln>
-          <a:effectLst/>
-        </p:spPr>
-        <p:style>
-          <a:lnRef idx="1">
-            <a:schemeClr val="accent1"/>
-          </a:lnRef>
-          <a:fillRef idx="3">
-            <a:schemeClr val="accent1"/>
-          </a:fillRef>
-          <a:effectRef idx="2">
-            <a:schemeClr val="accent1"/>
-          </a:effectRef>
-          <a:fontRef idx="minor">
-            <a:schemeClr val="lt1"/>
-          </a:fontRef>
-        </p:style>
-        <p:txBody>
-          <a:bodyPr rtlCol="0" anchor="ctr" wrap="none" tIns="0" bIns="0"/>
-          <a:lstStyle/>
-          <a:p>
-            <a:pPr algn="ctr"/>
-            <a:r>
-              <a:rPr sz="1400" b="1">
-                <a:solidFill>
-                  <a:srgbClr val="FFFFFF"/>
-                </a:solidFill>
-                <a:latin typeface="Arial"/>
-              </a:rPr>
-              <a:t>ĐỀ BÀI</a:t>
-            </a:r>
-          </a:p>
-        </p:txBody>
-      </p:sp>
-      <p:sp>
-        <p:nvSpPr>
-          <p:cNvPr id="4" name="TextBox 3"/>
+          <p:cNvPr id="3" name="TextBox 2"/>
           <p:cNvSpPr txBox="1"/>
           <p:nvPr/>
         </p:nvSpPr>
         <p:spPr>
           <a:xfrm>
-            <a:off x="731520" y="274320"/>
-            <a:ext cx="9582912" cy="868680"/>
+            <a:off x="914400" y="2743200"/>
+            <a:ext cx="10515600" cy="1371600"/>
           </a:xfrm>
           <a:prstGeom prst="rect">
             <a:avLst/>
@@ -15270,120 +15609,7 @@
           <a:noFill/>
         </p:spPr>
         <p:txBody>
-          <a:bodyPr wrap="square" anchor="ctr">
-            <a:spAutoFit/>
-          </a:bodyPr>
-          <a:lstStyle/>
-          <a:p>
-            <a:r>
-              <a:rPr sz="3600" b="1">
-                <a:solidFill>
-                  <a:srgbClr val="1E40AF"/>
-                </a:solidFill>
-                <a:latin typeface="Arial"/>
-              </a:rPr>
-              <a:t>LỖI TRẬT TỰ TỪ</a:t>
-            </a:r>
-          </a:p>
-        </p:txBody>
-      </p:sp>
-      <p:sp>
-        <p:nvSpPr>
-          <p:cNvPr id="5" name="Rectangle 4"/>
-          <p:cNvSpPr/>
-          <p:nvPr/>
-        </p:nvSpPr>
-        <p:spPr>
-          <a:xfrm>
-            <a:off x="457200" y="1207008"/>
-            <a:ext cx="11274552" cy="22000"/>
-          </a:xfrm>
-          <a:prstGeom prst="rect">
-            <a:avLst/>
-          </a:prstGeom>
-          <a:solidFill>
-            <a:srgbClr val="E2E8F0"/>
-          </a:solidFill>
-          <a:ln>
-            <a:noFill/>
-          </a:ln>
-          <a:effectLst/>
-        </p:spPr>
-        <p:style>
-          <a:lnRef idx="1">
-            <a:schemeClr val="accent1"/>
-          </a:lnRef>
-          <a:fillRef idx="3">
-            <a:schemeClr val="accent1"/>
-          </a:fillRef>
-          <a:effectRef idx="2">
-            <a:schemeClr val="accent1"/>
-          </a:effectRef>
-          <a:fontRef idx="minor">
-            <a:schemeClr val="lt1"/>
-          </a:fontRef>
-        </p:style>
-        <p:txBody>
-          <a:bodyPr rtlCol="0" anchor="ctr"/>
-          <a:lstStyle/>
-          <a:p>
-            <a:pPr algn="ctr"/>
-          </a:p>
-        </p:txBody>
-      </p:sp>
-      <p:sp>
-        <p:nvSpPr>
-          <p:cNvPr id="6" name="TextBox 5"/>
-          <p:cNvSpPr txBox="1"/>
-          <p:nvPr/>
-        </p:nvSpPr>
-        <p:spPr>
-          <a:xfrm>
-            <a:off x="457200" y="6355080"/>
-            <a:ext cx="11274552" cy="365760"/>
-          </a:xfrm>
-          <a:prstGeom prst="rect">
-            <a:avLst/>
-          </a:prstGeom>
-          <a:noFill/>
-        </p:spPr>
-        <p:txBody>
-          <a:bodyPr wrap="none">
-            <a:spAutoFit/>
-          </a:bodyPr>
-          <a:lstStyle/>
-          <a:p>
-            <a:pPr algn="r"/>
-            <a:r>
-              <a:rPr sz="1200">
-                <a:solidFill>
-                  <a:srgbClr val="64748B"/>
-                </a:solidFill>
-                <a:latin typeface="Calibri"/>
-              </a:rPr>
-              <a:t>Ngữ văn 10 · Bài 2: Vẻ Đẹp Của Thơ Ca          36</a:t>
-            </a:r>
-          </a:p>
-        </p:txBody>
-      </p:sp>
-      <p:sp>
-        <p:nvSpPr>
-          <p:cNvPr id="7" name="TextBox 6"/>
-          <p:cNvSpPr txBox="1"/>
-          <p:nvPr/>
-        </p:nvSpPr>
-        <p:spPr>
-          <a:xfrm>
-            <a:off x="731520" y="1463040"/>
-            <a:ext cx="10789920" cy="3566160"/>
-          </a:xfrm>
-          <a:prstGeom prst="rect">
-            <a:avLst/>
-          </a:prstGeom>
-          <a:noFill/>
-        </p:spPr>
-        <p:txBody>
-          <a:bodyPr wrap="square" anchor="t" lIns="45720" rIns="45720">
+          <a:bodyPr wrap="square" anchor="ctr" lIns="45720" rIns="45720">
             <a:spAutoFit/>
           </a:bodyPr>
           <a:lstStyle/>
@@ -15394,100 +15620,13 @@
               </a:spcAft>
             </a:pPr>
             <a:r>
-              <a:rPr sz="2600" b="1">
-                <a:solidFill>
-                  <a:srgbClr val="1E293B"/>
+              <a:rPr sz="3600" b="1">
+                <a:solidFill>
+                  <a:srgbClr val="1E40AF"/>
                 </a:solidFill>
                 <a:latin typeface="Calibri"/>
               </a:rPr>
-              <a:t>Câu nào mắc lỗi trật tự từ? Sửa lại: “Một bộ phận độc giả đông đảo đã không cảm nhận được cái mới ngay trong thơ Hàn Mặc Tử.”</a:t>
-            </a:r>
-          </a:p>
-        </p:txBody>
-      </p:sp>
-      <p:sp>
-        <p:nvSpPr>
-          <p:cNvPr id="8" name="Rounded Rectangle 7"/>
-          <p:cNvSpPr/>
-          <p:nvPr/>
-        </p:nvSpPr>
-        <p:spPr>
-          <a:xfrm>
-            <a:off x="731520" y="5120640"/>
-            <a:ext cx="10789920" cy="693420"/>
-          </a:xfrm>
-          <a:prstGeom prst="roundRect">
-            <a:avLst>
-              <a:gd name="adj" fmla="val 8000"/>
-            </a:avLst>
-          </a:prstGeom>
-          <a:solidFill>
-            <a:srgbClr val="EFF4FF"/>
-          </a:solidFill>
-          <a:ln w="19050">
-            <a:solidFill>
-              <a:srgbClr val="1E40AF"/>
-            </a:solidFill>
-          </a:ln>
-          <a:effectLst/>
-        </p:spPr>
-        <p:style>
-          <a:lnRef idx="1">
-            <a:schemeClr val="accent1"/>
-          </a:lnRef>
-          <a:fillRef idx="3">
-            <a:schemeClr val="accent1"/>
-          </a:fillRef>
-          <a:effectRef idx="2">
-            <a:schemeClr val="accent1"/>
-          </a:effectRef>
-          <a:fontRef idx="minor">
-            <a:schemeClr val="lt1"/>
-          </a:fontRef>
-        </p:style>
-        <p:txBody>
-          <a:bodyPr rtlCol="0" anchor="ctr"/>
-          <a:lstStyle/>
-          <a:p>
-            <a:pPr algn="ctr"/>
-          </a:p>
-        </p:txBody>
-      </p:sp>
-      <p:sp>
-        <p:nvSpPr>
-          <p:cNvPr id="9" name="TextBox 8"/>
-          <p:cNvSpPr txBox="1"/>
-          <p:nvPr/>
-        </p:nvSpPr>
-        <p:spPr>
-          <a:xfrm>
-            <a:off x="914400" y="5120640"/>
-            <a:ext cx="10424160" cy="693420"/>
-          </a:xfrm>
-          <a:prstGeom prst="rect">
-            <a:avLst/>
-          </a:prstGeom>
-          <a:noFill/>
-        </p:spPr>
-        <p:txBody>
-          <a:bodyPr wrap="square" anchor="ctr" lIns="45720" rIns="45720">
-            <a:spAutoFit/>
-          </a:bodyPr>
-          <a:lstStyle/>
-          <a:p>
-            <a:pPr algn="l">
-              <a:spcAft>
-                <a:spcPts val="400"/>
-              </a:spcAft>
-            </a:pPr>
-            <a:r>
-              <a:rPr sz="2200" b="1">
-                <a:solidFill>
-                  <a:srgbClr val="1E40AF"/>
-                </a:solidFill>
-                <a:latin typeface="Calibri"/>
-              </a:rPr>
-              <a:t>💡 “đông đảo” bổ nghĩa cho từ nào?</a:t>
+              <a:t>TIẾT 18: THỰC HÀNH TIẾNG VIỆT</a:t>
             </a:r>
           </a:p>
         </p:txBody>
@@ -15570,14 +15709,14 @@
         </p:nvSpPr>
         <p:spPr>
           <a:xfrm>
-            <a:off x="9942271" y="457200"/>
-            <a:ext cx="1700784" cy="457200"/>
+            <a:off x="10253167" y="457200"/>
+            <a:ext cx="1389888" cy="457200"/>
           </a:xfrm>
           <a:prstGeom prst="roundRect">
             <a:avLst/>
           </a:prstGeom>
           <a:solidFill>
-            <a:srgbClr val="991B1B"/>
+            <a:srgbClr val="1E40AF"/>
           </a:solidFill>
           <a:ln>
             <a:noFill/>
@@ -15610,7 +15749,7 @@
                 </a:solidFill>
                 <a:latin typeface="Arial"/>
               </a:rPr>
-              <a:t>LỜI GIẢI</a:t>
+              <a:t>ĐỀ BÀI</a:t>
             </a:r>
           </a:p>
         </p:txBody>
@@ -15624,7 +15763,7 @@
         <p:spPr>
           <a:xfrm>
             <a:off x="731520" y="274320"/>
-            <a:ext cx="9272016" cy="868680"/>
+            <a:ext cx="9582912" cy="868680"/>
           </a:xfrm>
           <a:prstGeom prst="rect">
             <a:avLst/>
@@ -15644,7 +15783,7 @@
                 </a:solidFill>
                 <a:latin typeface="Arial"/>
               </a:rPr>
-              <a:t>LỖI TRẬT TỰ TỪ</a:t>
+              <a:t>LỖI DÙNG TỪ</a:t>
             </a:r>
           </a:p>
         </p:txBody>
@@ -15737,7 +15876,7 @@
         <p:spPr>
           <a:xfrm>
             <a:off x="731520" y="1463040"/>
-            <a:ext cx="10789920" cy="3474720"/>
+            <a:ext cx="10789920" cy="3566160"/>
           </a:xfrm>
           <a:prstGeom prst="rect">
             <a:avLst/>
@@ -15750,66 +15889,19 @@
           </a:bodyPr>
           <a:lstStyle/>
           <a:p>
-            <a:pPr algn="l" marL="365760" indent="-365760">
+            <a:pPr algn="l">
               <a:spcAft>
                 <a:spcPts val="800"/>
               </a:spcAft>
-              <a:buClr>
-                <a:srgbClr val="1E40AF"/>
-              </a:buClr>
-              <a:buFont typeface="Arial"/>
-              <a:buChar char="•"/>
             </a:pPr>
             <a:r>
-              <a:rPr sz="2300">
+              <a:rPr sz="2600" b="1">
                 <a:solidFill>
                   <a:srgbClr val="1E293B"/>
                 </a:solidFill>
                 <a:latin typeface="Calibri"/>
               </a:rPr>
-              <a:t>Sai trật tự: “bộ phận độc giả đông đảo”.</a:t>
-            </a:r>
-          </a:p>
-          <a:p>
-            <a:pPr algn="l" marL="365760" indent="-365760">
-              <a:spcAft>
-                <a:spcPts val="800"/>
-              </a:spcAft>
-              <a:buClr>
-                <a:srgbClr val="1E40AF"/>
-              </a:buClr>
-              <a:buFont typeface="Arial"/>
-              <a:buChar char="•"/>
-            </a:pPr>
-            <a:r>
-              <a:rPr sz="2300">
-                <a:solidFill>
-                  <a:srgbClr val="1E293B"/>
-                </a:solidFill>
-                <a:latin typeface="Calibri"/>
-              </a:rPr>
-              <a:t>Sửa: “Một bộ phận đông đảo độc giả…”.</a:t>
-            </a:r>
-          </a:p>
-          <a:p>
-            <a:pPr algn="l" marL="365760" indent="-365760">
-              <a:spcAft>
-                <a:spcPts val="800"/>
-              </a:spcAft>
-              <a:buClr>
-                <a:srgbClr val="1E40AF"/>
-              </a:buClr>
-              <a:buFont typeface="Arial"/>
-              <a:buChar char="•"/>
-            </a:pPr>
-            <a:r>
-              <a:rPr sz="2300">
-                <a:solidFill>
-                  <a:srgbClr val="1E293B"/>
-                </a:solidFill>
-                <a:latin typeface="Calibri"/>
-              </a:rPr>
-              <a:t>Phân biệt lỗi trật tự từ với phép đảo ngữ trong văn học.</a:t>
+              <a:t>Tìm lỗi và sửa: “Đề tài, chủ đề, cảm hứng cũng như nội dung của các bài thơ hai-cư rất đa dạng, khác nhau.”</a:t>
             </a:r>
           </a:p>
         </p:txBody>
@@ -15822,8 +15914,8 @@
         </p:nvSpPr>
         <p:spPr>
           <a:xfrm>
-            <a:off x="731520" y="5074920"/>
-            <a:ext cx="10789920" cy="731520"/>
+            <a:off x="731520" y="5120640"/>
+            <a:ext cx="10789920" cy="693420"/>
           </a:xfrm>
           <a:prstGeom prst="roundRect">
             <a:avLst>
@@ -15831,11 +15923,11 @@
             </a:avLst>
           </a:prstGeom>
           <a:solidFill>
-            <a:srgbClr val="FEF2F2"/>
+            <a:srgbClr val="EFF4FF"/>
           </a:solidFill>
           <a:ln w="19050">
             <a:solidFill>
-              <a:srgbClr val="991B1B"/>
+              <a:srgbClr val="1E40AF"/>
             </a:solidFill>
           </a:ln>
           <a:effectLst/>
@@ -15870,8 +15962,8 @@
         </p:nvSpPr>
         <p:spPr>
           <a:xfrm>
-            <a:off x="914400" y="5074920"/>
-            <a:ext cx="10424160" cy="731520"/>
+            <a:off x="914400" y="5120640"/>
+            <a:ext cx="10424160" cy="693420"/>
           </a:xfrm>
           <a:prstGeom prst="rect">
             <a:avLst/>
@@ -15890,13 +15982,13 @@
               </a:spcAft>
             </a:pPr>
             <a:r>
-              <a:rPr sz="2400" b="1">
-                <a:solidFill>
-                  <a:srgbClr val="991B1B"/>
+              <a:rPr sz="2200" b="1">
+                <a:solidFill>
+                  <a:srgbClr val="1E40AF"/>
                 </a:solidFill>
                 <a:latin typeface="Calibri"/>
               </a:rPr>
-              <a:t>Sắp xếp từ đúng quy tắc ngữ pháp.</a:t>
+              <a:t>💡 Có từ nào thừa, trùng nghĩa?</a:t>
             </a:r>
           </a:p>
         </p:txBody>
@@ -15915,7 +16007,7 @@
     <p:bg>
       <p:bgPr>
         <a:solidFill>
-          <a:srgbClr val="F8F9FA"/>
+          <a:srgbClr val="FFFFFF"/>
         </a:solidFill>
         <a:effectLst/>
       </p:bgPr>
@@ -15935,10 +16027,54 @@
         </p:nvSpPr>
         <p:spPr>
           <a:xfrm>
-            <a:off x="548640" y="2926080"/>
-            <a:ext cx="164592" cy="1005840"/>
-          </a:xfrm>
-          <a:prstGeom prst="rect">
+            <a:off x="457200" y="384048"/>
+            <a:ext cx="109728" cy="658368"/>
+          </a:xfrm>
+          <a:prstGeom prst="rect">
+            <a:avLst/>
+          </a:prstGeom>
+          <a:solidFill>
+            <a:srgbClr val="1E40AF"/>
+          </a:solidFill>
+          <a:ln>
+            <a:noFill/>
+          </a:ln>
+          <a:effectLst/>
+        </p:spPr>
+        <p:style>
+          <a:lnRef idx="1">
+            <a:schemeClr val="accent1"/>
+          </a:lnRef>
+          <a:fillRef idx="3">
+            <a:schemeClr val="accent1"/>
+          </a:fillRef>
+          <a:effectRef idx="2">
+            <a:schemeClr val="accent1"/>
+          </a:effectRef>
+          <a:fontRef idx="minor">
+            <a:schemeClr val="lt1"/>
+          </a:fontRef>
+        </p:style>
+        <p:txBody>
+          <a:bodyPr rtlCol="0" anchor="ctr"/>
+          <a:lstStyle/>
+          <a:p>
+            <a:pPr algn="ctr"/>
+          </a:p>
+        </p:txBody>
+      </p:sp>
+      <p:sp>
+        <p:nvSpPr>
+          <p:cNvPr id="3" name="Rounded Rectangle 2"/>
+          <p:cNvSpPr/>
+          <p:nvPr/>
+        </p:nvSpPr>
+        <p:spPr>
+          <a:xfrm>
+            <a:off x="9942271" y="457200"/>
+            <a:ext cx="1700784" cy="457200"/>
+          </a:xfrm>
+          <a:prstGeom prst="roundRect">
             <a:avLst/>
           </a:prstGeom>
           <a:solidFill>
@@ -15964,6 +16100,93 @@
           </a:fontRef>
         </p:style>
         <p:txBody>
+          <a:bodyPr rtlCol="0" anchor="ctr" wrap="none" tIns="0" bIns="0"/>
+          <a:lstStyle/>
+          <a:p>
+            <a:pPr algn="ctr"/>
+            <a:r>
+              <a:rPr sz="1400" b="1">
+                <a:solidFill>
+                  <a:srgbClr val="FFFFFF"/>
+                </a:solidFill>
+                <a:latin typeface="Arial"/>
+              </a:rPr>
+              <a:t>LỜI GIẢI</a:t>
+            </a:r>
+          </a:p>
+        </p:txBody>
+      </p:sp>
+      <p:sp>
+        <p:nvSpPr>
+          <p:cNvPr id="4" name="TextBox 3"/>
+          <p:cNvSpPr txBox="1"/>
+          <p:nvPr/>
+        </p:nvSpPr>
+        <p:spPr>
+          <a:xfrm>
+            <a:off x="731520" y="274320"/>
+            <a:ext cx="9272016" cy="868680"/>
+          </a:xfrm>
+          <a:prstGeom prst="rect">
+            <a:avLst/>
+          </a:prstGeom>
+          <a:noFill/>
+        </p:spPr>
+        <p:txBody>
+          <a:bodyPr wrap="square" anchor="ctr">
+            <a:spAutoFit/>
+          </a:bodyPr>
+          <a:lstStyle/>
+          <a:p>
+            <a:r>
+              <a:rPr sz="3600" b="1">
+                <a:solidFill>
+                  <a:srgbClr val="1E40AF"/>
+                </a:solidFill>
+                <a:latin typeface="Arial"/>
+              </a:rPr>
+              <a:t>LỖI DÙNG TỪ</a:t>
+            </a:r>
+          </a:p>
+        </p:txBody>
+      </p:sp>
+      <p:sp>
+        <p:nvSpPr>
+          <p:cNvPr id="5" name="Rectangle 4"/>
+          <p:cNvSpPr/>
+          <p:nvPr/>
+        </p:nvSpPr>
+        <p:spPr>
+          <a:xfrm>
+            <a:off x="457200" y="1207008"/>
+            <a:ext cx="11274552" cy="22000"/>
+          </a:xfrm>
+          <a:prstGeom prst="rect">
+            <a:avLst/>
+          </a:prstGeom>
+          <a:solidFill>
+            <a:srgbClr val="E2E8F0"/>
+          </a:solidFill>
+          <a:ln>
+            <a:noFill/>
+          </a:ln>
+          <a:effectLst/>
+        </p:spPr>
+        <p:style>
+          <a:lnRef idx="1">
+            <a:schemeClr val="accent1"/>
+          </a:lnRef>
+          <a:fillRef idx="3">
+            <a:schemeClr val="accent1"/>
+          </a:fillRef>
+          <a:effectRef idx="2">
+            <a:schemeClr val="accent1"/>
+          </a:effectRef>
+          <a:fontRef idx="minor">
+            <a:schemeClr val="lt1"/>
+          </a:fontRef>
+        </p:style>
+        <p:txBody>
           <a:bodyPr rtlCol="0" anchor="ctr"/>
           <a:lstStyle/>
           <a:p>
@@ -15973,14 +16196,183 @@
       </p:sp>
       <p:sp>
         <p:nvSpPr>
-          <p:cNvPr id="3" name="TextBox 2"/>
+          <p:cNvPr id="6" name="TextBox 5"/>
           <p:cNvSpPr txBox="1"/>
           <p:nvPr/>
         </p:nvSpPr>
         <p:spPr>
           <a:xfrm>
-            <a:off x="914400" y="2743200"/>
-            <a:ext cx="10515600" cy="1371600"/>
+            <a:off x="457200" y="6355080"/>
+            <a:ext cx="11274552" cy="365760"/>
+          </a:xfrm>
+          <a:prstGeom prst="rect">
+            <a:avLst/>
+          </a:prstGeom>
+          <a:noFill/>
+        </p:spPr>
+        <p:txBody>
+          <a:bodyPr wrap="none">
+            <a:spAutoFit/>
+          </a:bodyPr>
+          <a:lstStyle/>
+          <a:p>
+            <a:pPr algn="r"/>
+            <a:r>
+              <a:rPr sz="1200">
+                <a:solidFill>
+                  <a:srgbClr val="64748B"/>
+                </a:solidFill>
+                <a:latin typeface="Calibri"/>
+              </a:rPr>
+              <a:t>Ngữ văn 10 · Bài 2: Vẻ Đẹp Của Thơ Ca          38</a:t>
+            </a:r>
+          </a:p>
+        </p:txBody>
+      </p:sp>
+      <p:sp>
+        <p:nvSpPr>
+          <p:cNvPr id="7" name="TextBox 6"/>
+          <p:cNvSpPr txBox="1"/>
+          <p:nvPr/>
+        </p:nvSpPr>
+        <p:spPr>
+          <a:xfrm>
+            <a:off x="731520" y="1463040"/>
+            <a:ext cx="10789920" cy="3474720"/>
+          </a:xfrm>
+          <a:prstGeom prst="rect">
+            <a:avLst/>
+          </a:prstGeom>
+          <a:noFill/>
+        </p:spPr>
+        <p:txBody>
+          <a:bodyPr wrap="square" anchor="t" lIns="45720" rIns="45720">
+            <a:spAutoFit/>
+          </a:bodyPr>
+          <a:lstStyle/>
+          <a:p>
+            <a:pPr algn="l" marL="365760" indent="-365760">
+              <a:spcAft>
+                <a:spcPts val="800"/>
+              </a:spcAft>
+              <a:buClr>
+                <a:srgbClr val="1E40AF"/>
+              </a:buClr>
+              <a:buFont typeface="Arial"/>
+              <a:buChar char="•"/>
+            </a:pPr>
+            <a:r>
+              <a:rPr sz="2300">
+                <a:solidFill>
+                  <a:srgbClr val="1E293B"/>
+                </a:solidFill>
+                <a:latin typeface="Calibri"/>
+              </a:rPr>
+              <a:t>“cũng như nội dung” thừa (đề tài, chủ đề đã là nội dung).</a:t>
+            </a:r>
+          </a:p>
+          <a:p>
+            <a:pPr algn="l" marL="365760" indent="-365760">
+              <a:spcAft>
+                <a:spcPts val="800"/>
+              </a:spcAft>
+              <a:buClr>
+                <a:srgbClr val="1E40AF"/>
+              </a:buClr>
+              <a:buFont typeface="Arial"/>
+              <a:buChar char="•"/>
+            </a:pPr>
+            <a:r>
+              <a:rPr sz="2300">
+                <a:solidFill>
+                  <a:srgbClr val="1E293B"/>
+                </a:solidFill>
+                <a:latin typeface="Calibri"/>
+              </a:rPr>
+              <a:t>“đa dạng, khác nhau” trùng nghĩa.</a:t>
+            </a:r>
+          </a:p>
+          <a:p>
+            <a:pPr algn="l" marL="365760" indent="-365760">
+              <a:spcAft>
+                <a:spcPts val="800"/>
+              </a:spcAft>
+              <a:buClr>
+                <a:srgbClr val="1E40AF"/>
+              </a:buClr>
+              <a:buFont typeface="Arial"/>
+              <a:buChar char="•"/>
+            </a:pPr>
+            <a:r>
+              <a:rPr sz="2300">
+                <a:solidFill>
+                  <a:srgbClr val="1E293B"/>
+                </a:solidFill>
+                <a:latin typeface="Calibri"/>
+              </a:rPr>
+              <a:t>Sửa: “Đề tài, chủ đề, cảm hứng của các bài thơ hai-cư rất đa dạng.”</a:t>
+            </a:r>
+          </a:p>
+        </p:txBody>
+      </p:sp>
+      <p:sp>
+        <p:nvSpPr>
+          <p:cNvPr id="8" name="Rounded Rectangle 7"/>
+          <p:cNvSpPr/>
+          <p:nvPr/>
+        </p:nvSpPr>
+        <p:spPr>
+          <a:xfrm>
+            <a:off x="731520" y="5074920"/>
+            <a:ext cx="10789920" cy="731520"/>
+          </a:xfrm>
+          <a:prstGeom prst="roundRect">
+            <a:avLst>
+              <a:gd name="adj" fmla="val 8000"/>
+            </a:avLst>
+          </a:prstGeom>
+          <a:solidFill>
+            <a:srgbClr val="FEF2F2"/>
+          </a:solidFill>
+          <a:ln w="19050">
+            <a:solidFill>
+              <a:srgbClr val="991B1B"/>
+            </a:solidFill>
+          </a:ln>
+          <a:effectLst/>
+        </p:spPr>
+        <p:style>
+          <a:lnRef idx="1">
+            <a:schemeClr val="accent1"/>
+          </a:lnRef>
+          <a:fillRef idx="3">
+            <a:schemeClr val="accent1"/>
+          </a:fillRef>
+          <a:effectRef idx="2">
+            <a:schemeClr val="accent1"/>
+          </a:effectRef>
+          <a:fontRef idx="minor">
+            <a:schemeClr val="lt1"/>
+          </a:fontRef>
+        </p:style>
+        <p:txBody>
+          <a:bodyPr rtlCol="0" anchor="ctr"/>
+          <a:lstStyle/>
+          <a:p>
+            <a:pPr algn="ctr"/>
+          </a:p>
+        </p:txBody>
+      </p:sp>
+      <p:sp>
+        <p:nvSpPr>
+          <p:cNvPr id="9" name="TextBox 8"/>
+          <p:cNvSpPr txBox="1"/>
+          <p:nvPr/>
+        </p:nvSpPr>
+        <p:spPr>
+          <a:xfrm>
+            <a:off x="914400" y="5074920"/>
+            <a:ext cx="10424160" cy="731520"/>
           </a:xfrm>
           <a:prstGeom prst="rect">
             <a:avLst/>
@@ -15995,17 +16387,17 @@
           <a:p>
             <a:pPr algn="l">
               <a:spcAft>
-                <a:spcPts val="800"/>
+                <a:spcPts val="400"/>
               </a:spcAft>
             </a:pPr>
             <a:r>
-              <a:rPr sz="3600" b="1">
-                <a:solidFill>
-                  <a:srgbClr val="1E40AF"/>
+              <a:rPr sz="2400" b="1">
+                <a:solidFill>
+                  <a:srgbClr val="991B1B"/>
                 </a:solidFill>
                 <a:latin typeface="Calibri"/>
               </a:rPr>
-              <a:t>TIẾT 19 – 22: VIẾT – NÓI VÀ NGHE</a:t>
+              <a:t>Tránh lặp, thừa từ.</a:t>
             </a:r>
           </a:p>
         </p:txBody>
@@ -16088,14 +16480,14 @@
         </p:nvSpPr>
         <p:spPr>
           <a:xfrm>
-            <a:off x="10097719" y="457200"/>
-            <a:ext cx="1545336" cy="457200"/>
+            <a:off x="10253167" y="457200"/>
+            <a:ext cx="1389888" cy="457200"/>
           </a:xfrm>
           <a:prstGeom prst="roundRect">
             <a:avLst/>
           </a:prstGeom>
           <a:solidFill>
-            <a:srgbClr val="166534"/>
+            <a:srgbClr val="1E40AF"/>
           </a:solidFill>
           <a:ln>
             <a:noFill/>
@@ -16128,7 +16520,7 @@
                 </a:solidFill>
                 <a:latin typeface="Arial"/>
               </a:rPr>
-              <a:t>GHI NHỚ</a:t>
+              <a:t>ĐỀ BÀI</a:t>
             </a:r>
           </a:p>
         </p:txBody>
@@ -16142,7 +16534,7 @@
         <p:spPr>
           <a:xfrm>
             <a:off x="731520" y="274320"/>
-            <a:ext cx="9427464" cy="868680"/>
+            <a:ext cx="9582912" cy="868680"/>
           </a:xfrm>
           <a:prstGeom prst="rect">
             <a:avLst/>
@@ -16162,7 +16554,7 @@
                 </a:solidFill>
                 <a:latin typeface="Arial"/>
               </a:rPr>
-              <a:t>YÊU CẦU BÀI PHÂN TÍCH THƠ</a:t>
+              <a:t>LỖI TRẬT TỰ TỪ</a:t>
             </a:r>
           </a:p>
         </p:txBody>
@@ -16255,7 +16647,7 @@
         <p:spPr>
           <a:xfrm>
             <a:off x="731520" y="1463040"/>
-            <a:ext cx="10789920" cy="4754880"/>
+            <a:ext cx="10789920" cy="3566160"/>
           </a:xfrm>
           <a:prstGeom prst="rect">
             <a:avLst/>
@@ -16268,87 +16660,106 @@
           </a:bodyPr>
           <a:lstStyle/>
           <a:p>
-            <a:pPr algn="l" marL="365760" indent="-365760">
+            <a:pPr algn="l">
               <a:spcAft>
                 <a:spcPts val="800"/>
               </a:spcAft>
-              <a:buClr>
-                <a:srgbClr val="1E40AF"/>
-              </a:buClr>
-              <a:buFont typeface="Arial"/>
-              <a:buChar char="•"/>
             </a:pPr>
             <a:r>
-              <a:rPr sz="2400">
+              <a:rPr sz="2600" b="1">
                 <a:solidFill>
                   <a:srgbClr val="1E293B"/>
                 </a:solidFill>
                 <a:latin typeface="Calibri"/>
               </a:rPr>
-              <a:t>Giới thiệu bài thơ: tác giả, hoàn cảnh, trào lưu, lí do chọn.</a:t>
-            </a:r>
-          </a:p>
-          <a:p>
-            <a:pPr algn="l" marL="365760" indent="-365760">
+              <a:t>Câu nào mắc lỗi trật tự từ? Sửa lại: “Một bộ phận độc giả đông đảo đã không cảm nhận được cái mới ngay trong thơ Hàn Mặc Tử.”</a:t>
+            </a:r>
+          </a:p>
+        </p:txBody>
+      </p:sp>
+      <p:sp>
+        <p:nvSpPr>
+          <p:cNvPr id="8" name="Rounded Rectangle 7"/>
+          <p:cNvSpPr/>
+          <p:nvPr/>
+        </p:nvSpPr>
+        <p:spPr>
+          <a:xfrm>
+            <a:off x="731520" y="5120640"/>
+            <a:ext cx="10789920" cy="693420"/>
+          </a:xfrm>
+          <a:prstGeom prst="roundRect">
+            <a:avLst>
+              <a:gd name="adj" fmla="val 8000"/>
+            </a:avLst>
+          </a:prstGeom>
+          <a:solidFill>
+            <a:srgbClr val="EFF4FF"/>
+          </a:solidFill>
+          <a:ln w="19050">
+            <a:solidFill>
+              <a:srgbClr val="1E40AF"/>
+            </a:solidFill>
+          </a:ln>
+          <a:effectLst/>
+        </p:spPr>
+        <p:style>
+          <a:lnRef idx="1">
+            <a:schemeClr val="accent1"/>
+          </a:lnRef>
+          <a:fillRef idx="3">
+            <a:schemeClr val="accent1"/>
+          </a:fillRef>
+          <a:effectRef idx="2">
+            <a:schemeClr val="accent1"/>
+          </a:effectRef>
+          <a:fontRef idx="minor">
+            <a:schemeClr val="lt1"/>
+          </a:fontRef>
+        </p:style>
+        <p:txBody>
+          <a:bodyPr rtlCol="0" anchor="ctr"/>
+          <a:lstStyle/>
+          <a:p>
+            <a:pPr algn="ctr"/>
+          </a:p>
+        </p:txBody>
+      </p:sp>
+      <p:sp>
+        <p:nvSpPr>
+          <p:cNvPr id="9" name="TextBox 8"/>
+          <p:cNvSpPr txBox="1"/>
+          <p:nvPr/>
+        </p:nvSpPr>
+        <p:spPr>
+          <a:xfrm>
+            <a:off x="914400" y="5120640"/>
+            <a:ext cx="10424160" cy="693420"/>
+          </a:xfrm>
+          <a:prstGeom prst="rect">
+            <a:avLst/>
+          </a:prstGeom>
+          <a:noFill/>
+        </p:spPr>
+        <p:txBody>
+          <a:bodyPr wrap="square" anchor="ctr" lIns="45720" rIns="45720">
+            <a:spAutoFit/>
+          </a:bodyPr>
+          <a:lstStyle/>
+          <a:p>
+            <a:pPr algn="l">
               <a:spcAft>
-                <a:spcPts val="800"/>
+                <a:spcPts val="400"/>
               </a:spcAft>
-              <a:buClr>
-                <a:srgbClr val="1E40AF"/>
-              </a:buClr>
-              <a:buFont typeface="Arial"/>
-              <a:buChar char="•"/>
             </a:pPr>
             <a:r>
-              <a:rPr sz="2400">
-                <a:solidFill>
-                  <a:srgbClr val="1E293B"/>
+              <a:rPr sz="2200" b="1">
+                <a:solidFill>
+                  <a:srgbClr val="1E40AF"/>
                 </a:solidFill>
                 <a:latin typeface="Calibri"/>
               </a:rPr>
-              <a:t>Phân tích nét đặc sắc: từ ngữ, hình ảnh, nhịp điệu, nhạc điệu, mạch cảm xúc.</a:t>
-            </a:r>
-          </a:p>
-          <a:p>
-            <a:pPr algn="l" marL="365760" indent="-365760">
-              <a:spcAft>
-                <a:spcPts val="800"/>
-              </a:spcAft>
-              <a:buClr>
-                <a:srgbClr val="1E40AF"/>
-              </a:buClr>
-              <a:buFont typeface="Arial"/>
-              <a:buChar char="•"/>
-            </a:pPr>
-            <a:r>
-              <a:rPr sz="2400">
-                <a:solidFill>
-                  <a:srgbClr val="1E293B"/>
-                </a:solidFill>
-                <a:latin typeface="Calibri"/>
-              </a:rPr>
-              <a:t>Đánh giá giá trị nghệ thuật và ý nghĩa nhân sinh.</a:t>
-            </a:r>
-          </a:p>
-          <a:p>
-            <a:pPr algn="l" marL="365760" indent="-365760">
-              <a:spcAft>
-                <a:spcPts val="800"/>
-              </a:spcAft>
-              <a:buClr>
-                <a:srgbClr val="1E40AF"/>
-              </a:buClr>
-              <a:buFont typeface="Arial"/>
-              <a:buChar char="•"/>
-            </a:pPr>
-            <a:r>
-              <a:rPr sz="2400">
-                <a:solidFill>
-                  <a:srgbClr val="1E293B"/>
-                </a:solidFill>
-                <a:latin typeface="Calibri"/>
-              </a:rPr>
-              <a:t>Tránh diễn xuôi bài thơ.</a:t>
+              <a:t>💡 “đông đảo” bổ nghĩa cho từ nào?</a:t>
             </a:r>
           </a:p>
         </p:txBody>
@@ -16722,14 +17133,14 @@
         </p:nvSpPr>
         <p:spPr>
           <a:xfrm>
-            <a:off x="10253167" y="457200"/>
-            <a:ext cx="1389888" cy="457200"/>
+            <a:off x="9942271" y="457200"/>
+            <a:ext cx="1700784" cy="457200"/>
           </a:xfrm>
           <a:prstGeom prst="roundRect">
             <a:avLst/>
           </a:prstGeom>
           <a:solidFill>
-            <a:srgbClr val="1E40AF"/>
+            <a:srgbClr val="991B1B"/>
           </a:solidFill>
           <a:ln>
             <a:noFill/>
@@ -16762,7 +17173,7 @@
                 </a:solidFill>
                 <a:latin typeface="Arial"/>
               </a:rPr>
-              <a:t>ĐỀ BÀI</a:t>
+              <a:t>LỜI GIẢI</a:t>
             </a:r>
           </a:p>
         </p:txBody>
@@ -16776,7 +17187,7 @@
         <p:spPr>
           <a:xfrm>
             <a:off x="731520" y="274320"/>
-            <a:ext cx="9582912" cy="868680"/>
+            <a:ext cx="9272016" cy="868680"/>
           </a:xfrm>
           <a:prstGeom prst="rect">
             <a:avLst/>
@@ -16796,7 +17207,7 @@
                 </a:solidFill>
                 <a:latin typeface="Arial"/>
               </a:rPr>
-              <a:t>ĐỀ THỰC HÀNH VIẾT</a:t>
+              <a:t>LỖI TRẬT TỰ TỪ</a:t>
             </a:r>
           </a:p>
         </p:txBody>
@@ -16889,7 +17300,7 @@
         <p:spPr>
           <a:xfrm>
             <a:off x="731520" y="1463040"/>
-            <a:ext cx="10789920" cy="3566160"/>
+            <a:ext cx="10789920" cy="3474720"/>
           </a:xfrm>
           <a:prstGeom prst="rect">
             <a:avLst/>
@@ -16902,19 +17313,66 @@
           </a:bodyPr>
           <a:lstStyle/>
           <a:p>
-            <a:pPr algn="l">
+            <a:pPr algn="l" marL="365760" indent="-365760">
               <a:spcAft>
                 <a:spcPts val="800"/>
               </a:spcAft>
+              <a:buClr>
+                <a:srgbClr val="1E40AF"/>
+              </a:buClr>
+              <a:buFont typeface="Arial"/>
+              <a:buChar char="•"/>
             </a:pPr>
             <a:r>
-              <a:rPr sz="2600" b="1">
+              <a:rPr sz="2300">
                 <a:solidFill>
                   <a:srgbClr val="1E293B"/>
                 </a:solidFill>
                 <a:latin typeface="Calibri"/>
               </a:rPr>
-              <a:t>Phân tích, đánh giá chủ đề và nét đặc sắc nghệ thuật của bài thơ Mùa xuân chín (Hàn Mặc Tử).</a:t>
+              <a:t>Sai trật tự: “bộ phận độc giả đông đảo”.</a:t>
+            </a:r>
+          </a:p>
+          <a:p>
+            <a:pPr algn="l" marL="365760" indent="-365760">
+              <a:spcAft>
+                <a:spcPts val="800"/>
+              </a:spcAft>
+              <a:buClr>
+                <a:srgbClr val="1E40AF"/>
+              </a:buClr>
+              <a:buFont typeface="Arial"/>
+              <a:buChar char="•"/>
+            </a:pPr>
+            <a:r>
+              <a:rPr sz="2300">
+                <a:solidFill>
+                  <a:srgbClr val="1E293B"/>
+                </a:solidFill>
+                <a:latin typeface="Calibri"/>
+              </a:rPr>
+              <a:t>Sửa: “Một bộ phận đông đảo độc giả…”.</a:t>
+            </a:r>
+          </a:p>
+          <a:p>
+            <a:pPr algn="l" marL="365760" indent="-365760">
+              <a:spcAft>
+                <a:spcPts val="800"/>
+              </a:spcAft>
+              <a:buClr>
+                <a:srgbClr val="1E40AF"/>
+              </a:buClr>
+              <a:buFont typeface="Arial"/>
+              <a:buChar char="•"/>
+            </a:pPr>
+            <a:r>
+              <a:rPr sz="2300">
+                <a:solidFill>
+                  <a:srgbClr val="1E293B"/>
+                </a:solidFill>
+                <a:latin typeface="Calibri"/>
+              </a:rPr>
+              <a:t>Phân biệt lỗi trật tự từ với phép đảo ngữ trong văn học.</a:t>
             </a:r>
           </a:p>
         </p:txBody>
@@ -16927,8 +17385,8 @@
         </p:nvSpPr>
         <p:spPr>
           <a:xfrm>
-            <a:off x="731520" y="5120640"/>
-            <a:ext cx="10789920" cy="693420"/>
+            <a:off x="731520" y="5074920"/>
+            <a:ext cx="10789920" cy="731520"/>
           </a:xfrm>
           <a:prstGeom prst="roundRect">
             <a:avLst>
@@ -16936,11 +17394,11 @@
             </a:avLst>
           </a:prstGeom>
           <a:solidFill>
-            <a:srgbClr val="EFF4FF"/>
+            <a:srgbClr val="FEF2F2"/>
           </a:solidFill>
           <a:ln w="19050">
             <a:solidFill>
-              <a:srgbClr val="1E40AF"/>
+              <a:srgbClr val="991B1B"/>
             </a:solidFill>
           </a:ln>
           <a:effectLst/>
@@ -16975,8 +17433,8 @@
         </p:nvSpPr>
         <p:spPr>
           <a:xfrm>
-            <a:off x="914400" y="5120640"/>
-            <a:ext cx="10424160" cy="693420"/>
+            <a:off x="914400" y="5074920"/>
+            <a:ext cx="10424160" cy="731520"/>
           </a:xfrm>
           <a:prstGeom prst="rect">
             <a:avLst/>
@@ -16995,13 +17453,13 @@
               </a:spcAft>
             </a:pPr>
             <a:r>
-              <a:rPr sz="2200" b="1">
-                <a:solidFill>
-                  <a:srgbClr val="1E40AF"/>
+              <a:rPr sz="2400" b="1">
+                <a:solidFill>
+                  <a:srgbClr val="991B1B"/>
                 </a:solidFill>
                 <a:latin typeface="Calibri"/>
               </a:rPr>
-              <a:t>💡 Lập dàn ý theo mạch khổ thơ hoặc theo luận điểm.</a:t>
+              <a:t>Sắp xếp từ đúng quy tắc ngữ pháp.</a:t>
             </a:r>
           </a:p>
         </p:txBody>
@@ -17020,7 +17478,7 @@
     <p:bg>
       <p:bgPr>
         <a:solidFill>
-          <a:srgbClr val="FFFFFF"/>
+          <a:srgbClr val="F8F9FA"/>
         </a:solidFill>
         <a:effectLst/>
       </p:bgPr>
@@ -17040,54 +17498,10 @@
         </p:nvSpPr>
         <p:spPr>
           <a:xfrm>
-            <a:off x="457200" y="384048"/>
-            <a:ext cx="109728" cy="658368"/>
-          </a:xfrm>
-          <a:prstGeom prst="rect">
-            <a:avLst/>
-          </a:prstGeom>
-          <a:solidFill>
-            <a:srgbClr val="1E40AF"/>
-          </a:solidFill>
-          <a:ln>
-            <a:noFill/>
-          </a:ln>
-          <a:effectLst/>
-        </p:spPr>
-        <p:style>
-          <a:lnRef idx="1">
-            <a:schemeClr val="accent1"/>
-          </a:lnRef>
-          <a:fillRef idx="3">
-            <a:schemeClr val="accent1"/>
-          </a:fillRef>
-          <a:effectRef idx="2">
-            <a:schemeClr val="accent1"/>
-          </a:effectRef>
-          <a:fontRef idx="minor">
-            <a:schemeClr val="lt1"/>
-          </a:fontRef>
-        </p:style>
-        <p:txBody>
-          <a:bodyPr rtlCol="0" anchor="ctr"/>
-          <a:lstStyle/>
-          <a:p>
-            <a:pPr algn="ctr"/>
-          </a:p>
-        </p:txBody>
-      </p:sp>
-      <p:sp>
-        <p:nvSpPr>
-          <p:cNvPr id="3" name="Rounded Rectangle 2"/>
-          <p:cNvSpPr/>
-          <p:nvPr/>
-        </p:nvSpPr>
-        <p:spPr>
-          <a:xfrm>
-            <a:off x="9942271" y="457200"/>
-            <a:ext cx="1700784" cy="457200"/>
-          </a:xfrm>
-          <a:prstGeom prst="roundRect">
+            <a:off x="548640" y="2926080"/>
+            <a:ext cx="164592" cy="1005840"/>
+          </a:xfrm>
+          <a:prstGeom prst="rect">
             <a:avLst/>
           </a:prstGeom>
           <a:solidFill>
@@ -17113,32 +17527,23 @@
           </a:fontRef>
         </p:style>
         <p:txBody>
-          <a:bodyPr rtlCol="0" anchor="ctr" wrap="none" tIns="0" bIns="0"/>
+          <a:bodyPr rtlCol="0" anchor="ctr"/>
           <a:lstStyle/>
           <a:p>
             <a:pPr algn="ctr"/>
-            <a:r>
-              <a:rPr sz="1400" b="1">
-                <a:solidFill>
-                  <a:srgbClr val="FFFFFF"/>
-                </a:solidFill>
-                <a:latin typeface="Arial"/>
-              </a:rPr>
-              <a:t>LỜI GIẢI</a:t>
-            </a:r>
-          </a:p>
-        </p:txBody>
-      </p:sp>
-      <p:sp>
-        <p:nvSpPr>
-          <p:cNvPr id="4" name="TextBox 3"/>
+          </a:p>
+        </p:txBody>
+      </p:sp>
+      <p:sp>
+        <p:nvSpPr>
+          <p:cNvPr id="3" name="TextBox 2"/>
           <p:cNvSpPr txBox="1"/>
           <p:nvPr/>
         </p:nvSpPr>
         <p:spPr>
           <a:xfrm>
-            <a:off x="731520" y="274320"/>
-            <a:ext cx="9272016" cy="868680"/>
+            <a:off x="914400" y="2743200"/>
+            <a:ext cx="10515600" cy="1371600"/>
           </a:xfrm>
           <a:prstGeom prst="rect">
             <a:avLst/>
@@ -17146,292 +17551,24 @@
           <a:noFill/>
         </p:spPr>
         <p:txBody>
-          <a:bodyPr wrap="square" anchor="ctr">
+          <a:bodyPr wrap="square" anchor="ctr" lIns="45720" rIns="45720">
             <a:spAutoFit/>
           </a:bodyPr>
           <a:lstStyle/>
           <a:p>
-            <a:r>
-              <a:rPr sz="3600" b="1">
-                <a:solidFill>
-                  <a:srgbClr val="1E40AF"/>
-                </a:solidFill>
-                <a:latin typeface="Arial"/>
-              </a:rPr>
-              <a:t>ĐỀ THỰC HÀNH VIẾT</a:t>
-            </a:r>
-          </a:p>
-        </p:txBody>
-      </p:sp>
-      <p:sp>
-        <p:nvSpPr>
-          <p:cNvPr id="5" name="Rectangle 4"/>
-          <p:cNvSpPr/>
-          <p:nvPr/>
-        </p:nvSpPr>
-        <p:spPr>
-          <a:xfrm>
-            <a:off x="457200" y="1207008"/>
-            <a:ext cx="11274552" cy="22000"/>
-          </a:xfrm>
-          <a:prstGeom prst="rect">
-            <a:avLst/>
-          </a:prstGeom>
-          <a:solidFill>
-            <a:srgbClr val="E2E8F0"/>
-          </a:solidFill>
-          <a:ln>
-            <a:noFill/>
-          </a:ln>
-          <a:effectLst/>
-        </p:spPr>
-        <p:style>
-          <a:lnRef idx="1">
-            <a:schemeClr val="accent1"/>
-          </a:lnRef>
-          <a:fillRef idx="3">
-            <a:schemeClr val="accent1"/>
-          </a:fillRef>
-          <a:effectRef idx="2">
-            <a:schemeClr val="accent1"/>
-          </a:effectRef>
-          <a:fontRef idx="minor">
-            <a:schemeClr val="lt1"/>
-          </a:fontRef>
-        </p:style>
-        <p:txBody>
-          <a:bodyPr rtlCol="0" anchor="ctr"/>
-          <a:lstStyle/>
-          <a:p>
-            <a:pPr algn="ctr"/>
-          </a:p>
-        </p:txBody>
-      </p:sp>
-      <p:sp>
-        <p:nvSpPr>
-          <p:cNvPr id="6" name="TextBox 5"/>
-          <p:cNvSpPr txBox="1"/>
-          <p:nvPr/>
-        </p:nvSpPr>
-        <p:spPr>
-          <a:xfrm>
-            <a:off x="457200" y="6355080"/>
-            <a:ext cx="11274552" cy="365760"/>
-          </a:xfrm>
-          <a:prstGeom prst="rect">
-            <a:avLst/>
-          </a:prstGeom>
-          <a:noFill/>
-        </p:spPr>
-        <p:txBody>
-          <a:bodyPr wrap="none">
-            <a:spAutoFit/>
-          </a:bodyPr>
-          <a:lstStyle/>
-          <a:p>
-            <a:pPr algn="r"/>
-            <a:r>
-              <a:rPr sz="1200">
-                <a:solidFill>
-                  <a:srgbClr val="64748B"/>
-                </a:solidFill>
-                <a:latin typeface="Calibri"/>
-              </a:rPr>
-              <a:t>Ngữ văn 10 · Bài 2: Vẻ Đẹp Của Thơ Ca          41</a:t>
-            </a:r>
-          </a:p>
-        </p:txBody>
-      </p:sp>
-      <p:sp>
-        <p:nvSpPr>
-          <p:cNvPr id="7" name="TextBox 6"/>
-          <p:cNvSpPr txBox="1"/>
-          <p:nvPr/>
-        </p:nvSpPr>
-        <p:spPr>
-          <a:xfrm>
-            <a:off x="731520" y="1463040"/>
-            <a:ext cx="10789920" cy="3474720"/>
-          </a:xfrm>
-          <a:prstGeom prst="rect">
-            <a:avLst/>
-          </a:prstGeom>
-          <a:noFill/>
-        </p:spPr>
-        <p:txBody>
-          <a:bodyPr wrap="square" anchor="t" lIns="45720" rIns="45720">
-            <a:spAutoFit/>
-          </a:bodyPr>
-          <a:lstStyle/>
-          <a:p>
-            <a:pPr algn="l" marL="365760" indent="-365760">
+            <a:pPr algn="l">
               <a:spcAft>
                 <a:spcPts val="800"/>
               </a:spcAft>
-              <a:buClr>
-                <a:srgbClr val="1E40AF"/>
-              </a:buClr>
-              <a:buFont typeface="Arial"/>
-              <a:buChar char="•"/>
             </a:pPr>
             <a:r>
-              <a:rPr sz="2300">
-                <a:solidFill>
-                  <a:srgbClr val="1E293B"/>
+              <a:rPr sz="3600" b="1">
+                <a:solidFill>
+                  <a:srgbClr val="1E40AF"/>
                 </a:solidFill>
                 <a:latin typeface="Calibri"/>
               </a:rPr>
-              <a:t>MB: giới thiệu Hàn Mặc Tử, bài thơ.</a:t>
-            </a:r>
-          </a:p>
-          <a:p>
-            <a:pPr algn="l" marL="365760" indent="-365760">
-              <a:spcAft>
-                <a:spcPts val="800"/>
-              </a:spcAft>
-              <a:buClr>
-                <a:srgbClr val="1E40AF"/>
-              </a:buClr>
-              <a:buFont typeface="Arial"/>
-              <a:buChar char="•"/>
-            </a:pPr>
-            <a:r>
-              <a:rPr sz="2300">
-                <a:solidFill>
-                  <a:srgbClr val="1E293B"/>
-                </a:solidFill>
-                <a:latin typeface="Calibri"/>
-              </a:rPr>
-              <a:t>TB: bức tranh xuân “chín” → âm thanh, con người → nỗi nhớ làng → nghệ thuật.</a:t>
-            </a:r>
-          </a:p>
-          <a:p>
-            <a:pPr algn="l" marL="365760" indent="-365760">
-              <a:spcAft>
-                <a:spcPts val="800"/>
-              </a:spcAft>
-              <a:buClr>
-                <a:srgbClr val="1E40AF"/>
-              </a:buClr>
-              <a:buFont typeface="Arial"/>
-              <a:buChar char="•"/>
-            </a:pPr>
-            <a:r>
-              <a:rPr sz="2300">
-                <a:solidFill>
-                  <a:srgbClr val="1E293B"/>
-                </a:solidFill>
-                <a:latin typeface="Calibri"/>
-              </a:rPr>
-              <a:t>Đánh giá giá trị nghệ thuật, ý nghĩa nhân sinh.</a:t>
-            </a:r>
-          </a:p>
-          <a:p>
-            <a:pPr algn="l" marL="365760" indent="-365760">
-              <a:spcAft>
-                <a:spcPts val="800"/>
-              </a:spcAft>
-              <a:buClr>
-                <a:srgbClr val="1E40AF"/>
-              </a:buClr>
-              <a:buFont typeface="Arial"/>
-              <a:buChar char="•"/>
-            </a:pPr>
-            <a:r>
-              <a:rPr sz="2300">
-                <a:solidFill>
-                  <a:srgbClr val="1E293B"/>
-                </a:solidFill>
-                <a:latin typeface="Calibri"/>
-              </a:rPr>
-              <a:t>KB: khẳng định giá trị, cảm nghĩ riêng.</a:t>
-            </a:r>
-          </a:p>
-        </p:txBody>
-      </p:sp>
-      <p:sp>
-        <p:nvSpPr>
-          <p:cNvPr id="8" name="Rounded Rectangle 7"/>
-          <p:cNvSpPr/>
-          <p:nvPr/>
-        </p:nvSpPr>
-        <p:spPr>
-          <a:xfrm>
-            <a:off x="731520" y="5074920"/>
-            <a:ext cx="10789920" cy="731520"/>
-          </a:xfrm>
-          <a:prstGeom prst="roundRect">
-            <a:avLst>
-              <a:gd name="adj" fmla="val 8000"/>
-            </a:avLst>
-          </a:prstGeom>
-          <a:solidFill>
-            <a:srgbClr val="FEF2F2"/>
-          </a:solidFill>
-          <a:ln w="19050">
-            <a:solidFill>
-              <a:srgbClr val="991B1B"/>
-            </a:solidFill>
-          </a:ln>
-          <a:effectLst/>
-        </p:spPr>
-        <p:style>
-          <a:lnRef idx="1">
-            <a:schemeClr val="accent1"/>
-          </a:lnRef>
-          <a:fillRef idx="3">
-            <a:schemeClr val="accent1"/>
-          </a:fillRef>
-          <a:effectRef idx="2">
-            <a:schemeClr val="accent1"/>
-          </a:effectRef>
-          <a:fontRef idx="minor">
-            <a:schemeClr val="lt1"/>
-          </a:fontRef>
-        </p:style>
-        <p:txBody>
-          <a:bodyPr rtlCol="0" anchor="ctr"/>
-          <a:lstStyle/>
-          <a:p>
-            <a:pPr algn="ctr"/>
-          </a:p>
-        </p:txBody>
-      </p:sp>
-      <p:sp>
-        <p:nvSpPr>
-          <p:cNvPr id="9" name="TextBox 8"/>
-          <p:cNvSpPr txBox="1"/>
-          <p:nvPr/>
-        </p:nvSpPr>
-        <p:spPr>
-          <a:xfrm>
-            <a:off x="914400" y="5074920"/>
-            <a:ext cx="10424160" cy="731520"/>
-          </a:xfrm>
-          <a:prstGeom prst="rect">
-            <a:avLst/>
-          </a:prstGeom>
-          <a:noFill/>
-        </p:spPr>
-        <p:txBody>
-          <a:bodyPr wrap="square" anchor="ctr" lIns="45720" rIns="45720">
-            <a:spAutoFit/>
-          </a:bodyPr>
-          <a:lstStyle/>
-          <a:p>
-            <a:pPr algn="l">
-              <a:spcAft>
-                <a:spcPts val="400"/>
-              </a:spcAft>
-            </a:pPr>
-            <a:r>
-              <a:rPr sz="2400" b="1">
-                <a:solidFill>
-                  <a:srgbClr val="991B1B"/>
-                </a:solidFill>
-                <a:latin typeface="Calibri"/>
-              </a:rPr>
-              <a:t>Gắn phân tích hình thức với cảm xúc.</a:t>
+              <a:t>TIẾT 19 – 22: VIẾT – NÓI VÀ NGHE</a:t>
             </a:r>
           </a:p>
         </p:txBody>
@@ -17464,6 +17601,103 @@
       <p:grpSpPr/>
       <p:sp>
         <p:nvSpPr>
+          <p:cNvPr id="2" name="Rectangle 1"/>
+          <p:cNvSpPr/>
+          <p:nvPr/>
+        </p:nvSpPr>
+        <p:spPr>
+          <a:xfrm>
+            <a:off x="457200" y="384048"/>
+            <a:ext cx="109728" cy="658368"/>
+          </a:xfrm>
+          <a:prstGeom prst="rect">
+            <a:avLst/>
+          </a:prstGeom>
+          <a:solidFill>
+            <a:srgbClr val="1E40AF"/>
+          </a:solidFill>
+          <a:ln>
+            <a:noFill/>
+          </a:ln>
+          <a:effectLst/>
+        </p:spPr>
+        <p:style>
+          <a:lnRef idx="1">
+            <a:schemeClr val="accent1"/>
+          </a:lnRef>
+          <a:fillRef idx="3">
+            <a:schemeClr val="accent1"/>
+          </a:fillRef>
+          <a:effectRef idx="2">
+            <a:schemeClr val="accent1"/>
+          </a:effectRef>
+          <a:fontRef idx="minor">
+            <a:schemeClr val="lt1"/>
+          </a:fontRef>
+        </p:style>
+        <p:txBody>
+          <a:bodyPr rtlCol="0" anchor="ctr"/>
+          <a:lstStyle/>
+          <a:p>
+            <a:pPr algn="ctr"/>
+          </a:p>
+        </p:txBody>
+      </p:sp>
+      <p:sp>
+        <p:nvSpPr>
+          <p:cNvPr id="3" name="Rounded Rectangle 2"/>
+          <p:cNvSpPr/>
+          <p:nvPr/>
+        </p:nvSpPr>
+        <p:spPr>
+          <a:xfrm>
+            <a:off x="10097719" y="457200"/>
+            <a:ext cx="1545336" cy="457200"/>
+          </a:xfrm>
+          <a:prstGeom prst="roundRect">
+            <a:avLst/>
+          </a:prstGeom>
+          <a:solidFill>
+            <a:srgbClr val="166534"/>
+          </a:solidFill>
+          <a:ln>
+            <a:noFill/>
+          </a:ln>
+          <a:effectLst/>
+        </p:spPr>
+        <p:style>
+          <a:lnRef idx="1">
+            <a:schemeClr val="accent1"/>
+          </a:lnRef>
+          <a:fillRef idx="3">
+            <a:schemeClr val="accent1"/>
+          </a:fillRef>
+          <a:effectRef idx="2">
+            <a:schemeClr val="accent1"/>
+          </a:effectRef>
+          <a:fontRef idx="minor">
+            <a:schemeClr val="lt1"/>
+          </a:fontRef>
+        </p:style>
+        <p:txBody>
+          <a:bodyPr rtlCol="0" anchor="ctr" wrap="none" tIns="0" bIns="0"/>
+          <a:lstStyle/>
+          <a:p>
+            <a:pPr algn="ctr"/>
+            <a:r>
+              <a:rPr sz="1400" b="1">
+                <a:solidFill>
+                  <a:srgbClr val="FFFFFF"/>
+                </a:solidFill>
+                <a:latin typeface="Arial"/>
+              </a:rPr>
+              <a:t>GHI NHỚ</a:t>
+            </a:r>
+          </a:p>
+        </p:txBody>
+      </p:sp>
+      <p:sp>
+        <p:nvSpPr>
           <p:cNvPr id="4" name="TextBox 3"/>
           <p:cNvSpPr txBox="1"/>
           <p:nvPr/>
@@ -17491,7 +17725,7 @@
                 </a:solidFill>
                 <a:latin typeface="Arial"/>
               </a:rPr>
-              <a:t>SƠ ĐỒ TƯ DUY</a:t>
+              <a:t>YÊU CẦU BÀI PHÂN TÍCH THƠ</a:t>
             </a:r>
           </a:p>
         </p:txBody>
@@ -17575,2081 +17809,109 @@
           </a:p>
         </p:txBody>
       </p:sp>
-      <p:cxnSp>
-        <p:nvCxnSpPr>
-          <p:cNvPr id="7" name="Connector 6"/>
-          <p:cNvCxnSpPr/>
-          <p:nvPr/>
-        </p:nvCxnSpPr>
-        <p:spPr>
-          <a:xfrm flipH="1" flipV="1">
-            <a:off x="4338888" y="2670962"/>
-            <a:ext cx="1688379" cy="1283818"/>
-          </a:xfrm>
-          <a:prstGeom prst="line">
-            <a:avLst/>
-          </a:prstGeom>
-          <a:ln w="44450">
-            <a:solidFill>
-              <a:srgbClr val="548235"/>
-            </a:solidFill>
-          </a:ln>
-        </p:spPr>
-        <p:style>
-          <a:lnRef idx="2">
-            <a:schemeClr val="accent1"/>
-          </a:lnRef>
-          <a:fillRef idx="0">
-            <a:schemeClr val="accent1"/>
-          </a:fillRef>
-          <a:effectRef idx="1">
-            <a:schemeClr val="accent1"/>
-          </a:effectRef>
-          <a:fontRef idx="minor">
-            <a:schemeClr val="tx1"/>
-          </a:fontRef>
-        </p:style>
-      </p:cxnSp>
-      <p:cxnSp>
-        <p:nvCxnSpPr>
-          <p:cNvPr id="8" name="Connector 7"/>
-          <p:cNvCxnSpPr/>
-          <p:nvPr/>
-        </p:nvCxnSpPr>
-        <p:spPr>
-          <a:xfrm flipH="1" flipV="1">
-            <a:off x="2735059" y="1931116"/>
-            <a:ext cx="1603829" cy="739846"/>
-          </a:xfrm>
-          <a:prstGeom prst="line">
-            <a:avLst/>
-          </a:prstGeom>
-          <a:ln w="15875">
-            <a:solidFill>
-              <a:srgbClr val="548235"/>
-            </a:solidFill>
-          </a:ln>
-        </p:spPr>
-        <p:style>
-          <a:lnRef idx="2">
-            <a:schemeClr val="accent1"/>
-          </a:lnRef>
-          <a:fillRef idx="0">
-            <a:schemeClr val="accent1"/>
-          </a:fillRef>
-          <a:effectRef idx="1">
-            <a:schemeClr val="accent1"/>
-          </a:effectRef>
-          <a:fontRef idx="minor">
-            <a:schemeClr val="tx1"/>
-          </a:fontRef>
-        </p:style>
-      </p:cxnSp>
-      <p:sp>
-        <p:nvSpPr>
-          <p:cNvPr id="9" name="Rounded Rectangle 8"/>
-          <p:cNvSpPr/>
-          <p:nvPr/>
-        </p:nvSpPr>
-        <p:spPr>
-          <a:xfrm>
-            <a:off x="877582" y="1755515"/>
-            <a:ext cx="1857477" cy="351200"/>
-          </a:xfrm>
-          <a:prstGeom prst="roundRect">
-            <a:avLst>
-              <a:gd name="adj" fmla="val 50000"/>
-            </a:avLst>
-          </a:prstGeom>
-          <a:solidFill>
-            <a:srgbClr val="EDF5E8"/>
-          </a:solidFill>
-          <a:ln w="15875">
-            <a:solidFill>
-              <a:srgbClr val="548235"/>
-            </a:solidFill>
-          </a:ln>
-          <a:effectLst/>
-        </p:spPr>
-        <p:style>
-          <a:lnRef idx="1">
-            <a:schemeClr val="accent1"/>
-          </a:lnRef>
-          <a:fillRef idx="3">
-            <a:schemeClr val="accent1"/>
-          </a:fillRef>
-          <a:effectRef idx="2">
-            <a:schemeClr val="accent1"/>
-          </a:effectRef>
-          <a:fontRef idx="minor">
-            <a:schemeClr val="lt1"/>
-          </a:fontRef>
-        </p:style>
-        <p:txBody>
-          <a:bodyPr rtlCol="0" anchor="ctr" wrap="none" lIns="64000" rIns="64000" tIns="25400" bIns="25400"/>
-          <a:lstStyle/>
-          <a:p>
-            <a:pPr algn="ctr"/>
-            <a:r>
-              <a:rPr sz="1300" b="1">
-                <a:solidFill>
-                  <a:srgbClr val="8B0000"/>
+      <p:sp>
+        <p:nvSpPr>
+          <p:cNvPr id="7" name="TextBox 6"/>
+          <p:cNvSpPr txBox="1"/>
+          <p:nvPr/>
+        </p:nvSpPr>
+        <p:spPr>
+          <a:xfrm>
+            <a:off x="731520" y="1463040"/>
+            <a:ext cx="10789920" cy="4754880"/>
+          </a:xfrm>
+          <a:prstGeom prst="rect">
+            <a:avLst/>
+          </a:prstGeom>
+          <a:noFill/>
+        </p:spPr>
+        <p:txBody>
+          <a:bodyPr wrap="square" anchor="t" lIns="45720" rIns="45720">
+            <a:spAutoFit/>
+          </a:bodyPr>
+          <a:lstStyle/>
+          <a:p>
+            <a:pPr algn="l" marL="365760" indent="-365760">
+              <a:spcAft>
+                <a:spcPts val="800"/>
+              </a:spcAft>
+              <a:buClr>
+                <a:srgbClr val="1E40AF"/>
+              </a:buClr>
+              <a:buFont typeface="Arial"/>
+              <a:buChar char="•"/>
+            </a:pPr>
+            <a:r>
+              <a:rPr sz="2400">
+                <a:solidFill>
+                  <a:srgbClr val="1E293B"/>
                 </a:solidFill>
                 <a:latin typeface="Calibri"/>
               </a:rPr>
-              <a:t>Nhân vật trữ tình</a:t>
-            </a:r>
-          </a:p>
-        </p:txBody>
-      </p:sp>
-      <p:cxnSp>
-        <p:nvCxnSpPr>
-          <p:cNvPr id="10" name="Connector 9"/>
-          <p:cNvCxnSpPr/>
-          <p:nvPr/>
-        </p:nvCxnSpPr>
-        <p:spPr>
-          <a:xfrm flipH="1" flipV="1">
-            <a:off x="2464295" y="2357206"/>
-            <a:ext cx="1874593" cy="313756"/>
-          </a:xfrm>
-          <a:prstGeom prst="line">
-            <a:avLst/>
-          </a:prstGeom>
-          <a:ln w="15875">
-            <a:solidFill>
-              <a:srgbClr val="548235"/>
-            </a:solidFill>
-          </a:ln>
-        </p:spPr>
-        <p:style>
-          <a:lnRef idx="2">
-            <a:schemeClr val="accent1"/>
-          </a:lnRef>
-          <a:fillRef idx="0">
-            <a:schemeClr val="accent1"/>
-          </a:fillRef>
-          <a:effectRef idx="1">
-            <a:schemeClr val="accent1"/>
-          </a:effectRef>
-          <a:fontRef idx="minor">
-            <a:schemeClr val="tx1"/>
-          </a:fontRef>
-        </p:style>
-      </p:cxnSp>
-      <p:sp>
-        <p:nvSpPr>
-          <p:cNvPr id="11" name="Rounded Rectangle 10"/>
-          <p:cNvSpPr/>
-          <p:nvPr/>
-        </p:nvSpPr>
-        <p:spPr>
-          <a:xfrm>
-            <a:off x="1148346" y="2181605"/>
-            <a:ext cx="1315949" cy="351200"/>
-          </a:xfrm>
-          <a:prstGeom prst="roundRect">
-            <a:avLst>
-              <a:gd name="adj" fmla="val 50000"/>
-            </a:avLst>
-          </a:prstGeom>
-          <a:solidFill>
-            <a:srgbClr val="EDF5E8"/>
-          </a:solidFill>
-          <a:ln w="15875">
-            <a:solidFill>
-              <a:srgbClr val="548235"/>
-            </a:solidFill>
-          </a:ln>
-          <a:effectLst/>
-        </p:spPr>
-        <p:style>
-          <a:lnRef idx="1">
-            <a:schemeClr val="accent1"/>
-          </a:lnRef>
-          <a:fillRef idx="3">
-            <a:schemeClr val="accent1"/>
-          </a:fillRef>
-          <a:effectRef idx="2">
-            <a:schemeClr val="accent1"/>
-          </a:effectRef>
-          <a:fontRef idx="minor">
-            <a:schemeClr val="lt1"/>
-          </a:fontRef>
-        </p:style>
-        <p:txBody>
-          <a:bodyPr rtlCol="0" anchor="ctr" wrap="none" lIns="64000" rIns="64000" tIns="25400" bIns="25400"/>
-          <a:lstStyle/>
-          <a:p>
-            <a:pPr algn="ctr"/>
-            <a:r>
-              <a:rPr sz="1300" b="0">
-                <a:solidFill>
-                  <a:srgbClr val="000000"/>
+              <a:t>Giới thiệu bài thơ: tác giả, hoàn cảnh, trào lưu, lí do chọn.</a:t>
+            </a:r>
+          </a:p>
+          <a:p>
+            <a:pPr algn="l" marL="365760" indent="-365760">
+              <a:spcAft>
+                <a:spcPts val="800"/>
+              </a:spcAft>
+              <a:buClr>
+                <a:srgbClr val="1E40AF"/>
+              </a:buClr>
+              <a:buFont typeface="Arial"/>
+              <a:buChar char="•"/>
+            </a:pPr>
+            <a:r>
+              <a:rPr sz="2400">
+                <a:solidFill>
+                  <a:srgbClr val="1E293B"/>
                 </a:solidFill>
                 <a:latin typeface="Calibri"/>
               </a:rPr>
-              <a:t>Hình ảnh thơ</a:t>
-            </a:r>
-          </a:p>
-        </p:txBody>
-      </p:sp>
-      <p:cxnSp>
-        <p:nvCxnSpPr>
-          <p:cNvPr id="12" name="Connector 11"/>
-          <p:cNvCxnSpPr/>
-          <p:nvPr/>
-        </p:nvCxnSpPr>
-        <p:spPr>
-          <a:xfrm flipH="1">
-            <a:off x="2593073" y="2670962"/>
-            <a:ext cx="1745815" cy="213045"/>
-          </a:xfrm>
-          <a:prstGeom prst="line">
-            <a:avLst/>
-          </a:prstGeom>
-          <a:ln w="15875">
-            <a:solidFill>
-              <a:srgbClr val="548235"/>
-            </a:solidFill>
-          </a:ln>
-        </p:spPr>
-        <p:style>
-          <a:lnRef idx="2">
-            <a:schemeClr val="accent1"/>
-          </a:lnRef>
-          <a:fillRef idx="0">
-            <a:schemeClr val="accent1"/>
-          </a:fillRef>
-          <a:effectRef idx="1">
-            <a:schemeClr val="accent1"/>
-          </a:effectRef>
-          <a:fontRef idx="minor">
-            <a:schemeClr val="tx1"/>
-          </a:fontRef>
-        </p:style>
-      </p:cxnSp>
-      <p:sp>
-        <p:nvSpPr>
-          <p:cNvPr id="13" name="Rounded Rectangle 12"/>
-          <p:cNvSpPr/>
-          <p:nvPr/>
-        </p:nvSpPr>
-        <p:spPr>
-          <a:xfrm>
-            <a:off x="1019568" y="2607696"/>
-            <a:ext cx="1573505" cy="552622"/>
-          </a:xfrm>
-          <a:prstGeom prst="roundRect">
-            <a:avLst>
-              <a:gd name="adj" fmla="val 50000"/>
-            </a:avLst>
-          </a:prstGeom>
-          <a:solidFill>
-            <a:srgbClr val="EDF5E8"/>
-          </a:solidFill>
-          <a:ln w="15875">
-            <a:solidFill>
-              <a:srgbClr val="548235"/>
-            </a:solidFill>
-          </a:ln>
-          <a:effectLst/>
-        </p:spPr>
-        <p:style>
-          <a:lnRef idx="1">
-            <a:schemeClr val="accent1"/>
-          </a:lnRef>
-          <a:fillRef idx="3">
-            <a:schemeClr val="accent1"/>
-          </a:fillRef>
-          <a:effectRef idx="2">
-            <a:schemeClr val="accent1"/>
-          </a:effectRef>
-          <a:fontRef idx="minor">
-            <a:schemeClr val="lt1"/>
-          </a:fontRef>
-        </p:style>
-        <p:txBody>
-          <a:bodyPr rtlCol="0" anchor="ctr" wrap="none" lIns="64000" rIns="64000" tIns="25400" bIns="25400"/>
-          <a:lstStyle/>
-          <a:p>
-            <a:pPr algn="ctr"/>
-            <a:r>
-              <a:rPr sz="1300" b="0">
-                <a:solidFill>
-                  <a:srgbClr val="000000"/>
+              <a:t>Phân tích nét đặc sắc: từ ngữ, hình ảnh, nhịp điệu, nhạc điệu, mạch cảm xúc.</a:t>
+            </a:r>
+          </a:p>
+          <a:p>
+            <a:pPr algn="l" marL="365760" indent="-365760">
+              <a:spcAft>
+                <a:spcPts val="800"/>
+              </a:spcAft>
+              <a:buClr>
+                <a:srgbClr val="1E40AF"/>
+              </a:buClr>
+              <a:buFont typeface="Arial"/>
+              <a:buChar char="•"/>
+            </a:pPr>
+            <a:r>
+              <a:rPr sz="2400">
+                <a:solidFill>
+                  <a:srgbClr val="1E293B"/>
                 </a:solidFill>
                 <a:latin typeface="Calibri"/>
               </a:rPr>
-              <a:t>Vần – nhịp –</a:t>
-            </a:r>
-          </a:p>
-          <a:p>
-            <a:pPr algn="ctr"/>
-            <a:r>
-              <a:rPr sz="1300" b="0">
-                <a:solidFill>
-                  <a:srgbClr val="000000"/>
+              <a:t>Đánh giá giá trị nghệ thuật và ý nghĩa nhân sinh.</a:t>
+            </a:r>
+          </a:p>
+          <a:p>
+            <a:pPr algn="l" marL="365760" indent="-365760">
+              <a:spcAft>
+                <a:spcPts val="800"/>
+              </a:spcAft>
+              <a:buClr>
+                <a:srgbClr val="1E40AF"/>
+              </a:buClr>
+              <a:buFont typeface="Arial"/>
+              <a:buChar char="•"/>
+            </a:pPr>
+            <a:r>
+              <a:rPr sz="2400">
+                <a:solidFill>
+                  <a:srgbClr val="1E293B"/>
                 </a:solidFill>
                 <a:latin typeface="Calibri"/>
               </a:rPr>
-              <a:t>nhạc điệu – đối</a:t>
-            </a:r>
-          </a:p>
-        </p:txBody>
-      </p:sp>
-      <p:cxnSp>
-        <p:nvCxnSpPr>
-          <p:cNvPr id="14" name="Connector 13"/>
-          <p:cNvCxnSpPr/>
-          <p:nvPr/>
-        </p:nvCxnSpPr>
-        <p:spPr>
-          <a:xfrm flipH="1">
-            <a:off x="2678925" y="2670962"/>
-            <a:ext cx="1659963" cy="739846"/>
-          </a:xfrm>
-          <a:prstGeom prst="line">
-            <a:avLst/>
-          </a:prstGeom>
-          <a:ln w="15875">
-            <a:solidFill>
-              <a:srgbClr val="548235"/>
-            </a:solidFill>
-          </a:ln>
-        </p:spPr>
-        <p:style>
-          <a:lnRef idx="2">
-            <a:schemeClr val="accent1"/>
-          </a:lnRef>
-          <a:fillRef idx="0">
-            <a:schemeClr val="accent1"/>
-          </a:fillRef>
-          <a:effectRef idx="1">
-            <a:schemeClr val="accent1"/>
-          </a:effectRef>
-          <a:fontRef idx="minor">
-            <a:schemeClr val="tx1"/>
-          </a:fontRef>
-        </p:style>
-      </p:cxnSp>
-      <p:sp>
-        <p:nvSpPr>
-          <p:cNvPr id="15" name="Rounded Rectangle 14"/>
-          <p:cNvSpPr/>
-          <p:nvPr/>
-        </p:nvSpPr>
-        <p:spPr>
-          <a:xfrm>
-            <a:off x="933716" y="3235208"/>
-            <a:ext cx="1745209" cy="351200"/>
-          </a:xfrm>
-          <a:prstGeom prst="roundRect">
-            <a:avLst>
-              <a:gd name="adj" fmla="val 50000"/>
-            </a:avLst>
-          </a:prstGeom>
-          <a:solidFill>
-            <a:srgbClr val="EDF5E8"/>
-          </a:solidFill>
-          <a:ln w="15875">
-            <a:solidFill>
-              <a:srgbClr val="548235"/>
-            </a:solidFill>
-          </a:ln>
-          <a:effectLst/>
-        </p:spPr>
-        <p:style>
-          <a:lnRef idx="1">
-            <a:schemeClr val="accent1"/>
-          </a:lnRef>
-          <a:fillRef idx="3">
-            <a:schemeClr val="accent1"/>
-          </a:fillRef>
-          <a:effectRef idx="2">
-            <a:schemeClr val="accent1"/>
-          </a:effectRef>
-          <a:fontRef idx="minor">
-            <a:schemeClr val="lt1"/>
-          </a:fontRef>
-        </p:style>
-        <p:txBody>
-          <a:bodyPr rtlCol="0" anchor="ctr" wrap="none" lIns="64000" rIns="64000" tIns="25400" bIns="25400"/>
-          <a:lstStyle/>
-          <a:p>
-            <a:pPr algn="ctr"/>
-            <a:r>
-              <a:rPr sz="1300" b="0">
-                <a:solidFill>
-                  <a:srgbClr val="000000"/>
-                </a:solidFill>
-                <a:latin typeface="Calibri"/>
-              </a:rPr>
-              <a:t>Thi luật, thể thơ</a:t>
-            </a:r>
-          </a:p>
-        </p:txBody>
-      </p:sp>
-      <p:sp>
-        <p:nvSpPr>
-          <p:cNvPr id="16" name="Oval 15"/>
-          <p:cNvSpPr/>
-          <p:nvPr/>
-        </p:nvSpPr>
-        <p:spPr>
-          <a:xfrm>
-            <a:off x="3502606" y="2259078"/>
-            <a:ext cx="1672565" cy="823767"/>
-          </a:xfrm>
-          <a:prstGeom prst="ellipse">
-            <a:avLst/>
-          </a:prstGeom>
-          <a:solidFill>
-            <a:srgbClr val="E2EFDA"/>
-          </a:solidFill>
-          <a:ln w="31750">
-            <a:solidFill>
-              <a:srgbClr val="375623"/>
-            </a:solidFill>
-          </a:ln>
-          <a:effectLst/>
-        </p:spPr>
-        <p:style>
-          <a:lnRef idx="1">
-            <a:schemeClr val="accent1"/>
-          </a:lnRef>
-          <a:fillRef idx="3">
-            <a:schemeClr val="accent1"/>
-          </a:fillRef>
-          <a:effectRef idx="2">
-            <a:schemeClr val="accent1"/>
-          </a:effectRef>
-          <a:fontRef idx="minor">
-            <a:schemeClr val="lt1"/>
-          </a:fontRef>
-        </p:style>
-        <p:txBody>
-          <a:bodyPr rtlCol="0" anchor="ctr" wrap="none" lIns="64000" rIns="64000" tIns="25400" bIns="25400"/>
-          <a:lstStyle/>
-          <a:p>
-            <a:pPr algn="ctr"/>
-            <a:r>
-              <a:rPr sz="1500" b="1">
-                <a:solidFill>
-                  <a:srgbClr val="000000"/>
-                </a:solidFill>
-                <a:latin typeface="Calibri"/>
-              </a:rPr>
-              <a:t>① Tri thức</a:t>
-            </a:r>
-          </a:p>
-          <a:p>
-            <a:pPr algn="ctr"/>
-            <a:r>
-              <a:rPr sz="1500" b="1">
-                <a:solidFill>
-                  <a:srgbClr val="000000"/>
-                </a:solidFill>
-                <a:latin typeface="Calibri"/>
-              </a:rPr>
-              <a:t>ngữ văn</a:t>
-            </a:r>
-          </a:p>
-        </p:txBody>
-      </p:sp>
-      <p:cxnSp>
-        <p:nvCxnSpPr>
-          <p:cNvPr id="17" name="Connector 16"/>
-          <p:cNvCxnSpPr/>
-          <p:nvPr/>
-        </p:nvCxnSpPr>
-        <p:spPr>
-          <a:xfrm flipV="1">
-            <a:off x="6027267" y="2670962"/>
-            <a:ext cx="1688379" cy="1283818"/>
-          </a:xfrm>
-          <a:prstGeom prst="line">
-            <a:avLst/>
-          </a:prstGeom>
-          <a:ln w="44450">
-            <a:solidFill>
-              <a:srgbClr val="BF8F00"/>
-            </a:solidFill>
-          </a:ln>
-        </p:spPr>
-        <p:style>
-          <a:lnRef idx="2">
-            <a:schemeClr val="accent1"/>
-          </a:lnRef>
-          <a:fillRef idx="0">
-            <a:schemeClr val="accent1"/>
-          </a:fillRef>
-          <a:effectRef idx="1">
-            <a:schemeClr val="accent1"/>
-          </a:effectRef>
-          <a:fontRef idx="minor">
-            <a:schemeClr val="tx1"/>
-          </a:fontRef>
-        </p:style>
-      </p:cxnSp>
-      <p:cxnSp>
-        <p:nvCxnSpPr>
-          <p:cNvPr id="18" name="Connector 17"/>
-          <p:cNvCxnSpPr/>
-          <p:nvPr/>
-        </p:nvCxnSpPr>
-        <p:spPr>
-          <a:xfrm flipV="1">
-            <a:off x="7715646" y="1830405"/>
-            <a:ext cx="1465145" cy="840557"/>
-          </a:xfrm>
-          <a:prstGeom prst="line">
-            <a:avLst/>
-          </a:prstGeom>
-          <a:ln w="15875">
-            <a:solidFill>
-              <a:srgbClr val="BF8F00"/>
-            </a:solidFill>
-          </a:ln>
-        </p:spPr>
-        <p:style>
-          <a:lnRef idx="2">
-            <a:schemeClr val="accent1"/>
-          </a:lnRef>
-          <a:fillRef idx="0">
-            <a:schemeClr val="accent1"/>
-          </a:fillRef>
-          <a:effectRef idx="1">
-            <a:schemeClr val="accent1"/>
-          </a:effectRef>
-          <a:fontRef idx="minor">
-            <a:schemeClr val="tx1"/>
-          </a:fontRef>
-        </p:style>
-      </p:cxnSp>
-      <p:sp>
-        <p:nvSpPr>
-          <p:cNvPr id="19" name="Rounded Rectangle 18"/>
-          <p:cNvSpPr/>
-          <p:nvPr/>
-        </p:nvSpPr>
-        <p:spPr>
-          <a:xfrm>
-            <a:off x="9180791" y="1654804"/>
-            <a:ext cx="2134845" cy="351200"/>
-          </a:xfrm>
-          <a:prstGeom prst="roundRect">
-            <a:avLst>
-              <a:gd name="adj" fmla="val 50000"/>
-            </a:avLst>
-          </a:prstGeom>
-          <a:solidFill>
-            <a:srgbClr val="FFF8E1"/>
-          </a:solidFill>
-          <a:ln w="15875">
-            <a:solidFill>
-              <a:srgbClr val="BF8F00"/>
-            </a:solidFill>
-          </a:ln>
-          <a:effectLst/>
-        </p:spPr>
-        <p:style>
-          <a:lnRef idx="1">
-            <a:schemeClr val="accent1"/>
-          </a:lnRef>
-          <a:fillRef idx="3">
-            <a:schemeClr val="accent1"/>
-          </a:fillRef>
-          <a:effectRef idx="2">
-            <a:schemeClr val="accent1"/>
-          </a:effectRef>
-          <a:fontRef idx="minor">
-            <a:schemeClr val="lt1"/>
-          </a:fontRef>
-        </p:style>
-        <p:txBody>
-          <a:bodyPr rtlCol="0" anchor="ctr" wrap="none" lIns="64000" rIns="64000" tIns="25400" bIns="25400"/>
-          <a:lstStyle/>
-          <a:p>
-            <a:pPr algn="ctr"/>
-            <a:r>
-              <a:rPr sz="1300" b="1">
-                <a:solidFill>
-                  <a:srgbClr val="8B0000"/>
-                </a:solidFill>
-                <a:latin typeface="Calibri"/>
-              </a:rPr>
-              <a:t>Hai-cư: 3 dòng 5–7–5</a:t>
-            </a:r>
-          </a:p>
-        </p:txBody>
-      </p:sp>
-      <p:cxnSp>
-        <p:nvCxnSpPr>
-          <p:cNvPr id="20" name="Connector 19"/>
-          <p:cNvCxnSpPr/>
-          <p:nvPr/>
-        </p:nvCxnSpPr>
-        <p:spPr>
-          <a:xfrm flipV="1">
-            <a:off x="7715646" y="2256495"/>
-            <a:ext cx="1531185" cy="414467"/>
-          </a:xfrm>
-          <a:prstGeom prst="line">
-            <a:avLst/>
-          </a:prstGeom>
-          <a:ln w="15875">
-            <a:solidFill>
-              <a:srgbClr val="BF8F00"/>
-            </a:solidFill>
-          </a:ln>
-        </p:spPr>
-        <p:style>
-          <a:lnRef idx="2">
-            <a:schemeClr val="accent1"/>
-          </a:lnRef>
-          <a:fillRef idx="0">
-            <a:schemeClr val="accent1"/>
-          </a:fillRef>
-          <a:effectRef idx="1">
-            <a:schemeClr val="accent1"/>
-          </a:effectRef>
-          <a:fontRef idx="minor">
-            <a:schemeClr val="tx1"/>
-          </a:fontRef>
-        </p:style>
-      </p:cxnSp>
-      <p:sp>
-        <p:nvSpPr>
-          <p:cNvPr id="21" name="Rounded Rectangle 20"/>
-          <p:cNvSpPr/>
-          <p:nvPr/>
-        </p:nvSpPr>
-        <p:spPr>
-          <a:xfrm>
-            <a:off x="9246831" y="2080894"/>
-            <a:ext cx="2002765" cy="351200"/>
-          </a:xfrm>
-          <a:prstGeom prst="roundRect">
-            <a:avLst>
-              <a:gd name="adj" fmla="val 50000"/>
-            </a:avLst>
-          </a:prstGeom>
-          <a:solidFill>
-            <a:srgbClr val="FFF8E1"/>
-          </a:solidFill>
-          <a:ln w="15875">
-            <a:solidFill>
-              <a:srgbClr val="BF8F00"/>
-            </a:solidFill>
-          </a:ln>
-          <a:effectLst/>
-        </p:spPr>
-        <p:style>
-          <a:lnRef idx="1">
-            <a:schemeClr val="accent1"/>
-          </a:lnRef>
-          <a:fillRef idx="3">
-            <a:schemeClr val="accent1"/>
-          </a:fillRef>
-          <a:effectRef idx="2">
-            <a:schemeClr val="accent1"/>
-          </a:effectRef>
-          <a:fontRef idx="minor">
-            <a:schemeClr val="lt1"/>
-          </a:fontRef>
-        </p:style>
-        <p:txBody>
-          <a:bodyPr rtlCol="0" anchor="ctr" wrap="none" lIns="64000" rIns="64000" tIns="25400" bIns="25400"/>
-          <a:lstStyle/>
-          <a:p>
-            <a:pPr algn="ctr"/>
-            <a:r>
-              <a:rPr sz="1300" b="0">
-                <a:solidFill>
-                  <a:srgbClr val="000000"/>
-                </a:solidFill>
-                <a:latin typeface="Calibri"/>
-              </a:rPr>
-              <a:t>Phát hiện “bừng ngộ”</a:t>
-            </a:r>
-          </a:p>
-        </p:txBody>
-      </p:sp>
-      <p:cxnSp>
-        <p:nvCxnSpPr>
-          <p:cNvPr id="22" name="Connector 21"/>
-          <p:cNvCxnSpPr/>
-          <p:nvPr/>
-        </p:nvCxnSpPr>
-        <p:spPr>
-          <a:xfrm>
-            <a:off x="7715646" y="2670962"/>
-            <a:ext cx="1702889" cy="112334"/>
-          </a:xfrm>
-          <a:prstGeom prst="line">
-            <a:avLst/>
-          </a:prstGeom>
-          <a:ln w="15875">
-            <a:solidFill>
-              <a:srgbClr val="BF8F00"/>
-            </a:solidFill>
-          </a:ln>
-        </p:spPr>
-        <p:style>
-          <a:lnRef idx="2">
-            <a:schemeClr val="accent1"/>
-          </a:lnRef>
-          <a:fillRef idx="0">
-            <a:schemeClr val="accent1"/>
-          </a:fillRef>
-          <a:effectRef idx="1">
-            <a:schemeClr val="accent1"/>
-          </a:effectRef>
-          <a:fontRef idx="minor">
-            <a:schemeClr val="tx1"/>
-          </a:fontRef>
-        </p:style>
-      </p:cxnSp>
-      <p:sp>
-        <p:nvSpPr>
-          <p:cNvPr id="23" name="Rounded Rectangle 22"/>
-          <p:cNvSpPr/>
-          <p:nvPr/>
-        </p:nvSpPr>
-        <p:spPr>
-          <a:xfrm>
-            <a:off x="9418535" y="2506985"/>
-            <a:ext cx="1659357" cy="552622"/>
-          </a:xfrm>
-          <a:prstGeom prst="roundRect">
-            <a:avLst>
-              <a:gd name="adj" fmla="val 50000"/>
-            </a:avLst>
-          </a:prstGeom>
-          <a:solidFill>
-            <a:srgbClr val="FFF8E1"/>
-          </a:solidFill>
-          <a:ln w="15875">
-            <a:solidFill>
-              <a:srgbClr val="BF8F00"/>
-            </a:solidFill>
-          </a:ln>
-          <a:effectLst/>
-        </p:spPr>
-        <p:style>
-          <a:lnRef idx="1">
-            <a:schemeClr val="accent1"/>
-          </a:lnRef>
-          <a:fillRef idx="3">
-            <a:schemeClr val="accent1"/>
-          </a:fillRef>
-          <a:effectRef idx="2">
-            <a:schemeClr val="accent1"/>
-          </a:effectRef>
-          <a:fontRef idx="minor">
-            <a:schemeClr val="lt1"/>
-          </a:fontRef>
-        </p:style>
-        <p:txBody>
-          <a:bodyPr rtlCol="0" anchor="ctr" wrap="none" lIns="64000" rIns="64000" tIns="25400" bIns="25400"/>
-          <a:lstStyle/>
-          <a:p>
-            <a:pPr algn="ctr"/>
-            <a:r>
-              <a:rPr sz="1300" b="0">
-                <a:solidFill>
-                  <a:srgbClr val="000000"/>
-                </a:solidFill>
-                <a:latin typeface="Calibri"/>
-              </a:rPr>
-              <a:t>Đường luật:</a:t>
-            </a:r>
-          </a:p>
-          <a:p>
-            <a:pPr algn="ctr"/>
-            <a:r>
-              <a:rPr sz="1300" b="0">
-                <a:solidFill>
-                  <a:srgbClr val="000000"/>
-                </a:solidFill>
-                <a:latin typeface="Calibri"/>
-              </a:rPr>
-              <a:t>đề–thực–luận–kết</a:t>
-            </a:r>
-          </a:p>
-        </p:txBody>
-      </p:sp>
-      <p:cxnSp>
-        <p:nvCxnSpPr>
-          <p:cNvPr id="24" name="Connector 23"/>
-          <p:cNvCxnSpPr/>
-          <p:nvPr/>
-        </p:nvCxnSpPr>
-        <p:spPr>
-          <a:xfrm>
-            <a:off x="7715646" y="2670962"/>
-            <a:ext cx="1788741" cy="739846"/>
-          </a:xfrm>
-          <a:prstGeom prst="line">
-            <a:avLst/>
-          </a:prstGeom>
-          <a:ln w="15875">
-            <a:solidFill>
-              <a:srgbClr val="BF8F00"/>
-            </a:solidFill>
-          </a:ln>
-        </p:spPr>
-        <p:style>
-          <a:lnRef idx="2">
-            <a:schemeClr val="accent1"/>
-          </a:lnRef>
-          <a:fillRef idx="0">
-            <a:schemeClr val="accent1"/>
-          </a:fillRef>
-          <a:effectRef idx="1">
-            <a:schemeClr val="accent1"/>
-          </a:effectRef>
-          <a:fontRef idx="minor">
-            <a:schemeClr val="tx1"/>
-          </a:fontRef>
-        </p:style>
-      </p:cxnSp>
-      <p:sp>
-        <p:nvSpPr>
-          <p:cNvPr id="25" name="Rounded Rectangle 24"/>
-          <p:cNvSpPr/>
-          <p:nvPr/>
-        </p:nvSpPr>
-        <p:spPr>
-          <a:xfrm>
-            <a:off x="9504387" y="3134497"/>
-            <a:ext cx="1487653" cy="552622"/>
-          </a:xfrm>
-          <a:prstGeom prst="roundRect">
-            <a:avLst>
-              <a:gd name="adj" fmla="val 50000"/>
-            </a:avLst>
-          </a:prstGeom>
-          <a:solidFill>
-            <a:srgbClr val="FFF8E1"/>
-          </a:solidFill>
-          <a:ln w="15875">
-            <a:solidFill>
-              <a:srgbClr val="BF8F00"/>
-            </a:solidFill>
-          </a:ln>
-          <a:effectLst/>
-        </p:spPr>
-        <p:style>
-          <a:lnRef idx="1">
-            <a:schemeClr val="accent1"/>
-          </a:lnRef>
-          <a:fillRef idx="3">
-            <a:schemeClr val="accent1"/>
-          </a:fillRef>
-          <a:effectRef idx="2">
-            <a:schemeClr val="accent1"/>
-          </a:effectRef>
-          <a:fontRef idx="minor">
-            <a:schemeClr val="lt1"/>
-          </a:fontRef>
-        </p:style>
-        <p:txBody>
-          <a:bodyPr rtlCol="0" anchor="ctr" wrap="none" lIns="64000" rIns="64000" tIns="25400" bIns="25400"/>
-          <a:lstStyle/>
-          <a:p>
-            <a:pPr algn="ctr"/>
-            <a:r>
-              <a:rPr sz="1300" b="0">
-                <a:solidFill>
-                  <a:srgbClr val="000000"/>
-                </a:solidFill>
-                <a:latin typeface="Calibri"/>
-              </a:rPr>
-              <a:t>Cảnh thu – nỗi</a:t>
-            </a:r>
-          </a:p>
-          <a:p>
-            <a:pPr algn="ctr"/>
-            <a:r>
-              <a:rPr sz="1300" b="0">
-                <a:solidFill>
-                  <a:srgbClr val="000000"/>
-                </a:solidFill>
-                <a:latin typeface="Calibri"/>
-              </a:rPr>
-              <a:t>nhớ quê</a:t>
-            </a:r>
-          </a:p>
-        </p:txBody>
-      </p:sp>
-      <p:sp>
-        <p:nvSpPr>
-          <p:cNvPr id="26" name="Oval 25"/>
-          <p:cNvSpPr/>
-          <p:nvPr/>
-        </p:nvSpPr>
-        <p:spPr>
-          <a:xfrm>
-            <a:off x="6879363" y="2259078"/>
-            <a:ext cx="1672565" cy="823767"/>
-          </a:xfrm>
-          <a:prstGeom prst="ellipse">
-            <a:avLst/>
-          </a:prstGeom>
-          <a:solidFill>
-            <a:srgbClr val="FFF2CC"/>
-          </a:solidFill>
-          <a:ln w="31750">
-            <a:solidFill>
-              <a:srgbClr val="BF8F00"/>
-            </a:solidFill>
-          </a:ln>
-          <a:effectLst/>
-        </p:spPr>
-        <p:style>
-          <a:lnRef idx="1">
-            <a:schemeClr val="accent1"/>
-          </a:lnRef>
-          <a:fillRef idx="3">
-            <a:schemeClr val="accent1"/>
-          </a:fillRef>
-          <a:effectRef idx="2">
-            <a:schemeClr val="accent1"/>
-          </a:effectRef>
-          <a:fontRef idx="minor">
-            <a:schemeClr val="lt1"/>
-          </a:fontRef>
-        </p:style>
-        <p:txBody>
-          <a:bodyPr rtlCol="0" anchor="ctr" wrap="none" lIns="64000" rIns="64000" tIns="25400" bIns="25400"/>
-          <a:lstStyle/>
-          <a:p>
-            <a:pPr algn="ctr"/>
-            <a:r>
-              <a:rPr sz="1500" b="1">
-                <a:solidFill>
-                  <a:srgbClr val="000000"/>
-                </a:solidFill>
-                <a:latin typeface="Calibri"/>
-              </a:rPr>
-              <a:t>② Hai-cư –</a:t>
-            </a:r>
-          </a:p>
-          <a:p>
-            <a:pPr algn="ctr"/>
-            <a:r>
-              <a:rPr sz="1500" b="1">
-                <a:solidFill>
-                  <a:srgbClr val="000000"/>
-                </a:solidFill>
-                <a:latin typeface="Calibri"/>
-              </a:rPr>
-              <a:t>Thu hứng</a:t>
-            </a:r>
-          </a:p>
-        </p:txBody>
-      </p:sp>
-      <p:cxnSp>
-        <p:nvCxnSpPr>
-          <p:cNvPr id="27" name="Connector 26"/>
-          <p:cNvCxnSpPr/>
-          <p:nvPr/>
-        </p:nvCxnSpPr>
-        <p:spPr>
-          <a:xfrm flipH="1">
-            <a:off x="4338888" y="3954780"/>
-            <a:ext cx="1688379" cy="1283817"/>
-          </a:xfrm>
-          <a:prstGeom prst="line">
-            <a:avLst/>
-          </a:prstGeom>
-          <a:ln w="44450">
-            <a:solidFill>
-              <a:srgbClr val="2F5597"/>
-            </a:solidFill>
-          </a:ln>
-        </p:spPr>
-        <p:style>
-          <a:lnRef idx="2">
-            <a:schemeClr val="accent1"/>
-          </a:lnRef>
-          <a:fillRef idx="0">
-            <a:schemeClr val="accent1"/>
-          </a:fillRef>
-          <a:effectRef idx="1">
-            <a:schemeClr val="accent1"/>
-          </a:effectRef>
-          <a:fontRef idx="minor">
-            <a:schemeClr val="tx1"/>
-          </a:fontRef>
-        </p:style>
-      </p:cxnSp>
-      <p:cxnSp>
-        <p:nvCxnSpPr>
-          <p:cNvPr id="28" name="Connector 27"/>
-          <p:cNvCxnSpPr/>
-          <p:nvPr/>
-        </p:nvCxnSpPr>
-        <p:spPr>
-          <a:xfrm flipH="1" flipV="1">
-            <a:off x="2919971" y="4398040"/>
-            <a:ext cx="1418917" cy="840557"/>
-          </a:xfrm>
-          <a:prstGeom prst="line">
-            <a:avLst/>
-          </a:prstGeom>
-          <a:ln w="15875">
-            <a:solidFill>
-              <a:srgbClr val="2F5597"/>
-            </a:solidFill>
-          </a:ln>
-        </p:spPr>
-        <p:style>
-          <a:lnRef idx="2">
-            <a:schemeClr val="accent1"/>
-          </a:lnRef>
-          <a:fillRef idx="0">
-            <a:schemeClr val="accent1"/>
-          </a:fillRef>
-          <a:effectRef idx="1">
-            <a:schemeClr val="accent1"/>
-          </a:effectRef>
-          <a:fontRef idx="minor">
-            <a:schemeClr val="tx1"/>
-          </a:fontRef>
-        </p:style>
-      </p:cxnSp>
-      <p:sp>
-        <p:nvSpPr>
-          <p:cNvPr id="29" name="Rounded Rectangle 28"/>
-          <p:cNvSpPr/>
-          <p:nvPr/>
-        </p:nvSpPr>
-        <p:spPr>
-          <a:xfrm>
-            <a:off x="692670" y="4222440"/>
-            <a:ext cx="2227301" cy="351200"/>
-          </a:xfrm>
-          <a:prstGeom prst="roundRect">
-            <a:avLst>
-              <a:gd name="adj" fmla="val 50000"/>
-            </a:avLst>
-          </a:prstGeom>
-          <a:solidFill>
-            <a:srgbClr val="E3EEF9"/>
-          </a:solidFill>
-          <a:ln w="15875">
-            <a:solidFill>
-              <a:srgbClr val="2F5597"/>
-            </a:solidFill>
-          </a:ln>
-          <a:effectLst/>
-        </p:spPr>
-        <p:style>
-          <a:lnRef idx="1">
-            <a:schemeClr val="accent1"/>
-          </a:lnRef>
-          <a:fillRef idx="3">
-            <a:schemeClr val="accent1"/>
-          </a:fillRef>
-          <a:effectRef idx="2">
-            <a:schemeClr val="accent1"/>
-          </a:effectRef>
-          <a:fontRef idx="minor">
-            <a:schemeClr val="lt1"/>
-          </a:fontRef>
-        </p:style>
-        <p:txBody>
-          <a:bodyPr rtlCol="0" anchor="ctr" wrap="none" lIns="64000" rIns="64000" tIns="25400" bIns="25400"/>
-          <a:lstStyle/>
-          <a:p>
-            <a:pPr algn="ctr"/>
-            <a:r>
-              <a:rPr sz="1300" b="1">
-                <a:solidFill>
-                  <a:srgbClr val="8B0000"/>
-                </a:solidFill>
-                <a:latin typeface="Calibri"/>
-              </a:rPr>
-              <a:t>Xuân “chín”: viên mãn</a:t>
-            </a:r>
-          </a:p>
-        </p:txBody>
-      </p:sp>
-      <p:cxnSp>
-        <p:nvCxnSpPr>
-          <p:cNvPr id="30" name="Connector 29"/>
-          <p:cNvCxnSpPr/>
-          <p:nvPr/>
-        </p:nvCxnSpPr>
-        <p:spPr>
-          <a:xfrm flipH="1" flipV="1">
-            <a:off x="2764777" y="4924841"/>
-            <a:ext cx="1574111" cy="313756"/>
-          </a:xfrm>
-          <a:prstGeom prst="line">
-            <a:avLst/>
-          </a:prstGeom>
-          <a:ln w="15875">
-            <a:solidFill>
-              <a:srgbClr val="2F5597"/>
-            </a:solidFill>
-          </a:ln>
-        </p:spPr>
-        <p:style>
-          <a:lnRef idx="2">
-            <a:schemeClr val="accent1"/>
-          </a:lnRef>
-          <a:fillRef idx="0">
-            <a:schemeClr val="accent1"/>
-          </a:fillRef>
-          <a:effectRef idx="1">
-            <a:schemeClr val="accent1"/>
-          </a:effectRef>
-          <a:fontRef idx="minor">
-            <a:schemeClr val="tx1"/>
-          </a:fontRef>
-        </p:style>
-      </p:cxnSp>
-      <p:sp>
-        <p:nvSpPr>
-          <p:cNvPr id="31" name="Rounded Rectangle 30"/>
-          <p:cNvSpPr/>
-          <p:nvPr/>
-        </p:nvSpPr>
-        <p:spPr>
-          <a:xfrm>
-            <a:off x="847864" y="4648530"/>
-            <a:ext cx="1916913" cy="552622"/>
-          </a:xfrm>
-          <a:prstGeom prst="roundRect">
-            <a:avLst>
-              <a:gd name="adj" fmla="val 50000"/>
-            </a:avLst>
-          </a:prstGeom>
-          <a:solidFill>
-            <a:srgbClr val="E3EEF9"/>
-          </a:solidFill>
-          <a:ln w="15875">
-            <a:solidFill>
-              <a:srgbClr val="2F5597"/>
-            </a:solidFill>
-          </a:ln>
-          <a:effectLst/>
-        </p:spPr>
-        <p:style>
-          <a:lnRef idx="1">
-            <a:schemeClr val="accent1"/>
-          </a:lnRef>
-          <a:fillRef idx="3">
-            <a:schemeClr val="accent1"/>
-          </a:fillRef>
-          <a:effectRef idx="2">
-            <a:schemeClr val="accent1"/>
-          </a:effectRef>
-          <a:fontRef idx="minor">
-            <a:schemeClr val="lt1"/>
-          </a:fontRef>
-        </p:style>
-        <p:txBody>
-          <a:bodyPr rtlCol="0" anchor="ctr" wrap="none" lIns="64000" rIns="64000" tIns="25400" bIns="25400"/>
-          <a:lstStyle/>
-          <a:p>
-            <a:pPr algn="ctr"/>
-            <a:r>
-              <a:rPr sz="1300" b="0">
-                <a:solidFill>
-                  <a:srgbClr val="000000"/>
-                </a:solidFill>
-                <a:latin typeface="Calibri"/>
-              </a:rPr>
-              <a:t>Ngôn từ, nhịp phóng</a:t>
-            </a:r>
-          </a:p>
-          <a:p>
-            <a:pPr algn="ctr"/>
-            <a:r>
-              <a:rPr sz="1300" b="0">
-                <a:solidFill>
-                  <a:srgbClr val="000000"/>
-                </a:solidFill>
-                <a:latin typeface="Calibri"/>
-              </a:rPr>
-              <a:t>khoáng</a:t>
-            </a:r>
-          </a:p>
-        </p:txBody>
-      </p:sp>
-      <p:cxnSp>
-        <p:nvCxnSpPr>
-          <p:cNvPr id="32" name="Connector 31"/>
-          <p:cNvCxnSpPr/>
-          <p:nvPr/>
-        </p:nvCxnSpPr>
-        <p:spPr>
-          <a:xfrm flipH="1">
-            <a:off x="2764777" y="5238597"/>
-            <a:ext cx="1574111" cy="213045"/>
-          </a:xfrm>
-          <a:prstGeom prst="line">
-            <a:avLst/>
-          </a:prstGeom>
-          <a:ln w="15875">
-            <a:solidFill>
-              <a:srgbClr val="2F5597"/>
-            </a:solidFill>
-          </a:ln>
-        </p:spPr>
-        <p:style>
-          <a:lnRef idx="2">
-            <a:schemeClr val="accent1"/>
-          </a:lnRef>
-          <a:fillRef idx="0">
-            <a:schemeClr val="accent1"/>
-          </a:fillRef>
-          <a:effectRef idx="1">
-            <a:schemeClr val="accent1"/>
-          </a:effectRef>
-          <a:fontRef idx="minor">
-            <a:schemeClr val="tx1"/>
-          </a:fontRef>
-        </p:style>
-      </p:cxnSp>
-      <p:sp>
-        <p:nvSpPr>
-          <p:cNvPr id="33" name="Rounded Rectangle 32"/>
-          <p:cNvSpPr/>
-          <p:nvPr/>
-        </p:nvSpPr>
-        <p:spPr>
-          <a:xfrm>
-            <a:off x="847864" y="5276042"/>
-            <a:ext cx="1916913" cy="351200"/>
-          </a:xfrm>
-          <a:prstGeom prst="roundRect">
-            <a:avLst>
-              <a:gd name="adj" fmla="val 50000"/>
-            </a:avLst>
-          </a:prstGeom>
-          <a:solidFill>
-            <a:srgbClr val="E3EEF9"/>
-          </a:solidFill>
-          <a:ln w="15875">
-            <a:solidFill>
-              <a:srgbClr val="2F5597"/>
-            </a:solidFill>
-          </a:ln>
-          <a:effectLst/>
-        </p:spPr>
-        <p:style>
-          <a:lnRef idx="1">
-            <a:schemeClr val="accent1"/>
-          </a:lnRef>
-          <a:fillRef idx="3">
-            <a:schemeClr val="accent1"/>
-          </a:fillRef>
-          <a:effectRef idx="2">
-            <a:schemeClr val="accent1"/>
-          </a:effectRef>
-          <a:fontRef idx="minor">
-            <a:schemeClr val="lt1"/>
-          </a:fontRef>
-        </p:style>
-        <p:txBody>
-          <a:bodyPr rtlCol="0" anchor="ctr" wrap="none" lIns="64000" rIns="64000" tIns="25400" bIns="25400"/>
-          <a:lstStyle/>
-          <a:p>
-            <a:pPr algn="ctr"/>
-            <a:r>
-              <a:rPr sz="1300" b="0">
-                <a:solidFill>
-                  <a:srgbClr val="000000"/>
-                </a:solidFill>
-                <a:latin typeface="Calibri"/>
-              </a:rPr>
-              <a:t>Nhớ làng, người chị</a:t>
-            </a:r>
-          </a:p>
-        </p:txBody>
-      </p:sp>
-      <p:cxnSp>
-        <p:nvCxnSpPr>
-          <p:cNvPr id="34" name="Connector 33"/>
-          <p:cNvCxnSpPr/>
-          <p:nvPr/>
-        </p:nvCxnSpPr>
-        <p:spPr>
-          <a:xfrm flipH="1">
-            <a:off x="2678925" y="5238597"/>
-            <a:ext cx="1659963" cy="739846"/>
-          </a:xfrm>
-          <a:prstGeom prst="line">
-            <a:avLst/>
-          </a:prstGeom>
-          <a:ln w="15875">
-            <a:solidFill>
-              <a:srgbClr val="2F5597"/>
-            </a:solidFill>
-          </a:ln>
-        </p:spPr>
-        <p:style>
-          <a:lnRef idx="2">
-            <a:schemeClr val="accent1"/>
-          </a:lnRef>
-          <a:fillRef idx="0">
-            <a:schemeClr val="accent1"/>
-          </a:fillRef>
-          <a:effectRef idx="1">
-            <a:schemeClr val="accent1"/>
-          </a:effectRef>
-          <a:fontRef idx="minor">
-            <a:schemeClr val="tx1"/>
-          </a:fontRef>
-        </p:style>
-      </p:cxnSp>
-      <p:sp>
-        <p:nvSpPr>
-          <p:cNvPr id="35" name="Rounded Rectangle 34"/>
-          <p:cNvSpPr/>
-          <p:nvPr/>
-        </p:nvSpPr>
-        <p:spPr>
-          <a:xfrm>
-            <a:off x="933716" y="5702132"/>
-            <a:ext cx="1745209" cy="552622"/>
-          </a:xfrm>
-          <a:prstGeom prst="roundRect">
-            <a:avLst>
-              <a:gd name="adj" fmla="val 50000"/>
-            </a:avLst>
-          </a:prstGeom>
-          <a:solidFill>
-            <a:srgbClr val="E3EEF9"/>
-          </a:solidFill>
-          <a:ln w="15875">
-            <a:solidFill>
-              <a:srgbClr val="2F5597"/>
-            </a:solidFill>
-          </a:ln>
-          <a:effectLst/>
-        </p:spPr>
-        <p:style>
-          <a:lnRef idx="1">
-            <a:schemeClr val="accent1"/>
-          </a:lnRef>
-          <a:fillRef idx="3">
-            <a:schemeClr val="accent1"/>
-          </a:fillRef>
-          <a:effectRef idx="2">
-            <a:schemeClr val="accent1"/>
-          </a:effectRef>
-          <a:fontRef idx="minor">
-            <a:schemeClr val="lt1"/>
-          </a:fontRef>
-        </p:style>
-        <p:txBody>
-          <a:bodyPr rtlCol="0" anchor="ctr" wrap="none" lIns="64000" rIns="64000" tIns="25400" bIns="25400"/>
-          <a:lstStyle/>
-          <a:p>
-            <a:pPr algn="ctr"/>
-            <a:r>
-              <a:rPr sz="1300" b="0">
-                <a:solidFill>
-                  <a:srgbClr val="000000"/>
-                </a:solidFill>
-                <a:latin typeface="Calibri"/>
-              </a:rPr>
-              <a:t>Tiếng thu ↔ tiếng</a:t>
-            </a:r>
-          </a:p>
-          <a:p>
-            <a:pPr algn="ctr"/>
-            <a:r>
-              <a:rPr sz="1300" b="0">
-                <a:solidFill>
-                  <a:srgbClr val="000000"/>
-                </a:solidFill>
-                <a:latin typeface="Calibri"/>
-              </a:rPr>
-              <a:t>thơ</a:t>
-            </a:r>
-          </a:p>
-        </p:txBody>
-      </p:sp>
-      <p:sp>
-        <p:nvSpPr>
-          <p:cNvPr id="36" name="Oval 35"/>
-          <p:cNvSpPr/>
-          <p:nvPr/>
-        </p:nvSpPr>
-        <p:spPr>
-          <a:xfrm>
-            <a:off x="3363922" y="4658216"/>
-            <a:ext cx="1949933" cy="1160762"/>
-          </a:xfrm>
-          <a:prstGeom prst="ellipse">
-            <a:avLst/>
-          </a:prstGeom>
-          <a:solidFill>
-            <a:srgbClr val="E2EFDA"/>
-          </a:solidFill>
-          <a:ln w="31750">
-            <a:solidFill>
-              <a:srgbClr val="375623"/>
-            </a:solidFill>
-          </a:ln>
-          <a:effectLst/>
-        </p:spPr>
-        <p:style>
-          <a:lnRef idx="1">
-            <a:schemeClr val="accent1"/>
-          </a:lnRef>
-          <a:fillRef idx="3">
-            <a:schemeClr val="accent1"/>
-          </a:fillRef>
-          <a:effectRef idx="2">
-            <a:schemeClr val="accent1"/>
-          </a:effectRef>
-          <a:fontRef idx="minor">
-            <a:schemeClr val="lt1"/>
-          </a:fontRef>
-        </p:style>
-        <p:txBody>
-          <a:bodyPr rtlCol="0" anchor="ctr" wrap="none" lIns="64000" rIns="64000" tIns="25400" bIns="25400"/>
-          <a:lstStyle/>
-          <a:p>
-            <a:pPr algn="ctr"/>
-            <a:r>
-              <a:rPr sz="1500" b="1">
-                <a:solidFill>
-                  <a:srgbClr val="000000"/>
-                </a:solidFill>
-                <a:latin typeface="Calibri"/>
-              </a:rPr>
-              <a:t>③ Mùa xuân</a:t>
-            </a:r>
-          </a:p>
-          <a:p>
-            <a:pPr algn="ctr"/>
-            <a:r>
-              <a:rPr sz="1500" b="1">
-                <a:solidFill>
-                  <a:srgbClr val="000000"/>
-                </a:solidFill>
-                <a:latin typeface="Calibri"/>
-              </a:rPr>
-              <a:t>chín – Tiếng</a:t>
-            </a:r>
-          </a:p>
-          <a:p>
-            <a:pPr algn="ctr"/>
-            <a:r>
-              <a:rPr sz="1500" b="1">
-                <a:solidFill>
-                  <a:srgbClr val="000000"/>
-                </a:solidFill>
-                <a:latin typeface="Calibri"/>
-              </a:rPr>
-              <a:t>thu</a:t>
-            </a:r>
-          </a:p>
-        </p:txBody>
-      </p:sp>
-      <p:cxnSp>
-        <p:nvCxnSpPr>
-          <p:cNvPr id="37" name="Connector 36"/>
-          <p:cNvCxnSpPr/>
-          <p:nvPr/>
-        </p:nvCxnSpPr>
-        <p:spPr>
-          <a:xfrm>
-            <a:off x="6027267" y="3954780"/>
-            <a:ext cx="1688379" cy="1283817"/>
-          </a:xfrm>
-          <a:prstGeom prst="line">
-            <a:avLst/>
-          </a:prstGeom>
-          <a:ln w="44450">
-            <a:solidFill>
-              <a:srgbClr val="7030A0"/>
-            </a:solidFill>
-          </a:ln>
-        </p:spPr>
-        <p:style>
-          <a:lnRef idx="2">
-            <a:schemeClr val="accent1"/>
-          </a:lnRef>
-          <a:fillRef idx="0">
-            <a:schemeClr val="accent1"/>
-          </a:fillRef>
-          <a:effectRef idx="1">
-            <a:schemeClr val="accent1"/>
-          </a:effectRef>
-          <a:fontRef idx="minor">
-            <a:schemeClr val="tx1"/>
-          </a:fontRef>
-        </p:style>
-      </p:cxnSp>
-      <p:cxnSp>
-        <p:nvCxnSpPr>
-          <p:cNvPr id="38" name="Connector 37"/>
-          <p:cNvCxnSpPr/>
-          <p:nvPr/>
-        </p:nvCxnSpPr>
-        <p:spPr>
-          <a:xfrm flipV="1">
-            <a:off x="7715646" y="4297329"/>
-            <a:ext cx="1659963" cy="941268"/>
-          </a:xfrm>
-          <a:prstGeom prst="line">
-            <a:avLst/>
-          </a:prstGeom>
-          <a:ln w="15875">
-            <a:solidFill>
-              <a:srgbClr val="7030A0"/>
-            </a:solidFill>
-          </a:ln>
-        </p:spPr>
-        <p:style>
-          <a:lnRef idx="2">
-            <a:schemeClr val="accent1"/>
-          </a:lnRef>
-          <a:fillRef idx="0">
-            <a:schemeClr val="accent1"/>
-          </a:fillRef>
-          <a:effectRef idx="1">
-            <a:schemeClr val="accent1"/>
-          </a:effectRef>
-          <a:fontRef idx="minor">
-            <a:schemeClr val="tx1"/>
-          </a:fontRef>
-        </p:style>
-      </p:cxnSp>
-      <p:sp>
-        <p:nvSpPr>
-          <p:cNvPr id="39" name="Rounded Rectangle 38"/>
-          <p:cNvSpPr/>
-          <p:nvPr/>
-        </p:nvSpPr>
-        <p:spPr>
-          <a:xfrm>
-            <a:off x="9375609" y="4021018"/>
-            <a:ext cx="1745209" cy="552622"/>
-          </a:xfrm>
-          <a:prstGeom prst="roundRect">
-            <a:avLst>
-              <a:gd name="adj" fmla="val 50000"/>
-            </a:avLst>
-          </a:prstGeom>
-          <a:solidFill>
-            <a:srgbClr val="F3E8F7"/>
-          </a:solidFill>
-          <a:ln w="15875">
-            <a:solidFill>
-              <a:srgbClr val="7030A0"/>
-            </a:solidFill>
-          </a:ln>
-          <a:effectLst/>
-        </p:spPr>
-        <p:style>
-          <a:lnRef idx="1">
-            <a:schemeClr val="accent1"/>
-          </a:lnRef>
-          <a:fillRef idx="3">
-            <a:schemeClr val="accent1"/>
-          </a:fillRef>
-          <a:effectRef idx="2">
-            <a:schemeClr val="accent1"/>
-          </a:effectRef>
-          <a:fontRef idx="minor">
-            <a:schemeClr val="lt1"/>
-          </a:fontRef>
-        </p:style>
-        <p:txBody>
-          <a:bodyPr rtlCol="0" anchor="ctr" wrap="none" lIns="64000" rIns="64000" tIns="25400" bIns="25400"/>
-          <a:lstStyle/>
-          <a:p>
-            <a:pPr algn="ctr"/>
-            <a:r>
-              <a:rPr sz="1300" b="0">
-                <a:solidFill>
-                  <a:srgbClr val="000000"/>
-                </a:solidFill>
-                <a:latin typeface="Calibri"/>
-              </a:rPr>
-              <a:t>Lỗi dùng từ, trật</a:t>
-            </a:r>
-          </a:p>
-          <a:p>
-            <a:pPr algn="ctr"/>
-            <a:r>
-              <a:rPr sz="1300" b="0">
-                <a:solidFill>
-                  <a:srgbClr val="000000"/>
-                </a:solidFill>
-                <a:latin typeface="Calibri"/>
-              </a:rPr>
-              <a:t>tự từ</a:t>
-            </a:r>
-          </a:p>
-        </p:txBody>
-      </p:sp>
-      <p:cxnSp>
-        <p:nvCxnSpPr>
-          <p:cNvPr id="40" name="Connector 39"/>
-          <p:cNvCxnSpPr/>
-          <p:nvPr/>
-        </p:nvCxnSpPr>
-        <p:spPr>
-          <a:xfrm flipV="1">
-            <a:off x="7715646" y="4924841"/>
-            <a:ext cx="1650057" cy="313756"/>
-          </a:xfrm>
-          <a:prstGeom prst="line">
-            <a:avLst/>
-          </a:prstGeom>
-          <a:ln w="15875">
-            <a:solidFill>
-              <a:srgbClr val="7030A0"/>
-            </a:solidFill>
-          </a:ln>
-        </p:spPr>
-        <p:style>
-          <a:lnRef idx="2">
-            <a:schemeClr val="accent1"/>
-          </a:lnRef>
-          <a:fillRef idx="0">
-            <a:schemeClr val="accent1"/>
-          </a:fillRef>
-          <a:effectRef idx="1">
-            <a:schemeClr val="accent1"/>
-          </a:effectRef>
-          <a:fontRef idx="minor">
-            <a:schemeClr val="tx1"/>
-          </a:fontRef>
-        </p:style>
-      </p:cxnSp>
-      <p:sp>
-        <p:nvSpPr>
-          <p:cNvPr id="41" name="Rounded Rectangle 40"/>
-          <p:cNvSpPr/>
-          <p:nvPr/>
-        </p:nvSpPr>
-        <p:spPr>
-          <a:xfrm>
-            <a:off x="9365703" y="4648530"/>
-            <a:ext cx="1765021" cy="552622"/>
-          </a:xfrm>
-          <a:prstGeom prst="roundRect">
-            <a:avLst>
-              <a:gd name="adj" fmla="val 50000"/>
-            </a:avLst>
-          </a:prstGeom>
-          <a:solidFill>
-            <a:srgbClr val="F3E8F7"/>
-          </a:solidFill>
-          <a:ln w="15875">
-            <a:solidFill>
-              <a:srgbClr val="7030A0"/>
-            </a:solidFill>
-          </a:ln>
-          <a:effectLst/>
-        </p:spPr>
-        <p:style>
-          <a:lnRef idx="1">
-            <a:schemeClr val="accent1"/>
-          </a:lnRef>
-          <a:fillRef idx="3">
-            <a:schemeClr val="accent1"/>
-          </a:fillRef>
-          <a:effectRef idx="2">
-            <a:schemeClr val="accent1"/>
-          </a:effectRef>
-          <a:fontRef idx="minor">
-            <a:schemeClr val="lt1"/>
-          </a:fontRef>
-        </p:style>
-        <p:txBody>
-          <a:bodyPr rtlCol="0" anchor="ctr" wrap="none" lIns="64000" rIns="64000" tIns="25400" bIns="25400"/>
-          <a:lstStyle/>
-          <a:p>
-            <a:pPr algn="ctr"/>
-            <a:r>
-              <a:rPr sz="1300" b="1">
-                <a:solidFill>
-                  <a:srgbClr val="8B0000"/>
-                </a:solidFill>
-                <a:latin typeface="Calibri"/>
-              </a:rPr>
-              <a:t>NL phân tích một</a:t>
-            </a:r>
-          </a:p>
-          <a:p>
-            <a:pPr algn="ctr"/>
-            <a:r>
-              <a:rPr sz="1300" b="1">
-                <a:solidFill>
-                  <a:srgbClr val="8B0000"/>
-                </a:solidFill>
-                <a:latin typeface="Calibri"/>
-              </a:rPr>
-              <a:t>bài thơ</a:t>
-            </a:r>
-          </a:p>
-        </p:txBody>
-      </p:sp>
-      <p:cxnSp>
-        <p:nvCxnSpPr>
-          <p:cNvPr id="42" name="Connector 41"/>
-          <p:cNvCxnSpPr/>
-          <p:nvPr/>
-        </p:nvCxnSpPr>
-        <p:spPr>
-          <a:xfrm>
-            <a:off x="7715646" y="5238597"/>
-            <a:ext cx="1574111" cy="313756"/>
-          </a:xfrm>
-          <a:prstGeom prst="line">
-            <a:avLst/>
-          </a:prstGeom>
-          <a:ln w="15875">
-            <a:solidFill>
-              <a:srgbClr val="7030A0"/>
-            </a:solidFill>
-          </a:ln>
-        </p:spPr>
-        <p:style>
-          <a:lnRef idx="2">
-            <a:schemeClr val="accent1"/>
-          </a:lnRef>
-          <a:fillRef idx="0">
-            <a:schemeClr val="accent1"/>
-          </a:fillRef>
-          <a:effectRef idx="1">
-            <a:schemeClr val="accent1"/>
-          </a:effectRef>
-          <a:fontRef idx="minor">
-            <a:schemeClr val="tx1"/>
-          </a:fontRef>
-        </p:style>
-      </p:cxnSp>
-      <p:sp>
-        <p:nvSpPr>
-          <p:cNvPr id="43" name="Rounded Rectangle 42"/>
-          <p:cNvSpPr/>
-          <p:nvPr/>
-        </p:nvSpPr>
-        <p:spPr>
-          <a:xfrm>
-            <a:off x="9289757" y="5276042"/>
-            <a:ext cx="1916913" cy="552622"/>
-          </a:xfrm>
-          <a:prstGeom prst="roundRect">
-            <a:avLst>
-              <a:gd name="adj" fmla="val 50000"/>
-            </a:avLst>
-          </a:prstGeom>
-          <a:solidFill>
-            <a:srgbClr val="F3E8F7"/>
-          </a:solidFill>
-          <a:ln w="15875">
-            <a:solidFill>
-              <a:srgbClr val="7030A0"/>
-            </a:solidFill>
-          </a:ln>
-          <a:effectLst/>
-        </p:spPr>
-        <p:style>
-          <a:lnRef idx="1">
-            <a:schemeClr val="accent1"/>
-          </a:lnRef>
-          <a:fillRef idx="3">
-            <a:schemeClr val="accent1"/>
-          </a:fillRef>
-          <a:effectRef idx="2">
-            <a:schemeClr val="accent1"/>
-          </a:effectRef>
-          <a:fontRef idx="minor">
-            <a:schemeClr val="lt1"/>
-          </a:fontRef>
-        </p:style>
-        <p:txBody>
-          <a:bodyPr rtlCol="0" anchor="ctr" wrap="none" lIns="64000" rIns="64000" tIns="25400" bIns="25400"/>
-          <a:lstStyle/>
-          <a:p>
-            <a:pPr algn="ctr"/>
-            <a:r>
-              <a:rPr sz="1300" b="0">
-                <a:solidFill>
-                  <a:srgbClr val="000000"/>
-                </a:solidFill>
-                <a:latin typeface="Calibri"/>
-              </a:rPr>
-              <a:t>Thuyết trình về bài</a:t>
-            </a:r>
-          </a:p>
-          <a:p>
-            <a:pPr algn="ctr"/>
-            <a:r>
-              <a:rPr sz="1300" b="0">
-                <a:solidFill>
-                  <a:srgbClr val="000000"/>
-                </a:solidFill>
-                <a:latin typeface="Calibri"/>
-              </a:rPr>
-              <a:t>thơ</a:t>
-            </a:r>
-          </a:p>
-        </p:txBody>
-      </p:sp>
-      <p:cxnSp>
-        <p:nvCxnSpPr>
-          <p:cNvPr id="44" name="Connector 43"/>
-          <p:cNvCxnSpPr/>
-          <p:nvPr/>
-        </p:nvCxnSpPr>
-        <p:spPr>
-          <a:xfrm>
-            <a:off x="7715646" y="5238597"/>
-            <a:ext cx="1617037" cy="941268"/>
-          </a:xfrm>
-          <a:prstGeom prst="line">
-            <a:avLst/>
-          </a:prstGeom>
-          <a:ln w="15875">
-            <a:solidFill>
-              <a:srgbClr val="7030A0"/>
-            </a:solidFill>
-          </a:ln>
-        </p:spPr>
-        <p:style>
-          <a:lnRef idx="2">
-            <a:schemeClr val="accent1"/>
-          </a:lnRef>
-          <a:fillRef idx="0">
-            <a:schemeClr val="accent1"/>
-          </a:fillRef>
-          <a:effectRef idx="1">
-            <a:schemeClr val="accent1"/>
-          </a:effectRef>
-          <a:fontRef idx="minor">
-            <a:schemeClr val="tx1"/>
-          </a:fontRef>
-        </p:style>
-      </p:cxnSp>
-      <p:sp>
-        <p:nvSpPr>
-          <p:cNvPr id="45" name="Rounded Rectangle 44"/>
-          <p:cNvSpPr/>
-          <p:nvPr/>
-        </p:nvSpPr>
-        <p:spPr>
-          <a:xfrm>
-            <a:off x="9332683" y="5903554"/>
-            <a:ext cx="1831061" cy="552622"/>
-          </a:xfrm>
-          <a:prstGeom prst="roundRect">
-            <a:avLst>
-              <a:gd name="adj" fmla="val 50000"/>
-            </a:avLst>
-          </a:prstGeom>
-          <a:solidFill>
-            <a:srgbClr val="F3E8F7"/>
-          </a:solidFill>
-          <a:ln w="15875">
-            <a:solidFill>
-              <a:srgbClr val="7030A0"/>
-            </a:solidFill>
-          </a:ln>
-          <a:effectLst/>
-        </p:spPr>
-        <p:style>
-          <a:lnRef idx="1">
-            <a:schemeClr val="accent1"/>
-          </a:lnRef>
-          <a:fillRef idx="3">
-            <a:schemeClr val="accent1"/>
-          </a:fillRef>
-          <a:effectRef idx="2">
-            <a:schemeClr val="accent1"/>
-          </a:effectRef>
-          <a:fontRef idx="minor">
-            <a:schemeClr val="lt1"/>
-          </a:fontRef>
-        </p:style>
-        <p:txBody>
-          <a:bodyPr rtlCol="0" anchor="ctr" wrap="none" lIns="64000" rIns="64000" tIns="25400" bIns="25400"/>
-          <a:lstStyle/>
-          <a:p>
-            <a:pPr algn="ctr"/>
-            <a:r>
-              <a:rPr sz="1300" b="0">
-                <a:solidFill>
-                  <a:srgbClr val="000000"/>
-                </a:solidFill>
-                <a:latin typeface="Calibri"/>
-              </a:rPr>
-              <a:t>Củng cố trực tuyến</a:t>
-            </a:r>
-          </a:p>
-          <a:p>
-            <a:pPr algn="ctr"/>
-            <a:r>
-              <a:rPr sz="1300" b="0">
-                <a:solidFill>
-                  <a:srgbClr val="000000"/>
-                </a:solidFill>
-                <a:latin typeface="Calibri"/>
-              </a:rPr>
-              <a:t>(QR)</a:t>
-            </a:r>
-          </a:p>
-        </p:txBody>
-      </p:sp>
-      <p:sp>
-        <p:nvSpPr>
-          <p:cNvPr id="46" name="Oval 45"/>
-          <p:cNvSpPr/>
-          <p:nvPr/>
-        </p:nvSpPr>
-        <p:spPr>
-          <a:xfrm>
-            <a:off x="6740679" y="4658216"/>
-            <a:ext cx="1949933" cy="1160762"/>
-          </a:xfrm>
-          <a:prstGeom prst="ellipse">
-            <a:avLst/>
-          </a:prstGeom>
-          <a:solidFill>
-            <a:srgbClr val="FFF2CC"/>
-          </a:solidFill>
-          <a:ln w="31750">
-            <a:solidFill>
-              <a:srgbClr val="BF8F00"/>
-            </a:solidFill>
-          </a:ln>
-          <a:effectLst/>
-        </p:spPr>
-        <p:style>
-          <a:lnRef idx="1">
-            <a:schemeClr val="accent1"/>
-          </a:lnRef>
-          <a:fillRef idx="3">
-            <a:schemeClr val="accent1"/>
-          </a:fillRef>
-          <a:effectRef idx="2">
-            <a:schemeClr val="accent1"/>
-          </a:effectRef>
-          <a:fontRef idx="minor">
-            <a:schemeClr val="lt1"/>
-          </a:fontRef>
-        </p:style>
-        <p:txBody>
-          <a:bodyPr rtlCol="0" anchor="ctr" wrap="none" lIns="64000" rIns="64000" tIns="25400" bIns="25400"/>
-          <a:lstStyle/>
-          <a:p>
-            <a:pPr algn="ctr"/>
-            <a:r>
-              <a:rPr sz="1500" b="1">
-                <a:solidFill>
-                  <a:srgbClr val="000000"/>
-                </a:solidFill>
-                <a:latin typeface="Calibri"/>
-              </a:rPr>
-              <a:t>④ Tiếng Việt</a:t>
-            </a:r>
-          </a:p>
-          <a:p>
-            <a:pPr algn="ctr"/>
-            <a:r>
-              <a:rPr sz="1500" b="1">
-                <a:solidFill>
-                  <a:srgbClr val="000000"/>
-                </a:solidFill>
-                <a:latin typeface="Calibri"/>
-              </a:rPr>
-              <a:t>– Viết –</a:t>
-            </a:r>
-          </a:p>
-          <a:p>
-            <a:pPr algn="ctr"/>
-            <a:r>
-              <a:rPr sz="1500" b="1">
-                <a:solidFill>
-                  <a:srgbClr val="000000"/>
-                </a:solidFill>
-                <a:latin typeface="Calibri"/>
-              </a:rPr>
-              <a:t>Nói</a:t>
-            </a:r>
-          </a:p>
-        </p:txBody>
-      </p:sp>
-      <p:sp>
-        <p:nvSpPr>
-          <p:cNvPr id="47" name="Oval 46"/>
-          <p:cNvSpPr/>
-          <p:nvPr/>
-        </p:nvSpPr>
-        <p:spPr>
-          <a:xfrm>
-            <a:off x="5098528" y="3484793"/>
-            <a:ext cx="1857477" cy="939972"/>
-          </a:xfrm>
-          <a:prstGeom prst="ellipse">
-            <a:avLst/>
-          </a:prstGeom>
-          <a:solidFill>
-            <a:srgbClr val="002060"/>
-          </a:solidFill>
-          <a:ln w="25400">
-            <a:solidFill>
-              <a:srgbClr val="000B1E"/>
-            </a:solidFill>
-          </a:ln>
-          <a:effectLst/>
-        </p:spPr>
-        <p:style>
-          <a:lnRef idx="1">
-            <a:schemeClr val="accent1"/>
-          </a:lnRef>
-          <a:fillRef idx="3">
-            <a:schemeClr val="accent1"/>
-          </a:fillRef>
-          <a:effectRef idx="2">
-            <a:schemeClr val="accent1"/>
-          </a:effectRef>
-          <a:fontRef idx="minor">
-            <a:schemeClr val="lt1"/>
-          </a:fontRef>
-        </p:style>
-        <p:txBody>
-          <a:bodyPr rtlCol="0" anchor="ctr" wrap="none" lIns="64000" rIns="64000" tIns="25400" bIns="25400"/>
-          <a:lstStyle/>
-          <a:p>
-            <a:pPr algn="ctr"/>
-            <a:r>
-              <a:rPr sz="1700" b="1">
-                <a:solidFill>
-                  <a:srgbClr val="FFFFFF"/>
-                </a:solidFill>
-                <a:latin typeface="Calibri"/>
-              </a:rPr>
-              <a:t>VẺ ĐẸP CỦA</a:t>
-            </a:r>
-          </a:p>
-          <a:p>
-            <a:pPr algn="ctr"/>
-            <a:r>
-              <a:rPr sz="1700" b="1">
-                <a:solidFill>
-                  <a:srgbClr val="FFFFFF"/>
-                </a:solidFill>
-                <a:latin typeface="Calibri"/>
-              </a:rPr>
-              <a:t>THƠ CA</a:t>
+              <a:t>Tránh diễn xuôi bài thơ.</a:t>
             </a:r>
           </a:p>
         </p:txBody>
@@ -19732,8 +17994,370 @@
         </p:nvSpPr>
         <p:spPr>
           <a:xfrm>
-            <a:off x="10097719" y="457200"/>
-            <a:ext cx="1545336" cy="457200"/>
+            <a:off x="10253167" y="457200"/>
+            <a:ext cx="1389888" cy="457200"/>
+          </a:xfrm>
+          <a:prstGeom prst="roundRect">
+            <a:avLst/>
+          </a:prstGeom>
+          <a:solidFill>
+            <a:srgbClr val="1E40AF"/>
+          </a:solidFill>
+          <a:ln>
+            <a:noFill/>
+          </a:ln>
+          <a:effectLst/>
+        </p:spPr>
+        <p:style>
+          <a:lnRef idx="1">
+            <a:schemeClr val="accent1"/>
+          </a:lnRef>
+          <a:fillRef idx="3">
+            <a:schemeClr val="accent1"/>
+          </a:fillRef>
+          <a:effectRef idx="2">
+            <a:schemeClr val="accent1"/>
+          </a:effectRef>
+          <a:fontRef idx="minor">
+            <a:schemeClr val="lt1"/>
+          </a:fontRef>
+        </p:style>
+        <p:txBody>
+          <a:bodyPr rtlCol="0" anchor="ctr" wrap="none" tIns="0" bIns="0"/>
+          <a:lstStyle/>
+          <a:p>
+            <a:pPr algn="ctr"/>
+            <a:r>
+              <a:rPr sz="1400" b="1">
+                <a:solidFill>
+                  <a:srgbClr val="FFFFFF"/>
+                </a:solidFill>
+                <a:latin typeface="Arial"/>
+              </a:rPr>
+              <a:t>ĐỀ BÀI</a:t>
+            </a:r>
+          </a:p>
+        </p:txBody>
+      </p:sp>
+      <p:sp>
+        <p:nvSpPr>
+          <p:cNvPr id="4" name="TextBox 3"/>
+          <p:cNvSpPr txBox="1"/>
+          <p:nvPr/>
+        </p:nvSpPr>
+        <p:spPr>
+          <a:xfrm>
+            <a:off x="731520" y="274320"/>
+            <a:ext cx="9582912" cy="868680"/>
+          </a:xfrm>
+          <a:prstGeom prst="rect">
+            <a:avLst/>
+          </a:prstGeom>
+          <a:noFill/>
+        </p:spPr>
+        <p:txBody>
+          <a:bodyPr wrap="square" anchor="ctr">
+            <a:spAutoFit/>
+          </a:bodyPr>
+          <a:lstStyle/>
+          <a:p>
+            <a:r>
+              <a:rPr sz="3600" b="1">
+                <a:solidFill>
+                  <a:srgbClr val="1E40AF"/>
+                </a:solidFill>
+                <a:latin typeface="Arial"/>
+              </a:rPr>
+              <a:t>ĐỀ THỰC HÀNH VIẾT</a:t>
+            </a:r>
+          </a:p>
+        </p:txBody>
+      </p:sp>
+      <p:sp>
+        <p:nvSpPr>
+          <p:cNvPr id="5" name="Rectangle 4"/>
+          <p:cNvSpPr/>
+          <p:nvPr/>
+        </p:nvSpPr>
+        <p:spPr>
+          <a:xfrm>
+            <a:off x="457200" y="1207008"/>
+            <a:ext cx="11274552" cy="22000"/>
+          </a:xfrm>
+          <a:prstGeom prst="rect">
+            <a:avLst/>
+          </a:prstGeom>
+          <a:solidFill>
+            <a:srgbClr val="E2E8F0"/>
+          </a:solidFill>
+          <a:ln>
+            <a:noFill/>
+          </a:ln>
+          <a:effectLst/>
+        </p:spPr>
+        <p:style>
+          <a:lnRef idx="1">
+            <a:schemeClr val="accent1"/>
+          </a:lnRef>
+          <a:fillRef idx="3">
+            <a:schemeClr val="accent1"/>
+          </a:fillRef>
+          <a:effectRef idx="2">
+            <a:schemeClr val="accent1"/>
+          </a:effectRef>
+          <a:fontRef idx="minor">
+            <a:schemeClr val="lt1"/>
+          </a:fontRef>
+        </p:style>
+        <p:txBody>
+          <a:bodyPr rtlCol="0" anchor="ctr"/>
+          <a:lstStyle/>
+          <a:p>
+            <a:pPr algn="ctr"/>
+          </a:p>
+        </p:txBody>
+      </p:sp>
+      <p:sp>
+        <p:nvSpPr>
+          <p:cNvPr id="6" name="TextBox 5"/>
+          <p:cNvSpPr txBox="1"/>
+          <p:nvPr/>
+        </p:nvSpPr>
+        <p:spPr>
+          <a:xfrm>
+            <a:off x="457200" y="6355080"/>
+            <a:ext cx="11274552" cy="365760"/>
+          </a:xfrm>
+          <a:prstGeom prst="rect">
+            <a:avLst/>
+          </a:prstGeom>
+          <a:noFill/>
+        </p:spPr>
+        <p:txBody>
+          <a:bodyPr wrap="none">
+            <a:spAutoFit/>
+          </a:bodyPr>
+          <a:lstStyle/>
+          <a:p>
+            <a:pPr algn="r"/>
+            <a:r>
+              <a:rPr sz="1200">
+                <a:solidFill>
+                  <a:srgbClr val="64748B"/>
+                </a:solidFill>
+                <a:latin typeface="Calibri"/>
+              </a:rPr>
+              <a:t>Ngữ văn 10 · Bài 2: Vẻ Đẹp Của Thơ Ca          43</a:t>
+            </a:r>
+          </a:p>
+        </p:txBody>
+      </p:sp>
+      <p:sp>
+        <p:nvSpPr>
+          <p:cNvPr id="7" name="TextBox 6"/>
+          <p:cNvSpPr txBox="1"/>
+          <p:nvPr/>
+        </p:nvSpPr>
+        <p:spPr>
+          <a:xfrm>
+            <a:off x="731520" y="1463040"/>
+            <a:ext cx="10789920" cy="3566160"/>
+          </a:xfrm>
+          <a:prstGeom prst="rect">
+            <a:avLst/>
+          </a:prstGeom>
+          <a:noFill/>
+        </p:spPr>
+        <p:txBody>
+          <a:bodyPr wrap="square" anchor="t" lIns="45720" rIns="45720">
+            <a:spAutoFit/>
+          </a:bodyPr>
+          <a:lstStyle/>
+          <a:p>
+            <a:pPr algn="l">
+              <a:spcAft>
+                <a:spcPts val="800"/>
+              </a:spcAft>
+            </a:pPr>
+            <a:r>
+              <a:rPr sz="2600" b="1">
+                <a:solidFill>
+                  <a:srgbClr val="1E293B"/>
+                </a:solidFill>
+                <a:latin typeface="Calibri"/>
+              </a:rPr>
+              <a:t>Phân tích, đánh giá chủ đề và nét đặc sắc nghệ thuật của bài thơ Mùa xuân chín (Hàn Mặc Tử).</a:t>
+            </a:r>
+          </a:p>
+        </p:txBody>
+      </p:sp>
+      <p:sp>
+        <p:nvSpPr>
+          <p:cNvPr id="8" name="Rounded Rectangle 7"/>
+          <p:cNvSpPr/>
+          <p:nvPr/>
+        </p:nvSpPr>
+        <p:spPr>
+          <a:xfrm>
+            <a:off x="731520" y="5120640"/>
+            <a:ext cx="10789920" cy="693420"/>
+          </a:xfrm>
+          <a:prstGeom prst="roundRect">
+            <a:avLst>
+              <a:gd name="adj" fmla="val 8000"/>
+            </a:avLst>
+          </a:prstGeom>
+          <a:solidFill>
+            <a:srgbClr val="EFF4FF"/>
+          </a:solidFill>
+          <a:ln w="19050">
+            <a:solidFill>
+              <a:srgbClr val="1E40AF"/>
+            </a:solidFill>
+          </a:ln>
+          <a:effectLst/>
+        </p:spPr>
+        <p:style>
+          <a:lnRef idx="1">
+            <a:schemeClr val="accent1"/>
+          </a:lnRef>
+          <a:fillRef idx="3">
+            <a:schemeClr val="accent1"/>
+          </a:fillRef>
+          <a:effectRef idx="2">
+            <a:schemeClr val="accent1"/>
+          </a:effectRef>
+          <a:fontRef idx="minor">
+            <a:schemeClr val="lt1"/>
+          </a:fontRef>
+        </p:style>
+        <p:txBody>
+          <a:bodyPr rtlCol="0" anchor="ctr"/>
+          <a:lstStyle/>
+          <a:p>
+            <a:pPr algn="ctr"/>
+          </a:p>
+        </p:txBody>
+      </p:sp>
+      <p:sp>
+        <p:nvSpPr>
+          <p:cNvPr id="9" name="TextBox 8"/>
+          <p:cNvSpPr txBox="1"/>
+          <p:nvPr/>
+        </p:nvSpPr>
+        <p:spPr>
+          <a:xfrm>
+            <a:off x="914400" y="5120640"/>
+            <a:ext cx="10424160" cy="693420"/>
+          </a:xfrm>
+          <a:prstGeom prst="rect">
+            <a:avLst/>
+          </a:prstGeom>
+          <a:noFill/>
+        </p:spPr>
+        <p:txBody>
+          <a:bodyPr wrap="square" anchor="ctr" lIns="45720" rIns="45720">
+            <a:spAutoFit/>
+          </a:bodyPr>
+          <a:lstStyle/>
+          <a:p>
+            <a:pPr algn="l">
+              <a:spcAft>
+                <a:spcPts val="400"/>
+              </a:spcAft>
+            </a:pPr>
+            <a:r>
+              <a:rPr sz="2200" b="1">
+                <a:solidFill>
+                  <a:srgbClr val="1E40AF"/>
+                </a:solidFill>
+                <a:latin typeface="Calibri"/>
+              </a:rPr>
+              <a:t>💡 Lập dàn ý theo mạch khổ thơ hoặc theo luận điểm.</a:t>
+            </a:r>
+          </a:p>
+        </p:txBody>
+      </p:sp>
+    </p:spTree>
+  </p:cSld>
+  <p:clrMapOvr>
+    <a:masterClrMapping/>
+  </p:clrMapOvr>
+</p:sld>
+</file>
+
+<file path=ppt/slides/slide44.xml><?xml version="1.0" encoding="utf-8"?>
+<p:sld xmlns:a="http://schemas.openxmlformats.org/drawingml/2006/main" xmlns:p="http://schemas.openxmlformats.org/presentationml/2006/main" xmlns:r="http://schemas.openxmlformats.org/officeDocument/2006/relationships">
+  <p:cSld>
+    <p:bg>
+      <p:bgPr>
+        <a:solidFill>
+          <a:srgbClr val="FFFFFF"/>
+        </a:solidFill>
+        <a:effectLst/>
+      </p:bgPr>
+    </p:bg>
+    <p:spTree>
+      <p:nvGrpSpPr>
+        <p:cNvPr id="1" name=""/>
+        <p:cNvGrpSpPr/>
+        <p:nvPr/>
+      </p:nvGrpSpPr>
+      <p:grpSpPr/>
+      <p:sp>
+        <p:nvSpPr>
+          <p:cNvPr id="2" name="Rectangle 1"/>
+          <p:cNvSpPr/>
+          <p:nvPr/>
+        </p:nvSpPr>
+        <p:spPr>
+          <a:xfrm>
+            <a:off x="457200" y="384048"/>
+            <a:ext cx="109728" cy="658368"/>
+          </a:xfrm>
+          <a:prstGeom prst="rect">
+            <a:avLst/>
+          </a:prstGeom>
+          <a:solidFill>
+            <a:srgbClr val="1E40AF"/>
+          </a:solidFill>
+          <a:ln>
+            <a:noFill/>
+          </a:ln>
+          <a:effectLst/>
+        </p:spPr>
+        <p:style>
+          <a:lnRef idx="1">
+            <a:schemeClr val="accent1"/>
+          </a:lnRef>
+          <a:fillRef idx="3">
+            <a:schemeClr val="accent1"/>
+          </a:fillRef>
+          <a:effectRef idx="2">
+            <a:schemeClr val="accent1"/>
+          </a:effectRef>
+          <a:fontRef idx="minor">
+            <a:schemeClr val="lt1"/>
+          </a:fontRef>
+        </p:style>
+        <p:txBody>
+          <a:bodyPr rtlCol="0" anchor="ctr"/>
+          <a:lstStyle/>
+          <a:p>
+            <a:pPr algn="ctr"/>
+          </a:p>
+        </p:txBody>
+      </p:sp>
+      <p:sp>
+        <p:nvSpPr>
+          <p:cNvPr id="3" name="Rounded Rectangle 2"/>
+          <p:cNvSpPr/>
+          <p:nvPr/>
+        </p:nvSpPr>
+        <p:spPr>
+          <a:xfrm>
+            <a:off x="9942271" y="457200"/>
+            <a:ext cx="1700784" cy="457200"/>
           </a:xfrm>
           <a:prstGeom prst="roundRect">
             <a:avLst/>
@@ -19772,7 +18396,7 @@
                 </a:solidFill>
                 <a:latin typeface="Arial"/>
               </a:rPr>
-              <a:t>CỦNG CỐ</a:t>
+              <a:t>LỜI GIẢI</a:t>
             </a:r>
           </a:p>
         </p:txBody>
@@ -19786,7 +18410,7 @@
         <p:spPr>
           <a:xfrm>
             <a:off x="731520" y="274320"/>
-            <a:ext cx="9427464" cy="868680"/>
+            <a:ext cx="9272016" cy="868680"/>
           </a:xfrm>
           <a:prstGeom prst="rect">
             <a:avLst/>
@@ -19806,7 +18430,7 @@
                 </a:solidFill>
                 <a:latin typeface="Arial"/>
               </a:rPr>
-              <a:t>BÀI TẬP CỦA BẠN</a:t>
+              <a:t>ĐỀ THỰC HÀNH VIẾT</a:t>
             </a:r>
           </a:p>
         </p:txBody>
@@ -19885,7 +18509,2655 @@
                 </a:solidFill>
                 <a:latin typeface="Calibri"/>
               </a:rPr>
-              <a:t>Ngữ văn 10 · Bài 2: Vẻ Đẹp Của Thơ Ca          43</a:t>
+              <a:t>Ngữ văn 10 · Bài 2: Vẻ Đẹp Của Thơ Ca          44</a:t>
+            </a:r>
+          </a:p>
+        </p:txBody>
+      </p:sp>
+      <p:sp>
+        <p:nvSpPr>
+          <p:cNvPr id="7" name="TextBox 6"/>
+          <p:cNvSpPr txBox="1"/>
+          <p:nvPr/>
+        </p:nvSpPr>
+        <p:spPr>
+          <a:xfrm>
+            <a:off x="731520" y="1463040"/>
+            <a:ext cx="10789920" cy="3474720"/>
+          </a:xfrm>
+          <a:prstGeom prst="rect">
+            <a:avLst/>
+          </a:prstGeom>
+          <a:noFill/>
+        </p:spPr>
+        <p:txBody>
+          <a:bodyPr wrap="square" anchor="t" lIns="45720" rIns="45720">
+            <a:spAutoFit/>
+          </a:bodyPr>
+          <a:lstStyle/>
+          <a:p>
+            <a:pPr algn="l" marL="365760" indent="-365760">
+              <a:spcAft>
+                <a:spcPts val="800"/>
+              </a:spcAft>
+              <a:buClr>
+                <a:srgbClr val="1E40AF"/>
+              </a:buClr>
+              <a:buFont typeface="Arial"/>
+              <a:buChar char="•"/>
+            </a:pPr>
+            <a:r>
+              <a:rPr sz="2300">
+                <a:solidFill>
+                  <a:srgbClr val="1E293B"/>
+                </a:solidFill>
+                <a:latin typeface="Calibri"/>
+              </a:rPr>
+              <a:t>MB: giới thiệu Hàn Mặc Tử, bài thơ.</a:t>
+            </a:r>
+          </a:p>
+          <a:p>
+            <a:pPr algn="l" marL="365760" indent="-365760">
+              <a:spcAft>
+                <a:spcPts val="800"/>
+              </a:spcAft>
+              <a:buClr>
+                <a:srgbClr val="1E40AF"/>
+              </a:buClr>
+              <a:buFont typeface="Arial"/>
+              <a:buChar char="•"/>
+            </a:pPr>
+            <a:r>
+              <a:rPr sz="2300">
+                <a:solidFill>
+                  <a:srgbClr val="1E293B"/>
+                </a:solidFill>
+                <a:latin typeface="Calibri"/>
+              </a:rPr>
+              <a:t>TB: bức tranh xuân “chín” → âm thanh, con người → nỗi nhớ làng → nghệ thuật.</a:t>
+            </a:r>
+          </a:p>
+          <a:p>
+            <a:pPr algn="l" marL="365760" indent="-365760">
+              <a:spcAft>
+                <a:spcPts val="800"/>
+              </a:spcAft>
+              <a:buClr>
+                <a:srgbClr val="1E40AF"/>
+              </a:buClr>
+              <a:buFont typeface="Arial"/>
+              <a:buChar char="•"/>
+            </a:pPr>
+            <a:r>
+              <a:rPr sz="2300">
+                <a:solidFill>
+                  <a:srgbClr val="1E293B"/>
+                </a:solidFill>
+                <a:latin typeface="Calibri"/>
+              </a:rPr>
+              <a:t>Đánh giá giá trị nghệ thuật, ý nghĩa nhân sinh.</a:t>
+            </a:r>
+          </a:p>
+          <a:p>
+            <a:pPr algn="l" marL="365760" indent="-365760">
+              <a:spcAft>
+                <a:spcPts val="800"/>
+              </a:spcAft>
+              <a:buClr>
+                <a:srgbClr val="1E40AF"/>
+              </a:buClr>
+              <a:buFont typeface="Arial"/>
+              <a:buChar char="•"/>
+            </a:pPr>
+            <a:r>
+              <a:rPr sz="2300">
+                <a:solidFill>
+                  <a:srgbClr val="1E293B"/>
+                </a:solidFill>
+                <a:latin typeface="Calibri"/>
+              </a:rPr>
+              <a:t>KB: khẳng định giá trị, cảm nghĩ riêng.</a:t>
+            </a:r>
+          </a:p>
+        </p:txBody>
+      </p:sp>
+      <p:sp>
+        <p:nvSpPr>
+          <p:cNvPr id="8" name="Rounded Rectangle 7"/>
+          <p:cNvSpPr/>
+          <p:nvPr/>
+        </p:nvSpPr>
+        <p:spPr>
+          <a:xfrm>
+            <a:off x="731520" y="5074920"/>
+            <a:ext cx="10789920" cy="731520"/>
+          </a:xfrm>
+          <a:prstGeom prst="roundRect">
+            <a:avLst>
+              <a:gd name="adj" fmla="val 8000"/>
+            </a:avLst>
+          </a:prstGeom>
+          <a:solidFill>
+            <a:srgbClr val="FEF2F2"/>
+          </a:solidFill>
+          <a:ln w="19050">
+            <a:solidFill>
+              <a:srgbClr val="991B1B"/>
+            </a:solidFill>
+          </a:ln>
+          <a:effectLst/>
+        </p:spPr>
+        <p:style>
+          <a:lnRef idx="1">
+            <a:schemeClr val="accent1"/>
+          </a:lnRef>
+          <a:fillRef idx="3">
+            <a:schemeClr val="accent1"/>
+          </a:fillRef>
+          <a:effectRef idx="2">
+            <a:schemeClr val="accent1"/>
+          </a:effectRef>
+          <a:fontRef idx="minor">
+            <a:schemeClr val="lt1"/>
+          </a:fontRef>
+        </p:style>
+        <p:txBody>
+          <a:bodyPr rtlCol="0" anchor="ctr"/>
+          <a:lstStyle/>
+          <a:p>
+            <a:pPr algn="ctr"/>
+          </a:p>
+        </p:txBody>
+      </p:sp>
+      <p:sp>
+        <p:nvSpPr>
+          <p:cNvPr id="9" name="TextBox 8"/>
+          <p:cNvSpPr txBox="1"/>
+          <p:nvPr/>
+        </p:nvSpPr>
+        <p:spPr>
+          <a:xfrm>
+            <a:off x="914400" y="5074920"/>
+            <a:ext cx="10424160" cy="731520"/>
+          </a:xfrm>
+          <a:prstGeom prst="rect">
+            <a:avLst/>
+          </a:prstGeom>
+          <a:noFill/>
+        </p:spPr>
+        <p:txBody>
+          <a:bodyPr wrap="square" anchor="ctr" lIns="45720" rIns="45720">
+            <a:spAutoFit/>
+          </a:bodyPr>
+          <a:lstStyle/>
+          <a:p>
+            <a:pPr algn="l">
+              <a:spcAft>
+                <a:spcPts val="400"/>
+              </a:spcAft>
+            </a:pPr>
+            <a:r>
+              <a:rPr sz="2400" b="1">
+                <a:solidFill>
+                  <a:srgbClr val="991B1B"/>
+                </a:solidFill>
+                <a:latin typeface="Calibri"/>
+              </a:rPr>
+              <a:t>Gắn phân tích hình thức với cảm xúc.</a:t>
+            </a:r>
+          </a:p>
+        </p:txBody>
+      </p:sp>
+    </p:spTree>
+  </p:cSld>
+  <p:clrMapOvr>
+    <a:masterClrMapping/>
+  </p:clrMapOvr>
+</p:sld>
+</file>
+
+<file path=ppt/slides/slide45.xml><?xml version="1.0" encoding="utf-8"?>
+<p:sld xmlns:a="http://schemas.openxmlformats.org/drawingml/2006/main" xmlns:p="http://schemas.openxmlformats.org/presentationml/2006/main" xmlns:r="http://schemas.openxmlformats.org/officeDocument/2006/relationships">
+  <p:cSld>
+    <p:bg>
+      <p:bgPr>
+        <a:solidFill>
+          <a:srgbClr val="FFFFFF"/>
+        </a:solidFill>
+        <a:effectLst/>
+      </p:bgPr>
+    </p:bg>
+    <p:spTree>
+      <p:nvGrpSpPr>
+        <p:cNvPr id="1" name=""/>
+        <p:cNvGrpSpPr/>
+        <p:nvPr/>
+      </p:nvGrpSpPr>
+      <p:grpSpPr/>
+      <p:sp>
+        <p:nvSpPr>
+          <p:cNvPr id="4" name="TextBox 3"/>
+          <p:cNvSpPr txBox="1"/>
+          <p:nvPr/>
+        </p:nvSpPr>
+        <p:spPr>
+          <a:xfrm>
+            <a:off x="731520" y="274320"/>
+            <a:ext cx="9427464" cy="868680"/>
+          </a:xfrm>
+          <a:prstGeom prst="rect">
+            <a:avLst/>
+          </a:prstGeom>
+          <a:noFill/>
+        </p:spPr>
+        <p:txBody>
+          <a:bodyPr wrap="square" anchor="ctr">
+            <a:spAutoFit/>
+          </a:bodyPr>
+          <a:lstStyle/>
+          <a:p>
+            <a:r>
+              <a:rPr sz="3600" b="1">
+                <a:solidFill>
+                  <a:srgbClr val="1E40AF"/>
+                </a:solidFill>
+                <a:latin typeface="Arial"/>
+              </a:rPr>
+              <a:t>SƠ ĐỒ TƯ DUY</a:t>
+            </a:r>
+          </a:p>
+        </p:txBody>
+      </p:sp>
+      <p:sp>
+        <p:nvSpPr>
+          <p:cNvPr id="5" name="Rectangle 4"/>
+          <p:cNvSpPr/>
+          <p:nvPr/>
+        </p:nvSpPr>
+        <p:spPr>
+          <a:xfrm>
+            <a:off x="457200" y="1207008"/>
+            <a:ext cx="11274552" cy="22000"/>
+          </a:xfrm>
+          <a:prstGeom prst="rect">
+            <a:avLst/>
+          </a:prstGeom>
+          <a:solidFill>
+            <a:srgbClr val="E2E8F0"/>
+          </a:solidFill>
+          <a:ln>
+            <a:noFill/>
+          </a:ln>
+          <a:effectLst/>
+        </p:spPr>
+        <p:style>
+          <a:lnRef idx="1">
+            <a:schemeClr val="accent1"/>
+          </a:lnRef>
+          <a:fillRef idx="3">
+            <a:schemeClr val="accent1"/>
+          </a:fillRef>
+          <a:effectRef idx="2">
+            <a:schemeClr val="accent1"/>
+          </a:effectRef>
+          <a:fontRef idx="minor">
+            <a:schemeClr val="lt1"/>
+          </a:fontRef>
+        </p:style>
+        <p:txBody>
+          <a:bodyPr rtlCol="0" anchor="ctr"/>
+          <a:lstStyle/>
+          <a:p>
+            <a:pPr algn="ctr"/>
+          </a:p>
+        </p:txBody>
+      </p:sp>
+      <p:sp>
+        <p:nvSpPr>
+          <p:cNvPr id="6" name="TextBox 5"/>
+          <p:cNvSpPr txBox="1"/>
+          <p:nvPr/>
+        </p:nvSpPr>
+        <p:spPr>
+          <a:xfrm>
+            <a:off x="457200" y="6355080"/>
+            <a:ext cx="11274552" cy="365760"/>
+          </a:xfrm>
+          <a:prstGeom prst="rect">
+            <a:avLst/>
+          </a:prstGeom>
+          <a:noFill/>
+        </p:spPr>
+        <p:txBody>
+          <a:bodyPr wrap="none">
+            <a:spAutoFit/>
+          </a:bodyPr>
+          <a:lstStyle/>
+          <a:p>
+            <a:pPr algn="r"/>
+            <a:r>
+              <a:rPr sz="1200">
+                <a:solidFill>
+                  <a:srgbClr val="64748B"/>
+                </a:solidFill>
+                <a:latin typeface="Calibri"/>
+              </a:rPr>
+              <a:t>Ngữ văn 10 · Bài 2: Vẻ Đẹp Của Thơ Ca          45</a:t>
+            </a:r>
+          </a:p>
+        </p:txBody>
+      </p:sp>
+      <p:cxnSp>
+        <p:nvCxnSpPr>
+          <p:cNvPr id="7" name="Connector 6"/>
+          <p:cNvCxnSpPr/>
+          <p:nvPr/>
+        </p:nvCxnSpPr>
+        <p:spPr>
+          <a:xfrm flipH="1" flipV="1">
+            <a:off x="4338888" y="2670962"/>
+            <a:ext cx="1688379" cy="1283818"/>
+          </a:xfrm>
+          <a:prstGeom prst="line">
+            <a:avLst/>
+          </a:prstGeom>
+          <a:ln w="44450">
+            <a:solidFill>
+              <a:srgbClr val="548235"/>
+            </a:solidFill>
+          </a:ln>
+        </p:spPr>
+        <p:style>
+          <a:lnRef idx="2">
+            <a:schemeClr val="accent1"/>
+          </a:lnRef>
+          <a:fillRef idx="0">
+            <a:schemeClr val="accent1"/>
+          </a:fillRef>
+          <a:effectRef idx="1">
+            <a:schemeClr val="accent1"/>
+          </a:effectRef>
+          <a:fontRef idx="minor">
+            <a:schemeClr val="tx1"/>
+          </a:fontRef>
+        </p:style>
+      </p:cxnSp>
+      <p:cxnSp>
+        <p:nvCxnSpPr>
+          <p:cNvPr id="8" name="Connector 7"/>
+          <p:cNvCxnSpPr/>
+          <p:nvPr/>
+        </p:nvCxnSpPr>
+        <p:spPr>
+          <a:xfrm flipH="1" flipV="1">
+            <a:off x="2735059" y="1931116"/>
+            <a:ext cx="1603829" cy="739846"/>
+          </a:xfrm>
+          <a:prstGeom prst="line">
+            <a:avLst/>
+          </a:prstGeom>
+          <a:ln w="15875">
+            <a:solidFill>
+              <a:srgbClr val="548235"/>
+            </a:solidFill>
+          </a:ln>
+        </p:spPr>
+        <p:style>
+          <a:lnRef idx="2">
+            <a:schemeClr val="accent1"/>
+          </a:lnRef>
+          <a:fillRef idx="0">
+            <a:schemeClr val="accent1"/>
+          </a:fillRef>
+          <a:effectRef idx="1">
+            <a:schemeClr val="accent1"/>
+          </a:effectRef>
+          <a:fontRef idx="minor">
+            <a:schemeClr val="tx1"/>
+          </a:fontRef>
+        </p:style>
+      </p:cxnSp>
+      <p:sp>
+        <p:nvSpPr>
+          <p:cNvPr id="9" name="Rounded Rectangle 8"/>
+          <p:cNvSpPr/>
+          <p:nvPr/>
+        </p:nvSpPr>
+        <p:spPr>
+          <a:xfrm>
+            <a:off x="877582" y="1755515"/>
+            <a:ext cx="1857477" cy="351200"/>
+          </a:xfrm>
+          <a:prstGeom prst="roundRect">
+            <a:avLst>
+              <a:gd name="adj" fmla="val 50000"/>
+            </a:avLst>
+          </a:prstGeom>
+          <a:solidFill>
+            <a:srgbClr val="EDF5E8"/>
+          </a:solidFill>
+          <a:ln w="15875">
+            <a:solidFill>
+              <a:srgbClr val="548235"/>
+            </a:solidFill>
+          </a:ln>
+          <a:effectLst/>
+        </p:spPr>
+        <p:style>
+          <a:lnRef idx="1">
+            <a:schemeClr val="accent1"/>
+          </a:lnRef>
+          <a:fillRef idx="3">
+            <a:schemeClr val="accent1"/>
+          </a:fillRef>
+          <a:effectRef idx="2">
+            <a:schemeClr val="accent1"/>
+          </a:effectRef>
+          <a:fontRef idx="minor">
+            <a:schemeClr val="lt1"/>
+          </a:fontRef>
+        </p:style>
+        <p:txBody>
+          <a:bodyPr rtlCol="0" anchor="ctr" wrap="none" lIns="64000" rIns="64000" tIns="25400" bIns="25400"/>
+          <a:lstStyle/>
+          <a:p>
+            <a:pPr algn="ctr"/>
+            <a:r>
+              <a:rPr sz="1300" b="1">
+                <a:solidFill>
+                  <a:srgbClr val="8B0000"/>
+                </a:solidFill>
+                <a:latin typeface="Calibri"/>
+              </a:rPr>
+              <a:t>Nhân vật trữ tình</a:t>
+            </a:r>
+          </a:p>
+        </p:txBody>
+      </p:sp>
+      <p:cxnSp>
+        <p:nvCxnSpPr>
+          <p:cNvPr id="10" name="Connector 9"/>
+          <p:cNvCxnSpPr/>
+          <p:nvPr/>
+        </p:nvCxnSpPr>
+        <p:spPr>
+          <a:xfrm flipH="1" flipV="1">
+            <a:off x="2464295" y="2357206"/>
+            <a:ext cx="1874593" cy="313756"/>
+          </a:xfrm>
+          <a:prstGeom prst="line">
+            <a:avLst/>
+          </a:prstGeom>
+          <a:ln w="15875">
+            <a:solidFill>
+              <a:srgbClr val="548235"/>
+            </a:solidFill>
+          </a:ln>
+        </p:spPr>
+        <p:style>
+          <a:lnRef idx="2">
+            <a:schemeClr val="accent1"/>
+          </a:lnRef>
+          <a:fillRef idx="0">
+            <a:schemeClr val="accent1"/>
+          </a:fillRef>
+          <a:effectRef idx="1">
+            <a:schemeClr val="accent1"/>
+          </a:effectRef>
+          <a:fontRef idx="minor">
+            <a:schemeClr val="tx1"/>
+          </a:fontRef>
+        </p:style>
+      </p:cxnSp>
+      <p:sp>
+        <p:nvSpPr>
+          <p:cNvPr id="11" name="Rounded Rectangle 10"/>
+          <p:cNvSpPr/>
+          <p:nvPr/>
+        </p:nvSpPr>
+        <p:spPr>
+          <a:xfrm>
+            <a:off x="1148346" y="2181605"/>
+            <a:ext cx="1315949" cy="351200"/>
+          </a:xfrm>
+          <a:prstGeom prst="roundRect">
+            <a:avLst>
+              <a:gd name="adj" fmla="val 50000"/>
+            </a:avLst>
+          </a:prstGeom>
+          <a:solidFill>
+            <a:srgbClr val="EDF5E8"/>
+          </a:solidFill>
+          <a:ln w="15875">
+            <a:solidFill>
+              <a:srgbClr val="548235"/>
+            </a:solidFill>
+          </a:ln>
+          <a:effectLst/>
+        </p:spPr>
+        <p:style>
+          <a:lnRef idx="1">
+            <a:schemeClr val="accent1"/>
+          </a:lnRef>
+          <a:fillRef idx="3">
+            <a:schemeClr val="accent1"/>
+          </a:fillRef>
+          <a:effectRef idx="2">
+            <a:schemeClr val="accent1"/>
+          </a:effectRef>
+          <a:fontRef idx="minor">
+            <a:schemeClr val="lt1"/>
+          </a:fontRef>
+        </p:style>
+        <p:txBody>
+          <a:bodyPr rtlCol="0" anchor="ctr" wrap="none" lIns="64000" rIns="64000" tIns="25400" bIns="25400"/>
+          <a:lstStyle/>
+          <a:p>
+            <a:pPr algn="ctr"/>
+            <a:r>
+              <a:rPr sz="1300" b="0">
+                <a:solidFill>
+                  <a:srgbClr val="000000"/>
+                </a:solidFill>
+                <a:latin typeface="Calibri"/>
+              </a:rPr>
+              <a:t>Hình ảnh thơ</a:t>
+            </a:r>
+          </a:p>
+        </p:txBody>
+      </p:sp>
+      <p:cxnSp>
+        <p:nvCxnSpPr>
+          <p:cNvPr id="12" name="Connector 11"/>
+          <p:cNvCxnSpPr/>
+          <p:nvPr/>
+        </p:nvCxnSpPr>
+        <p:spPr>
+          <a:xfrm flipH="1">
+            <a:off x="2593073" y="2670962"/>
+            <a:ext cx="1745815" cy="213045"/>
+          </a:xfrm>
+          <a:prstGeom prst="line">
+            <a:avLst/>
+          </a:prstGeom>
+          <a:ln w="15875">
+            <a:solidFill>
+              <a:srgbClr val="548235"/>
+            </a:solidFill>
+          </a:ln>
+        </p:spPr>
+        <p:style>
+          <a:lnRef idx="2">
+            <a:schemeClr val="accent1"/>
+          </a:lnRef>
+          <a:fillRef idx="0">
+            <a:schemeClr val="accent1"/>
+          </a:fillRef>
+          <a:effectRef idx="1">
+            <a:schemeClr val="accent1"/>
+          </a:effectRef>
+          <a:fontRef idx="minor">
+            <a:schemeClr val="tx1"/>
+          </a:fontRef>
+        </p:style>
+      </p:cxnSp>
+      <p:sp>
+        <p:nvSpPr>
+          <p:cNvPr id="13" name="Rounded Rectangle 12"/>
+          <p:cNvSpPr/>
+          <p:nvPr/>
+        </p:nvSpPr>
+        <p:spPr>
+          <a:xfrm>
+            <a:off x="1019568" y="2607696"/>
+            <a:ext cx="1573505" cy="552622"/>
+          </a:xfrm>
+          <a:prstGeom prst="roundRect">
+            <a:avLst>
+              <a:gd name="adj" fmla="val 50000"/>
+            </a:avLst>
+          </a:prstGeom>
+          <a:solidFill>
+            <a:srgbClr val="EDF5E8"/>
+          </a:solidFill>
+          <a:ln w="15875">
+            <a:solidFill>
+              <a:srgbClr val="548235"/>
+            </a:solidFill>
+          </a:ln>
+          <a:effectLst/>
+        </p:spPr>
+        <p:style>
+          <a:lnRef idx="1">
+            <a:schemeClr val="accent1"/>
+          </a:lnRef>
+          <a:fillRef idx="3">
+            <a:schemeClr val="accent1"/>
+          </a:fillRef>
+          <a:effectRef idx="2">
+            <a:schemeClr val="accent1"/>
+          </a:effectRef>
+          <a:fontRef idx="minor">
+            <a:schemeClr val="lt1"/>
+          </a:fontRef>
+        </p:style>
+        <p:txBody>
+          <a:bodyPr rtlCol="0" anchor="ctr" wrap="none" lIns="64000" rIns="64000" tIns="25400" bIns="25400"/>
+          <a:lstStyle/>
+          <a:p>
+            <a:pPr algn="ctr"/>
+            <a:r>
+              <a:rPr sz="1300" b="0">
+                <a:solidFill>
+                  <a:srgbClr val="000000"/>
+                </a:solidFill>
+                <a:latin typeface="Calibri"/>
+              </a:rPr>
+              <a:t>Vần – nhịp –</a:t>
+            </a:r>
+          </a:p>
+          <a:p>
+            <a:pPr algn="ctr"/>
+            <a:r>
+              <a:rPr sz="1300" b="0">
+                <a:solidFill>
+                  <a:srgbClr val="000000"/>
+                </a:solidFill>
+                <a:latin typeface="Calibri"/>
+              </a:rPr>
+              <a:t>nhạc điệu – đối</a:t>
+            </a:r>
+          </a:p>
+        </p:txBody>
+      </p:sp>
+      <p:cxnSp>
+        <p:nvCxnSpPr>
+          <p:cNvPr id="14" name="Connector 13"/>
+          <p:cNvCxnSpPr/>
+          <p:nvPr/>
+        </p:nvCxnSpPr>
+        <p:spPr>
+          <a:xfrm flipH="1">
+            <a:off x="2678925" y="2670962"/>
+            <a:ext cx="1659963" cy="739846"/>
+          </a:xfrm>
+          <a:prstGeom prst="line">
+            <a:avLst/>
+          </a:prstGeom>
+          <a:ln w="15875">
+            <a:solidFill>
+              <a:srgbClr val="548235"/>
+            </a:solidFill>
+          </a:ln>
+        </p:spPr>
+        <p:style>
+          <a:lnRef idx="2">
+            <a:schemeClr val="accent1"/>
+          </a:lnRef>
+          <a:fillRef idx="0">
+            <a:schemeClr val="accent1"/>
+          </a:fillRef>
+          <a:effectRef idx="1">
+            <a:schemeClr val="accent1"/>
+          </a:effectRef>
+          <a:fontRef idx="minor">
+            <a:schemeClr val="tx1"/>
+          </a:fontRef>
+        </p:style>
+      </p:cxnSp>
+      <p:sp>
+        <p:nvSpPr>
+          <p:cNvPr id="15" name="Rounded Rectangle 14"/>
+          <p:cNvSpPr/>
+          <p:nvPr/>
+        </p:nvSpPr>
+        <p:spPr>
+          <a:xfrm>
+            <a:off x="933716" y="3235208"/>
+            <a:ext cx="1745209" cy="351200"/>
+          </a:xfrm>
+          <a:prstGeom prst="roundRect">
+            <a:avLst>
+              <a:gd name="adj" fmla="val 50000"/>
+            </a:avLst>
+          </a:prstGeom>
+          <a:solidFill>
+            <a:srgbClr val="EDF5E8"/>
+          </a:solidFill>
+          <a:ln w="15875">
+            <a:solidFill>
+              <a:srgbClr val="548235"/>
+            </a:solidFill>
+          </a:ln>
+          <a:effectLst/>
+        </p:spPr>
+        <p:style>
+          <a:lnRef idx="1">
+            <a:schemeClr val="accent1"/>
+          </a:lnRef>
+          <a:fillRef idx="3">
+            <a:schemeClr val="accent1"/>
+          </a:fillRef>
+          <a:effectRef idx="2">
+            <a:schemeClr val="accent1"/>
+          </a:effectRef>
+          <a:fontRef idx="minor">
+            <a:schemeClr val="lt1"/>
+          </a:fontRef>
+        </p:style>
+        <p:txBody>
+          <a:bodyPr rtlCol="0" anchor="ctr" wrap="none" lIns="64000" rIns="64000" tIns="25400" bIns="25400"/>
+          <a:lstStyle/>
+          <a:p>
+            <a:pPr algn="ctr"/>
+            <a:r>
+              <a:rPr sz="1300" b="0">
+                <a:solidFill>
+                  <a:srgbClr val="000000"/>
+                </a:solidFill>
+                <a:latin typeface="Calibri"/>
+              </a:rPr>
+              <a:t>Thi luật, thể thơ</a:t>
+            </a:r>
+          </a:p>
+        </p:txBody>
+      </p:sp>
+      <p:sp>
+        <p:nvSpPr>
+          <p:cNvPr id="16" name="Oval 15"/>
+          <p:cNvSpPr/>
+          <p:nvPr/>
+        </p:nvSpPr>
+        <p:spPr>
+          <a:xfrm>
+            <a:off x="3502606" y="2259078"/>
+            <a:ext cx="1672565" cy="823767"/>
+          </a:xfrm>
+          <a:prstGeom prst="ellipse">
+            <a:avLst/>
+          </a:prstGeom>
+          <a:solidFill>
+            <a:srgbClr val="E2EFDA"/>
+          </a:solidFill>
+          <a:ln w="31750">
+            <a:solidFill>
+              <a:srgbClr val="375623"/>
+            </a:solidFill>
+          </a:ln>
+          <a:effectLst/>
+        </p:spPr>
+        <p:style>
+          <a:lnRef idx="1">
+            <a:schemeClr val="accent1"/>
+          </a:lnRef>
+          <a:fillRef idx="3">
+            <a:schemeClr val="accent1"/>
+          </a:fillRef>
+          <a:effectRef idx="2">
+            <a:schemeClr val="accent1"/>
+          </a:effectRef>
+          <a:fontRef idx="minor">
+            <a:schemeClr val="lt1"/>
+          </a:fontRef>
+        </p:style>
+        <p:txBody>
+          <a:bodyPr rtlCol="0" anchor="ctr" wrap="none" lIns="64000" rIns="64000" tIns="25400" bIns="25400"/>
+          <a:lstStyle/>
+          <a:p>
+            <a:pPr algn="ctr"/>
+            <a:r>
+              <a:rPr sz="1500" b="1">
+                <a:solidFill>
+                  <a:srgbClr val="000000"/>
+                </a:solidFill>
+                <a:latin typeface="Calibri"/>
+              </a:rPr>
+              <a:t>① Tri thức</a:t>
+            </a:r>
+          </a:p>
+          <a:p>
+            <a:pPr algn="ctr"/>
+            <a:r>
+              <a:rPr sz="1500" b="1">
+                <a:solidFill>
+                  <a:srgbClr val="000000"/>
+                </a:solidFill>
+                <a:latin typeface="Calibri"/>
+              </a:rPr>
+              <a:t>ngữ văn</a:t>
+            </a:r>
+          </a:p>
+        </p:txBody>
+      </p:sp>
+      <p:cxnSp>
+        <p:nvCxnSpPr>
+          <p:cNvPr id="17" name="Connector 16"/>
+          <p:cNvCxnSpPr/>
+          <p:nvPr/>
+        </p:nvCxnSpPr>
+        <p:spPr>
+          <a:xfrm flipV="1">
+            <a:off x="6027267" y="2670962"/>
+            <a:ext cx="1688379" cy="1283818"/>
+          </a:xfrm>
+          <a:prstGeom prst="line">
+            <a:avLst/>
+          </a:prstGeom>
+          <a:ln w="44450">
+            <a:solidFill>
+              <a:srgbClr val="BF8F00"/>
+            </a:solidFill>
+          </a:ln>
+        </p:spPr>
+        <p:style>
+          <a:lnRef idx="2">
+            <a:schemeClr val="accent1"/>
+          </a:lnRef>
+          <a:fillRef idx="0">
+            <a:schemeClr val="accent1"/>
+          </a:fillRef>
+          <a:effectRef idx="1">
+            <a:schemeClr val="accent1"/>
+          </a:effectRef>
+          <a:fontRef idx="minor">
+            <a:schemeClr val="tx1"/>
+          </a:fontRef>
+        </p:style>
+      </p:cxnSp>
+      <p:cxnSp>
+        <p:nvCxnSpPr>
+          <p:cNvPr id="18" name="Connector 17"/>
+          <p:cNvCxnSpPr/>
+          <p:nvPr/>
+        </p:nvCxnSpPr>
+        <p:spPr>
+          <a:xfrm flipV="1">
+            <a:off x="7715646" y="1830405"/>
+            <a:ext cx="1465145" cy="840557"/>
+          </a:xfrm>
+          <a:prstGeom prst="line">
+            <a:avLst/>
+          </a:prstGeom>
+          <a:ln w="15875">
+            <a:solidFill>
+              <a:srgbClr val="BF8F00"/>
+            </a:solidFill>
+          </a:ln>
+        </p:spPr>
+        <p:style>
+          <a:lnRef idx="2">
+            <a:schemeClr val="accent1"/>
+          </a:lnRef>
+          <a:fillRef idx="0">
+            <a:schemeClr val="accent1"/>
+          </a:fillRef>
+          <a:effectRef idx="1">
+            <a:schemeClr val="accent1"/>
+          </a:effectRef>
+          <a:fontRef idx="minor">
+            <a:schemeClr val="tx1"/>
+          </a:fontRef>
+        </p:style>
+      </p:cxnSp>
+      <p:sp>
+        <p:nvSpPr>
+          <p:cNvPr id="19" name="Rounded Rectangle 18"/>
+          <p:cNvSpPr/>
+          <p:nvPr/>
+        </p:nvSpPr>
+        <p:spPr>
+          <a:xfrm>
+            <a:off x="9180791" y="1654804"/>
+            <a:ext cx="2134845" cy="351200"/>
+          </a:xfrm>
+          <a:prstGeom prst="roundRect">
+            <a:avLst>
+              <a:gd name="adj" fmla="val 50000"/>
+            </a:avLst>
+          </a:prstGeom>
+          <a:solidFill>
+            <a:srgbClr val="FFF8E1"/>
+          </a:solidFill>
+          <a:ln w="15875">
+            <a:solidFill>
+              <a:srgbClr val="BF8F00"/>
+            </a:solidFill>
+          </a:ln>
+          <a:effectLst/>
+        </p:spPr>
+        <p:style>
+          <a:lnRef idx="1">
+            <a:schemeClr val="accent1"/>
+          </a:lnRef>
+          <a:fillRef idx="3">
+            <a:schemeClr val="accent1"/>
+          </a:fillRef>
+          <a:effectRef idx="2">
+            <a:schemeClr val="accent1"/>
+          </a:effectRef>
+          <a:fontRef idx="minor">
+            <a:schemeClr val="lt1"/>
+          </a:fontRef>
+        </p:style>
+        <p:txBody>
+          <a:bodyPr rtlCol="0" anchor="ctr" wrap="none" lIns="64000" rIns="64000" tIns="25400" bIns="25400"/>
+          <a:lstStyle/>
+          <a:p>
+            <a:pPr algn="ctr"/>
+            <a:r>
+              <a:rPr sz="1300" b="1">
+                <a:solidFill>
+                  <a:srgbClr val="8B0000"/>
+                </a:solidFill>
+                <a:latin typeface="Calibri"/>
+              </a:rPr>
+              <a:t>Hai-cư: 3 dòng 5–7–5</a:t>
+            </a:r>
+          </a:p>
+        </p:txBody>
+      </p:sp>
+      <p:cxnSp>
+        <p:nvCxnSpPr>
+          <p:cNvPr id="20" name="Connector 19"/>
+          <p:cNvCxnSpPr/>
+          <p:nvPr/>
+        </p:nvCxnSpPr>
+        <p:spPr>
+          <a:xfrm flipV="1">
+            <a:off x="7715646" y="2256495"/>
+            <a:ext cx="1531185" cy="414467"/>
+          </a:xfrm>
+          <a:prstGeom prst="line">
+            <a:avLst/>
+          </a:prstGeom>
+          <a:ln w="15875">
+            <a:solidFill>
+              <a:srgbClr val="BF8F00"/>
+            </a:solidFill>
+          </a:ln>
+        </p:spPr>
+        <p:style>
+          <a:lnRef idx="2">
+            <a:schemeClr val="accent1"/>
+          </a:lnRef>
+          <a:fillRef idx="0">
+            <a:schemeClr val="accent1"/>
+          </a:fillRef>
+          <a:effectRef idx="1">
+            <a:schemeClr val="accent1"/>
+          </a:effectRef>
+          <a:fontRef idx="minor">
+            <a:schemeClr val="tx1"/>
+          </a:fontRef>
+        </p:style>
+      </p:cxnSp>
+      <p:sp>
+        <p:nvSpPr>
+          <p:cNvPr id="21" name="Rounded Rectangle 20"/>
+          <p:cNvSpPr/>
+          <p:nvPr/>
+        </p:nvSpPr>
+        <p:spPr>
+          <a:xfrm>
+            <a:off x="9246831" y="2080894"/>
+            <a:ext cx="2002765" cy="351200"/>
+          </a:xfrm>
+          <a:prstGeom prst="roundRect">
+            <a:avLst>
+              <a:gd name="adj" fmla="val 50000"/>
+            </a:avLst>
+          </a:prstGeom>
+          <a:solidFill>
+            <a:srgbClr val="FFF8E1"/>
+          </a:solidFill>
+          <a:ln w="15875">
+            <a:solidFill>
+              <a:srgbClr val="BF8F00"/>
+            </a:solidFill>
+          </a:ln>
+          <a:effectLst/>
+        </p:spPr>
+        <p:style>
+          <a:lnRef idx="1">
+            <a:schemeClr val="accent1"/>
+          </a:lnRef>
+          <a:fillRef idx="3">
+            <a:schemeClr val="accent1"/>
+          </a:fillRef>
+          <a:effectRef idx="2">
+            <a:schemeClr val="accent1"/>
+          </a:effectRef>
+          <a:fontRef idx="minor">
+            <a:schemeClr val="lt1"/>
+          </a:fontRef>
+        </p:style>
+        <p:txBody>
+          <a:bodyPr rtlCol="0" anchor="ctr" wrap="none" lIns="64000" rIns="64000" tIns="25400" bIns="25400"/>
+          <a:lstStyle/>
+          <a:p>
+            <a:pPr algn="ctr"/>
+            <a:r>
+              <a:rPr sz="1300" b="0">
+                <a:solidFill>
+                  <a:srgbClr val="000000"/>
+                </a:solidFill>
+                <a:latin typeface="Calibri"/>
+              </a:rPr>
+              <a:t>Phát hiện “bừng ngộ”</a:t>
+            </a:r>
+          </a:p>
+        </p:txBody>
+      </p:sp>
+      <p:cxnSp>
+        <p:nvCxnSpPr>
+          <p:cNvPr id="22" name="Connector 21"/>
+          <p:cNvCxnSpPr/>
+          <p:nvPr/>
+        </p:nvCxnSpPr>
+        <p:spPr>
+          <a:xfrm>
+            <a:off x="7715646" y="2670962"/>
+            <a:ext cx="1702889" cy="112334"/>
+          </a:xfrm>
+          <a:prstGeom prst="line">
+            <a:avLst/>
+          </a:prstGeom>
+          <a:ln w="15875">
+            <a:solidFill>
+              <a:srgbClr val="BF8F00"/>
+            </a:solidFill>
+          </a:ln>
+        </p:spPr>
+        <p:style>
+          <a:lnRef idx="2">
+            <a:schemeClr val="accent1"/>
+          </a:lnRef>
+          <a:fillRef idx="0">
+            <a:schemeClr val="accent1"/>
+          </a:fillRef>
+          <a:effectRef idx="1">
+            <a:schemeClr val="accent1"/>
+          </a:effectRef>
+          <a:fontRef idx="minor">
+            <a:schemeClr val="tx1"/>
+          </a:fontRef>
+        </p:style>
+      </p:cxnSp>
+      <p:sp>
+        <p:nvSpPr>
+          <p:cNvPr id="23" name="Rounded Rectangle 22"/>
+          <p:cNvSpPr/>
+          <p:nvPr/>
+        </p:nvSpPr>
+        <p:spPr>
+          <a:xfrm>
+            <a:off x="9418535" y="2506985"/>
+            <a:ext cx="1659357" cy="552622"/>
+          </a:xfrm>
+          <a:prstGeom prst="roundRect">
+            <a:avLst>
+              <a:gd name="adj" fmla="val 50000"/>
+            </a:avLst>
+          </a:prstGeom>
+          <a:solidFill>
+            <a:srgbClr val="FFF8E1"/>
+          </a:solidFill>
+          <a:ln w="15875">
+            <a:solidFill>
+              <a:srgbClr val="BF8F00"/>
+            </a:solidFill>
+          </a:ln>
+          <a:effectLst/>
+        </p:spPr>
+        <p:style>
+          <a:lnRef idx="1">
+            <a:schemeClr val="accent1"/>
+          </a:lnRef>
+          <a:fillRef idx="3">
+            <a:schemeClr val="accent1"/>
+          </a:fillRef>
+          <a:effectRef idx="2">
+            <a:schemeClr val="accent1"/>
+          </a:effectRef>
+          <a:fontRef idx="minor">
+            <a:schemeClr val="lt1"/>
+          </a:fontRef>
+        </p:style>
+        <p:txBody>
+          <a:bodyPr rtlCol="0" anchor="ctr" wrap="none" lIns="64000" rIns="64000" tIns="25400" bIns="25400"/>
+          <a:lstStyle/>
+          <a:p>
+            <a:pPr algn="ctr"/>
+            <a:r>
+              <a:rPr sz="1300" b="0">
+                <a:solidFill>
+                  <a:srgbClr val="000000"/>
+                </a:solidFill>
+                <a:latin typeface="Calibri"/>
+              </a:rPr>
+              <a:t>Đường luật:</a:t>
+            </a:r>
+          </a:p>
+          <a:p>
+            <a:pPr algn="ctr"/>
+            <a:r>
+              <a:rPr sz="1300" b="0">
+                <a:solidFill>
+                  <a:srgbClr val="000000"/>
+                </a:solidFill>
+                <a:latin typeface="Calibri"/>
+              </a:rPr>
+              <a:t>đề–thực–luận–kết</a:t>
+            </a:r>
+          </a:p>
+        </p:txBody>
+      </p:sp>
+      <p:cxnSp>
+        <p:nvCxnSpPr>
+          <p:cNvPr id="24" name="Connector 23"/>
+          <p:cNvCxnSpPr/>
+          <p:nvPr/>
+        </p:nvCxnSpPr>
+        <p:spPr>
+          <a:xfrm>
+            <a:off x="7715646" y="2670962"/>
+            <a:ext cx="1788741" cy="739846"/>
+          </a:xfrm>
+          <a:prstGeom prst="line">
+            <a:avLst/>
+          </a:prstGeom>
+          <a:ln w="15875">
+            <a:solidFill>
+              <a:srgbClr val="BF8F00"/>
+            </a:solidFill>
+          </a:ln>
+        </p:spPr>
+        <p:style>
+          <a:lnRef idx="2">
+            <a:schemeClr val="accent1"/>
+          </a:lnRef>
+          <a:fillRef idx="0">
+            <a:schemeClr val="accent1"/>
+          </a:fillRef>
+          <a:effectRef idx="1">
+            <a:schemeClr val="accent1"/>
+          </a:effectRef>
+          <a:fontRef idx="minor">
+            <a:schemeClr val="tx1"/>
+          </a:fontRef>
+        </p:style>
+      </p:cxnSp>
+      <p:sp>
+        <p:nvSpPr>
+          <p:cNvPr id="25" name="Rounded Rectangle 24"/>
+          <p:cNvSpPr/>
+          <p:nvPr/>
+        </p:nvSpPr>
+        <p:spPr>
+          <a:xfrm>
+            <a:off x="9504387" y="3134497"/>
+            <a:ext cx="1487653" cy="552622"/>
+          </a:xfrm>
+          <a:prstGeom prst="roundRect">
+            <a:avLst>
+              <a:gd name="adj" fmla="val 50000"/>
+            </a:avLst>
+          </a:prstGeom>
+          <a:solidFill>
+            <a:srgbClr val="FFF8E1"/>
+          </a:solidFill>
+          <a:ln w="15875">
+            <a:solidFill>
+              <a:srgbClr val="BF8F00"/>
+            </a:solidFill>
+          </a:ln>
+          <a:effectLst/>
+        </p:spPr>
+        <p:style>
+          <a:lnRef idx="1">
+            <a:schemeClr val="accent1"/>
+          </a:lnRef>
+          <a:fillRef idx="3">
+            <a:schemeClr val="accent1"/>
+          </a:fillRef>
+          <a:effectRef idx="2">
+            <a:schemeClr val="accent1"/>
+          </a:effectRef>
+          <a:fontRef idx="minor">
+            <a:schemeClr val="lt1"/>
+          </a:fontRef>
+        </p:style>
+        <p:txBody>
+          <a:bodyPr rtlCol="0" anchor="ctr" wrap="none" lIns="64000" rIns="64000" tIns="25400" bIns="25400"/>
+          <a:lstStyle/>
+          <a:p>
+            <a:pPr algn="ctr"/>
+            <a:r>
+              <a:rPr sz="1300" b="0">
+                <a:solidFill>
+                  <a:srgbClr val="000000"/>
+                </a:solidFill>
+                <a:latin typeface="Calibri"/>
+              </a:rPr>
+              <a:t>Cảnh thu – nỗi</a:t>
+            </a:r>
+          </a:p>
+          <a:p>
+            <a:pPr algn="ctr"/>
+            <a:r>
+              <a:rPr sz="1300" b="0">
+                <a:solidFill>
+                  <a:srgbClr val="000000"/>
+                </a:solidFill>
+                <a:latin typeface="Calibri"/>
+              </a:rPr>
+              <a:t>nhớ quê</a:t>
+            </a:r>
+          </a:p>
+        </p:txBody>
+      </p:sp>
+      <p:sp>
+        <p:nvSpPr>
+          <p:cNvPr id="26" name="Oval 25"/>
+          <p:cNvSpPr/>
+          <p:nvPr/>
+        </p:nvSpPr>
+        <p:spPr>
+          <a:xfrm>
+            <a:off x="6879363" y="2259078"/>
+            <a:ext cx="1672565" cy="823767"/>
+          </a:xfrm>
+          <a:prstGeom prst="ellipse">
+            <a:avLst/>
+          </a:prstGeom>
+          <a:solidFill>
+            <a:srgbClr val="FFF2CC"/>
+          </a:solidFill>
+          <a:ln w="31750">
+            <a:solidFill>
+              <a:srgbClr val="BF8F00"/>
+            </a:solidFill>
+          </a:ln>
+          <a:effectLst/>
+        </p:spPr>
+        <p:style>
+          <a:lnRef idx="1">
+            <a:schemeClr val="accent1"/>
+          </a:lnRef>
+          <a:fillRef idx="3">
+            <a:schemeClr val="accent1"/>
+          </a:fillRef>
+          <a:effectRef idx="2">
+            <a:schemeClr val="accent1"/>
+          </a:effectRef>
+          <a:fontRef idx="minor">
+            <a:schemeClr val="lt1"/>
+          </a:fontRef>
+        </p:style>
+        <p:txBody>
+          <a:bodyPr rtlCol="0" anchor="ctr" wrap="none" lIns="64000" rIns="64000" tIns="25400" bIns="25400"/>
+          <a:lstStyle/>
+          <a:p>
+            <a:pPr algn="ctr"/>
+            <a:r>
+              <a:rPr sz="1500" b="1">
+                <a:solidFill>
+                  <a:srgbClr val="000000"/>
+                </a:solidFill>
+                <a:latin typeface="Calibri"/>
+              </a:rPr>
+              <a:t>② Hai-cư –</a:t>
+            </a:r>
+          </a:p>
+          <a:p>
+            <a:pPr algn="ctr"/>
+            <a:r>
+              <a:rPr sz="1500" b="1">
+                <a:solidFill>
+                  <a:srgbClr val="000000"/>
+                </a:solidFill>
+                <a:latin typeface="Calibri"/>
+              </a:rPr>
+              <a:t>Thu hứng</a:t>
+            </a:r>
+          </a:p>
+        </p:txBody>
+      </p:sp>
+      <p:cxnSp>
+        <p:nvCxnSpPr>
+          <p:cNvPr id="27" name="Connector 26"/>
+          <p:cNvCxnSpPr/>
+          <p:nvPr/>
+        </p:nvCxnSpPr>
+        <p:spPr>
+          <a:xfrm flipH="1">
+            <a:off x="4338888" y="3954780"/>
+            <a:ext cx="1688379" cy="1283817"/>
+          </a:xfrm>
+          <a:prstGeom prst="line">
+            <a:avLst/>
+          </a:prstGeom>
+          <a:ln w="44450">
+            <a:solidFill>
+              <a:srgbClr val="2F5597"/>
+            </a:solidFill>
+          </a:ln>
+        </p:spPr>
+        <p:style>
+          <a:lnRef idx="2">
+            <a:schemeClr val="accent1"/>
+          </a:lnRef>
+          <a:fillRef idx="0">
+            <a:schemeClr val="accent1"/>
+          </a:fillRef>
+          <a:effectRef idx="1">
+            <a:schemeClr val="accent1"/>
+          </a:effectRef>
+          <a:fontRef idx="minor">
+            <a:schemeClr val="tx1"/>
+          </a:fontRef>
+        </p:style>
+      </p:cxnSp>
+      <p:cxnSp>
+        <p:nvCxnSpPr>
+          <p:cNvPr id="28" name="Connector 27"/>
+          <p:cNvCxnSpPr/>
+          <p:nvPr/>
+        </p:nvCxnSpPr>
+        <p:spPr>
+          <a:xfrm flipH="1" flipV="1">
+            <a:off x="2919971" y="4398040"/>
+            <a:ext cx="1418917" cy="840557"/>
+          </a:xfrm>
+          <a:prstGeom prst="line">
+            <a:avLst/>
+          </a:prstGeom>
+          <a:ln w="15875">
+            <a:solidFill>
+              <a:srgbClr val="2F5597"/>
+            </a:solidFill>
+          </a:ln>
+        </p:spPr>
+        <p:style>
+          <a:lnRef idx="2">
+            <a:schemeClr val="accent1"/>
+          </a:lnRef>
+          <a:fillRef idx="0">
+            <a:schemeClr val="accent1"/>
+          </a:fillRef>
+          <a:effectRef idx="1">
+            <a:schemeClr val="accent1"/>
+          </a:effectRef>
+          <a:fontRef idx="minor">
+            <a:schemeClr val="tx1"/>
+          </a:fontRef>
+        </p:style>
+      </p:cxnSp>
+      <p:sp>
+        <p:nvSpPr>
+          <p:cNvPr id="29" name="Rounded Rectangle 28"/>
+          <p:cNvSpPr/>
+          <p:nvPr/>
+        </p:nvSpPr>
+        <p:spPr>
+          <a:xfrm>
+            <a:off x="692670" y="4222440"/>
+            <a:ext cx="2227301" cy="351200"/>
+          </a:xfrm>
+          <a:prstGeom prst="roundRect">
+            <a:avLst>
+              <a:gd name="adj" fmla="val 50000"/>
+            </a:avLst>
+          </a:prstGeom>
+          <a:solidFill>
+            <a:srgbClr val="E3EEF9"/>
+          </a:solidFill>
+          <a:ln w="15875">
+            <a:solidFill>
+              <a:srgbClr val="2F5597"/>
+            </a:solidFill>
+          </a:ln>
+          <a:effectLst/>
+        </p:spPr>
+        <p:style>
+          <a:lnRef idx="1">
+            <a:schemeClr val="accent1"/>
+          </a:lnRef>
+          <a:fillRef idx="3">
+            <a:schemeClr val="accent1"/>
+          </a:fillRef>
+          <a:effectRef idx="2">
+            <a:schemeClr val="accent1"/>
+          </a:effectRef>
+          <a:fontRef idx="minor">
+            <a:schemeClr val="lt1"/>
+          </a:fontRef>
+        </p:style>
+        <p:txBody>
+          <a:bodyPr rtlCol="0" anchor="ctr" wrap="none" lIns="64000" rIns="64000" tIns="25400" bIns="25400"/>
+          <a:lstStyle/>
+          <a:p>
+            <a:pPr algn="ctr"/>
+            <a:r>
+              <a:rPr sz="1300" b="1">
+                <a:solidFill>
+                  <a:srgbClr val="8B0000"/>
+                </a:solidFill>
+                <a:latin typeface="Calibri"/>
+              </a:rPr>
+              <a:t>Xuân “chín”: viên mãn</a:t>
+            </a:r>
+          </a:p>
+        </p:txBody>
+      </p:sp>
+      <p:cxnSp>
+        <p:nvCxnSpPr>
+          <p:cNvPr id="30" name="Connector 29"/>
+          <p:cNvCxnSpPr/>
+          <p:nvPr/>
+        </p:nvCxnSpPr>
+        <p:spPr>
+          <a:xfrm flipH="1" flipV="1">
+            <a:off x="2764777" y="4924841"/>
+            <a:ext cx="1574111" cy="313756"/>
+          </a:xfrm>
+          <a:prstGeom prst="line">
+            <a:avLst/>
+          </a:prstGeom>
+          <a:ln w="15875">
+            <a:solidFill>
+              <a:srgbClr val="2F5597"/>
+            </a:solidFill>
+          </a:ln>
+        </p:spPr>
+        <p:style>
+          <a:lnRef idx="2">
+            <a:schemeClr val="accent1"/>
+          </a:lnRef>
+          <a:fillRef idx="0">
+            <a:schemeClr val="accent1"/>
+          </a:fillRef>
+          <a:effectRef idx="1">
+            <a:schemeClr val="accent1"/>
+          </a:effectRef>
+          <a:fontRef idx="minor">
+            <a:schemeClr val="tx1"/>
+          </a:fontRef>
+        </p:style>
+      </p:cxnSp>
+      <p:sp>
+        <p:nvSpPr>
+          <p:cNvPr id="31" name="Rounded Rectangle 30"/>
+          <p:cNvSpPr/>
+          <p:nvPr/>
+        </p:nvSpPr>
+        <p:spPr>
+          <a:xfrm>
+            <a:off x="847864" y="4648530"/>
+            <a:ext cx="1916913" cy="552622"/>
+          </a:xfrm>
+          <a:prstGeom prst="roundRect">
+            <a:avLst>
+              <a:gd name="adj" fmla="val 50000"/>
+            </a:avLst>
+          </a:prstGeom>
+          <a:solidFill>
+            <a:srgbClr val="E3EEF9"/>
+          </a:solidFill>
+          <a:ln w="15875">
+            <a:solidFill>
+              <a:srgbClr val="2F5597"/>
+            </a:solidFill>
+          </a:ln>
+          <a:effectLst/>
+        </p:spPr>
+        <p:style>
+          <a:lnRef idx="1">
+            <a:schemeClr val="accent1"/>
+          </a:lnRef>
+          <a:fillRef idx="3">
+            <a:schemeClr val="accent1"/>
+          </a:fillRef>
+          <a:effectRef idx="2">
+            <a:schemeClr val="accent1"/>
+          </a:effectRef>
+          <a:fontRef idx="minor">
+            <a:schemeClr val="lt1"/>
+          </a:fontRef>
+        </p:style>
+        <p:txBody>
+          <a:bodyPr rtlCol="0" anchor="ctr" wrap="none" lIns="64000" rIns="64000" tIns="25400" bIns="25400"/>
+          <a:lstStyle/>
+          <a:p>
+            <a:pPr algn="ctr"/>
+            <a:r>
+              <a:rPr sz="1300" b="0">
+                <a:solidFill>
+                  <a:srgbClr val="000000"/>
+                </a:solidFill>
+                <a:latin typeface="Calibri"/>
+              </a:rPr>
+              <a:t>Ngôn từ, nhịp phóng</a:t>
+            </a:r>
+          </a:p>
+          <a:p>
+            <a:pPr algn="ctr"/>
+            <a:r>
+              <a:rPr sz="1300" b="0">
+                <a:solidFill>
+                  <a:srgbClr val="000000"/>
+                </a:solidFill>
+                <a:latin typeface="Calibri"/>
+              </a:rPr>
+              <a:t>khoáng</a:t>
+            </a:r>
+          </a:p>
+        </p:txBody>
+      </p:sp>
+      <p:cxnSp>
+        <p:nvCxnSpPr>
+          <p:cNvPr id="32" name="Connector 31"/>
+          <p:cNvCxnSpPr/>
+          <p:nvPr/>
+        </p:nvCxnSpPr>
+        <p:spPr>
+          <a:xfrm flipH="1">
+            <a:off x="2764777" y="5238597"/>
+            <a:ext cx="1574111" cy="213045"/>
+          </a:xfrm>
+          <a:prstGeom prst="line">
+            <a:avLst/>
+          </a:prstGeom>
+          <a:ln w="15875">
+            <a:solidFill>
+              <a:srgbClr val="2F5597"/>
+            </a:solidFill>
+          </a:ln>
+        </p:spPr>
+        <p:style>
+          <a:lnRef idx="2">
+            <a:schemeClr val="accent1"/>
+          </a:lnRef>
+          <a:fillRef idx="0">
+            <a:schemeClr val="accent1"/>
+          </a:fillRef>
+          <a:effectRef idx="1">
+            <a:schemeClr val="accent1"/>
+          </a:effectRef>
+          <a:fontRef idx="minor">
+            <a:schemeClr val="tx1"/>
+          </a:fontRef>
+        </p:style>
+      </p:cxnSp>
+      <p:sp>
+        <p:nvSpPr>
+          <p:cNvPr id="33" name="Rounded Rectangle 32"/>
+          <p:cNvSpPr/>
+          <p:nvPr/>
+        </p:nvSpPr>
+        <p:spPr>
+          <a:xfrm>
+            <a:off x="847864" y="5276042"/>
+            <a:ext cx="1916913" cy="351200"/>
+          </a:xfrm>
+          <a:prstGeom prst="roundRect">
+            <a:avLst>
+              <a:gd name="adj" fmla="val 50000"/>
+            </a:avLst>
+          </a:prstGeom>
+          <a:solidFill>
+            <a:srgbClr val="E3EEF9"/>
+          </a:solidFill>
+          <a:ln w="15875">
+            <a:solidFill>
+              <a:srgbClr val="2F5597"/>
+            </a:solidFill>
+          </a:ln>
+          <a:effectLst/>
+        </p:spPr>
+        <p:style>
+          <a:lnRef idx="1">
+            <a:schemeClr val="accent1"/>
+          </a:lnRef>
+          <a:fillRef idx="3">
+            <a:schemeClr val="accent1"/>
+          </a:fillRef>
+          <a:effectRef idx="2">
+            <a:schemeClr val="accent1"/>
+          </a:effectRef>
+          <a:fontRef idx="minor">
+            <a:schemeClr val="lt1"/>
+          </a:fontRef>
+        </p:style>
+        <p:txBody>
+          <a:bodyPr rtlCol="0" anchor="ctr" wrap="none" lIns="64000" rIns="64000" tIns="25400" bIns="25400"/>
+          <a:lstStyle/>
+          <a:p>
+            <a:pPr algn="ctr"/>
+            <a:r>
+              <a:rPr sz="1300" b="0">
+                <a:solidFill>
+                  <a:srgbClr val="000000"/>
+                </a:solidFill>
+                <a:latin typeface="Calibri"/>
+              </a:rPr>
+              <a:t>Nhớ làng, người chị</a:t>
+            </a:r>
+          </a:p>
+        </p:txBody>
+      </p:sp>
+      <p:cxnSp>
+        <p:nvCxnSpPr>
+          <p:cNvPr id="34" name="Connector 33"/>
+          <p:cNvCxnSpPr/>
+          <p:nvPr/>
+        </p:nvCxnSpPr>
+        <p:spPr>
+          <a:xfrm flipH="1">
+            <a:off x="2678925" y="5238597"/>
+            <a:ext cx="1659963" cy="739846"/>
+          </a:xfrm>
+          <a:prstGeom prst="line">
+            <a:avLst/>
+          </a:prstGeom>
+          <a:ln w="15875">
+            <a:solidFill>
+              <a:srgbClr val="2F5597"/>
+            </a:solidFill>
+          </a:ln>
+        </p:spPr>
+        <p:style>
+          <a:lnRef idx="2">
+            <a:schemeClr val="accent1"/>
+          </a:lnRef>
+          <a:fillRef idx="0">
+            <a:schemeClr val="accent1"/>
+          </a:fillRef>
+          <a:effectRef idx="1">
+            <a:schemeClr val="accent1"/>
+          </a:effectRef>
+          <a:fontRef idx="minor">
+            <a:schemeClr val="tx1"/>
+          </a:fontRef>
+        </p:style>
+      </p:cxnSp>
+      <p:sp>
+        <p:nvSpPr>
+          <p:cNvPr id="35" name="Rounded Rectangle 34"/>
+          <p:cNvSpPr/>
+          <p:nvPr/>
+        </p:nvSpPr>
+        <p:spPr>
+          <a:xfrm>
+            <a:off x="933716" y="5702132"/>
+            <a:ext cx="1745209" cy="552622"/>
+          </a:xfrm>
+          <a:prstGeom prst="roundRect">
+            <a:avLst>
+              <a:gd name="adj" fmla="val 50000"/>
+            </a:avLst>
+          </a:prstGeom>
+          <a:solidFill>
+            <a:srgbClr val="E3EEF9"/>
+          </a:solidFill>
+          <a:ln w="15875">
+            <a:solidFill>
+              <a:srgbClr val="2F5597"/>
+            </a:solidFill>
+          </a:ln>
+          <a:effectLst/>
+        </p:spPr>
+        <p:style>
+          <a:lnRef idx="1">
+            <a:schemeClr val="accent1"/>
+          </a:lnRef>
+          <a:fillRef idx="3">
+            <a:schemeClr val="accent1"/>
+          </a:fillRef>
+          <a:effectRef idx="2">
+            <a:schemeClr val="accent1"/>
+          </a:effectRef>
+          <a:fontRef idx="minor">
+            <a:schemeClr val="lt1"/>
+          </a:fontRef>
+        </p:style>
+        <p:txBody>
+          <a:bodyPr rtlCol="0" anchor="ctr" wrap="none" lIns="64000" rIns="64000" tIns="25400" bIns="25400"/>
+          <a:lstStyle/>
+          <a:p>
+            <a:pPr algn="ctr"/>
+            <a:r>
+              <a:rPr sz="1300" b="0">
+                <a:solidFill>
+                  <a:srgbClr val="000000"/>
+                </a:solidFill>
+                <a:latin typeface="Calibri"/>
+              </a:rPr>
+              <a:t>Tiếng thu ↔ tiếng</a:t>
+            </a:r>
+          </a:p>
+          <a:p>
+            <a:pPr algn="ctr"/>
+            <a:r>
+              <a:rPr sz="1300" b="0">
+                <a:solidFill>
+                  <a:srgbClr val="000000"/>
+                </a:solidFill>
+                <a:latin typeface="Calibri"/>
+              </a:rPr>
+              <a:t>thơ</a:t>
+            </a:r>
+          </a:p>
+        </p:txBody>
+      </p:sp>
+      <p:sp>
+        <p:nvSpPr>
+          <p:cNvPr id="36" name="Oval 35"/>
+          <p:cNvSpPr/>
+          <p:nvPr/>
+        </p:nvSpPr>
+        <p:spPr>
+          <a:xfrm>
+            <a:off x="3363922" y="4658216"/>
+            <a:ext cx="1949933" cy="1160762"/>
+          </a:xfrm>
+          <a:prstGeom prst="ellipse">
+            <a:avLst/>
+          </a:prstGeom>
+          <a:solidFill>
+            <a:srgbClr val="E2EFDA"/>
+          </a:solidFill>
+          <a:ln w="31750">
+            <a:solidFill>
+              <a:srgbClr val="375623"/>
+            </a:solidFill>
+          </a:ln>
+          <a:effectLst/>
+        </p:spPr>
+        <p:style>
+          <a:lnRef idx="1">
+            <a:schemeClr val="accent1"/>
+          </a:lnRef>
+          <a:fillRef idx="3">
+            <a:schemeClr val="accent1"/>
+          </a:fillRef>
+          <a:effectRef idx="2">
+            <a:schemeClr val="accent1"/>
+          </a:effectRef>
+          <a:fontRef idx="minor">
+            <a:schemeClr val="lt1"/>
+          </a:fontRef>
+        </p:style>
+        <p:txBody>
+          <a:bodyPr rtlCol="0" anchor="ctr" wrap="none" lIns="64000" rIns="64000" tIns="25400" bIns="25400"/>
+          <a:lstStyle/>
+          <a:p>
+            <a:pPr algn="ctr"/>
+            <a:r>
+              <a:rPr sz="1500" b="1">
+                <a:solidFill>
+                  <a:srgbClr val="000000"/>
+                </a:solidFill>
+                <a:latin typeface="Calibri"/>
+              </a:rPr>
+              <a:t>③ Mùa xuân</a:t>
+            </a:r>
+          </a:p>
+          <a:p>
+            <a:pPr algn="ctr"/>
+            <a:r>
+              <a:rPr sz="1500" b="1">
+                <a:solidFill>
+                  <a:srgbClr val="000000"/>
+                </a:solidFill>
+                <a:latin typeface="Calibri"/>
+              </a:rPr>
+              <a:t>chín – Tiếng</a:t>
+            </a:r>
+          </a:p>
+          <a:p>
+            <a:pPr algn="ctr"/>
+            <a:r>
+              <a:rPr sz="1500" b="1">
+                <a:solidFill>
+                  <a:srgbClr val="000000"/>
+                </a:solidFill>
+                <a:latin typeface="Calibri"/>
+              </a:rPr>
+              <a:t>thu</a:t>
+            </a:r>
+          </a:p>
+        </p:txBody>
+      </p:sp>
+      <p:cxnSp>
+        <p:nvCxnSpPr>
+          <p:cNvPr id="37" name="Connector 36"/>
+          <p:cNvCxnSpPr/>
+          <p:nvPr/>
+        </p:nvCxnSpPr>
+        <p:spPr>
+          <a:xfrm>
+            <a:off x="6027267" y="3954780"/>
+            <a:ext cx="1688379" cy="1283817"/>
+          </a:xfrm>
+          <a:prstGeom prst="line">
+            <a:avLst/>
+          </a:prstGeom>
+          <a:ln w="44450">
+            <a:solidFill>
+              <a:srgbClr val="7030A0"/>
+            </a:solidFill>
+          </a:ln>
+        </p:spPr>
+        <p:style>
+          <a:lnRef idx="2">
+            <a:schemeClr val="accent1"/>
+          </a:lnRef>
+          <a:fillRef idx="0">
+            <a:schemeClr val="accent1"/>
+          </a:fillRef>
+          <a:effectRef idx="1">
+            <a:schemeClr val="accent1"/>
+          </a:effectRef>
+          <a:fontRef idx="minor">
+            <a:schemeClr val="tx1"/>
+          </a:fontRef>
+        </p:style>
+      </p:cxnSp>
+      <p:cxnSp>
+        <p:nvCxnSpPr>
+          <p:cNvPr id="38" name="Connector 37"/>
+          <p:cNvCxnSpPr/>
+          <p:nvPr/>
+        </p:nvCxnSpPr>
+        <p:spPr>
+          <a:xfrm flipV="1">
+            <a:off x="7715646" y="4297329"/>
+            <a:ext cx="1659963" cy="941268"/>
+          </a:xfrm>
+          <a:prstGeom prst="line">
+            <a:avLst/>
+          </a:prstGeom>
+          <a:ln w="15875">
+            <a:solidFill>
+              <a:srgbClr val="7030A0"/>
+            </a:solidFill>
+          </a:ln>
+        </p:spPr>
+        <p:style>
+          <a:lnRef idx="2">
+            <a:schemeClr val="accent1"/>
+          </a:lnRef>
+          <a:fillRef idx="0">
+            <a:schemeClr val="accent1"/>
+          </a:fillRef>
+          <a:effectRef idx="1">
+            <a:schemeClr val="accent1"/>
+          </a:effectRef>
+          <a:fontRef idx="minor">
+            <a:schemeClr val="tx1"/>
+          </a:fontRef>
+        </p:style>
+      </p:cxnSp>
+      <p:sp>
+        <p:nvSpPr>
+          <p:cNvPr id="39" name="Rounded Rectangle 38"/>
+          <p:cNvSpPr/>
+          <p:nvPr/>
+        </p:nvSpPr>
+        <p:spPr>
+          <a:xfrm>
+            <a:off x="9375609" y="4021018"/>
+            <a:ext cx="1745209" cy="552622"/>
+          </a:xfrm>
+          <a:prstGeom prst="roundRect">
+            <a:avLst>
+              <a:gd name="adj" fmla="val 50000"/>
+            </a:avLst>
+          </a:prstGeom>
+          <a:solidFill>
+            <a:srgbClr val="F3E8F7"/>
+          </a:solidFill>
+          <a:ln w="15875">
+            <a:solidFill>
+              <a:srgbClr val="7030A0"/>
+            </a:solidFill>
+          </a:ln>
+          <a:effectLst/>
+        </p:spPr>
+        <p:style>
+          <a:lnRef idx="1">
+            <a:schemeClr val="accent1"/>
+          </a:lnRef>
+          <a:fillRef idx="3">
+            <a:schemeClr val="accent1"/>
+          </a:fillRef>
+          <a:effectRef idx="2">
+            <a:schemeClr val="accent1"/>
+          </a:effectRef>
+          <a:fontRef idx="minor">
+            <a:schemeClr val="lt1"/>
+          </a:fontRef>
+        </p:style>
+        <p:txBody>
+          <a:bodyPr rtlCol="0" anchor="ctr" wrap="none" lIns="64000" rIns="64000" tIns="25400" bIns="25400"/>
+          <a:lstStyle/>
+          <a:p>
+            <a:pPr algn="ctr"/>
+            <a:r>
+              <a:rPr sz="1300" b="0">
+                <a:solidFill>
+                  <a:srgbClr val="000000"/>
+                </a:solidFill>
+                <a:latin typeface="Calibri"/>
+              </a:rPr>
+              <a:t>Lỗi dùng từ, trật</a:t>
+            </a:r>
+          </a:p>
+          <a:p>
+            <a:pPr algn="ctr"/>
+            <a:r>
+              <a:rPr sz="1300" b="0">
+                <a:solidFill>
+                  <a:srgbClr val="000000"/>
+                </a:solidFill>
+                <a:latin typeface="Calibri"/>
+              </a:rPr>
+              <a:t>tự từ</a:t>
+            </a:r>
+          </a:p>
+        </p:txBody>
+      </p:sp>
+      <p:cxnSp>
+        <p:nvCxnSpPr>
+          <p:cNvPr id="40" name="Connector 39"/>
+          <p:cNvCxnSpPr/>
+          <p:nvPr/>
+        </p:nvCxnSpPr>
+        <p:spPr>
+          <a:xfrm flipV="1">
+            <a:off x="7715646" y="4924841"/>
+            <a:ext cx="1650057" cy="313756"/>
+          </a:xfrm>
+          <a:prstGeom prst="line">
+            <a:avLst/>
+          </a:prstGeom>
+          <a:ln w="15875">
+            <a:solidFill>
+              <a:srgbClr val="7030A0"/>
+            </a:solidFill>
+          </a:ln>
+        </p:spPr>
+        <p:style>
+          <a:lnRef idx="2">
+            <a:schemeClr val="accent1"/>
+          </a:lnRef>
+          <a:fillRef idx="0">
+            <a:schemeClr val="accent1"/>
+          </a:fillRef>
+          <a:effectRef idx="1">
+            <a:schemeClr val="accent1"/>
+          </a:effectRef>
+          <a:fontRef idx="minor">
+            <a:schemeClr val="tx1"/>
+          </a:fontRef>
+        </p:style>
+      </p:cxnSp>
+      <p:sp>
+        <p:nvSpPr>
+          <p:cNvPr id="41" name="Rounded Rectangle 40"/>
+          <p:cNvSpPr/>
+          <p:nvPr/>
+        </p:nvSpPr>
+        <p:spPr>
+          <a:xfrm>
+            <a:off x="9365703" y="4648530"/>
+            <a:ext cx="1765021" cy="552622"/>
+          </a:xfrm>
+          <a:prstGeom prst="roundRect">
+            <a:avLst>
+              <a:gd name="adj" fmla="val 50000"/>
+            </a:avLst>
+          </a:prstGeom>
+          <a:solidFill>
+            <a:srgbClr val="F3E8F7"/>
+          </a:solidFill>
+          <a:ln w="15875">
+            <a:solidFill>
+              <a:srgbClr val="7030A0"/>
+            </a:solidFill>
+          </a:ln>
+          <a:effectLst/>
+        </p:spPr>
+        <p:style>
+          <a:lnRef idx="1">
+            <a:schemeClr val="accent1"/>
+          </a:lnRef>
+          <a:fillRef idx="3">
+            <a:schemeClr val="accent1"/>
+          </a:fillRef>
+          <a:effectRef idx="2">
+            <a:schemeClr val="accent1"/>
+          </a:effectRef>
+          <a:fontRef idx="minor">
+            <a:schemeClr val="lt1"/>
+          </a:fontRef>
+        </p:style>
+        <p:txBody>
+          <a:bodyPr rtlCol="0" anchor="ctr" wrap="none" lIns="64000" rIns="64000" tIns="25400" bIns="25400"/>
+          <a:lstStyle/>
+          <a:p>
+            <a:pPr algn="ctr"/>
+            <a:r>
+              <a:rPr sz="1300" b="1">
+                <a:solidFill>
+                  <a:srgbClr val="8B0000"/>
+                </a:solidFill>
+                <a:latin typeface="Calibri"/>
+              </a:rPr>
+              <a:t>NL phân tích một</a:t>
+            </a:r>
+          </a:p>
+          <a:p>
+            <a:pPr algn="ctr"/>
+            <a:r>
+              <a:rPr sz="1300" b="1">
+                <a:solidFill>
+                  <a:srgbClr val="8B0000"/>
+                </a:solidFill>
+                <a:latin typeface="Calibri"/>
+              </a:rPr>
+              <a:t>bài thơ</a:t>
+            </a:r>
+          </a:p>
+        </p:txBody>
+      </p:sp>
+      <p:cxnSp>
+        <p:nvCxnSpPr>
+          <p:cNvPr id="42" name="Connector 41"/>
+          <p:cNvCxnSpPr/>
+          <p:nvPr/>
+        </p:nvCxnSpPr>
+        <p:spPr>
+          <a:xfrm>
+            <a:off x="7715646" y="5238597"/>
+            <a:ext cx="1574111" cy="313756"/>
+          </a:xfrm>
+          <a:prstGeom prst="line">
+            <a:avLst/>
+          </a:prstGeom>
+          <a:ln w="15875">
+            <a:solidFill>
+              <a:srgbClr val="7030A0"/>
+            </a:solidFill>
+          </a:ln>
+        </p:spPr>
+        <p:style>
+          <a:lnRef idx="2">
+            <a:schemeClr val="accent1"/>
+          </a:lnRef>
+          <a:fillRef idx="0">
+            <a:schemeClr val="accent1"/>
+          </a:fillRef>
+          <a:effectRef idx="1">
+            <a:schemeClr val="accent1"/>
+          </a:effectRef>
+          <a:fontRef idx="minor">
+            <a:schemeClr val="tx1"/>
+          </a:fontRef>
+        </p:style>
+      </p:cxnSp>
+      <p:sp>
+        <p:nvSpPr>
+          <p:cNvPr id="43" name="Rounded Rectangle 42"/>
+          <p:cNvSpPr/>
+          <p:nvPr/>
+        </p:nvSpPr>
+        <p:spPr>
+          <a:xfrm>
+            <a:off x="9289757" y="5276042"/>
+            <a:ext cx="1916913" cy="552622"/>
+          </a:xfrm>
+          <a:prstGeom prst="roundRect">
+            <a:avLst>
+              <a:gd name="adj" fmla="val 50000"/>
+            </a:avLst>
+          </a:prstGeom>
+          <a:solidFill>
+            <a:srgbClr val="F3E8F7"/>
+          </a:solidFill>
+          <a:ln w="15875">
+            <a:solidFill>
+              <a:srgbClr val="7030A0"/>
+            </a:solidFill>
+          </a:ln>
+          <a:effectLst/>
+        </p:spPr>
+        <p:style>
+          <a:lnRef idx="1">
+            <a:schemeClr val="accent1"/>
+          </a:lnRef>
+          <a:fillRef idx="3">
+            <a:schemeClr val="accent1"/>
+          </a:fillRef>
+          <a:effectRef idx="2">
+            <a:schemeClr val="accent1"/>
+          </a:effectRef>
+          <a:fontRef idx="minor">
+            <a:schemeClr val="lt1"/>
+          </a:fontRef>
+        </p:style>
+        <p:txBody>
+          <a:bodyPr rtlCol="0" anchor="ctr" wrap="none" lIns="64000" rIns="64000" tIns="25400" bIns="25400"/>
+          <a:lstStyle/>
+          <a:p>
+            <a:pPr algn="ctr"/>
+            <a:r>
+              <a:rPr sz="1300" b="0">
+                <a:solidFill>
+                  <a:srgbClr val="000000"/>
+                </a:solidFill>
+                <a:latin typeface="Calibri"/>
+              </a:rPr>
+              <a:t>Thuyết trình về bài</a:t>
+            </a:r>
+          </a:p>
+          <a:p>
+            <a:pPr algn="ctr"/>
+            <a:r>
+              <a:rPr sz="1300" b="0">
+                <a:solidFill>
+                  <a:srgbClr val="000000"/>
+                </a:solidFill>
+                <a:latin typeface="Calibri"/>
+              </a:rPr>
+              <a:t>thơ</a:t>
+            </a:r>
+          </a:p>
+        </p:txBody>
+      </p:sp>
+      <p:cxnSp>
+        <p:nvCxnSpPr>
+          <p:cNvPr id="44" name="Connector 43"/>
+          <p:cNvCxnSpPr/>
+          <p:nvPr/>
+        </p:nvCxnSpPr>
+        <p:spPr>
+          <a:xfrm>
+            <a:off x="7715646" y="5238597"/>
+            <a:ext cx="1617037" cy="941268"/>
+          </a:xfrm>
+          <a:prstGeom prst="line">
+            <a:avLst/>
+          </a:prstGeom>
+          <a:ln w="15875">
+            <a:solidFill>
+              <a:srgbClr val="7030A0"/>
+            </a:solidFill>
+          </a:ln>
+        </p:spPr>
+        <p:style>
+          <a:lnRef idx="2">
+            <a:schemeClr val="accent1"/>
+          </a:lnRef>
+          <a:fillRef idx="0">
+            <a:schemeClr val="accent1"/>
+          </a:fillRef>
+          <a:effectRef idx="1">
+            <a:schemeClr val="accent1"/>
+          </a:effectRef>
+          <a:fontRef idx="minor">
+            <a:schemeClr val="tx1"/>
+          </a:fontRef>
+        </p:style>
+      </p:cxnSp>
+      <p:sp>
+        <p:nvSpPr>
+          <p:cNvPr id="45" name="Rounded Rectangle 44"/>
+          <p:cNvSpPr/>
+          <p:nvPr/>
+        </p:nvSpPr>
+        <p:spPr>
+          <a:xfrm>
+            <a:off x="9332683" y="5903554"/>
+            <a:ext cx="1831061" cy="552622"/>
+          </a:xfrm>
+          <a:prstGeom prst="roundRect">
+            <a:avLst>
+              <a:gd name="adj" fmla="val 50000"/>
+            </a:avLst>
+          </a:prstGeom>
+          <a:solidFill>
+            <a:srgbClr val="F3E8F7"/>
+          </a:solidFill>
+          <a:ln w="15875">
+            <a:solidFill>
+              <a:srgbClr val="7030A0"/>
+            </a:solidFill>
+          </a:ln>
+          <a:effectLst/>
+        </p:spPr>
+        <p:style>
+          <a:lnRef idx="1">
+            <a:schemeClr val="accent1"/>
+          </a:lnRef>
+          <a:fillRef idx="3">
+            <a:schemeClr val="accent1"/>
+          </a:fillRef>
+          <a:effectRef idx="2">
+            <a:schemeClr val="accent1"/>
+          </a:effectRef>
+          <a:fontRef idx="minor">
+            <a:schemeClr val="lt1"/>
+          </a:fontRef>
+        </p:style>
+        <p:txBody>
+          <a:bodyPr rtlCol="0" anchor="ctr" wrap="none" lIns="64000" rIns="64000" tIns="25400" bIns="25400"/>
+          <a:lstStyle/>
+          <a:p>
+            <a:pPr algn="ctr"/>
+            <a:r>
+              <a:rPr sz="1300" b="0">
+                <a:solidFill>
+                  <a:srgbClr val="000000"/>
+                </a:solidFill>
+                <a:latin typeface="Calibri"/>
+              </a:rPr>
+              <a:t>Củng cố trực tuyến</a:t>
+            </a:r>
+          </a:p>
+          <a:p>
+            <a:pPr algn="ctr"/>
+            <a:r>
+              <a:rPr sz="1300" b="0">
+                <a:solidFill>
+                  <a:srgbClr val="000000"/>
+                </a:solidFill>
+                <a:latin typeface="Calibri"/>
+              </a:rPr>
+              <a:t>(QR)</a:t>
+            </a:r>
+          </a:p>
+        </p:txBody>
+      </p:sp>
+      <p:sp>
+        <p:nvSpPr>
+          <p:cNvPr id="46" name="Oval 45"/>
+          <p:cNvSpPr/>
+          <p:nvPr/>
+        </p:nvSpPr>
+        <p:spPr>
+          <a:xfrm>
+            <a:off x="6740679" y="4658216"/>
+            <a:ext cx="1949933" cy="1160762"/>
+          </a:xfrm>
+          <a:prstGeom prst="ellipse">
+            <a:avLst/>
+          </a:prstGeom>
+          <a:solidFill>
+            <a:srgbClr val="FFF2CC"/>
+          </a:solidFill>
+          <a:ln w="31750">
+            <a:solidFill>
+              <a:srgbClr val="BF8F00"/>
+            </a:solidFill>
+          </a:ln>
+          <a:effectLst/>
+        </p:spPr>
+        <p:style>
+          <a:lnRef idx="1">
+            <a:schemeClr val="accent1"/>
+          </a:lnRef>
+          <a:fillRef idx="3">
+            <a:schemeClr val="accent1"/>
+          </a:fillRef>
+          <a:effectRef idx="2">
+            <a:schemeClr val="accent1"/>
+          </a:effectRef>
+          <a:fontRef idx="minor">
+            <a:schemeClr val="lt1"/>
+          </a:fontRef>
+        </p:style>
+        <p:txBody>
+          <a:bodyPr rtlCol="0" anchor="ctr" wrap="none" lIns="64000" rIns="64000" tIns="25400" bIns="25400"/>
+          <a:lstStyle/>
+          <a:p>
+            <a:pPr algn="ctr"/>
+            <a:r>
+              <a:rPr sz="1500" b="1">
+                <a:solidFill>
+                  <a:srgbClr val="000000"/>
+                </a:solidFill>
+                <a:latin typeface="Calibri"/>
+              </a:rPr>
+              <a:t>④ Tiếng Việt</a:t>
+            </a:r>
+          </a:p>
+          <a:p>
+            <a:pPr algn="ctr"/>
+            <a:r>
+              <a:rPr sz="1500" b="1">
+                <a:solidFill>
+                  <a:srgbClr val="000000"/>
+                </a:solidFill>
+                <a:latin typeface="Calibri"/>
+              </a:rPr>
+              <a:t>– Viết –</a:t>
+            </a:r>
+          </a:p>
+          <a:p>
+            <a:pPr algn="ctr"/>
+            <a:r>
+              <a:rPr sz="1500" b="1">
+                <a:solidFill>
+                  <a:srgbClr val="000000"/>
+                </a:solidFill>
+                <a:latin typeface="Calibri"/>
+              </a:rPr>
+              <a:t>Nói</a:t>
+            </a:r>
+          </a:p>
+        </p:txBody>
+      </p:sp>
+      <p:sp>
+        <p:nvSpPr>
+          <p:cNvPr id="47" name="Oval 46"/>
+          <p:cNvSpPr/>
+          <p:nvPr/>
+        </p:nvSpPr>
+        <p:spPr>
+          <a:xfrm>
+            <a:off x="5098528" y="3484793"/>
+            <a:ext cx="1857477" cy="939972"/>
+          </a:xfrm>
+          <a:prstGeom prst="ellipse">
+            <a:avLst/>
+          </a:prstGeom>
+          <a:solidFill>
+            <a:srgbClr val="002060"/>
+          </a:solidFill>
+          <a:ln w="25400">
+            <a:solidFill>
+              <a:srgbClr val="000B1E"/>
+            </a:solidFill>
+          </a:ln>
+          <a:effectLst/>
+        </p:spPr>
+        <p:style>
+          <a:lnRef idx="1">
+            <a:schemeClr val="accent1"/>
+          </a:lnRef>
+          <a:fillRef idx="3">
+            <a:schemeClr val="accent1"/>
+          </a:fillRef>
+          <a:effectRef idx="2">
+            <a:schemeClr val="accent1"/>
+          </a:effectRef>
+          <a:fontRef idx="minor">
+            <a:schemeClr val="lt1"/>
+          </a:fontRef>
+        </p:style>
+        <p:txBody>
+          <a:bodyPr rtlCol="0" anchor="ctr" wrap="none" lIns="64000" rIns="64000" tIns="25400" bIns="25400"/>
+          <a:lstStyle/>
+          <a:p>
+            <a:pPr algn="ctr"/>
+            <a:r>
+              <a:rPr sz="1700" b="1">
+                <a:solidFill>
+                  <a:srgbClr val="FFFFFF"/>
+                </a:solidFill>
+                <a:latin typeface="Calibri"/>
+              </a:rPr>
+              <a:t>VẺ ĐẸP CỦA</a:t>
+            </a:r>
+          </a:p>
+          <a:p>
+            <a:pPr algn="ctr"/>
+            <a:r>
+              <a:rPr sz="1700" b="1">
+                <a:solidFill>
+                  <a:srgbClr val="FFFFFF"/>
+                </a:solidFill>
+                <a:latin typeface="Calibri"/>
+              </a:rPr>
+              <a:t>THƠ CA</a:t>
+            </a:r>
+          </a:p>
+        </p:txBody>
+      </p:sp>
+    </p:spTree>
+  </p:cSld>
+  <p:clrMapOvr>
+    <a:masterClrMapping/>
+  </p:clrMapOvr>
+</p:sld>
+</file>
+
+<file path=ppt/slides/slide46.xml><?xml version="1.0" encoding="utf-8"?>
+<p:sld xmlns:a="http://schemas.openxmlformats.org/drawingml/2006/main" xmlns:p="http://schemas.openxmlformats.org/presentationml/2006/main" xmlns:r="http://schemas.openxmlformats.org/officeDocument/2006/relationships">
+  <p:cSld>
+    <p:bg>
+      <p:bgPr>
+        <a:solidFill>
+          <a:srgbClr val="FFFFFF"/>
+        </a:solidFill>
+        <a:effectLst/>
+      </p:bgPr>
+    </p:bg>
+    <p:spTree>
+      <p:nvGrpSpPr>
+        <p:cNvPr id="1" name=""/>
+        <p:cNvGrpSpPr/>
+        <p:nvPr/>
+      </p:nvGrpSpPr>
+      <p:grpSpPr/>
+      <p:sp>
+        <p:nvSpPr>
+          <p:cNvPr id="2" name="Rectangle 1"/>
+          <p:cNvSpPr/>
+          <p:nvPr/>
+        </p:nvSpPr>
+        <p:spPr>
+          <a:xfrm>
+            <a:off x="457200" y="384048"/>
+            <a:ext cx="109728" cy="658368"/>
+          </a:xfrm>
+          <a:prstGeom prst="rect">
+            <a:avLst/>
+          </a:prstGeom>
+          <a:solidFill>
+            <a:srgbClr val="1E40AF"/>
+          </a:solidFill>
+          <a:ln>
+            <a:noFill/>
+          </a:ln>
+          <a:effectLst/>
+        </p:spPr>
+        <p:style>
+          <a:lnRef idx="1">
+            <a:schemeClr val="accent1"/>
+          </a:lnRef>
+          <a:fillRef idx="3">
+            <a:schemeClr val="accent1"/>
+          </a:fillRef>
+          <a:effectRef idx="2">
+            <a:schemeClr val="accent1"/>
+          </a:effectRef>
+          <a:fontRef idx="minor">
+            <a:schemeClr val="lt1"/>
+          </a:fontRef>
+        </p:style>
+        <p:txBody>
+          <a:bodyPr rtlCol="0" anchor="ctr"/>
+          <a:lstStyle/>
+          <a:p>
+            <a:pPr algn="ctr"/>
+          </a:p>
+        </p:txBody>
+      </p:sp>
+      <p:sp>
+        <p:nvSpPr>
+          <p:cNvPr id="3" name="Rounded Rectangle 2"/>
+          <p:cNvSpPr/>
+          <p:nvPr/>
+        </p:nvSpPr>
+        <p:spPr>
+          <a:xfrm>
+            <a:off x="10097719" y="457200"/>
+            <a:ext cx="1545336" cy="457200"/>
+          </a:xfrm>
+          <a:prstGeom prst="roundRect">
+            <a:avLst/>
+          </a:prstGeom>
+          <a:solidFill>
+            <a:srgbClr val="991B1B"/>
+          </a:solidFill>
+          <a:ln>
+            <a:noFill/>
+          </a:ln>
+          <a:effectLst/>
+        </p:spPr>
+        <p:style>
+          <a:lnRef idx="1">
+            <a:schemeClr val="accent1"/>
+          </a:lnRef>
+          <a:fillRef idx="3">
+            <a:schemeClr val="accent1"/>
+          </a:fillRef>
+          <a:effectRef idx="2">
+            <a:schemeClr val="accent1"/>
+          </a:effectRef>
+          <a:fontRef idx="minor">
+            <a:schemeClr val="lt1"/>
+          </a:fontRef>
+        </p:style>
+        <p:txBody>
+          <a:bodyPr rtlCol="0" anchor="ctr" wrap="none" tIns="0" bIns="0"/>
+          <a:lstStyle/>
+          <a:p>
+            <a:pPr algn="ctr"/>
+            <a:r>
+              <a:rPr sz="1400" b="1">
+                <a:solidFill>
+                  <a:srgbClr val="FFFFFF"/>
+                </a:solidFill>
+                <a:latin typeface="Arial"/>
+              </a:rPr>
+              <a:t>CỦNG CỐ</a:t>
+            </a:r>
+          </a:p>
+        </p:txBody>
+      </p:sp>
+      <p:sp>
+        <p:nvSpPr>
+          <p:cNvPr id="4" name="TextBox 3"/>
+          <p:cNvSpPr txBox="1"/>
+          <p:nvPr/>
+        </p:nvSpPr>
+        <p:spPr>
+          <a:xfrm>
+            <a:off x="731520" y="274320"/>
+            <a:ext cx="9427464" cy="868680"/>
+          </a:xfrm>
+          <a:prstGeom prst="rect">
+            <a:avLst/>
+          </a:prstGeom>
+          <a:noFill/>
+        </p:spPr>
+        <p:txBody>
+          <a:bodyPr wrap="square" anchor="ctr">
+            <a:spAutoFit/>
+          </a:bodyPr>
+          <a:lstStyle/>
+          <a:p>
+            <a:r>
+              <a:rPr sz="3600" b="1">
+                <a:solidFill>
+                  <a:srgbClr val="1E40AF"/>
+                </a:solidFill>
+                <a:latin typeface="Arial"/>
+              </a:rPr>
+              <a:t>BÀI TẬP CỦA BẠN</a:t>
+            </a:r>
+          </a:p>
+        </p:txBody>
+      </p:sp>
+      <p:sp>
+        <p:nvSpPr>
+          <p:cNvPr id="5" name="Rectangle 4"/>
+          <p:cNvSpPr/>
+          <p:nvPr/>
+        </p:nvSpPr>
+        <p:spPr>
+          <a:xfrm>
+            <a:off x="457200" y="1207008"/>
+            <a:ext cx="11274552" cy="22000"/>
+          </a:xfrm>
+          <a:prstGeom prst="rect">
+            <a:avLst/>
+          </a:prstGeom>
+          <a:solidFill>
+            <a:srgbClr val="E2E8F0"/>
+          </a:solidFill>
+          <a:ln>
+            <a:noFill/>
+          </a:ln>
+          <a:effectLst/>
+        </p:spPr>
+        <p:style>
+          <a:lnRef idx="1">
+            <a:schemeClr val="accent1"/>
+          </a:lnRef>
+          <a:fillRef idx="3">
+            <a:schemeClr val="accent1"/>
+          </a:fillRef>
+          <a:effectRef idx="2">
+            <a:schemeClr val="accent1"/>
+          </a:effectRef>
+          <a:fontRef idx="minor">
+            <a:schemeClr val="lt1"/>
+          </a:fontRef>
+        </p:style>
+        <p:txBody>
+          <a:bodyPr rtlCol="0" anchor="ctr"/>
+          <a:lstStyle/>
+          <a:p>
+            <a:pPr algn="ctr"/>
+          </a:p>
+        </p:txBody>
+      </p:sp>
+      <p:sp>
+        <p:nvSpPr>
+          <p:cNvPr id="6" name="TextBox 5"/>
+          <p:cNvSpPr txBox="1"/>
+          <p:nvPr/>
+        </p:nvSpPr>
+        <p:spPr>
+          <a:xfrm>
+            <a:off x="457200" y="6355080"/>
+            <a:ext cx="11274552" cy="365760"/>
+          </a:xfrm>
+          <a:prstGeom prst="rect">
+            <a:avLst/>
+          </a:prstGeom>
+          <a:noFill/>
+        </p:spPr>
+        <p:txBody>
+          <a:bodyPr wrap="none">
+            <a:spAutoFit/>
+          </a:bodyPr>
+          <a:lstStyle/>
+          <a:p>
+            <a:pPr algn="r"/>
+            <a:r>
+              <a:rPr sz="1200">
+                <a:solidFill>
+                  <a:srgbClr val="64748B"/>
+                </a:solidFill>
+                <a:latin typeface="Calibri"/>
+              </a:rPr>
+              <a:t>Ngữ văn 10 · Bài 2: Vẻ Đẹp Của Thơ Ca          46</a:t>
             </a:r>
           </a:p>
         </p:txBody>
